--- a/out/WineBank_FY2027_銀行提出.pptx
+++ b/out/WineBank_FY2027_銀行提出.pptx
@@ -18,9 +18,11 @@
     <p:sldId id="266" r:id="rId12"/>
     <p:sldId id="267" r:id="rId13"/>
     <p:sldId id="268" r:id="rId14"/>
+    <p:sldId id="269" r:id="rId15"/>
+    <p:sldId id="270" r:id="rId16"/>
   </p:sldIdLst>
   <p:notesMasterIdLst>
-    <p:notesMasterId r:id="rId15"/>
+    <p:notesMasterId r:id="rId17"/>
   </p:notesMasterIdLst>
   <p:sldSz cx="12192000" cy="6858000"/>
   <p:notesSz cx="6858000" cy="12192000"/>
@@ -1157,7 +1159,7 @@
           <a:p>
             <a:r>
               <a:rPr lang="en-US" dirty="0"/>
-              <a:t>銀行に指摘される前に自分から出す。これが信頼確保の基本方針。</a:t>
+              <a:t>在庫販売200百万円をみずほ返済に充てることで、長期借入の約定返済が月5.04百万円から2.66百万円へ軽くなる。これが資金繰りを支えている。</a:t>
             </a:r>
             <a:endParaRPr lang="en-US" dirty="0"/>
           </a:p>
@@ -1245,7 +1247,7 @@
           <a:p>
             <a:r>
               <a:rPr lang="en-US" dirty="0"/>
-              <a:t>次回提出資料を明示することで、継続的な報告姿勢を示す。</a:t>
+              <a:t>最も重要なのはケースC。在庫を積み増す方針を続けるなら3.5億円の調達が必要になる。在庫方針そのものが資金計画の変数であることを銀行に示す。</a:t>
             </a:r>
             <a:endParaRPr lang="en-US" dirty="0"/>
           </a:p>
@@ -1269,6 +1271,182 @@
             <a:fld id="{F7021451-1387-4CA6-816F-3879F97B5CBC}" type="slidenum">
               <a:rPr lang="en-US"/>
               <a:t>13</a:t>
+            </a:fld>
+            <a:endParaRPr lang="en-US"/>
+          </a:p>
+        </p:txBody>
+      </p:sp>
+    </p:spTree>
+    <p:extLst>
+      <p:ext uri="{BB962C8B-B14F-4D97-AF65-F5344CB8AC3E}">
+        <p14:creationId xmlns:p14="http://schemas.microsoft.com/office/powerpoint/2010/main" val="1024086991"/>
+      </p:ext>
+    </p:extLst>
+  </p:cSld>
+  <p:clrMapOvr>
+    <a:masterClrMapping/>
+  </p:clrMapOvr>
+</p:notes>
+</file>
+
+<file path=ppt/notesSlides/notesSlide14.xml><?xml version="1.0" encoding="utf-8"?>
+<p:notes xmlns:a="http://schemas.openxmlformats.org/drawingml/2006/main" xmlns:r="http://schemas.openxmlformats.org/officeDocument/2006/relationships" xmlns:p="http://schemas.openxmlformats.org/presentationml/2006/main">
+  <p:cSld>
+    <p:spTree>
+      <p:nvGrpSpPr>
+        <p:cNvPr id="1" name=""/>
+        <p:cNvGrpSpPr/>
+        <p:nvPr/>
+      </p:nvGrpSpPr>
+      <p:grpSpPr>
+        <a:xfrm>
+          <a:off x="0" y="0"/>
+          <a:ext cx="0" cy="0"/>
+          <a:chOff x="0" y="0"/>
+          <a:chExt cx="0" cy="0"/>
+        </a:xfrm>
+      </p:grpSpPr>
+      <p:sp>
+        <p:nvSpPr>
+          <p:cNvPr id="2" name="Slide Image Placeholder 1"/>
+          <p:cNvSpPr>
+            <a:spLocks noGrp="1" noRot="1" noChangeAspect="1"/>
+          </p:cNvSpPr>
+          <p:nvPr>
+            <p:ph type="sldImg"/>
+          </p:nvPr>
+        </p:nvSpPr>
+        <p:spPr/>
+      </p:sp>
+      <p:sp>
+        <p:nvSpPr>
+          <p:cNvPr id="3" name="Notes Placeholder 2"/>
+          <p:cNvSpPr>
+            <a:spLocks noGrp="1"/>
+          </p:cNvSpPr>
+          <p:nvPr>
+            <p:ph type="body" idx="1"/>
+          </p:nvPr>
+        </p:nvSpPr>
+        <p:spPr/>
+        <p:txBody>
+          <a:bodyPr/>
+          <a:lstStyle/>
+          <a:p>
+            <a:r>
+              <a:rPr lang="en-US" dirty="0"/>
+              <a:t>銀行に指摘される前に自分から出す。これが信頼確保の基本方針。</a:t>
+            </a:r>
+            <a:endParaRPr lang="en-US" dirty="0"/>
+          </a:p>
+        </p:txBody>
+      </p:sp>
+      <p:sp>
+        <p:nvSpPr>
+          <p:cNvPr id="4" name="Slide Number Placeholder 3"/>
+          <p:cNvSpPr>
+            <a:spLocks noGrp="1"/>
+          </p:cNvSpPr>
+          <p:nvPr>
+            <p:ph type="sldNum" sz="quarter" idx="10"/>
+          </p:nvPr>
+        </p:nvSpPr>
+        <p:spPr/>
+        <p:txBody>
+          <a:bodyPr/>
+          <a:lstStyle/>
+          <a:p>
+            <a:fld id="{F7021451-1387-4CA6-816F-3879F97B5CBC}" type="slidenum">
+              <a:rPr lang="en-US"/>
+              <a:t>14</a:t>
+            </a:fld>
+            <a:endParaRPr lang="en-US"/>
+          </a:p>
+        </p:txBody>
+      </p:sp>
+    </p:spTree>
+    <p:extLst>
+      <p:ext uri="{BB962C8B-B14F-4D97-AF65-F5344CB8AC3E}">
+        <p14:creationId xmlns:p14="http://schemas.microsoft.com/office/powerpoint/2010/main" val="1024086991"/>
+      </p:ext>
+    </p:extLst>
+  </p:cSld>
+  <p:clrMapOvr>
+    <a:masterClrMapping/>
+  </p:clrMapOvr>
+</p:notes>
+</file>
+
+<file path=ppt/notesSlides/notesSlide15.xml><?xml version="1.0" encoding="utf-8"?>
+<p:notes xmlns:a="http://schemas.openxmlformats.org/drawingml/2006/main" xmlns:r="http://schemas.openxmlformats.org/officeDocument/2006/relationships" xmlns:p="http://schemas.openxmlformats.org/presentationml/2006/main">
+  <p:cSld>
+    <p:spTree>
+      <p:nvGrpSpPr>
+        <p:cNvPr id="1" name=""/>
+        <p:cNvGrpSpPr/>
+        <p:nvPr/>
+      </p:nvGrpSpPr>
+      <p:grpSpPr>
+        <a:xfrm>
+          <a:off x="0" y="0"/>
+          <a:ext cx="0" cy="0"/>
+          <a:chOff x="0" y="0"/>
+          <a:chExt cx="0" cy="0"/>
+        </a:xfrm>
+      </p:grpSpPr>
+      <p:sp>
+        <p:nvSpPr>
+          <p:cNvPr id="2" name="Slide Image Placeholder 1"/>
+          <p:cNvSpPr>
+            <a:spLocks noGrp="1" noRot="1" noChangeAspect="1"/>
+          </p:cNvSpPr>
+          <p:nvPr>
+            <p:ph type="sldImg"/>
+          </p:nvPr>
+        </p:nvSpPr>
+        <p:spPr/>
+      </p:sp>
+      <p:sp>
+        <p:nvSpPr>
+          <p:cNvPr id="3" name="Notes Placeholder 2"/>
+          <p:cNvSpPr>
+            <a:spLocks noGrp="1"/>
+          </p:cNvSpPr>
+          <p:nvPr>
+            <p:ph type="body" idx="1"/>
+          </p:nvPr>
+        </p:nvSpPr>
+        <p:spPr/>
+        <p:txBody>
+          <a:bodyPr/>
+          <a:lstStyle/>
+          <a:p>
+            <a:r>
+              <a:rPr lang="en-US" dirty="0"/>
+              <a:t>次回提出資料を明示することで、継続的な報告姿勢を示す。</a:t>
+            </a:r>
+            <a:endParaRPr lang="en-US" dirty="0"/>
+          </a:p>
+        </p:txBody>
+      </p:sp>
+      <p:sp>
+        <p:nvSpPr>
+          <p:cNvPr id="4" name="Slide Number Placeholder 3"/>
+          <p:cNvSpPr>
+            <a:spLocks noGrp="1"/>
+          </p:cNvSpPr>
+          <p:nvPr>
+            <p:ph type="sldNum" sz="quarter" idx="10"/>
+          </p:nvPr>
+        </p:nvSpPr>
+        <p:spPr/>
+        <p:txBody>
+          <a:bodyPr/>
+          <a:lstStyle/>
+          <a:p>
+            <a:fld id="{F7021451-1387-4CA6-816F-3879F97B5CBC}" type="slidenum">
+              <a:rPr lang="en-US"/>
+              <a:t>15</a:t>
             </a:fld>
             <a:endParaRPr lang="en-US"/>
           </a:p>
@@ -4717,7 +4895,7 @@
                 <a:ea typeface="Cambria" pitchFamily="34" charset="-122"/>
                 <a:cs typeface="Cambria" pitchFamily="34" charset="-120"/>
               </a:rPr>
-              <a:t>想定されるご指摘と当社の対応</a:t>
+              <a:t>FY2027 月次資金繰り</a:t>
             </a:r>
             <a:endParaRPr lang="en-US" sz="3000" dirty="0"/>
           </a:p>
@@ -4756,7 +4934,7 @@
                 <a:ea typeface="Arial" pitchFamily="34" charset="-122"/>
                 <a:cs typeface="Arial" pitchFamily="34" charset="-120"/>
               </a:rPr>
-              <a:t>先に論点を開示し、対応方針をあわせてご説明します。</a:t>
+              <a:t>2026年9月の在庫販売200百万円とみずほ銀行への返済200百万円を反映。単位：百万円（税込）</a:t>
             </a:r>
             <a:endParaRPr lang="en-US" sz="1250" dirty="0"/>
           </a:p>
@@ -4770,12 +4948,3731 @@
         </p:nvSpPr>
         <p:spPr>
           <a:xfrm>
-            <a:off x="594360" y="1481328"/>
-            <a:ext cx="5486400" cy="2029968"/>
+            <a:off x="594360" y="1517904"/>
+            <a:ext cx="11631168" cy="402336"/>
+          </a:xfrm>
+          <a:prstGeom prst="rect">
+            <a:avLst/>
+          </a:prstGeom>
+          <a:solidFill>
+            <a:srgbClr val="6D2E46"/>
+          </a:solidFill>
+          <a:ln/>
+        </p:spPr>
+      </p:sp>
+      <p:sp>
+        <p:nvSpPr>
+          <p:cNvPr id="5" name="Text 3"/>
+          <p:cNvSpPr/>
+          <p:nvPr/>
+        </p:nvSpPr>
+        <p:spPr>
+          <a:xfrm>
+            <a:off x="731520" y="1517904"/>
+            <a:ext cx="2194560" cy="402336"/>
+          </a:xfrm>
+          <a:prstGeom prst="rect">
+            <a:avLst/>
+          </a:prstGeom>
+          <a:noFill/>
+          <a:ln/>
+        </p:spPr>
+        <p:txBody>
+          <a:bodyPr wrap="square" lIns="0" tIns="0" rIns="0" bIns="0" rtlCol="0" anchor="ctr"/>
+          <a:lstStyle/>
+          <a:p>
+            <a:pPr indent="0" marL="0">
+              <a:buNone/>
+            </a:pPr>
+            <a:r>
+              <a:rPr lang="en-US" sz="950" b="1" dirty="0">
+                <a:solidFill>
+                  <a:srgbClr val="FFFFFF"/>
+                </a:solidFill>
+                <a:latin typeface="Arial" pitchFamily="34" charset="0"/>
+                <a:ea typeface="Arial" pitchFamily="34" charset="-122"/>
+                <a:cs typeface="Arial" pitchFamily="34" charset="-120"/>
+              </a:rPr>
+              <a:t>科目</a:t>
+            </a:r>
+            <a:endParaRPr lang="en-US" sz="950" dirty="0"/>
+          </a:p>
+        </p:txBody>
+      </p:sp>
+      <p:sp>
+        <p:nvSpPr>
+          <p:cNvPr id="6" name="Text 4"/>
+          <p:cNvSpPr/>
+          <p:nvPr/>
+        </p:nvSpPr>
+        <p:spPr>
+          <a:xfrm>
+            <a:off x="2788920" y="1517904"/>
+            <a:ext cx="786384" cy="402336"/>
+          </a:xfrm>
+          <a:prstGeom prst="rect">
+            <a:avLst/>
+          </a:prstGeom>
+          <a:noFill/>
+          <a:ln/>
+        </p:spPr>
+        <p:txBody>
+          <a:bodyPr wrap="square" lIns="0" tIns="0" rIns="0" bIns="0" rtlCol="0" anchor="ctr"/>
+          <a:lstStyle/>
+          <a:p>
+            <a:pPr algn="ctr" indent="0" marL="0">
+              <a:buNone/>
+            </a:pPr>
+            <a:r>
+              <a:rPr lang="en-US" sz="850" dirty="0">
+                <a:solidFill>
+                  <a:srgbClr val="FFFFFF"/>
+                </a:solidFill>
+                <a:latin typeface="Arial" pitchFamily="34" charset="0"/>
+                <a:ea typeface="Arial" pitchFamily="34" charset="-122"/>
+                <a:cs typeface="Arial" pitchFamily="34" charset="-120"/>
+              </a:rPr>
+              <a:t>26/10</a:t>
+            </a:r>
+            <a:endParaRPr lang="en-US" sz="850" dirty="0"/>
+          </a:p>
+        </p:txBody>
+      </p:sp>
+      <p:sp>
+        <p:nvSpPr>
+          <p:cNvPr id="7" name="Text 5"/>
+          <p:cNvSpPr/>
+          <p:nvPr/>
+        </p:nvSpPr>
+        <p:spPr>
+          <a:xfrm>
+            <a:off x="3575304" y="1517904"/>
+            <a:ext cx="786384" cy="402336"/>
+          </a:xfrm>
+          <a:prstGeom prst="rect">
+            <a:avLst/>
+          </a:prstGeom>
+          <a:noFill/>
+          <a:ln/>
+        </p:spPr>
+        <p:txBody>
+          <a:bodyPr wrap="square" lIns="0" tIns="0" rIns="0" bIns="0" rtlCol="0" anchor="ctr"/>
+          <a:lstStyle/>
+          <a:p>
+            <a:pPr algn="ctr" indent="0" marL="0">
+              <a:buNone/>
+            </a:pPr>
+            <a:r>
+              <a:rPr lang="en-US" sz="850" dirty="0">
+                <a:solidFill>
+                  <a:srgbClr val="FFFFFF"/>
+                </a:solidFill>
+                <a:latin typeface="Arial" pitchFamily="34" charset="0"/>
+                <a:ea typeface="Arial" pitchFamily="34" charset="-122"/>
+                <a:cs typeface="Arial" pitchFamily="34" charset="-120"/>
+              </a:rPr>
+              <a:t>26/11</a:t>
+            </a:r>
+            <a:endParaRPr lang="en-US" sz="850" dirty="0"/>
+          </a:p>
+        </p:txBody>
+      </p:sp>
+      <p:sp>
+        <p:nvSpPr>
+          <p:cNvPr id="8" name="Text 6"/>
+          <p:cNvSpPr/>
+          <p:nvPr/>
+        </p:nvSpPr>
+        <p:spPr>
+          <a:xfrm>
+            <a:off x="4361688" y="1517904"/>
+            <a:ext cx="786384" cy="402336"/>
+          </a:xfrm>
+          <a:prstGeom prst="rect">
+            <a:avLst/>
+          </a:prstGeom>
+          <a:noFill/>
+          <a:ln/>
+        </p:spPr>
+        <p:txBody>
+          <a:bodyPr wrap="square" lIns="0" tIns="0" rIns="0" bIns="0" rtlCol="0" anchor="ctr"/>
+          <a:lstStyle/>
+          <a:p>
+            <a:pPr algn="ctr" indent="0" marL="0">
+              <a:buNone/>
+            </a:pPr>
+            <a:r>
+              <a:rPr lang="en-US" sz="850" dirty="0">
+                <a:solidFill>
+                  <a:srgbClr val="FFFFFF"/>
+                </a:solidFill>
+                <a:latin typeface="Arial" pitchFamily="34" charset="0"/>
+                <a:ea typeface="Arial" pitchFamily="34" charset="-122"/>
+                <a:cs typeface="Arial" pitchFamily="34" charset="-120"/>
+              </a:rPr>
+              <a:t>26/12</a:t>
+            </a:r>
+            <a:endParaRPr lang="en-US" sz="850" dirty="0"/>
+          </a:p>
+        </p:txBody>
+      </p:sp>
+      <p:sp>
+        <p:nvSpPr>
+          <p:cNvPr id="9" name="Text 7"/>
+          <p:cNvSpPr/>
+          <p:nvPr/>
+        </p:nvSpPr>
+        <p:spPr>
+          <a:xfrm>
+            <a:off x="5148072" y="1517904"/>
+            <a:ext cx="786384" cy="402336"/>
+          </a:xfrm>
+          <a:prstGeom prst="rect">
+            <a:avLst/>
+          </a:prstGeom>
+          <a:noFill/>
+          <a:ln/>
+        </p:spPr>
+        <p:txBody>
+          <a:bodyPr wrap="square" lIns="0" tIns="0" rIns="0" bIns="0" rtlCol="0" anchor="ctr"/>
+          <a:lstStyle/>
+          <a:p>
+            <a:pPr algn="ctr" indent="0" marL="0">
+              <a:buNone/>
+            </a:pPr>
+            <a:r>
+              <a:rPr lang="en-US" sz="850" dirty="0">
+                <a:solidFill>
+                  <a:srgbClr val="FFFFFF"/>
+                </a:solidFill>
+                <a:latin typeface="Arial" pitchFamily="34" charset="0"/>
+                <a:ea typeface="Arial" pitchFamily="34" charset="-122"/>
+                <a:cs typeface="Arial" pitchFamily="34" charset="-120"/>
+              </a:rPr>
+              <a:t>27/01</a:t>
+            </a:r>
+            <a:endParaRPr lang="en-US" sz="850" dirty="0"/>
+          </a:p>
+        </p:txBody>
+      </p:sp>
+      <p:sp>
+        <p:nvSpPr>
+          <p:cNvPr id="10" name="Text 8"/>
+          <p:cNvSpPr/>
+          <p:nvPr/>
+        </p:nvSpPr>
+        <p:spPr>
+          <a:xfrm>
+            <a:off x="5934456" y="1517904"/>
+            <a:ext cx="786384" cy="402336"/>
+          </a:xfrm>
+          <a:prstGeom prst="rect">
+            <a:avLst/>
+          </a:prstGeom>
+          <a:noFill/>
+          <a:ln/>
+        </p:spPr>
+        <p:txBody>
+          <a:bodyPr wrap="square" lIns="0" tIns="0" rIns="0" bIns="0" rtlCol="0" anchor="ctr"/>
+          <a:lstStyle/>
+          <a:p>
+            <a:pPr algn="ctr" indent="0" marL="0">
+              <a:buNone/>
+            </a:pPr>
+            <a:r>
+              <a:rPr lang="en-US" sz="850" dirty="0">
+                <a:solidFill>
+                  <a:srgbClr val="FFFFFF"/>
+                </a:solidFill>
+                <a:latin typeface="Arial" pitchFamily="34" charset="0"/>
+                <a:ea typeface="Arial" pitchFamily="34" charset="-122"/>
+                <a:cs typeface="Arial" pitchFamily="34" charset="-120"/>
+              </a:rPr>
+              <a:t>27/02</a:t>
+            </a:r>
+            <a:endParaRPr lang="en-US" sz="850" dirty="0"/>
+          </a:p>
+        </p:txBody>
+      </p:sp>
+      <p:sp>
+        <p:nvSpPr>
+          <p:cNvPr id="11" name="Text 9"/>
+          <p:cNvSpPr/>
+          <p:nvPr/>
+        </p:nvSpPr>
+        <p:spPr>
+          <a:xfrm>
+            <a:off x="6720840" y="1517904"/>
+            <a:ext cx="786384" cy="402336"/>
+          </a:xfrm>
+          <a:prstGeom prst="rect">
+            <a:avLst/>
+          </a:prstGeom>
+          <a:noFill/>
+          <a:ln/>
+        </p:spPr>
+        <p:txBody>
+          <a:bodyPr wrap="square" lIns="0" tIns="0" rIns="0" bIns="0" rtlCol="0" anchor="ctr"/>
+          <a:lstStyle/>
+          <a:p>
+            <a:pPr algn="ctr" indent="0" marL="0">
+              <a:buNone/>
+            </a:pPr>
+            <a:r>
+              <a:rPr lang="en-US" sz="850" dirty="0">
+                <a:solidFill>
+                  <a:srgbClr val="FFFFFF"/>
+                </a:solidFill>
+                <a:latin typeface="Arial" pitchFamily="34" charset="0"/>
+                <a:ea typeface="Arial" pitchFamily="34" charset="-122"/>
+                <a:cs typeface="Arial" pitchFamily="34" charset="-120"/>
+              </a:rPr>
+              <a:t>27/03</a:t>
+            </a:r>
+            <a:endParaRPr lang="en-US" sz="850" dirty="0"/>
+          </a:p>
+        </p:txBody>
+      </p:sp>
+      <p:sp>
+        <p:nvSpPr>
+          <p:cNvPr id="12" name="Text 10"/>
+          <p:cNvSpPr/>
+          <p:nvPr/>
+        </p:nvSpPr>
+        <p:spPr>
+          <a:xfrm>
+            <a:off x="7507224" y="1517904"/>
+            <a:ext cx="786384" cy="402336"/>
+          </a:xfrm>
+          <a:prstGeom prst="rect">
+            <a:avLst/>
+          </a:prstGeom>
+          <a:noFill/>
+          <a:ln/>
+        </p:spPr>
+        <p:txBody>
+          <a:bodyPr wrap="square" lIns="0" tIns="0" rIns="0" bIns="0" rtlCol="0" anchor="ctr"/>
+          <a:lstStyle/>
+          <a:p>
+            <a:pPr algn="ctr" indent="0" marL="0">
+              <a:buNone/>
+            </a:pPr>
+            <a:r>
+              <a:rPr lang="en-US" sz="850" dirty="0">
+                <a:solidFill>
+                  <a:srgbClr val="FFFFFF"/>
+                </a:solidFill>
+                <a:latin typeface="Arial" pitchFamily="34" charset="0"/>
+                <a:ea typeface="Arial" pitchFamily="34" charset="-122"/>
+                <a:cs typeface="Arial" pitchFamily="34" charset="-120"/>
+              </a:rPr>
+              <a:t>27/04</a:t>
+            </a:r>
+            <a:endParaRPr lang="en-US" sz="850" dirty="0"/>
+          </a:p>
+        </p:txBody>
+      </p:sp>
+      <p:sp>
+        <p:nvSpPr>
+          <p:cNvPr id="13" name="Text 11"/>
+          <p:cNvSpPr/>
+          <p:nvPr/>
+        </p:nvSpPr>
+        <p:spPr>
+          <a:xfrm>
+            <a:off x="8293608" y="1517904"/>
+            <a:ext cx="786384" cy="402336"/>
+          </a:xfrm>
+          <a:prstGeom prst="rect">
+            <a:avLst/>
+          </a:prstGeom>
+          <a:noFill/>
+          <a:ln/>
+        </p:spPr>
+        <p:txBody>
+          <a:bodyPr wrap="square" lIns="0" tIns="0" rIns="0" bIns="0" rtlCol="0" anchor="ctr"/>
+          <a:lstStyle/>
+          <a:p>
+            <a:pPr algn="ctr" indent="0" marL="0">
+              <a:buNone/>
+            </a:pPr>
+            <a:r>
+              <a:rPr lang="en-US" sz="850" dirty="0">
+                <a:solidFill>
+                  <a:srgbClr val="FFFFFF"/>
+                </a:solidFill>
+                <a:latin typeface="Arial" pitchFamily="34" charset="0"/>
+                <a:ea typeface="Arial" pitchFamily="34" charset="-122"/>
+                <a:cs typeface="Arial" pitchFamily="34" charset="-120"/>
+              </a:rPr>
+              <a:t>27/05</a:t>
+            </a:r>
+            <a:endParaRPr lang="en-US" sz="850" dirty="0"/>
+          </a:p>
+        </p:txBody>
+      </p:sp>
+      <p:sp>
+        <p:nvSpPr>
+          <p:cNvPr id="14" name="Text 12"/>
+          <p:cNvSpPr/>
+          <p:nvPr/>
+        </p:nvSpPr>
+        <p:spPr>
+          <a:xfrm>
+            <a:off x="9079992" y="1517904"/>
+            <a:ext cx="786384" cy="402336"/>
+          </a:xfrm>
+          <a:prstGeom prst="rect">
+            <a:avLst/>
+          </a:prstGeom>
+          <a:noFill/>
+          <a:ln/>
+        </p:spPr>
+        <p:txBody>
+          <a:bodyPr wrap="square" lIns="0" tIns="0" rIns="0" bIns="0" rtlCol="0" anchor="ctr"/>
+          <a:lstStyle/>
+          <a:p>
+            <a:pPr algn="ctr" indent="0" marL="0">
+              <a:buNone/>
+            </a:pPr>
+            <a:r>
+              <a:rPr lang="en-US" sz="850" dirty="0">
+                <a:solidFill>
+                  <a:srgbClr val="FFFFFF"/>
+                </a:solidFill>
+                <a:latin typeface="Arial" pitchFamily="34" charset="0"/>
+                <a:ea typeface="Arial" pitchFamily="34" charset="-122"/>
+                <a:cs typeface="Arial" pitchFamily="34" charset="-120"/>
+              </a:rPr>
+              <a:t>27/06</a:t>
+            </a:r>
+            <a:endParaRPr lang="en-US" sz="850" dirty="0"/>
+          </a:p>
+        </p:txBody>
+      </p:sp>
+      <p:sp>
+        <p:nvSpPr>
+          <p:cNvPr id="15" name="Text 13"/>
+          <p:cNvSpPr/>
+          <p:nvPr/>
+        </p:nvSpPr>
+        <p:spPr>
+          <a:xfrm>
+            <a:off x="9866376" y="1517904"/>
+            <a:ext cx="786384" cy="402336"/>
+          </a:xfrm>
+          <a:prstGeom prst="rect">
+            <a:avLst/>
+          </a:prstGeom>
+          <a:noFill/>
+          <a:ln/>
+        </p:spPr>
+        <p:txBody>
+          <a:bodyPr wrap="square" lIns="0" tIns="0" rIns="0" bIns="0" rtlCol="0" anchor="ctr"/>
+          <a:lstStyle/>
+          <a:p>
+            <a:pPr algn="ctr" indent="0" marL="0">
+              <a:buNone/>
+            </a:pPr>
+            <a:r>
+              <a:rPr lang="en-US" sz="850" dirty="0">
+                <a:solidFill>
+                  <a:srgbClr val="FFFFFF"/>
+                </a:solidFill>
+                <a:latin typeface="Arial" pitchFamily="34" charset="0"/>
+                <a:ea typeface="Arial" pitchFamily="34" charset="-122"/>
+                <a:cs typeface="Arial" pitchFamily="34" charset="-120"/>
+              </a:rPr>
+              <a:t>27/07</a:t>
+            </a:r>
+            <a:endParaRPr lang="en-US" sz="850" dirty="0"/>
+          </a:p>
+        </p:txBody>
+      </p:sp>
+      <p:sp>
+        <p:nvSpPr>
+          <p:cNvPr id="16" name="Text 14"/>
+          <p:cNvSpPr/>
+          <p:nvPr/>
+        </p:nvSpPr>
+        <p:spPr>
+          <a:xfrm>
+            <a:off x="10652760" y="1517904"/>
+            <a:ext cx="786384" cy="402336"/>
+          </a:xfrm>
+          <a:prstGeom prst="rect">
+            <a:avLst/>
+          </a:prstGeom>
+          <a:noFill/>
+          <a:ln/>
+        </p:spPr>
+        <p:txBody>
+          <a:bodyPr wrap="square" lIns="0" tIns="0" rIns="0" bIns="0" rtlCol="0" anchor="ctr"/>
+          <a:lstStyle/>
+          <a:p>
+            <a:pPr algn="ctr" indent="0" marL="0">
+              <a:buNone/>
+            </a:pPr>
+            <a:r>
+              <a:rPr lang="en-US" sz="850" dirty="0">
+                <a:solidFill>
+                  <a:srgbClr val="FFFFFF"/>
+                </a:solidFill>
+                <a:latin typeface="Arial" pitchFamily="34" charset="0"/>
+                <a:ea typeface="Arial" pitchFamily="34" charset="-122"/>
+                <a:cs typeface="Arial" pitchFamily="34" charset="-120"/>
+              </a:rPr>
+              <a:t>27/08</a:t>
+            </a:r>
+            <a:endParaRPr lang="en-US" sz="850" dirty="0"/>
+          </a:p>
+        </p:txBody>
+      </p:sp>
+      <p:sp>
+        <p:nvSpPr>
+          <p:cNvPr id="17" name="Text 15"/>
+          <p:cNvSpPr/>
+          <p:nvPr/>
+        </p:nvSpPr>
+        <p:spPr>
+          <a:xfrm>
+            <a:off x="11439144" y="1517904"/>
+            <a:ext cx="786384" cy="402336"/>
+          </a:xfrm>
+          <a:prstGeom prst="rect">
+            <a:avLst/>
+          </a:prstGeom>
+          <a:noFill/>
+          <a:ln/>
+        </p:spPr>
+        <p:txBody>
+          <a:bodyPr wrap="square" lIns="0" tIns="0" rIns="0" bIns="0" rtlCol="0" anchor="ctr"/>
+          <a:lstStyle/>
+          <a:p>
+            <a:pPr algn="ctr" indent="0" marL="0">
+              <a:buNone/>
+            </a:pPr>
+            <a:r>
+              <a:rPr lang="en-US" sz="850" dirty="0">
+                <a:solidFill>
+                  <a:srgbClr val="FFFFFF"/>
+                </a:solidFill>
+                <a:latin typeface="Arial" pitchFamily="34" charset="0"/>
+                <a:ea typeface="Arial" pitchFamily="34" charset="-122"/>
+                <a:cs typeface="Arial" pitchFamily="34" charset="-120"/>
+              </a:rPr>
+              <a:t>27/09</a:t>
+            </a:r>
+            <a:endParaRPr lang="en-US" sz="850" dirty="0"/>
+          </a:p>
+        </p:txBody>
+      </p:sp>
+      <p:sp>
+        <p:nvSpPr>
+          <p:cNvPr id="18" name="Shape 16"/>
+          <p:cNvSpPr/>
+          <p:nvPr/>
+        </p:nvSpPr>
+        <p:spPr>
+          <a:xfrm>
+            <a:off x="594360" y="1920240"/>
+            <a:ext cx="11631168" cy="438912"/>
+          </a:xfrm>
+          <a:prstGeom prst="rect">
+            <a:avLst/>
+          </a:prstGeom>
+          <a:solidFill>
+            <a:srgbClr val="FFFFFF"/>
+          </a:solidFill>
+          <a:ln w="6350">
+            <a:solidFill>
+              <a:srgbClr val="DED5CE"/>
+            </a:solidFill>
+            <a:prstDash val="solid"/>
+          </a:ln>
+        </p:spPr>
+      </p:sp>
+      <p:sp>
+        <p:nvSpPr>
+          <p:cNvPr id="19" name="Text 17"/>
+          <p:cNvSpPr/>
+          <p:nvPr/>
+        </p:nvSpPr>
+        <p:spPr>
+          <a:xfrm>
+            <a:off x="731520" y="1920240"/>
+            <a:ext cx="2194560" cy="438912"/>
+          </a:xfrm>
+          <a:prstGeom prst="rect">
+            <a:avLst/>
+          </a:prstGeom>
+          <a:noFill/>
+          <a:ln/>
+        </p:spPr>
+        <p:txBody>
+          <a:bodyPr wrap="square" lIns="0" tIns="0" rIns="0" bIns="0" rtlCol="0" anchor="ctr"/>
+          <a:lstStyle/>
+          <a:p>
+            <a:pPr indent="0" marL="0">
+              <a:buNone/>
+            </a:pPr>
+            <a:r>
+              <a:rPr lang="en-US" sz="950" dirty="0">
+                <a:solidFill>
+                  <a:srgbClr val="2B2B2B"/>
+                </a:solidFill>
+                <a:latin typeface="Arial" pitchFamily="34" charset="0"/>
+                <a:ea typeface="Arial" pitchFamily="34" charset="-122"/>
+                <a:cs typeface="Arial" pitchFamily="34" charset="-120"/>
+              </a:rPr>
+              <a:t>営業収入 計</a:t>
+            </a:r>
+            <a:endParaRPr lang="en-US" sz="950" dirty="0"/>
+          </a:p>
+        </p:txBody>
+      </p:sp>
+      <p:sp>
+        <p:nvSpPr>
+          <p:cNvPr id="20" name="Text 18"/>
+          <p:cNvSpPr/>
+          <p:nvPr/>
+        </p:nvSpPr>
+        <p:spPr>
+          <a:xfrm>
+            <a:off x="2788920" y="1920240"/>
+            <a:ext cx="786384" cy="438912"/>
+          </a:xfrm>
+          <a:prstGeom prst="rect">
+            <a:avLst/>
+          </a:prstGeom>
+          <a:noFill/>
+          <a:ln/>
+        </p:spPr>
+        <p:txBody>
+          <a:bodyPr wrap="square" lIns="0" tIns="0" rIns="0" bIns="0" rtlCol="0" anchor="ctr"/>
+          <a:lstStyle/>
+          <a:p>
+            <a:pPr algn="ctr" indent="0" marL="0">
+              <a:buNone/>
+            </a:pPr>
+            <a:r>
+              <a:rPr lang="en-US" sz="900" dirty="0">
+                <a:solidFill>
+                  <a:srgbClr val="2B2B2B"/>
+                </a:solidFill>
+                <a:latin typeface="Arial" pitchFamily="34" charset="0"/>
+                <a:ea typeface="Arial" pitchFamily="34" charset="-122"/>
+                <a:cs typeface="Arial" pitchFamily="34" charset="-120"/>
+              </a:rPr>
+              <a:t>264.2</a:t>
+            </a:r>
+            <a:endParaRPr lang="en-US" sz="900" dirty="0"/>
+          </a:p>
+        </p:txBody>
+      </p:sp>
+      <p:sp>
+        <p:nvSpPr>
+          <p:cNvPr id="21" name="Text 19"/>
+          <p:cNvSpPr/>
+          <p:nvPr/>
+        </p:nvSpPr>
+        <p:spPr>
+          <a:xfrm>
+            <a:off x="3575304" y="1920240"/>
+            <a:ext cx="786384" cy="438912"/>
+          </a:xfrm>
+          <a:prstGeom prst="rect">
+            <a:avLst/>
+          </a:prstGeom>
+          <a:noFill/>
+          <a:ln/>
+        </p:spPr>
+        <p:txBody>
+          <a:bodyPr wrap="square" lIns="0" tIns="0" rIns="0" bIns="0" rtlCol="0" anchor="ctr"/>
+          <a:lstStyle/>
+          <a:p>
+            <a:pPr algn="ctr" indent="0" marL="0">
+              <a:buNone/>
+            </a:pPr>
+            <a:r>
+              <a:rPr lang="en-US" sz="900" dirty="0">
+                <a:solidFill>
+                  <a:srgbClr val="2B2B2B"/>
+                </a:solidFill>
+                <a:latin typeface="Arial" pitchFamily="34" charset="0"/>
+                <a:ea typeface="Arial" pitchFamily="34" charset="-122"/>
+                <a:cs typeface="Arial" pitchFamily="34" charset="-120"/>
+              </a:rPr>
+              <a:t>44.2</a:t>
+            </a:r>
+            <a:endParaRPr lang="en-US" sz="900" dirty="0"/>
+          </a:p>
+        </p:txBody>
+      </p:sp>
+      <p:sp>
+        <p:nvSpPr>
+          <p:cNvPr id="22" name="Text 20"/>
+          <p:cNvSpPr/>
+          <p:nvPr/>
+        </p:nvSpPr>
+        <p:spPr>
+          <a:xfrm>
+            <a:off x="4361688" y="1920240"/>
+            <a:ext cx="786384" cy="438912"/>
+          </a:xfrm>
+          <a:prstGeom prst="rect">
+            <a:avLst/>
+          </a:prstGeom>
+          <a:noFill/>
+          <a:ln/>
+        </p:spPr>
+        <p:txBody>
+          <a:bodyPr wrap="square" lIns="0" tIns="0" rIns="0" bIns="0" rtlCol="0" anchor="ctr"/>
+          <a:lstStyle/>
+          <a:p>
+            <a:pPr algn="ctr" indent="0" marL="0">
+              <a:buNone/>
+            </a:pPr>
+            <a:r>
+              <a:rPr lang="en-US" sz="900" dirty="0">
+                <a:solidFill>
+                  <a:srgbClr val="2B2B2B"/>
+                </a:solidFill>
+                <a:latin typeface="Arial" pitchFamily="34" charset="0"/>
+                <a:ea typeface="Arial" pitchFamily="34" charset="-122"/>
+                <a:cs typeface="Arial" pitchFamily="34" charset="-120"/>
+              </a:rPr>
+              <a:t>44.2</a:t>
+            </a:r>
+            <a:endParaRPr lang="en-US" sz="900" dirty="0"/>
+          </a:p>
+        </p:txBody>
+      </p:sp>
+      <p:sp>
+        <p:nvSpPr>
+          <p:cNvPr id="23" name="Text 21"/>
+          <p:cNvSpPr/>
+          <p:nvPr/>
+        </p:nvSpPr>
+        <p:spPr>
+          <a:xfrm>
+            <a:off x="5148072" y="1920240"/>
+            <a:ext cx="786384" cy="438912"/>
+          </a:xfrm>
+          <a:prstGeom prst="rect">
+            <a:avLst/>
+          </a:prstGeom>
+          <a:noFill/>
+          <a:ln/>
+        </p:spPr>
+        <p:txBody>
+          <a:bodyPr wrap="square" lIns="0" tIns="0" rIns="0" bIns="0" rtlCol="0" anchor="ctr"/>
+          <a:lstStyle/>
+          <a:p>
+            <a:pPr algn="ctr" indent="0" marL="0">
+              <a:buNone/>
+            </a:pPr>
+            <a:r>
+              <a:rPr lang="en-US" sz="900" dirty="0">
+                <a:solidFill>
+                  <a:srgbClr val="2B2B2B"/>
+                </a:solidFill>
+                <a:latin typeface="Arial" pitchFamily="34" charset="0"/>
+                <a:ea typeface="Arial" pitchFamily="34" charset="-122"/>
+                <a:cs typeface="Arial" pitchFamily="34" charset="-120"/>
+              </a:rPr>
+              <a:t>44.2</a:t>
+            </a:r>
+            <a:endParaRPr lang="en-US" sz="900" dirty="0"/>
+          </a:p>
+        </p:txBody>
+      </p:sp>
+      <p:sp>
+        <p:nvSpPr>
+          <p:cNvPr id="24" name="Text 22"/>
+          <p:cNvSpPr/>
+          <p:nvPr/>
+        </p:nvSpPr>
+        <p:spPr>
+          <a:xfrm>
+            <a:off x="5934456" y="1920240"/>
+            <a:ext cx="786384" cy="438912"/>
+          </a:xfrm>
+          <a:prstGeom prst="rect">
+            <a:avLst/>
+          </a:prstGeom>
+          <a:noFill/>
+          <a:ln/>
+        </p:spPr>
+        <p:txBody>
+          <a:bodyPr wrap="square" lIns="0" tIns="0" rIns="0" bIns="0" rtlCol="0" anchor="ctr"/>
+          <a:lstStyle/>
+          <a:p>
+            <a:pPr algn="ctr" indent="0" marL="0">
+              <a:buNone/>
+            </a:pPr>
+            <a:r>
+              <a:rPr lang="en-US" sz="900" dirty="0">
+                <a:solidFill>
+                  <a:srgbClr val="2B2B2B"/>
+                </a:solidFill>
+                <a:latin typeface="Arial" pitchFamily="34" charset="0"/>
+                <a:ea typeface="Arial" pitchFamily="34" charset="-122"/>
+                <a:cs typeface="Arial" pitchFamily="34" charset="-120"/>
+              </a:rPr>
+              <a:t>44.2</a:t>
+            </a:r>
+            <a:endParaRPr lang="en-US" sz="900" dirty="0"/>
+          </a:p>
+        </p:txBody>
+      </p:sp>
+      <p:sp>
+        <p:nvSpPr>
+          <p:cNvPr id="25" name="Text 23"/>
+          <p:cNvSpPr/>
+          <p:nvPr/>
+        </p:nvSpPr>
+        <p:spPr>
+          <a:xfrm>
+            <a:off x="6720840" y="1920240"/>
+            <a:ext cx="786384" cy="438912"/>
+          </a:xfrm>
+          <a:prstGeom prst="rect">
+            <a:avLst/>
+          </a:prstGeom>
+          <a:noFill/>
+          <a:ln/>
+        </p:spPr>
+        <p:txBody>
+          <a:bodyPr wrap="square" lIns="0" tIns="0" rIns="0" bIns="0" rtlCol="0" anchor="ctr"/>
+          <a:lstStyle/>
+          <a:p>
+            <a:pPr algn="ctr" indent="0" marL="0">
+              <a:buNone/>
+            </a:pPr>
+            <a:r>
+              <a:rPr lang="en-US" sz="900" dirty="0">
+                <a:solidFill>
+                  <a:srgbClr val="2B2B2B"/>
+                </a:solidFill>
+                <a:latin typeface="Arial" pitchFamily="34" charset="0"/>
+                <a:ea typeface="Arial" pitchFamily="34" charset="-122"/>
+                <a:cs typeface="Arial" pitchFamily="34" charset="-120"/>
+              </a:rPr>
+              <a:t>66.2</a:t>
+            </a:r>
+            <a:endParaRPr lang="en-US" sz="900" dirty="0"/>
+          </a:p>
+        </p:txBody>
+      </p:sp>
+      <p:sp>
+        <p:nvSpPr>
+          <p:cNvPr id="26" name="Text 24"/>
+          <p:cNvSpPr/>
+          <p:nvPr/>
+        </p:nvSpPr>
+        <p:spPr>
+          <a:xfrm>
+            <a:off x="7507224" y="1920240"/>
+            <a:ext cx="786384" cy="438912"/>
+          </a:xfrm>
+          <a:prstGeom prst="rect">
+            <a:avLst/>
+          </a:prstGeom>
+          <a:noFill/>
+          <a:ln/>
+        </p:spPr>
+        <p:txBody>
+          <a:bodyPr wrap="square" lIns="0" tIns="0" rIns="0" bIns="0" rtlCol="0" anchor="ctr"/>
+          <a:lstStyle/>
+          <a:p>
+            <a:pPr algn="ctr" indent="0" marL="0">
+              <a:buNone/>
+            </a:pPr>
+            <a:r>
+              <a:rPr lang="en-US" sz="900" dirty="0">
+                <a:solidFill>
+                  <a:srgbClr val="2B2B2B"/>
+                </a:solidFill>
+                <a:latin typeface="Arial" pitchFamily="34" charset="0"/>
+                <a:ea typeface="Arial" pitchFamily="34" charset="-122"/>
+                <a:cs typeface="Arial" pitchFamily="34" charset="-120"/>
+              </a:rPr>
+              <a:t>44.2</a:t>
+            </a:r>
+            <a:endParaRPr lang="en-US" sz="900" dirty="0"/>
+          </a:p>
+        </p:txBody>
+      </p:sp>
+      <p:sp>
+        <p:nvSpPr>
+          <p:cNvPr id="27" name="Text 25"/>
+          <p:cNvSpPr/>
+          <p:nvPr/>
+        </p:nvSpPr>
+        <p:spPr>
+          <a:xfrm>
+            <a:off x="8293608" y="1920240"/>
+            <a:ext cx="786384" cy="438912"/>
+          </a:xfrm>
+          <a:prstGeom prst="rect">
+            <a:avLst/>
+          </a:prstGeom>
+          <a:noFill/>
+          <a:ln/>
+        </p:spPr>
+        <p:txBody>
+          <a:bodyPr wrap="square" lIns="0" tIns="0" rIns="0" bIns="0" rtlCol="0" anchor="ctr"/>
+          <a:lstStyle/>
+          <a:p>
+            <a:pPr algn="ctr" indent="0" marL="0">
+              <a:buNone/>
+            </a:pPr>
+            <a:r>
+              <a:rPr lang="en-US" sz="900" dirty="0">
+                <a:solidFill>
+                  <a:srgbClr val="2B2B2B"/>
+                </a:solidFill>
+                <a:latin typeface="Arial" pitchFamily="34" charset="0"/>
+                <a:ea typeface="Arial" pitchFamily="34" charset="-122"/>
+                <a:cs typeface="Arial" pitchFamily="34" charset="-120"/>
+              </a:rPr>
+              <a:t>44.2</a:t>
+            </a:r>
+            <a:endParaRPr lang="en-US" sz="900" dirty="0"/>
+          </a:p>
+        </p:txBody>
+      </p:sp>
+      <p:sp>
+        <p:nvSpPr>
+          <p:cNvPr id="28" name="Text 26"/>
+          <p:cNvSpPr/>
+          <p:nvPr/>
+        </p:nvSpPr>
+        <p:spPr>
+          <a:xfrm>
+            <a:off x="9079992" y="1920240"/>
+            <a:ext cx="786384" cy="438912"/>
+          </a:xfrm>
+          <a:prstGeom prst="rect">
+            <a:avLst/>
+          </a:prstGeom>
+          <a:noFill/>
+          <a:ln/>
+        </p:spPr>
+        <p:txBody>
+          <a:bodyPr wrap="square" lIns="0" tIns="0" rIns="0" bIns="0" rtlCol="0" anchor="ctr"/>
+          <a:lstStyle/>
+          <a:p>
+            <a:pPr algn="ctr" indent="0" marL="0">
+              <a:buNone/>
+            </a:pPr>
+            <a:r>
+              <a:rPr lang="en-US" sz="900" dirty="0">
+                <a:solidFill>
+                  <a:srgbClr val="2B2B2B"/>
+                </a:solidFill>
+                <a:latin typeface="Arial" pitchFamily="34" charset="0"/>
+                <a:ea typeface="Arial" pitchFamily="34" charset="-122"/>
+                <a:cs typeface="Arial" pitchFamily="34" charset="-120"/>
+              </a:rPr>
+              <a:t>44.2</a:t>
+            </a:r>
+            <a:endParaRPr lang="en-US" sz="900" dirty="0"/>
+          </a:p>
+        </p:txBody>
+      </p:sp>
+      <p:sp>
+        <p:nvSpPr>
+          <p:cNvPr id="29" name="Text 27"/>
+          <p:cNvSpPr/>
+          <p:nvPr/>
+        </p:nvSpPr>
+        <p:spPr>
+          <a:xfrm>
+            <a:off x="9866376" y="1920240"/>
+            <a:ext cx="786384" cy="438912"/>
+          </a:xfrm>
+          <a:prstGeom prst="rect">
+            <a:avLst/>
+          </a:prstGeom>
+          <a:noFill/>
+          <a:ln/>
+        </p:spPr>
+        <p:txBody>
+          <a:bodyPr wrap="square" lIns="0" tIns="0" rIns="0" bIns="0" rtlCol="0" anchor="ctr"/>
+          <a:lstStyle/>
+          <a:p>
+            <a:pPr algn="ctr" indent="0" marL="0">
+              <a:buNone/>
+            </a:pPr>
+            <a:r>
+              <a:rPr lang="en-US" sz="900" dirty="0">
+                <a:solidFill>
+                  <a:srgbClr val="2B2B2B"/>
+                </a:solidFill>
+                <a:latin typeface="Arial" pitchFamily="34" charset="0"/>
+                <a:ea typeface="Arial" pitchFamily="34" charset="-122"/>
+                <a:cs typeface="Arial" pitchFamily="34" charset="-120"/>
+              </a:rPr>
+              <a:t>44.2</a:t>
+            </a:r>
+            <a:endParaRPr lang="en-US" sz="900" dirty="0"/>
+          </a:p>
+        </p:txBody>
+      </p:sp>
+      <p:sp>
+        <p:nvSpPr>
+          <p:cNvPr id="30" name="Text 28"/>
+          <p:cNvSpPr/>
+          <p:nvPr/>
+        </p:nvSpPr>
+        <p:spPr>
+          <a:xfrm>
+            <a:off x="10652760" y="1920240"/>
+            <a:ext cx="786384" cy="438912"/>
+          </a:xfrm>
+          <a:prstGeom prst="rect">
+            <a:avLst/>
+          </a:prstGeom>
+          <a:noFill/>
+          <a:ln/>
+        </p:spPr>
+        <p:txBody>
+          <a:bodyPr wrap="square" lIns="0" tIns="0" rIns="0" bIns="0" rtlCol="0" anchor="ctr"/>
+          <a:lstStyle/>
+          <a:p>
+            <a:pPr algn="ctr" indent="0" marL="0">
+              <a:buNone/>
+            </a:pPr>
+            <a:r>
+              <a:rPr lang="en-US" sz="900" dirty="0">
+                <a:solidFill>
+                  <a:srgbClr val="2B2B2B"/>
+                </a:solidFill>
+                <a:latin typeface="Arial" pitchFamily="34" charset="0"/>
+                <a:ea typeface="Arial" pitchFamily="34" charset="-122"/>
+                <a:cs typeface="Arial" pitchFamily="34" charset="-120"/>
+              </a:rPr>
+              <a:t>44.2</a:t>
+            </a:r>
+            <a:endParaRPr lang="en-US" sz="900" dirty="0"/>
+          </a:p>
+        </p:txBody>
+      </p:sp>
+      <p:sp>
+        <p:nvSpPr>
+          <p:cNvPr id="31" name="Text 29"/>
+          <p:cNvSpPr/>
+          <p:nvPr/>
+        </p:nvSpPr>
+        <p:spPr>
+          <a:xfrm>
+            <a:off x="11439144" y="1920240"/>
+            <a:ext cx="786384" cy="438912"/>
+          </a:xfrm>
+          <a:prstGeom prst="rect">
+            <a:avLst/>
+          </a:prstGeom>
+          <a:noFill/>
+          <a:ln/>
+        </p:spPr>
+        <p:txBody>
+          <a:bodyPr wrap="square" lIns="0" tIns="0" rIns="0" bIns="0" rtlCol="0" anchor="ctr"/>
+          <a:lstStyle/>
+          <a:p>
+            <a:pPr algn="ctr" indent="0" marL="0">
+              <a:buNone/>
+            </a:pPr>
+            <a:r>
+              <a:rPr lang="en-US" sz="900" dirty="0">
+                <a:solidFill>
+                  <a:srgbClr val="2B2B2B"/>
+                </a:solidFill>
+                <a:latin typeface="Arial" pitchFamily="34" charset="0"/>
+                <a:ea typeface="Arial" pitchFamily="34" charset="-122"/>
+                <a:cs typeface="Arial" pitchFamily="34" charset="-120"/>
+              </a:rPr>
+              <a:t>44.2</a:t>
+            </a:r>
+            <a:endParaRPr lang="en-US" sz="900" dirty="0"/>
+          </a:p>
+        </p:txBody>
+      </p:sp>
+      <p:sp>
+        <p:nvSpPr>
+          <p:cNvPr id="32" name="Shape 30"/>
+          <p:cNvSpPr/>
+          <p:nvPr/>
+        </p:nvSpPr>
+        <p:spPr>
+          <a:xfrm>
+            <a:off x="594360" y="2359152"/>
+            <a:ext cx="11631168" cy="438912"/>
+          </a:xfrm>
+          <a:prstGeom prst="rect">
+            <a:avLst/>
+          </a:prstGeom>
+          <a:solidFill>
+            <a:srgbClr val="FBF9F7"/>
+          </a:solidFill>
+          <a:ln w="6350">
+            <a:solidFill>
+              <a:srgbClr val="DED5CE"/>
+            </a:solidFill>
+            <a:prstDash val="solid"/>
+          </a:ln>
+        </p:spPr>
+      </p:sp>
+      <p:sp>
+        <p:nvSpPr>
+          <p:cNvPr id="33" name="Text 31"/>
+          <p:cNvSpPr/>
+          <p:nvPr/>
+        </p:nvSpPr>
+        <p:spPr>
+          <a:xfrm>
+            <a:off x="731520" y="2359152"/>
+            <a:ext cx="2194560" cy="438912"/>
+          </a:xfrm>
+          <a:prstGeom prst="rect">
+            <a:avLst/>
+          </a:prstGeom>
+          <a:noFill/>
+          <a:ln/>
+        </p:spPr>
+        <p:txBody>
+          <a:bodyPr wrap="square" lIns="0" tIns="0" rIns="0" bIns="0" rtlCol="0" anchor="ctr"/>
+          <a:lstStyle/>
+          <a:p>
+            <a:pPr indent="0" marL="0">
+              <a:buNone/>
+            </a:pPr>
+            <a:r>
+              <a:rPr lang="en-US" sz="950" dirty="0">
+                <a:solidFill>
+                  <a:srgbClr val="2B2B2B"/>
+                </a:solidFill>
+                <a:latin typeface="Arial" pitchFamily="34" charset="0"/>
+                <a:ea typeface="Arial" pitchFamily="34" charset="-122"/>
+                <a:cs typeface="Arial" pitchFamily="34" charset="-120"/>
+              </a:rPr>
+              <a:t>営業支出 計</a:t>
+            </a:r>
+            <a:endParaRPr lang="en-US" sz="950" dirty="0"/>
+          </a:p>
+        </p:txBody>
+      </p:sp>
+      <p:sp>
+        <p:nvSpPr>
+          <p:cNvPr id="34" name="Text 32"/>
+          <p:cNvSpPr/>
+          <p:nvPr/>
+        </p:nvSpPr>
+        <p:spPr>
+          <a:xfrm>
+            <a:off x="2788920" y="2359152"/>
+            <a:ext cx="786384" cy="438912"/>
+          </a:xfrm>
+          <a:prstGeom prst="rect">
+            <a:avLst/>
+          </a:prstGeom>
+          <a:noFill/>
+          <a:ln/>
+        </p:spPr>
+        <p:txBody>
+          <a:bodyPr wrap="square" lIns="0" tIns="0" rIns="0" bIns="0" rtlCol="0" anchor="ctr"/>
+          <a:lstStyle/>
+          <a:p>
+            <a:pPr algn="ctr" indent="0" marL="0">
+              <a:buNone/>
+            </a:pPr>
+            <a:r>
+              <a:rPr lang="en-US" sz="900" dirty="0">
+                <a:solidFill>
+                  <a:srgbClr val="2B2B2B"/>
+                </a:solidFill>
+                <a:latin typeface="Arial" pitchFamily="34" charset="0"/>
+                <a:ea typeface="Arial" pitchFamily="34" charset="-122"/>
+                <a:cs typeface="Arial" pitchFamily="34" charset="-120"/>
+              </a:rPr>
+              <a:t>44.7</a:t>
+            </a:r>
+            <a:endParaRPr lang="en-US" sz="900" dirty="0"/>
+          </a:p>
+        </p:txBody>
+      </p:sp>
+      <p:sp>
+        <p:nvSpPr>
+          <p:cNvPr id="35" name="Text 33"/>
+          <p:cNvSpPr/>
+          <p:nvPr/>
+        </p:nvSpPr>
+        <p:spPr>
+          <a:xfrm>
+            <a:off x="3575304" y="2359152"/>
+            <a:ext cx="786384" cy="438912"/>
+          </a:xfrm>
+          <a:prstGeom prst="rect">
+            <a:avLst/>
+          </a:prstGeom>
+          <a:noFill/>
+          <a:ln/>
+        </p:spPr>
+        <p:txBody>
+          <a:bodyPr wrap="square" lIns="0" tIns="0" rIns="0" bIns="0" rtlCol="0" anchor="ctr"/>
+          <a:lstStyle/>
+          <a:p>
+            <a:pPr algn="ctr" indent="0" marL="0">
+              <a:buNone/>
+            </a:pPr>
+            <a:r>
+              <a:rPr lang="en-US" sz="900" dirty="0">
+                <a:solidFill>
+                  <a:srgbClr val="2B2B2B"/>
+                </a:solidFill>
+                <a:latin typeface="Arial" pitchFamily="34" charset="0"/>
+                <a:ea typeface="Arial" pitchFamily="34" charset="-122"/>
+                <a:cs typeface="Arial" pitchFamily="34" charset="-120"/>
+              </a:rPr>
+              <a:t>75.1</a:t>
+            </a:r>
+            <a:endParaRPr lang="en-US" sz="900" dirty="0"/>
+          </a:p>
+        </p:txBody>
+      </p:sp>
+      <p:sp>
+        <p:nvSpPr>
+          <p:cNvPr id="36" name="Text 34"/>
+          <p:cNvSpPr/>
+          <p:nvPr/>
+        </p:nvSpPr>
+        <p:spPr>
+          <a:xfrm>
+            <a:off x="4361688" y="2359152"/>
+            <a:ext cx="786384" cy="438912"/>
+          </a:xfrm>
+          <a:prstGeom prst="rect">
+            <a:avLst/>
+          </a:prstGeom>
+          <a:noFill/>
+          <a:ln/>
+        </p:spPr>
+        <p:txBody>
+          <a:bodyPr wrap="square" lIns="0" tIns="0" rIns="0" bIns="0" rtlCol="0" anchor="ctr"/>
+          <a:lstStyle/>
+          <a:p>
+            <a:pPr algn="ctr" indent="0" marL="0">
+              <a:buNone/>
+            </a:pPr>
+            <a:r>
+              <a:rPr lang="en-US" sz="900" dirty="0">
+                <a:solidFill>
+                  <a:srgbClr val="2B2B2B"/>
+                </a:solidFill>
+                <a:latin typeface="Arial" pitchFamily="34" charset="0"/>
+                <a:ea typeface="Arial" pitchFamily="34" charset="-122"/>
+                <a:cs typeface="Arial" pitchFamily="34" charset="-120"/>
+              </a:rPr>
+              <a:t>44.7</a:t>
+            </a:r>
+            <a:endParaRPr lang="en-US" sz="900" dirty="0"/>
+          </a:p>
+        </p:txBody>
+      </p:sp>
+      <p:sp>
+        <p:nvSpPr>
+          <p:cNvPr id="37" name="Text 35"/>
+          <p:cNvSpPr/>
+          <p:nvPr/>
+        </p:nvSpPr>
+        <p:spPr>
+          <a:xfrm>
+            <a:off x="5148072" y="2359152"/>
+            <a:ext cx="786384" cy="438912"/>
+          </a:xfrm>
+          <a:prstGeom prst="rect">
+            <a:avLst/>
+          </a:prstGeom>
+          <a:noFill/>
+          <a:ln/>
+        </p:spPr>
+        <p:txBody>
+          <a:bodyPr wrap="square" lIns="0" tIns="0" rIns="0" bIns="0" rtlCol="0" anchor="ctr"/>
+          <a:lstStyle/>
+          <a:p>
+            <a:pPr algn="ctr" indent="0" marL="0">
+              <a:buNone/>
+            </a:pPr>
+            <a:r>
+              <a:rPr lang="en-US" sz="900" dirty="0">
+                <a:solidFill>
+                  <a:srgbClr val="2B2B2B"/>
+                </a:solidFill>
+                <a:latin typeface="Arial" pitchFamily="34" charset="0"/>
+                <a:ea typeface="Arial" pitchFamily="34" charset="-122"/>
+                <a:cs typeface="Arial" pitchFamily="34" charset="-120"/>
+              </a:rPr>
+              <a:t>44.7</a:t>
+            </a:r>
+            <a:endParaRPr lang="en-US" sz="900" dirty="0"/>
+          </a:p>
+        </p:txBody>
+      </p:sp>
+      <p:sp>
+        <p:nvSpPr>
+          <p:cNvPr id="38" name="Text 36"/>
+          <p:cNvSpPr/>
+          <p:nvPr/>
+        </p:nvSpPr>
+        <p:spPr>
+          <a:xfrm>
+            <a:off x="5934456" y="2359152"/>
+            <a:ext cx="786384" cy="438912"/>
+          </a:xfrm>
+          <a:prstGeom prst="rect">
+            <a:avLst/>
+          </a:prstGeom>
+          <a:noFill/>
+          <a:ln/>
+        </p:spPr>
+        <p:txBody>
+          <a:bodyPr wrap="square" lIns="0" tIns="0" rIns="0" bIns="0" rtlCol="0" anchor="ctr"/>
+          <a:lstStyle/>
+          <a:p>
+            <a:pPr algn="ctr" indent="0" marL="0">
+              <a:buNone/>
+            </a:pPr>
+            <a:r>
+              <a:rPr lang="en-US" sz="900" dirty="0">
+                <a:solidFill>
+                  <a:srgbClr val="2B2B2B"/>
+                </a:solidFill>
+                <a:latin typeface="Arial" pitchFamily="34" charset="0"/>
+                <a:ea typeface="Arial" pitchFamily="34" charset="-122"/>
+                <a:cs typeface="Arial" pitchFamily="34" charset="-120"/>
+              </a:rPr>
+              <a:t>44.7</a:t>
+            </a:r>
+            <a:endParaRPr lang="en-US" sz="900" dirty="0"/>
+          </a:p>
+        </p:txBody>
+      </p:sp>
+      <p:sp>
+        <p:nvSpPr>
+          <p:cNvPr id="39" name="Text 37"/>
+          <p:cNvSpPr/>
+          <p:nvPr/>
+        </p:nvSpPr>
+        <p:spPr>
+          <a:xfrm>
+            <a:off x="6720840" y="2359152"/>
+            <a:ext cx="786384" cy="438912"/>
+          </a:xfrm>
+          <a:prstGeom prst="rect">
+            <a:avLst/>
+          </a:prstGeom>
+          <a:noFill/>
+          <a:ln/>
+        </p:spPr>
+        <p:txBody>
+          <a:bodyPr wrap="square" lIns="0" tIns="0" rIns="0" bIns="0" rtlCol="0" anchor="ctr"/>
+          <a:lstStyle/>
+          <a:p>
+            <a:pPr algn="ctr" indent="0" marL="0">
+              <a:buNone/>
+            </a:pPr>
+            <a:r>
+              <a:rPr lang="en-US" sz="900" dirty="0">
+                <a:solidFill>
+                  <a:srgbClr val="2B2B2B"/>
+                </a:solidFill>
+                <a:latin typeface="Arial" pitchFamily="34" charset="0"/>
+                <a:ea typeface="Arial" pitchFamily="34" charset="-122"/>
+                <a:cs typeface="Arial" pitchFamily="34" charset="-120"/>
+              </a:rPr>
+              <a:t>44.7</a:t>
+            </a:r>
+            <a:endParaRPr lang="en-US" sz="900" dirty="0"/>
+          </a:p>
+        </p:txBody>
+      </p:sp>
+      <p:sp>
+        <p:nvSpPr>
+          <p:cNvPr id="40" name="Text 38"/>
+          <p:cNvSpPr/>
+          <p:nvPr/>
+        </p:nvSpPr>
+        <p:spPr>
+          <a:xfrm>
+            <a:off x="7507224" y="2359152"/>
+            <a:ext cx="786384" cy="438912"/>
+          </a:xfrm>
+          <a:prstGeom prst="rect">
+            <a:avLst/>
+          </a:prstGeom>
+          <a:noFill/>
+          <a:ln/>
+        </p:spPr>
+        <p:txBody>
+          <a:bodyPr wrap="square" lIns="0" tIns="0" rIns="0" bIns="0" rtlCol="0" anchor="ctr"/>
+          <a:lstStyle/>
+          <a:p>
+            <a:pPr algn="ctr" indent="0" marL="0">
+              <a:buNone/>
+            </a:pPr>
+            <a:r>
+              <a:rPr lang="en-US" sz="900" dirty="0">
+                <a:solidFill>
+                  <a:srgbClr val="2B2B2B"/>
+                </a:solidFill>
+                <a:latin typeface="Arial" pitchFamily="34" charset="0"/>
+                <a:ea typeface="Arial" pitchFamily="34" charset="-122"/>
+                <a:cs typeface="Arial" pitchFamily="34" charset="-120"/>
+              </a:rPr>
+              <a:t>44.7</a:t>
+            </a:r>
+            <a:endParaRPr lang="en-US" sz="900" dirty="0"/>
+          </a:p>
+        </p:txBody>
+      </p:sp>
+      <p:sp>
+        <p:nvSpPr>
+          <p:cNvPr id="41" name="Text 39"/>
+          <p:cNvSpPr/>
+          <p:nvPr/>
+        </p:nvSpPr>
+        <p:spPr>
+          <a:xfrm>
+            <a:off x="8293608" y="2359152"/>
+            <a:ext cx="786384" cy="438912"/>
+          </a:xfrm>
+          <a:prstGeom prst="rect">
+            <a:avLst/>
+          </a:prstGeom>
+          <a:noFill/>
+          <a:ln/>
+        </p:spPr>
+        <p:txBody>
+          <a:bodyPr wrap="square" lIns="0" tIns="0" rIns="0" bIns="0" rtlCol="0" anchor="ctr"/>
+          <a:lstStyle/>
+          <a:p>
+            <a:pPr algn="ctr" indent="0" marL="0">
+              <a:buNone/>
+            </a:pPr>
+            <a:r>
+              <a:rPr lang="en-US" sz="900" dirty="0">
+                <a:solidFill>
+                  <a:srgbClr val="2B2B2B"/>
+                </a:solidFill>
+                <a:latin typeface="Arial" pitchFamily="34" charset="0"/>
+                <a:ea typeface="Arial" pitchFamily="34" charset="-122"/>
+                <a:cs typeface="Arial" pitchFamily="34" charset="-120"/>
+              </a:rPr>
+              <a:t>49.7</a:t>
+            </a:r>
+            <a:endParaRPr lang="en-US" sz="900" dirty="0"/>
+          </a:p>
+        </p:txBody>
+      </p:sp>
+      <p:sp>
+        <p:nvSpPr>
+          <p:cNvPr id="42" name="Text 40"/>
+          <p:cNvSpPr/>
+          <p:nvPr/>
+        </p:nvSpPr>
+        <p:spPr>
+          <a:xfrm>
+            <a:off x="9079992" y="2359152"/>
+            <a:ext cx="786384" cy="438912"/>
+          </a:xfrm>
+          <a:prstGeom prst="rect">
+            <a:avLst/>
+          </a:prstGeom>
+          <a:noFill/>
+          <a:ln/>
+        </p:spPr>
+        <p:txBody>
+          <a:bodyPr wrap="square" lIns="0" tIns="0" rIns="0" bIns="0" rtlCol="0" anchor="ctr"/>
+          <a:lstStyle/>
+          <a:p>
+            <a:pPr algn="ctr" indent="0" marL="0">
+              <a:buNone/>
+            </a:pPr>
+            <a:r>
+              <a:rPr lang="en-US" sz="900" dirty="0">
+                <a:solidFill>
+                  <a:srgbClr val="2B2B2B"/>
+                </a:solidFill>
+                <a:latin typeface="Arial" pitchFamily="34" charset="0"/>
+                <a:ea typeface="Arial" pitchFamily="34" charset="-122"/>
+                <a:cs typeface="Arial" pitchFamily="34" charset="-120"/>
+              </a:rPr>
+              <a:t>44.7</a:t>
+            </a:r>
+            <a:endParaRPr lang="en-US" sz="900" dirty="0"/>
+          </a:p>
+        </p:txBody>
+      </p:sp>
+      <p:sp>
+        <p:nvSpPr>
+          <p:cNvPr id="43" name="Text 41"/>
+          <p:cNvSpPr/>
+          <p:nvPr/>
+        </p:nvSpPr>
+        <p:spPr>
+          <a:xfrm>
+            <a:off x="9866376" y="2359152"/>
+            <a:ext cx="786384" cy="438912"/>
+          </a:xfrm>
+          <a:prstGeom prst="rect">
+            <a:avLst/>
+          </a:prstGeom>
+          <a:noFill/>
+          <a:ln/>
+        </p:spPr>
+        <p:txBody>
+          <a:bodyPr wrap="square" lIns="0" tIns="0" rIns="0" bIns="0" rtlCol="0" anchor="ctr"/>
+          <a:lstStyle/>
+          <a:p>
+            <a:pPr algn="ctr" indent="0" marL="0">
+              <a:buNone/>
+            </a:pPr>
+            <a:r>
+              <a:rPr lang="en-US" sz="900" dirty="0">
+                <a:solidFill>
+                  <a:srgbClr val="2B2B2B"/>
+                </a:solidFill>
+                <a:latin typeface="Arial" pitchFamily="34" charset="0"/>
+                <a:ea typeface="Arial" pitchFamily="34" charset="-122"/>
+                <a:cs typeface="Arial" pitchFamily="34" charset="-120"/>
+              </a:rPr>
+              <a:t>44.7</a:t>
+            </a:r>
+            <a:endParaRPr lang="en-US" sz="900" dirty="0"/>
+          </a:p>
+        </p:txBody>
+      </p:sp>
+      <p:sp>
+        <p:nvSpPr>
+          <p:cNvPr id="44" name="Text 42"/>
+          <p:cNvSpPr/>
+          <p:nvPr/>
+        </p:nvSpPr>
+        <p:spPr>
+          <a:xfrm>
+            <a:off x="10652760" y="2359152"/>
+            <a:ext cx="786384" cy="438912"/>
+          </a:xfrm>
+          <a:prstGeom prst="rect">
+            <a:avLst/>
+          </a:prstGeom>
+          <a:noFill/>
+          <a:ln/>
+        </p:spPr>
+        <p:txBody>
+          <a:bodyPr wrap="square" lIns="0" tIns="0" rIns="0" bIns="0" rtlCol="0" anchor="ctr"/>
+          <a:lstStyle/>
+          <a:p>
+            <a:pPr algn="ctr" indent="0" marL="0">
+              <a:buNone/>
+            </a:pPr>
+            <a:r>
+              <a:rPr lang="en-US" sz="900" dirty="0">
+                <a:solidFill>
+                  <a:srgbClr val="2B2B2B"/>
+                </a:solidFill>
+                <a:latin typeface="Arial" pitchFamily="34" charset="0"/>
+                <a:ea typeface="Arial" pitchFamily="34" charset="-122"/>
+                <a:cs typeface="Arial" pitchFamily="34" charset="-120"/>
+              </a:rPr>
+              <a:t>44.7</a:t>
+            </a:r>
+            <a:endParaRPr lang="en-US" sz="900" dirty="0"/>
+          </a:p>
+        </p:txBody>
+      </p:sp>
+      <p:sp>
+        <p:nvSpPr>
+          <p:cNvPr id="45" name="Text 43"/>
+          <p:cNvSpPr/>
+          <p:nvPr/>
+        </p:nvSpPr>
+        <p:spPr>
+          <a:xfrm>
+            <a:off x="11439144" y="2359152"/>
+            <a:ext cx="786384" cy="438912"/>
+          </a:xfrm>
+          <a:prstGeom prst="rect">
+            <a:avLst/>
+          </a:prstGeom>
+          <a:noFill/>
+          <a:ln/>
+        </p:spPr>
+        <p:txBody>
+          <a:bodyPr wrap="square" lIns="0" tIns="0" rIns="0" bIns="0" rtlCol="0" anchor="ctr"/>
+          <a:lstStyle/>
+          <a:p>
+            <a:pPr algn="ctr" indent="0" marL="0">
+              <a:buNone/>
+            </a:pPr>
+            <a:r>
+              <a:rPr lang="en-US" sz="900" dirty="0">
+                <a:solidFill>
+                  <a:srgbClr val="2B2B2B"/>
+                </a:solidFill>
+                <a:latin typeface="Arial" pitchFamily="34" charset="0"/>
+                <a:ea typeface="Arial" pitchFamily="34" charset="-122"/>
+                <a:cs typeface="Arial" pitchFamily="34" charset="-120"/>
+              </a:rPr>
+              <a:t>44.7</a:t>
+            </a:r>
+            <a:endParaRPr lang="en-US" sz="900" dirty="0"/>
+          </a:p>
+        </p:txBody>
+      </p:sp>
+      <p:sp>
+        <p:nvSpPr>
+          <p:cNvPr id="46" name="Shape 44"/>
+          <p:cNvSpPr/>
+          <p:nvPr/>
+        </p:nvSpPr>
+        <p:spPr>
+          <a:xfrm>
+            <a:off x="594360" y="2798064"/>
+            <a:ext cx="11631168" cy="438912"/>
+          </a:xfrm>
+          <a:prstGeom prst="rect">
+            <a:avLst/>
+          </a:prstGeom>
+          <a:solidFill>
+            <a:srgbClr val="F3EDE9"/>
+          </a:solidFill>
+          <a:ln w="6350">
+            <a:solidFill>
+              <a:srgbClr val="DED5CE"/>
+            </a:solidFill>
+            <a:prstDash val="solid"/>
+          </a:ln>
+        </p:spPr>
+      </p:sp>
+      <p:sp>
+        <p:nvSpPr>
+          <p:cNvPr id="47" name="Text 45"/>
+          <p:cNvSpPr/>
+          <p:nvPr/>
+        </p:nvSpPr>
+        <p:spPr>
+          <a:xfrm>
+            <a:off x="731520" y="2798064"/>
+            <a:ext cx="2194560" cy="438912"/>
+          </a:xfrm>
+          <a:prstGeom prst="rect">
+            <a:avLst/>
+          </a:prstGeom>
+          <a:noFill/>
+          <a:ln/>
+        </p:spPr>
+        <p:txBody>
+          <a:bodyPr wrap="square" lIns="0" tIns="0" rIns="0" bIns="0" rtlCol="0" anchor="ctr"/>
+          <a:lstStyle/>
+          <a:p>
+            <a:pPr indent="0" marL="0">
+              <a:buNone/>
+            </a:pPr>
+            <a:r>
+              <a:rPr lang="en-US" sz="950" b="1" dirty="0">
+                <a:solidFill>
+                  <a:srgbClr val="2B2B2B"/>
+                </a:solidFill>
+                <a:latin typeface="Arial" pitchFamily="34" charset="0"/>
+                <a:ea typeface="Arial" pitchFamily="34" charset="-122"/>
+                <a:cs typeface="Arial" pitchFamily="34" charset="-120"/>
+              </a:rPr>
+              <a:t>経常収支</a:t>
+            </a:r>
+            <a:endParaRPr lang="en-US" sz="950" dirty="0"/>
+          </a:p>
+        </p:txBody>
+      </p:sp>
+      <p:sp>
+        <p:nvSpPr>
+          <p:cNvPr id="48" name="Text 46"/>
+          <p:cNvSpPr/>
+          <p:nvPr/>
+        </p:nvSpPr>
+        <p:spPr>
+          <a:xfrm>
+            <a:off x="2788920" y="2798064"/>
+            <a:ext cx="786384" cy="438912"/>
+          </a:xfrm>
+          <a:prstGeom prst="rect">
+            <a:avLst/>
+          </a:prstGeom>
+          <a:noFill/>
+          <a:ln/>
+        </p:spPr>
+        <p:txBody>
+          <a:bodyPr wrap="square" lIns="0" tIns="0" rIns="0" bIns="0" rtlCol="0" anchor="ctr"/>
+          <a:lstStyle/>
+          <a:p>
+            <a:pPr algn="ctr" indent="0" marL="0">
+              <a:buNone/>
+            </a:pPr>
+            <a:r>
+              <a:rPr lang="en-US" sz="900" b="1" dirty="0">
+                <a:solidFill>
+                  <a:srgbClr val="6D2E46"/>
+                </a:solidFill>
+                <a:latin typeface="Arial" pitchFamily="34" charset="0"/>
+                <a:ea typeface="Arial" pitchFamily="34" charset="-122"/>
+                <a:cs typeface="Arial" pitchFamily="34" charset="-120"/>
+              </a:rPr>
+              <a:t>219.5</a:t>
+            </a:r>
+            <a:endParaRPr lang="en-US" sz="900" dirty="0"/>
+          </a:p>
+        </p:txBody>
+      </p:sp>
+      <p:sp>
+        <p:nvSpPr>
+          <p:cNvPr id="49" name="Text 47"/>
+          <p:cNvSpPr/>
+          <p:nvPr/>
+        </p:nvSpPr>
+        <p:spPr>
+          <a:xfrm>
+            <a:off x="3575304" y="2798064"/>
+            <a:ext cx="786384" cy="438912"/>
+          </a:xfrm>
+          <a:prstGeom prst="rect">
+            <a:avLst/>
+          </a:prstGeom>
+          <a:noFill/>
+          <a:ln/>
+        </p:spPr>
+        <p:txBody>
+          <a:bodyPr wrap="square" lIns="0" tIns="0" rIns="0" bIns="0" rtlCol="0" anchor="ctr"/>
+          <a:lstStyle/>
+          <a:p>
+            <a:pPr algn="ctr" indent="0" marL="0">
+              <a:buNone/>
+            </a:pPr>
+            <a:r>
+              <a:rPr lang="en-US" sz="900" b="1" dirty="0">
+                <a:solidFill>
+                  <a:srgbClr val="C0392B"/>
+                </a:solidFill>
+                <a:latin typeface="Arial" pitchFamily="34" charset="0"/>
+                <a:ea typeface="Arial" pitchFamily="34" charset="-122"/>
+                <a:cs typeface="Arial" pitchFamily="34" charset="-120"/>
+              </a:rPr>
+              <a:t>▲31.0</a:t>
+            </a:r>
+            <a:endParaRPr lang="en-US" sz="900" dirty="0"/>
+          </a:p>
+        </p:txBody>
+      </p:sp>
+      <p:sp>
+        <p:nvSpPr>
+          <p:cNvPr id="50" name="Text 48"/>
+          <p:cNvSpPr/>
+          <p:nvPr/>
+        </p:nvSpPr>
+        <p:spPr>
+          <a:xfrm>
+            <a:off x="4361688" y="2798064"/>
+            <a:ext cx="786384" cy="438912"/>
+          </a:xfrm>
+          <a:prstGeom prst="rect">
+            <a:avLst/>
+          </a:prstGeom>
+          <a:noFill/>
+          <a:ln/>
+        </p:spPr>
+        <p:txBody>
+          <a:bodyPr wrap="square" lIns="0" tIns="0" rIns="0" bIns="0" rtlCol="0" anchor="ctr"/>
+          <a:lstStyle/>
+          <a:p>
+            <a:pPr algn="ctr" indent="0" marL="0">
+              <a:buNone/>
+            </a:pPr>
+            <a:r>
+              <a:rPr lang="en-US" sz="900" b="1" dirty="0">
+                <a:solidFill>
+                  <a:srgbClr val="C0392B"/>
+                </a:solidFill>
+                <a:latin typeface="Arial" pitchFamily="34" charset="0"/>
+                <a:ea typeface="Arial" pitchFamily="34" charset="-122"/>
+                <a:cs typeface="Arial" pitchFamily="34" charset="-120"/>
+              </a:rPr>
+              <a:t>▲0.5</a:t>
+            </a:r>
+            <a:endParaRPr lang="en-US" sz="900" dirty="0"/>
+          </a:p>
+        </p:txBody>
+      </p:sp>
+      <p:sp>
+        <p:nvSpPr>
+          <p:cNvPr id="51" name="Text 49"/>
+          <p:cNvSpPr/>
+          <p:nvPr/>
+        </p:nvSpPr>
+        <p:spPr>
+          <a:xfrm>
+            <a:off x="5148072" y="2798064"/>
+            <a:ext cx="786384" cy="438912"/>
+          </a:xfrm>
+          <a:prstGeom prst="rect">
+            <a:avLst/>
+          </a:prstGeom>
+          <a:noFill/>
+          <a:ln/>
+        </p:spPr>
+        <p:txBody>
+          <a:bodyPr wrap="square" lIns="0" tIns="0" rIns="0" bIns="0" rtlCol="0" anchor="ctr"/>
+          <a:lstStyle/>
+          <a:p>
+            <a:pPr algn="ctr" indent="0" marL="0">
+              <a:buNone/>
+            </a:pPr>
+            <a:r>
+              <a:rPr lang="en-US" sz="900" b="1" dirty="0">
+                <a:solidFill>
+                  <a:srgbClr val="C0392B"/>
+                </a:solidFill>
+                <a:latin typeface="Arial" pitchFamily="34" charset="0"/>
+                <a:ea typeface="Arial" pitchFamily="34" charset="-122"/>
+                <a:cs typeface="Arial" pitchFamily="34" charset="-120"/>
+              </a:rPr>
+              <a:t>▲0.5</a:t>
+            </a:r>
+            <a:endParaRPr lang="en-US" sz="900" dirty="0"/>
+          </a:p>
+        </p:txBody>
+      </p:sp>
+      <p:sp>
+        <p:nvSpPr>
+          <p:cNvPr id="52" name="Text 50"/>
+          <p:cNvSpPr/>
+          <p:nvPr/>
+        </p:nvSpPr>
+        <p:spPr>
+          <a:xfrm>
+            <a:off x="5934456" y="2798064"/>
+            <a:ext cx="786384" cy="438912"/>
+          </a:xfrm>
+          <a:prstGeom prst="rect">
+            <a:avLst/>
+          </a:prstGeom>
+          <a:noFill/>
+          <a:ln/>
+        </p:spPr>
+        <p:txBody>
+          <a:bodyPr wrap="square" lIns="0" tIns="0" rIns="0" bIns="0" rtlCol="0" anchor="ctr"/>
+          <a:lstStyle/>
+          <a:p>
+            <a:pPr algn="ctr" indent="0" marL="0">
+              <a:buNone/>
+            </a:pPr>
+            <a:r>
+              <a:rPr lang="en-US" sz="900" b="1" dirty="0">
+                <a:solidFill>
+                  <a:srgbClr val="C0392B"/>
+                </a:solidFill>
+                <a:latin typeface="Arial" pitchFamily="34" charset="0"/>
+                <a:ea typeface="Arial" pitchFamily="34" charset="-122"/>
+                <a:cs typeface="Arial" pitchFamily="34" charset="-120"/>
+              </a:rPr>
+              <a:t>▲0.5</a:t>
+            </a:r>
+            <a:endParaRPr lang="en-US" sz="900" dirty="0"/>
+          </a:p>
+        </p:txBody>
+      </p:sp>
+      <p:sp>
+        <p:nvSpPr>
+          <p:cNvPr id="53" name="Text 51"/>
+          <p:cNvSpPr/>
+          <p:nvPr/>
+        </p:nvSpPr>
+        <p:spPr>
+          <a:xfrm>
+            <a:off x="6720840" y="2798064"/>
+            <a:ext cx="786384" cy="438912"/>
+          </a:xfrm>
+          <a:prstGeom prst="rect">
+            <a:avLst/>
+          </a:prstGeom>
+          <a:noFill/>
+          <a:ln/>
+        </p:spPr>
+        <p:txBody>
+          <a:bodyPr wrap="square" lIns="0" tIns="0" rIns="0" bIns="0" rtlCol="0" anchor="ctr"/>
+          <a:lstStyle/>
+          <a:p>
+            <a:pPr algn="ctr" indent="0" marL="0">
+              <a:buNone/>
+            </a:pPr>
+            <a:r>
+              <a:rPr lang="en-US" sz="900" b="1" dirty="0">
+                <a:solidFill>
+                  <a:srgbClr val="6D2E46"/>
+                </a:solidFill>
+                <a:latin typeface="Arial" pitchFamily="34" charset="0"/>
+                <a:ea typeface="Arial" pitchFamily="34" charset="-122"/>
+                <a:cs typeface="Arial" pitchFamily="34" charset="-120"/>
+              </a:rPr>
+              <a:t>21.5</a:t>
+            </a:r>
+            <a:endParaRPr lang="en-US" sz="900" dirty="0"/>
+          </a:p>
+        </p:txBody>
+      </p:sp>
+      <p:sp>
+        <p:nvSpPr>
+          <p:cNvPr id="54" name="Text 52"/>
+          <p:cNvSpPr/>
+          <p:nvPr/>
+        </p:nvSpPr>
+        <p:spPr>
+          <a:xfrm>
+            <a:off x="7507224" y="2798064"/>
+            <a:ext cx="786384" cy="438912"/>
+          </a:xfrm>
+          <a:prstGeom prst="rect">
+            <a:avLst/>
+          </a:prstGeom>
+          <a:noFill/>
+          <a:ln/>
+        </p:spPr>
+        <p:txBody>
+          <a:bodyPr wrap="square" lIns="0" tIns="0" rIns="0" bIns="0" rtlCol="0" anchor="ctr"/>
+          <a:lstStyle/>
+          <a:p>
+            <a:pPr algn="ctr" indent="0" marL="0">
+              <a:buNone/>
+            </a:pPr>
+            <a:r>
+              <a:rPr lang="en-US" sz="900" b="1" dirty="0">
+                <a:solidFill>
+                  <a:srgbClr val="C0392B"/>
+                </a:solidFill>
+                <a:latin typeface="Arial" pitchFamily="34" charset="0"/>
+                <a:ea typeface="Arial" pitchFamily="34" charset="-122"/>
+                <a:cs typeface="Arial" pitchFamily="34" charset="-120"/>
+              </a:rPr>
+              <a:t>▲0.5</a:t>
+            </a:r>
+            <a:endParaRPr lang="en-US" sz="900" dirty="0"/>
+          </a:p>
+        </p:txBody>
+      </p:sp>
+      <p:sp>
+        <p:nvSpPr>
+          <p:cNvPr id="55" name="Text 53"/>
+          <p:cNvSpPr/>
+          <p:nvPr/>
+        </p:nvSpPr>
+        <p:spPr>
+          <a:xfrm>
+            <a:off x="8293608" y="2798064"/>
+            <a:ext cx="786384" cy="438912"/>
+          </a:xfrm>
+          <a:prstGeom prst="rect">
+            <a:avLst/>
+          </a:prstGeom>
+          <a:noFill/>
+          <a:ln/>
+        </p:spPr>
+        <p:txBody>
+          <a:bodyPr wrap="square" lIns="0" tIns="0" rIns="0" bIns="0" rtlCol="0" anchor="ctr"/>
+          <a:lstStyle/>
+          <a:p>
+            <a:pPr algn="ctr" indent="0" marL="0">
+              <a:buNone/>
+            </a:pPr>
+            <a:r>
+              <a:rPr lang="en-US" sz="900" b="1" dirty="0">
+                <a:solidFill>
+                  <a:srgbClr val="C0392B"/>
+                </a:solidFill>
+                <a:latin typeface="Arial" pitchFamily="34" charset="0"/>
+                <a:ea typeface="Arial" pitchFamily="34" charset="-122"/>
+                <a:cs typeface="Arial" pitchFamily="34" charset="-120"/>
+              </a:rPr>
+              <a:t>▲5.5</a:t>
+            </a:r>
+            <a:endParaRPr lang="en-US" sz="900" dirty="0"/>
+          </a:p>
+        </p:txBody>
+      </p:sp>
+      <p:sp>
+        <p:nvSpPr>
+          <p:cNvPr id="56" name="Text 54"/>
+          <p:cNvSpPr/>
+          <p:nvPr/>
+        </p:nvSpPr>
+        <p:spPr>
+          <a:xfrm>
+            <a:off x="9079992" y="2798064"/>
+            <a:ext cx="786384" cy="438912"/>
+          </a:xfrm>
+          <a:prstGeom prst="rect">
+            <a:avLst/>
+          </a:prstGeom>
+          <a:noFill/>
+          <a:ln/>
+        </p:spPr>
+        <p:txBody>
+          <a:bodyPr wrap="square" lIns="0" tIns="0" rIns="0" bIns="0" rtlCol="0" anchor="ctr"/>
+          <a:lstStyle/>
+          <a:p>
+            <a:pPr algn="ctr" indent="0" marL="0">
+              <a:buNone/>
+            </a:pPr>
+            <a:r>
+              <a:rPr lang="en-US" sz="900" b="1" dirty="0">
+                <a:solidFill>
+                  <a:srgbClr val="C0392B"/>
+                </a:solidFill>
+                <a:latin typeface="Arial" pitchFamily="34" charset="0"/>
+                <a:ea typeface="Arial" pitchFamily="34" charset="-122"/>
+                <a:cs typeface="Arial" pitchFamily="34" charset="-120"/>
+              </a:rPr>
+              <a:t>▲0.5</a:t>
+            </a:r>
+            <a:endParaRPr lang="en-US" sz="900" dirty="0"/>
+          </a:p>
+        </p:txBody>
+      </p:sp>
+      <p:sp>
+        <p:nvSpPr>
+          <p:cNvPr id="57" name="Text 55"/>
+          <p:cNvSpPr/>
+          <p:nvPr/>
+        </p:nvSpPr>
+        <p:spPr>
+          <a:xfrm>
+            <a:off x="9866376" y="2798064"/>
+            <a:ext cx="786384" cy="438912"/>
+          </a:xfrm>
+          <a:prstGeom prst="rect">
+            <a:avLst/>
+          </a:prstGeom>
+          <a:noFill/>
+          <a:ln/>
+        </p:spPr>
+        <p:txBody>
+          <a:bodyPr wrap="square" lIns="0" tIns="0" rIns="0" bIns="0" rtlCol="0" anchor="ctr"/>
+          <a:lstStyle/>
+          <a:p>
+            <a:pPr algn="ctr" indent="0" marL="0">
+              <a:buNone/>
+            </a:pPr>
+            <a:r>
+              <a:rPr lang="en-US" sz="900" b="1" dirty="0">
+                <a:solidFill>
+                  <a:srgbClr val="C0392B"/>
+                </a:solidFill>
+                <a:latin typeface="Arial" pitchFamily="34" charset="0"/>
+                <a:ea typeface="Arial" pitchFamily="34" charset="-122"/>
+                <a:cs typeface="Arial" pitchFamily="34" charset="-120"/>
+              </a:rPr>
+              <a:t>▲0.5</a:t>
+            </a:r>
+            <a:endParaRPr lang="en-US" sz="900" dirty="0"/>
+          </a:p>
+        </p:txBody>
+      </p:sp>
+      <p:sp>
+        <p:nvSpPr>
+          <p:cNvPr id="58" name="Text 56"/>
+          <p:cNvSpPr/>
+          <p:nvPr/>
+        </p:nvSpPr>
+        <p:spPr>
+          <a:xfrm>
+            <a:off x="10652760" y="2798064"/>
+            <a:ext cx="786384" cy="438912"/>
+          </a:xfrm>
+          <a:prstGeom prst="rect">
+            <a:avLst/>
+          </a:prstGeom>
+          <a:noFill/>
+          <a:ln/>
+        </p:spPr>
+        <p:txBody>
+          <a:bodyPr wrap="square" lIns="0" tIns="0" rIns="0" bIns="0" rtlCol="0" anchor="ctr"/>
+          <a:lstStyle/>
+          <a:p>
+            <a:pPr algn="ctr" indent="0" marL="0">
+              <a:buNone/>
+            </a:pPr>
+            <a:r>
+              <a:rPr lang="en-US" sz="900" b="1" dirty="0">
+                <a:solidFill>
+                  <a:srgbClr val="C0392B"/>
+                </a:solidFill>
+                <a:latin typeface="Arial" pitchFamily="34" charset="0"/>
+                <a:ea typeface="Arial" pitchFamily="34" charset="-122"/>
+                <a:cs typeface="Arial" pitchFamily="34" charset="-120"/>
+              </a:rPr>
+              <a:t>▲0.5</a:t>
+            </a:r>
+            <a:endParaRPr lang="en-US" sz="900" dirty="0"/>
+          </a:p>
+        </p:txBody>
+      </p:sp>
+      <p:sp>
+        <p:nvSpPr>
+          <p:cNvPr id="59" name="Text 57"/>
+          <p:cNvSpPr/>
+          <p:nvPr/>
+        </p:nvSpPr>
+        <p:spPr>
+          <a:xfrm>
+            <a:off x="11439144" y="2798064"/>
+            <a:ext cx="786384" cy="438912"/>
+          </a:xfrm>
+          <a:prstGeom prst="rect">
+            <a:avLst/>
+          </a:prstGeom>
+          <a:noFill/>
+          <a:ln/>
+        </p:spPr>
+        <p:txBody>
+          <a:bodyPr wrap="square" lIns="0" tIns="0" rIns="0" bIns="0" rtlCol="0" anchor="ctr"/>
+          <a:lstStyle/>
+          <a:p>
+            <a:pPr algn="ctr" indent="0" marL="0">
+              <a:buNone/>
+            </a:pPr>
+            <a:r>
+              <a:rPr lang="en-US" sz="900" b="1" dirty="0">
+                <a:solidFill>
+                  <a:srgbClr val="C0392B"/>
+                </a:solidFill>
+                <a:latin typeface="Arial" pitchFamily="34" charset="0"/>
+                <a:ea typeface="Arial" pitchFamily="34" charset="-122"/>
+                <a:cs typeface="Arial" pitchFamily="34" charset="-120"/>
+              </a:rPr>
+              <a:t>▲0.5</a:t>
+            </a:r>
+            <a:endParaRPr lang="en-US" sz="900" dirty="0"/>
+          </a:p>
+        </p:txBody>
+      </p:sp>
+      <p:sp>
+        <p:nvSpPr>
+          <p:cNvPr id="60" name="Shape 58"/>
+          <p:cNvSpPr/>
+          <p:nvPr/>
+        </p:nvSpPr>
+        <p:spPr>
+          <a:xfrm>
+            <a:off x="594360" y="3236976"/>
+            <a:ext cx="11631168" cy="438912"/>
+          </a:xfrm>
+          <a:prstGeom prst="rect">
+            <a:avLst/>
+          </a:prstGeom>
+          <a:solidFill>
+            <a:srgbClr val="FBF9F7"/>
+          </a:solidFill>
+          <a:ln w="6350">
+            <a:solidFill>
+              <a:srgbClr val="DED5CE"/>
+            </a:solidFill>
+            <a:prstDash val="solid"/>
+          </a:ln>
+        </p:spPr>
+      </p:sp>
+      <p:sp>
+        <p:nvSpPr>
+          <p:cNvPr id="61" name="Text 59"/>
+          <p:cNvSpPr/>
+          <p:nvPr/>
+        </p:nvSpPr>
+        <p:spPr>
+          <a:xfrm>
+            <a:off x="731520" y="3236976"/>
+            <a:ext cx="2194560" cy="438912"/>
+          </a:xfrm>
+          <a:prstGeom prst="rect">
+            <a:avLst/>
+          </a:prstGeom>
+          <a:noFill/>
+          <a:ln/>
+        </p:spPr>
+        <p:txBody>
+          <a:bodyPr wrap="square" lIns="0" tIns="0" rIns="0" bIns="0" rtlCol="0" anchor="ctr"/>
+          <a:lstStyle/>
+          <a:p>
+            <a:pPr indent="0" marL="0">
+              <a:buNone/>
+            </a:pPr>
+            <a:r>
+              <a:rPr lang="en-US" sz="950" dirty="0">
+                <a:solidFill>
+                  <a:srgbClr val="2B2B2B"/>
+                </a:solidFill>
+                <a:latin typeface="Arial" pitchFamily="34" charset="0"/>
+                <a:ea typeface="Arial" pitchFamily="34" charset="-122"/>
+                <a:cs typeface="Arial" pitchFamily="34" charset="-120"/>
+              </a:rPr>
+              <a:t>財務・投資収支 計</a:t>
+            </a:r>
+            <a:endParaRPr lang="en-US" sz="950" dirty="0"/>
+          </a:p>
+        </p:txBody>
+      </p:sp>
+      <p:sp>
+        <p:nvSpPr>
+          <p:cNvPr id="62" name="Text 60"/>
+          <p:cNvSpPr/>
+          <p:nvPr/>
+        </p:nvSpPr>
+        <p:spPr>
+          <a:xfrm>
+            <a:off x="2788920" y="3236976"/>
+            <a:ext cx="786384" cy="438912"/>
+          </a:xfrm>
+          <a:prstGeom prst="rect">
+            <a:avLst/>
+          </a:prstGeom>
+          <a:noFill/>
+          <a:ln/>
+        </p:spPr>
+        <p:txBody>
+          <a:bodyPr wrap="square" lIns="0" tIns="0" rIns="0" bIns="0" rtlCol="0" anchor="ctr"/>
+          <a:lstStyle/>
+          <a:p>
+            <a:pPr algn="ctr" indent="0" marL="0">
+              <a:buNone/>
+            </a:pPr>
+            <a:r>
+              <a:rPr lang="en-US" sz="900" dirty="0">
+                <a:solidFill>
+                  <a:srgbClr val="C0392B"/>
+                </a:solidFill>
+                <a:latin typeface="Arial" pitchFamily="34" charset="0"/>
+                <a:ea typeface="Arial" pitchFamily="34" charset="-122"/>
+                <a:cs typeface="Arial" pitchFamily="34" charset="-120"/>
+              </a:rPr>
+              <a:t>▲202.7</a:t>
+            </a:r>
+            <a:endParaRPr lang="en-US" sz="900" dirty="0"/>
+          </a:p>
+        </p:txBody>
+      </p:sp>
+      <p:sp>
+        <p:nvSpPr>
+          <p:cNvPr id="63" name="Text 61"/>
+          <p:cNvSpPr/>
+          <p:nvPr/>
+        </p:nvSpPr>
+        <p:spPr>
+          <a:xfrm>
+            <a:off x="3575304" y="3236976"/>
+            <a:ext cx="786384" cy="438912"/>
+          </a:xfrm>
+          <a:prstGeom prst="rect">
+            <a:avLst/>
+          </a:prstGeom>
+          <a:noFill/>
+          <a:ln/>
+        </p:spPr>
+        <p:txBody>
+          <a:bodyPr wrap="square" lIns="0" tIns="0" rIns="0" bIns="0" rtlCol="0" anchor="ctr"/>
+          <a:lstStyle/>
+          <a:p>
+            <a:pPr algn="ctr" indent="0" marL="0">
+              <a:buNone/>
+            </a:pPr>
+            <a:r>
+              <a:rPr lang="en-US" sz="900" dirty="0">
+                <a:solidFill>
+                  <a:srgbClr val="C0392B"/>
+                </a:solidFill>
+                <a:latin typeface="Arial" pitchFamily="34" charset="0"/>
+                <a:ea typeface="Arial" pitchFamily="34" charset="-122"/>
+                <a:cs typeface="Arial" pitchFamily="34" charset="-120"/>
+              </a:rPr>
+              <a:t>▲2.7</a:t>
+            </a:r>
+            <a:endParaRPr lang="en-US" sz="900" dirty="0"/>
+          </a:p>
+        </p:txBody>
+      </p:sp>
+      <p:sp>
+        <p:nvSpPr>
+          <p:cNvPr id="64" name="Text 62"/>
+          <p:cNvSpPr/>
+          <p:nvPr/>
+        </p:nvSpPr>
+        <p:spPr>
+          <a:xfrm>
+            <a:off x="4361688" y="3236976"/>
+            <a:ext cx="786384" cy="438912"/>
+          </a:xfrm>
+          <a:prstGeom prst="rect">
+            <a:avLst/>
+          </a:prstGeom>
+          <a:noFill/>
+          <a:ln/>
+        </p:spPr>
+        <p:txBody>
+          <a:bodyPr wrap="square" lIns="0" tIns="0" rIns="0" bIns="0" rtlCol="0" anchor="ctr"/>
+          <a:lstStyle/>
+          <a:p>
+            <a:pPr algn="ctr" indent="0" marL="0">
+              <a:buNone/>
+            </a:pPr>
+            <a:r>
+              <a:rPr lang="en-US" sz="900" dirty="0">
+                <a:solidFill>
+                  <a:srgbClr val="C0392B"/>
+                </a:solidFill>
+                <a:latin typeface="Arial" pitchFamily="34" charset="0"/>
+                <a:ea typeface="Arial" pitchFamily="34" charset="-122"/>
+                <a:cs typeface="Arial" pitchFamily="34" charset="-120"/>
+              </a:rPr>
+              <a:t>▲2.7</a:t>
+            </a:r>
+            <a:endParaRPr lang="en-US" sz="900" dirty="0"/>
+          </a:p>
+        </p:txBody>
+      </p:sp>
+      <p:sp>
+        <p:nvSpPr>
+          <p:cNvPr id="65" name="Text 63"/>
+          <p:cNvSpPr/>
+          <p:nvPr/>
+        </p:nvSpPr>
+        <p:spPr>
+          <a:xfrm>
+            <a:off x="5148072" y="3236976"/>
+            <a:ext cx="786384" cy="438912"/>
+          </a:xfrm>
+          <a:prstGeom prst="rect">
+            <a:avLst/>
+          </a:prstGeom>
+          <a:noFill/>
+          <a:ln/>
+        </p:spPr>
+        <p:txBody>
+          <a:bodyPr wrap="square" lIns="0" tIns="0" rIns="0" bIns="0" rtlCol="0" anchor="ctr"/>
+          <a:lstStyle/>
+          <a:p>
+            <a:pPr algn="ctr" indent="0" marL="0">
+              <a:buNone/>
+            </a:pPr>
+            <a:r>
+              <a:rPr lang="en-US" sz="900" dirty="0">
+                <a:solidFill>
+                  <a:srgbClr val="C0392B"/>
+                </a:solidFill>
+                <a:latin typeface="Arial" pitchFamily="34" charset="0"/>
+                <a:ea typeface="Arial" pitchFamily="34" charset="-122"/>
+                <a:cs typeface="Arial" pitchFamily="34" charset="-120"/>
+              </a:rPr>
+              <a:t>▲2.7</a:t>
+            </a:r>
+            <a:endParaRPr lang="en-US" sz="900" dirty="0"/>
+          </a:p>
+        </p:txBody>
+      </p:sp>
+      <p:sp>
+        <p:nvSpPr>
+          <p:cNvPr id="66" name="Text 64"/>
+          <p:cNvSpPr/>
+          <p:nvPr/>
+        </p:nvSpPr>
+        <p:spPr>
+          <a:xfrm>
+            <a:off x="5934456" y="3236976"/>
+            <a:ext cx="786384" cy="438912"/>
+          </a:xfrm>
+          <a:prstGeom prst="rect">
+            <a:avLst/>
+          </a:prstGeom>
+          <a:noFill/>
+          <a:ln/>
+        </p:spPr>
+        <p:txBody>
+          <a:bodyPr wrap="square" lIns="0" tIns="0" rIns="0" bIns="0" rtlCol="0" anchor="ctr"/>
+          <a:lstStyle/>
+          <a:p>
+            <a:pPr algn="ctr" indent="0" marL="0">
+              <a:buNone/>
+            </a:pPr>
+            <a:r>
+              <a:rPr lang="en-US" sz="900" dirty="0">
+                <a:solidFill>
+                  <a:srgbClr val="C0392B"/>
+                </a:solidFill>
+                <a:latin typeface="Arial" pitchFamily="34" charset="0"/>
+                <a:ea typeface="Arial" pitchFamily="34" charset="-122"/>
+                <a:cs typeface="Arial" pitchFamily="34" charset="-120"/>
+              </a:rPr>
+              <a:t>▲2.7</a:t>
+            </a:r>
+            <a:endParaRPr lang="en-US" sz="900" dirty="0"/>
+          </a:p>
+        </p:txBody>
+      </p:sp>
+      <p:sp>
+        <p:nvSpPr>
+          <p:cNvPr id="67" name="Text 65"/>
+          <p:cNvSpPr/>
+          <p:nvPr/>
+        </p:nvSpPr>
+        <p:spPr>
+          <a:xfrm>
+            <a:off x="6720840" y="3236976"/>
+            <a:ext cx="786384" cy="438912"/>
+          </a:xfrm>
+          <a:prstGeom prst="rect">
+            <a:avLst/>
+          </a:prstGeom>
+          <a:noFill/>
+          <a:ln/>
+        </p:spPr>
+        <p:txBody>
+          <a:bodyPr wrap="square" lIns="0" tIns="0" rIns="0" bIns="0" rtlCol="0" anchor="ctr"/>
+          <a:lstStyle/>
+          <a:p>
+            <a:pPr algn="ctr" indent="0" marL="0">
+              <a:buNone/>
+            </a:pPr>
+            <a:r>
+              <a:rPr lang="en-US" sz="900" dirty="0">
+                <a:solidFill>
+                  <a:srgbClr val="2B2B2B"/>
+                </a:solidFill>
+                <a:latin typeface="Arial" pitchFamily="34" charset="0"/>
+                <a:ea typeface="Arial" pitchFamily="34" charset="-122"/>
+                <a:cs typeface="Arial" pitchFamily="34" charset="-120"/>
+              </a:rPr>
+              <a:t>17.3</a:t>
+            </a:r>
+            <a:endParaRPr lang="en-US" sz="900" dirty="0"/>
+          </a:p>
+        </p:txBody>
+      </p:sp>
+      <p:sp>
+        <p:nvSpPr>
+          <p:cNvPr id="68" name="Text 66"/>
+          <p:cNvSpPr/>
+          <p:nvPr/>
+        </p:nvSpPr>
+        <p:spPr>
+          <a:xfrm>
+            <a:off x="7507224" y="3236976"/>
+            <a:ext cx="786384" cy="438912"/>
+          </a:xfrm>
+          <a:prstGeom prst="rect">
+            <a:avLst/>
+          </a:prstGeom>
+          <a:noFill/>
+          <a:ln/>
+        </p:spPr>
+        <p:txBody>
+          <a:bodyPr wrap="square" lIns="0" tIns="0" rIns="0" bIns="0" rtlCol="0" anchor="ctr"/>
+          <a:lstStyle/>
+          <a:p>
+            <a:pPr algn="ctr" indent="0" marL="0">
+              <a:buNone/>
+            </a:pPr>
+            <a:r>
+              <a:rPr lang="en-US" sz="900" dirty="0">
+                <a:solidFill>
+                  <a:srgbClr val="C0392B"/>
+                </a:solidFill>
+                <a:latin typeface="Arial" pitchFamily="34" charset="0"/>
+                <a:ea typeface="Arial" pitchFamily="34" charset="-122"/>
+                <a:cs typeface="Arial" pitchFamily="34" charset="-120"/>
+              </a:rPr>
+              <a:t>▲2.7</a:t>
+            </a:r>
+            <a:endParaRPr lang="en-US" sz="900" dirty="0"/>
+          </a:p>
+        </p:txBody>
+      </p:sp>
+      <p:sp>
+        <p:nvSpPr>
+          <p:cNvPr id="69" name="Text 67"/>
+          <p:cNvSpPr/>
+          <p:nvPr/>
+        </p:nvSpPr>
+        <p:spPr>
+          <a:xfrm>
+            <a:off x="8293608" y="3236976"/>
+            <a:ext cx="786384" cy="438912"/>
+          </a:xfrm>
+          <a:prstGeom prst="rect">
+            <a:avLst/>
+          </a:prstGeom>
+          <a:noFill/>
+          <a:ln/>
+        </p:spPr>
+        <p:txBody>
+          <a:bodyPr wrap="square" lIns="0" tIns="0" rIns="0" bIns="0" rtlCol="0" anchor="ctr"/>
+          <a:lstStyle/>
+          <a:p>
+            <a:pPr algn="ctr" indent="0" marL="0">
+              <a:buNone/>
+            </a:pPr>
+            <a:r>
+              <a:rPr lang="en-US" sz="900" dirty="0">
+                <a:solidFill>
+                  <a:srgbClr val="C0392B"/>
+                </a:solidFill>
+                <a:latin typeface="Arial" pitchFamily="34" charset="0"/>
+                <a:ea typeface="Arial" pitchFamily="34" charset="-122"/>
+                <a:cs typeface="Arial" pitchFamily="34" charset="-120"/>
+              </a:rPr>
+              <a:t>▲2.7</a:t>
+            </a:r>
+            <a:endParaRPr lang="en-US" sz="900" dirty="0"/>
+          </a:p>
+        </p:txBody>
+      </p:sp>
+      <p:sp>
+        <p:nvSpPr>
+          <p:cNvPr id="70" name="Text 68"/>
+          <p:cNvSpPr/>
+          <p:nvPr/>
+        </p:nvSpPr>
+        <p:spPr>
+          <a:xfrm>
+            <a:off x="9079992" y="3236976"/>
+            <a:ext cx="786384" cy="438912"/>
+          </a:xfrm>
+          <a:prstGeom prst="rect">
+            <a:avLst/>
+          </a:prstGeom>
+          <a:noFill/>
+          <a:ln/>
+        </p:spPr>
+        <p:txBody>
+          <a:bodyPr wrap="square" lIns="0" tIns="0" rIns="0" bIns="0" rtlCol="0" anchor="ctr"/>
+          <a:lstStyle/>
+          <a:p>
+            <a:pPr algn="ctr" indent="0" marL="0">
+              <a:buNone/>
+            </a:pPr>
+            <a:r>
+              <a:rPr lang="en-US" sz="900" dirty="0">
+                <a:solidFill>
+                  <a:srgbClr val="C0392B"/>
+                </a:solidFill>
+                <a:latin typeface="Arial" pitchFamily="34" charset="0"/>
+                <a:ea typeface="Arial" pitchFamily="34" charset="-122"/>
+                <a:cs typeface="Arial" pitchFamily="34" charset="-120"/>
+              </a:rPr>
+              <a:t>▲2.7</a:t>
+            </a:r>
+            <a:endParaRPr lang="en-US" sz="900" dirty="0"/>
+          </a:p>
+        </p:txBody>
+      </p:sp>
+      <p:sp>
+        <p:nvSpPr>
+          <p:cNvPr id="71" name="Text 69"/>
+          <p:cNvSpPr/>
+          <p:nvPr/>
+        </p:nvSpPr>
+        <p:spPr>
+          <a:xfrm>
+            <a:off x="9866376" y="3236976"/>
+            <a:ext cx="786384" cy="438912"/>
+          </a:xfrm>
+          <a:prstGeom prst="rect">
+            <a:avLst/>
+          </a:prstGeom>
+          <a:noFill/>
+          <a:ln/>
+        </p:spPr>
+        <p:txBody>
+          <a:bodyPr wrap="square" lIns="0" tIns="0" rIns="0" bIns="0" rtlCol="0" anchor="ctr"/>
+          <a:lstStyle/>
+          <a:p>
+            <a:pPr algn="ctr" indent="0" marL="0">
+              <a:buNone/>
+            </a:pPr>
+            <a:r>
+              <a:rPr lang="en-US" sz="900" dirty="0">
+                <a:solidFill>
+                  <a:srgbClr val="C0392B"/>
+                </a:solidFill>
+                <a:latin typeface="Arial" pitchFamily="34" charset="0"/>
+                <a:ea typeface="Arial" pitchFamily="34" charset="-122"/>
+                <a:cs typeface="Arial" pitchFamily="34" charset="-120"/>
+              </a:rPr>
+              <a:t>▲2.7</a:t>
+            </a:r>
+            <a:endParaRPr lang="en-US" sz="900" dirty="0"/>
+          </a:p>
+        </p:txBody>
+      </p:sp>
+      <p:sp>
+        <p:nvSpPr>
+          <p:cNvPr id="72" name="Text 70"/>
+          <p:cNvSpPr/>
+          <p:nvPr/>
+        </p:nvSpPr>
+        <p:spPr>
+          <a:xfrm>
+            <a:off x="10652760" y="3236976"/>
+            <a:ext cx="786384" cy="438912"/>
+          </a:xfrm>
+          <a:prstGeom prst="rect">
+            <a:avLst/>
+          </a:prstGeom>
+          <a:noFill/>
+          <a:ln/>
+        </p:spPr>
+        <p:txBody>
+          <a:bodyPr wrap="square" lIns="0" tIns="0" rIns="0" bIns="0" rtlCol="0" anchor="ctr"/>
+          <a:lstStyle/>
+          <a:p>
+            <a:pPr algn="ctr" indent="0" marL="0">
+              <a:buNone/>
+            </a:pPr>
+            <a:r>
+              <a:rPr lang="en-US" sz="900" dirty="0">
+                <a:solidFill>
+                  <a:srgbClr val="C0392B"/>
+                </a:solidFill>
+                <a:latin typeface="Arial" pitchFamily="34" charset="0"/>
+                <a:ea typeface="Arial" pitchFamily="34" charset="-122"/>
+                <a:cs typeface="Arial" pitchFamily="34" charset="-120"/>
+              </a:rPr>
+              <a:t>▲2.7</a:t>
+            </a:r>
+            <a:endParaRPr lang="en-US" sz="900" dirty="0"/>
+          </a:p>
+        </p:txBody>
+      </p:sp>
+      <p:sp>
+        <p:nvSpPr>
+          <p:cNvPr id="73" name="Text 71"/>
+          <p:cNvSpPr/>
+          <p:nvPr/>
+        </p:nvSpPr>
+        <p:spPr>
+          <a:xfrm>
+            <a:off x="11439144" y="3236976"/>
+            <a:ext cx="786384" cy="438912"/>
+          </a:xfrm>
+          <a:prstGeom prst="rect">
+            <a:avLst/>
+          </a:prstGeom>
+          <a:noFill/>
+          <a:ln/>
+        </p:spPr>
+        <p:txBody>
+          <a:bodyPr wrap="square" lIns="0" tIns="0" rIns="0" bIns="0" rtlCol="0" anchor="ctr"/>
+          <a:lstStyle/>
+          <a:p>
+            <a:pPr algn="ctr" indent="0" marL="0">
+              <a:buNone/>
+            </a:pPr>
+            <a:r>
+              <a:rPr lang="en-US" sz="900" dirty="0">
+                <a:solidFill>
+                  <a:srgbClr val="C0392B"/>
+                </a:solidFill>
+                <a:latin typeface="Arial" pitchFamily="34" charset="0"/>
+                <a:ea typeface="Arial" pitchFamily="34" charset="-122"/>
+                <a:cs typeface="Arial" pitchFamily="34" charset="-120"/>
+              </a:rPr>
+              <a:t>▲2.7</a:t>
+            </a:r>
+            <a:endParaRPr lang="en-US" sz="900" dirty="0"/>
+          </a:p>
+        </p:txBody>
+      </p:sp>
+      <p:sp>
+        <p:nvSpPr>
+          <p:cNvPr id="74" name="Shape 72"/>
+          <p:cNvSpPr/>
+          <p:nvPr/>
+        </p:nvSpPr>
+        <p:spPr>
+          <a:xfrm>
+            <a:off x="594360" y="3675888"/>
+            <a:ext cx="11631168" cy="438912"/>
+          </a:xfrm>
+          <a:prstGeom prst="rect">
+            <a:avLst/>
+          </a:prstGeom>
+          <a:solidFill>
+            <a:srgbClr val="F3EDE9"/>
+          </a:solidFill>
+          <a:ln w="6350">
+            <a:solidFill>
+              <a:srgbClr val="DED5CE"/>
+            </a:solidFill>
+            <a:prstDash val="solid"/>
+          </a:ln>
+        </p:spPr>
+      </p:sp>
+      <p:sp>
+        <p:nvSpPr>
+          <p:cNvPr id="75" name="Text 73"/>
+          <p:cNvSpPr/>
+          <p:nvPr/>
+        </p:nvSpPr>
+        <p:spPr>
+          <a:xfrm>
+            <a:off x="731520" y="3675888"/>
+            <a:ext cx="2194560" cy="438912"/>
+          </a:xfrm>
+          <a:prstGeom prst="rect">
+            <a:avLst/>
+          </a:prstGeom>
+          <a:noFill/>
+          <a:ln/>
+        </p:spPr>
+        <p:txBody>
+          <a:bodyPr wrap="square" lIns="0" tIns="0" rIns="0" bIns="0" rtlCol="0" anchor="ctr"/>
+          <a:lstStyle/>
+          <a:p>
+            <a:pPr indent="0" marL="0">
+              <a:buNone/>
+            </a:pPr>
+            <a:r>
+              <a:rPr lang="en-US" sz="950" b="1" dirty="0">
+                <a:solidFill>
+                  <a:srgbClr val="2B2B2B"/>
+                </a:solidFill>
+                <a:latin typeface="Arial" pitchFamily="34" charset="0"/>
+                <a:ea typeface="Arial" pitchFamily="34" charset="-122"/>
+                <a:cs typeface="Arial" pitchFamily="34" charset="-120"/>
+              </a:rPr>
+              <a:t>当月収支</a:t>
+            </a:r>
+            <a:endParaRPr lang="en-US" sz="950" dirty="0"/>
+          </a:p>
+        </p:txBody>
+      </p:sp>
+      <p:sp>
+        <p:nvSpPr>
+          <p:cNvPr id="76" name="Text 74"/>
+          <p:cNvSpPr/>
+          <p:nvPr/>
+        </p:nvSpPr>
+        <p:spPr>
+          <a:xfrm>
+            <a:off x="2788920" y="3675888"/>
+            <a:ext cx="786384" cy="438912"/>
+          </a:xfrm>
+          <a:prstGeom prst="rect">
+            <a:avLst/>
+          </a:prstGeom>
+          <a:noFill/>
+          <a:ln/>
+        </p:spPr>
+        <p:txBody>
+          <a:bodyPr wrap="square" lIns="0" tIns="0" rIns="0" bIns="0" rtlCol="0" anchor="ctr"/>
+          <a:lstStyle/>
+          <a:p>
+            <a:pPr algn="ctr" indent="0" marL="0">
+              <a:buNone/>
+            </a:pPr>
+            <a:r>
+              <a:rPr lang="en-US" sz="900" b="1" dirty="0">
+                <a:solidFill>
+                  <a:srgbClr val="6D2E46"/>
+                </a:solidFill>
+                <a:latin typeface="Arial" pitchFamily="34" charset="0"/>
+                <a:ea typeface="Arial" pitchFamily="34" charset="-122"/>
+                <a:cs typeface="Arial" pitchFamily="34" charset="-120"/>
+              </a:rPr>
+              <a:t>16.8</a:t>
+            </a:r>
+            <a:endParaRPr lang="en-US" sz="900" dirty="0"/>
+          </a:p>
+        </p:txBody>
+      </p:sp>
+      <p:sp>
+        <p:nvSpPr>
+          <p:cNvPr id="77" name="Text 75"/>
+          <p:cNvSpPr/>
+          <p:nvPr/>
+        </p:nvSpPr>
+        <p:spPr>
+          <a:xfrm>
+            <a:off x="3575304" y="3675888"/>
+            <a:ext cx="786384" cy="438912"/>
+          </a:xfrm>
+          <a:prstGeom prst="rect">
+            <a:avLst/>
+          </a:prstGeom>
+          <a:noFill/>
+          <a:ln/>
+        </p:spPr>
+        <p:txBody>
+          <a:bodyPr wrap="square" lIns="0" tIns="0" rIns="0" bIns="0" rtlCol="0" anchor="ctr"/>
+          <a:lstStyle/>
+          <a:p>
+            <a:pPr algn="ctr" indent="0" marL="0">
+              <a:buNone/>
+            </a:pPr>
+            <a:r>
+              <a:rPr lang="en-US" sz="900" b="1" dirty="0">
+                <a:solidFill>
+                  <a:srgbClr val="C0392B"/>
+                </a:solidFill>
+                <a:latin typeface="Arial" pitchFamily="34" charset="0"/>
+                <a:ea typeface="Arial" pitchFamily="34" charset="-122"/>
+                <a:cs typeface="Arial" pitchFamily="34" charset="-120"/>
+              </a:rPr>
+              <a:t>▲33.7</a:t>
+            </a:r>
+            <a:endParaRPr lang="en-US" sz="900" dirty="0"/>
+          </a:p>
+        </p:txBody>
+      </p:sp>
+      <p:sp>
+        <p:nvSpPr>
+          <p:cNvPr id="78" name="Text 76"/>
+          <p:cNvSpPr/>
+          <p:nvPr/>
+        </p:nvSpPr>
+        <p:spPr>
+          <a:xfrm>
+            <a:off x="4361688" y="3675888"/>
+            <a:ext cx="786384" cy="438912"/>
+          </a:xfrm>
+          <a:prstGeom prst="rect">
+            <a:avLst/>
+          </a:prstGeom>
+          <a:noFill/>
+          <a:ln/>
+        </p:spPr>
+        <p:txBody>
+          <a:bodyPr wrap="square" lIns="0" tIns="0" rIns="0" bIns="0" rtlCol="0" anchor="ctr"/>
+          <a:lstStyle/>
+          <a:p>
+            <a:pPr algn="ctr" indent="0" marL="0">
+              <a:buNone/>
+            </a:pPr>
+            <a:r>
+              <a:rPr lang="en-US" sz="900" b="1" dirty="0">
+                <a:solidFill>
+                  <a:srgbClr val="C0392B"/>
+                </a:solidFill>
+                <a:latin typeface="Arial" pitchFamily="34" charset="0"/>
+                <a:ea typeface="Arial" pitchFamily="34" charset="-122"/>
+                <a:cs typeface="Arial" pitchFamily="34" charset="-120"/>
+              </a:rPr>
+              <a:t>▲3.2</a:t>
+            </a:r>
+            <a:endParaRPr lang="en-US" sz="900" dirty="0"/>
+          </a:p>
+        </p:txBody>
+      </p:sp>
+      <p:sp>
+        <p:nvSpPr>
+          <p:cNvPr id="79" name="Text 77"/>
+          <p:cNvSpPr/>
+          <p:nvPr/>
+        </p:nvSpPr>
+        <p:spPr>
+          <a:xfrm>
+            <a:off x="5148072" y="3675888"/>
+            <a:ext cx="786384" cy="438912"/>
+          </a:xfrm>
+          <a:prstGeom prst="rect">
+            <a:avLst/>
+          </a:prstGeom>
+          <a:noFill/>
+          <a:ln/>
+        </p:spPr>
+        <p:txBody>
+          <a:bodyPr wrap="square" lIns="0" tIns="0" rIns="0" bIns="0" rtlCol="0" anchor="ctr"/>
+          <a:lstStyle/>
+          <a:p>
+            <a:pPr algn="ctr" indent="0" marL="0">
+              <a:buNone/>
+            </a:pPr>
+            <a:r>
+              <a:rPr lang="en-US" sz="900" b="1" dirty="0">
+                <a:solidFill>
+                  <a:srgbClr val="C0392B"/>
+                </a:solidFill>
+                <a:latin typeface="Arial" pitchFamily="34" charset="0"/>
+                <a:ea typeface="Arial" pitchFamily="34" charset="-122"/>
+                <a:cs typeface="Arial" pitchFamily="34" charset="-120"/>
+              </a:rPr>
+              <a:t>▲3.2</a:t>
+            </a:r>
+            <a:endParaRPr lang="en-US" sz="900" dirty="0"/>
+          </a:p>
+        </p:txBody>
+      </p:sp>
+      <p:sp>
+        <p:nvSpPr>
+          <p:cNvPr id="80" name="Text 78"/>
+          <p:cNvSpPr/>
+          <p:nvPr/>
+        </p:nvSpPr>
+        <p:spPr>
+          <a:xfrm>
+            <a:off x="5934456" y="3675888"/>
+            <a:ext cx="786384" cy="438912"/>
+          </a:xfrm>
+          <a:prstGeom prst="rect">
+            <a:avLst/>
+          </a:prstGeom>
+          <a:noFill/>
+          <a:ln/>
+        </p:spPr>
+        <p:txBody>
+          <a:bodyPr wrap="square" lIns="0" tIns="0" rIns="0" bIns="0" rtlCol="0" anchor="ctr"/>
+          <a:lstStyle/>
+          <a:p>
+            <a:pPr algn="ctr" indent="0" marL="0">
+              <a:buNone/>
+            </a:pPr>
+            <a:r>
+              <a:rPr lang="en-US" sz="900" b="1" dirty="0">
+                <a:solidFill>
+                  <a:srgbClr val="C0392B"/>
+                </a:solidFill>
+                <a:latin typeface="Arial" pitchFamily="34" charset="0"/>
+                <a:ea typeface="Arial" pitchFamily="34" charset="-122"/>
+                <a:cs typeface="Arial" pitchFamily="34" charset="-120"/>
+              </a:rPr>
+              <a:t>▲3.2</a:t>
+            </a:r>
+            <a:endParaRPr lang="en-US" sz="900" dirty="0"/>
+          </a:p>
+        </p:txBody>
+      </p:sp>
+      <p:sp>
+        <p:nvSpPr>
+          <p:cNvPr id="81" name="Text 79"/>
+          <p:cNvSpPr/>
+          <p:nvPr/>
+        </p:nvSpPr>
+        <p:spPr>
+          <a:xfrm>
+            <a:off x="6720840" y="3675888"/>
+            <a:ext cx="786384" cy="438912"/>
+          </a:xfrm>
+          <a:prstGeom prst="rect">
+            <a:avLst/>
+          </a:prstGeom>
+          <a:noFill/>
+          <a:ln/>
+        </p:spPr>
+        <p:txBody>
+          <a:bodyPr wrap="square" lIns="0" tIns="0" rIns="0" bIns="0" rtlCol="0" anchor="ctr"/>
+          <a:lstStyle/>
+          <a:p>
+            <a:pPr algn="ctr" indent="0" marL="0">
+              <a:buNone/>
+            </a:pPr>
+            <a:r>
+              <a:rPr lang="en-US" sz="900" b="1" dirty="0">
+                <a:solidFill>
+                  <a:srgbClr val="6D2E46"/>
+                </a:solidFill>
+                <a:latin typeface="Arial" pitchFamily="34" charset="0"/>
+                <a:ea typeface="Arial" pitchFamily="34" charset="-122"/>
+                <a:cs typeface="Arial" pitchFamily="34" charset="-120"/>
+              </a:rPr>
+              <a:t>38.8</a:t>
+            </a:r>
+            <a:endParaRPr lang="en-US" sz="900" dirty="0"/>
+          </a:p>
+        </p:txBody>
+      </p:sp>
+      <p:sp>
+        <p:nvSpPr>
+          <p:cNvPr id="82" name="Text 80"/>
+          <p:cNvSpPr/>
+          <p:nvPr/>
+        </p:nvSpPr>
+        <p:spPr>
+          <a:xfrm>
+            <a:off x="7507224" y="3675888"/>
+            <a:ext cx="786384" cy="438912"/>
+          </a:xfrm>
+          <a:prstGeom prst="rect">
+            <a:avLst/>
+          </a:prstGeom>
+          <a:noFill/>
+          <a:ln/>
+        </p:spPr>
+        <p:txBody>
+          <a:bodyPr wrap="square" lIns="0" tIns="0" rIns="0" bIns="0" rtlCol="0" anchor="ctr"/>
+          <a:lstStyle/>
+          <a:p>
+            <a:pPr algn="ctr" indent="0" marL="0">
+              <a:buNone/>
+            </a:pPr>
+            <a:r>
+              <a:rPr lang="en-US" sz="900" b="1" dirty="0">
+                <a:solidFill>
+                  <a:srgbClr val="C0392B"/>
+                </a:solidFill>
+                <a:latin typeface="Arial" pitchFamily="34" charset="0"/>
+                <a:ea typeface="Arial" pitchFamily="34" charset="-122"/>
+                <a:cs typeface="Arial" pitchFamily="34" charset="-120"/>
+              </a:rPr>
+              <a:t>▲3.2</a:t>
+            </a:r>
+            <a:endParaRPr lang="en-US" sz="900" dirty="0"/>
+          </a:p>
+        </p:txBody>
+      </p:sp>
+      <p:sp>
+        <p:nvSpPr>
+          <p:cNvPr id="83" name="Text 81"/>
+          <p:cNvSpPr/>
+          <p:nvPr/>
+        </p:nvSpPr>
+        <p:spPr>
+          <a:xfrm>
+            <a:off x="8293608" y="3675888"/>
+            <a:ext cx="786384" cy="438912"/>
+          </a:xfrm>
+          <a:prstGeom prst="rect">
+            <a:avLst/>
+          </a:prstGeom>
+          <a:noFill/>
+          <a:ln/>
+        </p:spPr>
+        <p:txBody>
+          <a:bodyPr wrap="square" lIns="0" tIns="0" rIns="0" bIns="0" rtlCol="0" anchor="ctr"/>
+          <a:lstStyle/>
+          <a:p>
+            <a:pPr algn="ctr" indent="0" marL="0">
+              <a:buNone/>
+            </a:pPr>
+            <a:r>
+              <a:rPr lang="en-US" sz="900" b="1" dirty="0">
+                <a:solidFill>
+                  <a:srgbClr val="C0392B"/>
+                </a:solidFill>
+                <a:latin typeface="Arial" pitchFamily="34" charset="0"/>
+                <a:ea typeface="Arial" pitchFamily="34" charset="-122"/>
+                <a:cs typeface="Arial" pitchFamily="34" charset="-120"/>
+              </a:rPr>
+              <a:t>▲8.2</a:t>
+            </a:r>
+            <a:endParaRPr lang="en-US" sz="900" dirty="0"/>
+          </a:p>
+        </p:txBody>
+      </p:sp>
+      <p:sp>
+        <p:nvSpPr>
+          <p:cNvPr id="84" name="Text 82"/>
+          <p:cNvSpPr/>
+          <p:nvPr/>
+        </p:nvSpPr>
+        <p:spPr>
+          <a:xfrm>
+            <a:off x="9079992" y="3675888"/>
+            <a:ext cx="786384" cy="438912"/>
+          </a:xfrm>
+          <a:prstGeom prst="rect">
+            <a:avLst/>
+          </a:prstGeom>
+          <a:noFill/>
+          <a:ln/>
+        </p:spPr>
+        <p:txBody>
+          <a:bodyPr wrap="square" lIns="0" tIns="0" rIns="0" bIns="0" rtlCol="0" anchor="ctr"/>
+          <a:lstStyle/>
+          <a:p>
+            <a:pPr algn="ctr" indent="0" marL="0">
+              <a:buNone/>
+            </a:pPr>
+            <a:r>
+              <a:rPr lang="en-US" sz="900" b="1" dirty="0">
+                <a:solidFill>
+                  <a:srgbClr val="C0392B"/>
+                </a:solidFill>
+                <a:latin typeface="Arial" pitchFamily="34" charset="0"/>
+                <a:ea typeface="Arial" pitchFamily="34" charset="-122"/>
+                <a:cs typeface="Arial" pitchFamily="34" charset="-120"/>
+              </a:rPr>
+              <a:t>▲3.2</a:t>
+            </a:r>
+            <a:endParaRPr lang="en-US" sz="900" dirty="0"/>
+          </a:p>
+        </p:txBody>
+      </p:sp>
+      <p:sp>
+        <p:nvSpPr>
+          <p:cNvPr id="85" name="Text 83"/>
+          <p:cNvSpPr/>
+          <p:nvPr/>
+        </p:nvSpPr>
+        <p:spPr>
+          <a:xfrm>
+            <a:off x="9866376" y="3675888"/>
+            <a:ext cx="786384" cy="438912"/>
+          </a:xfrm>
+          <a:prstGeom prst="rect">
+            <a:avLst/>
+          </a:prstGeom>
+          <a:noFill/>
+          <a:ln/>
+        </p:spPr>
+        <p:txBody>
+          <a:bodyPr wrap="square" lIns="0" tIns="0" rIns="0" bIns="0" rtlCol="0" anchor="ctr"/>
+          <a:lstStyle/>
+          <a:p>
+            <a:pPr algn="ctr" indent="0" marL="0">
+              <a:buNone/>
+            </a:pPr>
+            <a:r>
+              <a:rPr lang="en-US" sz="900" b="1" dirty="0">
+                <a:solidFill>
+                  <a:srgbClr val="C0392B"/>
+                </a:solidFill>
+                <a:latin typeface="Arial" pitchFamily="34" charset="0"/>
+                <a:ea typeface="Arial" pitchFamily="34" charset="-122"/>
+                <a:cs typeface="Arial" pitchFamily="34" charset="-120"/>
+              </a:rPr>
+              <a:t>▲3.2</a:t>
+            </a:r>
+            <a:endParaRPr lang="en-US" sz="900" dirty="0"/>
+          </a:p>
+        </p:txBody>
+      </p:sp>
+      <p:sp>
+        <p:nvSpPr>
+          <p:cNvPr id="86" name="Text 84"/>
+          <p:cNvSpPr/>
+          <p:nvPr/>
+        </p:nvSpPr>
+        <p:spPr>
+          <a:xfrm>
+            <a:off x="10652760" y="3675888"/>
+            <a:ext cx="786384" cy="438912"/>
+          </a:xfrm>
+          <a:prstGeom prst="rect">
+            <a:avLst/>
+          </a:prstGeom>
+          <a:noFill/>
+          <a:ln/>
+        </p:spPr>
+        <p:txBody>
+          <a:bodyPr wrap="square" lIns="0" tIns="0" rIns="0" bIns="0" rtlCol="0" anchor="ctr"/>
+          <a:lstStyle/>
+          <a:p>
+            <a:pPr algn="ctr" indent="0" marL="0">
+              <a:buNone/>
+            </a:pPr>
+            <a:r>
+              <a:rPr lang="en-US" sz="900" b="1" dirty="0">
+                <a:solidFill>
+                  <a:srgbClr val="C0392B"/>
+                </a:solidFill>
+                <a:latin typeface="Arial" pitchFamily="34" charset="0"/>
+                <a:ea typeface="Arial" pitchFamily="34" charset="-122"/>
+                <a:cs typeface="Arial" pitchFamily="34" charset="-120"/>
+              </a:rPr>
+              <a:t>▲3.2</a:t>
+            </a:r>
+            <a:endParaRPr lang="en-US" sz="900" dirty="0"/>
+          </a:p>
+        </p:txBody>
+      </p:sp>
+      <p:sp>
+        <p:nvSpPr>
+          <p:cNvPr id="87" name="Text 85"/>
+          <p:cNvSpPr/>
+          <p:nvPr/>
+        </p:nvSpPr>
+        <p:spPr>
+          <a:xfrm>
+            <a:off x="11439144" y="3675888"/>
+            <a:ext cx="786384" cy="438912"/>
+          </a:xfrm>
+          <a:prstGeom prst="rect">
+            <a:avLst/>
+          </a:prstGeom>
+          <a:noFill/>
+          <a:ln/>
+        </p:spPr>
+        <p:txBody>
+          <a:bodyPr wrap="square" lIns="0" tIns="0" rIns="0" bIns="0" rtlCol="0" anchor="ctr"/>
+          <a:lstStyle/>
+          <a:p>
+            <a:pPr algn="ctr" indent="0" marL="0">
+              <a:buNone/>
+            </a:pPr>
+            <a:r>
+              <a:rPr lang="en-US" sz="900" b="1" dirty="0">
+                <a:solidFill>
+                  <a:srgbClr val="C0392B"/>
+                </a:solidFill>
+                <a:latin typeface="Arial" pitchFamily="34" charset="0"/>
+                <a:ea typeface="Arial" pitchFamily="34" charset="-122"/>
+                <a:cs typeface="Arial" pitchFamily="34" charset="-120"/>
+              </a:rPr>
+              <a:t>▲3.2</a:t>
+            </a:r>
+            <a:endParaRPr lang="en-US" sz="900" dirty="0"/>
+          </a:p>
+        </p:txBody>
+      </p:sp>
+      <p:sp>
+        <p:nvSpPr>
+          <p:cNvPr id="88" name="Shape 86"/>
+          <p:cNvSpPr/>
+          <p:nvPr/>
+        </p:nvSpPr>
+        <p:spPr>
+          <a:xfrm>
+            <a:off x="594360" y="4114800"/>
+            <a:ext cx="11631168" cy="438912"/>
+          </a:xfrm>
+          <a:prstGeom prst="rect">
+            <a:avLst/>
+          </a:prstGeom>
+          <a:solidFill>
+            <a:srgbClr val="ECE2D0"/>
+          </a:solidFill>
+          <a:ln w="6350">
+            <a:solidFill>
+              <a:srgbClr val="DED5CE"/>
+            </a:solidFill>
+            <a:prstDash val="solid"/>
+          </a:ln>
+        </p:spPr>
+      </p:sp>
+      <p:sp>
+        <p:nvSpPr>
+          <p:cNvPr id="89" name="Text 87"/>
+          <p:cNvSpPr/>
+          <p:nvPr/>
+        </p:nvSpPr>
+        <p:spPr>
+          <a:xfrm>
+            <a:off x="731520" y="4114800"/>
+            <a:ext cx="2194560" cy="438912"/>
+          </a:xfrm>
+          <a:prstGeom prst="rect">
+            <a:avLst/>
+          </a:prstGeom>
+          <a:noFill/>
+          <a:ln/>
+        </p:spPr>
+        <p:txBody>
+          <a:bodyPr wrap="square" lIns="0" tIns="0" rIns="0" bIns="0" rtlCol="0" anchor="ctr"/>
+          <a:lstStyle/>
+          <a:p>
+            <a:pPr indent="0" marL="0">
+              <a:buNone/>
+            </a:pPr>
+            <a:r>
+              <a:rPr lang="en-US" sz="950" b="1" dirty="0">
+                <a:solidFill>
+                  <a:srgbClr val="2B2B2B"/>
+                </a:solidFill>
+                <a:latin typeface="Arial" pitchFamily="34" charset="0"/>
+                <a:ea typeface="Arial" pitchFamily="34" charset="-122"/>
+                <a:cs typeface="Arial" pitchFamily="34" charset="-120"/>
+              </a:rPr>
+              <a:t>月末 現預金残高</a:t>
+            </a:r>
+            <a:endParaRPr lang="en-US" sz="950" dirty="0"/>
+          </a:p>
+        </p:txBody>
+      </p:sp>
+      <p:sp>
+        <p:nvSpPr>
+          <p:cNvPr id="90" name="Text 88"/>
+          <p:cNvSpPr/>
+          <p:nvPr/>
+        </p:nvSpPr>
+        <p:spPr>
+          <a:xfrm>
+            <a:off x="2788920" y="4114800"/>
+            <a:ext cx="786384" cy="438912"/>
+          </a:xfrm>
+          <a:prstGeom prst="rect">
+            <a:avLst/>
+          </a:prstGeom>
+          <a:noFill/>
+          <a:ln/>
+        </p:spPr>
+        <p:txBody>
+          <a:bodyPr wrap="square" lIns="0" tIns="0" rIns="0" bIns="0" rtlCol="0" anchor="ctr"/>
+          <a:lstStyle/>
+          <a:p>
+            <a:pPr algn="ctr" indent="0" marL="0">
+              <a:buNone/>
+            </a:pPr>
+            <a:r>
+              <a:rPr lang="en-US" sz="900" b="1" dirty="0">
+                <a:solidFill>
+                  <a:srgbClr val="6D2E46"/>
+                </a:solidFill>
+                <a:latin typeface="Arial" pitchFamily="34" charset="0"/>
+                <a:ea typeface="Arial" pitchFamily="34" charset="-122"/>
+                <a:cs typeface="Arial" pitchFamily="34" charset="-120"/>
+              </a:rPr>
+              <a:t>41.2</a:t>
+            </a:r>
+            <a:endParaRPr lang="en-US" sz="900" dirty="0"/>
+          </a:p>
+        </p:txBody>
+      </p:sp>
+      <p:sp>
+        <p:nvSpPr>
+          <p:cNvPr id="91" name="Text 89"/>
+          <p:cNvSpPr/>
+          <p:nvPr/>
+        </p:nvSpPr>
+        <p:spPr>
+          <a:xfrm>
+            <a:off x="3575304" y="4114800"/>
+            <a:ext cx="786384" cy="438912"/>
+          </a:xfrm>
+          <a:prstGeom prst="rect">
+            <a:avLst/>
+          </a:prstGeom>
+          <a:noFill/>
+          <a:ln/>
+        </p:spPr>
+        <p:txBody>
+          <a:bodyPr wrap="square" lIns="0" tIns="0" rIns="0" bIns="0" rtlCol="0" anchor="ctr"/>
+          <a:lstStyle/>
+          <a:p>
+            <a:pPr algn="ctr" indent="0" marL="0">
+              <a:buNone/>
+            </a:pPr>
+            <a:r>
+              <a:rPr lang="en-US" sz="900" b="1" dirty="0">
+                <a:solidFill>
+                  <a:srgbClr val="6D2E46"/>
+                </a:solidFill>
+                <a:latin typeface="Arial" pitchFamily="34" charset="0"/>
+                <a:ea typeface="Arial" pitchFamily="34" charset="-122"/>
+                <a:cs typeface="Arial" pitchFamily="34" charset="-120"/>
+              </a:rPr>
+              <a:t>7.5</a:t>
+            </a:r>
+            <a:endParaRPr lang="en-US" sz="900" dirty="0"/>
+          </a:p>
+        </p:txBody>
+      </p:sp>
+      <p:sp>
+        <p:nvSpPr>
+          <p:cNvPr id="92" name="Text 90"/>
+          <p:cNvSpPr/>
+          <p:nvPr/>
+        </p:nvSpPr>
+        <p:spPr>
+          <a:xfrm>
+            <a:off x="4361688" y="4114800"/>
+            <a:ext cx="786384" cy="438912"/>
+          </a:xfrm>
+          <a:prstGeom prst="rect">
+            <a:avLst/>
+          </a:prstGeom>
+          <a:noFill/>
+          <a:ln/>
+        </p:spPr>
+        <p:txBody>
+          <a:bodyPr wrap="square" lIns="0" tIns="0" rIns="0" bIns="0" rtlCol="0" anchor="ctr"/>
+          <a:lstStyle/>
+          <a:p>
+            <a:pPr algn="ctr" indent="0" marL="0">
+              <a:buNone/>
+            </a:pPr>
+            <a:r>
+              <a:rPr lang="en-US" sz="900" b="1" dirty="0">
+                <a:solidFill>
+                  <a:srgbClr val="6D2E46"/>
+                </a:solidFill>
+                <a:latin typeface="Arial" pitchFamily="34" charset="0"/>
+                <a:ea typeface="Arial" pitchFamily="34" charset="-122"/>
+                <a:cs typeface="Arial" pitchFamily="34" charset="-120"/>
+              </a:rPr>
+              <a:t>4.3</a:t>
+            </a:r>
+            <a:endParaRPr lang="en-US" sz="900" dirty="0"/>
+          </a:p>
+        </p:txBody>
+      </p:sp>
+      <p:sp>
+        <p:nvSpPr>
+          <p:cNvPr id="93" name="Text 91"/>
+          <p:cNvSpPr/>
+          <p:nvPr/>
+        </p:nvSpPr>
+        <p:spPr>
+          <a:xfrm>
+            <a:off x="5148072" y="4114800"/>
+            <a:ext cx="786384" cy="438912"/>
+          </a:xfrm>
+          <a:prstGeom prst="rect">
+            <a:avLst/>
+          </a:prstGeom>
+          <a:noFill/>
+          <a:ln/>
+        </p:spPr>
+        <p:txBody>
+          <a:bodyPr wrap="square" lIns="0" tIns="0" rIns="0" bIns="0" rtlCol="0" anchor="ctr"/>
+          <a:lstStyle/>
+          <a:p>
+            <a:pPr algn="ctr" indent="0" marL="0">
+              <a:buNone/>
+            </a:pPr>
+            <a:r>
+              <a:rPr lang="en-US" sz="900" b="1" dirty="0">
+                <a:solidFill>
+                  <a:srgbClr val="6D2E46"/>
+                </a:solidFill>
+                <a:latin typeface="Arial" pitchFamily="34" charset="0"/>
+                <a:ea typeface="Arial" pitchFamily="34" charset="-122"/>
+                <a:cs typeface="Arial" pitchFamily="34" charset="-120"/>
+              </a:rPr>
+              <a:t>1.1</a:t>
+            </a:r>
+            <a:endParaRPr lang="en-US" sz="900" dirty="0"/>
+          </a:p>
+        </p:txBody>
+      </p:sp>
+      <p:sp>
+        <p:nvSpPr>
+          <p:cNvPr id="94" name="Text 92"/>
+          <p:cNvSpPr/>
+          <p:nvPr/>
+        </p:nvSpPr>
+        <p:spPr>
+          <a:xfrm>
+            <a:off x="5934456" y="4114800"/>
+            <a:ext cx="786384" cy="438912"/>
+          </a:xfrm>
+          <a:prstGeom prst="rect">
+            <a:avLst/>
+          </a:prstGeom>
+          <a:noFill/>
+          <a:ln/>
+        </p:spPr>
+        <p:txBody>
+          <a:bodyPr wrap="square" lIns="0" tIns="0" rIns="0" bIns="0" rtlCol="0" anchor="ctr"/>
+          <a:lstStyle/>
+          <a:p>
+            <a:pPr algn="ctr" indent="0" marL="0">
+              <a:buNone/>
+            </a:pPr>
+            <a:r>
+              <a:rPr lang="en-US" sz="900" b="1" dirty="0">
+                <a:solidFill>
+                  <a:srgbClr val="C0392B"/>
+                </a:solidFill>
+                <a:latin typeface="Arial" pitchFamily="34" charset="0"/>
+                <a:ea typeface="Arial" pitchFamily="34" charset="-122"/>
+                <a:cs typeface="Arial" pitchFamily="34" charset="-120"/>
+              </a:rPr>
+              <a:t>▲2.1</a:t>
+            </a:r>
+            <a:endParaRPr lang="en-US" sz="900" dirty="0"/>
+          </a:p>
+        </p:txBody>
+      </p:sp>
+      <p:sp>
+        <p:nvSpPr>
+          <p:cNvPr id="95" name="Text 93"/>
+          <p:cNvSpPr/>
+          <p:nvPr/>
+        </p:nvSpPr>
+        <p:spPr>
+          <a:xfrm>
+            <a:off x="6720840" y="4114800"/>
+            <a:ext cx="786384" cy="438912"/>
+          </a:xfrm>
+          <a:prstGeom prst="rect">
+            <a:avLst/>
+          </a:prstGeom>
+          <a:noFill/>
+          <a:ln/>
+        </p:spPr>
+        <p:txBody>
+          <a:bodyPr wrap="square" lIns="0" tIns="0" rIns="0" bIns="0" rtlCol="0" anchor="ctr"/>
+          <a:lstStyle/>
+          <a:p>
+            <a:pPr algn="ctr" indent="0" marL="0">
+              <a:buNone/>
+            </a:pPr>
+            <a:r>
+              <a:rPr lang="en-US" sz="900" b="1" dirty="0">
+                <a:solidFill>
+                  <a:srgbClr val="6D2E46"/>
+                </a:solidFill>
+                <a:latin typeface="Arial" pitchFamily="34" charset="0"/>
+                <a:ea typeface="Arial" pitchFamily="34" charset="-122"/>
+                <a:cs typeface="Arial" pitchFamily="34" charset="-120"/>
+              </a:rPr>
+              <a:t>36.7</a:t>
+            </a:r>
+            <a:endParaRPr lang="en-US" sz="900" dirty="0"/>
+          </a:p>
+        </p:txBody>
+      </p:sp>
+      <p:sp>
+        <p:nvSpPr>
+          <p:cNvPr id="96" name="Text 94"/>
+          <p:cNvSpPr/>
+          <p:nvPr/>
+        </p:nvSpPr>
+        <p:spPr>
+          <a:xfrm>
+            <a:off x="7507224" y="4114800"/>
+            <a:ext cx="786384" cy="438912"/>
+          </a:xfrm>
+          <a:prstGeom prst="rect">
+            <a:avLst/>
+          </a:prstGeom>
+          <a:noFill/>
+          <a:ln/>
+        </p:spPr>
+        <p:txBody>
+          <a:bodyPr wrap="square" lIns="0" tIns="0" rIns="0" bIns="0" rtlCol="0" anchor="ctr"/>
+          <a:lstStyle/>
+          <a:p>
+            <a:pPr algn="ctr" indent="0" marL="0">
+              <a:buNone/>
+            </a:pPr>
+            <a:r>
+              <a:rPr lang="en-US" sz="900" b="1" dirty="0">
+                <a:solidFill>
+                  <a:srgbClr val="6D2E46"/>
+                </a:solidFill>
+                <a:latin typeface="Arial" pitchFamily="34" charset="0"/>
+                <a:ea typeface="Arial" pitchFamily="34" charset="-122"/>
+                <a:cs typeface="Arial" pitchFamily="34" charset="-120"/>
+              </a:rPr>
+              <a:t>33.5</a:t>
+            </a:r>
+            <a:endParaRPr lang="en-US" sz="900" dirty="0"/>
+          </a:p>
+        </p:txBody>
+      </p:sp>
+      <p:sp>
+        <p:nvSpPr>
+          <p:cNvPr id="97" name="Text 95"/>
+          <p:cNvSpPr/>
+          <p:nvPr/>
+        </p:nvSpPr>
+        <p:spPr>
+          <a:xfrm>
+            <a:off x="8293608" y="4114800"/>
+            <a:ext cx="786384" cy="438912"/>
+          </a:xfrm>
+          <a:prstGeom prst="rect">
+            <a:avLst/>
+          </a:prstGeom>
+          <a:noFill/>
+          <a:ln/>
+        </p:spPr>
+        <p:txBody>
+          <a:bodyPr wrap="square" lIns="0" tIns="0" rIns="0" bIns="0" rtlCol="0" anchor="ctr"/>
+          <a:lstStyle/>
+          <a:p>
+            <a:pPr algn="ctr" indent="0" marL="0">
+              <a:buNone/>
+            </a:pPr>
+            <a:r>
+              <a:rPr lang="en-US" sz="900" b="1" dirty="0">
+                <a:solidFill>
+                  <a:srgbClr val="6D2E46"/>
+                </a:solidFill>
+                <a:latin typeface="Arial" pitchFamily="34" charset="0"/>
+                <a:ea typeface="Arial" pitchFamily="34" charset="-122"/>
+                <a:cs typeface="Arial" pitchFamily="34" charset="-120"/>
+              </a:rPr>
+              <a:t>25.4</a:t>
+            </a:r>
+            <a:endParaRPr lang="en-US" sz="900" dirty="0"/>
+          </a:p>
+        </p:txBody>
+      </p:sp>
+      <p:sp>
+        <p:nvSpPr>
+          <p:cNvPr id="98" name="Text 96"/>
+          <p:cNvSpPr/>
+          <p:nvPr/>
+        </p:nvSpPr>
+        <p:spPr>
+          <a:xfrm>
+            <a:off x="9079992" y="4114800"/>
+            <a:ext cx="786384" cy="438912"/>
+          </a:xfrm>
+          <a:prstGeom prst="rect">
+            <a:avLst/>
+          </a:prstGeom>
+          <a:noFill/>
+          <a:ln/>
+        </p:spPr>
+        <p:txBody>
+          <a:bodyPr wrap="square" lIns="0" tIns="0" rIns="0" bIns="0" rtlCol="0" anchor="ctr"/>
+          <a:lstStyle/>
+          <a:p>
+            <a:pPr algn="ctr" indent="0" marL="0">
+              <a:buNone/>
+            </a:pPr>
+            <a:r>
+              <a:rPr lang="en-US" sz="900" b="1" dirty="0">
+                <a:solidFill>
+                  <a:srgbClr val="6D2E46"/>
+                </a:solidFill>
+                <a:latin typeface="Arial" pitchFamily="34" charset="0"/>
+                <a:ea typeface="Arial" pitchFamily="34" charset="-122"/>
+                <a:cs typeface="Arial" pitchFamily="34" charset="-120"/>
+              </a:rPr>
+              <a:t>22.2</a:t>
+            </a:r>
+            <a:endParaRPr lang="en-US" sz="900" dirty="0"/>
+          </a:p>
+        </p:txBody>
+      </p:sp>
+      <p:sp>
+        <p:nvSpPr>
+          <p:cNvPr id="99" name="Text 97"/>
+          <p:cNvSpPr/>
+          <p:nvPr/>
+        </p:nvSpPr>
+        <p:spPr>
+          <a:xfrm>
+            <a:off x="9866376" y="4114800"/>
+            <a:ext cx="786384" cy="438912"/>
+          </a:xfrm>
+          <a:prstGeom prst="rect">
+            <a:avLst/>
+          </a:prstGeom>
+          <a:noFill/>
+          <a:ln/>
+        </p:spPr>
+        <p:txBody>
+          <a:bodyPr wrap="square" lIns="0" tIns="0" rIns="0" bIns="0" rtlCol="0" anchor="ctr"/>
+          <a:lstStyle/>
+          <a:p>
+            <a:pPr algn="ctr" indent="0" marL="0">
+              <a:buNone/>
+            </a:pPr>
+            <a:r>
+              <a:rPr lang="en-US" sz="900" b="1" dirty="0">
+                <a:solidFill>
+                  <a:srgbClr val="6D2E46"/>
+                </a:solidFill>
+                <a:latin typeface="Arial" pitchFamily="34" charset="0"/>
+                <a:ea typeface="Arial" pitchFamily="34" charset="-122"/>
+                <a:cs typeface="Arial" pitchFamily="34" charset="-120"/>
+              </a:rPr>
+              <a:t>19.0</a:t>
+            </a:r>
+            <a:endParaRPr lang="en-US" sz="900" dirty="0"/>
+          </a:p>
+        </p:txBody>
+      </p:sp>
+      <p:sp>
+        <p:nvSpPr>
+          <p:cNvPr id="100" name="Text 98"/>
+          <p:cNvSpPr/>
+          <p:nvPr/>
+        </p:nvSpPr>
+        <p:spPr>
+          <a:xfrm>
+            <a:off x="10652760" y="4114800"/>
+            <a:ext cx="786384" cy="438912"/>
+          </a:xfrm>
+          <a:prstGeom prst="rect">
+            <a:avLst/>
+          </a:prstGeom>
+          <a:noFill/>
+          <a:ln/>
+        </p:spPr>
+        <p:txBody>
+          <a:bodyPr wrap="square" lIns="0" tIns="0" rIns="0" bIns="0" rtlCol="0" anchor="ctr"/>
+          <a:lstStyle/>
+          <a:p>
+            <a:pPr algn="ctr" indent="0" marL="0">
+              <a:buNone/>
+            </a:pPr>
+            <a:r>
+              <a:rPr lang="en-US" sz="900" b="1" dirty="0">
+                <a:solidFill>
+                  <a:srgbClr val="6D2E46"/>
+                </a:solidFill>
+                <a:latin typeface="Arial" pitchFamily="34" charset="0"/>
+                <a:ea typeface="Arial" pitchFamily="34" charset="-122"/>
+                <a:cs typeface="Arial" pitchFamily="34" charset="-120"/>
+              </a:rPr>
+              <a:t>15.8</a:t>
+            </a:r>
+            <a:endParaRPr lang="en-US" sz="900" dirty="0"/>
+          </a:p>
+        </p:txBody>
+      </p:sp>
+      <p:sp>
+        <p:nvSpPr>
+          <p:cNvPr id="101" name="Text 99"/>
+          <p:cNvSpPr/>
+          <p:nvPr/>
+        </p:nvSpPr>
+        <p:spPr>
+          <a:xfrm>
+            <a:off x="11439144" y="4114800"/>
+            <a:ext cx="786384" cy="438912"/>
+          </a:xfrm>
+          <a:prstGeom prst="rect">
+            <a:avLst/>
+          </a:prstGeom>
+          <a:noFill/>
+          <a:ln/>
+        </p:spPr>
+        <p:txBody>
+          <a:bodyPr wrap="square" lIns="0" tIns="0" rIns="0" bIns="0" rtlCol="0" anchor="ctr"/>
+          <a:lstStyle/>
+          <a:p>
+            <a:pPr algn="ctr" indent="0" marL="0">
+              <a:buNone/>
+            </a:pPr>
+            <a:r>
+              <a:rPr lang="en-US" sz="900" b="1" dirty="0">
+                <a:solidFill>
+                  <a:srgbClr val="6D2E46"/>
+                </a:solidFill>
+                <a:latin typeface="Arial" pitchFamily="34" charset="0"/>
+                <a:ea typeface="Arial" pitchFamily="34" charset="-122"/>
+                <a:cs typeface="Arial" pitchFamily="34" charset="-120"/>
+              </a:rPr>
+              <a:t>12.6</a:t>
+            </a:r>
+            <a:endParaRPr lang="en-US" sz="900" dirty="0"/>
+          </a:p>
+        </p:txBody>
+      </p:sp>
+      <p:sp>
+        <p:nvSpPr>
+          <p:cNvPr id="102" name="Shape 100"/>
+          <p:cNvSpPr/>
+          <p:nvPr/>
+        </p:nvSpPr>
+        <p:spPr>
+          <a:xfrm>
+            <a:off x="594360" y="4828032"/>
+            <a:ext cx="3611880" cy="1024128"/>
           </a:xfrm>
           <a:prstGeom prst="roundRect">
             <a:avLst>
-              <a:gd name="adj" fmla="val 2703"/>
+              <a:gd name="adj" fmla="val 5357"/>
             </a:avLst>
           </a:prstGeom>
           <a:solidFill>
@@ -4798,73 +8695,14 @@
       </p:sp>
       <p:sp>
         <p:nvSpPr>
-          <p:cNvPr id="5" name="Shape 3"/>
-          <p:cNvSpPr/>
-          <p:nvPr/>
-        </p:nvSpPr>
-        <p:spPr>
-          <a:xfrm>
-            <a:off x="868680" y="1719072"/>
-            <a:ext cx="310896" cy="310896"/>
-          </a:xfrm>
-          <a:prstGeom prst="ellipse">
-            <a:avLst/>
-          </a:prstGeom>
-          <a:solidFill>
-            <a:srgbClr val="6D2E46"/>
-          </a:solidFill>
-          <a:ln/>
-        </p:spPr>
-      </p:sp>
-      <p:sp>
-        <p:nvSpPr>
-          <p:cNvPr id="6" name="Text 4"/>
-          <p:cNvSpPr/>
-          <p:nvPr/>
-        </p:nvSpPr>
-        <p:spPr>
-          <a:xfrm>
-            <a:off x="868680" y="1719072"/>
-            <a:ext cx="310896" cy="310896"/>
-          </a:xfrm>
-          <a:prstGeom prst="rect">
-            <a:avLst/>
-          </a:prstGeom>
-          <a:noFill/>
-          <a:ln/>
-        </p:spPr>
-        <p:txBody>
-          <a:bodyPr wrap="square" lIns="0" tIns="0" rIns="0" bIns="0" rtlCol="0" anchor="ctr"/>
-          <a:lstStyle/>
-          <a:p>
-            <a:pPr algn="ctr" indent="0" marL="0">
-              <a:buNone/>
-            </a:pPr>
-            <a:r>
-              <a:rPr lang="en-US" sz="1300" b="1" dirty="0">
-                <a:solidFill>
-                  <a:srgbClr val="FFFFFF"/>
-                </a:solidFill>
-                <a:latin typeface="Arial" pitchFamily="34" charset="0"/>
-                <a:ea typeface="Arial" pitchFamily="34" charset="-122"/>
-                <a:cs typeface="Arial" pitchFamily="34" charset="-120"/>
-              </a:rPr>
-              <a:t>1</a:t>
-            </a:r>
-            <a:endParaRPr lang="en-US" sz="1300" dirty="0"/>
-          </a:p>
-        </p:txBody>
-      </p:sp>
-      <p:sp>
-        <p:nvSpPr>
-          <p:cNvPr id="7" name="Text 5"/>
-          <p:cNvSpPr/>
-          <p:nvPr/>
-        </p:nvSpPr>
-        <p:spPr>
-          <a:xfrm>
-            <a:off x="1307592" y="1700784"/>
-            <a:ext cx="4480560" cy="329184"/>
+          <p:cNvPr id="103" name="Text 101"/>
+          <p:cNvSpPr/>
+          <p:nvPr/>
+        </p:nvSpPr>
+        <p:spPr>
+          <a:xfrm>
+            <a:off x="795528" y="4974336"/>
+            <a:ext cx="3200400" cy="310896"/>
           </a:xfrm>
           <a:prstGeom prst="rect">
             <a:avLst/>
@@ -4880,30 +8718,30 @@
               <a:buNone/>
             </a:pPr>
             <a:r>
-              <a:rPr lang="en-US" sz="1350" b="1" dirty="0">
-                <a:solidFill>
-                  <a:srgbClr val="6D2E46"/>
-                </a:solidFill>
-                <a:latin typeface="Arial" pitchFamily="34" charset="0"/>
-                <a:ea typeface="Arial" pitchFamily="34" charset="-122"/>
-                <a:cs typeface="Arial" pitchFamily="34" charset="-120"/>
-              </a:rPr>
-              <a:t>グループ内取引 100百万円</a:t>
-            </a:r>
-            <a:endParaRPr lang="en-US" sz="1350" dirty="0"/>
-          </a:p>
-        </p:txBody>
-      </p:sp>
-      <p:sp>
-        <p:nvSpPr>
-          <p:cNvPr id="8" name="Text 6"/>
-          <p:cNvSpPr/>
-          <p:nvPr/>
-        </p:nvSpPr>
-        <p:spPr>
-          <a:xfrm>
-            <a:off x="886968" y="2121408"/>
-            <a:ext cx="4937760" cy="548640"/>
+              <a:rPr lang="en-US" sz="950" dirty="0">
+                <a:solidFill>
+                  <a:srgbClr val="7A6A64"/>
+                </a:solidFill>
+                <a:latin typeface="Arial" pitchFamily="34" charset="0"/>
+                <a:ea typeface="Arial" pitchFamily="34" charset="-122"/>
+                <a:cs typeface="Arial" pitchFamily="34" charset="-120"/>
+              </a:rPr>
+              <a:t>期中 最低残高（2027年2月末）</a:t>
+            </a:r>
+            <a:endParaRPr lang="en-US" sz="950" dirty="0"/>
+          </a:p>
+        </p:txBody>
+      </p:sp>
+      <p:sp>
+        <p:nvSpPr>
+          <p:cNvPr id="104" name="Text 102"/>
+          <p:cNvSpPr/>
+          <p:nvPr/>
+        </p:nvSpPr>
+        <p:spPr>
+          <a:xfrm>
+            <a:off x="795528" y="5303520"/>
+            <a:ext cx="3200400" cy="457200"/>
           </a:xfrm>
           <a:prstGeom prst="rect">
             <a:avLst/>
@@ -4919,95 +8757,34 @@
               <a:buNone/>
             </a:pPr>
             <a:r>
-              <a:rPr lang="en-US" sz="1050" dirty="0">
-                <a:solidFill>
-                  <a:srgbClr val="7A6A64"/>
-                </a:solidFill>
-                <a:latin typeface="Arial" pitchFamily="34" charset="0"/>
-                <a:ea typeface="Arial" pitchFamily="34" charset="-122"/>
-                <a:cs typeface="Arial" pitchFamily="34" charset="-120"/>
-              </a:rPr>
-              <a:t>上乗せ案件132.5百万円のうち約100百万円はグループ会社からの経営指導料。</a:t>
-            </a:r>
-            <a:endParaRPr lang="en-US" sz="1050" dirty="0"/>
-          </a:p>
-        </p:txBody>
-      </p:sp>
-      <p:sp>
-        <p:nvSpPr>
-          <p:cNvPr id="9" name="Shape 7"/>
-          <p:cNvSpPr/>
-          <p:nvPr/>
-        </p:nvSpPr>
-        <p:spPr>
-          <a:xfrm>
-            <a:off x="886968" y="2670048"/>
-            <a:ext cx="4937760" cy="694944"/>
+              <a:rPr lang="en-US" sz="2200" b="1" dirty="0">
+                <a:solidFill>
+                  <a:srgbClr val="A26769"/>
+                </a:solidFill>
+                <a:latin typeface="Cambria" pitchFamily="34" charset="0"/>
+                <a:ea typeface="Cambria" pitchFamily="34" charset="-122"/>
+                <a:cs typeface="Cambria" pitchFamily="34" charset="-120"/>
+              </a:rPr>
+              <a:t>▲2.1百万円</a:t>
+            </a:r>
+            <a:endParaRPr lang="en-US" sz="2200" dirty="0"/>
+          </a:p>
+        </p:txBody>
+      </p:sp>
+      <p:sp>
+        <p:nvSpPr>
+          <p:cNvPr id="105" name="Shape 103"/>
+          <p:cNvSpPr/>
+          <p:nvPr/>
+        </p:nvSpPr>
+        <p:spPr>
+          <a:xfrm>
+            <a:off x="4453128" y="4828032"/>
+            <a:ext cx="3611880" cy="1024128"/>
           </a:xfrm>
           <a:prstGeom prst="roundRect">
             <a:avLst>
-              <a:gd name="adj" fmla="val 6579"/>
-            </a:avLst>
-          </a:prstGeom>
-          <a:solidFill>
-            <a:srgbClr val="ECE2D0"/>
-          </a:solidFill>
-          <a:ln/>
-        </p:spPr>
-      </p:sp>
-      <p:sp>
-        <p:nvSpPr>
-          <p:cNvPr id="10" name="Text 8"/>
-          <p:cNvSpPr/>
-          <p:nvPr/>
-        </p:nvSpPr>
-        <p:spPr>
-          <a:xfrm>
-            <a:off x="1051560" y="2670048"/>
-            <a:ext cx="4617720" cy="694944"/>
-          </a:xfrm>
-          <a:prstGeom prst="rect">
-            <a:avLst/>
-          </a:prstGeom>
-          <a:noFill/>
-          <a:ln/>
-        </p:spPr>
-        <p:txBody>
-          <a:bodyPr wrap="square" lIns="0" tIns="0" rIns="0" bIns="0" rtlCol="0" anchor="ctr"/>
-          <a:lstStyle/>
-          <a:p>
-            <a:pPr indent="0" marL="0">
-              <a:buNone/>
-            </a:pPr>
-            <a:r>
-              <a:rPr lang="en-US" sz="1050" dirty="0">
-                <a:solidFill>
-                  <a:srgbClr val="2B2B2B"/>
-                </a:solidFill>
-                <a:latin typeface="Arial" pitchFamily="34" charset="0"/>
-                <a:ea typeface="Arial" pitchFamily="34" charset="-122"/>
-                <a:cs typeface="Arial" pitchFamily="34" charset="-120"/>
-              </a:rPr>
-              <a:t>支払側各社の支払能力と、対価の算定根拠（業務内容・工数）を文書化してご提出します。</a:t>
-            </a:r>
-            <a:endParaRPr lang="en-US" sz="1050" dirty="0"/>
-          </a:p>
-        </p:txBody>
-      </p:sp>
-      <p:sp>
-        <p:nvSpPr>
-          <p:cNvPr id="11" name="Shape 9"/>
-          <p:cNvSpPr/>
-          <p:nvPr/>
-        </p:nvSpPr>
-        <p:spPr>
-          <a:xfrm>
-            <a:off x="6400800" y="1481328"/>
-            <a:ext cx="5486400" cy="2029968"/>
-          </a:xfrm>
-          <a:prstGeom prst="roundRect">
-            <a:avLst>
-              <a:gd name="adj" fmla="val 2703"/>
+              <a:gd name="adj" fmla="val 5357"/>
             </a:avLst>
           </a:prstGeom>
           <a:solidFill>
@@ -5030,73 +8807,14 @@
       </p:sp>
       <p:sp>
         <p:nvSpPr>
-          <p:cNvPr id="12" name="Shape 10"/>
-          <p:cNvSpPr/>
-          <p:nvPr/>
-        </p:nvSpPr>
-        <p:spPr>
-          <a:xfrm>
-            <a:off x="6675120" y="1719072"/>
-            <a:ext cx="310896" cy="310896"/>
-          </a:xfrm>
-          <a:prstGeom prst="ellipse">
-            <a:avLst/>
-          </a:prstGeom>
-          <a:solidFill>
-            <a:srgbClr val="6D2E46"/>
-          </a:solidFill>
-          <a:ln/>
-        </p:spPr>
-      </p:sp>
-      <p:sp>
-        <p:nvSpPr>
-          <p:cNvPr id="13" name="Text 11"/>
-          <p:cNvSpPr/>
-          <p:nvPr/>
-        </p:nvSpPr>
-        <p:spPr>
-          <a:xfrm>
-            <a:off x="6675120" y="1719072"/>
-            <a:ext cx="310896" cy="310896"/>
-          </a:xfrm>
-          <a:prstGeom prst="rect">
-            <a:avLst/>
-          </a:prstGeom>
-          <a:noFill/>
-          <a:ln/>
-        </p:spPr>
-        <p:txBody>
-          <a:bodyPr wrap="square" lIns="0" tIns="0" rIns="0" bIns="0" rtlCol="0" anchor="ctr"/>
-          <a:lstStyle/>
-          <a:p>
-            <a:pPr algn="ctr" indent="0" marL="0">
-              <a:buNone/>
-            </a:pPr>
-            <a:r>
-              <a:rPr lang="en-US" sz="1300" b="1" dirty="0">
-                <a:solidFill>
-                  <a:srgbClr val="FFFFFF"/>
-                </a:solidFill>
-                <a:latin typeface="Arial" pitchFamily="34" charset="0"/>
-                <a:ea typeface="Arial" pitchFamily="34" charset="-122"/>
-                <a:cs typeface="Arial" pitchFamily="34" charset="-120"/>
-              </a:rPr>
-              <a:t>2</a:t>
-            </a:r>
-            <a:endParaRPr lang="en-US" sz="1300" dirty="0"/>
-          </a:p>
-        </p:txBody>
-      </p:sp>
-      <p:sp>
-        <p:nvSpPr>
-          <p:cNvPr id="14" name="Text 12"/>
-          <p:cNvSpPr/>
-          <p:nvPr/>
-        </p:nvSpPr>
-        <p:spPr>
-          <a:xfrm>
-            <a:off x="7114032" y="1700784"/>
-            <a:ext cx="4480560" cy="329184"/>
+          <p:cNvPr id="106" name="Text 104"/>
+          <p:cNvSpPr/>
+          <p:nvPr/>
+        </p:nvSpPr>
+        <p:spPr>
+          <a:xfrm>
+            <a:off x="4654296" y="4974336"/>
+            <a:ext cx="3200400" cy="310896"/>
           </a:xfrm>
           <a:prstGeom prst="rect">
             <a:avLst/>
@@ -5112,134 +8830,73 @@
               <a:buNone/>
             </a:pPr>
             <a:r>
-              <a:rPr lang="en-US" sz="1350" b="1" dirty="0">
+              <a:rPr lang="en-US" sz="950" dirty="0">
+                <a:solidFill>
+                  <a:srgbClr val="7A6A64"/>
+                </a:solidFill>
+                <a:latin typeface="Arial" pitchFamily="34" charset="0"/>
+                <a:ea typeface="Arial" pitchFamily="34" charset="-122"/>
+                <a:cs typeface="Arial" pitchFamily="34" charset="-120"/>
+              </a:rPr>
+              <a:t>期末 現預金残高</a:t>
+            </a:r>
+            <a:endParaRPr lang="en-US" sz="950" dirty="0"/>
+          </a:p>
+        </p:txBody>
+      </p:sp>
+      <p:sp>
+        <p:nvSpPr>
+          <p:cNvPr id="107" name="Text 105"/>
+          <p:cNvSpPr/>
+          <p:nvPr/>
+        </p:nvSpPr>
+        <p:spPr>
+          <a:xfrm>
+            <a:off x="4654296" y="5303520"/>
+            <a:ext cx="3200400" cy="457200"/>
+          </a:xfrm>
+          <a:prstGeom prst="rect">
+            <a:avLst/>
+          </a:prstGeom>
+          <a:noFill/>
+          <a:ln/>
+        </p:spPr>
+        <p:txBody>
+          <a:bodyPr wrap="square" lIns="0" tIns="0" rIns="0" bIns="0" rtlCol="0" anchor="ctr"/>
+          <a:lstStyle/>
+          <a:p>
+            <a:pPr indent="0" marL="0">
+              <a:buNone/>
+            </a:pPr>
+            <a:r>
+              <a:rPr lang="en-US" sz="2200" b="1" dirty="0">
                 <a:solidFill>
                   <a:srgbClr val="6D2E46"/>
                 </a:solidFill>
-                <a:latin typeface="Arial" pitchFamily="34" charset="0"/>
-                <a:ea typeface="Arial" pitchFamily="34" charset="-122"/>
-                <a:cs typeface="Arial" pitchFamily="34" charset="-120"/>
-              </a:rPr>
-              <a:t>手元流動性が1か月未満</a:t>
-            </a:r>
-            <a:endParaRPr lang="en-US" sz="1350" dirty="0"/>
-          </a:p>
-        </p:txBody>
-      </p:sp>
-      <p:sp>
-        <p:nvSpPr>
-          <p:cNvPr id="15" name="Text 13"/>
-          <p:cNvSpPr/>
-          <p:nvPr/>
-        </p:nvSpPr>
-        <p:spPr>
-          <a:xfrm>
-            <a:off x="6693408" y="2121408"/>
-            <a:ext cx="4937760" cy="548640"/>
-          </a:xfrm>
-          <a:prstGeom prst="rect">
-            <a:avLst/>
-          </a:prstGeom>
-          <a:noFill/>
-          <a:ln/>
-        </p:spPr>
-        <p:txBody>
-          <a:bodyPr wrap="square" lIns="0" tIns="0" rIns="0" bIns="0" rtlCol="0" anchor="ctr"/>
-          <a:lstStyle/>
-          <a:p>
-            <a:pPr indent="0" marL="0">
-              <a:buNone/>
-            </a:pPr>
-            <a:r>
-              <a:rPr lang="en-US" sz="1050" dirty="0">
-                <a:solidFill>
-                  <a:srgbClr val="7A6A64"/>
-                </a:solidFill>
-                <a:latin typeface="Arial" pitchFamily="34" charset="0"/>
-                <a:ea typeface="Arial" pitchFamily="34" charset="-122"/>
-                <a:cs typeface="Arial" pitchFamily="34" charset="-120"/>
-              </a:rPr>
-              <a:t>現金及び預金24.4百万円に対し、月次販管費は25.0百万円。</a:t>
-            </a:r>
-            <a:endParaRPr lang="en-US" sz="1050" dirty="0"/>
-          </a:p>
-        </p:txBody>
-      </p:sp>
-      <p:sp>
-        <p:nvSpPr>
-          <p:cNvPr id="16" name="Shape 14"/>
-          <p:cNvSpPr/>
-          <p:nvPr/>
-        </p:nvSpPr>
-        <p:spPr>
-          <a:xfrm>
-            <a:off x="6693408" y="2670048"/>
-            <a:ext cx="4937760" cy="694944"/>
+                <a:latin typeface="Cambria" pitchFamily="34" charset="0"/>
+                <a:ea typeface="Cambria" pitchFamily="34" charset="-122"/>
+                <a:cs typeface="Cambria" pitchFamily="34" charset="-120"/>
+              </a:rPr>
+              <a:t>＋12.6百万円</a:t>
+            </a:r>
+            <a:endParaRPr lang="en-US" sz="2200" dirty="0"/>
+          </a:p>
+        </p:txBody>
+      </p:sp>
+      <p:sp>
+        <p:nvSpPr>
+          <p:cNvPr id="108" name="Shape 106"/>
+          <p:cNvSpPr/>
+          <p:nvPr/>
+        </p:nvSpPr>
+        <p:spPr>
+          <a:xfrm>
+            <a:off x="8311896" y="4828032"/>
+            <a:ext cx="3611880" cy="1024128"/>
           </a:xfrm>
           <a:prstGeom prst="roundRect">
             <a:avLst>
-              <a:gd name="adj" fmla="val 6579"/>
-            </a:avLst>
-          </a:prstGeom>
-          <a:solidFill>
-            <a:srgbClr val="ECE2D0"/>
-          </a:solidFill>
-          <a:ln/>
-        </p:spPr>
-      </p:sp>
-      <p:sp>
-        <p:nvSpPr>
-          <p:cNvPr id="17" name="Text 15"/>
-          <p:cNvSpPr/>
-          <p:nvPr/>
-        </p:nvSpPr>
-        <p:spPr>
-          <a:xfrm>
-            <a:off x="6858000" y="2670048"/>
-            <a:ext cx="4617720" cy="694944"/>
-          </a:xfrm>
-          <a:prstGeom prst="rect">
-            <a:avLst/>
-          </a:prstGeom>
-          <a:noFill/>
-          <a:ln/>
-        </p:spPr>
-        <p:txBody>
-          <a:bodyPr wrap="square" lIns="0" tIns="0" rIns="0" bIns="0" rtlCol="0" anchor="ctr"/>
-          <a:lstStyle/>
-          <a:p>
-            <a:pPr indent="0" marL="0">
-              <a:buNone/>
-            </a:pPr>
-            <a:r>
-              <a:rPr lang="en-US" sz="1050" dirty="0">
-                <a:solidFill>
-                  <a:srgbClr val="2B2B2B"/>
-                </a:solidFill>
-                <a:latin typeface="Arial" pitchFamily="34" charset="0"/>
-                <a:ea typeface="Arial" pitchFamily="34" charset="-122"/>
-                <a:cs typeface="Arial" pitchFamily="34" charset="-120"/>
-              </a:rPr>
-              <a:t>月次および13週の資金繰り表を作成し、調達手段と実行時期を明示します。</a:t>
-            </a:r>
-            <a:endParaRPr lang="en-US" sz="1050" dirty="0"/>
-          </a:p>
-        </p:txBody>
-      </p:sp>
-      <p:sp>
-        <p:nvSpPr>
-          <p:cNvPr id="18" name="Shape 16"/>
-          <p:cNvSpPr/>
-          <p:nvPr/>
-        </p:nvSpPr>
-        <p:spPr>
-          <a:xfrm>
-            <a:off x="594360" y="3694176"/>
-            <a:ext cx="5486400" cy="2029968"/>
-          </a:xfrm>
-          <a:prstGeom prst="roundRect">
-            <a:avLst>
-              <a:gd name="adj" fmla="val 2703"/>
+              <a:gd name="adj" fmla="val 5357"/>
             </a:avLst>
           </a:prstGeom>
           <a:solidFill>
@@ -5262,73 +8919,14 @@
       </p:sp>
       <p:sp>
         <p:nvSpPr>
-          <p:cNvPr id="19" name="Shape 17"/>
-          <p:cNvSpPr/>
-          <p:nvPr/>
-        </p:nvSpPr>
-        <p:spPr>
-          <a:xfrm>
-            <a:off x="868680" y="3931920"/>
-            <a:ext cx="310896" cy="310896"/>
-          </a:xfrm>
-          <a:prstGeom prst="ellipse">
-            <a:avLst/>
-          </a:prstGeom>
-          <a:solidFill>
-            <a:srgbClr val="6D2E46"/>
-          </a:solidFill>
-          <a:ln/>
-        </p:spPr>
-      </p:sp>
-      <p:sp>
-        <p:nvSpPr>
-          <p:cNvPr id="20" name="Text 18"/>
-          <p:cNvSpPr/>
-          <p:nvPr/>
-        </p:nvSpPr>
-        <p:spPr>
-          <a:xfrm>
-            <a:off x="868680" y="3931920"/>
-            <a:ext cx="310896" cy="310896"/>
-          </a:xfrm>
-          <a:prstGeom prst="rect">
-            <a:avLst/>
-          </a:prstGeom>
-          <a:noFill/>
-          <a:ln/>
-        </p:spPr>
-        <p:txBody>
-          <a:bodyPr wrap="square" lIns="0" tIns="0" rIns="0" bIns="0" rtlCol="0" anchor="ctr"/>
-          <a:lstStyle/>
-          <a:p>
-            <a:pPr algn="ctr" indent="0" marL="0">
-              <a:buNone/>
-            </a:pPr>
-            <a:r>
-              <a:rPr lang="en-US" sz="1300" b="1" dirty="0">
-                <a:solidFill>
-                  <a:srgbClr val="FFFFFF"/>
-                </a:solidFill>
-                <a:latin typeface="Arial" pitchFamily="34" charset="0"/>
-                <a:ea typeface="Arial" pitchFamily="34" charset="-122"/>
-                <a:cs typeface="Arial" pitchFamily="34" charset="-120"/>
-              </a:rPr>
-              <a:t>3</a:t>
-            </a:r>
-            <a:endParaRPr lang="en-US" sz="1300" dirty="0"/>
-          </a:p>
-        </p:txBody>
-      </p:sp>
-      <p:sp>
-        <p:nvSpPr>
-          <p:cNvPr id="21" name="Text 19"/>
-          <p:cNvSpPr/>
-          <p:nvPr/>
-        </p:nvSpPr>
-        <p:spPr>
-          <a:xfrm>
-            <a:off x="1307592" y="3913632"/>
-            <a:ext cx="4480560" cy="329184"/>
+          <p:cNvPr id="109" name="Text 107"/>
+          <p:cNvSpPr/>
+          <p:nvPr/>
+        </p:nvSpPr>
+        <p:spPr>
+          <a:xfrm>
+            <a:off x="8513064" y="4974336"/>
+            <a:ext cx="3200400" cy="310896"/>
           </a:xfrm>
           <a:prstGeom prst="rect">
             <a:avLst/>
@@ -5344,30 +8942,179 @@
               <a:buNone/>
             </a:pPr>
             <a:r>
-              <a:rPr lang="en-US" sz="1350" b="1" dirty="0">
+              <a:rPr lang="en-US" sz="950" dirty="0">
+                <a:solidFill>
+                  <a:srgbClr val="7A6A64"/>
+                </a:solidFill>
+                <a:latin typeface="Arial" pitchFamily="34" charset="0"/>
+                <a:ea typeface="Arial" pitchFamily="34" charset="-122"/>
+                <a:cs typeface="Arial" pitchFamily="34" charset="-120"/>
+              </a:rPr>
+              <a:t>必要調達額（月商1か月のバッファ込）</a:t>
+            </a:r>
+            <a:endParaRPr lang="en-US" sz="950" dirty="0"/>
+          </a:p>
+        </p:txBody>
+      </p:sp>
+      <p:sp>
+        <p:nvSpPr>
+          <p:cNvPr id="110" name="Text 108"/>
+          <p:cNvSpPr/>
+          <p:nvPr/>
+        </p:nvSpPr>
+        <p:spPr>
+          <a:xfrm>
+            <a:off x="8513064" y="5303520"/>
+            <a:ext cx="3200400" cy="457200"/>
+          </a:xfrm>
+          <a:prstGeom prst="rect">
+            <a:avLst/>
+          </a:prstGeom>
+          <a:noFill/>
+          <a:ln/>
+        </p:spPr>
+        <p:txBody>
+          <a:bodyPr wrap="square" lIns="0" tIns="0" rIns="0" bIns="0" rtlCol="0" anchor="ctr"/>
+          <a:lstStyle/>
+          <a:p>
+            <a:pPr indent="0" marL="0">
+              <a:buNone/>
+            </a:pPr>
+            <a:r>
+              <a:rPr lang="en-US" sz="2200" b="1" dirty="0">
+                <a:solidFill>
+                  <a:srgbClr val="9A7B4F"/>
+                </a:solidFill>
+                <a:latin typeface="Cambria" pitchFamily="34" charset="0"/>
+                <a:ea typeface="Cambria" pitchFamily="34" charset="-122"/>
+                <a:cs typeface="Cambria" pitchFamily="34" charset="-120"/>
+              </a:rPr>
+              <a:t>37.7百万円</a:t>
+            </a:r>
+            <a:endParaRPr lang="en-US" sz="2200" dirty="0"/>
+          </a:p>
+        </p:txBody>
+      </p:sp>
+      <p:sp>
+        <p:nvSpPr>
+          <p:cNvPr id="111" name="Text 109"/>
+          <p:cNvSpPr/>
+          <p:nvPr/>
+        </p:nvSpPr>
+        <p:spPr>
+          <a:xfrm>
+            <a:off x="594360" y="6382512"/>
+            <a:ext cx="10972800" cy="274320"/>
+          </a:xfrm>
+          <a:prstGeom prst="rect">
+            <a:avLst/>
+          </a:prstGeom>
+          <a:noFill/>
+          <a:ln/>
+        </p:spPr>
+        <p:txBody>
+          <a:bodyPr wrap="square" lIns="0" tIns="0" rIns="0" bIns="0" rtlCol="0" anchor="ctr"/>
+          <a:lstStyle/>
+          <a:p>
+            <a:pPr indent="0" marL="0">
+              <a:buNone/>
+            </a:pPr>
+            <a:r>
+              <a:rPr lang="en-US" sz="850" dirty="0">
+                <a:solidFill>
+                  <a:srgbClr val="7A6A64"/>
+                </a:solidFill>
+                <a:latin typeface="Arial" pitchFamily="34" charset="0"/>
+                <a:ea typeface="Arial" pitchFamily="34" charset="-122"/>
+                <a:cs typeface="Arial" pitchFamily="34" charset="-120"/>
+              </a:rPr>
+              <a:t>期首現預金24.4百万円（2025/09末実績を暫定使用）、長期借入は みずほ返済後223.6百万円を7年均等返済と仮定。</a:t>
+            </a:r>
+            <a:endParaRPr lang="en-US" sz="850" dirty="0"/>
+          </a:p>
+        </p:txBody>
+      </p:sp>
+    </p:spTree>
+  </p:cSld>
+  <p:clrMapOvr>
+    <a:masterClrMapping/>
+  </p:clrMapOvr>
+</p:sld>
+</file>
+
+<file path=ppt/slides/slide13.xml><?xml version="1.0" encoding="utf-8"?>
+<p:sld xmlns:a="http://schemas.openxmlformats.org/drawingml/2006/main" xmlns:r="http://schemas.openxmlformats.org/officeDocument/2006/relationships" xmlns:p="http://schemas.openxmlformats.org/presentationml/2006/main">
+  <p:cSld name="Slide 13">
+    <p:bg>
+      <p:bgPr>
+        <a:solidFill>
+          <a:srgbClr val="F7F3EF"/>
+        </a:solidFill>
+      </p:bgPr>
+    </p:bg>
+    <p:spTree>
+      <p:nvGrpSpPr>
+        <p:cNvPr id="1" name=""/>
+        <p:cNvGrpSpPr/>
+        <p:nvPr/>
+      </p:nvGrpSpPr>
+      <p:grpSpPr>
+        <a:xfrm>
+          <a:off x="0" y="0"/>
+          <a:ext cx="0" cy="0"/>
+          <a:chOff x="0" y="0"/>
+          <a:chExt cx="0" cy="0"/>
+        </a:xfrm>
+      </p:grpSpPr>
+      <p:sp>
+        <p:nvSpPr>
+          <p:cNvPr id="2" name="Text 0"/>
+          <p:cNvSpPr/>
+          <p:nvPr/>
+        </p:nvSpPr>
+        <p:spPr>
+          <a:xfrm>
+            <a:off x="594360" y="384048"/>
+            <a:ext cx="10972800" cy="566928"/>
+          </a:xfrm>
+          <a:prstGeom prst="rect">
+            <a:avLst/>
+          </a:prstGeom>
+          <a:noFill/>
+          <a:ln/>
+        </p:spPr>
+        <p:txBody>
+          <a:bodyPr wrap="square" lIns="0" tIns="0" rIns="0" bIns="0" rtlCol="0" anchor="ctr"/>
+          <a:lstStyle/>
+          <a:p>
+            <a:pPr indent="0" marL="0">
+              <a:buNone/>
+            </a:pPr>
+            <a:r>
+              <a:rPr lang="en-US" sz="3000" b="1" dirty="0">
                 <a:solidFill>
                   <a:srgbClr val="6D2E46"/>
                 </a:solidFill>
-                <a:latin typeface="Arial" pitchFamily="34" charset="0"/>
-                <a:ea typeface="Arial" pitchFamily="34" charset="-122"/>
-                <a:cs typeface="Arial" pitchFamily="34" charset="-120"/>
-              </a:rPr>
-              <a:t>財務制限条項への抵触</a:t>
-            </a:r>
-            <a:endParaRPr lang="en-US" sz="1350" dirty="0"/>
-          </a:p>
-        </p:txBody>
-      </p:sp>
-      <p:sp>
-        <p:nvSpPr>
-          <p:cNvPr id="22" name="Text 20"/>
-          <p:cNvSpPr/>
-          <p:nvPr/>
-        </p:nvSpPr>
-        <p:spPr>
-          <a:xfrm>
-            <a:off x="886968" y="4334256"/>
-            <a:ext cx="4937760" cy="548640"/>
+                <a:latin typeface="Cambria" pitchFamily="34" charset="0"/>
+                <a:ea typeface="Cambria" pitchFamily="34" charset="-122"/>
+                <a:cs typeface="Cambria" pitchFamily="34" charset="-120"/>
+              </a:rPr>
+              <a:t>ワイン在庫が資金繰りを決める</a:t>
+            </a:r>
+            <a:endParaRPr lang="en-US" sz="3000" dirty="0"/>
+          </a:p>
+        </p:txBody>
+      </p:sp>
+      <p:sp>
+        <p:nvSpPr>
+          <p:cNvPr id="3" name="Text 1"/>
+          <p:cNvSpPr/>
+          <p:nvPr/>
+        </p:nvSpPr>
+        <p:spPr>
+          <a:xfrm>
+            <a:off x="594360" y="969264"/>
+            <a:ext cx="10972800" cy="310896"/>
           </a:xfrm>
           <a:prstGeom prst="rect">
             <a:avLst/>
@@ -5383,7 +9130,7 @@
               <a:buNone/>
             </a:pPr>
             <a:r>
-              <a:rPr lang="en-US" sz="1050" dirty="0">
+              <a:rPr lang="en-US" sz="1250" dirty="0">
                 <a:solidFill>
                   <a:srgbClr val="7A6A64"/>
                 </a:solidFill>
@@ -5391,87 +9138,26 @@
                 <a:ea typeface="Arial" pitchFamily="34" charset="-122"/>
                 <a:cs typeface="Arial" pitchFamily="34" charset="-120"/>
               </a:rPr>
-              <a:t>純資産維持条項・連続赤字条項に抵触する可能性があります。</a:t>
-            </a:r>
-            <a:endParaRPr lang="en-US" sz="1050" dirty="0"/>
-          </a:p>
-        </p:txBody>
-      </p:sp>
-      <p:sp>
-        <p:nvSpPr>
-          <p:cNvPr id="23" name="Shape 21"/>
-          <p:cNvSpPr/>
-          <p:nvPr/>
-        </p:nvSpPr>
-        <p:spPr>
-          <a:xfrm>
-            <a:off x="886968" y="4882896"/>
-            <a:ext cx="4937760" cy="694944"/>
+              <a:t>在庫の積み増しはPLに現れないが、そのまま資金流出になります。</a:t>
+            </a:r>
+            <a:endParaRPr lang="en-US" sz="1250" dirty="0"/>
+          </a:p>
+        </p:txBody>
+      </p:sp>
+      <p:sp>
+        <p:nvSpPr>
+          <p:cNvPr id="4" name="Shape 2"/>
+          <p:cNvSpPr/>
+          <p:nvPr/>
+        </p:nvSpPr>
+        <p:spPr>
+          <a:xfrm>
+            <a:off x="594360" y="1481328"/>
+            <a:ext cx="5349240" cy="2286000"/>
           </a:xfrm>
           <a:prstGeom prst="roundRect">
             <a:avLst>
-              <a:gd name="adj" fmla="val 6579"/>
-            </a:avLst>
-          </a:prstGeom>
-          <a:solidFill>
-            <a:srgbClr val="ECE2D0"/>
-          </a:solidFill>
-          <a:ln/>
-        </p:spPr>
-      </p:sp>
-      <p:sp>
-        <p:nvSpPr>
-          <p:cNvPr id="24" name="Text 22"/>
-          <p:cNvSpPr/>
-          <p:nvPr/>
-        </p:nvSpPr>
-        <p:spPr>
-          <a:xfrm>
-            <a:off x="1051560" y="4882896"/>
-            <a:ext cx="4617720" cy="694944"/>
-          </a:xfrm>
-          <a:prstGeom prst="rect">
-            <a:avLst/>
-          </a:prstGeom>
-          <a:noFill/>
-          <a:ln/>
-        </p:spPr>
-        <p:txBody>
-          <a:bodyPr wrap="square" lIns="0" tIns="0" rIns="0" bIns="0" rtlCol="0" anchor="ctr"/>
-          <a:lstStyle/>
-          <a:p>
-            <a:pPr indent="0" marL="0">
-              <a:buNone/>
-            </a:pPr>
-            <a:r>
-              <a:rPr lang="en-US" sz="1050" dirty="0">
-                <a:solidFill>
-                  <a:srgbClr val="2B2B2B"/>
-                </a:solidFill>
-                <a:latin typeface="Arial" pitchFamily="34" charset="0"/>
-                <a:ea typeface="Arial" pitchFamily="34" charset="-122"/>
-                <a:cs typeface="Arial" pitchFamily="34" charset="-120"/>
-              </a:rPr>
-              <a:t>借入契約書を精査のうえ、抵触前に事前にご相談し、ウェーバーを申請します。</a:t>
-            </a:r>
-            <a:endParaRPr lang="en-US" sz="1050" dirty="0"/>
-          </a:p>
-        </p:txBody>
-      </p:sp>
-      <p:sp>
-        <p:nvSpPr>
-          <p:cNvPr id="25" name="Shape 23"/>
-          <p:cNvSpPr/>
-          <p:nvPr/>
-        </p:nvSpPr>
-        <p:spPr>
-          <a:xfrm>
-            <a:off x="6400800" y="3694176"/>
-            <a:ext cx="5486400" cy="2029968"/>
-          </a:xfrm>
-          <a:prstGeom prst="roundRect">
-            <a:avLst>
-              <a:gd name="adj" fmla="val 2703"/>
+              <a:gd name="adj" fmla="val 2400"/>
             </a:avLst>
           </a:prstGeom>
           <a:solidFill>
@@ -5494,16 +9180,251 @@
       </p:sp>
       <p:sp>
         <p:nvSpPr>
-          <p:cNvPr id="26" name="Shape 24"/>
-          <p:cNvSpPr/>
-          <p:nvPr/>
-        </p:nvSpPr>
-        <p:spPr>
-          <a:xfrm>
-            <a:off x="6675120" y="3931920"/>
-            <a:ext cx="310896" cy="310896"/>
-          </a:xfrm>
-          <a:prstGeom prst="ellipse">
+          <p:cNvPr id="5" name="Text 3"/>
+          <p:cNvSpPr/>
+          <p:nvPr/>
+        </p:nvSpPr>
+        <p:spPr>
+          <a:xfrm>
+            <a:off x="914400" y="1664208"/>
+            <a:ext cx="4754880" cy="310896"/>
+          </a:xfrm>
+          <a:prstGeom prst="rect">
+            <a:avLst/>
+          </a:prstGeom>
+          <a:noFill/>
+          <a:ln/>
+        </p:spPr>
+        <p:txBody>
+          <a:bodyPr wrap="square" lIns="0" tIns="0" rIns="0" bIns="0" rtlCol="0" anchor="ctr"/>
+          <a:lstStyle/>
+          <a:p>
+            <a:pPr indent="0" marL="0">
+              <a:buNone/>
+            </a:pPr>
+            <a:r>
+              <a:rPr lang="en-US" sz="1200" b="1" dirty="0">
+                <a:solidFill>
+                  <a:srgbClr val="6D2E46"/>
+                </a:solidFill>
+                <a:latin typeface="Arial" pitchFamily="34" charset="0"/>
+                <a:ea typeface="Arial" pitchFamily="34" charset="-122"/>
+                <a:cs typeface="Arial" pitchFamily="34" charset="-120"/>
+              </a:rPr>
+              <a:t>自社在庫（簿価）の推移</a:t>
+            </a:r>
+            <a:endParaRPr lang="en-US" sz="1200" dirty="0"/>
+          </a:p>
+        </p:txBody>
+      </p:sp>
+      <p:sp>
+        <p:nvSpPr>
+          <p:cNvPr id="6" name="Shape 4"/>
+          <p:cNvSpPr/>
+          <p:nvPr/>
+        </p:nvSpPr>
+        <p:spPr>
+          <a:xfrm>
+            <a:off x="914400" y="2338050"/>
+            <a:ext cx="625450" cy="1063518"/>
+          </a:xfrm>
+          <a:prstGeom prst="rect">
+            <a:avLst/>
+          </a:prstGeom>
+          <a:solidFill>
+            <a:srgbClr val="C9AEB8"/>
+          </a:solidFill>
+          <a:ln/>
+        </p:spPr>
+      </p:sp>
+      <p:sp>
+        <p:nvSpPr>
+          <p:cNvPr id="7" name="Text 5"/>
+          <p:cNvSpPr/>
+          <p:nvPr/>
+        </p:nvSpPr>
+        <p:spPr>
+          <a:xfrm>
+            <a:off x="841248" y="2045442"/>
+            <a:ext cx="764438" cy="274320"/>
+          </a:xfrm>
+          <a:prstGeom prst="rect">
+            <a:avLst/>
+          </a:prstGeom>
+          <a:noFill/>
+          <a:ln/>
+        </p:spPr>
+        <p:txBody>
+          <a:bodyPr wrap="square" lIns="0" tIns="0" rIns="0" bIns="0" rtlCol="0" anchor="ctr"/>
+          <a:lstStyle/>
+          <a:p>
+            <a:pPr algn="ctr" indent="0" marL="0">
+              <a:buNone/>
+            </a:pPr>
+            <a:r>
+              <a:rPr lang="en-US" sz="1000" b="1" dirty="0">
+                <a:solidFill>
+                  <a:srgbClr val="6D2E46"/>
+                </a:solidFill>
+                <a:latin typeface="Arial" pitchFamily="34" charset="0"/>
+                <a:ea typeface="Arial" pitchFamily="34" charset="-122"/>
+                <a:cs typeface="Arial" pitchFamily="34" charset="-120"/>
+              </a:rPr>
+              <a:t>5.6</a:t>
+            </a:r>
+            <a:endParaRPr lang="en-US" sz="1000" dirty="0"/>
+          </a:p>
+        </p:txBody>
+      </p:sp>
+      <p:sp>
+        <p:nvSpPr>
+          <p:cNvPr id="8" name="Text 6"/>
+          <p:cNvSpPr/>
+          <p:nvPr/>
+        </p:nvSpPr>
+        <p:spPr>
+          <a:xfrm>
+            <a:off x="804672" y="3438144"/>
+            <a:ext cx="833933" cy="237744"/>
+          </a:xfrm>
+          <a:prstGeom prst="rect">
+            <a:avLst/>
+          </a:prstGeom>
+          <a:noFill/>
+          <a:ln/>
+        </p:spPr>
+        <p:txBody>
+          <a:bodyPr wrap="square" lIns="0" tIns="0" rIns="0" bIns="0" rtlCol="0" anchor="ctr"/>
+          <a:lstStyle/>
+          <a:p>
+            <a:pPr algn="ctr" indent="0" marL="0">
+              <a:buNone/>
+            </a:pPr>
+            <a:r>
+              <a:rPr lang="en-US" sz="850" dirty="0">
+                <a:solidFill>
+                  <a:srgbClr val="7A6A64"/>
+                </a:solidFill>
+                <a:latin typeface="Arial" pitchFamily="34" charset="0"/>
+                <a:ea typeface="Arial" pitchFamily="34" charset="-122"/>
+                <a:cs typeface="Arial" pitchFamily="34" charset="-120"/>
+              </a:rPr>
+              <a:t>24/12末</a:t>
+            </a:r>
+            <a:endParaRPr lang="en-US" sz="850" dirty="0"/>
+          </a:p>
+        </p:txBody>
+      </p:sp>
+      <p:sp>
+        <p:nvSpPr>
+          <p:cNvPr id="9" name="Shape 7"/>
+          <p:cNvSpPr/>
+          <p:nvPr/>
+        </p:nvSpPr>
+        <p:spPr>
+          <a:xfrm>
+            <a:off x="1874520" y="2508973"/>
+            <a:ext cx="625450" cy="892595"/>
+          </a:xfrm>
+          <a:prstGeom prst="rect">
+            <a:avLst/>
+          </a:prstGeom>
+          <a:solidFill>
+            <a:srgbClr val="C9AEB8"/>
+          </a:solidFill>
+          <a:ln/>
+        </p:spPr>
+      </p:sp>
+      <p:sp>
+        <p:nvSpPr>
+          <p:cNvPr id="10" name="Text 8"/>
+          <p:cNvSpPr/>
+          <p:nvPr/>
+        </p:nvSpPr>
+        <p:spPr>
+          <a:xfrm>
+            <a:off x="1801368" y="2216365"/>
+            <a:ext cx="764438" cy="274320"/>
+          </a:xfrm>
+          <a:prstGeom prst="rect">
+            <a:avLst/>
+          </a:prstGeom>
+          <a:noFill/>
+          <a:ln/>
+        </p:spPr>
+        <p:txBody>
+          <a:bodyPr wrap="square" lIns="0" tIns="0" rIns="0" bIns="0" rtlCol="0" anchor="ctr"/>
+          <a:lstStyle/>
+          <a:p>
+            <a:pPr algn="ctr" indent="0" marL="0">
+              <a:buNone/>
+            </a:pPr>
+            <a:r>
+              <a:rPr lang="en-US" sz="1000" b="1" dirty="0">
+                <a:solidFill>
+                  <a:srgbClr val="6D2E46"/>
+                </a:solidFill>
+                <a:latin typeface="Arial" pitchFamily="34" charset="0"/>
+                <a:ea typeface="Arial" pitchFamily="34" charset="-122"/>
+                <a:cs typeface="Arial" pitchFamily="34" charset="-120"/>
+              </a:rPr>
+              <a:t>4.7</a:t>
+            </a:r>
+            <a:endParaRPr lang="en-US" sz="1000" dirty="0"/>
+          </a:p>
+        </p:txBody>
+      </p:sp>
+      <p:sp>
+        <p:nvSpPr>
+          <p:cNvPr id="11" name="Text 9"/>
+          <p:cNvSpPr/>
+          <p:nvPr/>
+        </p:nvSpPr>
+        <p:spPr>
+          <a:xfrm>
+            <a:off x="1764792" y="3438144"/>
+            <a:ext cx="833933" cy="237744"/>
+          </a:xfrm>
+          <a:prstGeom prst="rect">
+            <a:avLst/>
+          </a:prstGeom>
+          <a:noFill/>
+          <a:ln/>
+        </p:spPr>
+        <p:txBody>
+          <a:bodyPr wrap="square" lIns="0" tIns="0" rIns="0" bIns="0" rtlCol="0" anchor="ctr"/>
+          <a:lstStyle/>
+          <a:p>
+            <a:pPr algn="ctr" indent="0" marL="0">
+              <a:buNone/>
+            </a:pPr>
+            <a:r>
+              <a:rPr lang="en-US" sz="850" dirty="0">
+                <a:solidFill>
+                  <a:srgbClr val="7A6A64"/>
+                </a:solidFill>
+                <a:latin typeface="Arial" pitchFamily="34" charset="0"/>
+                <a:ea typeface="Arial" pitchFamily="34" charset="-122"/>
+                <a:cs typeface="Arial" pitchFamily="34" charset="-120"/>
+              </a:rPr>
+              <a:t>25/07末</a:t>
+            </a:r>
+            <a:endParaRPr lang="en-US" sz="850" dirty="0"/>
+          </a:p>
+        </p:txBody>
+      </p:sp>
+      <p:sp>
+        <p:nvSpPr>
+          <p:cNvPr id="12" name="Shape 10"/>
+          <p:cNvSpPr/>
+          <p:nvPr/>
+        </p:nvSpPr>
+        <p:spPr>
+          <a:xfrm>
+            <a:off x="2834640" y="2489982"/>
+            <a:ext cx="625450" cy="911586"/>
+          </a:xfrm>
+          <a:prstGeom prst="rect">
             <a:avLst/>
           </a:prstGeom>
           <a:solidFill>
@@ -5514,69 +9435,30 @@
       </p:sp>
       <p:sp>
         <p:nvSpPr>
-          <p:cNvPr id="27" name="Text 25"/>
-          <p:cNvSpPr/>
-          <p:nvPr/>
-        </p:nvSpPr>
-        <p:spPr>
-          <a:xfrm>
-            <a:off x="6675120" y="3931920"/>
-            <a:ext cx="310896" cy="310896"/>
-          </a:xfrm>
-          <a:prstGeom prst="rect">
-            <a:avLst/>
-          </a:prstGeom>
-          <a:noFill/>
-          <a:ln/>
-        </p:spPr>
-        <p:txBody>
-          <a:bodyPr wrap="square" lIns="0" tIns="0" rIns="0" bIns="0" rtlCol="0" anchor="ctr"/>
-          <a:lstStyle/>
-          <a:p>
-            <a:pPr algn="ctr" indent="0" marL="0">
-              <a:buNone/>
-            </a:pPr>
-            <a:r>
-              <a:rPr lang="en-US" sz="1300" b="1" dirty="0">
-                <a:solidFill>
-                  <a:srgbClr val="FFFFFF"/>
-                </a:solidFill>
-                <a:latin typeface="Arial" pitchFamily="34" charset="0"/>
-                <a:ea typeface="Arial" pitchFamily="34" charset="-122"/>
-                <a:cs typeface="Arial" pitchFamily="34" charset="-120"/>
-              </a:rPr>
-              <a:t>4</a:t>
-            </a:r>
-            <a:endParaRPr lang="en-US" sz="1300" dirty="0"/>
-          </a:p>
-        </p:txBody>
-      </p:sp>
-      <p:sp>
-        <p:nvSpPr>
-          <p:cNvPr id="28" name="Text 26"/>
-          <p:cNvSpPr/>
-          <p:nvPr/>
-        </p:nvSpPr>
-        <p:spPr>
-          <a:xfrm>
-            <a:off x="7114032" y="3913632"/>
-            <a:ext cx="4480560" cy="329184"/>
-          </a:xfrm>
-          <a:prstGeom prst="rect">
-            <a:avLst/>
-          </a:prstGeom>
-          <a:noFill/>
-          <a:ln/>
-        </p:spPr>
-        <p:txBody>
-          <a:bodyPr wrap="square" lIns="0" tIns="0" rIns="0" bIns="0" rtlCol="0" anchor="ctr"/>
-          <a:lstStyle/>
-          <a:p>
-            <a:pPr indent="0" marL="0">
-              <a:buNone/>
-            </a:pPr>
-            <a:r>
-              <a:rPr lang="en-US" sz="1350" b="1" dirty="0">
+          <p:cNvPr id="13" name="Text 11"/>
+          <p:cNvSpPr/>
+          <p:nvPr/>
+        </p:nvSpPr>
+        <p:spPr>
+          <a:xfrm>
+            <a:off x="2761488" y="2197374"/>
+            <a:ext cx="764438" cy="274320"/>
+          </a:xfrm>
+          <a:prstGeom prst="rect">
+            <a:avLst/>
+          </a:prstGeom>
+          <a:noFill/>
+          <a:ln/>
+        </p:spPr>
+        <p:txBody>
+          <a:bodyPr wrap="square" lIns="0" tIns="0" rIns="0" bIns="0" rtlCol="0" anchor="ctr"/>
+          <a:lstStyle/>
+          <a:p>
+            <a:pPr algn="ctr" indent="0" marL="0">
+              <a:buNone/>
+            </a:pPr>
+            <a:r>
+              <a:rPr lang="en-US" sz="1000" b="1" dirty="0">
                 <a:solidFill>
                   <a:srgbClr val="6D2E46"/>
                 </a:solidFill>
@@ -5584,38 +9466,38 @@
                 <a:ea typeface="Arial" pitchFamily="34" charset="-122"/>
                 <a:cs typeface="Arial" pitchFamily="34" charset="-120"/>
               </a:rPr>
-              <a:t>上乗せ案件の契約化</a:t>
-            </a:r>
-            <a:endParaRPr lang="en-US" sz="1350" dirty="0"/>
-          </a:p>
-        </p:txBody>
-      </p:sp>
-      <p:sp>
-        <p:nvSpPr>
-          <p:cNvPr id="29" name="Text 27"/>
-          <p:cNvSpPr/>
-          <p:nvPr/>
-        </p:nvSpPr>
-        <p:spPr>
-          <a:xfrm>
-            <a:off x="6693408" y="4334256"/>
-            <a:ext cx="4937760" cy="548640"/>
-          </a:xfrm>
-          <a:prstGeom prst="rect">
-            <a:avLst/>
-          </a:prstGeom>
-          <a:noFill/>
-          <a:ln/>
-        </p:spPr>
-        <p:txBody>
-          <a:bodyPr wrap="square" lIns="0" tIns="0" rIns="0" bIns="0" rtlCol="0" anchor="ctr"/>
-          <a:lstStyle/>
-          <a:p>
-            <a:pPr indent="0" marL="0">
-              <a:buNone/>
-            </a:pPr>
-            <a:r>
-              <a:rPr lang="en-US" sz="1050" dirty="0">
+              <a:t>4.8</a:t>
+            </a:r>
+            <a:endParaRPr lang="en-US" sz="1000" dirty="0"/>
+          </a:p>
+        </p:txBody>
+      </p:sp>
+      <p:sp>
+        <p:nvSpPr>
+          <p:cNvPr id="14" name="Text 12"/>
+          <p:cNvSpPr/>
+          <p:nvPr/>
+        </p:nvSpPr>
+        <p:spPr>
+          <a:xfrm>
+            <a:off x="2724912" y="3438144"/>
+            <a:ext cx="833933" cy="237744"/>
+          </a:xfrm>
+          <a:prstGeom prst="rect">
+            <a:avLst/>
+          </a:prstGeom>
+          <a:noFill/>
+          <a:ln/>
+        </p:spPr>
+        <p:txBody>
+          <a:bodyPr wrap="square" lIns="0" tIns="0" rIns="0" bIns="0" rtlCol="0" anchor="ctr"/>
+          <a:lstStyle/>
+          <a:p>
+            <a:pPr algn="ctr" indent="0" marL="0">
+              <a:buNone/>
+            </a:pPr>
+            <a:r>
+              <a:rPr lang="en-US" sz="850" dirty="0">
                 <a:solidFill>
                   <a:srgbClr val="7A6A64"/>
                 </a:solidFill>
@@ -5623,44 +9505,648 @@
                 <a:ea typeface="Arial" pitchFamily="34" charset="-122"/>
                 <a:cs typeface="Arial" pitchFamily="34" charset="-120"/>
               </a:rPr>
-              <a:t>経営指導料は契約書の締結時期により計上期が動きます。</a:t>
-            </a:r>
-            <a:endParaRPr lang="en-US" sz="1050" dirty="0"/>
-          </a:p>
-        </p:txBody>
-      </p:sp>
-      <p:sp>
-        <p:nvSpPr>
-          <p:cNvPr id="30" name="Shape 28"/>
-          <p:cNvSpPr/>
-          <p:nvPr/>
-        </p:nvSpPr>
-        <p:spPr>
-          <a:xfrm>
-            <a:off x="6693408" y="4882896"/>
-            <a:ext cx="4937760" cy="694944"/>
+              <a:t>25/09末</a:t>
+            </a:r>
+            <a:endParaRPr lang="en-US" sz="850" dirty="0"/>
+          </a:p>
+        </p:txBody>
+      </p:sp>
+      <p:sp>
+        <p:nvSpPr>
+          <p:cNvPr id="15" name="Shape 13"/>
+          <p:cNvSpPr/>
+          <p:nvPr/>
+        </p:nvSpPr>
+        <p:spPr>
+          <a:xfrm>
+            <a:off x="3794760" y="2395025"/>
+            <a:ext cx="625450" cy="1006543"/>
+          </a:xfrm>
+          <a:prstGeom prst="rect">
+            <a:avLst/>
+          </a:prstGeom>
+          <a:solidFill>
+            <a:srgbClr val="6D2E46"/>
+          </a:solidFill>
+          <a:ln/>
+        </p:spPr>
+      </p:sp>
+      <p:sp>
+        <p:nvSpPr>
+          <p:cNvPr id="16" name="Text 14"/>
+          <p:cNvSpPr/>
+          <p:nvPr/>
+        </p:nvSpPr>
+        <p:spPr>
+          <a:xfrm>
+            <a:off x="3721608" y="2102417"/>
+            <a:ext cx="764438" cy="274320"/>
+          </a:xfrm>
+          <a:prstGeom prst="rect">
+            <a:avLst/>
+          </a:prstGeom>
+          <a:noFill/>
+          <a:ln/>
+        </p:spPr>
+        <p:txBody>
+          <a:bodyPr wrap="square" lIns="0" tIns="0" rIns="0" bIns="0" rtlCol="0" anchor="ctr"/>
+          <a:lstStyle/>
+          <a:p>
+            <a:pPr algn="ctr" indent="0" marL="0">
+              <a:buNone/>
+            </a:pPr>
+            <a:r>
+              <a:rPr lang="en-US" sz="1000" b="1" dirty="0">
+                <a:solidFill>
+                  <a:srgbClr val="6D2E46"/>
+                </a:solidFill>
+                <a:latin typeface="Arial" pitchFamily="34" charset="0"/>
+                <a:ea typeface="Arial" pitchFamily="34" charset="-122"/>
+                <a:cs typeface="Arial" pitchFamily="34" charset="-120"/>
+              </a:rPr>
+              <a:t>5.3</a:t>
+            </a:r>
+            <a:endParaRPr lang="en-US" sz="1000" dirty="0"/>
+          </a:p>
+        </p:txBody>
+      </p:sp>
+      <p:sp>
+        <p:nvSpPr>
+          <p:cNvPr id="17" name="Text 15"/>
+          <p:cNvSpPr/>
+          <p:nvPr/>
+        </p:nvSpPr>
+        <p:spPr>
+          <a:xfrm>
+            <a:off x="3685032" y="3438144"/>
+            <a:ext cx="833933" cy="237744"/>
+          </a:xfrm>
+          <a:prstGeom prst="rect">
+            <a:avLst/>
+          </a:prstGeom>
+          <a:noFill/>
+          <a:ln/>
+        </p:spPr>
+        <p:txBody>
+          <a:bodyPr wrap="square" lIns="0" tIns="0" rIns="0" bIns="0" rtlCol="0" anchor="ctr"/>
+          <a:lstStyle/>
+          <a:p>
+            <a:pPr algn="ctr" indent="0" marL="0">
+              <a:buNone/>
+            </a:pPr>
+            <a:r>
+              <a:rPr lang="en-US" sz="850" dirty="0">
+                <a:solidFill>
+                  <a:srgbClr val="7A6A64"/>
+                </a:solidFill>
+                <a:latin typeface="Arial" pitchFamily="34" charset="0"/>
+                <a:ea typeface="Arial" pitchFamily="34" charset="-122"/>
+                <a:cs typeface="Arial" pitchFamily="34" charset="-120"/>
+              </a:rPr>
+              <a:t>25/12末</a:t>
+            </a:r>
+            <a:endParaRPr lang="en-US" sz="850" dirty="0"/>
+          </a:p>
+        </p:txBody>
+      </p:sp>
+      <p:sp>
+        <p:nvSpPr>
+          <p:cNvPr id="18" name="Shape 16"/>
+          <p:cNvSpPr/>
+          <p:nvPr/>
+        </p:nvSpPr>
+        <p:spPr>
+          <a:xfrm>
+            <a:off x="4754880" y="2224102"/>
+            <a:ext cx="625450" cy="1177466"/>
+          </a:xfrm>
+          <a:prstGeom prst="rect">
+            <a:avLst/>
+          </a:prstGeom>
+          <a:solidFill>
+            <a:srgbClr val="6D2E46"/>
+          </a:solidFill>
+          <a:ln/>
+        </p:spPr>
+      </p:sp>
+      <p:sp>
+        <p:nvSpPr>
+          <p:cNvPr id="19" name="Text 17"/>
+          <p:cNvSpPr/>
+          <p:nvPr/>
+        </p:nvSpPr>
+        <p:spPr>
+          <a:xfrm>
+            <a:off x="4681728" y="1931494"/>
+            <a:ext cx="764438" cy="274320"/>
+          </a:xfrm>
+          <a:prstGeom prst="rect">
+            <a:avLst/>
+          </a:prstGeom>
+          <a:noFill/>
+          <a:ln/>
+        </p:spPr>
+        <p:txBody>
+          <a:bodyPr wrap="square" lIns="0" tIns="0" rIns="0" bIns="0" rtlCol="0" anchor="ctr"/>
+          <a:lstStyle/>
+          <a:p>
+            <a:pPr algn="ctr" indent="0" marL="0">
+              <a:buNone/>
+            </a:pPr>
+            <a:r>
+              <a:rPr lang="en-US" sz="1000" b="1" dirty="0">
+                <a:solidFill>
+                  <a:srgbClr val="6D2E46"/>
+                </a:solidFill>
+                <a:latin typeface="Arial" pitchFamily="34" charset="0"/>
+                <a:ea typeface="Arial" pitchFamily="34" charset="-122"/>
+                <a:cs typeface="Arial" pitchFamily="34" charset="-120"/>
+              </a:rPr>
+              <a:t>6.2</a:t>
+            </a:r>
+            <a:endParaRPr lang="en-US" sz="1000" dirty="0"/>
+          </a:p>
+        </p:txBody>
+      </p:sp>
+      <p:sp>
+        <p:nvSpPr>
+          <p:cNvPr id="20" name="Text 18"/>
+          <p:cNvSpPr/>
+          <p:nvPr/>
+        </p:nvSpPr>
+        <p:spPr>
+          <a:xfrm>
+            <a:off x="4645152" y="3438144"/>
+            <a:ext cx="833933" cy="237744"/>
+          </a:xfrm>
+          <a:prstGeom prst="rect">
+            <a:avLst/>
+          </a:prstGeom>
+          <a:noFill/>
+          <a:ln/>
+        </p:spPr>
+        <p:txBody>
+          <a:bodyPr wrap="square" lIns="0" tIns="0" rIns="0" bIns="0" rtlCol="0" anchor="ctr"/>
+          <a:lstStyle/>
+          <a:p>
+            <a:pPr algn="ctr" indent="0" marL="0">
+              <a:buNone/>
+            </a:pPr>
+            <a:r>
+              <a:rPr lang="en-US" sz="850" dirty="0">
+                <a:solidFill>
+                  <a:srgbClr val="7A6A64"/>
+                </a:solidFill>
+                <a:latin typeface="Arial" pitchFamily="34" charset="0"/>
+                <a:ea typeface="Arial" pitchFamily="34" charset="-122"/>
+                <a:cs typeface="Arial" pitchFamily="34" charset="-120"/>
+              </a:rPr>
+              <a:t>26/03末</a:t>
+            </a:r>
+            <a:endParaRPr lang="en-US" sz="850" dirty="0"/>
+          </a:p>
+        </p:txBody>
+      </p:sp>
+      <p:sp>
+        <p:nvSpPr>
+          <p:cNvPr id="21" name="Text 19"/>
+          <p:cNvSpPr/>
+          <p:nvPr/>
+        </p:nvSpPr>
+        <p:spPr>
+          <a:xfrm>
+            <a:off x="4572000" y="1682496"/>
+            <a:ext cx="1188720" cy="237744"/>
+          </a:xfrm>
+          <a:prstGeom prst="rect">
+            <a:avLst/>
+          </a:prstGeom>
+          <a:noFill/>
+          <a:ln/>
+        </p:spPr>
+        <p:txBody>
+          <a:bodyPr wrap="square" lIns="0" tIns="0" rIns="0" bIns="0" rtlCol="0" anchor="ctr"/>
+          <a:lstStyle/>
+          <a:p>
+            <a:pPr algn="r" indent="0" marL="0">
+              <a:buNone/>
+            </a:pPr>
+            <a:r>
+              <a:rPr lang="en-US" sz="850" dirty="0">
+                <a:solidFill>
+                  <a:srgbClr val="7A6A64"/>
+                </a:solidFill>
+                <a:latin typeface="Arial" pitchFamily="34" charset="0"/>
+                <a:ea typeface="Arial" pitchFamily="34" charset="-122"/>
+                <a:cs typeface="Arial" pitchFamily="34" charset="-120"/>
+              </a:rPr>
+              <a:t>単位：億円</a:t>
+            </a:r>
+            <a:endParaRPr lang="en-US" sz="850" dirty="0"/>
+          </a:p>
+        </p:txBody>
+      </p:sp>
+      <p:sp>
+        <p:nvSpPr>
+          <p:cNvPr id="22" name="Shape 20"/>
+          <p:cNvSpPr/>
+          <p:nvPr/>
+        </p:nvSpPr>
+        <p:spPr>
+          <a:xfrm>
+            <a:off x="6217920" y="1481328"/>
+            <a:ext cx="5349240" cy="2286000"/>
           </a:xfrm>
           <a:prstGeom prst="roundRect">
             <a:avLst>
-              <a:gd name="adj" fmla="val 6579"/>
+              <a:gd name="adj" fmla="val 2400"/>
             </a:avLst>
+          </a:prstGeom>
+          <a:solidFill>
+            <a:srgbClr val="6D2E46"/>
+          </a:solidFill>
+          <a:ln w="9525">
+            <a:solidFill>
+              <a:srgbClr val="DED5CE"/>
+            </a:solidFill>
+            <a:prstDash val="solid"/>
+          </a:ln>
+          <a:effectLst>
+            <a:outerShdw sx="100000" sy="100000" kx="0" ky="0" algn="bl" rotWithShape="0" blurRad="127000" dist="25400" dir="5400000">
+              <a:srgbClr val="000000">
+                <a:alpha val="10000"/>
+              </a:srgbClr>
+            </a:outerShdw>
+          </a:effectLst>
+        </p:spPr>
+      </p:sp>
+      <p:sp>
+        <p:nvSpPr>
+          <p:cNvPr id="23" name="Text 21"/>
+          <p:cNvSpPr/>
+          <p:nvPr/>
+        </p:nvSpPr>
+        <p:spPr>
+          <a:xfrm>
+            <a:off x="6537960" y="1691640"/>
+            <a:ext cx="4709160" cy="274320"/>
+          </a:xfrm>
+          <a:prstGeom prst="rect">
+            <a:avLst/>
+          </a:prstGeom>
+          <a:noFill/>
+          <a:ln/>
+        </p:spPr>
+        <p:txBody>
+          <a:bodyPr wrap="square" lIns="0" tIns="0" rIns="0" bIns="0" rtlCol="0" anchor="ctr"/>
+          <a:lstStyle/>
+          <a:p>
+            <a:pPr indent="0" marL="0">
+              <a:buNone/>
+            </a:pPr>
+            <a:r>
+              <a:rPr lang="en-US" sz="1100" dirty="0">
+                <a:solidFill>
+                  <a:srgbClr val="ECE2D0"/>
+                </a:solidFill>
+                <a:latin typeface="Arial" pitchFamily="34" charset="0"/>
+                <a:ea typeface="Arial" pitchFamily="34" charset="-122"/>
+                <a:cs typeface="Arial" pitchFamily="34" charset="-120"/>
+              </a:rPr>
+              <a:t>2025/09末 → 2026/03末</a:t>
+            </a:r>
+            <a:endParaRPr lang="en-US" sz="1100" dirty="0"/>
+          </a:p>
+        </p:txBody>
+      </p:sp>
+      <p:sp>
+        <p:nvSpPr>
+          <p:cNvPr id="24" name="Text 22"/>
+          <p:cNvSpPr/>
+          <p:nvPr/>
+        </p:nvSpPr>
+        <p:spPr>
+          <a:xfrm>
+            <a:off x="6537960" y="1965960"/>
+            <a:ext cx="4709160" cy="685800"/>
+          </a:xfrm>
+          <a:prstGeom prst="rect">
+            <a:avLst/>
+          </a:prstGeom>
+          <a:noFill/>
+          <a:ln/>
+        </p:spPr>
+        <p:txBody>
+          <a:bodyPr wrap="square" lIns="0" tIns="0" rIns="0" bIns="0" rtlCol="0" anchor="ctr"/>
+          <a:lstStyle/>
+          <a:p>
+            <a:pPr indent="0" marL="0">
+              <a:buNone/>
+            </a:pPr>
+            <a:r>
+              <a:rPr lang="en-US" sz="3800" b="1" dirty="0">
+                <a:solidFill>
+                  <a:srgbClr val="FFFFFF"/>
+                </a:solidFill>
+                <a:latin typeface="Cambria" pitchFamily="34" charset="0"/>
+                <a:ea typeface="Cambria" pitchFamily="34" charset="-122"/>
+                <a:cs typeface="Cambria" pitchFamily="34" charset="-120"/>
+              </a:rPr>
+              <a:t>＋1.4億円</a:t>
+            </a:r>
+            <a:endParaRPr lang="en-US" sz="3800" dirty="0"/>
+          </a:p>
+        </p:txBody>
+      </p:sp>
+      <p:sp>
+        <p:nvSpPr>
+          <p:cNvPr id="25" name="Text 23"/>
+          <p:cNvSpPr/>
+          <p:nvPr/>
+        </p:nvSpPr>
+        <p:spPr>
+          <a:xfrm>
+            <a:off x="6537960" y="2697480"/>
+            <a:ext cx="4709160" cy="868680"/>
+          </a:xfrm>
+          <a:prstGeom prst="rect">
+            <a:avLst/>
+          </a:prstGeom>
+          <a:noFill/>
+          <a:ln/>
+        </p:spPr>
+        <p:txBody>
+          <a:bodyPr wrap="square" lIns="0" tIns="0" rIns="0" bIns="0" rtlCol="0" anchor="t"/>
+          <a:lstStyle/>
+          <a:p>
+            <a:pPr indent="0" marL="0">
+              <a:buNone/>
+            </a:pPr>
+            <a:r>
+              <a:rPr lang="en-US" sz="1150" dirty="0">
+                <a:solidFill>
+                  <a:srgbClr val="ECE2D0"/>
+                </a:solidFill>
+                <a:latin typeface="Arial" pitchFamily="34" charset="0"/>
+                <a:ea typeface="Arial" pitchFamily="34" charset="-122"/>
+                <a:cs typeface="Arial" pitchFamily="34" charset="-120"/>
+              </a:rPr>
+              <a:t>6か月で在庫が1.4億円増加＝月23.3百万円の資金が在庫に固定されました。この分はPLの利益には一切現れません。</a:t>
+            </a:r>
+            <a:endParaRPr lang="en-US" sz="1150" dirty="0"/>
+          </a:p>
+        </p:txBody>
+      </p:sp>
+      <p:sp>
+        <p:nvSpPr>
+          <p:cNvPr id="26" name="Text 24"/>
+          <p:cNvSpPr/>
+          <p:nvPr/>
+        </p:nvSpPr>
+        <p:spPr>
+          <a:xfrm>
+            <a:off x="594360" y="3950208"/>
+            <a:ext cx="7315200" cy="329184"/>
+          </a:xfrm>
+          <a:prstGeom prst="rect">
+            <a:avLst/>
+          </a:prstGeom>
+          <a:noFill/>
+          <a:ln/>
+        </p:spPr>
+        <p:txBody>
+          <a:bodyPr wrap="square" lIns="0" tIns="0" rIns="0" bIns="0" rtlCol="0" anchor="ctr"/>
+          <a:lstStyle/>
+          <a:p>
+            <a:pPr indent="0" marL="0">
+              <a:buNone/>
+            </a:pPr>
+            <a:r>
+              <a:rPr lang="en-US" sz="1700" b="1" dirty="0">
+                <a:solidFill>
+                  <a:srgbClr val="6D2E46"/>
+                </a:solidFill>
+                <a:latin typeface="Cambria" pitchFamily="34" charset="0"/>
+                <a:ea typeface="Cambria" pitchFamily="34" charset="-122"/>
+                <a:cs typeface="Cambria" pitchFamily="34" charset="-120"/>
+              </a:rPr>
+              <a:t>感応度 － 4つのケースでの必要調達額</a:t>
+            </a:r>
+            <a:endParaRPr lang="en-US" sz="1700" dirty="0"/>
+          </a:p>
+        </p:txBody>
+      </p:sp>
+      <p:sp>
+        <p:nvSpPr>
+          <p:cNvPr id="27" name="Shape 25"/>
+          <p:cNvSpPr/>
+          <p:nvPr/>
+        </p:nvSpPr>
+        <p:spPr>
+          <a:xfrm>
+            <a:off x="594360" y="4370832"/>
+            <a:ext cx="10963656" cy="365760"/>
+          </a:xfrm>
+          <a:prstGeom prst="rect">
+            <a:avLst/>
+          </a:prstGeom>
+          <a:solidFill>
+            <a:srgbClr val="6D2E46"/>
+          </a:solidFill>
+          <a:ln/>
+        </p:spPr>
+      </p:sp>
+      <p:sp>
+        <p:nvSpPr>
+          <p:cNvPr id="28" name="Text 26"/>
+          <p:cNvSpPr/>
+          <p:nvPr/>
+        </p:nvSpPr>
+        <p:spPr>
+          <a:xfrm>
+            <a:off x="822960" y="4370832"/>
+            <a:ext cx="5120640" cy="365760"/>
+          </a:xfrm>
+          <a:prstGeom prst="rect">
+            <a:avLst/>
+          </a:prstGeom>
+          <a:noFill/>
+          <a:ln/>
+        </p:spPr>
+        <p:txBody>
+          <a:bodyPr wrap="square" lIns="0" tIns="0" rIns="0" bIns="0" rtlCol="0" anchor="ctr"/>
+          <a:lstStyle/>
+          <a:p>
+            <a:pPr algn="l" indent="0" marL="0">
+              <a:buNone/>
+            </a:pPr>
+            <a:r>
+              <a:rPr lang="en-US" sz="950" b="1" dirty="0">
+                <a:solidFill>
+                  <a:srgbClr val="FFFFFF"/>
+                </a:solidFill>
+                <a:latin typeface="Arial" pitchFamily="34" charset="0"/>
+                <a:ea typeface="Arial" pitchFamily="34" charset="-122"/>
+                <a:cs typeface="Arial" pitchFamily="34" charset="-120"/>
+              </a:rPr>
+              <a:t>ケース</a:t>
+            </a:r>
+            <a:endParaRPr lang="en-US" sz="950" dirty="0"/>
+          </a:p>
+        </p:txBody>
+      </p:sp>
+      <p:sp>
+        <p:nvSpPr>
+          <p:cNvPr id="29" name="Text 27"/>
+          <p:cNvSpPr/>
+          <p:nvPr/>
+        </p:nvSpPr>
+        <p:spPr>
+          <a:xfrm>
+            <a:off x="6126480" y="4370832"/>
+            <a:ext cx="1554480" cy="365760"/>
+          </a:xfrm>
+          <a:prstGeom prst="rect">
+            <a:avLst/>
+          </a:prstGeom>
+          <a:noFill/>
+          <a:ln/>
+        </p:spPr>
+        <p:txBody>
+          <a:bodyPr wrap="square" lIns="0" tIns="0" rIns="0" bIns="0" rtlCol="0" anchor="ctr"/>
+          <a:lstStyle/>
+          <a:p>
+            <a:pPr algn="r" indent="0" marL="0">
+              <a:buNone/>
+            </a:pPr>
+            <a:r>
+              <a:rPr lang="en-US" sz="950" b="1" dirty="0">
+                <a:solidFill>
+                  <a:srgbClr val="FFFFFF"/>
+                </a:solidFill>
+                <a:latin typeface="Arial" pitchFamily="34" charset="0"/>
+                <a:ea typeface="Arial" pitchFamily="34" charset="-122"/>
+                <a:cs typeface="Arial" pitchFamily="34" charset="-120"/>
+              </a:rPr>
+              <a:t>期末残高</a:t>
+            </a:r>
+            <a:endParaRPr lang="en-US" sz="950" dirty="0"/>
+          </a:p>
+        </p:txBody>
+      </p:sp>
+      <p:sp>
+        <p:nvSpPr>
+          <p:cNvPr id="30" name="Text 28"/>
+          <p:cNvSpPr/>
+          <p:nvPr/>
+        </p:nvSpPr>
+        <p:spPr>
+          <a:xfrm>
+            <a:off x="7863840" y="4370832"/>
+            <a:ext cx="1737360" cy="365760"/>
+          </a:xfrm>
+          <a:prstGeom prst="rect">
+            <a:avLst/>
+          </a:prstGeom>
+          <a:noFill/>
+          <a:ln/>
+        </p:spPr>
+        <p:txBody>
+          <a:bodyPr wrap="square" lIns="0" tIns="0" rIns="0" bIns="0" rtlCol="0" anchor="ctr"/>
+          <a:lstStyle/>
+          <a:p>
+            <a:pPr algn="r" indent="0" marL="0">
+              <a:buNone/>
+            </a:pPr>
+            <a:r>
+              <a:rPr lang="en-US" sz="950" b="1" dirty="0">
+                <a:solidFill>
+                  <a:srgbClr val="FFFFFF"/>
+                </a:solidFill>
+                <a:latin typeface="Arial" pitchFamily="34" charset="0"/>
+                <a:ea typeface="Arial" pitchFamily="34" charset="-122"/>
+                <a:cs typeface="Arial" pitchFamily="34" charset="-120"/>
+              </a:rPr>
+              <a:t>期中最低残高</a:t>
+            </a:r>
+            <a:endParaRPr lang="en-US" sz="950" dirty="0"/>
+          </a:p>
+        </p:txBody>
+      </p:sp>
+      <p:sp>
+        <p:nvSpPr>
+          <p:cNvPr id="31" name="Text 29"/>
+          <p:cNvSpPr/>
+          <p:nvPr/>
+        </p:nvSpPr>
+        <p:spPr>
+          <a:xfrm>
+            <a:off x="9784080" y="4370832"/>
+            <a:ext cx="1600200" cy="365760"/>
+          </a:xfrm>
+          <a:prstGeom prst="rect">
+            <a:avLst/>
+          </a:prstGeom>
+          <a:noFill/>
+          <a:ln/>
+        </p:spPr>
+        <p:txBody>
+          <a:bodyPr wrap="square" lIns="0" tIns="0" rIns="0" bIns="0" rtlCol="0" anchor="ctr"/>
+          <a:lstStyle/>
+          <a:p>
+            <a:pPr algn="r" indent="0" marL="0">
+              <a:buNone/>
+            </a:pPr>
+            <a:r>
+              <a:rPr lang="en-US" sz="950" b="1" dirty="0">
+                <a:solidFill>
+                  <a:srgbClr val="FFFFFF"/>
+                </a:solidFill>
+                <a:latin typeface="Arial" pitchFamily="34" charset="0"/>
+                <a:ea typeface="Arial" pitchFamily="34" charset="-122"/>
+                <a:cs typeface="Arial" pitchFamily="34" charset="-120"/>
+              </a:rPr>
+              <a:t>必要調達額</a:t>
+            </a:r>
+            <a:endParaRPr lang="en-US" sz="950" dirty="0"/>
+          </a:p>
+        </p:txBody>
+      </p:sp>
+      <p:sp>
+        <p:nvSpPr>
+          <p:cNvPr id="32" name="Shape 30"/>
+          <p:cNvSpPr/>
+          <p:nvPr/>
+        </p:nvSpPr>
+        <p:spPr>
+          <a:xfrm>
+            <a:off x="594360" y="4736592"/>
+            <a:ext cx="10963656" cy="402336"/>
+          </a:xfrm>
+          <a:prstGeom prst="rect">
+            <a:avLst/>
           </a:prstGeom>
           <a:solidFill>
             <a:srgbClr val="ECE2D0"/>
           </a:solidFill>
-          <a:ln/>
-        </p:spPr>
-      </p:sp>
-      <p:sp>
-        <p:nvSpPr>
-          <p:cNvPr id="31" name="Text 29"/>
-          <p:cNvSpPr/>
-          <p:nvPr/>
-        </p:nvSpPr>
-        <p:spPr>
-          <a:xfrm>
-            <a:off x="6858000" y="4882896"/>
-            <a:ext cx="4617720" cy="694944"/>
+          <a:ln w="6350">
+            <a:solidFill>
+              <a:srgbClr val="DED5CE"/>
+            </a:solidFill>
+            <a:prstDash val="solid"/>
+          </a:ln>
+        </p:spPr>
+      </p:sp>
+      <p:sp>
+        <p:nvSpPr>
+          <p:cNvPr id="33" name="Text 31"/>
+          <p:cNvSpPr/>
+          <p:nvPr/>
+        </p:nvSpPr>
+        <p:spPr>
+          <a:xfrm>
+            <a:off x="822960" y="4736592"/>
+            <a:ext cx="5120640" cy="402336"/>
           </a:xfrm>
           <a:prstGeom prst="rect">
             <a:avLst/>
@@ -5676,15 +10162,196 @@
               <a:buNone/>
             </a:pPr>
             <a:r>
+              <a:rPr lang="en-US" sz="1050" b="1" dirty="0">
+                <a:solidFill>
+                  <a:srgbClr val="2B2B2B"/>
+                </a:solidFill>
+                <a:latin typeface="Arial" pitchFamily="34" charset="0"/>
+                <a:ea typeface="Arial" pitchFamily="34" charset="-122"/>
+                <a:cs typeface="Arial" pitchFamily="34" charset="-120"/>
+              </a:rPr>
+              <a:t>A. 基本（在庫横ばい）</a:t>
+            </a:r>
+            <a:endParaRPr lang="en-US" sz="1050" dirty="0"/>
+          </a:p>
+        </p:txBody>
+      </p:sp>
+      <p:sp>
+        <p:nvSpPr>
+          <p:cNvPr id="34" name="Text 32"/>
+          <p:cNvSpPr/>
+          <p:nvPr/>
+        </p:nvSpPr>
+        <p:spPr>
+          <a:xfrm>
+            <a:off x="6126480" y="4736592"/>
+            <a:ext cx="1554480" cy="402336"/>
+          </a:xfrm>
+          <a:prstGeom prst="rect">
+            <a:avLst/>
+          </a:prstGeom>
+          <a:noFill/>
+          <a:ln/>
+        </p:spPr>
+        <p:txBody>
+          <a:bodyPr wrap="square" lIns="0" tIns="0" rIns="0" bIns="0" rtlCol="0" anchor="ctr"/>
+          <a:lstStyle/>
+          <a:p>
+            <a:pPr algn="r" indent="0" marL="0">
+              <a:buNone/>
+            </a:pPr>
+            <a:r>
               <a:rPr lang="en-US" sz="1050" dirty="0">
                 <a:solidFill>
+                  <a:srgbClr val="6D2E46"/>
+                </a:solidFill>
+                <a:latin typeface="Arial" pitchFamily="34" charset="0"/>
+                <a:ea typeface="Arial" pitchFamily="34" charset="-122"/>
+                <a:cs typeface="Arial" pitchFamily="34" charset="-120"/>
+              </a:rPr>
+              <a:t>＋12.6百万円</a:t>
+            </a:r>
+            <a:endParaRPr lang="en-US" sz="1050" dirty="0"/>
+          </a:p>
+        </p:txBody>
+      </p:sp>
+      <p:sp>
+        <p:nvSpPr>
+          <p:cNvPr id="35" name="Text 33"/>
+          <p:cNvSpPr/>
+          <p:nvPr/>
+        </p:nvSpPr>
+        <p:spPr>
+          <a:xfrm>
+            <a:off x="7863840" y="4736592"/>
+            <a:ext cx="1737360" cy="402336"/>
+          </a:xfrm>
+          <a:prstGeom prst="rect">
+            <a:avLst/>
+          </a:prstGeom>
+          <a:noFill/>
+          <a:ln/>
+        </p:spPr>
+        <p:txBody>
+          <a:bodyPr wrap="square" lIns="0" tIns="0" rIns="0" bIns="0" rtlCol="0" anchor="ctr"/>
+          <a:lstStyle/>
+          <a:p>
+            <a:pPr algn="r" indent="0" marL="0">
+              <a:buNone/>
+            </a:pPr>
+            <a:r>
+              <a:rPr lang="en-US" sz="1050" dirty="0">
+                <a:solidFill>
+                  <a:srgbClr val="C0392B"/>
+                </a:solidFill>
+                <a:latin typeface="Arial" pitchFamily="34" charset="0"/>
+                <a:ea typeface="Arial" pitchFamily="34" charset="-122"/>
+                <a:cs typeface="Arial" pitchFamily="34" charset="-120"/>
+              </a:rPr>
+              <a:t>▲2.1百万円</a:t>
+            </a:r>
+            <a:endParaRPr lang="en-US" sz="1050" dirty="0"/>
+          </a:p>
+        </p:txBody>
+      </p:sp>
+      <p:sp>
+        <p:nvSpPr>
+          <p:cNvPr id="36" name="Text 34"/>
+          <p:cNvSpPr/>
+          <p:nvPr/>
+        </p:nvSpPr>
+        <p:spPr>
+          <a:xfrm>
+            <a:off x="9784080" y="4736592"/>
+            <a:ext cx="1600200" cy="402336"/>
+          </a:xfrm>
+          <a:prstGeom prst="rect">
+            <a:avLst/>
+          </a:prstGeom>
+          <a:noFill/>
+          <a:ln/>
+        </p:spPr>
+        <p:txBody>
+          <a:bodyPr wrap="square" lIns="0" tIns="0" rIns="0" bIns="0" rtlCol="0" anchor="ctr"/>
+          <a:lstStyle/>
+          <a:p>
+            <a:pPr algn="r" indent="0" marL="0">
+              <a:buNone/>
+            </a:pPr>
+            <a:r>
+              <a:rPr lang="en-US" sz="1050" b="1" dirty="0">
+                <a:solidFill>
+                  <a:srgbClr val="6D2E46"/>
+                </a:solidFill>
+                <a:latin typeface="Arial" pitchFamily="34" charset="0"/>
+                <a:ea typeface="Arial" pitchFamily="34" charset="-122"/>
+                <a:cs typeface="Arial" pitchFamily="34" charset="-120"/>
+              </a:rPr>
+              <a:t>37.7百万円</a:t>
+            </a:r>
+            <a:endParaRPr lang="en-US" sz="1050" dirty="0"/>
+          </a:p>
+        </p:txBody>
+      </p:sp>
+      <p:sp>
+        <p:nvSpPr>
+          <p:cNvPr id="37" name="Shape 35"/>
+          <p:cNvSpPr/>
+          <p:nvPr/>
+        </p:nvSpPr>
+        <p:spPr>
+          <a:xfrm>
+            <a:off x="594360" y="5138928"/>
+            <a:ext cx="10963656" cy="402336"/>
+          </a:xfrm>
+          <a:prstGeom prst="rect">
+            <a:avLst/>
+          </a:prstGeom>
+          <a:solidFill>
+            <a:srgbClr val="FBF9F7"/>
+          </a:solidFill>
+          <a:ln w="6350">
+            <a:solidFill>
+              <a:srgbClr val="DED5CE"/>
+            </a:solidFill>
+            <a:prstDash val="solid"/>
+          </a:ln>
+        </p:spPr>
+      </p:sp>
+      <p:sp>
+        <p:nvSpPr>
+          <p:cNvPr id="38" name="Text 36"/>
+          <p:cNvSpPr/>
+          <p:nvPr/>
+        </p:nvSpPr>
+        <p:spPr>
+          <a:xfrm>
+            <a:off x="822960" y="5138928"/>
+            <a:ext cx="5120640" cy="402336"/>
+          </a:xfrm>
+          <a:prstGeom prst="rect">
+            <a:avLst/>
+          </a:prstGeom>
+          <a:noFill/>
+          <a:ln/>
+        </p:spPr>
+        <p:txBody>
+          <a:bodyPr wrap="square" lIns="0" tIns="0" rIns="0" bIns="0" rtlCol="0" anchor="ctr"/>
+          <a:lstStyle/>
+          <a:p>
+            <a:pPr indent="0" marL="0">
+              <a:buNone/>
+            </a:pPr>
+            <a:r>
+              <a:rPr lang="en-US" sz="1050" dirty="0">
+                <a:solidFill>
                   <a:srgbClr val="2B2B2B"/>
                 </a:solidFill>
                 <a:latin typeface="Arial" pitchFamily="34" charset="0"/>
                 <a:ea typeface="Arial" pitchFamily="34" charset="-122"/>
                 <a:cs typeface="Arial" pitchFamily="34" charset="-120"/>
               </a:rPr>
-              <a:t>各案件の契約締結スケジュールを一覧化し、進捗を月次でご報告します。</a:t>
+              <a:t>B. 2027/03の一時収益42百万円が未入金</a:t>
             </a:r>
             <a:endParaRPr lang="en-US" sz="1050" dirty="0"/>
           </a:p>
@@ -5692,7 +10359,486 @@
       </p:sp>
       <p:sp>
         <p:nvSpPr>
-          <p:cNvPr id="32" name="Text 30"/>
+          <p:cNvPr id="39" name="Text 37"/>
+          <p:cNvSpPr/>
+          <p:nvPr/>
+        </p:nvSpPr>
+        <p:spPr>
+          <a:xfrm>
+            <a:off x="6126480" y="5138928"/>
+            <a:ext cx="1554480" cy="402336"/>
+          </a:xfrm>
+          <a:prstGeom prst="rect">
+            <a:avLst/>
+          </a:prstGeom>
+          <a:noFill/>
+          <a:ln/>
+        </p:spPr>
+        <p:txBody>
+          <a:bodyPr wrap="square" lIns="0" tIns="0" rIns="0" bIns="0" rtlCol="0" anchor="ctr"/>
+          <a:lstStyle/>
+          <a:p>
+            <a:pPr algn="r" indent="0" marL="0">
+              <a:buNone/>
+            </a:pPr>
+            <a:r>
+              <a:rPr lang="en-US" sz="1050" dirty="0">
+                <a:solidFill>
+                  <a:srgbClr val="C0392B"/>
+                </a:solidFill>
+                <a:latin typeface="Arial" pitchFamily="34" charset="0"/>
+                <a:ea typeface="Arial" pitchFamily="34" charset="-122"/>
+                <a:cs typeface="Arial" pitchFamily="34" charset="-120"/>
+              </a:rPr>
+              <a:t>▲29.4百万円</a:t>
+            </a:r>
+            <a:endParaRPr lang="en-US" sz="1050" dirty="0"/>
+          </a:p>
+        </p:txBody>
+      </p:sp>
+      <p:sp>
+        <p:nvSpPr>
+          <p:cNvPr id="40" name="Text 38"/>
+          <p:cNvSpPr/>
+          <p:nvPr/>
+        </p:nvSpPr>
+        <p:spPr>
+          <a:xfrm>
+            <a:off x="7863840" y="5138928"/>
+            <a:ext cx="1737360" cy="402336"/>
+          </a:xfrm>
+          <a:prstGeom prst="rect">
+            <a:avLst/>
+          </a:prstGeom>
+          <a:noFill/>
+          <a:ln/>
+        </p:spPr>
+        <p:txBody>
+          <a:bodyPr wrap="square" lIns="0" tIns="0" rIns="0" bIns="0" rtlCol="0" anchor="ctr"/>
+          <a:lstStyle/>
+          <a:p>
+            <a:pPr algn="r" indent="0" marL="0">
+              <a:buNone/>
+            </a:pPr>
+            <a:r>
+              <a:rPr lang="en-US" sz="1050" dirty="0">
+                <a:solidFill>
+                  <a:srgbClr val="C0392B"/>
+                </a:solidFill>
+                <a:latin typeface="Arial" pitchFamily="34" charset="0"/>
+                <a:ea typeface="Arial" pitchFamily="34" charset="-122"/>
+                <a:cs typeface="Arial" pitchFamily="34" charset="-120"/>
+              </a:rPr>
+              <a:t>▲44.1百万円</a:t>
+            </a:r>
+            <a:endParaRPr lang="en-US" sz="1050" dirty="0"/>
+          </a:p>
+        </p:txBody>
+      </p:sp>
+      <p:sp>
+        <p:nvSpPr>
+          <p:cNvPr id="41" name="Text 39"/>
+          <p:cNvSpPr/>
+          <p:nvPr/>
+        </p:nvSpPr>
+        <p:spPr>
+          <a:xfrm>
+            <a:off x="9784080" y="5138928"/>
+            <a:ext cx="1600200" cy="402336"/>
+          </a:xfrm>
+          <a:prstGeom prst="rect">
+            <a:avLst/>
+          </a:prstGeom>
+          <a:noFill/>
+          <a:ln/>
+        </p:spPr>
+        <p:txBody>
+          <a:bodyPr wrap="square" lIns="0" tIns="0" rIns="0" bIns="0" rtlCol="0" anchor="ctr"/>
+          <a:lstStyle/>
+          <a:p>
+            <a:pPr algn="r" indent="0" marL="0">
+              <a:buNone/>
+            </a:pPr>
+            <a:r>
+              <a:rPr lang="en-US" sz="1050" b="1" dirty="0">
+                <a:solidFill>
+                  <a:srgbClr val="A26769"/>
+                </a:solidFill>
+                <a:latin typeface="Arial" pitchFamily="34" charset="0"/>
+                <a:ea typeface="Arial" pitchFamily="34" charset="-122"/>
+                <a:cs typeface="Arial" pitchFamily="34" charset="-120"/>
+              </a:rPr>
+              <a:t>79.7百万円</a:t>
+            </a:r>
+            <a:endParaRPr lang="en-US" sz="1050" dirty="0"/>
+          </a:p>
+        </p:txBody>
+      </p:sp>
+      <p:sp>
+        <p:nvSpPr>
+          <p:cNvPr id="42" name="Shape 40"/>
+          <p:cNvSpPr/>
+          <p:nvPr/>
+        </p:nvSpPr>
+        <p:spPr>
+          <a:xfrm>
+            <a:off x="594360" y="5541264"/>
+            <a:ext cx="10963656" cy="402336"/>
+          </a:xfrm>
+          <a:prstGeom prst="rect">
+            <a:avLst/>
+          </a:prstGeom>
+          <a:solidFill>
+            <a:srgbClr val="FFFFFF"/>
+          </a:solidFill>
+          <a:ln w="6350">
+            <a:solidFill>
+              <a:srgbClr val="DED5CE"/>
+            </a:solidFill>
+            <a:prstDash val="solid"/>
+          </a:ln>
+        </p:spPr>
+      </p:sp>
+      <p:sp>
+        <p:nvSpPr>
+          <p:cNvPr id="43" name="Text 41"/>
+          <p:cNvSpPr/>
+          <p:nvPr/>
+        </p:nvSpPr>
+        <p:spPr>
+          <a:xfrm>
+            <a:off x="822960" y="5541264"/>
+            <a:ext cx="5120640" cy="402336"/>
+          </a:xfrm>
+          <a:prstGeom prst="rect">
+            <a:avLst/>
+          </a:prstGeom>
+          <a:noFill/>
+          <a:ln/>
+        </p:spPr>
+        <p:txBody>
+          <a:bodyPr wrap="square" lIns="0" tIns="0" rIns="0" bIns="0" rtlCol="0" anchor="ctr"/>
+          <a:lstStyle/>
+          <a:p>
+            <a:pPr indent="0" marL="0">
+              <a:buNone/>
+            </a:pPr>
+            <a:r>
+              <a:rPr lang="en-US" sz="1050" dirty="0">
+                <a:solidFill>
+                  <a:srgbClr val="2B2B2B"/>
+                </a:solidFill>
+                <a:latin typeface="Arial" pitchFamily="34" charset="0"/>
+                <a:ea typeface="Arial" pitchFamily="34" charset="-122"/>
+                <a:cs typeface="Arial" pitchFamily="34" charset="-120"/>
+              </a:rPr>
+              <a:t>C. 在庫をFY2026上期ペースで積み増し</a:t>
+            </a:r>
+            <a:endParaRPr lang="en-US" sz="1050" dirty="0"/>
+          </a:p>
+        </p:txBody>
+      </p:sp>
+      <p:sp>
+        <p:nvSpPr>
+          <p:cNvPr id="44" name="Text 42"/>
+          <p:cNvSpPr/>
+          <p:nvPr/>
+        </p:nvSpPr>
+        <p:spPr>
+          <a:xfrm>
+            <a:off x="6126480" y="5541264"/>
+            <a:ext cx="1554480" cy="402336"/>
+          </a:xfrm>
+          <a:prstGeom prst="rect">
+            <a:avLst/>
+          </a:prstGeom>
+          <a:noFill/>
+          <a:ln/>
+        </p:spPr>
+        <p:txBody>
+          <a:bodyPr wrap="square" lIns="0" tIns="0" rIns="0" bIns="0" rtlCol="0" anchor="ctr"/>
+          <a:lstStyle/>
+          <a:p>
+            <a:pPr algn="r" indent="0" marL="0">
+              <a:buNone/>
+            </a:pPr>
+            <a:r>
+              <a:rPr lang="en-US" sz="1050" dirty="0">
+                <a:solidFill>
+                  <a:srgbClr val="C0392B"/>
+                </a:solidFill>
+                <a:latin typeface="Arial" pitchFamily="34" charset="0"/>
+                <a:ea typeface="Arial" pitchFamily="34" charset="-122"/>
+                <a:cs typeface="Arial" pitchFamily="34" charset="-120"/>
+              </a:rPr>
+              <a:t>▲295.4百万円</a:t>
+            </a:r>
+            <a:endParaRPr lang="en-US" sz="1050" dirty="0"/>
+          </a:p>
+        </p:txBody>
+      </p:sp>
+      <p:sp>
+        <p:nvSpPr>
+          <p:cNvPr id="45" name="Text 43"/>
+          <p:cNvSpPr/>
+          <p:nvPr/>
+        </p:nvSpPr>
+        <p:spPr>
+          <a:xfrm>
+            <a:off x="7863840" y="5541264"/>
+            <a:ext cx="1737360" cy="402336"/>
+          </a:xfrm>
+          <a:prstGeom prst="rect">
+            <a:avLst/>
+          </a:prstGeom>
+          <a:noFill/>
+          <a:ln/>
+        </p:spPr>
+        <p:txBody>
+          <a:bodyPr wrap="square" lIns="0" tIns="0" rIns="0" bIns="0" rtlCol="0" anchor="ctr"/>
+          <a:lstStyle/>
+          <a:p>
+            <a:pPr algn="r" indent="0" marL="0">
+              <a:buNone/>
+            </a:pPr>
+            <a:r>
+              <a:rPr lang="en-US" sz="1050" dirty="0">
+                <a:solidFill>
+                  <a:srgbClr val="C0392B"/>
+                </a:solidFill>
+                <a:latin typeface="Arial" pitchFamily="34" charset="0"/>
+                <a:ea typeface="Arial" pitchFamily="34" charset="-122"/>
+                <a:cs typeface="Arial" pitchFamily="34" charset="-120"/>
+              </a:rPr>
+              <a:t>▲310.1百万円</a:t>
+            </a:r>
+            <a:endParaRPr lang="en-US" sz="1050" dirty="0"/>
+          </a:p>
+        </p:txBody>
+      </p:sp>
+      <p:sp>
+        <p:nvSpPr>
+          <p:cNvPr id="46" name="Text 44"/>
+          <p:cNvSpPr/>
+          <p:nvPr/>
+        </p:nvSpPr>
+        <p:spPr>
+          <a:xfrm>
+            <a:off x="9784080" y="5541264"/>
+            <a:ext cx="1600200" cy="402336"/>
+          </a:xfrm>
+          <a:prstGeom prst="rect">
+            <a:avLst/>
+          </a:prstGeom>
+          <a:noFill/>
+          <a:ln/>
+        </p:spPr>
+        <p:txBody>
+          <a:bodyPr wrap="square" lIns="0" tIns="0" rIns="0" bIns="0" rtlCol="0" anchor="ctr"/>
+          <a:lstStyle/>
+          <a:p>
+            <a:pPr algn="r" indent="0" marL="0">
+              <a:buNone/>
+            </a:pPr>
+            <a:r>
+              <a:rPr lang="en-US" sz="1050" b="1" dirty="0">
+                <a:solidFill>
+                  <a:srgbClr val="C0392B"/>
+                </a:solidFill>
+                <a:latin typeface="Arial" pitchFamily="34" charset="0"/>
+                <a:ea typeface="Arial" pitchFamily="34" charset="-122"/>
+                <a:cs typeface="Arial" pitchFamily="34" charset="-120"/>
+              </a:rPr>
+              <a:t>345.7百万円</a:t>
+            </a:r>
+            <a:endParaRPr lang="en-US" sz="1050" dirty="0"/>
+          </a:p>
+        </p:txBody>
+      </p:sp>
+      <p:sp>
+        <p:nvSpPr>
+          <p:cNvPr id="47" name="Shape 45"/>
+          <p:cNvSpPr/>
+          <p:nvPr/>
+        </p:nvSpPr>
+        <p:spPr>
+          <a:xfrm>
+            <a:off x="594360" y="5943600"/>
+            <a:ext cx="10963656" cy="402336"/>
+          </a:xfrm>
+          <a:prstGeom prst="rect">
+            <a:avLst/>
+          </a:prstGeom>
+          <a:solidFill>
+            <a:srgbClr val="FBF9F7"/>
+          </a:solidFill>
+          <a:ln w="6350">
+            <a:solidFill>
+              <a:srgbClr val="DED5CE"/>
+            </a:solidFill>
+            <a:prstDash val="solid"/>
+          </a:ln>
+        </p:spPr>
+      </p:sp>
+      <p:sp>
+        <p:nvSpPr>
+          <p:cNvPr id="48" name="Text 46"/>
+          <p:cNvSpPr/>
+          <p:nvPr/>
+        </p:nvSpPr>
+        <p:spPr>
+          <a:xfrm>
+            <a:off x="822960" y="5943600"/>
+            <a:ext cx="5120640" cy="402336"/>
+          </a:xfrm>
+          <a:prstGeom prst="rect">
+            <a:avLst/>
+          </a:prstGeom>
+          <a:noFill/>
+          <a:ln/>
+        </p:spPr>
+        <p:txBody>
+          <a:bodyPr wrap="square" lIns="0" tIns="0" rIns="0" bIns="0" rtlCol="0" anchor="ctr"/>
+          <a:lstStyle/>
+          <a:p>
+            <a:pPr indent="0" marL="0">
+              <a:buNone/>
+            </a:pPr>
+            <a:r>
+              <a:rPr lang="en-US" sz="1050" dirty="0">
+                <a:solidFill>
+                  <a:srgbClr val="2B2B2B"/>
+                </a:solidFill>
+                <a:latin typeface="Arial" pitchFamily="34" charset="0"/>
+                <a:ea typeface="Arial" pitchFamily="34" charset="-122"/>
+                <a:cs typeface="Arial" pitchFamily="34" charset="-120"/>
+              </a:rPr>
+              <a:t>D. 2026/09の在庫販売200百万円が不成立</a:t>
+            </a:r>
+            <a:endParaRPr lang="en-US" sz="1050" dirty="0"/>
+          </a:p>
+        </p:txBody>
+      </p:sp>
+      <p:sp>
+        <p:nvSpPr>
+          <p:cNvPr id="49" name="Text 47"/>
+          <p:cNvSpPr/>
+          <p:nvPr/>
+        </p:nvSpPr>
+        <p:spPr>
+          <a:xfrm>
+            <a:off x="6126480" y="5943600"/>
+            <a:ext cx="1554480" cy="402336"/>
+          </a:xfrm>
+          <a:prstGeom prst="rect">
+            <a:avLst/>
+          </a:prstGeom>
+          <a:noFill/>
+          <a:ln/>
+        </p:spPr>
+        <p:txBody>
+          <a:bodyPr wrap="square" lIns="0" tIns="0" rIns="0" bIns="0" rtlCol="0" anchor="ctr"/>
+          <a:lstStyle/>
+          <a:p>
+            <a:pPr algn="r" indent="0" marL="0">
+              <a:buNone/>
+            </a:pPr>
+            <a:r>
+              <a:rPr lang="en-US" sz="1050" dirty="0">
+                <a:solidFill>
+                  <a:srgbClr val="C0392B"/>
+                </a:solidFill>
+                <a:latin typeface="Arial" pitchFamily="34" charset="0"/>
+                <a:ea typeface="Arial" pitchFamily="34" charset="-122"/>
+                <a:cs typeface="Arial" pitchFamily="34" charset="-120"/>
+              </a:rPr>
+              <a:t>▲16.0百万円</a:t>
+            </a:r>
+            <a:endParaRPr lang="en-US" sz="1050" dirty="0"/>
+          </a:p>
+        </p:txBody>
+      </p:sp>
+      <p:sp>
+        <p:nvSpPr>
+          <p:cNvPr id="50" name="Text 48"/>
+          <p:cNvSpPr/>
+          <p:nvPr/>
+        </p:nvSpPr>
+        <p:spPr>
+          <a:xfrm>
+            <a:off x="7863840" y="5943600"/>
+            <a:ext cx="1737360" cy="402336"/>
+          </a:xfrm>
+          <a:prstGeom prst="rect">
+            <a:avLst/>
+          </a:prstGeom>
+          <a:noFill/>
+          <a:ln/>
+        </p:spPr>
+        <p:txBody>
+          <a:bodyPr wrap="square" lIns="0" tIns="0" rIns="0" bIns="0" rtlCol="0" anchor="ctr"/>
+          <a:lstStyle/>
+          <a:p>
+            <a:pPr algn="r" indent="0" marL="0">
+              <a:buNone/>
+            </a:pPr>
+            <a:r>
+              <a:rPr lang="en-US" sz="1050" dirty="0">
+                <a:solidFill>
+                  <a:srgbClr val="C0392B"/>
+                </a:solidFill>
+                <a:latin typeface="Arial" pitchFamily="34" charset="0"/>
+                <a:ea typeface="Arial" pitchFamily="34" charset="-122"/>
+                <a:cs typeface="Arial" pitchFamily="34" charset="-120"/>
+              </a:rPr>
+              <a:t>▲30.6百万円</a:t>
+            </a:r>
+            <a:endParaRPr lang="en-US" sz="1050" dirty="0"/>
+          </a:p>
+        </p:txBody>
+      </p:sp>
+      <p:sp>
+        <p:nvSpPr>
+          <p:cNvPr id="51" name="Text 49"/>
+          <p:cNvSpPr/>
+          <p:nvPr/>
+        </p:nvSpPr>
+        <p:spPr>
+          <a:xfrm>
+            <a:off x="9784080" y="5943600"/>
+            <a:ext cx="1600200" cy="402336"/>
+          </a:xfrm>
+          <a:prstGeom prst="rect">
+            <a:avLst/>
+          </a:prstGeom>
+          <a:noFill/>
+          <a:ln/>
+        </p:spPr>
+        <p:txBody>
+          <a:bodyPr wrap="square" lIns="0" tIns="0" rIns="0" bIns="0" rtlCol="0" anchor="ctr"/>
+          <a:lstStyle/>
+          <a:p>
+            <a:pPr algn="r" indent="0" marL="0">
+              <a:buNone/>
+            </a:pPr>
+            <a:r>
+              <a:rPr lang="en-US" sz="1050" b="1" dirty="0">
+                <a:solidFill>
+                  <a:srgbClr val="A26769"/>
+                </a:solidFill>
+                <a:latin typeface="Arial" pitchFamily="34" charset="0"/>
+                <a:ea typeface="Arial" pitchFamily="34" charset="-122"/>
+                <a:cs typeface="Arial" pitchFamily="34" charset="-120"/>
+              </a:rPr>
+              <a:t>66.3百万円</a:t>
+            </a:r>
+            <a:endParaRPr lang="en-US" sz="1050" dirty="0"/>
+          </a:p>
+        </p:txBody>
+      </p:sp>
+      <p:sp>
+        <p:nvSpPr>
+          <p:cNvPr id="52" name="Text 50"/>
           <p:cNvSpPr/>
           <p:nvPr/>
         </p:nvSpPr>
@@ -5714,6 +10860,17 @@
             <a:pPr indent="0" marL="0">
               <a:buNone/>
             </a:pPr>
+            <a:r>
+              <a:rPr lang="en-US" sz="850" dirty="0">
+                <a:solidFill>
+                  <a:srgbClr val="7A6A64"/>
+                </a:solidFill>
+                <a:latin typeface="Arial" pitchFamily="34" charset="0"/>
+                <a:ea typeface="Arial" pitchFamily="34" charset="-122"/>
+                <a:cs typeface="Arial" pitchFamily="34" charset="-120"/>
+              </a:rPr>
+              <a:t>必要調達額＝期中最低残高をゼロに戻す額＋運転資金バッファ（月商1か月 35.7百万円）。出典：2026年7月度 取締役会資料、決算報告書 第54期。</a:t>
+            </a:r>
             <a:endParaRPr lang="en-US" sz="850" dirty="0"/>
           </a:p>
         </p:txBody>
@@ -5726,9 +10883,1075 @@
 </p:sld>
 </file>
 
-<file path=ppt/slides/slide13.xml><?xml version="1.0" encoding="utf-8"?>
+<file path=ppt/slides/slide14.xml><?xml version="1.0" encoding="utf-8"?>
 <p:sld xmlns:a="http://schemas.openxmlformats.org/drawingml/2006/main" xmlns:r="http://schemas.openxmlformats.org/officeDocument/2006/relationships" xmlns:p="http://schemas.openxmlformats.org/presentationml/2006/main">
-  <p:cSld name="Slide 13">
+  <p:cSld name="Slide 14">
+    <p:bg>
+      <p:bgPr>
+        <a:solidFill>
+          <a:srgbClr val="F7F3EF"/>
+        </a:solidFill>
+      </p:bgPr>
+    </p:bg>
+    <p:spTree>
+      <p:nvGrpSpPr>
+        <p:cNvPr id="1" name=""/>
+        <p:cNvGrpSpPr/>
+        <p:nvPr/>
+      </p:nvGrpSpPr>
+      <p:grpSpPr>
+        <a:xfrm>
+          <a:off x="0" y="0"/>
+          <a:ext cx="0" cy="0"/>
+          <a:chOff x="0" y="0"/>
+          <a:chExt cx="0" cy="0"/>
+        </a:xfrm>
+      </p:grpSpPr>
+      <p:sp>
+        <p:nvSpPr>
+          <p:cNvPr id="2" name="Text 0"/>
+          <p:cNvSpPr/>
+          <p:nvPr/>
+        </p:nvSpPr>
+        <p:spPr>
+          <a:xfrm>
+            <a:off x="594360" y="384048"/>
+            <a:ext cx="10972800" cy="566928"/>
+          </a:xfrm>
+          <a:prstGeom prst="rect">
+            <a:avLst/>
+          </a:prstGeom>
+          <a:noFill/>
+          <a:ln/>
+        </p:spPr>
+        <p:txBody>
+          <a:bodyPr wrap="square" lIns="0" tIns="0" rIns="0" bIns="0" rtlCol="0" anchor="ctr"/>
+          <a:lstStyle/>
+          <a:p>
+            <a:pPr indent="0" marL="0">
+              <a:buNone/>
+            </a:pPr>
+            <a:r>
+              <a:rPr lang="en-US" sz="3000" b="1" dirty="0">
+                <a:solidFill>
+                  <a:srgbClr val="6D2E46"/>
+                </a:solidFill>
+                <a:latin typeface="Cambria" pitchFamily="34" charset="0"/>
+                <a:ea typeface="Cambria" pitchFamily="34" charset="-122"/>
+                <a:cs typeface="Cambria" pitchFamily="34" charset="-120"/>
+              </a:rPr>
+              <a:t>想定されるご指摘と当社の対応</a:t>
+            </a:r>
+            <a:endParaRPr lang="en-US" sz="3000" dirty="0"/>
+          </a:p>
+        </p:txBody>
+      </p:sp>
+      <p:sp>
+        <p:nvSpPr>
+          <p:cNvPr id="3" name="Text 1"/>
+          <p:cNvSpPr/>
+          <p:nvPr/>
+        </p:nvSpPr>
+        <p:spPr>
+          <a:xfrm>
+            <a:off x="594360" y="969264"/>
+            <a:ext cx="10972800" cy="310896"/>
+          </a:xfrm>
+          <a:prstGeom prst="rect">
+            <a:avLst/>
+          </a:prstGeom>
+          <a:noFill/>
+          <a:ln/>
+        </p:spPr>
+        <p:txBody>
+          <a:bodyPr wrap="square" lIns="0" tIns="0" rIns="0" bIns="0" rtlCol="0" anchor="ctr"/>
+          <a:lstStyle/>
+          <a:p>
+            <a:pPr indent="0" marL="0">
+              <a:buNone/>
+            </a:pPr>
+            <a:r>
+              <a:rPr lang="en-US" sz="1250" dirty="0">
+                <a:solidFill>
+                  <a:srgbClr val="7A6A64"/>
+                </a:solidFill>
+                <a:latin typeface="Arial" pitchFamily="34" charset="0"/>
+                <a:ea typeface="Arial" pitchFamily="34" charset="-122"/>
+                <a:cs typeface="Arial" pitchFamily="34" charset="-120"/>
+              </a:rPr>
+              <a:t>先に論点を開示し、対応方針をあわせてご説明します。</a:t>
+            </a:r>
+            <a:endParaRPr lang="en-US" sz="1250" dirty="0"/>
+          </a:p>
+        </p:txBody>
+      </p:sp>
+      <p:sp>
+        <p:nvSpPr>
+          <p:cNvPr id="4" name="Shape 2"/>
+          <p:cNvSpPr/>
+          <p:nvPr/>
+        </p:nvSpPr>
+        <p:spPr>
+          <a:xfrm>
+            <a:off x="594360" y="1481328"/>
+            <a:ext cx="5486400" cy="2029968"/>
+          </a:xfrm>
+          <a:prstGeom prst="roundRect">
+            <a:avLst>
+              <a:gd name="adj" fmla="val 2703"/>
+            </a:avLst>
+          </a:prstGeom>
+          <a:solidFill>
+            <a:srgbClr val="FFFFFF"/>
+          </a:solidFill>
+          <a:ln w="9525">
+            <a:solidFill>
+              <a:srgbClr val="DED5CE"/>
+            </a:solidFill>
+            <a:prstDash val="solid"/>
+          </a:ln>
+          <a:effectLst>
+            <a:outerShdw sx="100000" sy="100000" kx="0" ky="0" algn="bl" rotWithShape="0" blurRad="127000" dist="25400" dir="5400000">
+              <a:srgbClr val="000000">
+                <a:alpha val="10000"/>
+              </a:srgbClr>
+            </a:outerShdw>
+          </a:effectLst>
+        </p:spPr>
+      </p:sp>
+      <p:sp>
+        <p:nvSpPr>
+          <p:cNvPr id="5" name="Shape 3"/>
+          <p:cNvSpPr/>
+          <p:nvPr/>
+        </p:nvSpPr>
+        <p:spPr>
+          <a:xfrm>
+            <a:off x="868680" y="1719072"/>
+            <a:ext cx="310896" cy="310896"/>
+          </a:xfrm>
+          <a:prstGeom prst="ellipse">
+            <a:avLst/>
+          </a:prstGeom>
+          <a:solidFill>
+            <a:srgbClr val="6D2E46"/>
+          </a:solidFill>
+          <a:ln/>
+        </p:spPr>
+      </p:sp>
+      <p:sp>
+        <p:nvSpPr>
+          <p:cNvPr id="6" name="Text 4"/>
+          <p:cNvSpPr/>
+          <p:nvPr/>
+        </p:nvSpPr>
+        <p:spPr>
+          <a:xfrm>
+            <a:off x="868680" y="1719072"/>
+            <a:ext cx="310896" cy="310896"/>
+          </a:xfrm>
+          <a:prstGeom prst="rect">
+            <a:avLst/>
+          </a:prstGeom>
+          <a:noFill/>
+          <a:ln/>
+        </p:spPr>
+        <p:txBody>
+          <a:bodyPr wrap="square" lIns="0" tIns="0" rIns="0" bIns="0" rtlCol="0" anchor="ctr"/>
+          <a:lstStyle/>
+          <a:p>
+            <a:pPr algn="ctr" indent="0" marL="0">
+              <a:buNone/>
+            </a:pPr>
+            <a:r>
+              <a:rPr lang="en-US" sz="1300" b="1" dirty="0">
+                <a:solidFill>
+                  <a:srgbClr val="FFFFFF"/>
+                </a:solidFill>
+                <a:latin typeface="Arial" pitchFamily="34" charset="0"/>
+                <a:ea typeface="Arial" pitchFamily="34" charset="-122"/>
+                <a:cs typeface="Arial" pitchFamily="34" charset="-120"/>
+              </a:rPr>
+              <a:t>1</a:t>
+            </a:r>
+            <a:endParaRPr lang="en-US" sz="1300" dirty="0"/>
+          </a:p>
+        </p:txBody>
+      </p:sp>
+      <p:sp>
+        <p:nvSpPr>
+          <p:cNvPr id="7" name="Text 5"/>
+          <p:cNvSpPr/>
+          <p:nvPr/>
+        </p:nvSpPr>
+        <p:spPr>
+          <a:xfrm>
+            <a:off x="1307592" y="1700784"/>
+            <a:ext cx="4480560" cy="329184"/>
+          </a:xfrm>
+          <a:prstGeom prst="rect">
+            <a:avLst/>
+          </a:prstGeom>
+          <a:noFill/>
+          <a:ln/>
+        </p:spPr>
+        <p:txBody>
+          <a:bodyPr wrap="square" lIns="0" tIns="0" rIns="0" bIns="0" rtlCol="0" anchor="ctr"/>
+          <a:lstStyle/>
+          <a:p>
+            <a:pPr indent="0" marL="0">
+              <a:buNone/>
+            </a:pPr>
+            <a:r>
+              <a:rPr lang="en-US" sz="1350" b="1" dirty="0">
+                <a:solidFill>
+                  <a:srgbClr val="6D2E46"/>
+                </a:solidFill>
+                <a:latin typeface="Arial" pitchFamily="34" charset="0"/>
+                <a:ea typeface="Arial" pitchFamily="34" charset="-122"/>
+                <a:cs typeface="Arial" pitchFamily="34" charset="-120"/>
+              </a:rPr>
+              <a:t>グループ内取引 100百万円</a:t>
+            </a:r>
+            <a:endParaRPr lang="en-US" sz="1350" dirty="0"/>
+          </a:p>
+        </p:txBody>
+      </p:sp>
+      <p:sp>
+        <p:nvSpPr>
+          <p:cNvPr id="8" name="Text 6"/>
+          <p:cNvSpPr/>
+          <p:nvPr/>
+        </p:nvSpPr>
+        <p:spPr>
+          <a:xfrm>
+            <a:off x="886968" y="2121408"/>
+            <a:ext cx="4937760" cy="548640"/>
+          </a:xfrm>
+          <a:prstGeom prst="rect">
+            <a:avLst/>
+          </a:prstGeom>
+          <a:noFill/>
+          <a:ln/>
+        </p:spPr>
+        <p:txBody>
+          <a:bodyPr wrap="square" lIns="0" tIns="0" rIns="0" bIns="0" rtlCol="0" anchor="ctr"/>
+          <a:lstStyle/>
+          <a:p>
+            <a:pPr indent="0" marL="0">
+              <a:buNone/>
+            </a:pPr>
+            <a:r>
+              <a:rPr lang="en-US" sz="1050" dirty="0">
+                <a:solidFill>
+                  <a:srgbClr val="7A6A64"/>
+                </a:solidFill>
+                <a:latin typeface="Arial" pitchFamily="34" charset="0"/>
+                <a:ea typeface="Arial" pitchFamily="34" charset="-122"/>
+                <a:cs typeface="Arial" pitchFamily="34" charset="-120"/>
+              </a:rPr>
+              <a:t>上乗せ案件132.5百万円のうち約100百万円はグループ会社からの経営指導料。</a:t>
+            </a:r>
+            <a:endParaRPr lang="en-US" sz="1050" dirty="0"/>
+          </a:p>
+        </p:txBody>
+      </p:sp>
+      <p:sp>
+        <p:nvSpPr>
+          <p:cNvPr id="9" name="Shape 7"/>
+          <p:cNvSpPr/>
+          <p:nvPr/>
+        </p:nvSpPr>
+        <p:spPr>
+          <a:xfrm>
+            <a:off x="886968" y="2670048"/>
+            <a:ext cx="4937760" cy="694944"/>
+          </a:xfrm>
+          <a:prstGeom prst="roundRect">
+            <a:avLst>
+              <a:gd name="adj" fmla="val 6579"/>
+            </a:avLst>
+          </a:prstGeom>
+          <a:solidFill>
+            <a:srgbClr val="ECE2D0"/>
+          </a:solidFill>
+          <a:ln/>
+        </p:spPr>
+      </p:sp>
+      <p:sp>
+        <p:nvSpPr>
+          <p:cNvPr id="10" name="Text 8"/>
+          <p:cNvSpPr/>
+          <p:nvPr/>
+        </p:nvSpPr>
+        <p:spPr>
+          <a:xfrm>
+            <a:off x="1051560" y="2670048"/>
+            <a:ext cx="4617720" cy="694944"/>
+          </a:xfrm>
+          <a:prstGeom prst="rect">
+            <a:avLst/>
+          </a:prstGeom>
+          <a:noFill/>
+          <a:ln/>
+        </p:spPr>
+        <p:txBody>
+          <a:bodyPr wrap="square" lIns="0" tIns="0" rIns="0" bIns="0" rtlCol="0" anchor="ctr"/>
+          <a:lstStyle/>
+          <a:p>
+            <a:pPr indent="0" marL="0">
+              <a:buNone/>
+            </a:pPr>
+            <a:r>
+              <a:rPr lang="en-US" sz="1050" dirty="0">
+                <a:solidFill>
+                  <a:srgbClr val="2B2B2B"/>
+                </a:solidFill>
+                <a:latin typeface="Arial" pitchFamily="34" charset="0"/>
+                <a:ea typeface="Arial" pitchFamily="34" charset="-122"/>
+                <a:cs typeface="Arial" pitchFamily="34" charset="-120"/>
+              </a:rPr>
+              <a:t>支払側各社の支払能力と、対価の算定根拠（業務内容・工数）を文書化してご提出します。</a:t>
+            </a:r>
+            <a:endParaRPr lang="en-US" sz="1050" dirty="0"/>
+          </a:p>
+        </p:txBody>
+      </p:sp>
+      <p:sp>
+        <p:nvSpPr>
+          <p:cNvPr id="11" name="Shape 9"/>
+          <p:cNvSpPr/>
+          <p:nvPr/>
+        </p:nvSpPr>
+        <p:spPr>
+          <a:xfrm>
+            <a:off x="6400800" y="1481328"/>
+            <a:ext cx="5486400" cy="2029968"/>
+          </a:xfrm>
+          <a:prstGeom prst="roundRect">
+            <a:avLst>
+              <a:gd name="adj" fmla="val 2703"/>
+            </a:avLst>
+          </a:prstGeom>
+          <a:solidFill>
+            <a:srgbClr val="FFFFFF"/>
+          </a:solidFill>
+          <a:ln w="9525">
+            <a:solidFill>
+              <a:srgbClr val="DED5CE"/>
+            </a:solidFill>
+            <a:prstDash val="solid"/>
+          </a:ln>
+          <a:effectLst>
+            <a:outerShdw sx="100000" sy="100000" kx="0" ky="0" algn="bl" rotWithShape="0" blurRad="127000" dist="25400" dir="5400000">
+              <a:srgbClr val="000000">
+                <a:alpha val="10000"/>
+              </a:srgbClr>
+            </a:outerShdw>
+          </a:effectLst>
+        </p:spPr>
+      </p:sp>
+      <p:sp>
+        <p:nvSpPr>
+          <p:cNvPr id="12" name="Shape 10"/>
+          <p:cNvSpPr/>
+          <p:nvPr/>
+        </p:nvSpPr>
+        <p:spPr>
+          <a:xfrm>
+            <a:off x="6675120" y="1719072"/>
+            <a:ext cx="310896" cy="310896"/>
+          </a:xfrm>
+          <a:prstGeom prst="ellipse">
+            <a:avLst/>
+          </a:prstGeom>
+          <a:solidFill>
+            <a:srgbClr val="6D2E46"/>
+          </a:solidFill>
+          <a:ln/>
+        </p:spPr>
+      </p:sp>
+      <p:sp>
+        <p:nvSpPr>
+          <p:cNvPr id="13" name="Text 11"/>
+          <p:cNvSpPr/>
+          <p:nvPr/>
+        </p:nvSpPr>
+        <p:spPr>
+          <a:xfrm>
+            <a:off x="6675120" y="1719072"/>
+            <a:ext cx="310896" cy="310896"/>
+          </a:xfrm>
+          <a:prstGeom prst="rect">
+            <a:avLst/>
+          </a:prstGeom>
+          <a:noFill/>
+          <a:ln/>
+        </p:spPr>
+        <p:txBody>
+          <a:bodyPr wrap="square" lIns="0" tIns="0" rIns="0" bIns="0" rtlCol="0" anchor="ctr"/>
+          <a:lstStyle/>
+          <a:p>
+            <a:pPr algn="ctr" indent="0" marL="0">
+              <a:buNone/>
+            </a:pPr>
+            <a:r>
+              <a:rPr lang="en-US" sz="1300" b="1" dirty="0">
+                <a:solidFill>
+                  <a:srgbClr val="FFFFFF"/>
+                </a:solidFill>
+                <a:latin typeface="Arial" pitchFamily="34" charset="0"/>
+                <a:ea typeface="Arial" pitchFamily="34" charset="-122"/>
+                <a:cs typeface="Arial" pitchFamily="34" charset="-120"/>
+              </a:rPr>
+              <a:t>2</a:t>
+            </a:r>
+            <a:endParaRPr lang="en-US" sz="1300" dirty="0"/>
+          </a:p>
+        </p:txBody>
+      </p:sp>
+      <p:sp>
+        <p:nvSpPr>
+          <p:cNvPr id="14" name="Text 12"/>
+          <p:cNvSpPr/>
+          <p:nvPr/>
+        </p:nvSpPr>
+        <p:spPr>
+          <a:xfrm>
+            <a:off x="7114032" y="1700784"/>
+            <a:ext cx="4480560" cy="329184"/>
+          </a:xfrm>
+          <a:prstGeom prst="rect">
+            <a:avLst/>
+          </a:prstGeom>
+          <a:noFill/>
+          <a:ln/>
+        </p:spPr>
+        <p:txBody>
+          <a:bodyPr wrap="square" lIns="0" tIns="0" rIns="0" bIns="0" rtlCol="0" anchor="ctr"/>
+          <a:lstStyle/>
+          <a:p>
+            <a:pPr indent="0" marL="0">
+              <a:buNone/>
+            </a:pPr>
+            <a:r>
+              <a:rPr lang="en-US" sz="1350" b="1" dirty="0">
+                <a:solidFill>
+                  <a:srgbClr val="6D2E46"/>
+                </a:solidFill>
+                <a:latin typeface="Arial" pitchFamily="34" charset="0"/>
+                <a:ea typeface="Arial" pitchFamily="34" charset="-122"/>
+                <a:cs typeface="Arial" pitchFamily="34" charset="-120"/>
+              </a:rPr>
+              <a:t>手元流動性が1か月未満</a:t>
+            </a:r>
+            <a:endParaRPr lang="en-US" sz="1350" dirty="0"/>
+          </a:p>
+        </p:txBody>
+      </p:sp>
+      <p:sp>
+        <p:nvSpPr>
+          <p:cNvPr id="15" name="Text 13"/>
+          <p:cNvSpPr/>
+          <p:nvPr/>
+        </p:nvSpPr>
+        <p:spPr>
+          <a:xfrm>
+            <a:off x="6693408" y="2121408"/>
+            <a:ext cx="4937760" cy="548640"/>
+          </a:xfrm>
+          <a:prstGeom prst="rect">
+            <a:avLst/>
+          </a:prstGeom>
+          <a:noFill/>
+          <a:ln/>
+        </p:spPr>
+        <p:txBody>
+          <a:bodyPr wrap="square" lIns="0" tIns="0" rIns="0" bIns="0" rtlCol="0" anchor="ctr"/>
+          <a:lstStyle/>
+          <a:p>
+            <a:pPr indent="0" marL="0">
+              <a:buNone/>
+            </a:pPr>
+            <a:r>
+              <a:rPr lang="en-US" sz="1050" dirty="0">
+                <a:solidFill>
+                  <a:srgbClr val="7A6A64"/>
+                </a:solidFill>
+                <a:latin typeface="Arial" pitchFamily="34" charset="0"/>
+                <a:ea typeface="Arial" pitchFamily="34" charset="-122"/>
+                <a:cs typeface="Arial" pitchFamily="34" charset="-120"/>
+              </a:rPr>
+              <a:t>現金及び預金24.4百万円に対し、月次販管費は25.0百万円。</a:t>
+            </a:r>
+            <a:endParaRPr lang="en-US" sz="1050" dirty="0"/>
+          </a:p>
+        </p:txBody>
+      </p:sp>
+      <p:sp>
+        <p:nvSpPr>
+          <p:cNvPr id="16" name="Shape 14"/>
+          <p:cNvSpPr/>
+          <p:nvPr/>
+        </p:nvSpPr>
+        <p:spPr>
+          <a:xfrm>
+            <a:off x="6693408" y="2670048"/>
+            <a:ext cx="4937760" cy="694944"/>
+          </a:xfrm>
+          <a:prstGeom prst="roundRect">
+            <a:avLst>
+              <a:gd name="adj" fmla="val 6579"/>
+            </a:avLst>
+          </a:prstGeom>
+          <a:solidFill>
+            <a:srgbClr val="ECE2D0"/>
+          </a:solidFill>
+          <a:ln/>
+        </p:spPr>
+      </p:sp>
+      <p:sp>
+        <p:nvSpPr>
+          <p:cNvPr id="17" name="Text 15"/>
+          <p:cNvSpPr/>
+          <p:nvPr/>
+        </p:nvSpPr>
+        <p:spPr>
+          <a:xfrm>
+            <a:off x="6858000" y="2670048"/>
+            <a:ext cx="4617720" cy="694944"/>
+          </a:xfrm>
+          <a:prstGeom prst="rect">
+            <a:avLst/>
+          </a:prstGeom>
+          <a:noFill/>
+          <a:ln/>
+        </p:spPr>
+        <p:txBody>
+          <a:bodyPr wrap="square" lIns="0" tIns="0" rIns="0" bIns="0" rtlCol="0" anchor="ctr"/>
+          <a:lstStyle/>
+          <a:p>
+            <a:pPr indent="0" marL="0">
+              <a:buNone/>
+            </a:pPr>
+            <a:r>
+              <a:rPr lang="en-US" sz="1050" dirty="0">
+                <a:solidFill>
+                  <a:srgbClr val="2B2B2B"/>
+                </a:solidFill>
+                <a:latin typeface="Arial" pitchFamily="34" charset="0"/>
+                <a:ea typeface="Arial" pitchFamily="34" charset="-122"/>
+                <a:cs typeface="Arial" pitchFamily="34" charset="-120"/>
+              </a:rPr>
+              <a:t>月次および13週の資金繰り表を作成し、調達手段と実行時期を明示します。</a:t>
+            </a:r>
+            <a:endParaRPr lang="en-US" sz="1050" dirty="0"/>
+          </a:p>
+        </p:txBody>
+      </p:sp>
+      <p:sp>
+        <p:nvSpPr>
+          <p:cNvPr id="18" name="Shape 16"/>
+          <p:cNvSpPr/>
+          <p:nvPr/>
+        </p:nvSpPr>
+        <p:spPr>
+          <a:xfrm>
+            <a:off x="594360" y="3694176"/>
+            <a:ext cx="5486400" cy="2029968"/>
+          </a:xfrm>
+          <a:prstGeom prst="roundRect">
+            <a:avLst>
+              <a:gd name="adj" fmla="val 2703"/>
+            </a:avLst>
+          </a:prstGeom>
+          <a:solidFill>
+            <a:srgbClr val="FFFFFF"/>
+          </a:solidFill>
+          <a:ln w="9525">
+            <a:solidFill>
+              <a:srgbClr val="DED5CE"/>
+            </a:solidFill>
+            <a:prstDash val="solid"/>
+          </a:ln>
+          <a:effectLst>
+            <a:outerShdw sx="100000" sy="100000" kx="0" ky="0" algn="bl" rotWithShape="0" blurRad="127000" dist="25400" dir="5400000">
+              <a:srgbClr val="000000">
+                <a:alpha val="10000"/>
+              </a:srgbClr>
+            </a:outerShdw>
+          </a:effectLst>
+        </p:spPr>
+      </p:sp>
+      <p:sp>
+        <p:nvSpPr>
+          <p:cNvPr id="19" name="Shape 17"/>
+          <p:cNvSpPr/>
+          <p:nvPr/>
+        </p:nvSpPr>
+        <p:spPr>
+          <a:xfrm>
+            <a:off x="868680" y="3931920"/>
+            <a:ext cx="310896" cy="310896"/>
+          </a:xfrm>
+          <a:prstGeom prst="ellipse">
+            <a:avLst/>
+          </a:prstGeom>
+          <a:solidFill>
+            <a:srgbClr val="6D2E46"/>
+          </a:solidFill>
+          <a:ln/>
+        </p:spPr>
+      </p:sp>
+      <p:sp>
+        <p:nvSpPr>
+          <p:cNvPr id="20" name="Text 18"/>
+          <p:cNvSpPr/>
+          <p:nvPr/>
+        </p:nvSpPr>
+        <p:spPr>
+          <a:xfrm>
+            <a:off x="868680" y="3931920"/>
+            <a:ext cx="310896" cy="310896"/>
+          </a:xfrm>
+          <a:prstGeom prst="rect">
+            <a:avLst/>
+          </a:prstGeom>
+          <a:noFill/>
+          <a:ln/>
+        </p:spPr>
+        <p:txBody>
+          <a:bodyPr wrap="square" lIns="0" tIns="0" rIns="0" bIns="0" rtlCol="0" anchor="ctr"/>
+          <a:lstStyle/>
+          <a:p>
+            <a:pPr algn="ctr" indent="0" marL="0">
+              <a:buNone/>
+            </a:pPr>
+            <a:r>
+              <a:rPr lang="en-US" sz="1300" b="1" dirty="0">
+                <a:solidFill>
+                  <a:srgbClr val="FFFFFF"/>
+                </a:solidFill>
+                <a:latin typeface="Arial" pitchFamily="34" charset="0"/>
+                <a:ea typeface="Arial" pitchFamily="34" charset="-122"/>
+                <a:cs typeface="Arial" pitchFamily="34" charset="-120"/>
+              </a:rPr>
+              <a:t>3</a:t>
+            </a:r>
+            <a:endParaRPr lang="en-US" sz="1300" dirty="0"/>
+          </a:p>
+        </p:txBody>
+      </p:sp>
+      <p:sp>
+        <p:nvSpPr>
+          <p:cNvPr id="21" name="Text 19"/>
+          <p:cNvSpPr/>
+          <p:nvPr/>
+        </p:nvSpPr>
+        <p:spPr>
+          <a:xfrm>
+            <a:off x="1307592" y="3913632"/>
+            <a:ext cx="4480560" cy="329184"/>
+          </a:xfrm>
+          <a:prstGeom prst="rect">
+            <a:avLst/>
+          </a:prstGeom>
+          <a:noFill/>
+          <a:ln/>
+        </p:spPr>
+        <p:txBody>
+          <a:bodyPr wrap="square" lIns="0" tIns="0" rIns="0" bIns="0" rtlCol="0" anchor="ctr"/>
+          <a:lstStyle/>
+          <a:p>
+            <a:pPr indent="0" marL="0">
+              <a:buNone/>
+            </a:pPr>
+            <a:r>
+              <a:rPr lang="en-US" sz="1350" b="1" dirty="0">
+                <a:solidFill>
+                  <a:srgbClr val="6D2E46"/>
+                </a:solidFill>
+                <a:latin typeface="Arial" pitchFamily="34" charset="0"/>
+                <a:ea typeface="Arial" pitchFamily="34" charset="-122"/>
+                <a:cs typeface="Arial" pitchFamily="34" charset="-120"/>
+              </a:rPr>
+              <a:t>財務制限条項への抵触</a:t>
+            </a:r>
+            <a:endParaRPr lang="en-US" sz="1350" dirty="0"/>
+          </a:p>
+        </p:txBody>
+      </p:sp>
+      <p:sp>
+        <p:nvSpPr>
+          <p:cNvPr id="22" name="Text 20"/>
+          <p:cNvSpPr/>
+          <p:nvPr/>
+        </p:nvSpPr>
+        <p:spPr>
+          <a:xfrm>
+            <a:off x="886968" y="4334256"/>
+            <a:ext cx="4937760" cy="548640"/>
+          </a:xfrm>
+          <a:prstGeom prst="rect">
+            <a:avLst/>
+          </a:prstGeom>
+          <a:noFill/>
+          <a:ln/>
+        </p:spPr>
+        <p:txBody>
+          <a:bodyPr wrap="square" lIns="0" tIns="0" rIns="0" bIns="0" rtlCol="0" anchor="ctr"/>
+          <a:lstStyle/>
+          <a:p>
+            <a:pPr indent="0" marL="0">
+              <a:buNone/>
+            </a:pPr>
+            <a:r>
+              <a:rPr lang="en-US" sz="1050" dirty="0">
+                <a:solidFill>
+                  <a:srgbClr val="7A6A64"/>
+                </a:solidFill>
+                <a:latin typeface="Arial" pitchFamily="34" charset="0"/>
+                <a:ea typeface="Arial" pitchFamily="34" charset="-122"/>
+                <a:cs typeface="Arial" pitchFamily="34" charset="-120"/>
+              </a:rPr>
+              <a:t>純資産維持条項・連続赤字条項に抵触する可能性があります。</a:t>
+            </a:r>
+            <a:endParaRPr lang="en-US" sz="1050" dirty="0"/>
+          </a:p>
+        </p:txBody>
+      </p:sp>
+      <p:sp>
+        <p:nvSpPr>
+          <p:cNvPr id="23" name="Shape 21"/>
+          <p:cNvSpPr/>
+          <p:nvPr/>
+        </p:nvSpPr>
+        <p:spPr>
+          <a:xfrm>
+            <a:off x="886968" y="4882896"/>
+            <a:ext cx="4937760" cy="694944"/>
+          </a:xfrm>
+          <a:prstGeom prst="roundRect">
+            <a:avLst>
+              <a:gd name="adj" fmla="val 6579"/>
+            </a:avLst>
+          </a:prstGeom>
+          <a:solidFill>
+            <a:srgbClr val="ECE2D0"/>
+          </a:solidFill>
+          <a:ln/>
+        </p:spPr>
+      </p:sp>
+      <p:sp>
+        <p:nvSpPr>
+          <p:cNvPr id="24" name="Text 22"/>
+          <p:cNvSpPr/>
+          <p:nvPr/>
+        </p:nvSpPr>
+        <p:spPr>
+          <a:xfrm>
+            <a:off x="1051560" y="4882896"/>
+            <a:ext cx="4617720" cy="694944"/>
+          </a:xfrm>
+          <a:prstGeom prst="rect">
+            <a:avLst/>
+          </a:prstGeom>
+          <a:noFill/>
+          <a:ln/>
+        </p:spPr>
+        <p:txBody>
+          <a:bodyPr wrap="square" lIns="0" tIns="0" rIns="0" bIns="0" rtlCol="0" anchor="ctr"/>
+          <a:lstStyle/>
+          <a:p>
+            <a:pPr indent="0" marL="0">
+              <a:buNone/>
+            </a:pPr>
+            <a:r>
+              <a:rPr lang="en-US" sz="1050" dirty="0">
+                <a:solidFill>
+                  <a:srgbClr val="2B2B2B"/>
+                </a:solidFill>
+                <a:latin typeface="Arial" pitchFamily="34" charset="0"/>
+                <a:ea typeface="Arial" pitchFamily="34" charset="-122"/>
+                <a:cs typeface="Arial" pitchFamily="34" charset="-120"/>
+              </a:rPr>
+              <a:t>借入契約書を精査のうえ、抵触前に事前にご相談し、ウェーバーを申請します。</a:t>
+            </a:r>
+            <a:endParaRPr lang="en-US" sz="1050" dirty="0"/>
+          </a:p>
+        </p:txBody>
+      </p:sp>
+      <p:sp>
+        <p:nvSpPr>
+          <p:cNvPr id="25" name="Shape 23"/>
+          <p:cNvSpPr/>
+          <p:nvPr/>
+        </p:nvSpPr>
+        <p:spPr>
+          <a:xfrm>
+            <a:off x="6400800" y="3694176"/>
+            <a:ext cx="5486400" cy="2029968"/>
+          </a:xfrm>
+          <a:prstGeom prst="roundRect">
+            <a:avLst>
+              <a:gd name="adj" fmla="val 2703"/>
+            </a:avLst>
+          </a:prstGeom>
+          <a:solidFill>
+            <a:srgbClr val="FFFFFF"/>
+          </a:solidFill>
+          <a:ln w="9525">
+            <a:solidFill>
+              <a:srgbClr val="DED5CE"/>
+            </a:solidFill>
+            <a:prstDash val="solid"/>
+          </a:ln>
+          <a:effectLst>
+            <a:outerShdw sx="100000" sy="100000" kx="0" ky="0" algn="bl" rotWithShape="0" blurRad="127000" dist="25400" dir="5400000">
+              <a:srgbClr val="000000">
+                <a:alpha val="10000"/>
+              </a:srgbClr>
+            </a:outerShdw>
+          </a:effectLst>
+        </p:spPr>
+      </p:sp>
+      <p:sp>
+        <p:nvSpPr>
+          <p:cNvPr id="26" name="Shape 24"/>
+          <p:cNvSpPr/>
+          <p:nvPr/>
+        </p:nvSpPr>
+        <p:spPr>
+          <a:xfrm>
+            <a:off x="6675120" y="3931920"/>
+            <a:ext cx="310896" cy="310896"/>
+          </a:xfrm>
+          <a:prstGeom prst="ellipse">
+            <a:avLst/>
+          </a:prstGeom>
+          <a:solidFill>
+            <a:srgbClr val="6D2E46"/>
+          </a:solidFill>
+          <a:ln/>
+        </p:spPr>
+      </p:sp>
+      <p:sp>
+        <p:nvSpPr>
+          <p:cNvPr id="27" name="Text 25"/>
+          <p:cNvSpPr/>
+          <p:nvPr/>
+        </p:nvSpPr>
+        <p:spPr>
+          <a:xfrm>
+            <a:off x="6675120" y="3931920"/>
+            <a:ext cx="310896" cy="310896"/>
+          </a:xfrm>
+          <a:prstGeom prst="rect">
+            <a:avLst/>
+          </a:prstGeom>
+          <a:noFill/>
+          <a:ln/>
+        </p:spPr>
+        <p:txBody>
+          <a:bodyPr wrap="square" lIns="0" tIns="0" rIns="0" bIns="0" rtlCol="0" anchor="ctr"/>
+          <a:lstStyle/>
+          <a:p>
+            <a:pPr algn="ctr" indent="0" marL="0">
+              <a:buNone/>
+            </a:pPr>
+            <a:r>
+              <a:rPr lang="en-US" sz="1300" b="1" dirty="0">
+                <a:solidFill>
+                  <a:srgbClr val="FFFFFF"/>
+                </a:solidFill>
+                <a:latin typeface="Arial" pitchFamily="34" charset="0"/>
+                <a:ea typeface="Arial" pitchFamily="34" charset="-122"/>
+                <a:cs typeface="Arial" pitchFamily="34" charset="-120"/>
+              </a:rPr>
+              <a:t>4</a:t>
+            </a:r>
+            <a:endParaRPr lang="en-US" sz="1300" dirty="0"/>
+          </a:p>
+        </p:txBody>
+      </p:sp>
+      <p:sp>
+        <p:nvSpPr>
+          <p:cNvPr id="28" name="Text 26"/>
+          <p:cNvSpPr/>
+          <p:nvPr/>
+        </p:nvSpPr>
+        <p:spPr>
+          <a:xfrm>
+            <a:off x="7114032" y="3913632"/>
+            <a:ext cx="4480560" cy="329184"/>
+          </a:xfrm>
+          <a:prstGeom prst="rect">
+            <a:avLst/>
+          </a:prstGeom>
+          <a:noFill/>
+          <a:ln/>
+        </p:spPr>
+        <p:txBody>
+          <a:bodyPr wrap="square" lIns="0" tIns="0" rIns="0" bIns="0" rtlCol="0" anchor="ctr"/>
+          <a:lstStyle/>
+          <a:p>
+            <a:pPr indent="0" marL="0">
+              <a:buNone/>
+            </a:pPr>
+            <a:r>
+              <a:rPr lang="en-US" sz="1350" b="1" dirty="0">
+                <a:solidFill>
+                  <a:srgbClr val="6D2E46"/>
+                </a:solidFill>
+                <a:latin typeface="Arial" pitchFamily="34" charset="0"/>
+                <a:ea typeface="Arial" pitchFamily="34" charset="-122"/>
+                <a:cs typeface="Arial" pitchFamily="34" charset="-120"/>
+              </a:rPr>
+              <a:t>上乗せ案件の契約化</a:t>
+            </a:r>
+            <a:endParaRPr lang="en-US" sz="1350" dirty="0"/>
+          </a:p>
+        </p:txBody>
+      </p:sp>
+      <p:sp>
+        <p:nvSpPr>
+          <p:cNvPr id="29" name="Text 27"/>
+          <p:cNvSpPr/>
+          <p:nvPr/>
+        </p:nvSpPr>
+        <p:spPr>
+          <a:xfrm>
+            <a:off x="6693408" y="4334256"/>
+            <a:ext cx="4937760" cy="548640"/>
+          </a:xfrm>
+          <a:prstGeom prst="rect">
+            <a:avLst/>
+          </a:prstGeom>
+          <a:noFill/>
+          <a:ln/>
+        </p:spPr>
+        <p:txBody>
+          <a:bodyPr wrap="square" lIns="0" tIns="0" rIns="0" bIns="0" rtlCol="0" anchor="ctr"/>
+          <a:lstStyle/>
+          <a:p>
+            <a:pPr indent="0" marL="0">
+              <a:buNone/>
+            </a:pPr>
+            <a:r>
+              <a:rPr lang="en-US" sz="1050" dirty="0">
+                <a:solidFill>
+                  <a:srgbClr val="7A6A64"/>
+                </a:solidFill>
+                <a:latin typeface="Arial" pitchFamily="34" charset="0"/>
+                <a:ea typeface="Arial" pitchFamily="34" charset="-122"/>
+                <a:cs typeface="Arial" pitchFamily="34" charset="-120"/>
+              </a:rPr>
+              <a:t>経営指導料は契約書の締結時期により計上期が動きます。</a:t>
+            </a:r>
+            <a:endParaRPr lang="en-US" sz="1050" dirty="0"/>
+          </a:p>
+        </p:txBody>
+      </p:sp>
+      <p:sp>
+        <p:nvSpPr>
+          <p:cNvPr id="30" name="Shape 28"/>
+          <p:cNvSpPr/>
+          <p:nvPr/>
+        </p:nvSpPr>
+        <p:spPr>
+          <a:xfrm>
+            <a:off x="6693408" y="4882896"/>
+            <a:ext cx="4937760" cy="694944"/>
+          </a:xfrm>
+          <a:prstGeom prst="roundRect">
+            <a:avLst>
+              <a:gd name="adj" fmla="val 6579"/>
+            </a:avLst>
+          </a:prstGeom>
+          <a:solidFill>
+            <a:srgbClr val="ECE2D0"/>
+          </a:solidFill>
+          <a:ln/>
+        </p:spPr>
+      </p:sp>
+      <p:sp>
+        <p:nvSpPr>
+          <p:cNvPr id="31" name="Text 29"/>
+          <p:cNvSpPr/>
+          <p:nvPr/>
+        </p:nvSpPr>
+        <p:spPr>
+          <a:xfrm>
+            <a:off x="6858000" y="4882896"/>
+            <a:ext cx="4617720" cy="694944"/>
+          </a:xfrm>
+          <a:prstGeom prst="rect">
+            <a:avLst/>
+          </a:prstGeom>
+          <a:noFill/>
+          <a:ln/>
+        </p:spPr>
+        <p:txBody>
+          <a:bodyPr wrap="square" lIns="0" tIns="0" rIns="0" bIns="0" rtlCol="0" anchor="ctr"/>
+          <a:lstStyle/>
+          <a:p>
+            <a:pPr indent="0" marL="0">
+              <a:buNone/>
+            </a:pPr>
+            <a:r>
+              <a:rPr lang="en-US" sz="1050" dirty="0">
+                <a:solidFill>
+                  <a:srgbClr val="2B2B2B"/>
+                </a:solidFill>
+                <a:latin typeface="Arial" pitchFamily="34" charset="0"/>
+                <a:ea typeface="Arial" pitchFamily="34" charset="-122"/>
+                <a:cs typeface="Arial" pitchFamily="34" charset="-120"/>
+              </a:rPr>
+              <a:t>各案件の契約締結スケジュールを一覧化し、進捗を月次でご報告します。</a:t>
+            </a:r>
+            <a:endParaRPr lang="en-US" sz="1050" dirty="0"/>
+          </a:p>
+        </p:txBody>
+      </p:sp>
+      <p:sp>
+        <p:nvSpPr>
+          <p:cNvPr id="32" name="Text 30"/>
+          <p:cNvSpPr/>
+          <p:nvPr/>
+        </p:nvSpPr>
+        <p:spPr>
+          <a:xfrm>
+            <a:off x="594360" y="6382512"/>
+            <a:ext cx="10972800" cy="274320"/>
+          </a:xfrm>
+          <a:prstGeom prst="rect">
+            <a:avLst/>
+          </a:prstGeom>
+          <a:noFill/>
+          <a:ln/>
+        </p:spPr>
+        <p:txBody>
+          <a:bodyPr wrap="square" lIns="0" tIns="0" rIns="0" bIns="0" rtlCol="0" anchor="ctr"/>
+          <a:lstStyle/>
+          <a:p>
+            <a:pPr indent="0" marL="0">
+              <a:buNone/>
+            </a:pPr>
+            <a:endParaRPr lang="en-US" sz="850" dirty="0"/>
+          </a:p>
+        </p:txBody>
+      </p:sp>
+    </p:spTree>
+  </p:cSld>
+  <p:clrMapOvr>
+    <a:masterClrMapping/>
+  </p:clrMapOvr>
+</p:sld>
+</file>
+
+<file path=ppt/slides/slide15.xml><?xml version="1.0" encoding="utf-8"?>
+<p:sld xmlns:a="http://schemas.openxmlformats.org/drawingml/2006/main" xmlns:r="http://schemas.openxmlformats.org/officeDocument/2006/relationships" xmlns:p="http://schemas.openxmlformats.org/presentationml/2006/main">
+  <p:cSld name="Slide 15">
     <p:bg>
       <p:bgPr>
         <a:solidFill>

--- a/out/WineBank_FY2027_銀行提出.pptx
+++ b/out/WineBank_FY2027_銀行提出.pptx
@@ -1161,7 +1161,7 @@
           <a:p>
             <a:r>
               <a:rPr lang="en-US" dirty="0"/>
-              <a:t>2027年3月はM&amp;A仲介と新規クルーザー事業が重なり単月経常利益が大きく出る。</a:t>
+              <a:t>通常月は経常▲3.9百万円だが、3月にM&amp;A仲介と新規クルーザー事業30百万円が乗り通期はほぼ均衡。減価償却43.7百万円があるため資金は回る。</a:t>
             </a:r>
             <a:endParaRPr lang="en-US" dirty="0"/>
           </a:p>
@@ -1249,7 +1249,7 @@
           <a:p>
             <a:r>
               <a:rPr lang="en-US" dirty="0"/>
-              <a:t>11月の消費税だけを短期でつなげば、必要売上のハードルは大きく下がる。銀行への具体的な依頼事項になる。</a:t>
+              <a:t>保守前提でも期中最低14.6百万円を確保。仕入を維持しても在庫が積み上がらないため、資金が固定されないことが効いている。</a:t>
             </a:r>
             <a:endParaRPr lang="en-US" dirty="0"/>
           </a:p>
@@ -1689,7 +1689,7 @@
           <a:p>
             <a:r>
               <a:rPr lang="en-US" dirty="0"/>
-              <a:t>Dプランは、ワイン仕入を落とさずに資金繰りが回る売上水準。必要売上566.2百万円は過去2期の実績を下回る。</a:t>
+              <a:t>プランDは売上を前期・今期並みに置き、粗利率を保守的に落とした前提。営業＋8.8百万円、経常▲6.2百万円だが、減価償却43.7百万円があるため資金は回る。</a:t>
             </a:r>
             <a:endParaRPr lang="en-US" dirty="0"/>
           </a:p>
@@ -3017,7 +3017,7 @@
                 <a:ea typeface="メイリオ" pitchFamily="34" charset="-122"/>
                 <a:cs typeface="メイリオ" pitchFamily="34" charset="-120"/>
               </a:rPr>
-              <a:t>4つのプラン － 資金繰りが成立するのはDのみ</a:t>
+              <a:t>4つのプラン － Dを本線とします</a:t>
             </a:r>
             <a:endParaRPr lang="en-US" sz="2900" dirty="0"/>
           </a:p>
@@ -3056,7 +3056,7 @@
                 <a:ea typeface="メイリオ" pitchFamily="34" charset="-122"/>
                 <a:cs typeface="メイリオ" pitchFamily="34" charset="-120"/>
               </a:rPr>
-              <a:t>ワイン仕入を落とさない前提では、経常利益1億円（プランC）でも資金が回りません。</a:t>
+              <a:t>売上は前期・今期並み、粗利率は保守的。上振れを織り込まない前提で組み立てています。</a:t>
             </a:r>
             <a:endParaRPr lang="en-US" sz="1250" dirty="0"/>
           </a:p>
@@ -3071,7 +3071,7 @@
         <p:spPr>
           <a:xfrm>
             <a:off x="594360" y="1517904"/>
-            <a:ext cx="10972800" cy="384048"/>
+            <a:ext cx="10789920" cy="384048"/>
           </a:xfrm>
           <a:prstGeom prst="rect">
             <a:avLst/>
@@ -3091,7 +3091,7 @@
         <p:spPr>
           <a:xfrm>
             <a:off x="704088" y="1517904"/>
-            <a:ext cx="2798064" cy="384048"/>
+            <a:ext cx="2615184" cy="384048"/>
           </a:xfrm>
           <a:prstGeom prst="rect">
             <a:avLst/>
@@ -3107,7 +3107,7 @@
               <a:buNone/>
             </a:pPr>
             <a:r>
-              <a:rPr lang="en-US" sz="950" b="1" dirty="0">
+              <a:rPr lang="en-US" sz="900" b="1" dirty="0">
                 <a:solidFill>
                   <a:srgbClr val="FFFFFF"/>
                 </a:solidFill>
@@ -3117,7 +3117,7 @@
               </a:rPr>
               <a:t>（百万円）</a:t>
             </a:r>
-            <a:endParaRPr lang="en-US" sz="950" dirty="0"/>
+            <a:endParaRPr lang="en-US" sz="900" dirty="0"/>
           </a:p>
         </p:txBody>
       </p:sp>
@@ -3129,7 +3129,7 @@
         </p:nvSpPr>
         <p:spPr>
           <a:xfrm>
-            <a:off x="3721608" y="1517904"/>
+            <a:off x="3538728" y="1517904"/>
             <a:ext cx="1746504" cy="384048"/>
           </a:xfrm>
           <a:prstGeom prst="rect">
@@ -3146,7 +3146,7 @@
               <a:buNone/>
             </a:pPr>
             <a:r>
-              <a:rPr lang="en-US" sz="950" b="1" dirty="0">
+              <a:rPr lang="en-US" sz="900" b="1" dirty="0">
                 <a:solidFill>
                   <a:srgbClr val="FFFFFF"/>
                 </a:solidFill>
@@ -3156,7 +3156,7 @@
               </a:rPr>
               <a:t>A. 横ばいのみ</a:t>
             </a:r>
-            <a:endParaRPr lang="en-US" sz="950" dirty="0"/>
+            <a:endParaRPr lang="en-US" sz="900" dirty="0"/>
           </a:p>
         </p:txBody>
       </p:sp>
@@ -3168,7 +3168,7 @@
         </p:nvSpPr>
         <p:spPr>
           <a:xfrm>
-            <a:off x="5687568" y="1517904"/>
+            <a:off x="5504688" y="1517904"/>
             <a:ext cx="1746504" cy="384048"/>
           </a:xfrm>
           <a:prstGeom prst="rect">
@@ -3185,7 +3185,7 @@
               <a:buNone/>
             </a:pPr>
             <a:r>
-              <a:rPr lang="en-US" sz="950" b="1" dirty="0">
+              <a:rPr lang="en-US" sz="900" b="1" dirty="0">
                 <a:solidFill>
                   <a:srgbClr val="FFFFFF"/>
                 </a:solidFill>
@@ -3195,7 +3195,7 @@
               </a:rPr>
               <a:t>B. ＋上乗せ132.5</a:t>
             </a:r>
-            <a:endParaRPr lang="en-US" sz="950" dirty="0"/>
+            <a:endParaRPr lang="en-US" sz="900" dirty="0"/>
           </a:p>
         </p:txBody>
       </p:sp>
@@ -3207,7 +3207,7 @@
         </p:nvSpPr>
         <p:spPr>
           <a:xfrm>
-            <a:off x="7653528" y="1517904"/>
+            <a:off x="7470648" y="1517904"/>
             <a:ext cx="1746504" cy="384048"/>
           </a:xfrm>
           <a:prstGeom prst="rect">
@@ -3224,7 +3224,7 @@
               <a:buNone/>
             </a:pPr>
             <a:r>
-              <a:rPr lang="en-US" sz="950" b="1" dirty="0">
+              <a:rPr lang="en-US" sz="900" b="1" dirty="0">
                 <a:solidFill>
                   <a:srgbClr val="FFFFFF"/>
                 </a:solidFill>
@@ -3234,7 +3234,7 @@
               </a:rPr>
               <a:t>C. 経常利益1億円</a:t>
             </a:r>
-            <a:endParaRPr lang="en-US" sz="950" dirty="0"/>
+            <a:endParaRPr lang="en-US" sz="900" dirty="0"/>
           </a:p>
         </p:txBody>
       </p:sp>
@@ -3246,7 +3246,7 @@
         </p:nvSpPr>
         <p:spPr>
           <a:xfrm>
-            <a:off x="9619488" y="1517904"/>
+            <a:off x="9436608" y="1517904"/>
             <a:ext cx="1837944" cy="384048"/>
           </a:xfrm>
           <a:prstGeom prst="rect">
@@ -3263,7 +3263,7 @@
               <a:buNone/>
             </a:pPr>
             <a:r>
-              <a:rPr lang="en-US" sz="950" b="1" dirty="0">
+              <a:rPr lang="en-US" sz="900" b="1" dirty="0">
                 <a:solidFill>
                   <a:srgbClr val="FFFFFF"/>
                 </a:solidFill>
@@ -3271,9 +3271,9 @@
                 <a:ea typeface="メイリオ" pitchFamily="34" charset="-122"/>
                 <a:cs typeface="メイリオ" pitchFamily="34" charset="-120"/>
               </a:rPr>
-              <a:t>D. CFが回る水準</a:t>
-            </a:r>
-            <a:endParaRPr lang="en-US" sz="950" dirty="0"/>
+              <a:t>D. 保守シナリオ</a:t>
+            </a:r>
+            <a:endParaRPr lang="en-US" sz="900" dirty="0"/>
           </a:p>
         </p:txBody>
       </p:sp>
@@ -3286,7 +3286,7 @@
         <p:spPr>
           <a:xfrm>
             <a:off x="594360" y="1901952"/>
-            <a:ext cx="10972800" cy="512064"/>
+            <a:ext cx="10789920" cy="365760"/>
           </a:xfrm>
           <a:prstGeom prst="rect">
             <a:avLst/>
@@ -3311,7 +3311,7 @@
         <p:spPr>
           <a:xfrm>
             <a:off x="704088" y="1901952"/>
-            <a:ext cx="2798064" cy="512064"/>
+            <a:ext cx="2615184" cy="365760"/>
           </a:xfrm>
           <a:prstGeom prst="rect">
             <a:avLst/>
@@ -3335,7 +3335,7 @@
                 <a:ea typeface="メイリオ" pitchFamily="34" charset="-122"/>
                 <a:cs typeface="メイリオ" pitchFamily="34" charset="-120"/>
               </a:rPr>
-              <a:t>売上高</a:t>
+              <a:t>売上高（上乗せ含む）</a:t>
             </a:r>
             <a:endParaRPr lang="en-US" sz="1050" dirty="0"/>
           </a:p>
@@ -3349,8 +3349,8 @@
         </p:nvSpPr>
         <p:spPr>
           <a:xfrm>
-            <a:off x="3721608" y="1901952"/>
-            <a:ext cx="1746504" cy="512064"/>
+            <a:off x="3538728" y="1901952"/>
+            <a:ext cx="1746504" cy="365760"/>
           </a:xfrm>
           <a:prstGeom prst="rect">
             <a:avLst/>
@@ -3388,8 +3388,8 @@
         </p:nvSpPr>
         <p:spPr>
           <a:xfrm>
-            <a:off x="5687568" y="1901952"/>
-            <a:ext cx="1746504" cy="512064"/>
+            <a:off x="5504688" y="1901952"/>
+            <a:ext cx="1746504" cy="365760"/>
           </a:xfrm>
           <a:prstGeom prst="rect">
             <a:avLst/>
@@ -3413,7 +3413,7 @@
                 <a:ea typeface="メイリオ" pitchFamily="34" charset="-122"/>
                 <a:cs typeface="メイリオ" pitchFamily="34" charset="-120"/>
               </a:rPr>
-              <a:t>389.1</a:t>
+              <a:t>521.6</a:t>
             </a:r>
             <a:endParaRPr lang="en-US" sz="1050" dirty="0"/>
           </a:p>
@@ -3427,8 +3427,8 @@
         </p:nvSpPr>
         <p:spPr>
           <a:xfrm>
-            <a:off x="7653528" y="1901952"/>
-            <a:ext cx="1746504" cy="512064"/>
+            <a:off x="7470648" y="1901952"/>
+            <a:ext cx="1746504" cy="365760"/>
           </a:xfrm>
           <a:prstGeom prst="rect">
             <a:avLst/>
@@ -3452,7 +3452,7 @@
                 <a:ea typeface="メイリオ" pitchFamily="34" charset="-122"/>
                 <a:cs typeface="メイリオ" pitchFamily="34" charset="-120"/>
               </a:rPr>
-              <a:t>548.3</a:t>
+              <a:t>680.8</a:t>
             </a:r>
             <a:endParaRPr lang="en-US" sz="1050" dirty="0"/>
           </a:p>
@@ -3466,8 +3466,8 @@
         </p:nvSpPr>
         <p:spPr>
           <a:xfrm>
-            <a:off x="9619488" y="1901952"/>
-            <a:ext cx="1837944" cy="512064"/>
+            <a:off x="9436608" y="1901952"/>
+            <a:ext cx="1837944" cy="365760"/>
           </a:xfrm>
           <a:prstGeom prst="rect">
             <a:avLst/>
@@ -3491,7 +3491,7 @@
                 <a:ea typeface="メイリオ" pitchFamily="34" charset="-122"/>
                 <a:cs typeface="メイリオ" pitchFamily="34" charset="-120"/>
               </a:rPr>
-              <a:t>566.2</a:t>
+              <a:t>730.5</a:t>
             </a:r>
             <a:endParaRPr lang="en-US" sz="1050" dirty="0"/>
           </a:p>
@@ -3505,8 +3505,8 @@
         </p:nvSpPr>
         <p:spPr>
           <a:xfrm>
-            <a:off x="594360" y="2414016"/>
-            <a:ext cx="10972800" cy="512064"/>
+            <a:off x="594360" y="2267712"/>
+            <a:ext cx="10789920" cy="365760"/>
           </a:xfrm>
           <a:prstGeom prst="rect">
             <a:avLst/>
@@ -3530,8 +3530,8 @@
         </p:nvSpPr>
         <p:spPr>
           <a:xfrm>
-            <a:off x="704088" y="2414016"/>
-            <a:ext cx="2798064" cy="512064"/>
+            <a:off x="704088" y="2267712"/>
+            <a:ext cx="2615184" cy="365760"/>
           </a:xfrm>
           <a:prstGeom prst="rect">
             <a:avLst/>
@@ -3555,7 +3555,7 @@
                 <a:ea typeface="メイリオ" pitchFamily="34" charset="-122"/>
                 <a:cs typeface="メイリオ" pitchFamily="34" charset="-120"/>
               </a:rPr>
-              <a:t>売上総利益 合計</a:t>
+              <a:t>既存事業の粗利率</a:t>
             </a:r>
             <a:endParaRPr lang="en-US" sz="1050" dirty="0"/>
           </a:p>
@@ -3569,8 +3569,8 @@
         </p:nvSpPr>
         <p:spPr>
           <a:xfrm>
-            <a:off x="3721608" y="2414016"/>
-            <a:ext cx="1746504" cy="512064"/>
+            <a:off x="3538728" y="2267712"/>
+            <a:ext cx="1746504" cy="365760"/>
           </a:xfrm>
           <a:prstGeom prst="rect">
             <a:avLst/>
@@ -3594,7 +3594,7 @@
                 <a:ea typeface="メイリオ" pitchFamily="34" charset="-122"/>
                 <a:cs typeface="メイリオ" pitchFamily="34" charset="-120"/>
               </a:rPr>
-              <a:t>200.6</a:t>
+              <a:t>51.5%</a:t>
             </a:r>
             <a:endParaRPr lang="en-US" sz="1050" dirty="0"/>
           </a:p>
@@ -3608,8 +3608,8 @@
         </p:nvSpPr>
         <p:spPr>
           <a:xfrm>
-            <a:off x="5687568" y="2414016"/>
-            <a:ext cx="1746504" cy="512064"/>
+            <a:off x="5504688" y="2267712"/>
+            <a:ext cx="1746504" cy="365760"/>
           </a:xfrm>
           <a:prstGeom prst="rect">
             <a:avLst/>
@@ -3633,7 +3633,7 @@
                 <a:ea typeface="メイリオ" pitchFamily="34" charset="-122"/>
                 <a:cs typeface="メイリオ" pitchFamily="34" charset="-120"/>
               </a:rPr>
-              <a:t>333.1</a:t>
+              <a:t>51.5%</a:t>
             </a:r>
             <a:endParaRPr lang="en-US" sz="1050" dirty="0"/>
           </a:p>
@@ -3647,8 +3647,8 @@
         </p:nvSpPr>
         <p:spPr>
           <a:xfrm>
-            <a:off x="7653528" y="2414016"/>
-            <a:ext cx="1746504" cy="512064"/>
+            <a:off x="7470648" y="2267712"/>
+            <a:ext cx="1746504" cy="365760"/>
           </a:xfrm>
           <a:prstGeom prst="rect">
             <a:avLst/>
@@ -3672,7 +3672,7 @@
                 <a:ea typeface="メイリオ" pitchFamily="34" charset="-122"/>
                 <a:cs typeface="メイリオ" pitchFamily="34" charset="-120"/>
               </a:rPr>
-              <a:t>415.2</a:t>
+              <a:t>51.5%</a:t>
             </a:r>
             <a:endParaRPr lang="en-US" sz="1050" dirty="0"/>
           </a:p>
@@ -3686,8 +3686,8 @@
         </p:nvSpPr>
         <p:spPr>
           <a:xfrm>
-            <a:off x="9619488" y="2414016"/>
-            <a:ext cx="1837944" cy="512064"/>
+            <a:off x="9436608" y="2267712"/>
+            <a:ext cx="1837944" cy="365760"/>
           </a:xfrm>
           <a:prstGeom prst="rect">
             <a:avLst/>
@@ -3711,7 +3711,7 @@
                 <a:ea typeface="メイリオ" pitchFamily="34" charset="-122"/>
                 <a:cs typeface="メイリオ" pitchFamily="34" charset="-120"/>
               </a:rPr>
-              <a:t>424.4</a:t>
+              <a:t>29.5%</a:t>
             </a:r>
             <a:endParaRPr lang="en-US" sz="1050" dirty="0"/>
           </a:p>
@@ -3725,8 +3725,8 @@
         </p:nvSpPr>
         <p:spPr>
           <a:xfrm>
-            <a:off x="594360" y="2926080"/>
-            <a:ext cx="10972800" cy="512064"/>
+            <a:off x="594360" y="2633472"/>
+            <a:ext cx="10789920" cy="365760"/>
           </a:xfrm>
           <a:prstGeom prst="rect">
             <a:avLst/>
@@ -3750,8 +3750,8 @@
         </p:nvSpPr>
         <p:spPr>
           <a:xfrm>
-            <a:off x="704088" y="2926080"/>
-            <a:ext cx="2798064" cy="512064"/>
+            <a:off x="704088" y="2633472"/>
+            <a:ext cx="2615184" cy="365760"/>
           </a:xfrm>
           <a:prstGeom prst="rect">
             <a:avLst/>
@@ -3775,6 +3775,446 @@
                 <a:ea typeface="メイリオ" pitchFamily="34" charset="-122"/>
                 <a:cs typeface="メイリオ" pitchFamily="34" charset="-120"/>
               </a:rPr>
+              <a:t>売上総利益 合計</a:t>
+            </a:r>
+            <a:endParaRPr lang="en-US" sz="1050" dirty="0"/>
+          </a:p>
+        </p:txBody>
+      </p:sp>
+      <p:sp>
+        <p:nvSpPr>
+          <p:cNvPr id="24" name="Text 22"/>
+          <p:cNvSpPr/>
+          <p:nvPr/>
+        </p:nvSpPr>
+        <p:spPr>
+          <a:xfrm>
+            <a:off x="3538728" y="2633472"/>
+            <a:ext cx="1746504" cy="365760"/>
+          </a:xfrm>
+          <a:prstGeom prst="rect">
+            <a:avLst/>
+          </a:prstGeom>
+          <a:noFill/>
+          <a:ln/>
+        </p:spPr>
+        <p:txBody>
+          <a:bodyPr wrap="square" lIns="0" tIns="0" rIns="0" bIns="0" rtlCol="0" anchor="ctr"/>
+          <a:lstStyle/>
+          <a:p>
+            <a:pPr algn="r" indent="0" marL="0">
+              <a:buNone/>
+            </a:pPr>
+            <a:r>
+              <a:rPr lang="en-US" sz="1050" dirty="0">
+                <a:solidFill>
+                  <a:srgbClr val="1A1A1A"/>
+                </a:solidFill>
+                <a:latin typeface="メイリオ" pitchFamily="34" charset="0"/>
+                <a:ea typeface="メイリオ" pitchFamily="34" charset="-122"/>
+                <a:cs typeface="メイリオ" pitchFamily="34" charset="-120"/>
+              </a:rPr>
+              <a:t>200.6</a:t>
+            </a:r>
+            <a:endParaRPr lang="en-US" sz="1050" dirty="0"/>
+          </a:p>
+        </p:txBody>
+      </p:sp>
+      <p:sp>
+        <p:nvSpPr>
+          <p:cNvPr id="25" name="Text 23"/>
+          <p:cNvSpPr/>
+          <p:nvPr/>
+        </p:nvSpPr>
+        <p:spPr>
+          <a:xfrm>
+            <a:off x="5504688" y="2633472"/>
+            <a:ext cx="1746504" cy="365760"/>
+          </a:xfrm>
+          <a:prstGeom prst="rect">
+            <a:avLst/>
+          </a:prstGeom>
+          <a:noFill/>
+          <a:ln/>
+        </p:spPr>
+        <p:txBody>
+          <a:bodyPr wrap="square" lIns="0" tIns="0" rIns="0" bIns="0" rtlCol="0" anchor="ctr"/>
+          <a:lstStyle/>
+          <a:p>
+            <a:pPr algn="r" indent="0" marL="0">
+              <a:buNone/>
+            </a:pPr>
+            <a:r>
+              <a:rPr lang="en-US" sz="1050" dirty="0">
+                <a:solidFill>
+                  <a:srgbClr val="1A1A1A"/>
+                </a:solidFill>
+                <a:latin typeface="メイリオ" pitchFamily="34" charset="0"/>
+                <a:ea typeface="メイリオ" pitchFamily="34" charset="-122"/>
+                <a:cs typeface="メイリオ" pitchFamily="34" charset="-120"/>
+              </a:rPr>
+              <a:t>333.1</a:t>
+            </a:r>
+            <a:endParaRPr lang="en-US" sz="1050" dirty="0"/>
+          </a:p>
+        </p:txBody>
+      </p:sp>
+      <p:sp>
+        <p:nvSpPr>
+          <p:cNvPr id="26" name="Text 24"/>
+          <p:cNvSpPr/>
+          <p:nvPr/>
+        </p:nvSpPr>
+        <p:spPr>
+          <a:xfrm>
+            <a:off x="7470648" y="2633472"/>
+            <a:ext cx="1746504" cy="365760"/>
+          </a:xfrm>
+          <a:prstGeom prst="rect">
+            <a:avLst/>
+          </a:prstGeom>
+          <a:noFill/>
+          <a:ln/>
+        </p:spPr>
+        <p:txBody>
+          <a:bodyPr wrap="square" lIns="0" tIns="0" rIns="0" bIns="0" rtlCol="0" anchor="ctr"/>
+          <a:lstStyle/>
+          <a:p>
+            <a:pPr algn="r" indent="0" marL="0">
+              <a:buNone/>
+            </a:pPr>
+            <a:r>
+              <a:rPr lang="en-US" sz="1050" dirty="0">
+                <a:solidFill>
+                  <a:srgbClr val="1A1A1A"/>
+                </a:solidFill>
+                <a:latin typeface="メイリオ" pitchFamily="34" charset="0"/>
+                <a:ea typeface="メイリオ" pitchFamily="34" charset="-122"/>
+                <a:cs typeface="メイリオ" pitchFamily="34" charset="-120"/>
+              </a:rPr>
+              <a:t>415.2</a:t>
+            </a:r>
+            <a:endParaRPr lang="en-US" sz="1050" dirty="0"/>
+          </a:p>
+        </p:txBody>
+      </p:sp>
+      <p:sp>
+        <p:nvSpPr>
+          <p:cNvPr id="27" name="Text 25"/>
+          <p:cNvSpPr/>
+          <p:nvPr/>
+        </p:nvSpPr>
+        <p:spPr>
+          <a:xfrm>
+            <a:off x="9436608" y="2633472"/>
+            <a:ext cx="1837944" cy="365760"/>
+          </a:xfrm>
+          <a:prstGeom prst="rect">
+            <a:avLst/>
+          </a:prstGeom>
+          <a:noFill/>
+          <a:ln/>
+        </p:spPr>
+        <p:txBody>
+          <a:bodyPr wrap="square" lIns="0" tIns="0" rIns="0" bIns="0" rtlCol="0" anchor="ctr"/>
+          <a:lstStyle/>
+          <a:p>
+            <a:pPr algn="r" indent="0" marL="0">
+              <a:buNone/>
+            </a:pPr>
+            <a:r>
+              <a:rPr lang="en-US" sz="1050" dirty="0">
+                <a:solidFill>
+                  <a:srgbClr val="1A1A1A"/>
+                </a:solidFill>
+                <a:latin typeface="メイリオ" pitchFamily="34" charset="0"/>
+                <a:ea typeface="メイリオ" pitchFamily="34" charset="-122"/>
+                <a:cs typeface="メイリオ" pitchFamily="34" charset="-120"/>
+              </a:rPr>
+              <a:t>308.9</a:t>
+            </a:r>
+            <a:endParaRPr lang="en-US" sz="1050" dirty="0"/>
+          </a:p>
+        </p:txBody>
+      </p:sp>
+      <p:sp>
+        <p:nvSpPr>
+          <p:cNvPr id="28" name="Shape 26"/>
+          <p:cNvSpPr/>
+          <p:nvPr/>
+        </p:nvSpPr>
+        <p:spPr>
+          <a:xfrm>
+            <a:off x="594360" y="2999232"/>
+            <a:ext cx="10789920" cy="365760"/>
+          </a:xfrm>
+          <a:prstGeom prst="rect">
+            <a:avLst/>
+          </a:prstGeom>
+          <a:solidFill>
+            <a:srgbClr val="FBFAF8"/>
+          </a:solidFill>
+          <a:ln w="6350">
+            <a:solidFill>
+              <a:srgbClr val="E2E0DC"/>
+            </a:solidFill>
+            <a:prstDash val="solid"/>
+          </a:ln>
+        </p:spPr>
+      </p:sp>
+      <p:sp>
+        <p:nvSpPr>
+          <p:cNvPr id="29" name="Text 27"/>
+          <p:cNvSpPr/>
+          <p:nvPr/>
+        </p:nvSpPr>
+        <p:spPr>
+          <a:xfrm>
+            <a:off x="704088" y="2999232"/>
+            <a:ext cx="2615184" cy="365760"/>
+          </a:xfrm>
+          <a:prstGeom prst="rect">
+            <a:avLst/>
+          </a:prstGeom>
+          <a:noFill/>
+          <a:ln/>
+        </p:spPr>
+        <p:txBody>
+          <a:bodyPr wrap="square" lIns="0" tIns="0" rIns="0" bIns="0" rtlCol="0" anchor="ctr"/>
+          <a:lstStyle/>
+          <a:p>
+            <a:pPr algn="l" indent="0" marL="0">
+              <a:buNone/>
+            </a:pPr>
+            <a:r>
+              <a:rPr lang="en-US" sz="1050" dirty="0">
+                <a:solidFill>
+                  <a:srgbClr val="1A1A1A"/>
+                </a:solidFill>
+                <a:latin typeface="メイリオ" pitchFamily="34" charset="0"/>
+                <a:ea typeface="メイリオ" pitchFamily="34" charset="-122"/>
+                <a:cs typeface="メイリオ" pitchFamily="34" charset="-120"/>
+              </a:rPr>
+              <a:t>総合粗利率</a:t>
+            </a:r>
+            <a:endParaRPr lang="en-US" sz="1050" dirty="0"/>
+          </a:p>
+        </p:txBody>
+      </p:sp>
+      <p:sp>
+        <p:nvSpPr>
+          <p:cNvPr id="30" name="Text 28"/>
+          <p:cNvSpPr/>
+          <p:nvPr/>
+        </p:nvSpPr>
+        <p:spPr>
+          <a:xfrm>
+            <a:off x="3538728" y="2999232"/>
+            <a:ext cx="1746504" cy="365760"/>
+          </a:xfrm>
+          <a:prstGeom prst="rect">
+            <a:avLst/>
+          </a:prstGeom>
+          <a:noFill/>
+          <a:ln/>
+        </p:spPr>
+        <p:txBody>
+          <a:bodyPr wrap="square" lIns="0" tIns="0" rIns="0" bIns="0" rtlCol="0" anchor="ctr"/>
+          <a:lstStyle/>
+          <a:p>
+            <a:pPr algn="r" indent="0" marL="0">
+              <a:buNone/>
+            </a:pPr>
+            <a:r>
+              <a:rPr lang="en-US" sz="1050" dirty="0">
+                <a:solidFill>
+                  <a:srgbClr val="1A1A1A"/>
+                </a:solidFill>
+                <a:latin typeface="メイリオ" pitchFamily="34" charset="0"/>
+                <a:ea typeface="メイリオ" pitchFamily="34" charset="-122"/>
+                <a:cs typeface="メイリオ" pitchFamily="34" charset="-120"/>
+              </a:rPr>
+              <a:t>51.5%</a:t>
+            </a:r>
+            <a:endParaRPr lang="en-US" sz="1050" dirty="0"/>
+          </a:p>
+        </p:txBody>
+      </p:sp>
+      <p:sp>
+        <p:nvSpPr>
+          <p:cNvPr id="31" name="Text 29"/>
+          <p:cNvSpPr/>
+          <p:nvPr/>
+        </p:nvSpPr>
+        <p:spPr>
+          <a:xfrm>
+            <a:off x="5504688" y="2999232"/>
+            <a:ext cx="1746504" cy="365760"/>
+          </a:xfrm>
+          <a:prstGeom prst="rect">
+            <a:avLst/>
+          </a:prstGeom>
+          <a:noFill/>
+          <a:ln/>
+        </p:spPr>
+        <p:txBody>
+          <a:bodyPr wrap="square" lIns="0" tIns="0" rIns="0" bIns="0" rtlCol="0" anchor="ctr"/>
+          <a:lstStyle/>
+          <a:p>
+            <a:pPr algn="r" indent="0" marL="0">
+              <a:buNone/>
+            </a:pPr>
+            <a:r>
+              <a:rPr lang="en-US" sz="1050" dirty="0">
+                <a:solidFill>
+                  <a:srgbClr val="1A1A1A"/>
+                </a:solidFill>
+                <a:latin typeface="メイリオ" pitchFamily="34" charset="0"/>
+                <a:ea typeface="メイリオ" pitchFamily="34" charset="-122"/>
+                <a:cs typeface="メイリオ" pitchFamily="34" charset="-120"/>
+              </a:rPr>
+              <a:t>63.9%</a:t>
+            </a:r>
+            <a:endParaRPr lang="en-US" sz="1050" dirty="0"/>
+          </a:p>
+        </p:txBody>
+      </p:sp>
+      <p:sp>
+        <p:nvSpPr>
+          <p:cNvPr id="32" name="Text 30"/>
+          <p:cNvSpPr/>
+          <p:nvPr/>
+        </p:nvSpPr>
+        <p:spPr>
+          <a:xfrm>
+            <a:off x="7470648" y="2999232"/>
+            <a:ext cx="1746504" cy="365760"/>
+          </a:xfrm>
+          <a:prstGeom prst="rect">
+            <a:avLst/>
+          </a:prstGeom>
+          <a:noFill/>
+          <a:ln/>
+        </p:spPr>
+        <p:txBody>
+          <a:bodyPr wrap="square" lIns="0" tIns="0" rIns="0" bIns="0" rtlCol="0" anchor="ctr"/>
+          <a:lstStyle/>
+          <a:p>
+            <a:pPr algn="r" indent="0" marL="0">
+              <a:buNone/>
+            </a:pPr>
+            <a:r>
+              <a:rPr lang="en-US" sz="1050" dirty="0">
+                <a:solidFill>
+                  <a:srgbClr val="1A1A1A"/>
+                </a:solidFill>
+                <a:latin typeface="メイリオ" pitchFamily="34" charset="0"/>
+                <a:ea typeface="メイリオ" pitchFamily="34" charset="-122"/>
+                <a:cs typeface="メイリオ" pitchFamily="34" charset="-120"/>
+              </a:rPr>
+              <a:t>61.0%</a:t>
+            </a:r>
+            <a:endParaRPr lang="en-US" sz="1050" dirty="0"/>
+          </a:p>
+        </p:txBody>
+      </p:sp>
+      <p:sp>
+        <p:nvSpPr>
+          <p:cNvPr id="33" name="Text 31"/>
+          <p:cNvSpPr/>
+          <p:nvPr/>
+        </p:nvSpPr>
+        <p:spPr>
+          <a:xfrm>
+            <a:off x="9436608" y="2999232"/>
+            <a:ext cx="1837944" cy="365760"/>
+          </a:xfrm>
+          <a:prstGeom prst="rect">
+            <a:avLst/>
+          </a:prstGeom>
+          <a:noFill/>
+          <a:ln/>
+        </p:spPr>
+        <p:txBody>
+          <a:bodyPr wrap="square" lIns="0" tIns="0" rIns="0" bIns="0" rtlCol="0" anchor="ctr"/>
+          <a:lstStyle/>
+          <a:p>
+            <a:pPr algn="r" indent="0" marL="0">
+              <a:buNone/>
+            </a:pPr>
+            <a:r>
+              <a:rPr lang="en-US" sz="1050" dirty="0">
+                <a:solidFill>
+                  <a:srgbClr val="1A1A1A"/>
+                </a:solidFill>
+                <a:latin typeface="メイリオ" pitchFamily="34" charset="0"/>
+                <a:ea typeface="メイリオ" pitchFamily="34" charset="-122"/>
+                <a:cs typeface="メイリオ" pitchFamily="34" charset="-120"/>
+              </a:rPr>
+              <a:t>42.3%</a:t>
+            </a:r>
+            <a:endParaRPr lang="en-US" sz="1050" dirty="0"/>
+          </a:p>
+        </p:txBody>
+      </p:sp>
+      <p:sp>
+        <p:nvSpPr>
+          <p:cNvPr id="34" name="Shape 32"/>
+          <p:cNvSpPr/>
+          <p:nvPr/>
+        </p:nvSpPr>
+        <p:spPr>
+          <a:xfrm>
+            <a:off x="594360" y="3364992"/>
+            <a:ext cx="10789920" cy="365760"/>
+          </a:xfrm>
+          <a:prstGeom prst="rect">
+            <a:avLst/>
+          </a:prstGeom>
+          <a:solidFill>
+            <a:srgbClr val="FFFFFF"/>
+          </a:solidFill>
+          <a:ln w="6350">
+            <a:solidFill>
+              <a:srgbClr val="E2E0DC"/>
+            </a:solidFill>
+            <a:prstDash val="solid"/>
+          </a:ln>
+        </p:spPr>
+      </p:sp>
+      <p:sp>
+        <p:nvSpPr>
+          <p:cNvPr id="35" name="Text 33"/>
+          <p:cNvSpPr/>
+          <p:nvPr/>
+        </p:nvSpPr>
+        <p:spPr>
+          <a:xfrm>
+            <a:off x="704088" y="3364992"/>
+            <a:ext cx="2615184" cy="365760"/>
+          </a:xfrm>
+          <a:prstGeom prst="rect">
+            <a:avLst/>
+          </a:prstGeom>
+          <a:noFill/>
+          <a:ln/>
+        </p:spPr>
+        <p:txBody>
+          <a:bodyPr wrap="square" lIns="0" tIns="0" rIns="0" bIns="0" rtlCol="0" anchor="ctr"/>
+          <a:lstStyle/>
+          <a:p>
+            <a:pPr algn="l" indent="0" marL="0">
+              <a:buNone/>
+            </a:pPr>
+            <a:r>
+              <a:rPr lang="en-US" sz="1050" dirty="0">
+                <a:solidFill>
+                  <a:srgbClr val="1A1A1A"/>
+                </a:solidFill>
+                <a:latin typeface="メイリオ" pitchFamily="34" charset="0"/>
+                <a:ea typeface="メイリオ" pitchFamily="34" charset="-122"/>
+                <a:cs typeface="メイリオ" pitchFamily="34" charset="-120"/>
+              </a:rPr>
               <a:t>販管費</a:t>
             </a:r>
             <a:endParaRPr lang="en-US" sz="1050" dirty="0"/>
@@ -3783,14 +4223,14 @@
       </p:sp>
       <p:sp>
         <p:nvSpPr>
-          <p:cNvPr id="24" name="Text 22"/>
-          <p:cNvSpPr/>
-          <p:nvPr/>
-        </p:nvSpPr>
-        <p:spPr>
-          <a:xfrm>
-            <a:off x="3721608" y="2926080"/>
-            <a:ext cx="1746504" cy="512064"/>
+          <p:cNvPr id="36" name="Text 34"/>
+          <p:cNvSpPr/>
+          <p:nvPr/>
+        </p:nvSpPr>
+        <p:spPr>
+          <a:xfrm>
+            <a:off x="3538728" y="3364992"/>
+            <a:ext cx="1746504" cy="365760"/>
           </a:xfrm>
           <a:prstGeom prst="rect">
             <a:avLst/>
@@ -3822,14 +4262,14 @@
       </p:sp>
       <p:sp>
         <p:nvSpPr>
-          <p:cNvPr id="25" name="Text 23"/>
-          <p:cNvSpPr/>
-          <p:nvPr/>
-        </p:nvSpPr>
-        <p:spPr>
-          <a:xfrm>
-            <a:off x="5687568" y="2926080"/>
-            <a:ext cx="1746504" cy="512064"/>
+          <p:cNvPr id="37" name="Text 35"/>
+          <p:cNvSpPr/>
+          <p:nvPr/>
+        </p:nvSpPr>
+        <p:spPr>
+          <a:xfrm>
+            <a:off x="5504688" y="3364992"/>
+            <a:ext cx="1746504" cy="365760"/>
           </a:xfrm>
           <a:prstGeom prst="rect">
             <a:avLst/>
@@ -3861,14 +4301,14 @@
       </p:sp>
       <p:sp>
         <p:nvSpPr>
-          <p:cNvPr id="26" name="Text 24"/>
-          <p:cNvSpPr/>
-          <p:nvPr/>
-        </p:nvSpPr>
-        <p:spPr>
-          <a:xfrm>
-            <a:off x="7653528" y="2926080"/>
-            <a:ext cx="1746504" cy="512064"/>
+          <p:cNvPr id="38" name="Text 36"/>
+          <p:cNvSpPr/>
+          <p:nvPr/>
+        </p:nvSpPr>
+        <p:spPr>
+          <a:xfrm>
+            <a:off x="7470648" y="3364992"/>
+            <a:ext cx="1746504" cy="365760"/>
           </a:xfrm>
           <a:prstGeom prst="rect">
             <a:avLst/>
@@ -3900,14 +4340,14 @@
       </p:sp>
       <p:sp>
         <p:nvSpPr>
-          <p:cNvPr id="27" name="Text 25"/>
-          <p:cNvSpPr/>
-          <p:nvPr/>
-        </p:nvSpPr>
-        <p:spPr>
-          <a:xfrm>
-            <a:off x="9619488" y="2926080"/>
-            <a:ext cx="1837944" cy="512064"/>
+          <p:cNvPr id="39" name="Text 37"/>
+          <p:cNvSpPr/>
+          <p:nvPr/>
+        </p:nvSpPr>
+        <p:spPr>
+          <a:xfrm>
+            <a:off x="9436608" y="3364992"/>
+            <a:ext cx="1837944" cy="365760"/>
           </a:xfrm>
           <a:prstGeom prst="rect">
             <a:avLst/>
@@ -3939,14 +4379,14 @@
       </p:sp>
       <p:sp>
         <p:nvSpPr>
-          <p:cNvPr id="28" name="Shape 26"/>
-          <p:cNvSpPr/>
-          <p:nvPr/>
-        </p:nvSpPr>
-        <p:spPr>
-          <a:xfrm>
-            <a:off x="594360" y="3438144"/>
-            <a:ext cx="10972800" cy="512064"/>
+          <p:cNvPr id="40" name="Shape 38"/>
+          <p:cNvSpPr/>
+          <p:nvPr/>
+        </p:nvSpPr>
+        <p:spPr>
+          <a:xfrm>
+            <a:off x="594360" y="3730752"/>
+            <a:ext cx="10789920" cy="365760"/>
           </a:xfrm>
           <a:prstGeom prst="rect">
             <a:avLst/>
@@ -3964,14 +4404,14 @@
       </p:sp>
       <p:sp>
         <p:nvSpPr>
-          <p:cNvPr id="29" name="Text 27"/>
-          <p:cNvSpPr/>
-          <p:nvPr/>
-        </p:nvSpPr>
-        <p:spPr>
-          <a:xfrm>
-            <a:off x="704088" y="3438144"/>
-            <a:ext cx="2798064" cy="512064"/>
+          <p:cNvPr id="41" name="Text 39"/>
+          <p:cNvSpPr/>
+          <p:nvPr/>
+        </p:nvSpPr>
+        <p:spPr>
+          <a:xfrm>
+            <a:off x="704088" y="3730752"/>
+            <a:ext cx="2615184" cy="365760"/>
           </a:xfrm>
           <a:prstGeom prst="rect">
             <a:avLst/>
@@ -4003,14 +4443,14 @@
       </p:sp>
       <p:sp>
         <p:nvSpPr>
-          <p:cNvPr id="30" name="Text 28"/>
-          <p:cNvSpPr/>
-          <p:nvPr/>
-        </p:nvSpPr>
-        <p:spPr>
-          <a:xfrm>
-            <a:off x="3721608" y="3438144"/>
-            <a:ext cx="1746504" cy="512064"/>
+          <p:cNvPr id="42" name="Text 40"/>
+          <p:cNvSpPr/>
+          <p:nvPr/>
+        </p:nvSpPr>
+        <p:spPr>
+          <a:xfrm>
+            <a:off x="3538728" y="3730752"/>
+            <a:ext cx="1746504" cy="365760"/>
           </a:xfrm>
           <a:prstGeom prst="rect">
             <a:avLst/>
@@ -4042,14 +4482,14 @@
       </p:sp>
       <p:sp>
         <p:nvSpPr>
-          <p:cNvPr id="31" name="Text 29"/>
-          <p:cNvSpPr/>
-          <p:nvPr/>
-        </p:nvSpPr>
-        <p:spPr>
-          <a:xfrm>
-            <a:off x="5687568" y="3438144"/>
-            <a:ext cx="1746504" cy="512064"/>
+          <p:cNvPr id="43" name="Text 41"/>
+          <p:cNvSpPr/>
+          <p:nvPr/>
+        </p:nvSpPr>
+        <p:spPr>
+          <a:xfrm>
+            <a:off x="5504688" y="3730752"/>
+            <a:ext cx="1746504" cy="365760"/>
           </a:xfrm>
           <a:prstGeom prst="rect">
             <a:avLst/>
@@ -4081,14 +4521,14 @@
       </p:sp>
       <p:sp>
         <p:nvSpPr>
-          <p:cNvPr id="32" name="Text 30"/>
-          <p:cNvSpPr/>
-          <p:nvPr/>
-        </p:nvSpPr>
-        <p:spPr>
-          <a:xfrm>
-            <a:off x="7653528" y="3438144"/>
-            <a:ext cx="1746504" cy="512064"/>
+          <p:cNvPr id="44" name="Text 42"/>
+          <p:cNvSpPr/>
+          <p:nvPr/>
+        </p:nvSpPr>
+        <p:spPr>
+          <a:xfrm>
+            <a:off x="7470648" y="3730752"/>
+            <a:ext cx="1746504" cy="365760"/>
           </a:xfrm>
           <a:prstGeom prst="rect">
             <a:avLst/>
@@ -4120,14 +4560,14 @@
       </p:sp>
       <p:sp>
         <p:nvSpPr>
-          <p:cNvPr id="33" name="Text 31"/>
-          <p:cNvSpPr/>
-          <p:nvPr/>
-        </p:nvSpPr>
-        <p:spPr>
-          <a:xfrm>
-            <a:off x="9619488" y="3438144"/>
-            <a:ext cx="1837944" cy="512064"/>
+          <p:cNvPr id="45" name="Text 43"/>
+          <p:cNvSpPr/>
+          <p:nvPr/>
+        </p:nvSpPr>
+        <p:spPr>
+          <a:xfrm>
+            <a:off x="9436608" y="3730752"/>
+            <a:ext cx="1837944" cy="365760"/>
           </a:xfrm>
           <a:prstGeom prst="rect">
             <a:avLst/>
@@ -4151,7 +4591,7 @@
                 <a:ea typeface="メイリオ" pitchFamily="34" charset="-122"/>
                 <a:cs typeface="メイリオ" pitchFamily="34" charset="-120"/>
               </a:rPr>
-              <a:t>＋124.2</a:t>
+              <a:t>＋8.8</a:t>
             </a:r>
             <a:endParaRPr lang="en-US" sz="1050" dirty="0"/>
           </a:p>
@@ -4159,14 +4599,14 @@
       </p:sp>
       <p:sp>
         <p:nvSpPr>
-          <p:cNvPr id="34" name="Shape 32"/>
-          <p:cNvSpPr/>
-          <p:nvPr/>
-        </p:nvSpPr>
-        <p:spPr>
-          <a:xfrm>
-            <a:off x="594360" y="3950208"/>
-            <a:ext cx="10972800" cy="512064"/>
+          <p:cNvPr id="46" name="Shape 44"/>
+          <p:cNvSpPr/>
+          <p:nvPr/>
+        </p:nvSpPr>
+        <p:spPr>
+          <a:xfrm>
+            <a:off x="594360" y="4096512"/>
+            <a:ext cx="10789920" cy="365760"/>
           </a:xfrm>
           <a:prstGeom prst="rect">
             <a:avLst/>
@@ -4184,14 +4624,14 @@
       </p:sp>
       <p:sp>
         <p:nvSpPr>
-          <p:cNvPr id="35" name="Text 33"/>
-          <p:cNvSpPr/>
-          <p:nvPr/>
-        </p:nvSpPr>
-        <p:spPr>
-          <a:xfrm>
-            <a:off x="704088" y="3950208"/>
-            <a:ext cx="2798064" cy="512064"/>
+          <p:cNvPr id="47" name="Text 45"/>
+          <p:cNvSpPr/>
+          <p:nvPr/>
+        </p:nvSpPr>
+        <p:spPr>
+          <a:xfrm>
+            <a:off x="704088" y="4096512"/>
+            <a:ext cx="2615184" cy="365760"/>
           </a:xfrm>
           <a:prstGeom prst="rect">
             <a:avLst/>
@@ -4223,14 +4663,14 @@
       </p:sp>
       <p:sp>
         <p:nvSpPr>
-          <p:cNvPr id="36" name="Text 34"/>
-          <p:cNvSpPr/>
-          <p:nvPr/>
-        </p:nvSpPr>
-        <p:spPr>
-          <a:xfrm>
-            <a:off x="3721608" y="3950208"/>
-            <a:ext cx="1746504" cy="512064"/>
+          <p:cNvPr id="48" name="Text 46"/>
+          <p:cNvSpPr/>
+          <p:nvPr/>
+        </p:nvSpPr>
+        <p:spPr>
+          <a:xfrm>
+            <a:off x="3538728" y="4096512"/>
+            <a:ext cx="1746504" cy="365760"/>
           </a:xfrm>
           <a:prstGeom prst="rect">
             <a:avLst/>
@@ -4262,14 +4702,14 @@
       </p:sp>
       <p:sp>
         <p:nvSpPr>
-          <p:cNvPr id="37" name="Text 35"/>
-          <p:cNvSpPr/>
-          <p:nvPr/>
-        </p:nvSpPr>
-        <p:spPr>
-          <a:xfrm>
-            <a:off x="5687568" y="3950208"/>
-            <a:ext cx="1746504" cy="512064"/>
+          <p:cNvPr id="49" name="Text 47"/>
+          <p:cNvSpPr/>
+          <p:nvPr/>
+        </p:nvSpPr>
+        <p:spPr>
+          <a:xfrm>
+            <a:off x="5504688" y="4096512"/>
+            <a:ext cx="1746504" cy="365760"/>
           </a:xfrm>
           <a:prstGeom prst="rect">
             <a:avLst/>
@@ -4301,14 +4741,14 @@
       </p:sp>
       <p:sp>
         <p:nvSpPr>
-          <p:cNvPr id="38" name="Text 36"/>
-          <p:cNvSpPr/>
-          <p:nvPr/>
-        </p:nvSpPr>
-        <p:spPr>
-          <a:xfrm>
-            <a:off x="7653528" y="3950208"/>
-            <a:ext cx="1746504" cy="512064"/>
+          <p:cNvPr id="50" name="Text 48"/>
+          <p:cNvSpPr/>
+          <p:nvPr/>
+        </p:nvSpPr>
+        <p:spPr>
+          <a:xfrm>
+            <a:off x="7470648" y="4096512"/>
+            <a:ext cx="1746504" cy="365760"/>
           </a:xfrm>
           <a:prstGeom prst="rect">
             <a:avLst/>
@@ -4340,14 +4780,14 @@
       </p:sp>
       <p:sp>
         <p:nvSpPr>
-          <p:cNvPr id="39" name="Text 37"/>
-          <p:cNvSpPr/>
-          <p:nvPr/>
-        </p:nvSpPr>
-        <p:spPr>
-          <a:xfrm>
-            <a:off x="9619488" y="3950208"/>
-            <a:ext cx="1837944" cy="512064"/>
+          <p:cNvPr id="51" name="Text 49"/>
+          <p:cNvSpPr/>
+          <p:nvPr/>
+        </p:nvSpPr>
+        <p:spPr>
+          <a:xfrm>
+            <a:off x="9436608" y="4096512"/>
+            <a:ext cx="1837944" cy="365760"/>
           </a:xfrm>
           <a:prstGeom prst="rect">
             <a:avLst/>
@@ -4365,13 +4805,13 @@
             <a:r>
               <a:rPr lang="en-US" sz="1050" b="1" dirty="0">
                 <a:solidFill>
-                  <a:srgbClr val="1A1A1A"/>
-                </a:solidFill>
-                <a:latin typeface="メイリオ" pitchFamily="34" charset="0"/>
-                <a:ea typeface="メイリオ" pitchFamily="34" charset="-122"/>
-                <a:cs typeface="メイリオ" pitchFamily="34" charset="-120"/>
-              </a:rPr>
-              <a:t>＋109.2</a:t>
+                  <a:srgbClr val="6E6E6E"/>
+                </a:solidFill>
+                <a:latin typeface="メイリオ" pitchFamily="34" charset="0"/>
+                <a:ea typeface="メイリオ" pitchFamily="34" charset="-122"/>
+                <a:cs typeface="メイリオ" pitchFamily="34" charset="-120"/>
+              </a:rPr>
+              <a:t>▲6.2</a:t>
             </a:r>
             <a:endParaRPr lang="en-US" sz="1050" dirty="0"/>
           </a:p>
@@ -4379,14 +4819,14 @@
       </p:sp>
       <p:sp>
         <p:nvSpPr>
-          <p:cNvPr id="40" name="Shape 38"/>
+          <p:cNvPr id="52" name="Shape 50"/>
           <p:cNvSpPr/>
           <p:nvPr/>
         </p:nvSpPr>
         <p:spPr>
           <a:xfrm>
             <a:off x="594360" y="4462272"/>
-            <a:ext cx="10972800" cy="512064"/>
+            <a:ext cx="10789920" cy="365760"/>
           </a:xfrm>
           <a:prstGeom prst="rect">
             <a:avLst/>
@@ -4404,14 +4844,14 @@
       </p:sp>
       <p:sp>
         <p:nvSpPr>
-          <p:cNvPr id="41" name="Text 39"/>
+          <p:cNvPr id="53" name="Text 51"/>
           <p:cNvSpPr/>
           <p:nvPr/>
         </p:nvSpPr>
         <p:spPr>
           <a:xfrm>
             <a:off x="704088" y="4462272"/>
-            <a:ext cx="2798064" cy="512064"/>
+            <a:ext cx="2615184" cy="365760"/>
           </a:xfrm>
           <a:prstGeom prst="rect">
             <a:avLst/>
@@ -4443,14 +4883,14 @@
       </p:sp>
       <p:sp>
         <p:nvSpPr>
-          <p:cNvPr id="42" name="Text 40"/>
-          <p:cNvSpPr/>
-          <p:nvPr/>
-        </p:nvSpPr>
-        <p:spPr>
-          <a:xfrm>
-            <a:off x="3721608" y="4462272"/>
-            <a:ext cx="1746504" cy="512064"/>
+          <p:cNvPr id="54" name="Text 52"/>
+          <p:cNvSpPr/>
+          <p:nvPr/>
+        </p:nvSpPr>
+        <p:spPr>
+          <a:xfrm>
+            <a:off x="3538728" y="4462272"/>
+            <a:ext cx="1746504" cy="365760"/>
           </a:xfrm>
           <a:prstGeom prst="rect">
             <a:avLst/>
@@ -4482,14 +4922,14 @@
       </p:sp>
       <p:sp>
         <p:nvSpPr>
-          <p:cNvPr id="43" name="Text 41"/>
-          <p:cNvSpPr/>
-          <p:nvPr/>
-        </p:nvSpPr>
-        <p:spPr>
-          <a:xfrm>
-            <a:off x="5687568" y="4462272"/>
-            <a:ext cx="1746504" cy="512064"/>
+          <p:cNvPr id="55" name="Text 53"/>
+          <p:cNvSpPr/>
+          <p:nvPr/>
+        </p:nvSpPr>
+        <p:spPr>
+          <a:xfrm>
+            <a:off x="5504688" y="4462272"/>
+            <a:ext cx="1746504" cy="365760"/>
           </a:xfrm>
           <a:prstGeom prst="rect">
             <a:avLst/>
@@ -4521,14 +4961,14 @@
       </p:sp>
       <p:sp>
         <p:nvSpPr>
-          <p:cNvPr id="44" name="Text 42"/>
-          <p:cNvSpPr/>
-          <p:nvPr/>
-        </p:nvSpPr>
-        <p:spPr>
-          <a:xfrm>
-            <a:off x="7653528" y="4462272"/>
-            <a:ext cx="1746504" cy="512064"/>
+          <p:cNvPr id="56" name="Text 54"/>
+          <p:cNvSpPr/>
+          <p:nvPr/>
+        </p:nvSpPr>
+        <p:spPr>
+          <a:xfrm>
+            <a:off x="7470648" y="4462272"/>
+            <a:ext cx="1746504" cy="365760"/>
           </a:xfrm>
           <a:prstGeom prst="rect">
             <a:avLst/>
@@ -4546,13 +4986,13 @@
             <a:r>
               <a:rPr lang="en-US" sz="1050" b="1" dirty="0">
                 <a:solidFill>
-                  <a:srgbClr val="6E6E6E"/>
-                </a:solidFill>
-                <a:latin typeface="メイリオ" pitchFamily="34" charset="0"/>
-                <a:ea typeface="メイリオ" pitchFamily="34" charset="-122"/>
-                <a:cs typeface="メイリオ" pitchFamily="34" charset="-120"/>
-              </a:rPr>
-              <a:t>▲6.6</a:t>
+                  <a:srgbClr val="1A1A1A"/>
+                </a:solidFill>
+                <a:latin typeface="メイリオ" pitchFamily="34" charset="0"/>
+                <a:ea typeface="メイリオ" pitchFamily="34" charset="-122"/>
+                <a:cs typeface="メイリオ" pitchFamily="34" charset="-120"/>
+              </a:rPr>
+              <a:t>－</a:t>
             </a:r>
             <a:endParaRPr lang="en-US" sz="1050" dirty="0"/>
           </a:p>
@@ -4560,14 +5000,14 @@
       </p:sp>
       <p:sp>
         <p:nvSpPr>
-          <p:cNvPr id="45" name="Text 43"/>
-          <p:cNvSpPr/>
-          <p:nvPr/>
-        </p:nvSpPr>
-        <p:spPr>
-          <a:xfrm>
-            <a:off x="9619488" y="4462272"/>
-            <a:ext cx="1837944" cy="512064"/>
+          <p:cNvPr id="57" name="Text 55"/>
+          <p:cNvSpPr/>
+          <p:nvPr/>
+        </p:nvSpPr>
+        <p:spPr>
+          <a:xfrm>
+            <a:off x="9436608" y="4462272"/>
+            <a:ext cx="1837944" cy="365760"/>
           </a:xfrm>
           <a:prstGeom prst="rect">
             <a:avLst/>
@@ -4591,7 +5031,7 @@
                 <a:ea typeface="メイリオ" pitchFamily="34" charset="-122"/>
                 <a:cs typeface="メイリオ" pitchFamily="34" charset="-120"/>
               </a:rPr>
-              <a:t>0.0</a:t>
+              <a:t>＋14.6</a:t>
             </a:r>
             <a:endParaRPr lang="en-US" sz="1050" dirty="0"/>
           </a:p>
@@ -4599,18 +5039,18 @@
       </p:sp>
       <p:sp>
         <p:nvSpPr>
-          <p:cNvPr id="46" name="Shape 44"/>
-          <p:cNvSpPr/>
-          <p:nvPr/>
-        </p:nvSpPr>
-        <p:spPr>
-          <a:xfrm>
-            <a:off x="594360" y="5029200"/>
-            <a:ext cx="5349240" cy="1280160"/>
+          <p:cNvPr id="58" name="Shape 56"/>
+          <p:cNvSpPr/>
+          <p:nvPr/>
+        </p:nvSpPr>
+        <p:spPr>
+          <a:xfrm>
+            <a:off x="594360" y="4983480"/>
+            <a:ext cx="5349240" cy="1298448"/>
           </a:xfrm>
           <a:prstGeom prst="roundRect">
             <a:avLst>
-              <a:gd name="adj" fmla="val 3571"/>
+              <a:gd name="adj" fmla="val 3521"/>
             </a:avLst>
           </a:prstGeom>
           <a:solidFill>
@@ -4633,13 +5073,13 @@
       </p:sp>
       <p:sp>
         <p:nvSpPr>
-          <p:cNvPr id="47" name="Text 45"/>
-          <p:cNvSpPr/>
-          <p:nvPr/>
-        </p:nvSpPr>
-        <p:spPr>
-          <a:xfrm>
-            <a:off x="868680" y="5193792"/>
+          <p:cNvPr id="59" name="Text 57"/>
+          <p:cNvSpPr/>
+          <p:nvPr/>
+        </p:nvSpPr>
+        <p:spPr>
+          <a:xfrm>
+            <a:off x="868680" y="5138928"/>
             <a:ext cx="4800600" cy="274320"/>
           </a:xfrm>
           <a:prstGeom prst="rect">
@@ -4658,13 +5098,13 @@
             <a:r>
               <a:rPr lang="en-US" sz="1100" b="1" dirty="0">
                 <a:solidFill>
-                  <a:srgbClr val="FAF3E2"/>
-                </a:solidFill>
-                <a:latin typeface="メイリオ" pitchFamily="34" charset="0"/>
-                <a:ea typeface="メイリオ" pitchFamily="34" charset="-122"/>
-                <a:cs typeface="メイリオ" pitchFamily="34" charset="-120"/>
-              </a:rPr>
-              <a:t>プランC の問題</a:t>
+                  <a:srgbClr val="A98442"/>
+                </a:solidFill>
+                <a:latin typeface="メイリオ" pitchFamily="34" charset="0"/>
+                <a:ea typeface="メイリオ" pitchFamily="34" charset="-122"/>
+                <a:cs typeface="メイリオ" pitchFamily="34" charset="-120"/>
+              </a:rPr>
+              <a:t>A〜C は粗利率51.5%を前提</a:t>
             </a:r>
             <a:endParaRPr lang="en-US" sz="1100" dirty="0"/>
           </a:p>
@@ -4672,14 +5112,14 @@
       </p:sp>
       <p:sp>
         <p:nvSpPr>
-          <p:cNvPr id="48" name="Text 46"/>
-          <p:cNvSpPr/>
-          <p:nvPr/>
-        </p:nvSpPr>
-        <p:spPr>
-          <a:xfrm>
-            <a:off x="868680" y="5486400"/>
-            <a:ext cx="4800600" cy="731520"/>
+          <p:cNvPr id="60" name="Text 58"/>
+          <p:cNvSpPr/>
+          <p:nvPr/>
+        </p:nvSpPr>
+        <p:spPr>
+          <a:xfrm>
+            <a:off x="868680" y="5422392"/>
+            <a:ext cx="4800600" cy="777240"/>
           </a:xfrm>
           <a:prstGeom prst="rect">
             <a:avLst/>
@@ -4695,7 +5135,7 @@
               <a:buNone/>
             </a:pPr>
             <a:r>
-              <a:rPr lang="en-US" sz="1100" dirty="0">
+              <a:rPr lang="en-US" sz="1050" dirty="0">
                 <a:solidFill>
                   <a:srgbClr val="FFFFFF"/>
                 </a:solidFill>
@@ -4703,26 +5143,26 @@
                 <a:ea typeface="メイリオ" pitchFamily="34" charset="-122"/>
                 <a:cs typeface="メイリオ" pitchFamily="34" charset="-120"/>
               </a:rPr>
-              <a:t>経常利益1億円では期中に現預金がマイナスに転じます。仕入を維持する前提では、あと17.9百万円の売上が必要です。</a:t>
-            </a:r>
-            <a:endParaRPr lang="en-US" sz="1100" dirty="0"/>
-          </a:p>
-        </p:txBody>
-      </p:sp>
-      <p:sp>
-        <p:nvSpPr>
-          <p:cNvPr id="49" name="Shape 47"/>
-          <p:cNvSpPr/>
-          <p:nvPr/>
-        </p:nvSpPr>
-        <p:spPr>
-          <a:xfrm>
-            <a:off x="6217920" y="5029200"/>
-            <a:ext cx="5349240" cy="1280160"/>
+              <a:t>2026年4-6月の実績値。ただしこの水準は大口の在庫販売が入らなかった3か月のもので、通期で維持できる保証はありません。</a:t>
+            </a:r>
+            <a:endParaRPr lang="en-US" sz="1050" dirty="0"/>
+          </a:p>
+        </p:txBody>
+      </p:sp>
+      <p:sp>
+        <p:nvSpPr>
+          <p:cNvPr id="61" name="Shape 59"/>
+          <p:cNvSpPr/>
+          <p:nvPr/>
+        </p:nvSpPr>
+        <p:spPr>
+          <a:xfrm>
+            <a:off x="6217920" y="4983480"/>
+            <a:ext cx="5349240" cy="1298448"/>
           </a:xfrm>
           <a:prstGeom prst="roundRect">
             <a:avLst>
-              <a:gd name="adj" fmla="val 3571"/>
+              <a:gd name="adj" fmla="val 3521"/>
             </a:avLst>
           </a:prstGeom>
           <a:solidFill>
@@ -4745,13 +5185,13 @@
       </p:sp>
       <p:sp>
         <p:nvSpPr>
-          <p:cNvPr id="50" name="Text 48"/>
-          <p:cNvSpPr/>
-          <p:nvPr/>
-        </p:nvSpPr>
-        <p:spPr>
-          <a:xfrm>
-            <a:off x="6492240" y="5193792"/>
+          <p:cNvPr id="62" name="Text 60"/>
+          <p:cNvSpPr/>
+          <p:nvPr/>
+        </p:nvSpPr>
+        <p:spPr>
+          <a:xfrm>
+            <a:off x="6492240" y="5138928"/>
             <a:ext cx="4800600" cy="274320"/>
           </a:xfrm>
           <a:prstGeom prst="rect">
@@ -4776,7 +5216,7 @@
                 <a:ea typeface="メイリオ" pitchFamily="34" charset="-122"/>
                 <a:cs typeface="メイリオ" pitchFamily="34" charset="-120"/>
               </a:rPr>
-              <a:t>プランD が本線</a:t>
+              <a:t>D は粗利率29.5%を前提</a:t>
             </a:r>
             <a:endParaRPr lang="en-US" sz="1100" dirty="0"/>
           </a:p>
@@ -4784,14 +5224,14 @@
       </p:sp>
       <p:sp>
         <p:nvSpPr>
-          <p:cNvPr id="51" name="Text 49"/>
-          <p:cNvSpPr/>
-          <p:nvPr/>
-        </p:nvSpPr>
-        <p:spPr>
-          <a:xfrm>
-            <a:off x="6492240" y="5486400"/>
-            <a:ext cx="4800600" cy="731520"/>
+          <p:cNvPr id="63" name="Text 61"/>
+          <p:cNvSpPr/>
+          <p:nvPr/>
+        </p:nvSpPr>
+        <p:spPr>
+          <a:xfrm>
+            <a:off x="6492240" y="5422392"/>
+            <a:ext cx="4800600" cy="777240"/>
           </a:xfrm>
           <a:prstGeom prst="rect">
             <a:avLst/>
@@ -4807,23 +5247,23 @@
               <a:buNone/>
             </a:pPr>
             <a:r>
-              <a:rPr lang="en-US" sz="1100" dirty="0">
-                <a:solidFill>
-                  <a:srgbClr val="1A1A1A"/>
-                </a:solidFill>
-                <a:latin typeface="メイリオ" pitchFamily="34" charset="0"/>
-                <a:ea typeface="メイリオ" pitchFamily="34" charset="-122"/>
-                <a:cs typeface="メイリオ" pitchFamily="34" charset="-120"/>
-              </a:rPr>
-              <a:t>売上566.2百万円で、仕入を落とさずに期中一度も現預金がマイナスにならない水準。経常利益は109.2百万円。</a:t>
-            </a:r>
-            <a:endParaRPr lang="en-US" sz="1100" dirty="0"/>
-          </a:p>
-        </p:txBody>
-      </p:sp>
-      <p:sp>
-        <p:nvSpPr>
-          <p:cNvPr id="52" name="Text 50"/>
+              <a:rPr lang="en-US" sz="1050" dirty="0">
+                <a:solidFill>
+                  <a:srgbClr val="1A1A1A"/>
+                </a:solidFill>
+                <a:latin typeface="メイリオ" pitchFamily="34" charset="0"/>
+                <a:ea typeface="メイリオ" pitchFamily="34" charset="-122"/>
+                <a:cs typeface="メイリオ" pitchFamily="34" charset="-120"/>
+              </a:rPr>
+              <a:t>FY2025・FY2026の加重平均。大口の在庫販売を含む実績なので、より実態に近い保守値です。損益は均衡ですが資金は回ります。</a:t>
+            </a:r>
+            <a:endParaRPr lang="en-US" sz="1050" dirty="0"/>
+          </a:p>
+        </p:txBody>
+      </p:sp>
+      <p:sp>
+        <p:nvSpPr>
+          <p:cNvPr id="64" name="Text 62"/>
           <p:cNvSpPr/>
           <p:nvPr/>
         </p:nvSpPr>
@@ -4854,7 +5294,7 @@
                 <a:ea typeface="メイリオ" pitchFamily="34" charset="-122"/>
                 <a:cs typeface="メイリオ" pitchFamily="34" charset="-120"/>
               </a:rPr>
-              <a:t>いずれも上場関連コストは計上せず、期首現預金30百万円（2026/09末のみずほ銀行200百万円返済後）を前提。</a:t>
+              <a:t>上場関連コストは計上せず、期首現預金30百万円（2026/09末のみずほ銀行200百万円返済後）を前提。上乗せ案件132.5百万円は原価なしのため総合粗利率を押し上げます。</a:t>
             </a:r>
             <a:endParaRPr lang="en-US" sz="850" dirty="0"/>
           </a:p>
@@ -6053,7 +6493,7 @@
                 <a:ea typeface="メイリオ" pitchFamily="34" charset="-122"/>
                 <a:cs typeface="メイリオ" pitchFamily="34" charset="-120"/>
               </a:rPr>
-              <a:t>274.3百万円</a:t>
+              <a:t>421.6百万円</a:t>
             </a:r>
             <a:endParaRPr lang="en-US" sz="1800" dirty="0"/>
           </a:p>
@@ -6165,7 +6605,7 @@
                 <a:ea typeface="メイリオ" pitchFamily="34" charset="-122"/>
                 <a:cs typeface="メイリオ" pitchFamily="34" charset="-120"/>
               </a:rPr>
-              <a:t>564.7百万円</a:t>
+              <a:t>417.5百万円</a:t>
             </a:r>
             <a:endParaRPr lang="en-US" sz="1800" dirty="0"/>
           </a:p>
@@ -6238,7 +6678,7 @@
                 <a:ea typeface="メイリオ" pitchFamily="34" charset="-122"/>
                 <a:cs typeface="メイリオ" pitchFamily="34" charset="-120"/>
               </a:rPr>
-              <a:t>在庫は145.7百万円積み上がりますが、時価1.37倍の換価可能資産です。運転資金としてのご理解をお願いしたい部分です。</a:t>
+              <a:t>仕入419.1百万円と売上原価421.6百万円がほぼ見合うため、在庫は420.0→417.5百万円と横ばい。仕入を維持しながら在庫に資金を固定しません。</a:t>
             </a:r>
             <a:endParaRPr lang="en-US" sz="1200" dirty="0"/>
           </a:p>
@@ -6387,7 +6827,7 @@
                 <a:ea typeface="メイリオ" pitchFamily="34" charset="-122"/>
                 <a:cs typeface="メイリオ" pitchFamily="34" charset="-120"/>
               </a:rPr>
-              <a:t>2026年4-6月の実力値をベースに、追加売上と上乗せ案件を計上したもの。単位：百万円</a:t>
+              <a:t>売上は前期・今期並み、既存事業の粗利率は29.5%（保守）。上乗せ案件132.5百万円は原価なし。単位：百万円</a:t>
             </a:r>
             <a:endParaRPr lang="en-US" sz="1250" dirty="0"/>
           </a:p>
@@ -7017,7 +7457,7 @@
                 <a:ea typeface="メイリオ" pitchFamily="34" charset="-122"/>
                 <a:cs typeface="メイリオ" pitchFamily="34" charset="-120"/>
               </a:rPr>
-              <a:t>売上高</a:t>
+              <a:t>売上高（既存事業）</a:t>
             </a:r>
             <a:endParaRPr lang="en-US" sz="900" dirty="0"/>
           </a:p>
@@ -7056,7 +7496,7 @@
                 <a:ea typeface="メイリオ" pitchFamily="34" charset="-122"/>
                 <a:cs typeface="メイリオ" pitchFamily="34" charset="-120"/>
               </a:rPr>
-              <a:t>47.2</a:t>
+              <a:t>49.8</a:t>
             </a:r>
             <a:endParaRPr lang="en-US" sz="850" dirty="0"/>
           </a:p>
@@ -7095,7 +7535,7 @@
                 <a:ea typeface="メイリオ" pitchFamily="34" charset="-122"/>
                 <a:cs typeface="メイリオ" pitchFamily="34" charset="-120"/>
               </a:rPr>
-              <a:t>47.2</a:t>
+              <a:t>49.8</a:t>
             </a:r>
             <a:endParaRPr lang="en-US" sz="850" dirty="0"/>
           </a:p>
@@ -7134,7 +7574,7 @@
                 <a:ea typeface="メイリオ" pitchFamily="34" charset="-122"/>
                 <a:cs typeface="メイリオ" pitchFamily="34" charset="-120"/>
               </a:rPr>
-              <a:t>47.2</a:t>
+              <a:t>49.8</a:t>
             </a:r>
             <a:endParaRPr lang="en-US" sz="850" dirty="0"/>
           </a:p>
@@ -7173,7 +7613,7 @@
                 <a:ea typeface="メイリオ" pitchFamily="34" charset="-122"/>
                 <a:cs typeface="メイリオ" pitchFamily="34" charset="-120"/>
               </a:rPr>
-              <a:t>47.2</a:t>
+              <a:t>49.8</a:t>
             </a:r>
             <a:endParaRPr lang="en-US" sz="850" dirty="0"/>
           </a:p>
@@ -7212,7 +7652,7 @@
                 <a:ea typeface="メイリオ" pitchFamily="34" charset="-122"/>
                 <a:cs typeface="メイリオ" pitchFamily="34" charset="-120"/>
               </a:rPr>
-              <a:t>47.2</a:t>
+              <a:t>49.8</a:t>
             </a:r>
             <a:endParaRPr lang="en-US" sz="850" dirty="0"/>
           </a:p>
@@ -7251,7 +7691,7 @@
                 <a:ea typeface="メイリオ" pitchFamily="34" charset="-122"/>
                 <a:cs typeface="メイリオ" pitchFamily="34" charset="-120"/>
               </a:rPr>
-              <a:t>47.2</a:t>
+              <a:t>49.8</a:t>
             </a:r>
             <a:endParaRPr lang="en-US" sz="850" dirty="0"/>
           </a:p>
@@ -7290,7 +7730,7 @@
                 <a:ea typeface="メイリオ" pitchFamily="34" charset="-122"/>
                 <a:cs typeface="メイリオ" pitchFamily="34" charset="-120"/>
               </a:rPr>
-              <a:t>47.2</a:t>
+              <a:t>49.8</a:t>
             </a:r>
             <a:endParaRPr lang="en-US" sz="850" dirty="0"/>
           </a:p>
@@ -7329,7 +7769,7 @@
                 <a:ea typeface="メイリオ" pitchFamily="34" charset="-122"/>
                 <a:cs typeface="メイリオ" pitchFamily="34" charset="-120"/>
               </a:rPr>
-              <a:t>47.2</a:t>
+              <a:t>49.8</a:t>
             </a:r>
             <a:endParaRPr lang="en-US" sz="850" dirty="0"/>
           </a:p>
@@ -7368,7 +7808,7 @@
                 <a:ea typeface="メイリオ" pitchFamily="34" charset="-122"/>
                 <a:cs typeface="メイリオ" pitchFamily="34" charset="-120"/>
               </a:rPr>
-              <a:t>47.2</a:t>
+              <a:t>49.8</a:t>
             </a:r>
             <a:endParaRPr lang="en-US" sz="850" dirty="0"/>
           </a:p>
@@ -7407,7 +7847,7 @@
                 <a:ea typeface="メイリオ" pitchFamily="34" charset="-122"/>
                 <a:cs typeface="メイリオ" pitchFamily="34" charset="-120"/>
               </a:rPr>
-              <a:t>47.2</a:t>
+              <a:t>49.8</a:t>
             </a:r>
             <a:endParaRPr lang="en-US" sz="850" dirty="0"/>
           </a:p>
@@ -7446,7 +7886,7 @@
                 <a:ea typeface="メイリオ" pitchFamily="34" charset="-122"/>
                 <a:cs typeface="メイリオ" pitchFamily="34" charset="-120"/>
               </a:rPr>
-              <a:t>47.2</a:t>
+              <a:t>49.8</a:t>
             </a:r>
             <a:endParaRPr lang="en-US" sz="850" dirty="0"/>
           </a:p>
@@ -7485,7 +7925,7 @@
                 <a:ea typeface="メイリオ" pitchFamily="34" charset="-122"/>
                 <a:cs typeface="メイリオ" pitchFamily="34" charset="-120"/>
               </a:rPr>
-              <a:t>47.2</a:t>
+              <a:t>49.8</a:t>
             </a:r>
             <a:endParaRPr lang="en-US" sz="850" dirty="0"/>
           </a:p>
@@ -7524,7 +7964,7 @@
                 <a:ea typeface="メイリオ" pitchFamily="34" charset="-122"/>
                 <a:cs typeface="メイリオ" pitchFamily="34" charset="-120"/>
               </a:rPr>
-              <a:t>566.2</a:t>
+              <a:t>598.0</a:t>
             </a:r>
             <a:endParaRPr lang="en-US" sz="900" dirty="0"/>
           </a:p>
@@ -7588,7 +8028,7 @@
                 <a:ea typeface="メイリオ" pitchFamily="34" charset="-122"/>
                 <a:cs typeface="メイリオ" pitchFamily="34" charset="-120"/>
               </a:rPr>
-              <a:t>売上総利益（事業）</a:t>
+              <a:t>売上原価</a:t>
             </a:r>
             <a:endParaRPr lang="en-US" sz="900" dirty="0"/>
           </a:p>
@@ -7621,13 +8061,13 @@
             <a:r>
               <a:rPr lang="en-US" sz="850" dirty="0">
                 <a:solidFill>
-                  <a:srgbClr val="1A1A1A"/>
-                </a:solidFill>
-                <a:latin typeface="メイリオ" pitchFamily="34" charset="0"/>
-                <a:ea typeface="メイリオ" pitchFamily="34" charset="-122"/>
-                <a:cs typeface="メイリオ" pitchFamily="34" charset="-120"/>
-              </a:rPr>
-              <a:t>24.3</a:t>
+                  <a:srgbClr val="6E6E6E"/>
+                </a:solidFill>
+                <a:latin typeface="メイリオ" pitchFamily="34" charset="0"/>
+                <a:ea typeface="メイリオ" pitchFamily="34" charset="-122"/>
+                <a:cs typeface="メイリオ" pitchFamily="34" charset="-120"/>
+              </a:rPr>
+              <a:t>▲35.1</a:t>
             </a:r>
             <a:endParaRPr lang="en-US" sz="850" dirty="0"/>
           </a:p>
@@ -7660,13 +8100,13 @@
             <a:r>
               <a:rPr lang="en-US" sz="850" dirty="0">
                 <a:solidFill>
-                  <a:srgbClr val="1A1A1A"/>
-                </a:solidFill>
-                <a:latin typeface="メイリオ" pitchFamily="34" charset="0"/>
-                <a:ea typeface="メイリオ" pitchFamily="34" charset="-122"/>
-                <a:cs typeface="メイリオ" pitchFamily="34" charset="-120"/>
-              </a:rPr>
-              <a:t>24.3</a:t>
+                  <a:srgbClr val="6E6E6E"/>
+                </a:solidFill>
+                <a:latin typeface="メイリオ" pitchFamily="34" charset="0"/>
+                <a:ea typeface="メイリオ" pitchFamily="34" charset="-122"/>
+                <a:cs typeface="メイリオ" pitchFamily="34" charset="-120"/>
+              </a:rPr>
+              <a:t>▲35.1</a:t>
             </a:r>
             <a:endParaRPr lang="en-US" sz="850" dirty="0"/>
           </a:p>
@@ -7699,13 +8139,13 @@
             <a:r>
               <a:rPr lang="en-US" sz="850" dirty="0">
                 <a:solidFill>
-                  <a:srgbClr val="1A1A1A"/>
-                </a:solidFill>
-                <a:latin typeface="メイリオ" pitchFamily="34" charset="0"/>
-                <a:ea typeface="メイリオ" pitchFamily="34" charset="-122"/>
-                <a:cs typeface="メイリオ" pitchFamily="34" charset="-120"/>
-              </a:rPr>
-              <a:t>24.3</a:t>
+                  <a:srgbClr val="6E6E6E"/>
+                </a:solidFill>
+                <a:latin typeface="メイリオ" pitchFamily="34" charset="0"/>
+                <a:ea typeface="メイリオ" pitchFamily="34" charset="-122"/>
+                <a:cs typeface="メイリオ" pitchFamily="34" charset="-120"/>
+              </a:rPr>
+              <a:t>▲35.1</a:t>
             </a:r>
             <a:endParaRPr lang="en-US" sz="850" dirty="0"/>
           </a:p>
@@ -7738,13 +8178,13 @@
             <a:r>
               <a:rPr lang="en-US" sz="850" dirty="0">
                 <a:solidFill>
-                  <a:srgbClr val="1A1A1A"/>
-                </a:solidFill>
-                <a:latin typeface="メイリオ" pitchFamily="34" charset="0"/>
-                <a:ea typeface="メイリオ" pitchFamily="34" charset="-122"/>
-                <a:cs typeface="メイリオ" pitchFamily="34" charset="-120"/>
-              </a:rPr>
-              <a:t>24.3</a:t>
+                  <a:srgbClr val="6E6E6E"/>
+                </a:solidFill>
+                <a:latin typeface="メイリオ" pitchFamily="34" charset="0"/>
+                <a:ea typeface="メイリオ" pitchFamily="34" charset="-122"/>
+                <a:cs typeface="メイリオ" pitchFamily="34" charset="-120"/>
+              </a:rPr>
+              <a:t>▲35.1</a:t>
             </a:r>
             <a:endParaRPr lang="en-US" sz="850" dirty="0"/>
           </a:p>
@@ -7777,13 +8217,13 @@
             <a:r>
               <a:rPr lang="en-US" sz="850" dirty="0">
                 <a:solidFill>
-                  <a:srgbClr val="1A1A1A"/>
-                </a:solidFill>
-                <a:latin typeface="メイリオ" pitchFamily="34" charset="0"/>
-                <a:ea typeface="メイリオ" pitchFamily="34" charset="-122"/>
-                <a:cs typeface="メイリオ" pitchFamily="34" charset="-120"/>
-              </a:rPr>
-              <a:t>24.3</a:t>
+                  <a:srgbClr val="6E6E6E"/>
+                </a:solidFill>
+                <a:latin typeface="メイリオ" pitchFamily="34" charset="0"/>
+                <a:ea typeface="メイリオ" pitchFamily="34" charset="-122"/>
+                <a:cs typeface="メイリオ" pitchFamily="34" charset="-120"/>
+              </a:rPr>
+              <a:t>▲35.1</a:t>
             </a:r>
             <a:endParaRPr lang="en-US" sz="850" dirty="0"/>
           </a:p>
@@ -7816,13 +8256,13 @@
             <a:r>
               <a:rPr lang="en-US" sz="850" dirty="0">
                 <a:solidFill>
-                  <a:srgbClr val="1A1A1A"/>
-                </a:solidFill>
-                <a:latin typeface="メイリオ" pitchFamily="34" charset="0"/>
-                <a:ea typeface="メイリオ" pitchFamily="34" charset="-122"/>
-                <a:cs typeface="メイリオ" pitchFamily="34" charset="-120"/>
-              </a:rPr>
-              <a:t>24.3</a:t>
+                  <a:srgbClr val="6E6E6E"/>
+                </a:solidFill>
+                <a:latin typeface="メイリオ" pitchFamily="34" charset="0"/>
+                <a:ea typeface="メイリオ" pitchFamily="34" charset="-122"/>
+                <a:cs typeface="メイリオ" pitchFamily="34" charset="-120"/>
+              </a:rPr>
+              <a:t>▲35.1</a:t>
             </a:r>
             <a:endParaRPr lang="en-US" sz="850" dirty="0"/>
           </a:p>
@@ -7855,13 +8295,13 @@
             <a:r>
               <a:rPr lang="en-US" sz="850" dirty="0">
                 <a:solidFill>
-                  <a:srgbClr val="1A1A1A"/>
-                </a:solidFill>
-                <a:latin typeface="メイリオ" pitchFamily="34" charset="0"/>
-                <a:ea typeface="メイリオ" pitchFamily="34" charset="-122"/>
-                <a:cs typeface="メイリオ" pitchFamily="34" charset="-120"/>
-              </a:rPr>
-              <a:t>24.3</a:t>
+                  <a:srgbClr val="6E6E6E"/>
+                </a:solidFill>
+                <a:latin typeface="メイリオ" pitchFamily="34" charset="0"/>
+                <a:ea typeface="メイリオ" pitchFamily="34" charset="-122"/>
+                <a:cs typeface="メイリオ" pitchFamily="34" charset="-120"/>
+              </a:rPr>
+              <a:t>▲35.1</a:t>
             </a:r>
             <a:endParaRPr lang="en-US" sz="850" dirty="0"/>
           </a:p>
@@ -7894,13 +8334,13 @@
             <a:r>
               <a:rPr lang="en-US" sz="850" dirty="0">
                 <a:solidFill>
-                  <a:srgbClr val="1A1A1A"/>
-                </a:solidFill>
-                <a:latin typeface="メイリオ" pitchFamily="34" charset="0"/>
-                <a:ea typeface="メイリオ" pitchFamily="34" charset="-122"/>
-                <a:cs typeface="メイリオ" pitchFamily="34" charset="-120"/>
-              </a:rPr>
-              <a:t>24.3</a:t>
+                  <a:srgbClr val="6E6E6E"/>
+                </a:solidFill>
+                <a:latin typeface="メイリオ" pitchFamily="34" charset="0"/>
+                <a:ea typeface="メイリオ" pitchFamily="34" charset="-122"/>
+                <a:cs typeface="メイリオ" pitchFamily="34" charset="-120"/>
+              </a:rPr>
+              <a:t>▲35.1</a:t>
             </a:r>
             <a:endParaRPr lang="en-US" sz="850" dirty="0"/>
           </a:p>
@@ -7933,13 +8373,13 @@
             <a:r>
               <a:rPr lang="en-US" sz="850" dirty="0">
                 <a:solidFill>
-                  <a:srgbClr val="1A1A1A"/>
-                </a:solidFill>
-                <a:latin typeface="メイリオ" pitchFamily="34" charset="0"/>
-                <a:ea typeface="メイリオ" pitchFamily="34" charset="-122"/>
-                <a:cs typeface="メイリオ" pitchFamily="34" charset="-120"/>
-              </a:rPr>
-              <a:t>24.3</a:t>
+                  <a:srgbClr val="6E6E6E"/>
+                </a:solidFill>
+                <a:latin typeface="メイリオ" pitchFamily="34" charset="0"/>
+                <a:ea typeface="メイリオ" pitchFamily="34" charset="-122"/>
+                <a:cs typeface="メイリオ" pitchFamily="34" charset="-120"/>
+              </a:rPr>
+              <a:t>▲35.1</a:t>
             </a:r>
             <a:endParaRPr lang="en-US" sz="850" dirty="0"/>
           </a:p>
@@ -7972,13 +8412,13 @@
             <a:r>
               <a:rPr lang="en-US" sz="850" dirty="0">
                 <a:solidFill>
-                  <a:srgbClr val="1A1A1A"/>
-                </a:solidFill>
-                <a:latin typeface="メイリオ" pitchFamily="34" charset="0"/>
-                <a:ea typeface="メイリオ" pitchFamily="34" charset="-122"/>
-                <a:cs typeface="メイリオ" pitchFamily="34" charset="-120"/>
-              </a:rPr>
-              <a:t>24.3</a:t>
+                  <a:srgbClr val="6E6E6E"/>
+                </a:solidFill>
+                <a:latin typeface="メイリオ" pitchFamily="34" charset="0"/>
+                <a:ea typeface="メイリオ" pitchFamily="34" charset="-122"/>
+                <a:cs typeface="メイリオ" pitchFamily="34" charset="-120"/>
+              </a:rPr>
+              <a:t>▲35.1</a:t>
             </a:r>
             <a:endParaRPr lang="en-US" sz="850" dirty="0"/>
           </a:p>
@@ -8011,13 +8451,13 @@
             <a:r>
               <a:rPr lang="en-US" sz="850" dirty="0">
                 <a:solidFill>
-                  <a:srgbClr val="1A1A1A"/>
-                </a:solidFill>
-                <a:latin typeface="メイリオ" pitchFamily="34" charset="0"/>
-                <a:ea typeface="メイリオ" pitchFamily="34" charset="-122"/>
-                <a:cs typeface="メイリオ" pitchFamily="34" charset="-120"/>
-              </a:rPr>
-              <a:t>24.3</a:t>
+                  <a:srgbClr val="6E6E6E"/>
+                </a:solidFill>
+                <a:latin typeface="メイリオ" pitchFamily="34" charset="0"/>
+                <a:ea typeface="メイリオ" pitchFamily="34" charset="-122"/>
+                <a:cs typeface="メイリオ" pitchFamily="34" charset="-120"/>
+              </a:rPr>
+              <a:t>▲35.1</a:t>
             </a:r>
             <a:endParaRPr lang="en-US" sz="850" dirty="0"/>
           </a:p>
@@ -8050,13 +8490,13 @@
             <a:r>
               <a:rPr lang="en-US" sz="850" dirty="0">
                 <a:solidFill>
-                  <a:srgbClr val="1A1A1A"/>
-                </a:solidFill>
-                <a:latin typeface="メイリオ" pitchFamily="34" charset="0"/>
-                <a:ea typeface="メイリオ" pitchFamily="34" charset="-122"/>
-                <a:cs typeface="メイリオ" pitchFamily="34" charset="-120"/>
-              </a:rPr>
-              <a:t>24.3</a:t>
+                  <a:srgbClr val="6E6E6E"/>
+                </a:solidFill>
+                <a:latin typeface="メイリオ" pitchFamily="34" charset="0"/>
+                <a:ea typeface="メイリオ" pitchFamily="34" charset="-122"/>
+                <a:cs typeface="メイリオ" pitchFamily="34" charset="-120"/>
+              </a:rPr>
+              <a:t>▲35.1</a:t>
             </a:r>
             <a:endParaRPr lang="en-US" sz="850" dirty="0"/>
           </a:p>
@@ -8089,13 +8529,13 @@
             <a:r>
               <a:rPr lang="en-US" sz="900" b="1" dirty="0">
                 <a:solidFill>
-                  <a:srgbClr val="1A1A1A"/>
-                </a:solidFill>
-                <a:latin typeface="メイリオ" pitchFamily="34" charset="0"/>
-                <a:ea typeface="メイリオ" pitchFamily="34" charset="-122"/>
-                <a:cs typeface="メイリオ" pitchFamily="34" charset="-120"/>
-              </a:rPr>
-              <a:t>291.9</a:t>
+                  <a:srgbClr val="6E6E6E"/>
+                </a:solidFill>
+                <a:latin typeface="メイリオ" pitchFamily="34" charset="0"/>
+                <a:ea typeface="メイリオ" pitchFamily="34" charset="-122"/>
+                <a:cs typeface="メイリオ" pitchFamily="34" charset="-120"/>
+              </a:rPr>
+              <a:t>▲421.6</a:t>
             </a:r>
             <a:endParaRPr lang="en-US" sz="900" dirty="0"/>
           </a:p>
@@ -8159,7 +8599,7 @@
                 <a:ea typeface="メイリオ" pitchFamily="34" charset="-122"/>
                 <a:cs typeface="メイリオ" pitchFamily="34" charset="-120"/>
               </a:rPr>
-              <a:t>＋経営指導料</a:t>
+              <a:t>売上総利益（既存事業）</a:t>
             </a:r>
             <a:endParaRPr lang="en-US" sz="900" dirty="0"/>
           </a:p>
@@ -8198,7 +8638,7 @@
                 <a:ea typeface="メイリオ" pitchFamily="34" charset="-122"/>
                 <a:cs typeface="メイリオ" pitchFamily="34" charset="-120"/>
               </a:rPr>
-              <a:t>7.7</a:t>
+              <a:t>14.7</a:t>
             </a:r>
             <a:endParaRPr lang="en-US" sz="850" dirty="0"/>
           </a:p>
@@ -8237,7 +8677,7 @@
                 <a:ea typeface="メイリオ" pitchFamily="34" charset="-122"/>
                 <a:cs typeface="メイリオ" pitchFamily="34" charset="-120"/>
               </a:rPr>
-              <a:t>7.7</a:t>
+              <a:t>14.7</a:t>
             </a:r>
             <a:endParaRPr lang="en-US" sz="850" dirty="0"/>
           </a:p>
@@ -8276,7 +8716,7 @@
                 <a:ea typeface="メイリオ" pitchFamily="34" charset="-122"/>
                 <a:cs typeface="メイリオ" pitchFamily="34" charset="-120"/>
               </a:rPr>
-              <a:t>7.7</a:t>
+              <a:t>14.7</a:t>
             </a:r>
             <a:endParaRPr lang="en-US" sz="850" dirty="0"/>
           </a:p>
@@ -8315,7 +8755,7 @@
                 <a:ea typeface="メイリオ" pitchFamily="34" charset="-122"/>
                 <a:cs typeface="メイリオ" pitchFamily="34" charset="-120"/>
               </a:rPr>
-              <a:t>7.7</a:t>
+              <a:t>14.7</a:t>
             </a:r>
             <a:endParaRPr lang="en-US" sz="850" dirty="0"/>
           </a:p>
@@ -8354,7 +8794,7 @@
                 <a:ea typeface="メイリオ" pitchFamily="34" charset="-122"/>
                 <a:cs typeface="メイリオ" pitchFamily="34" charset="-120"/>
               </a:rPr>
-              <a:t>7.7</a:t>
+              <a:t>14.7</a:t>
             </a:r>
             <a:endParaRPr lang="en-US" sz="850" dirty="0"/>
           </a:p>
@@ -8393,7 +8833,7 @@
                 <a:ea typeface="メイリオ" pitchFamily="34" charset="-122"/>
                 <a:cs typeface="メイリオ" pitchFamily="34" charset="-120"/>
               </a:rPr>
-              <a:t>7.7</a:t>
+              <a:t>14.7</a:t>
             </a:r>
             <a:endParaRPr lang="en-US" sz="850" dirty="0"/>
           </a:p>
@@ -8432,7 +8872,7 @@
                 <a:ea typeface="メイリオ" pitchFamily="34" charset="-122"/>
                 <a:cs typeface="メイリオ" pitchFamily="34" charset="-120"/>
               </a:rPr>
-              <a:t>7.7</a:t>
+              <a:t>14.7</a:t>
             </a:r>
             <a:endParaRPr lang="en-US" sz="850" dirty="0"/>
           </a:p>
@@ -8471,7 +8911,7 @@
                 <a:ea typeface="メイリオ" pitchFamily="34" charset="-122"/>
                 <a:cs typeface="メイリオ" pitchFamily="34" charset="-120"/>
               </a:rPr>
-              <a:t>7.7</a:t>
+              <a:t>14.7</a:t>
             </a:r>
             <a:endParaRPr lang="en-US" sz="850" dirty="0"/>
           </a:p>
@@ -8510,7 +8950,7 @@
                 <a:ea typeface="メイリオ" pitchFamily="34" charset="-122"/>
                 <a:cs typeface="メイリオ" pitchFamily="34" charset="-120"/>
               </a:rPr>
-              <a:t>7.7</a:t>
+              <a:t>14.7</a:t>
             </a:r>
             <a:endParaRPr lang="en-US" sz="850" dirty="0"/>
           </a:p>
@@ -8549,7 +8989,7 @@
                 <a:ea typeface="メイリオ" pitchFamily="34" charset="-122"/>
                 <a:cs typeface="メイリオ" pitchFamily="34" charset="-120"/>
               </a:rPr>
-              <a:t>7.7</a:t>
+              <a:t>14.7</a:t>
             </a:r>
             <a:endParaRPr lang="en-US" sz="850" dirty="0"/>
           </a:p>
@@ -8588,7 +9028,7 @@
                 <a:ea typeface="メイリオ" pitchFamily="34" charset="-122"/>
                 <a:cs typeface="メイリオ" pitchFamily="34" charset="-120"/>
               </a:rPr>
-              <a:t>7.7</a:t>
+              <a:t>14.7</a:t>
             </a:r>
             <a:endParaRPr lang="en-US" sz="850" dirty="0"/>
           </a:p>
@@ -8627,7 +9067,7 @@
                 <a:ea typeface="メイリオ" pitchFamily="34" charset="-122"/>
                 <a:cs typeface="メイリオ" pitchFamily="34" charset="-120"/>
               </a:rPr>
-              <a:t>7.7</a:t>
+              <a:t>14.7</a:t>
             </a:r>
             <a:endParaRPr lang="en-US" sz="850" dirty="0"/>
           </a:p>
@@ -8666,7 +9106,7 @@
                 <a:ea typeface="メイリオ" pitchFamily="34" charset="-122"/>
                 <a:cs typeface="メイリオ" pitchFamily="34" charset="-120"/>
               </a:rPr>
-              <a:t>92.5</a:t>
+              <a:t>176.4</a:t>
             </a:r>
             <a:endParaRPr lang="en-US" sz="900" dirty="0"/>
           </a:p>
@@ -8730,7 +9170,7 @@
                 <a:ea typeface="メイリオ" pitchFamily="34" charset="-122"/>
                 <a:cs typeface="メイリオ" pitchFamily="34" charset="-120"/>
               </a:rPr>
-              <a:t>＋M&amp;A仲介</a:t>
+              <a:t>＋経営指導料</a:t>
             </a:r>
             <a:endParaRPr lang="en-US" sz="900" dirty="0"/>
           </a:p>
@@ -8769,7 +9209,7 @@
                 <a:ea typeface="メイリオ" pitchFamily="34" charset="-122"/>
                 <a:cs typeface="メイリオ" pitchFamily="34" charset="-120"/>
               </a:rPr>
-              <a:t>0.0</a:t>
+              <a:t>7.7</a:t>
             </a:r>
             <a:endParaRPr lang="en-US" sz="850" dirty="0"/>
           </a:p>
@@ -8808,7 +9248,7 @@
                 <a:ea typeface="メイリオ" pitchFamily="34" charset="-122"/>
                 <a:cs typeface="メイリオ" pitchFamily="34" charset="-120"/>
               </a:rPr>
-              <a:t>0.0</a:t>
+              <a:t>7.7</a:t>
             </a:r>
             <a:endParaRPr lang="en-US" sz="850" dirty="0"/>
           </a:p>
@@ -8847,7 +9287,7 @@
                 <a:ea typeface="メイリオ" pitchFamily="34" charset="-122"/>
                 <a:cs typeface="メイリオ" pitchFamily="34" charset="-120"/>
               </a:rPr>
-              <a:t>0.0</a:t>
+              <a:t>7.7</a:t>
             </a:r>
             <a:endParaRPr lang="en-US" sz="850" dirty="0"/>
           </a:p>
@@ -8886,7 +9326,7 @@
                 <a:ea typeface="メイリオ" pitchFamily="34" charset="-122"/>
                 <a:cs typeface="メイリオ" pitchFamily="34" charset="-120"/>
               </a:rPr>
-              <a:t>0.0</a:t>
+              <a:t>7.7</a:t>
             </a:r>
             <a:endParaRPr lang="en-US" sz="850" dirty="0"/>
           </a:p>
@@ -8925,7 +9365,7 @@
                 <a:ea typeface="メイリオ" pitchFamily="34" charset="-122"/>
                 <a:cs typeface="メイリオ" pitchFamily="34" charset="-120"/>
               </a:rPr>
-              <a:t>0.0</a:t>
+              <a:t>7.7</a:t>
             </a:r>
             <a:endParaRPr lang="en-US" sz="850" dirty="0"/>
           </a:p>
@@ -8964,7 +9404,7 @@
                 <a:ea typeface="メイリオ" pitchFamily="34" charset="-122"/>
                 <a:cs typeface="メイリオ" pitchFamily="34" charset="-120"/>
               </a:rPr>
-              <a:t>20.0</a:t>
+              <a:t>7.7</a:t>
             </a:r>
             <a:endParaRPr lang="en-US" sz="850" dirty="0"/>
           </a:p>
@@ -9003,7 +9443,7 @@
                 <a:ea typeface="メイリオ" pitchFamily="34" charset="-122"/>
                 <a:cs typeface="メイリオ" pitchFamily="34" charset="-120"/>
               </a:rPr>
-              <a:t>0.0</a:t>
+              <a:t>7.7</a:t>
             </a:r>
             <a:endParaRPr lang="en-US" sz="850" dirty="0"/>
           </a:p>
@@ -9042,7 +9482,7 @@
                 <a:ea typeface="メイリオ" pitchFamily="34" charset="-122"/>
                 <a:cs typeface="メイリオ" pitchFamily="34" charset="-120"/>
               </a:rPr>
-              <a:t>0.0</a:t>
+              <a:t>7.7</a:t>
             </a:r>
             <a:endParaRPr lang="en-US" sz="850" dirty="0"/>
           </a:p>
@@ -9081,7 +9521,7 @@
                 <a:ea typeface="メイリオ" pitchFamily="34" charset="-122"/>
                 <a:cs typeface="メイリオ" pitchFamily="34" charset="-120"/>
               </a:rPr>
-              <a:t>0.0</a:t>
+              <a:t>7.7</a:t>
             </a:r>
             <a:endParaRPr lang="en-US" sz="850" dirty="0"/>
           </a:p>
@@ -9120,7 +9560,7 @@
                 <a:ea typeface="メイリオ" pitchFamily="34" charset="-122"/>
                 <a:cs typeface="メイリオ" pitchFamily="34" charset="-120"/>
               </a:rPr>
-              <a:t>0.0</a:t>
+              <a:t>7.7</a:t>
             </a:r>
             <a:endParaRPr lang="en-US" sz="850" dirty="0"/>
           </a:p>
@@ -9159,7 +9599,7 @@
                 <a:ea typeface="メイリオ" pitchFamily="34" charset="-122"/>
                 <a:cs typeface="メイリオ" pitchFamily="34" charset="-120"/>
               </a:rPr>
-              <a:t>0.0</a:t>
+              <a:t>7.7</a:t>
             </a:r>
             <a:endParaRPr lang="en-US" sz="850" dirty="0"/>
           </a:p>
@@ -9198,7 +9638,7 @@
                 <a:ea typeface="メイリオ" pitchFamily="34" charset="-122"/>
                 <a:cs typeface="メイリオ" pitchFamily="34" charset="-120"/>
               </a:rPr>
-              <a:t>0.0</a:t>
+              <a:t>7.7</a:t>
             </a:r>
             <a:endParaRPr lang="en-US" sz="850" dirty="0"/>
           </a:p>
@@ -9237,7 +9677,7 @@
                 <a:ea typeface="メイリオ" pitchFamily="34" charset="-122"/>
                 <a:cs typeface="メイリオ" pitchFamily="34" charset="-120"/>
               </a:rPr>
-              <a:t>20.0</a:t>
+              <a:t>92.5</a:t>
             </a:r>
             <a:endParaRPr lang="en-US" sz="900" dirty="0"/>
           </a:p>
@@ -9301,7 +9741,7 @@
                 <a:ea typeface="メイリオ" pitchFamily="34" charset="-122"/>
                 <a:cs typeface="メイリオ" pitchFamily="34" charset="-120"/>
               </a:rPr>
-              <a:t>＋新規事業利益（クルーザー）</a:t>
+              <a:t>＋M&amp;A仲介</a:t>
             </a:r>
             <a:endParaRPr lang="en-US" sz="900" dirty="0"/>
           </a:p>
@@ -9535,7 +9975,7 @@
                 <a:ea typeface="メイリオ" pitchFamily="34" charset="-122"/>
                 <a:cs typeface="メイリオ" pitchFamily="34" charset="-120"/>
               </a:rPr>
-              <a:t>10.0</a:t>
+              <a:t>20.0</a:t>
             </a:r>
             <a:endParaRPr lang="en-US" sz="850" dirty="0"/>
           </a:p>
@@ -9769,7 +10209,7 @@
                 <a:ea typeface="メイリオ" pitchFamily="34" charset="-122"/>
                 <a:cs typeface="メイリオ" pitchFamily="34" charset="-120"/>
               </a:rPr>
-              <a:t>10.0</a:t>
+              <a:t>0.0</a:t>
             </a:r>
             <a:endParaRPr lang="en-US" sz="850" dirty="0"/>
           </a:p>
@@ -9823,6 +10263,577 @@
         <p:spPr>
           <a:xfrm>
             <a:off x="594360" y="3694176"/>
+            <a:ext cx="11658600" cy="365760"/>
+          </a:xfrm>
+          <a:prstGeom prst="rect">
+            <a:avLst/>
+          </a:prstGeom>
+          <a:solidFill>
+            <a:srgbClr val="FBFAF8"/>
+          </a:solidFill>
+          <a:ln w="6350">
+            <a:solidFill>
+              <a:srgbClr val="E2E0DC"/>
+            </a:solidFill>
+            <a:prstDash val="solid"/>
+          </a:ln>
+        </p:spPr>
+      </p:sp>
+      <p:sp>
+        <p:nvSpPr>
+          <p:cNvPr id="95" name="Text 93"/>
+          <p:cNvSpPr/>
+          <p:nvPr/>
+        </p:nvSpPr>
+        <p:spPr>
+          <a:xfrm>
+            <a:off x="704088" y="3694176"/>
+            <a:ext cx="2011680" cy="365760"/>
+          </a:xfrm>
+          <a:prstGeom prst="rect">
+            <a:avLst/>
+          </a:prstGeom>
+          <a:noFill/>
+          <a:ln/>
+        </p:spPr>
+        <p:txBody>
+          <a:bodyPr wrap="square" lIns="0" tIns="0" rIns="0" bIns="0" rtlCol="0" anchor="ctr"/>
+          <a:lstStyle/>
+          <a:p>
+            <a:pPr indent="0" marL="0">
+              <a:buNone/>
+            </a:pPr>
+            <a:r>
+              <a:rPr lang="en-US" sz="900" dirty="0">
+                <a:solidFill>
+                  <a:srgbClr val="1A1A1A"/>
+                </a:solidFill>
+                <a:latin typeface="メイリオ" pitchFamily="34" charset="0"/>
+                <a:ea typeface="メイリオ" pitchFamily="34" charset="-122"/>
+                <a:cs typeface="メイリオ" pitchFamily="34" charset="-120"/>
+              </a:rPr>
+              <a:t>＋新規事業利益（クルーザー）</a:t>
+            </a:r>
+            <a:endParaRPr lang="en-US" sz="900" dirty="0"/>
+          </a:p>
+        </p:txBody>
+      </p:sp>
+      <p:sp>
+        <p:nvSpPr>
+          <p:cNvPr id="96" name="Text 94"/>
+          <p:cNvSpPr/>
+          <p:nvPr/>
+        </p:nvSpPr>
+        <p:spPr>
+          <a:xfrm>
+            <a:off x="2606040" y="3694176"/>
+            <a:ext cx="731520" cy="365760"/>
+          </a:xfrm>
+          <a:prstGeom prst="rect">
+            <a:avLst/>
+          </a:prstGeom>
+          <a:noFill/>
+          <a:ln/>
+        </p:spPr>
+        <p:txBody>
+          <a:bodyPr wrap="square" lIns="0" tIns="0" rIns="0" bIns="0" rtlCol="0" anchor="ctr"/>
+          <a:lstStyle/>
+          <a:p>
+            <a:pPr algn="ctr" indent="0" marL="0">
+              <a:buNone/>
+            </a:pPr>
+            <a:r>
+              <a:rPr lang="en-US" sz="850" dirty="0">
+                <a:solidFill>
+                  <a:srgbClr val="1A1A1A"/>
+                </a:solidFill>
+                <a:latin typeface="メイリオ" pitchFamily="34" charset="0"/>
+                <a:ea typeface="メイリオ" pitchFamily="34" charset="-122"/>
+                <a:cs typeface="メイリオ" pitchFamily="34" charset="-120"/>
+              </a:rPr>
+              <a:t>0.0</a:t>
+            </a:r>
+            <a:endParaRPr lang="en-US" sz="850" dirty="0"/>
+          </a:p>
+        </p:txBody>
+      </p:sp>
+      <p:sp>
+        <p:nvSpPr>
+          <p:cNvPr id="97" name="Text 95"/>
+          <p:cNvSpPr/>
+          <p:nvPr/>
+        </p:nvSpPr>
+        <p:spPr>
+          <a:xfrm>
+            <a:off x="3337560" y="3694176"/>
+            <a:ext cx="731520" cy="365760"/>
+          </a:xfrm>
+          <a:prstGeom prst="rect">
+            <a:avLst/>
+          </a:prstGeom>
+          <a:noFill/>
+          <a:ln/>
+        </p:spPr>
+        <p:txBody>
+          <a:bodyPr wrap="square" lIns="0" tIns="0" rIns="0" bIns="0" rtlCol="0" anchor="ctr"/>
+          <a:lstStyle/>
+          <a:p>
+            <a:pPr algn="ctr" indent="0" marL="0">
+              <a:buNone/>
+            </a:pPr>
+            <a:r>
+              <a:rPr lang="en-US" sz="850" dirty="0">
+                <a:solidFill>
+                  <a:srgbClr val="1A1A1A"/>
+                </a:solidFill>
+                <a:latin typeface="メイリオ" pitchFamily="34" charset="0"/>
+                <a:ea typeface="メイリオ" pitchFamily="34" charset="-122"/>
+                <a:cs typeface="メイリオ" pitchFamily="34" charset="-120"/>
+              </a:rPr>
+              <a:t>0.0</a:t>
+            </a:r>
+            <a:endParaRPr lang="en-US" sz="850" dirty="0"/>
+          </a:p>
+        </p:txBody>
+      </p:sp>
+      <p:sp>
+        <p:nvSpPr>
+          <p:cNvPr id="98" name="Text 96"/>
+          <p:cNvSpPr/>
+          <p:nvPr/>
+        </p:nvSpPr>
+        <p:spPr>
+          <a:xfrm>
+            <a:off x="4069080" y="3694176"/>
+            <a:ext cx="731520" cy="365760"/>
+          </a:xfrm>
+          <a:prstGeom prst="rect">
+            <a:avLst/>
+          </a:prstGeom>
+          <a:noFill/>
+          <a:ln/>
+        </p:spPr>
+        <p:txBody>
+          <a:bodyPr wrap="square" lIns="0" tIns="0" rIns="0" bIns="0" rtlCol="0" anchor="ctr"/>
+          <a:lstStyle/>
+          <a:p>
+            <a:pPr algn="ctr" indent="0" marL="0">
+              <a:buNone/>
+            </a:pPr>
+            <a:r>
+              <a:rPr lang="en-US" sz="850" dirty="0">
+                <a:solidFill>
+                  <a:srgbClr val="1A1A1A"/>
+                </a:solidFill>
+                <a:latin typeface="メイリオ" pitchFamily="34" charset="0"/>
+                <a:ea typeface="メイリオ" pitchFamily="34" charset="-122"/>
+                <a:cs typeface="メイリオ" pitchFamily="34" charset="-120"/>
+              </a:rPr>
+              <a:t>0.0</a:t>
+            </a:r>
+            <a:endParaRPr lang="en-US" sz="850" dirty="0"/>
+          </a:p>
+        </p:txBody>
+      </p:sp>
+      <p:sp>
+        <p:nvSpPr>
+          <p:cNvPr id="99" name="Text 97"/>
+          <p:cNvSpPr/>
+          <p:nvPr/>
+        </p:nvSpPr>
+        <p:spPr>
+          <a:xfrm>
+            <a:off x="4800600" y="3694176"/>
+            <a:ext cx="731520" cy="365760"/>
+          </a:xfrm>
+          <a:prstGeom prst="rect">
+            <a:avLst/>
+          </a:prstGeom>
+          <a:noFill/>
+          <a:ln/>
+        </p:spPr>
+        <p:txBody>
+          <a:bodyPr wrap="square" lIns="0" tIns="0" rIns="0" bIns="0" rtlCol="0" anchor="ctr"/>
+          <a:lstStyle/>
+          <a:p>
+            <a:pPr algn="ctr" indent="0" marL="0">
+              <a:buNone/>
+            </a:pPr>
+            <a:r>
+              <a:rPr lang="en-US" sz="850" dirty="0">
+                <a:solidFill>
+                  <a:srgbClr val="1A1A1A"/>
+                </a:solidFill>
+                <a:latin typeface="メイリオ" pitchFamily="34" charset="0"/>
+                <a:ea typeface="メイリオ" pitchFamily="34" charset="-122"/>
+                <a:cs typeface="メイリオ" pitchFamily="34" charset="-120"/>
+              </a:rPr>
+              <a:t>0.0</a:t>
+            </a:r>
+            <a:endParaRPr lang="en-US" sz="850" dirty="0"/>
+          </a:p>
+        </p:txBody>
+      </p:sp>
+      <p:sp>
+        <p:nvSpPr>
+          <p:cNvPr id="100" name="Text 98"/>
+          <p:cNvSpPr/>
+          <p:nvPr/>
+        </p:nvSpPr>
+        <p:spPr>
+          <a:xfrm>
+            <a:off x="5532120" y="3694176"/>
+            <a:ext cx="731520" cy="365760"/>
+          </a:xfrm>
+          <a:prstGeom prst="rect">
+            <a:avLst/>
+          </a:prstGeom>
+          <a:noFill/>
+          <a:ln/>
+        </p:spPr>
+        <p:txBody>
+          <a:bodyPr wrap="square" lIns="0" tIns="0" rIns="0" bIns="0" rtlCol="0" anchor="ctr"/>
+          <a:lstStyle/>
+          <a:p>
+            <a:pPr algn="ctr" indent="0" marL="0">
+              <a:buNone/>
+            </a:pPr>
+            <a:r>
+              <a:rPr lang="en-US" sz="850" dirty="0">
+                <a:solidFill>
+                  <a:srgbClr val="1A1A1A"/>
+                </a:solidFill>
+                <a:latin typeface="メイリオ" pitchFamily="34" charset="0"/>
+                <a:ea typeface="メイリオ" pitchFamily="34" charset="-122"/>
+                <a:cs typeface="メイリオ" pitchFamily="34" charset="-120"/>
+              </a:rPr>
+              <a:t>0.0</a:t>
+            </a:r>
+            <a:endParaRPr lang="en-US" sz="850" dirty="0"/>
+          </a:p>
+        </p:txBody>
+      </p:sp>
+      <p:sp>
+        <p:nvSpPr>
+          <p:cNvPr id="101" name="Text 99"/>
+          <p:cNvSpPr/>
+          <p:nvPr/>
+        </p:nvSpPr>
+        <p:spPr>
+          <a:xfrm>
+            <a:off x="6263640" y="3694176"/>
+            <a:ext cx="731520" cy="365760"/>
+          </a:xfrm>
+          <a:prstGeom prst="rect">
+            <a:avLst/>
+          </a:prstGeom>
+          <a:noFill/>
+          <a:ln/>
+        </p:spPr>
+        <p:txBody>
+          <a:bodyPr wrap="square" lIns="0" tIns="0" rIns="0" bIns="0" rtlCol="0" anchor="ctr"/>
+          <a:lstStyle/>
+          <a:p>
+            <a:pPr algn="ctr" indent="0" marL="0">
+              <a:buNone/>
+            </a:pPr>
+            <a:r>
+              <a:rPr lang="en-US" sz="850" dirty="0">
+                <a:solidFill>
+                  <a:srgbClr val="1A1A1A"/>
+                </a:solidFill>
+                <a:latin typeface="メイリオ" pitchFamily="34" charset="0"/>
+                <a:ea typeface="メイリオ" pitchFamily="34" charset="-122"/>
+                <a:cs typeface="メイリオ" pitchFamily="34" charset="-120"/>
+              </a:rPr>
+              <a:t>10.0</a:t>
+            </a:r>
+            <a:endParaRPr lang="en-US" sz="850" dirty="0"/>
+          </a:p>
+        </p:txBody>
+      </p:sp>
+      <p:sp>
+        <p:nvSpPr>
+          <p:cNvPr id="102" name="Text 100"/>
+          <p:cNvSpPr/>
+          <p:nvPr/>
+        </p:nvSpPr>
+        <p:spPr>
+          <a:xfrm>
+            <a:off x="6995160" y="3694176"/>
+            <a:ext cx="731520" cy="365760"/>
+          </a:xfrm>
+          <a:prstGeom prst="rect">
+            <a:avLst/>
+          </a:prstGeom>
+          <a:noFill/>
+          <a:ln/>
+        </p:spPr>
+        <p:txBody>
+          <a:bodyPr wrap="square" lIns="0" tIns="0" rIns="0" bIns="0" rtlCol="0" anchor="ctr"/>
+          <a:lstStyle/>
+          <a:p>
+            <a:pPr algn="ctr" indent="0" marL="0">
+              <a:buNone/>
+            </a:pPr>
+            <a:r>
+              <a:rPr lang="en-US" sz="850" dirty="0">
+                <a:solidFill>
+                  <a:srgbClr val="1A1A1A"/>
+                </a:solidFill>
+                <a:latin typeface="メイリオ" pitchFamily="34" charset="0"/>
+                <a:ea typeface="メイリオ" pitchFamily="34" charset="-122"/>
+                <a:cs typeface="メイリオ" pitchFamily="34" charset="-120"/>
+              </a:rPr>
+              <a:t>0.0</a:t>
+            </a:r>
+            <a:endParaRPr lang="en-US" sz="850" dirty="0"/>
+          </a:p>
+        </p:txBody>
+      </p:sp>
+      <p:sp>
+        <p:nvSpPr>
+          <p:cNvPr id="103" name="Text 101"/>
+          <p:cNvSpPr/>
+          <p:nvPr/>
+        </p:nvSpPr>
+        <p:spPr>
+          <a:xfrm>
+            <a:off x="7726680" y="3694176"/>
+            <a:ext cx="731520" cy="365760"/>
+          </a:xfrm>
+          <a:prstGeom prst="rect">
+            <a:avLst/>
+          </a:prstGeom>
+          <a:noFill/>
+          <a:ln/>
+        </p:spPr>
+        <p:txBody>
+          <a:bodyPr wrap="square" lIns="0" tIns="0" rIns="0" bIns="0" rtlCol="0" anchor="ctr"/>
+          <a:lstStyle/>
+          <a:p>
+            <a:pPr algn="ctr" indent="0" marL="0">
+              <a:buNone/>
+            </a:pPr>
+            <a:r>
+              <a:rPr lang="en-US" sz="850" dirty="0">
+                <a:solidFill>
+                  <a:srgbClr val="1A1A1A"/>
+                </a:solidFill>
+                <a:latin typeface="メイリオ" pitchFamily="34" charset="0"/>
+                <a:ea typeface="メイリオ" pitchFamily="34" charset="-122"/>
+                <a:cs typeface="メイリオ" pitchFamily="34" charset="-120"/>
+              </a:rPr>
+              <a:t>0.0</a:t>
+            </a:r>
+            <a:endParaRPr lang="en-US" sz="850" dirty="0"/>
+          </a:p>
+        </p:txBody>
+      </p:sp>
+      <p:sp>
+        <p:nvSpPr>
+          <p:cNvPr id="104" name="Text 102"/>
+          <p:cNvSpPr/>
+          <p:nvPr/>
+        </p:nvSpPr>
+        <p:spPr>
+          <a:xfrm>
+            <a:off x="8458200" y="3694176"/>
+            <a:ext cx="731520" cy="365760"/>
+          </a:xfrm>
+          <a:prstGeom prst="rect">
+            <a:avLst/>
+          </a:prstGeom>
+          <a:noFill/>
+          <a:ln/>
+        </p:spPr>
+        <p:txBody>
+          <a:bodyPr wrap="square" lIns="0" tIns="0" rIns="0" bIns="0" rtlCol="0" anchor="ctr"/>
+          <a:lstStyle/>
+          <a:p>
+            <a:pPr algn="ctr" indent="0" marL="0">
+              <a:buNone/>
+            </a:pPr>
+            <a:r>
+              <a:rPr lang="en-US" sz="850" dirty="0">
+                <a:solidFill>
+                  <a:srgbClr val="1A1A1A"/>
+                </a:solidFill>
+                <a:latin typeface="メイリオ" pitchFamily="34" charset="0"/>
+                <a:ea typeface="メイリオ" pitchFamily="34" charset="-122"/>
+                <a:cs typeface="メイリオ" pitchFamily="34" charset="-120"/>
+              </a:rPr>
+              <a:t>0.0</a:t>
+            </a:r>
+            <a:endParaRPr lang="en-US" sz="850" dirty="0"/>
+          </a:p>
+        </p:txBody>
+      </p:sp>
+      <p:sp>
+        <p:nvSpPr>
+          <p:cNvPr id="105" name="Text 103"/>
+          <p:cNvSpPr/>
+          <p:nvPr/>
+        </p:nvSpPr>
+        <p:spPr>
+          <a:xfrm>
+            <a:off x="9189720" y="3694176"/>
+            <a:ext cx="731520" cy="365760"/>
+          </a:xfrm>
+          <a:prstGeom prst="rect">
+            <a:avLst/>
+          </a:prstGeom>
+          <a:noFill/>
+          <a:ln/>
+        </p:spPr>
+        <p:txBody>
+          <a:bodyPr wrap="square" lIns="0" tIns="0" rIns="0" bIns="0" rtlCol="0" anchor="ctr"/>
+          <a:lstStyle/>
+          <a:p>
+            <a:pPr algn="ctr" indent="0" marL="0">
+              <a:buNone/>
+            </a:pPr>
+            <a:r>
+              <a:rPr lang="en-US" sz="850" dirty="0">
+                <a:solidFill>
+                  <a:srgbClr val="1A1A1A"/>
+                </a:solidFill>
+                <a:latin typeface="メイリオ" pitchFamily="34" charset="0"/>
+                <a:ea typeface="メイリオ" pitchFamily="34" charset="-122"/>
+                <a:cs typeface="メイリオ" pitchFamily="34" charset="-120"/>
+              </a:rPr>
+              <a:t>0.0</a:t>
+            </a:r>
+            <a:endParaRPr lang="en-US" sz="850" dirty="0"/>
+          </a:p>
+        </p:txBody>
+      </p:sp>
+      <p:sp>
+        <p:nvSpPr>
+          <p:cNvPr id="106" name="Text 104"/>
+          <p:cNvSpPr/>
+          <p:nvPr/>
+        </p:nvSpPr>
+        <p:spPr>
+          <a:xfrm>
+            <a:off x="9921240" y="3694176"/>
+            <a:ext cx="731520" cy="365760"/>
+          </a:xfrm>
+          <a:prstGeom prst="rect">
+            <a:avLst/>
+          </a:prstGeom>
+          <a:noFill/>
+          <a:ln/>
+        </p:spPr>
+        <p:txBody>
+          <a:bodyPr wrap="square" lIns="0" tIns="0" rIns="0" bIns="0" rtlCol="0" anchor="ctr"/>
+          <a:lstStyle/>
+          <a:p>
+            <a:pPr algn="ctr" indent="0" marL="0">
+              <a:buNone/>
+            </a:pPr>
+            <a:r>
+              <a:rPr lang="en-US" sz="850" dirty="0">
+                <a:solidFill>
+                  <a:srgbClr val="1A1A1A"/>
+                </a:solidFill>
+                <a:latin typeface="メイリオ" pitchFamily="34" charset="0"/>
+                <a:ea typeface="メイリオ" pitchFamily="34" charset="-122"/>
+                <a:cs typeface="メイリオ" pitchFamily="34" charset="-120"/>
+              </a:rPr>
+              <a:t>0.0</a:t>
+            </a:r>
+            <a:endParaRPr lang="en-US" sz="850" dirty="0"/>
+          </a:p>
+        </p:txBody>
+      </p:sp>
+      <p:sp>
+        <p:nvSpPr>
+          <p:cNvPr id="107" name="Text 105"/>
+          <p:cNvSpPr/>
+          <p:nvPr/>
+        </p:nvSpPr>
+        <p:spPr>
+          <a:xfrm>
+            <a:off x="10652760" y="3694176"/>
+            <a:ext cx="731520" cy="365760"/>
+          </a:xfrm>
+          <a:prstGeom prst="rect">
+            <a:avLst/>
+          </a:prstGeom>
+          <a:noFill/>
+          <a:ln/>
+        </p:spPr>
+        <p:txBody>
+          <a:bodyPr wrap="square" lIns="0" tIns="0" rIns="0" bIns="0" rtlCol="0" anchor="ctr"/>
+          <a:lstStyle/>
+          <a:p>
+            <a:pPr algn="ctr" indent="0" marL="0">
+              <a:buNone/>
+            </a:pPr>
+            <a:r>
+              <a:rPr lang="en-US" sz="850" dirty="0">
+                <a:solidFill>
+                  <a:srgbClr val="1A1A1A"/>
+                </a:solidFill>
+                <a:latin typeface="メイリオ" pitchFamily="34" charset="0"/>
+                <a:ea typeface="メイリオ" pitchFamily="34" charset="-122"/>
+                <a:cs typeface="メイリオ" pitchFamily="34" charset="-120"/>
+              </a:rPr>
+              <a:t>10.0</a:t>
+            </a:r>
+            <a:endParaRPr lang="en-US" sz="850" dirty="0"/>
+          </a:p>
+        </p:txBody>
+      </p:sp>
+      <p:sp>
+        <p:nvSpPr>
+          <p:cNvPr id="108" name="Text 106"/>
+          <p:cNvSpPr/>
+          <p:nvPr/>
+        </p:nvSpPr>
+        <p:spPr>
+          <a:xfrm>
+            <a:off x="11384280" y="3694176"/>
+            <a:ext cx="868680" cy="365760"/>
+          </a:xfrm>
+          <a:prstGeom prst="rect">
+            <a:avLst/>
+          </a:prstGeom>
+          <a:noFill/>
+          <a:ln/>
+        </p:spPr>
+        <p:txBody>
+          <a:bodyPr wrap="square" lIns="0" tIns="0" rIns="0" bIns="0" rtlCol="0" anchor="ctr"/>
+          <a:lstStyle/>
+          <a:p>
+            <a:pPr algn="ctr" indent="0" marL="0">
+              <a:buNone/>
+            </a:pPr>
+            <a:r>
+              <a:rPr lang="en-US" sz="900" b="1" dirty="0">
+                <a:solidFill>
+                  <a:srgbClr val="1A1A1A"/>
+                </a:solidFill>
+                <a:latin typeface="メイリオ" pitchFamily="34" charset="0"/>
+                <a:ea typeface="メイリオ" pitchFamily="34" charset="-122"/>
+                <a:cs typeface="メイリオ" pitchFamily="34" charset="-120"/>
+              </a:rPr>
+              <a:t>20.0</a:t>
+            </a:r>
+            <a:endParaRPr lang="en-US" sz="900" dirty="0"/>
+          </a:p>
+        </p:txBody>
+      </p:sp>
+      <p:sp>
+        <p:nvSpPr>
+          <p:cNvPr id="109" name="Shape 107"/>
+          <p:cNvSpPr/>
+          <p:nvPr/>
+        </p:nvSpPr>
+        <p:spPr>
+          <a:xfrm>
+            <a:off x="594360" y="4059936"/>
             <a:ext cx="11658600" cy="365760"/>
           </a:xfrm>
           <a:prstGeom prst="rect">
@@ -9841,13 +10852,13 @@
       </p:sp>
       <p:sp>
         <p:nvSpPr>
-          <p:cNvPr id="95" name="Text 93"/>
-          <p:cNvSpPr/>
-          <p:nvPr/>
-        </p:nvSpPr>
-        <p:spPr>
-          <a:xfrm>
-            <a:off x="704088" y="3694176"/>
+          <p:cNvPr id="110" name="Text 108"/>
+          <p:cNvSpPr/>
+          <p:nvPr/>
+        </p:nvSpPr>
+        <p:spPr>
+          <a:xfrm>
+            <a:off x="704088" y="4059936"/>
             <a:ext cx="2011680" cy="365760"/>
           </a:xfrm>
           <a:prstGeom prst="rect">
@@ -9880,13 +10891,13 @@
       </p:sp>
       <p:sp>
         <p:nvSpPr>
-          <p:cNvPr id="96" name="Text 94"/>
-          <p:cNvSpPr/>
-          <p:nvPr/>
-        </p:nvSpPr>
-        <p:spPr>
-          <a:xfrm>
-            <a:off x="2606040" y="3694176"/>
+          <p:cNvPr id="111" name="Text 109"/>
+          <p:cNvSpPr/>
+          <p:nvPr/>
+        </p:nvSpPr>
+        <p:spPr>
+          <a:xfrm>
+            <a:off x="2606040" y="4059936"/>
             <a:ext cx="731520" cy="365760"/>
           </a:xfrm>
           <a:prstGeom prst="rect">
@@ -9911,7 +10922,7 @@
                 <a:ea typeface="メイリオ" pitchFamily="34" charset="-122"/>
                 <a:cs typeface="メイリオ" pitchFamily="34" charset="-120"/>
               </a:rPr>
-              <a:t>32.0</a:t>
+              <a:t>22.4</a:t>
             </a:r>
             <a:endParaRPr lang="en-US" sz="850" dirty="0"/>
           </a:p>
@@ -9919,13 +10930,13 @@
       </p:sp>
       <p:sp>
         <p:nvSpPr>
-          <p:cNvPr id="97" name="Text 95"/>
-          <p:cNvSpPr/>
-          <p:nvPr/>
-        </p:nvSpPr>
-        <p:spPr>
-          <a:xfrm>
-            <a:off x="3337560" y="3694176"/>
+          <p:cNvPr id="112" name="Text 110"/>
+          <p:cNvSpPr/>
+          <p:nvPr/>
+        </p:nvSpPr>
+        <p:spPr>
+          <a:xfrm>
+            <a:off x="3337560" y="4059936"/>
             <a:ext cx="731520" cy="365760"/>
           </a:xfrm>
           <a:prstGeom prst="rect">
@@ -9950,7 +10961,7 @@
                 <a:ea typeface="メイリオ" pitchFamily="34" charset="-122"/>
                 <a:cs typeface="メイリオ" pitchFamily="34" charset="-120"/>
               </a:rPr>
-              <a:t>32.0</a:t>
+              <a:t>22.4</a:t>
             </a:r>
             <a:endParaRPr lang="en-US" sz="850" dirty="0"/>
           </a:p>
@@ -9958,13 +10969,13 @@
       </p:sp>
       <p:sp>
         <p:nvSpPr>
-          <p:cNvPr id="98" name="Text 96"/>
-          <p:cNvSpPr/>
-          <p:nvPr/>
-        </p:nvSpPr>
-        <p:spPr>
-          <a:xfrm>
-            <a:off x="4069080" y="3694176"/>
+          <p:cNvPr id="113" name="Text 111"/>
+          <p:cNvSpPr/>
+          <p:nvPr/>
+        </p:nvSpPr>
+        <p:spPr>
+          <a:xfrm>
+            <a:off x="4069080" y="4059936"/>
             <a:ext cx="731520" cy="365760"/>
           </a:xfrm>
           <a:prstGeom prst="rect">
@@ -9989,7 +11000,7 @@
                 <a:ea typeface="メイリオ" pitchFamily="34" charset="-122"/>
                 <a:cs typeface="メイリオ" pitchFamily="34" charset="-120"/>
               </a:rPr>
-              <a:t>32.0</a:t>
+              <a:t>22.4</a:t>
             </a:r>
             <a:endParaRPr lang="en-US" sz="850" dirty="0"/>
           </a:p>
@@ -9997,13 +11008,13 @@
       </p:sp>
       <p:sp>
         <p:nvSpPr>
-          <p:cNvPr id="99" name="Text 97"/>
-          <p:cNvSpPr/>
-          <p:nvPr/>
-        </p:nvSpPr>
-        <p:spPr>
-          <a:xfrm>
-            <a:off x="4800600" y="3694176"/>
+          <p:cNvPr id="114" name="Text 112"/>
+          <p:cNvSpPr/>
+          <p:nvPr/>
+        </p:nvSpPr>
+        <p:spPr>
+          <a:xfrm>
+            <a:off x="4800600" y="4059936"/>
             <a:ext cx="731520" cy="365760"/>
           </a:xfrm>
           <a:prstGeom prst="rect">
@@ -10028,7 +11039,7 @@
                 <a:ea typeface="メイリオ" pitchFamily="34" charset="-122"/>
                 <a:cs typeface="メイリオ" pitchFamily="34" charset="-120"/>
               </a:rPr>
-              <a:t>32.0</a:t>
+              <a:t>22.4</a:t>
             </a:r>
             <a:endParaRPr lang="en-US" sz="850" dirty="0"/>
           </a:p>
@@ -10036,13 +11047,13 @@
       </p:sp>
       <p:sp>
         <p:nvSpPr>
-          <p:cNvPr id="100" name="Text 98"/>
-          <p:cNvSpPr/>
-          <p:nvPr/>
-        </p:nvSpPr>
-        <p:spPr>
-          <a:xfrm>
-            <a:off x="5532120" y="3694176"/>
+          <p:cNvPr id="115" name="Text 113"/>
+          <p:cNvSpPr/>
+          <p:nvPr/>
+        </p:nvSpPr>
+        <p:spPr>
+          <a:xfrm>
+            <a:off x="5532120" y="4059936"/>
             <a:ext cx="731520" cy="365760"/>
           </a:xfrm>
           <a:prstGeom prst="rect">
@@ -10067,7 +11078,7 @@
                 <a:ea typeface="メイリオ" pitchFamily="34" charset="-122"/>
                 <a:cs typeface="メイリオ" pitchFamily="34" charset="-120"/>
               </a:rPr>
-              <a:t>32.0</a:t>
+              <a:t>22.4</a:t>
             </a:r>
             <a:endParaRPr lang="en-US" sz="850" dirty="0"/>
           </a:p>
@@ -10075,13 +11086,13 @@
       </p:sp>
       <p:sp>
         <p:nvSpPr>
-          <p:cNvPr id="101" name="Text 99"/>
-          <p:cNvSpPr/>
-          <p:nvPr/>
-        </p:nvSpPr>
-        <p:spPr>
-          <a:xfrm>
-            <a:off x="6263640" y="3694176"/>
+          <p:cNvPr id="116" name="Text 114"/>
+          <p:cNvSpPr/>
+          <p:nvPr/>
+        </p:nvSpPr>
+        <p:spPr>
+          <a:xfrm>
+            <a:off x="6263640" y="4059936"/>
             <a:ext cx="731520" cy="365760"/>
           </a:xfrm>
           <a:prstGeom prst="rect">
@@ -10106,7 +11117,7 @@
                 <a:ea typeface="メイリオ" pitchFamily="34" charset="-122"/>
                 <a:cs typeface="メイリオ" pitchFamily="34" charset="-120"/>
               </a:rPr>
-              <a:t>62.0</a:t>
+              <a:t>52.4</a:t>
             </a:r>
             <a:endParaRPr lang="en-US" sz="850" dirty="0"/>
           </a:p>
@@ -10114,13 +11125,13 @@
       </p:sp>
       <p:sp>
         <p:nvSpPr>
-          <p:cNvPr id="102" name="Text 100"/>
-          <p:cNvSpPr/>
-          <p:nvPr/>
-        </p:nvSpPr>
-        <p:spPr>
-          <a:xfrm>
-            <a:off x="6995160" y="3694176"/>
+          <p:cNvPr id="117" name="Text 115"/>
+          <p:cNvSpPr/>
+          <p:nvPr/>
+        </p:nvSpPr>
+        <p:spPr>
+          <a:xfrm>
+            <a:off x="6995160" y="4059936"/>
             <a:ext cx="731520" cy="365760"/>
           </a:xfrm>
           <a:prstGeom prst="rect">
@@ -10145,7 +11156,7 @@
                 <a:ea typeface="メイリオ" pitchFamily="34" charset="-122"/>
                 <a:cs typeface="メイリオ" pitchFamily="34" charset="-120"/>
               </a:rPr>
-              <a:t>32.0</a:t>
+              <a:t>22.4</a:t>
             </a:r>
             <a:endParaRPr lang="en-US" sz="850" dirty="0"/>
           </a:p>
@@ -10153,13 +11164,13 @@
       </p:sp>
       <p:sp>
         <p:nvSpPr>
-          <p:cNvPr id="103" name="Text 101"/>
-          <p:cNvSpPr/>
-          <p:nvPr/>
-        </p:nvSpPr>
-        <p:spPr>
-          <a:xfrm>
-            <a:off x="7726680" y="3694176"/>
+          <p:cNvPr id="118" name="Text 116"/>
+          <p:cNvSpPr/>
+          <p:nvPr/>
+        </p:nvSpPr>
+        <p:spPr>
+          <a:xfrm>
+            <a:off x="7726680" y="4059936"/>
             <a:ext cx="731520" cy="365760"/>
           </a:xfrm>
           <a:prstGeom prst="rect">
@@ -10184,7 +11195,7 @@
                 <a:ea typeface="メイリオ" pitchFamily="34" charset="-122"/>
                 <a:cs typeface="メイリオ" pitchFamily="34" charset="-120"/>
               </a:rPr>
-              <a:t>32.0</a:t>
+              <a:t>22.4</a:t>
             </a:r>
             <a:endParaRPr lang="en-US" sz="850" dirty="0"/>
           </a:p>
@@ -10192,13 +11203,13 @@
       </p:sp>
       <p:sp>
         <p:nvSpPr>
-          <p:cNvPr id="104" name="Text 102"/>
-          <p:cNvSpPr/>
-          <p:nvPr/>
-        </p:nvSpPr>
-        <p:spPr>
-          <a:xfrm>
-            <a:off x="8458200" y="3694176"/>
+          <p:cNvPr id="119" name="Text 117"/>
+          <p:cNvSpPr/>
+          <p:nvPr/>
+        </p:nvSpPr>
+        <p:spPr>
+          <a:xfrm>
+            <a:off x="8458200" y="4059936"/>
             <a:ext cx="731520" cy="365760"/>
           </a:xfrm>
           <a:prstGeom prst="rect">
@@ -10223,7 +11234,7 @@
                 <a:ea typeface="メイリオ" pitchFamily="34" charset="-122"/>
                 <a:cs typeface="メイリオ" pitchFamily="34" charset="-120"/>
               </a:rPr>
-              <a:t>32.0</a:t>
+              <a:t>22.4</a:t>
             </a:r>
             <a:endParaRPr lang="en-US" sz="850" dirty="0"/>
           </a:p>
@@ -10231,13 +11242,13 @@
       </p:sp>
       <p:sp>
         <p:nvSpPr>
-          <p:cNvPr id="105" name="Text 103"/>
-          <p:cNvSpPr/>
-          <p:nvPr/>
-        </p:nvSpPr>
-        <p:spPr>
-          <a:xfrm>
-            <a:off x="9189720" y="3694176"/>
+          <p:cNvPr id="120" name="Text 118"/>
+          <p:cNvSpPr/>
+          <p:nvPr/>
+        </p:nvSpPr>
+        <p:spPr>
+          <a:xfrm>
+            <a:off x="9189720" y="4059936"/>
             <a:ext cx="731520" cy="365760"/>
           </a:xfrm>
           <a:prstGeom prst="rect">
@@ -10262,7 +11273,7 @@
                 <a:ea typeface="メイリオ" pitchFamily="34" charset="-122"/>
                 <a:cs typeface="メイリオ" pitchFamily="34" charset="-120"/>
               </a:rPr>
-              <a:t>32.0</a:t>
+              <a:t>22.4</a:t>
             </a:r>
             <a:endParaRPr lang="en-US" sz="850" dirty="0"/>
           </a:p>
@@ -10270,13 +11281,13 @@
       </p:sp>
       <p:sp>
         <p:nvSpPr>
-          <p:cNvPr id="106" name="Text 104"/>
-          <p:cNvSpPr/>
-          <p:nvPr/>
-        </p:nvSpPr>
-        <p:spPr>
-          <a:xfrm>
-            <a:off x="9921240" y="3694176"/>
+          <p:cNvPr id="121" name="Text 119"/>
+          <p:cNvSpPr/>
+          <p:nvPr/>
+        </p:nvSpPr>
+        <p:spPr>
+          <a:xfrm>
+            <a:off x="9921240" y="4059936"/>
             <a:ext cx="731520" cy="365760"/>
           </a:xfrm>
           <a:prstGeom prst="rect">
@@ -10301,7 +11312,7 @@
                 <a:ea typeface="メイリオ" pitchFamily="34" charset="-122"/>
                 <a:cs typeface="メイリオ" pitchFamily="34" charset="-120"/>
               </a:rPr>
-              <a:t>32.0</a:t>
+              <a:t>22.4</a:t>
             </a:r>
             <a:endParaRPr lang="en-US" sz="850" dirty="0"/>
           </a:p>
@@ -10309,13 +11320,13 @@
       </p:sp>
       <p:sp>
         <p:nvSpPr>
-          <p:cNvPr id="107" name="Text 105"/>
-          <p:cNvSpPr/>
-          <p:nvPr/>
-        </p:nvSpPr>
-        <p:spPr>
-          <a:xfrm>
-            <a:off x="10652760" y="3694176"/>
+          <p:cNvPr id="122" name="Text 120"/>
+          <p:cNvSpPr/>
+          <p:nvPr/>
+        </p:nvSpPr>
+        <p:spPr>
+          <a:xfrm>
+            <a:off x="10652760" y="4059936"/>
             <a:ext cx="731520" cy="365760"/>
           </a:xfrm>
           <a:prstGeom prst="rect">
@@ -10340,7 +11351,7 @@
                 <a:ea typeface="メイリオ" pitchFamily="34" charset="-122"/>
                 <a:cs typeface="メイリオ" pitchFamily="34" charset="-120"/>
               </a:rPr>
-              <a:t>42.0</a:t>
+              <a:t>32.4</a:t>
             </a:r>
             <a:endParaRPr lang="en-US" sz="850" dirty="0"/>
           </a:p>
@@ -10348,13 +11359,13 @@
       </p:sp>
       <p:sp>
         <p:nvSpPr>
-          <p:cNvPr id="108" name="Text 106"/>
-          <p:cNvSpPr/>
-          <p:nvPr/>
-        </p:nvSpPr>
-        <p:spPr>
-          <a:xfrm>
-            <a:off x="11384280" y="3694176"/>
+          <p:cNvPr id="123" name="Text 121"/>
+          <p:cNvSpPr/>
+          <p:nvPr/>
+        </p:nvSpPr>
+        <p:spPr>
+          <a:xfrm>
+            <a:off x="11384280" y="4059936"/>
             <a:ext cx="868680" cy="365760"/>
           </a:xfrm>
           <a:prstGeom prst="rect">
@@ -10379,7 +11390,7 @@
                 <a:ea typeface="メイリオ" pitchFamily="34" charset="-122"/>
                 <a:cs typeface="メイリオ" pitchFamily="34" charset="-120"/>
               </a:rPr>
-              <a:t>424.4</a:t>
+              <a:t>308.9</a:t>
             </a:r>
             <a:endParaRPr lang="en-US" sz="900" dirty="0"/>
           </a:p>
@@ -10387,20 +11398,20 @@
       </p:sp>
       <p:sp>
         <p:nvSpPr>
-          <p:cNvPr id="109" name="Shape 107"/>
-          <p:cNvSpPr/>
-          <p:nvPr/>
-        </p:nvSpPr>
-        <p:spPr>
-          <a:xfrm>
-            <a:off x="594360" y="4059936"/>
+          <p:cNvPr id="124" name="Shape 122"/>
+          <p:cNvSpPr/>
+          <p:nvPr/>
+        </p:nvSpPr>
+        <p:spPr>
+          <a:xfrm>
+            <a:off x="594360" y="4425696"/>
             <a:ext cx="11658600" cy="365760"/>
           </a:xfrm>
           <a:prstGeom prst="rect">
             <a:avLst/>
           </a:prstGeom>
           <a:solidFill>
-            <a:srgbClr val="FFFFFF"/>
+            <a:srgbClr val="FBFAF8"/>
           </a:solidFill>
           <a:ln w="6350">
             <a:solidFill>
@@ -10412,13 +11423,13 @@
       </p:sp>
       <p:sp>
         <p:nvSpPr>
-          <p:cNvPr id="110" name="Text 108"/>
-          <p:cNvSpPr/>
-          <p:nvPr/>
-        </p:nvSpPr>
-        <p:spPr>
-          <a:xfrm>
-            <a:off x="704088" y="4059936"/>
+          <p:cNvPr id="125" name="Text 123"/>
+          <p:cNvSpPr/>
+          <p:nvPr/>
+        </p:nvSpPr>
+        <p:spPr>
+          <a:xfrm>
+            <a:off x="704088" y="4425696"/>
             <a:ext cx="2011680" cy="365760"/>
           </a:xfrm>
           <a:prstGeom prst="rect">
@@ -10451,13 +11462,13 @@
       </p:sp>
       <p:sp>
         <p:nvSpPr>
-          <p:cNvPr id="111" name="Text 109"/>
-          <p:cNvSpPr/>
-          <p:nvPr/>
-        </p:nvSpPr>
-        <p:spPr>
-          <a:xfrm>
-            <a:off x="2606040" y="4059936"/>
+          <p:cNvPr id="126" name="Text 124"/>
+          <p:cNvSpPr/>
+          <p:nvPr/>
+        </p:nvSpPr>
+        <p:spPr>
+          <a:xfrm>
+            <a:off x="2606040" y="4425696"/>
             <a:ext cx="731520" cy="365760"/>
           </a:xfrm>
           <a:prstGeom prst="rect">
@@ -10490,13 +11501,13 @@
       </p:sp>
       <p:sp>
         <p:nvSpPr>
-          <p:cNvPr id="112" name="Text 110"/>
-          <p:cNvSpPr/>
-          <p:nvPr/>
-        </p:nvSpPr>
-        <p:spPr>
-          <a:xfrm>
-            <a:off x="3337560" y="4059936"/>
+          <p:cNvPr id="127" name="Text 125"/>
+          <p:cNvSpPr/>
+          <p:nvPr/>
+        </p:nvSpPr>
+        <p:spPr>
+          <a:xfrm>
+            <a:off x="3337560" y="4425696"/>
             <a:ext cx="731520" cy="365760"/>
           </a:xfrm>
           <a:prstGeom prst="rect">
@@ -10529,13 +11540,13 @@
       </p:sp>
       <p:sp>
         <p:nvSpPr>
-          <p:cNvPr id="113" name="Text 111"/>
-          <p:cNvSpPr/>
-          <p:nvPr/>
-        </p:nvSpPr>
-        <p:spPr>
-          <a:xfrm>
-            <a:off x="4069080" y="4059936"/>
+          <p:cNvPr id="128" name="Text 126"/>
+          <p:cNvSpPr/>
+          <p:nvPr/>
+        </p:nvSpPr>
+        <p:spPr>
+          <a:xfrm>
+            <a:off x="4069080" y="4425696"/>
             <a:ext cx="731520" cy="365760"/>
           </a:xfrm>
           <a:prstGeom prst="rect">
@@ -10568,13 +11579,13 @@
       </p:sp>
       <p:sp>
         <p:nvSpPr>
-          <p:cNvPr id="114" name="Text 112"/>
-          <p:cNvSpPr/>
-          <p:nvPr/>
-        </p:nvSpPr>
-        <p:spPr>
-          <a:xfrm>
-            <a:off x="4800600" y="4059936"/>
+          <p:cNvPr id="129" name="Text 127"/>
+          <p:cNvSpPr/>
+          <p:nvPr/>
+        </p:nvSpPr>
+        <p:spPr>
+          <a:xfrm>
+            <a:off x="4800600" y="4425696"/>
             <a:ext cx="731520" cy="365760"/>
           </a:xfrm>
           <a:prstGeom prst="rect">
@@ -10607,13 +11618,13 @@
       </p:sp>
       <p:sp>
         <p:nvSpPr>
-          <p:cNvPr id="115" name="Text 113"/>
-          <p:cNvSpPr/>
-          <p:nvPr/>
-        </p:nvSpPr>
-        <p:spPr>
-          <a:xfrm>
-            <a:off x="5532120" y="4059936"/>
+          <p:cNvPr id="130" name="Text 128"/>
+          <p:cNvSpPr/>
+          <p:nvPr/>
+        </p:nvSpPr>
+        <p:spPr>
+          <a:xfrm>
+            <a:off x="5532120" y="4425696"/>
             <a:ext cx="731520" cy="365760"/>
           </a:xfrm>
           <a:prstGeom prst="rect">
@@ -10646,13 +11657,13 @@
       </p:sp>
       <p:sp>
         <p:nvSpPr>
-          <p:cNvPr id="116" name="Text 114"/>
-          <p:cNvSpPr/>
-          <p:nvPr/>
-        </p:nvSpPr>
-        <p:spPr>
-          <a:xfrm>
-            <a:off x="6263640" y="4059936"/>
+          <p:cNvPr id="131" name="Text 129"/>
+          <p:cNvSpPr/>
+          <p:nvPr/>
+        </p:nvSpPr>
+        <p:spPr>
+          <a:xfrm>
+            <a:off x="6263640" y="4425696"/>
             <a:ext cx="731520" cy="365760"/>
           </a:xfrm>
           <a:prstGeom prst="rect">
@@ -10685,13 +11696,13 @@
       </p:sp>
       <p:sp>
         <p:nvSpPr>
-          <p:cNvPr id="117" name="Text 115"/>
-          <p:cNvSpPr/>
-          <p:nvPr/>
-        </p:nvSpPr>
-        <p:spPr>
-          <a:xfrm>
-            <a:off x="6995160" y="4059936"/>
+          <p:cNvPr id="132" name="Text 130"/>
+          <p:cNvSpPr/>
+          <p:nvPr/>
+        </p:nvSpPr>
+        <p:spPr>
+          <a:xfrm>
+            <a:off x="6995160" y="4425696"/>
             <a:ext cx="731520" cy="365760"/>
           </a:xfrm>
           <a:prstGeom prst="rect">
@@ -10724,13 +11735,13 @@
       </p:sp>
       <p:sp>
         <p:nvSpPr>
-          <p:cNvPr id="118" name="Text 116"/>
-          <p:cNvSpPr/>
-          <p:nvPr/>
-        </p:nvSpPr>
-        <p:spPr>
-          <a:xfrm>
-            <a:off x="7726680" y="4059936"/>
+          <p:cNvPr id="133" name="Text 131"/>
+          <p:cNvSpPr/>
+          <p:nvPr/>
+        </p:nvSpPr>
+        <p:spPr>
+          <a:xfrm>
+            <a:off x="7726680" y="4425696"/>
             <a:ext cx="731520" cy="365760"/>
           </a:xfrm>
           <a:prstGeom prst="rect">
@@ -10763,13 +11774,13 @@
       </p:sp>
       <p:sp>
         <p:nvSpPr>
-          <p:cNvPr id="119" name="Text 117"/>
-          <p:cNvSpPr/>
-          <p:nvPr/>
-        </p:nvSpPr>
-        <p:spPr>
-          <a:xfrm>
-            <a:off x="8458200" y="4059936"/>
+          <p:cNvPr id="134" name="Text 132"/>
+          <p:cNvSpPr/>
+          <p:nvPr/>
+        </p:nvSpPr>
+        <p:spPr>
+          <a:xfrm>
+            <a:off x="8458200" y="4425696"/>
             <a:ext cx="731520" cy="365760"/>
           </a:xfrm>
           <a:prstGeom prst="rect">
@@ -10802,13 +11813,13 @@
       </p:sp>
       <p:sp>
         <p:nvSpPr>
-          <p:cNvPr id="120" name="Text 118"/>
-          <p:cNvSpPr/>
-          <p:nvPr/>
-        </p:nvSpPr>
-        <p:spPr>
-          <a:xfrm>
-            <a:off x="9189720" y="4059936"/>
+          <p:cNvPr id="135" name="Text 133"/>
+          <p:cNvSpPr/>
+          <p:nvPr/>
+        </p:nvSpPr>
+        <p:spPr>
+          <a:xfrm>
+            <a:off x="9189720" y="4425696"/>
             <a:ext cx="731520" cy="365760"/>
           </a:xfrm>
           <a:prstGeom prst="rect">
@@ -10841,13 +11852,13 @@
       </p:sp>
       <p:sp>
         <p:nvSpPr>
-          <p:cNvPr id="121" name="Text 119"/>
-          <p:cNvSpPr/>
-          <p:nvPr/>
-        </p:nvSpPr>
-        <p:spPr>
-          <a:xfrm>
-            <a:off x="9921240" y="4059936"/>
+          <p:cNvPr id="136" name="Text 134"/>
+          <p:cNvSpPr/>
+          <p:nvPr/>
+        </p:nvSpPr>
+        <p:spPr>
+          <a:xfrm>
+            <a:off x="9921240" y="4425696"/>
             <a:ext cx="731520" cy="365760"/>
           </a:xfrm>
           <a:prstGeom prst="rect">
@@ -10880,13 +11891,13 @@
       </p:sp>
       <p:sp>
         <p:nvSpPr>
-          <p:cNvPr id="122" name="Text 120"/>
-          <p:cNvSpPr/>
-          <p:nvPr/>
-        </p:nvSpPr>
-        <p:spPr>
-          <a:xfrm>
-            <a:off x="10652760" y="4059936"/>
+          <p:cNvPr id="137" name="Text 135"/>
+          <p:cNvSpPr/>
+          <p:nvPr/>
+        </p:nvSpPr>
+        <p:spPr>
+          <a:xfrm>
+            <a:off x="10652760" y="4425696"/>
             <a:ext cx="731520" cy="365760"/>
           </a:xfrm>
           <a:prstGeom prst="rect">
@@ -10919,13 +11930,13 @@
       </p:sp>
       <p:sp>
         <p:nvSpPr>
-          <p:cNvPr id="123" name="Text 121"/>
-          <p:cNvSpPr/>
-          <p:nvPr/>
-        </p:nvSpPr>
-        <p:spPr>
-          <a:xfrm>
-            <a:off x="11384280" y="4059936"/>
+          <p:cNvPr id="138" name="Text 136"/>
+          <p:cNvSpPr/>
+          <p:nvPr/>
+        </p:nvSpPr>
+        <p:spPr>
+          <a:xfrm>
+            <a:off x="11384280" y="4425696"/>
             <a:ext cx="868680" cy="365760"/>
           </a:xfrm>
           <a:prstGeom prst="rect">
@@ -10958,13 +11969,13 @@
       </p:sp>
       <p:sp>
         <p:nvSpPr>
-          <p:cNvPr id="124" name="Shape 122"/>
-          <p:cNvSpPr/>
-          <p:nvPr/>
-        </p:nvSpPr>
-        <p:spPr>
-          <a:xfrm>
-            <a:off x="594360" y="4425696"/>
+          <p:cNvPr id="139" name="Shape 137"/>
+          <p:cNvSpPr/>
+          <p:nvPr/>
+        </p:nvSpPr>
+        <p:spPr>
+          <a:xfrm>
+            <a:off x="594360" y="4791456"/>
             <a:ext cx="11658600" cy="365760"/>
           </a:xfrm>
           <a:prstGeom prst="rect">
@@ -10983,13 +11994,13 @@
       </p:sp>
       <p:sp>
         <p:nvSpPr>
-          <p:cNvPr id="125" name="Text 123"/>
-          <p:cNvSpPr/>
-          <p:nvPr/>
-        </p:nvSpPr>
-        <p:spPr>
-          <a:xfrm>
-            <a:off x="704088" y="4425696"/>
+          <p:cNvPr id="140" name="Text 138"/>
+          <p:cNvSpPr/>
+          <p:nvPr/>
+        </p:nvSpPr>
+        <p:spPr>
+          <a:xfrm>
+            <a:off x="704088" y="4791456"/>
             <a:ext cx="2011680" cy="365760"/>
           </a:xfrm>
           <a:prstGeom prst="rect">
@@ -11022,13 +12033,13 @@
       </p:sp>
       <p:sp>
         <p:nvSpPr>
-          <p:cNvPr id="126" name="Text 124"/>
-          <p:cNvSpPr/>
-          <p:nvPr/>
-        </p:nvSpPr>
-        <p:spPr>
-          <a:xfrm>
-            <a:off x="2606040" y="4425696"/>
+          <p:cNvPr id="141" name="Text 139"/>
+          <p:cNvSpPr/>
+          <p:nvPr/>
+        </p:nvSpPr>
+        <p:spPr>
+          <a:xfrm>
+            <a:off x="2606040" y="4791456"/>
             <a:ext cx="731520" cy="365760"/>
           </a:xfrm>
           <a:prstGeom prst="rect">
@@ -11047,13 +12058,13 @@
             <a:r>
               <a:rPr lang="en-US" sz="850" b="1" dirty="0">
                 <a:solidFill>
-                  <a:srgbClr val="1A1A1A"/>
-                </a:solidFill>
-                <a:latin typeface="メイリオ" pitchFamily="34" charset="0"/>
-                <a:ea typeface="メイリオ" pitchFamily="34" charset="-122"/>
-                <a:cs typeface="メイリオ" pitchFamily="34" charset="-120"/>
-              </a:rPr>
-              <a:t>7.0</a:t>
+                  <a:srgbClr val="6E6E6E"/>
+                </a:solidFill>
+                <a:latin typeface="メイリオ" pitchFamily="34" charset="0"/>
+                <a:ea typeface="メイリオ" pitchFamily="34" charset="-122"/>
+                <a:cs typeface="メイリオ" pitchFamily="34" charset="-120"/>
+              </a:rPr>
+              <a:t>▲2.6</a:t>
             </a:r>
             <a:endParaRPr lang="en-US" sz="850" dirty="0"/>
           </a:p>
@@ -11061,13 +12072,13 @@
       </p:sp>
       <p:sp>
         <p:nvSpPr>
-          <p:cNvPr id="127" name="Text 125"/>
-          <p:cNvSpPr/>
-          <p:nvPr/>
-        </p:nvSpPr>
-        <p:spPr>
-          <a:xfrm>
-            <a:off x="3337560" y="4425696"/>
+          <p:cNvPr id="142" name="Text 140"/>
+          <p:cNvSpPr/>
+          <p:nvPr/>
+        </p:nvSpPr>
+        <p:spPr>
+          <a:xfrm>
+            <a:off x="3337560" y="4791456"/>
             <a:ext cx="731520" cy="365760"/>
           </a:xfrm>
           <a:prstGeom prst="rect">
@@ -11086,13 +12097,13 @@
             <a:r>
               <a:rPr lang="en-US" sz="850" b="1" dirty="0">
                 <a:solidFill>
-                  <a:srgbClr val="1A1A1A"/>
-                </a:solidFill>
-                <a:latin typeface="メイリオ" pitchFamily="34" charset="0"/>
-                <a:ea typeface="メイリオ" pitchFamily="34" charset="-122"/>
-                <a:cs typeface="メイリオ" pitchFamily="34" charset="-120"/>
-              </a:rPr>
-              <a:t>7.0</a:t>
+                  <a:srgbClr val="6E6E6E"/>
+                </a:solidFill>
+                <a:latin typeface="メイリオ" pitchFamily="34" charset="0"/>
+                <a:ea typeface="メイリオ" pitchFamily="34" charset="-122"/>
+                <a:cs typeface="メイリオ" pitchFamily="34" charset="-120"/>
+              </a:rPr>
+              <a:t>▲2.6</a:t>
             </a:r>
             <a:endParaRPr lang="en-US" sz="850" dirty="0"/>
           </a:p>
@@ -11100,13 +12111,13 @@
       </p:sp>
       <p:sp>
         <p:nvSpPr>
-          <p:cNvPr id="128" name="Text 126"/>
-          <p:cNvSpPr/>
-          <p:nvPr/>
-        </p:nvSpPr>
-        <p:spPr>
-          <a:xfrm>
-            <a:off x="4069080" y="4425696"/>
+          <p:cNvPr id="143" name="Text 141"/>
+          <p:cNvSpPr/>
+          <p:nvPr/>
+        </p:nvSpPr>
+        <p:spPr>
+          <a:xfrm>
+            <a:off x="4069080" y="4791456"/>
             <a:ext cx="731520" cy="365760"/>
           </a:xfrm>
           <a:prstGeom prst="rect">
@@ -11125,13 +12136,13 @@
             <a:r>
               <a:rPr lang="en-US" sz="850" b="1" dirty="0">
                 <a:solidFill>
-                  <a:srgbClr val="1A1A1A"/>
-                </a:solidFill>
-                <a:latin typeface="メイリオ" pitchFamily="34" charset="0"/>
-                <a:ea typeface="メイリオ" pitchFamily="34" charset="-122"/>
-                <a:cs typeface="メイリオ" pitchFamily="34" charset="-120"/>
-              </a:rPr>
-              <a:t>7.0</a:t>
+                  <a:srgbClr val="6E6E6E"/>
+                </a:solidFill>
+                <a:latin typeface="メイリオ" pitchFamily="34" charset="0"/>
+                <a:ea typeface="メイリオ" pitchFamily="34" charset="-122"/>
+                <a:cs typeface="メイリオ" pitchFamily="34" charset="-120"/>
+              </a:rPr>
+              <a:t>▲2.6</a:t>
             </a:r>
             <a:endParaRPr lang="en-US" sz="850" dirty="0"/>
           </a:p>
@@ -11139,13 +12150,13 @@
       </p:sp>
       <p:sp>
         <p:nvSpPr>
-          <p:cNvPr id="129" name="Text 127"/>
-          <p:cNvSpPr/>
-          <p:nvPr/>
-        </p:nvSpPr>
-        <p:spPr>
-          <a:xfrm>
-            <a:off x="4800600" y="4425696"/>
+          <p:cNvPr id="144" name="Text 142"/>
+          <p:cNvSpPr/>
+          <p:nvPr/>
+        </p:nvSpPr>
+        <p:spPr>
+          <a:xfrm>
+            <a:off x="4800600" y="4791456"/>
             <a:ext cx="731520" cy="365760"/>
           </a:xfrm>
           <a:prstGeom prst="rect">
@@ -11164,13 +12175,13 @@
             <a:r>
               <a:rPr lang="en-US" sz="850" b="1" dirty="0">
                 <a:solidFill>
-                  <a:srgbClr val="1A1A1A"/>
-                </a:solidFill>
-                <a:latin typeface="メイリオ" pitchFamily="34" charset="0"/>
-                <a:ea typeface="メイリオ" pitchFamily="34" charset="-122"/>
-                <a:cs typeface="メイリオ" pitchFamily="34" charset="-120"/>
-              </a:rPr>
-              <a:t>7.0</a:t>
+                  <a:srgbClr val="6E6E6E"/>
+                </a:solidFill>
+                <a:latin typeface="メイリオ" pitchFamily="34" charset="0"/>
+                <a:ea typeface="メイリオ" pitchFamily="34" charset="-122"/>
+                <a:cs typeface="メイリオ" pitchFamily="34" charset="-120"/>
+              </a:rPr>
+              <a:t>▲2.6</a:t>
             </a:r>
             <a:endParaRPr lang="en-US" sz="850" dirty="0"/>
           </a:p>
@@ -11178,13 +12189,13 @@
       </p:sp>
       <p:sp>
         <p:nvSpPr>
-          <p:cNvPr id="130" name="Text 128"/>
-          <p:cNvSpPr/>
-          <p:nvPr/>
-        </p:nvSpPr>
-        <p:spPr>
-          <a:xfrm>
-            <a:off x="5532120" y="4425696"/>
+          <p:cNvPr id="145" name="Text 143"/>
+          <p:cNvSpPr/>
+          <p:nvPr/>
+        </p:nvSpPr>
+        <p:spPr>
+          <a:xfrm>
+            <a:off x="5532120" y="4791456"/>
             <a:ext cx="731520" cy="365760"/>
           </a:xfrm>
           <a:prstGeom prst="rect">
@@ -11203,13 +12214,13 @@
             <a:r>
               <a:rPr lang="en-US" sz="850" b="1" dirty="0">
                 <a:solidFill>
-                  <a:srgbClr val="1A1A1A"/>
-                </a:solidFill>
-                <a:latin typeface="メイリオ" pitchFamily="34" charset="0"/>
-                <a:ea typeface="メイリオ" pitchFamily="34" charset="-122"/>
-                <a:cs typeface="メイリオ" pitchFamily="34" charset="-120"/>
-              </a:rPr>
-              <a:t>7.0</a:t>
+                  <a:srgbClr val="6E6E6E"/>
+                </a:solidFill>
+                <a:latin typeface="メイリオ" pitchFamily="34" charset="0"/>
+                <a:ea typeface="メイリオ" pitchFamily="34" charset="-122"/>
+                <a:cs typeface="メイリオ" pitchFamily="34" charset="-120"/>
+              </a:rPr>
+              <a:t>▲2.6</a:t>
             </a:r>
             <a:endParaRPr lang="en-US" sz="850" dirty="0"/>
           </a:p>
@@ -11217,13 +12228,13 @@
       </p:sp>
       <p:sp>
         <p:nvSpPr>
-          <p:cNvPr id="131" name="Text 129"/>
-          <p:cNvSpPr/>
-          <p:nvPr/>
-        </p:nvSpPr>
-        <p:spPr>
-          <a:xfrm>
-            <a:off x="6263640" y="4425696"/>
+          <p:cNvPr id="146" name="Text 144"/>
+          <p:cNvSpPr/>
+          <p:nvPr/>
+        </p:nvSpPr>
+        <p:spPr>
+          <a:xfrm>
+            <a:off x="6263640" y="4791456"/>
             <a:ext cx="731520" cy="365760"/>
           </a:xfrm>
           <a:prstGeom prst="rect">
@@ -11248,7 +12259,7 @@
                 <a:ea typeface="メイリオ" pitchFamily="34" charset="-122"/>
                 <a:cs typeface="メイリオ" pitchFamily="34" charset="-120"/>
               </a:rPr>
-              <a:t>37.0</a:t>
+              <a:t>27.4</a:t>
             </a:r>
             <a:endParaRPr lang="en-US" sz="850" dirty="0"/>
           </a:p>
@@ -11256,13 +12267,13 @@
       </p:sp>
       <p:sp>
         <p:nvSpPr>
-          <p:cNvPr id="132" name="Text 130"/>
-          <p:cNvSpPr/>
-          <p:nvPr/>
-        </p:nvSpPr>
-        <p:spPr>
-          <a:xfrm>
-            <a:off x="6995160" y="4425696"/>
+          <p:cNvPr id="147" name="Text 145"/>
+          <p:cNvSpPr/>
+          <p:nvPr/>
+        </p:nvSpPr>
+        <p:spPr>
+          <a:xfrm>
+            <a:off x="6995160" y="4791456"/>
             <a:ext cx="731520" cy="365760"/>
           </a:xfrm>
           <a:prstGeom prst="rect">
@@ -11281,13 +12292,13 @@
             <a:r>
               <a:rPr lang="en-US" sz="850" b="1" dirty="0">
                 <a:solidFill>
-                  <a:srgbClr val="1A1A1A"/>
-                </a:solidFill>
-                <a:latin typeface="メイリオ" pitchFamily="34" charset="0"/>
-                <a:ea typeface="メイリオ" pitchFamily="34" charset="-122"/>
-                <a:cs typeface="メイリオ" pitchFamily="34" charset="-120"/>
-              </a:rPr>
-              <a:t>7.0</a:t>
+                  <a:srgbClr val="6E6E6E"/>
+                </a:solidFill>
+                <a:latin typeface="メイリオ" pitchFamily="34" charset="0"/>
+                <a:ea typeface="メイリオ" pitchFamily="34" charset="-122"/>
+                <a:cs typeface="メイリオ" pitchFamily="34" charset="-120"/>
+              </a:rPr>
+              <a:t>▲2.6</a:t>
             </a:r>
             <a:endParaRPr lang="en-US" sz="850" dirty="0"/>
           </a:p>
@@ -11295,13 +12306,13 @@
       </p:sp>
       <p:sp>
         <p:nvSpPr>
-          <p:cNvPr id="133" name="Text 131"/>
-          <p:cNvSpPr/>
-          <p:nvPr/>
-        </p:nvSpPr>
-        <p:spPr>
-          <a:xfrm>
-            <a:off x="7726680" y="4425696"/>
+          <p:cNvPr id="148" name="Text 146"/>
+          <p:cNvSpPr/>
+          <p:nvPr/>
+        </p:nvSpPr>
+        <p:spPr>
+          <a:xfrm>
+            <a:off x="7726680" y="4791456"/>
             <a:ext cx="731520" cy="365760"/>
           </a:xfrm>
           <a:prstGeom prst="rect">
@@ -11320,13 +12331,13 @@
             <a:r>
               <a:rPr lang="en-US" sz="850" b="1" dirty="0">
                 <a:solidFill>
-                  <a:srgbClr val="1A1A1A"/>
-                </a:solidFill>
-                <a:latin typeface="メイリオ" pitchFamily="34" charset="0"/>
-                <a:ea typeface="メイリオ" pitchFamily="34" charset="-122"/>
-                <a:cs typeface="メイリオ" pitchFamily="34" charset="-120"/>
-              </a:rPr>
-              <a:t>7.0</a:t>
+                  <a:srgbClr val="6E6E6E"/>
+                </a:solidFill>
+                <a:latin typeface="メイリオ" pitchFamily="34" charset="0"/>
+                <a:ea typeface="メイリオ" pitchFamily="34" charset="-122"/>
+                <a:cs typeface="メイリオ" pitchFamily="34" charset="-120"/>
+              </a:rPr>
+              <a:t>▲2.6</a:t>
             </a:r>
             <a:endParaRPr lang="en-US" sz="850" dirty="0"/>
           </a:p>
@@ -11334,13 +12345,13 @@
       </p:sp>
       <p:sp>
         <p:nvSpPr>
-          <p:cNvPr id="134" name="Text 132"/>
-          <p:cNvSpPr/>
-          <p:nvPr/>
-        </p:nvSpPr>
-        <p:spPr>
-          <a:xfrm>
-            <a:off x="8458200" y="4425696"/>
+          <p:cNvPr id="149" name="Text 147"/>
+          <p:cNvSpPr/>
+          <p:nvPr/>
+        </p:nvSpPr>
+        <p:spPr>
+          <a:xfrm>
+            <a:off x="8458200" y="4791456"/>
             <a:ext cx="731520" cy="365760"/>
           </a:xfrm>
           <a:prstGeom prst="rect">
@@ -11359,13 +12370,13 @@
             <a:r>
               <a:rPr lang="en-US" sz="850" b="1" dirty="0">
                 <a:solidFill>
-                  <a:srgbClr val="1A1A1A"/>
-                </a:solidFill>
-                <a:latin typeface="メイリオ" pitchFamily="34" charset="0"/>
-                <a:ea typeface="メイリオ" pitchFamily="34" charset="-122"/>
-                <a:cs typeface="メイリオ" pitchFamily="34" charset="-120"/>
-              </a:rPr>
-              <a:t>7.0</a:t>
+                  <a:srgbClr val="6E6E6E"/>
+                </a:solidFill>
+                <a:latin typeface="メイリオ" pitchFamily="34" charset="0"/>
+                <a:ea typeface="メイリオ" pitchFamily="34" charset="-122"/>
+                <a:cs typeface="メイリオ" pitchFamily="34" charset="-120"/>
+              </a:rPr>
+              <a:t>▲2.6</a:t>
             </a:r>
             <a:endParaRPr lang="en-US" sz="850" dirty="0"/>
           </a:p>
@@ -11373,13 +12384,13 @@
       </p:sp>
       <p:sp>
         <p:nvSpPr>
-          <p:cNvPr id="135" name="Text 133"/>
-          <p:cNvSpPr/>
-          <p:nvPr/>
-        </p:nvSpPr>
-        <p:spPr>
-          <a:xfrm>
-            <a:off x="9189720" y="4425696"/>
+          <p:cNvPr id="150" name="Text 148"/>
+          <p:cNvSpPr/>
+          <p:nvPr/>
+        </p:nvSpPr>
+        <p:spPr>
+          <a:xfrm>
+            <a:off x="9189720" y="4791456"/>
             <a:ext cx="731520" cy="365760"/>
           </a:xfrm>
           <a:prstGeom prst="rect">
@@ -11398,13 +12409,13 @@
             <a:r>
               <a:rPr lang="en-US" sz="850" b="1" dirty="0">
                 <a:solidFill>
-                  <a:srgbClr val="1A1A1A"/>
-                </a:solidFill>
-                <a:latin typeface="メイリオ" pitchFamily="34" charset="0"/>
-                <a:ea typeface="メイリオ" pitchFamily="34" charset="-122"/>
-                <a:cs typeface="メイリオ" pitchFamily="34" charset="-120"/>
-              </a:rPr>
-              <a:t>7.0</a:t>
+                  <a:srgbClr val="6E6E6E"/>
+                </a:solidFill>
+                <a:latin typeface="メイリオ" pitchFamily="34" charset="0"/>
+                <a:ea typeface="メイリオ" pitchFamily="34" charset="-122"/>
+                <a:cs typeface="メイリオ" pitchFamily="34" charset="-120"/>
+              </a:rPr>
+              <a:t>▲2.6</a:t>
             </a:r>
             <a:endParaRPr lang="en-US" sz="850" dirty="0"/>
           </a:p>
@@ -11412,13 +12423,13 @@
       </p:sp>
       <p:sp>
         <p:nvSpPr>
-          <p:cNvPr id="136" name="Text 134"/>
-          <p:cNvSpPr/>
-          <p:nvPr/>
-        </p:nvSpPr>
-        <p:spPr>
-          <a:xfrm>
-            <a:off x="9921240" y="4425696"/>
+          <p:cNvPr id="151" name="Text 149"/>
+          <p:cNvSpPr/>
+          <p:nvPr/>
+        </p:nvSpPr>
+        <p:spPr>
+          <a:xfrm>
+            <a:off x="9921240" y="4791456"/>
             <a:ext cx="731520" cy="365760"/>
           </a:xfrm>
           <a:prstGeom prst="rect">
@@ -11437,13 +12448,13 @@
             <a:r>
               <a:rPr lang="en-US" sz="850" b="1" dirty="0">
                 <a:solidFill>
-                  <a:srgbClr val="1A1A1A"/>
-                </a:solidFill>
-                <a:latin typeface="メイリオ" pitchFamily="34" charset="0"/>
-                <a:ea typeface="メイリオ" pitchFamily="34" charset="-122"/>
-                <a:cs typeface="メイリオ" pitchFamily="34" charset="-120"/>
-              </a:rPr>
-              <a:t>7.0</a:t>
+                  <a:srgbClr val="6E6E6E"/>
+                </a:solidFill>
+                <a:latin typeface="メイリオ" pitchFamily="34" charset="0"/>
+                <a:ea typeface="メイリオ" pitchFamily="34" charset="-122"/>
+                <a:cs typeface="メイリオ" pitchFamily="34" charset="-120"/>
+              </a:rPr>
+              <a:t>▲2.6</a:t>
             </a:r>
             <a:endParaRPr lang="en-US" sz="850" dirty="0"/>
           </a:p>
@@ -11451,13 +12462,13 @@
       </p:sp>
       <p:sp>
         <p:nvSpPr>
-          <p:cNvPr id="137" name="Text 135"/>
-          <p:cNvSpPr/>
-          <p:nvPr/>
-        </p:nvSpPr>
-        <p:spPr>
-          <a:xfrm>
-            <a:off x="10652760" y="4425696"/>
+          <p:cNvPr id="152" name="Text 150"/>
+          <p:cNvSpPr/>
+          <p:nvPr/>
+        </p:nvSpPr>
+        <p:spPr>
+          <a:xfrm>
+            <a:off x="10652760" y="4791456"/>
             <a:ext cx="731520" cy="365760"/>
           </a:xfrm>
           <a:prstGeom prst="rect">
@@ -11482,7 +12493,7 @@
                 <a:ea typeface="メイリオ" pitchFamily="34" charset="-122"/>
                 <a:cs typeface="メイリオ" pitchFamily="34" charset="-120"/>
               </a:rPr>
-              <a:t>17.0</a:t>
+              <a:t>7.4</a:t>
             </a:r>
             <a:endParaRPr lang="en-US" sz="850" dirty="0"/>
           </a:p>
@@ -11490,13 +12501,13 @@
       </p:sp>
       <p:sp>
         <p:nvSpPr>
-          <p:cNvPr id="138" name="Text 136"/>
-          <p:cNvSpPr/>
-          <p:nvPr/>
-        </p:nvSpPr>
-        <p:spPr>
-          <a:xfrm>
-            <a:off x="11384280" y="4425696"/>
+          <p:cNvPr id="153" name="Text 151"/>
+          <p:cNvSpPr/>
+          <p:nvPr/>
+        </p:nvSpPr>
+        <p:spPr>
+          <a:xfrm>
+            <a:off x="11384280" y="4791456"/>
             <a:ext cx="868680" cy="365760"/>
           </a:xfrm>
           <a:prstGeom prst="rect">
@@ -11521,7 +12532,7 @@
                 <a:ea typeface="メイリオ" pitchFamily="34" charset="-122"/>
                 <a:cs typeface="メイリオ" pitchFamily="34" charset="-120"/>
               </a:rPr>
-              <a:t>124.2</a:t>
+              <a:t>8.8</a:t>
             </a:r>
             <a:endParaRPr lang="en-US" sz="900" dirty="0"/>
           </a:p>
@@ -11529,20 +12540,20 @@
       </p:sp>
       <p:sp>
         <p:nvSpPr>
-          <p:cNvPr id="139" name="Shape 137"/>
-          <p:cNvSpPr/>
-          <p:nvPr/>
-        </p:nvSpPr>
-        <p:spPr>
-          <a:xfrm>
-            <a:off x="594360" y="4791456"/>
+          <p:cNvPr id="154" name="Shape 152"/>
+          <p:cNvSpPr/>
+          <p:nvPr/>
+        </p:nvSpPr>
+        <p:spPr>
+          <a:xfrm>
+            <a:off x="594360" y="5157216"/>
             <a:ext cx="11658600" cy="365760"/>
           </a:xfrm>
           <a:prstGeom prst="rect">
             <a:avLst/>
           </a:prstGeom>
           <a:solidFill>
-            <a:srgbClr val="FFFFFF"/>
+            <a:srgbClr val="FBFAF8"/>
           </a:solidFill>
           <a:ln w="6350">
             <a:solidFill>
@@ -11554,13 +12565,13 @@
       </p:sp>
       <p:sp>
         <p:nvSpPr>
-          <p:cNvPr id="140" name="Text 138"/>
-          <p:cNvSpPr/>
-          <p:nvPr/>
-        </p:nvSpPr>
-        <p:spPr>
-          <a:xfrm>
-            <a:off x="704088" y="4791456"/>
+          <p:cNvPr id="155" name="Text 153"/>
+          <p:cNvSpPr/>
+          <p:nvPr/>
+        </p:nvSpPr>
+        <p:spPr>
+          <a:xfrm>
+            <a:off x="704088" y="5157216"/>
             <a:ext cx="2011680" cy="365760"/>
           </a:xfrm>
           <a:prstGeom prst="rect">
@@ -11593,13 +12604,13 @@
       </p:sp>
       <p:sp>
         <p:nvSpPr>
-          <p:cNvPr id="141" name="Text 139"/>
-          <p:cNvSpPr/>
-          <p:nvPr/>
-        </p:nvSpPr>
-        <p:spPr>
-          <a:xfrm>
-            <a:off x="2606040" y="4791456"/>
+          <p:cNvPr id="156" name="Text 154"/>
+          <p:cNvSpPr/>
+          <p:nvPr/>
+        </p:nvSpPr>
+        <p:spPr>
+          <a:xfrm>
+            <a:off x="2606040" y="5157216"/>
             <a:ext cx="731520" cy="365760"/>
           </a:xfrm>
           <a:prstGeom prst="rect">
@@ -11632,13 +12643,13 @@
       </p:sp>
       <p:sp>
         <p:nvSpPr>
-          <p:cNvPr id="142" name="Text 140"/>
-          <p:cNvSpPr/>
-          <p:nvPr/>
-        </p:nvSpPr>
-        <p:spPr>
-          <a:xfrm>
-            <a:off x="3337560" y="4791456"/>
+          <p:cNvPr id="157" name="Text 155"/>
+          <p:cNvSpPr/>
+          <p:nvPr/>
+        </p:nvSpPr>
+        <p:spPr>
+          <a:xfrm>
+            <a:off x="3337560" y="5157216"/>
             <a:ext cx="731520" cy="365760"/>
           </a:xfrm>
           <a:prstGeom prst="rect">
@@ -11671,13 +12682,13 @@
       </p:sp>
       <p:sp>
         <p:nvSpPr>
-          <p:cNvPr id="143" name="Text 141"/>
-          <p:cNvSpPr/>
-          <p:nvPr/>
-        </p:nvSpPr>
-        <p:spPr>
-          <a:xfrm>
-            <a:off x="4069080" y="4791456"/>
+          <p:cNvPr id="158" name="Text 156"/>
+          <p:cNvSpPr/>
+          <p:nvPr/>
+        </p:nvSpPr>
+        <p:spPr>
+          <a:xfrm>
+            <a:off x="4069080" y="5157216"/>
             <a:ext cx="731520" cy="365760"/>
           </a:xfrm>
           <a:prstGeom prst="rect">
@@ -11710,13 +12721,13 @@
       </p:sp>
       <p:sp>
         <p:nvSpPr>
-          <p:cNvPr id="144" name="Text 142"/>
-          <p:cNvSpPr/>
-          <p:nvPr/>
-        </p:nvSpPr>
-        <p:spPr>
-          <a:xfrm>
-            <a:off x="4800600" y="4791456"/>
+          <p:cNvPr id="159" name="Text 157"/>
+          <p:cNvSpPr/>
+          <p:nvPr/>
+        </p:nvSpPr>
+        <p:spPr>
+          <a:xfrm>
+            <a:off x="4800600" y="5157216"/>
             <a:ext cx="731520" cy="365760"/>
           </a:xfrm>
           <a:prstGeom prst="rect">
@@ -11749,13 +12760,13 @@
       </p:sp>
       <p:sp>
         <p:nvSpPr>
-          <p:cNvPr id="145" name="Text 143"/>
-          <p:cNvSpPr/>
-          <p:nvPr/>
-        </p:nvSpPr>
-        <p:spPr>
-          <a:xfrm>
-            <a:off x="5532120" y="4791456"/>
+          <p:cNvPr id="160" name="Text 158"/>
+          <p:cNvSpPr/>
+          <p:nvPr/>
+        </p:nvSpPr>
+        <p:spPr>
+          <a:xfrm>
+            <a:off x="5532120" y="5157216"/>
             <a:ext cx="731520" cy="365760"/>
           </a:xfrm>
           <a:prstGeom prst="rect">
@@ -11788,13 +12799,13 @@
       </p:sp>
       <p:sp>
         <p:nvSpPr>
-          <p:cNvPr id="146" name="Text 144"/>
-          <p:cNvSpPr/>
-          <p:nvPr/>
-        </p:nvSpPr>
-        <p:spPr>
-          <a:xfrm>
-            <a:off x="6263640" y="4791456"/>
+          <p:cNvPr id="161" name="Text 159"/>
+          <p:cNvSpPr/>
+          <p:nvPr/>
+        </p:nvSpPr>
+        <p:spPr>
+          <a:xfrm>
+            <a:off x="6263640" y="5157216"/>
             <a:ext cx="731520" cy="365760"/>
           </a:xfrm>
           <a:prstGeom prst="rect">
@@ -11827,13 +12838,13 @@
       </p:sp>
       <p:sp>
         <p:nvSpPr>
-          <p:cNvPr id="147" name="Text 145"/>
-          <p:cNvSpPr/>
-          <p:nvPr/>
-        </p:nvSpPr>
-        <p:spPr>
-          <a:xfrm>
-            <a:off x="6995160" y="4791456"/>
+          <p:cNvPr id="162" name="Text 160"/>
+          <p:cNvSpPr/>
+          <p:nvPr/>
+        </p:nvSpPr>
+        <p:spPr>
+          <a:xfrm>
+            <a:off x="6995160" y="5157216"/>
             <a:ext cx="731520" cy="365760"/>
           </a:xfrm>
           <a:prstGeom prst="rect">
@@ -11866,13 +12877,13 @@
       </p:sp>
       <p:sp>
         <p:nvSpPr>
-          <p:cNvPr id="148" name="Text 146"/>
-          <p:cNvSpPr/>
-          <p:nvPr/>
-        </p:nvSpPr>
-        <p:spPr>
-          <a:xfrm>
-            <a:off x="7726680" y="4791456"/>
+          <p:cNvPr id="163" name="Text 161"/>
+          <p:cNvSpPr/>
+          <p:nvPr/>
+        </p:nvSpPr>
+        <p:spPr>
+          <a:xfrm>
+            <a:off x="7726680" y="5157216"/>
             <a:ext cx="731520" cy="365760"/>
           </a:xfrm>
           <a:prstGeom prst="rect">
@@ -11905,13 +12916,13 @@
       </p:sp>
       <p:sp>
         <p:nvSpPr>
-          <p:cNvPr id="149" name="Text 147"/>
-          <p:cNvSpPr/>
-          <p:nvPr/>
-        </p:nvSpPr>
-        <p:spPr>
-          <a:xfrm>
-            <a:off x="8458200" y="4791456"/>
+          <p:cNvPr id="164" name="Text 162"/>
+          <p:cNvSpPr/>
+          <p:nvPr/>
+        </p:nvSpPr>
+        <p:spPr>
+          <a:xfrm>
+            <a:off x="8458200" y="5157216"/>
             <a:ext cx="731520" cy="365760"/>
           </a:xfrm>
           <a:prstGeom prst="rect">
@@ -11944,13 +12955,13 @@
       </p:sp>
       <p:sp>
         <p:nvSpPr>
-          <p:cNvPr id="150" name="Text 148"/>
-          <p:cNvSpPr/>
-          <p:nvPr/>
-        </p:nvSpPr>
-        <p:spPr>
-          <a:xfrm>
-            <a:off x="9189720" y="4791456"/>
+          <p:cNvPr id="165" name="Text 163"/>
+          <p:cNvSpPr/>
+          <p:nvPr/>
+        </p:nvSpPr>
+        <p:spPr>
+          <a:xfrm>
+            <a:off x="9189720" y="5157216"/>
             <a:ext cx="731520" cy="365760"/>
           </a:xfrm>
           <a:prstGeom prst="rect">
@@ -11983,13 +12994,13 @@
       </p:sp>
       <p:sp>
         <p:nvSpPr>
-          <p:cNvPr id="151" name="Text 149"/>
-          <p:cNvSpPr/>
-          <p:nvPr/>
-        </p:nvSpPr>
-        <p:spPr>
-          <a:xfrm>
-            <a:off x="9921240" y="4791456"/>
+          <p:cNvPr id="166" name="Text 164"/>
+          <p:cNvSpPr/>
+          <p:nvPr/>
+        </p:nvSpPr>
+        <p:spPr>
+          <a:xfrm>
+            <a:off x="9921240" y="5157216"/>
             <a:ext cx="731520" cy="365760"/>
           </a:xfrm>
           <a:prstGeom prst="rect">
@@ -12022,13 +13033,13 @@
       </p:sp>
       <p:sp>
         <p:nvSpPr>
-          <p:cNvPr id="152" name="Text 150"/>
-          <p:cNvSpPr/>
-          <p:nvPr/>
-        </p:nvSpPr>
-        <p:spPr>
-          <a:xfrm>
-            <a:off x="10652760" y="4791456"/>
+          <p:cNvPr id="167" name="Text 165"/>
+          <p:cNvSpPr/>
+          <p:nvPr/>
+        </p:nvSpPr>
+        <p:spPr>
+          <a:xfrm>
+            <a:off x="10652760" y="5157216"/>
             <a:ext cx="731520" cy="365760"/>
           </a:xfrm>
           <a:prstGeom prst="rect">
@@ -12061,13 +13072,13 @@
       </p:sp>
       <p:sp>
         <p:nvSpPr>
-          <p:cNvPr id="153" name="Text 151"/>
-          <p:cNvSpPr/>
-          <p:nvPr/>
-        </p:nvSpPr>
-        <p:spPr>
-          <a:xfrm>
-            <a:off x="11384280" y="4791456"/>
+          <p:cNvPr id="168" name="Text 166"/>
+          <p:cNvSpPr/>
+          <p:nvPr/>
+        </p:nvSpPr>
+        <p:spPr>
+          <a:xfrm>
+            <a:off x="11384280" y="5157216"/>
             <a:ext cx="868680" cy="365760"/>
           </a:xfrm>
           <a:prstGeom prst="rect">
@@ -12100,13 +13111,13 @@
       </p:sp>
       <p:sp>
         <p:nvSpPr>
-          <p:cNvPr id="154" name="Shape 152"/>
-          <p:cNvSpPr/>
-          <p:nvPr/>
-        </p:nvSpPr>
-        <p:spPr>
-          <a:xfrm>
-            <a:off x="594360" y="5157216"/>
+          <p:cNvPr id="169" name="Shape 167"/>
+          <p:cNvSpPr/>
+          <p:nvPr/>
+        </p:nvSpPr>
+        <p:spPr>
+          <a:xfrm>
+            <a:off x="594360" y="5522976"/>
             <a:ext cx="11658600" cy="365760"/>
           </a:xfrm>
           <a:prstGeom prst="rect">
@@ -12125,13 +13136,13 @@
       </p:sp>
       <p:sp>
         <p:nvSpPr>
-          <p:cNvPr id="155" name="Text 153"/>
-          <p:cNvSpPr/>
-          <p:nvPr/>
-        </p:nvSpPr>
-        <p:spPr>
-          <a:xfrm>
-            <a:off x="704088" y="5157216"/>
+          <p:cNvPr id="170" name="Text 168"/>
+          <p:cNvSpPr/>
+          <p:nvPr/>
+        </p:nvSpPr>
+        <p:spPr>
+          <a:xfrm>
+            <a:off x="704088" y="5522976"/>
             <a:ext cx="2011680" cy="365760"/>
           </a:xfrm>
           <a:prstGeom prst="rect">
@@ -12164,13 +13175,13 @@
       </p:sp>
       <p:sp>
         <p:nvSpPr>
-          <p:cNvPr id="156" name="Text 154"/>
-          <p:cNvSpPr/>
-          <p:nvPr/>
-        </p:nvSpPr>
-        <p:spPr>
-          <a:xfrm>
-            <a:off x="2606040" y="5157216"/>
+          <p:cNvPr id="171" name="Text 169"/>
+          <p:cNvSpPr/>
+          <p:nvPr/>
+        </p:nvSpPr>
+        <p:spPr>
+          <a:xfrm>
+            <a:off x="2606040" y="5522976"/>
             <a:ext cx="731520" cy="365760"/>
           </a:xfrm>
           <a:prstGeom prst="rect">
@@ -12189,13 +13200,13 @@
             <a:r>
               <a:rPr lang="en-US" sz="850" b="1" dirty="0">
                 <a:solidFill>
-                  <a:srgbClr val="1A1A1A"/>
-                </a:solidFill>
-                <a:latin typeface="メイリオ" pitchFamily="34" charset="0"/>
-                <a:ea typeface="メイリオ" pitchFamily="34" charset="-122"/>
-                <a:cs typeface="メイリオ" pitchFamily="34" charset="-120"/>
-              </a:rPr>
-              <a:t>5.8</a:t>
+                  <a:srgbClr val="6E6E6E"/>
+                </a:solidFill>
+                <a:latin typeface="メイリオ" pitchFamily="34" charset="0"/>
+                <a:ea typeface="メイリオ" pitchFamily="34" charset="-122"/>
+                <a:cs typeface="メイリオ" pitchFamily="34" charset="-120"/>
+              </a:rPr>
+              <a:t>▲3.9</a:t>
             </a:r>
             <a:endParaRPr lang="en-US" sz="850" dirty="0"/>
           </a:p>
@@ -12203,13 +13214,13 @@
       </p:sp>
       <p:sp>
         <p:nvSpPr>
-          <p:cNvPr id="157" name="Text 155"/>
-          <p:cNvSpPr/>
-          <p:nvPr/>
-        </p:nvSpPr>
-        <p:spPr>
-          <a:xfrm>
-            <a:off x="3337560" y="5157216"/>
+          <p:cNvPr id="172" name="Text 170"/>
+          <p:cNvSpPr/>
+          <p:nvPr/>
+        </p:nvSpPr>
+        <p:spPr>
+          <a:xfrm>
+            <a:off x="3337560" y="5522976"/>
             <a:ext cx="731520" cy="365760"/>
           </a:xfrm>
           <a:prstGeom prst="rect">
@@ -12228,13 +13239,13 @@
             <a:r>
               <a:rPr lang="en-US" sz="850" b="1" dirty="0">
                 <a:solidFill>
-                  <a:srgbClr val="1A1A1A"/>
-                </a:solidFill>
-                <a:latin typeface="メイリオ" pitchFamily="34" charset="0"/>
-                <a:ea typeface="メイリオ" pitchFamily="34" charset="-122"/>
-                <a:cs typeface="メイリオ" pitchFamily="34" charset="-120"/>
-              </a:rPr>
-              <a:t>5.8</a:t>
+                  <a:srgbClr val="6E6E6E"/>
+                </a:solidFill>
+                <a:latin typeface="メイリオ" pitchFamily="34" charset="0"/>
+                <a:ea typeface="メイリオ" pitchFamily="34" charset="-122"/>
+                <a:cs typeface="メイリオ" pitchFamily="34" charset="-120"/>
+              </a:rPr>
+              <a:t>▲3.9</a:t>
             </a:r>
             <a:endParaRPr lang="en-US" sz="850" dirty="0"/>
           </a:p>
@@ -12242,13 +13253,13 @@
       </p:sp>
       <p:sp>
         <p:nvSpPr>
-          <p:cNvPr id="158" name="Text 156"/>
-          <p:cNvSpPr/>
-          <p:nvPr/>
-        </p:nvSpPr>
-        <p:spPr>
-          <a:xfrm>
-            <a:off x="4069080" y="5157216"/>
+          <p:cNvPr id="173" name="Text 171"/>
+          <p:cNvSpPr/>
+          <p:nvPr/>
+        </p:nvSpPr>
+        <p:spPr>
+          <a:xfrm>
+            <a:off x="4069080" y="5522976"/>
             <a:ext cx="731520" cy="365760"/>
           </a:xfrm>
           <a:prstGeom prst="rect">
@@ -12267,13 +13278,13 @@
             <a:r>
               <a:rPr lang="en-US" sz="850" b="1" dirty="0">
                 <a:solidFill>
-                  <a:srgbClr val="1A1A1A"/>
-                </a:solidFill>
-                <a:latin typeface="メイリオ" pitchFamily="34" charset="0"/>
-                <a:ea typeface="メイリオ" pitchFamily="34" charset="-122"/>
-                <a:cs typeface="メイリオ" pitchFamily="34" charset="-120"/>
-              </a:rPr>
-              <a:t>5.8</a:t>
+                  <a:srgbClr val="6E6E6E"/>
+                </a:solidFill>
+                <a:latin typeface="メイリオ" pitchFamily="34" charset="0"/>
+                <a:ea typeface="メイリオ" pitchFamily="34" charset="-122"/>
+                <a:cs typeface="メイリオ" pitchFamily="34" charset="-120"/>
+              </a:rPr>
+              <a:t>▲3.9</a:t>
             </a:r>
             <a:endParaRPr lang="en-US" sz="850" dirty="0"/>
           </a:p>
@@ -12281,13 +13292,13 @@
       </p:sp>
       <p:sp>
         <p:nvSpPr>
-          <p:cNvPr id="159" name="Text 157"/>
-          <p:cNvSpPr/>
-          <p:nvPr/>
-        </p:nvSpPr>
-        <p:spPr>
-          <a:xfrm>
-            <a:off x="4800600" y="5157216"/>
+          <p:cNvPr id="174" name="Text 172"/>
+          <p:cNvSpPr/>
+          <p:nvPr/>
+        </p:nvSpPr>
+        <p:spPr>
+          <a:xfrm>
+            <a:off x="4800600" y="5522976"/>
             <a:ext cx="731520" cy="365760"/>
           </a:xfrm>
           <a:prstGeom prst="rect">
@@ -12306,13 +13317,13 @@
             <a:r>
               <a:rPr lang="en-US" sz="850" b="1" dirty="0">
                 <a:solidFill>
-                  <a:srgbClr val="1A1A1A"/>
-                </a:solidFill>
-                <a:latin typeface="メイリオ" pitchFamily="34" charset="0"/>
-                <a:ea typeface="メイリオ" pitchFamily="34" charset="-122"/>
-                <a:cs typeface="メイリオ" pitchFamily="34" charset="-120"/>
-              </a:rPr>
-              <a:t>5.8</a:t>
+                  <a:srgbClr val="6E6E6E"/>
+                </a:solidFill>
+                <a:latin typeface="メイリオ" pitchFamily="34" charset="0"/>
+                <a:ea typeface="メイリオ" pitchFamily="34" charset="-122"/>
+                <a:cs typeface="メイリオ" pitchFamily="34" charset="-120"/>
+              </a:rPr>
+              <a:t>▲3.9</a:t>
             </a:r>
             <a:endParaRPr lang="en-US" sz="850" dirty="0"/>
           </a:p>
@@ -12320,13 +13331,13 @@
       </p:sp>
       <p:sp>
         <p:nvSpPr>
-          <p:cNvPr id="160" name="Text 158"/>
-          <p:cNvSpPr/>
-          <p:nvPr/>
-        </p:nvSpPr>
-        <p:spPr>
-          <a:xfrm>
-            <a:off x="5532120" y="5157216"/>
+          <p:cNvPr id="175" name="Text 173"/>
+          <p:cNvSpPr/>
+          <p:nvPr/>
+        </p:nvSpPr>
+        <p:spPr>
+          <a:xfrm>
+            <a:off x="5532120" y="5522976"/>
             <a:ext cx="731520" cy="365760"/>
           </a:xfrm>
           <a:prstGeom prst="rect">
@@ -12345,13 +13356,13 @@
             <a:r>
               <a:rPr lang="en-US" sz="850" b="1" dirty="0">
                 <a:solidFill>
-                  <a:srgbClr val="1A1A1A"/>
-                </a:solidFill>
-                <a:latin typeface="メイリオ" pitchFamily="34" charset="0"/>
-                <a:ea typeface="メイリオ" pitchFamily="34" charset="-122"/>
-                <a:cs typeface="メイリオ" pitchFamily="34" charset="-120"/>
-              </a:rPr>
-              <a:t>5.8</a:t>
+                  <a:srgbClr val="6E6E6E"/>
+                </a:solidFill>
+                <a:latin typeface="メイリオ" pitchFamily="34" charset="0"/>
+                <a:ea typeface="メイリオ" pitchFamily="34" charset="-122"/>
+                <a:cs typeface="メイリオ" pitchFamily="34" charset="-120"/>
+              </a:rPr>
+              <a:t>▲3.9</a:t>
             </a:r>
             <a:endParaRPr lang="en-US" sz="850" dirty="0"/>
           </a:p>
@@ -12359,13 +13370,13 @@
       </p:sp>
       <p:sp>
         <p:nvSpPr>
-          <p:cNvPr id="161" name="Text 159"/>
-          <p:cNvSpPr/>
-          <p:nvPr/>
-        </p:nvSpPr>
-        <p:spPr>
-          <a:xfrm>
-            <a:off x="6263640" y="5157216"/>
+          <p:cNvPr id="176" name="Text 174"/>
+          <p:cNvSpPr/>
+          <p:nvPr/>
+        </p:nvSpPr>
+        <p:spPr>
+          <a:xfrm>
+            <a:off x="6263640" y="5522976"/>
             <a:ext cx="731520" cy="365760"/>
           </a:xfrm>
           <a:prstGeom prst="rect">
@@ -12390,7 +13401,7 @@
                 <a:ea typeface="メイリオ" pitchFamily="34" charset="-122"/>
                 <a:cs typeface="メイリオ" pitchFamily="34" charset="-120"/>
               </a:rPr>
-              <a:t>35.8</a:t>
+              <a:t>26.1</a:t>
             </a:r>
             <a:endParaRPr lang="en-US" sz="850" dirty="0"/>
           </a:p>
@@ -12398,13 +13409,13 @@
       </p:sp>
       <p:sp>
         <p:nvSpPr>
-          <p:cNvPr id="162" name="Text 160"/>
-          <p:cNvSpPr/>
-          <p:nvPr/>
-        </p:nvSpPr>
-        <p:spPr>
-          <a:xfrm>
-            <a:off x="6995160" y="5157216"/>
+          <p:cNvPr id="177" name="Text 175"/>
+          <p:cNvSpPr/>
+          <p:nvPr/>
+        </p:nvSpPr>
+        <p:spPr>
+          <a:xfrm>
+            <a:off x="6995160" y="5522976"/>
             <a:ext cx="731520" cy="365760"/>
           </a:xfrm>
           <a:prstGeom prst="rect">
@@ -12423,13 +13434,13 @@
             <a:r>
               <a:rPr lang="en-US" sz="850" b="1" dirty="0">
                 <a:solidFill>
-                  <a:srgbClr val="1A1A1A"/>
-                </a:solidFill>
-                <a:latin typeface="メイリオ" pitchFamily="34" charset="0"/>
-                <a:ea typeface="メイリオ" pitchFamily="34" charset="-122"/>
-                <a:cs typeface="メイリオ" pitchFamily="34" charset="-120"/>
-              </a:rPr>
-              <a:t>5.8</a:t>
+                  <a:srgbClr val="6E6E6E"/>
+                </a:solidFill>
+                <a:latin typeface="メイリオ" pitchFamily="34" charset="0"/>
+                <a:ea typeface="メイリオ" pitchFamily="34" charset="-122"/>
+                <a:cs typeface="メイリオ" pitchFamily="34" charset="-120"/>
+              </a:rPr>
+              <a:t>▲3.9</a:t>
             </a:r>
             <a:endParaRPr lang="en-US" sz="850" dirty="0"/>
           </a:p>
@@ -12437,13 +13448,13 @@
       </p:sp>
       <p:sp>
         <p:nvSpPr>
-          <p:cNvPr id="163" name="Text 161"/>
-          <p:cNvSpPr/>
-          <p:nvPr/>
-        </p:nvSpPr>
-        <p:spPr>
-          <a:xfrm>
-            <a:off x="7726680" y="5157216"/>
+          <p:cNvPr id="178" name="Text 176"/>
+          <p:cNvSpPr/>
+          <p:nvPr/>
+        </p:nvSpPr>
+        <p:spPr>
+          <a:xfrm>
+            <a:off x="7726680" y="5522976"/>
             <a:ext cx="731520" cy="365760"/>
           </a:xfrm>
           <a:prstGeom prst="rect">
@@ -12462,13 +13473,13 @@
             <a:r>
               <a:rPr lang="en-US" sz="850" b="1" dirty="0">
                 <a:solidFill>
-                  <a:srgbClr val="1A1A1A"/>
-                </a:solidFill>
-                <a:latin typeface="メイリオ" pitchFamily="34" charset="0"/>
-                <a:ea typeface="メイリオ" pitchFamily="34" charset="-122"/>
-                <a:cs typeface="メイリオ" pitchFamily="34" charset="-120"/>
-              </a:rPr>
-              <a:t>5.8</a:t>
+                  <a:srgbClr val="6E6E6E"/>
+                </a:solidFill>
+                <a:latin typeface="メイリオ" pitchFamily="34" charset="0"/>
+                <a:ea typeface="メイリオ" pitchFamily="34" charset="-122"/>
+                <a:cs typeface="メイリオ" pitchFamily="34" charset="-120"/>
+              </a:rPr>
+              <a:t>▲3.9</a:t>
             </a:r>
             <a:endParaRPr lang="en-US" sz="850" dirty="0"/>
           </a:p>
@@ -12476,13 +13487,13 @@
       </p:sp>
       <p:sp>
         <p:nvSpPr>
-          <p:cNvPr id="164" name="Text 162"/>
-          <p:cNvSpPr/>
-          <p:nvPr/>
-        </p:nvSpPr>
-        <p:spPr>
-          <a:xfrm>
-            <a:off x="8458200" y="5157216"/>
+          <p:cNvPr id="179" name="Text 177"/>
+          <p:cNvSpPr/>
+          <p:nvPr/>
+        </p:nvSpPr>
+        <p:spPr>
+          <a:xfrm>
+            <a:off x="8458200" y="5522976"/>
             <a:ext cx="731520" cy="365760"/>
           </a:xfrm>
           <a:prstGeom prst="rect">
@@ -12501,13 +13512,13 @@
             <a:r>
               <a:rPr lang="en-US" sz="850" b="1" dirty="0">
                 <a:solidFill>
-                  <a:srgbClr val="1A1A1A"/>
-                </a:solidFill>
-                <a:latin typeface="メイリオ" pitchFamily="34" charset="0"/>
-                <a:ea typeface="メイリオ" pitchFamily="34" charset="-122"/>
-                <a:cs typeface="メイリオ" pitchFamily="34" charset="-120"/>
-              </a:rPr>
-              <a:t>5.8</a:t>
+                  <a:srgbClr val="6E6E6E"/>
+                </a:solidFill>
+                <a:latin typeface="メイリオ" pitchFamily="34" charset="0"/>
+                <a:ea typeface="メイリオ" pitchFamily="34" charset="-122"/>
+                <a:cs typeface="メイリオ" pitchFamily="34" charset="-120"/>
+              </a:rPr>
+              <a:t>▲3.9</a:t>
             </a:r>
             <a:endParaRPr lang="en-US" sz="850" dirty="0"/>
           </a:p>
@@ -12515,13 +13526,13 @@
       </p:sp>
       <p:sp>
         <p:nvSpPr>
-          <p:cNvPr id="165" name="Text 163"/>
-          <p:cNvSpPr/>
-          <p:nvPr/>
-        </p:nvSpPr>
-        <p:spPr>
-          <a:xfrm>
-            <a:off x="9189720" y="5157216"/>
+          <p:cNvPr id="180" name="Text 178"/>
+          <p:cNvSpPr/>
+          <p:nvPr/>
+        </p:nvSpPr>
+        <p:spPr>
+          <a:xfrm>
+            <a:off x="9189720" y="5522976"/>
             <a:ext cx="731520" cy="365760"/>
           </a:xfrm>
           <a:prstGeom prst="rect">
@@ -12540,13 +13551,13 @@
             <a:r>
               <a:rPr lang="en-US" sz="850" b="1" dirty="0">
                 <a:solidFill>
-                  <a:srgbClr val="1A1A1A"/>
-                </a:solidFill>
-                <a:latin typeface="メイリオ" pitchFamily="34" charset="0"/>
-                <a:ea typeface="メイリオ" pitchFamily="34" charset="-122"/>
-                <a:cs typeface="メイリオ" pitchFamily="34" charset="-120"/>
-              </a:rPr>
-              <a:t>5.8</a:t>
+                  <a:srgbClr val="6E6E6E"/>
+                </a:solidFill>
+                <a:latin typeface="メイリオ" pitchFamily="34" charset="0"/>
+                <a:ea typeface="メイリオ" pitchFamily="34" charset="-122"/>
+                <a:cs typeface="メイリオ" pitchFamily="34" charset="-120"/>
+              </a:rPr>
+              <a:t>▲3.9</a:t>
             </a:r>
             <a:endParaRPr lang="en-US" sz="850" dirty="0"/>
           </a:p>
@@ -12554,13 +13565,13 @@
       </p:sp>
       <p:sp>
         <p:nvSpPr>
-          <p:cNvPr id="166" name="Text 164"/>
-          <p:cNvSpPr/>
-          <p:nvPr/>
-        </p:nvSpPr>
-        <p:spPr>
-          <a:xfrm>
-            <a:off x="9921240" y="5157216"/>
+          <p:cNvPr id="181" name="Text 179"/>
+          <p:cNvSpPr/>
+          <p:nvPr/>
+        </p:nvSpPr>
+        <p:spPr>
+          <a:xfrm>
+            <a:off x="9921240" y="5522976"/>
             <a:ext cx="731520" cy="365760"/>
           </a:xfrm>
           <a:prstGeom prst="rect">
@@ -12579,13 +13590,13 @@
             <a:r>
               <a:rPr lang="en-US" sz="850" b="1" dirty="0">
                 <a:solidFill>
-                  <a:srgbClr val="1A1A1A"/>
-                </a:solidFill>
-                <a:latin typeface="メイリオ" pitchFamily="34" charset="0"/>
-                <a:ea typeface="メイリオ" pitchFamily="34" charset="-122"/>
-                <a:cs typeface="メイリオ" pitchFamily="34" charset="-120"/>
-              </a:rPr>
-              <a:t>5.8</a:t>
+                  <a:srgbClr val="6E6E6E"/>
+                </a:solidFill>
+                <a:latin typeface="メイリオ" pitchFamily="34" charset="0"/>
+                <a:ea typeface="メイリオ" pitchFamily="34" charset="-122"/>
+                <a:cs typeface="メイリオ" pitchFamily="34" charset="-120"/>
+              </a:rPr>
+              <a:t>▲3.9</a:t>
             </a:r>
             <a:endParaRPr lang="en-US" sz="850" dirty="0"/>
           </a:p>
@@ -12593,13 +13604,13 @@
       </p:sp>
       <p:sp>
         <p:nvSpPr>
-          <p:cNvPr id="167" name="Text 165"/>
-          <p:cNvSpPr/>
-          <p:nvPr/>
-        </p:nvSpPr>
-        <p:spPr>
-          <a:xfrm>
-            <a:off x="10652760" y="5157216"/>
+          <p:cNvPr id="182" name="Text 180"/>
+          <p:cNvSpPr/>
+          <p:nvPr/>
+        </p:nvSpPr>
+        <p:spPr>
+          <a:xfrm>
+            <a:off x="10652760" y="5522976"/>
             <a:ext cx="731520" cy="365760"/>
           </a:xfrm>
           <a:prstGeom prst="rect">
@@ -12624,7 +13635,7 @@
                 <a:ea typeface="メイリオ" pitchFamily="34" charset="-122"/>
                 <a:cs typeface="メイリオ" pitchFamily="34" charset="-120"/>
               </a:rPr>
-              <a:t>15.8</a:t>
+              <a:t>6.1</a:t>
             </a:r>
             <a:endParaRPr lang="en-US" sz="850" dirty="0"/>
           </a:p>
@@ -12632,13 +13643,13 @@
       </p:sp>
       <p:sp>
         <p:nvSpPr>
-          <p:cNvPr id="168" name="Text 166"/>
-          <p:cNvSpPr/>
-          <p:nvPr/>
-        </p:nvSpPr>
-        <p:spPr>
-          <a:xfrm>
-            <a:off x="11384280" y="5157216"/>
+          <p:cNvPr id="183" name="Text 181"/>
+          <p:cNvSpPr/>
+          <p:nvPr/>
+        </p:nvSpPr>
+        <p:spPr>
+          <a:xfrm>
+            <a:off x="11384280" y="5522976"/>
             <a:ext cx="868680" cy="365760"/>
           </a:xfrm>
           <a:prstGeom prst="rect">
@@ -12657,13 +13668,13 @@
             <a:r>
               <a:rPr lang="en-US" sz="900" b="1" dirty="0">
                 <a:solidFill>
-                  <a:srgbClr val="1A1A1A"/>
-                </a:solidFill>
-                <a:latin typeface="メイリオ" pitchFamily="34" charset="0"/>
-                <a:ea typeface="メイリオ" pitchFamily="34" charset="-122"/>
-                <a:cs typeface="メイリオ" pitchFamily="34" charset="-120"/>
-              </a:rPr>
-              <a:t>109.2</a:t>
+                  <a:srgbClr val="6E6E6E"/>
+                </a:solidFill>
+                <a:latin typeface="メイリオ" pitchFamily="34" charset="0"/>
+                <a:ea typeface="メイリオ" pitchFamily="34" charset="-122"/>
+                <a:cs typeface="メイリオ" pitchFamily="34" charset="-120"/>
+              </a:rPr>
+              <a:t>▲6.2</a:t>
             </a:r>
             <a:endParaRPr lang="en-US" sz="900" dirty="0"/>
           </a:p>
@@ -12671,13 +13682,13 @@
       </p:sp>
       <p:sp>
         <p:nvSpPr>
-          <p:cNvPr id="169" name="Shape 167"/>
-          <p:cNvSpPr/>
-          <p:nvPr/>
-        </p:nvSpPr>
-        <p:spPr>
-          <a:xfrm>
-            <a:off x="594360" y="5742432"/>
+          <p:cNvPr id="184" name="Shape 182"/>
+          <p:cNvSpPr/>
+          <p:nvPr/>
+        </p:nvSpPr>
+        <p:spPr>
+          <a:xfrm>
+            <a:off x="594360" y="6108192"/>
             <a:ext cx="10963656" cy="841248"/>
           </a:xfrm>
           <a:prstGeom prst="roundRect">
@@ -12705,13 +13716,13 @@
       </p:sp>
       <p:sp>
         <p:nvSpPr>
-          <p:cNvPr id="170" name="Text 168"/>
-          <p:cNvSpPr/>
-          <p:nvPr/>
-        </p:nvSpPr>
-        <p:spPr>
-          <a:xfrm>
-            <a:off x="914400" y="5815584"/>
+          <p:cNvPr id="185" name="Text 183"/>
+          <p:cNvSpPr/>
+          <p:nvPr/>
+        </p:nvSpPr>
+        <p:spPr>
+          <a:xfrm>
+            <a:off x="914400" y="6181344"/>
             <a:ext cx="3291840" cy="237744"/>
           </a:xfrm>
           <a:prstGeom prst="rect">
@@ -12736,7 +13747,7 @@
                 <a:ea typeface="メイリオ" pitchFamily="34" charset="-122"/>
                 <a:cs typeface="メイリオ" pitchFamily="34" charset="-120"/>
               </a:rPr>
-              <a:t>通期 売上高</a:t>
+              <a:t>売上高 合計（上乗せ含む）</a:t>
             </a:r>
             <a:endParaRPr lang="en-US" sz="950" dirty="0"/>
           </a:p>
@@ -12744,13 +13755,13 @@
       </p:sp>
       <p:sp>
         <p:nvSpPr>
-          <p:cNvPr id="171" name="Text 169"/>
-          <p:cNvSpPr/>
-          <p:nvPr/>
-        </p:nvSpPr>
-        <p:spPr>
-          <a:xfrm>
-            <a:off x="914400" y="6016752"/>
+          <p:cNvPr id="186" name="Text 184"/>
+          <p:cNvSpPr/>
+          <p:nvPr/>
+        </p:nvSpPr>
+        <p:spPr>
+          <a:xfrm>
+            <a:off x="914400" y="6382512"/>
             <a:ext cx="3291840" cy="310896"/>
           </a:xfrm>
           <a:prstGeom prst="rect">
@@ -12775,7 +13786,7 @@
                 <a:ea typeface="メイリオ" pitchFamily="34" charset="-122"/>
                 <a:cs typeface="メイリオ" pitchFamily="34" charset="-120"/>
               </a:rPr>
-              <a:t>566.2百万円</a:t>
+              <a:t>730.5百万円</a:t>
             </a:r>
             <a:endParaRPr lang="en-US" sz="1600" dirty="0"/>
           </a:p>
@@ -12783,13 +13794,13 @@
       </p:sp>
       <p:sp>
         <p:nvSpPr>
-          <p:cNvPr id="172" name="Text 170"/>
-          <p:cNvSpPr/>
-          <p:nvPr/>
-        </p:nvSpPr>
-        <p:spPr>
-          <a:xfrm>
-            <a:off x="4526280" y="5815584"/>
+          <p:cNvPr id="187" name="Text 185"/>
+          <p:cNvSpPr/>
+          <p:nvPr/>
+        </p:nvSpPr>
+        <p:spPr>
+          <a:xfrm>
+            <a:off x="4526280" y="6181344"/>
             <a:ext cx="3291840" cy="237744"/>
           </a:xfrm>
           <a:prstGeom prst="rect">
@@ -12822,13 +13833,13 @@
       </p:sp>
       <p:sp>
         <p:nvSpPr>
-          <p:cNvPr id="173" name="Text 171"/>
-          <p:cNvSpPr/>
-          <p:nvPr/>
-        </p:nvSpPr>
-        <p:spPr>
-          <a:xfrm>
-            <a:off x="4526280" y="6016752"/>
+          <p:cNvPr id="188" name="Text 186"/>
+          <p:cNvSpPr/>
+          <p:nvPr/>
+        </p:nvSpPr>
+        <p:spPr>
+          <a:xfrm>
+            <a:off x="4526280" y="6382512"/>
             <a:ext cx="3291840" cy="310896"/>
           </a:xfrm>
           <a:prstGeom prst="rect">
@@ -12853,7 +13864,7 @@
                 <a:ea typeface="メイリオ" pitchFamily="34" charset="-122"/>
                 <a:cs typeface="メイリオ" pitchFamily="34" charset="-120"/>
               </a:rPr>
-              <a:t>＋124.2百万円</a:t>
+              <a:t>＋8.8百万円</a:t>
             </a:r>
             <a:endParaRPr lang="en-US" sz="1600" dirty="0"/>
           </a:p>
@@ -12861,13 +13872,13 @@
       </p:sp>
       <p:sp>
         <p:nvSpPr>
-          <p:cNvPr id="174" name="Text 172"/>
-          <p:cNvSpPr/>
-          <p:nvPr/>
-        </p:nvSpPr>
-        <p:spPr>
-          <a:xfrm>
-            <a:off x="8138160" y="5815584"/>
+          <p:cNvPr id="189" name="Text 187"/>
+          <p:cNvSpPr/>
+          <p:nvPr/>
+        </p:nvSpPr>
+        <p:spPr>
+          <a:xfrm>
+            <a:off x="8138160" y="6181344"/>
             <a:ext cx="3291840" cy="237744"/>
           </a:xfrm>
           <a:prstGeom prst="rect">
@@ -12900,13 +13911,13 @@
       </p:sp>
       <p:sp>
         <p:nvSpPr>
-          <p:cNvPr id="175" name="Text 173"/>
-          <p:cNvSpPr/>
-          <p:nvPr/>
-        </p:nvSpPr>
-        <p:spPr>
-          <a:xfrm>
-            <a:off x="8138160" y="6016752"/>
+          <p:cNvPr id="190" name="Text 188"/>
+          <p:cNvSpPr/>
+          <p:nvPr/>
+        </p:nvSpPr>
+        <p:spPr>
+          <a:xfrm>
+            <a:off x="8138160" y="6382512"/>
             <a:ext cx="3291840" cy="310896"/>
           </a:xfrm>
           <a:prstGeom prst="rect">
@@ -12931,7 +13942,7 @@
                 <a:ea typeface="メイリオ" pitchFamily="34" charset="-122"/>
                 <a:cs typeface="メイリオ" pitchFamily="34" charset="-120"/>
               </a:rPr>
-              <a:t>＋109.2百万円</a:t>
+              <a:t>▲6.2百万円</a:t>
             </a:r>
             <a:endParaRPr lang="en-US" sz="1600" dirty="0"/>
           </a:p>
@@ -12939,13 +13950,13 @@
       </p:sp>
       <p:sp>
         <p:nvSpPr>
-          <p:cNvPr id="176" name="Text 174"/>
-          <p:cNvSpPr/>
-          <p:nvPr/>
-        </p:nvSpPr>
-        <p:spPr>
-          <a:xfrm>
-            <a:off x="914400" y="6327648"/>
+          <p:cNvPr id="191" name="Text 189"/>
+          <p:cNvSpPr/>
+          <p:nvPr/>
+        </p:nvSpPr>
+        <p:spPr>
+          <a:xfrm>
+            <a:off x="914400" y="6693408"/>
             <a:ext cx="10332720" cy="219456"/>
           </a:xfrm>
           <a:prstGeom prst="rect">
@@ -13080,7 +14091,7 @@
                 <a:ea typeface="メイリオ" pitchFamily="34" charset="-122"/>
                 <a:cs typeface="メイリオ" pitchFamily="34" charset="-120"/>
               </a:rPr>
-              <a:t>ワイン仕入419.1百万円を維持したまま、期中に一度も現預金がマイナスになりません。単位：百万円（税込）</a:t>
+              <a:t>ワイン仕入419.1百万円を維持。売上原価421.6百万円とほぼ見合うため在庫は横ばいで、資金が固定されません。単位：百万円（税込）</a:t>
             </a:r>
             <a:endParaRPr lang="en-US" sz="1250" dirty="0"/>
           </a:p>
@@ -13710,7 +14721,7 @@
                 <a:ea typeface="メイリオ" pitchFamily="34" charset="-122"/>
                 <a:cs typeface="メイリオ" pitchFamily="34" charset="-120"/>
               </a:rPr>
-              <a:t>60.4</a:t>
+              <a:t>63.3</a:t>
             </a:r>
             <a:endParaRPr lang="en-US" sz="900" dirty="0"/>
           </a:p>
@@ -13749,7 +14760,7 @@
                 <a:ea typeface="メイリオ" pitchFamily="34" charset="-122"/>
                 <a:cs typeface="メイリオ" pitchFamily="34" charset="-120"/>
               </a:rPr>
-              <a:t>60.4</a:t>
+              <a:t>63.3</a:t>
             </a:r>
             <a:endParaRPr lang="en-US" sz="900" dirty="0"/>
           </a:p>
@@ -13788,7 +14799,7 @@
                 <a:ea typeface="メイリオ" pitchFamily="34" charset="-122"/>
                 <a:cs typeface="メイリオ" pitchFamily="34" charset="-120"/>
               </a:rPr>
-              <a:t>60.4</a:t>
+              <a:t>63.3</a:t>
             </a:r>
             <a:endParaRPr lang="en-US" sz="900" dirty="0"/>
           </a:p>
@@ -13827,7 +14838,7 @@
                 <a:ea typeface="メイリオ" pitchFamily="34" charset="-122"/>
                 <a:cs typeface="メイリオ" pitchFamily="34" charset="-120"/>
               </a:rPr>
-              <a:t>60.4</a:t>
+              <a:t>63.3</a:t>
             </a:r>
             <a:endParaRPr lang="en-US" sz="900" dirty="0"/>
           </a:p>
@@ -13866,7 +14877,7 @@
                 <a:ea typeface="メイリオ" pitchFamily="34" charset="-122"/>
                 <a:cs typeface="メイリオ" pitchFamily="34" charset="-120"/>
               </a:rPr>
-              <a:t>60.4</a:t>
+              <a:t>63.3</a:t>
             </a:r>
             <a:endParaRPr lang="en-US" sz="900" dirty="0"/>
           </a:p>
@@ -13905,7 +14916,7 @@
                 <a:ea typeface="メイリオ" pitchFamily="34" charset="-122"/>
                 <a:cs typeface="メイリオ" pitchFamily="34" charset="-120"/>
               </a:rPr>
-              <a:t>93.4</a:t>
+              <a:t>96.3</a:t>
             </a:r>
             <a:endParaRPr lang="en-US" sz="900" dirty="0"/>
           </a:p>
@@ -13944,7 +14955,7 @@
                 <a:ea typeface="メイリオ" pitchFamily="34" charset="-122"/>
                 <a:cs typeface="メイリオ" pitchFamily="34" charset="-120"/>
               </a:rPr>
-              <a:t>60.4</a:t>
+              <a:t>63.3</a:t>
             </a:r>
             <a:endParaRPr lang="en-US" sz="900" dirty="0"/>
           </a:p>
@@ -13983,7 +14994,7 @@
                 <a:ea typeface="メイリオ" pitchFamily="34" charset="-122"/>
                 <a:cs typeface="メイリオ" pitchFamily="34" charset="-120"/>
               </a:rPr>
-              <a:t>60.4</a:t>
+              <a:t>63.3</a:t>
             </a:r>
             <a:endParaRPr lang="en-US" sz="900" dirty="0"/>
           </a:p>
@@ -14022,7 +15033,7 @@
                 <a:ea typeface="メイリオ" pitchFamily="34" charset="-122"/>
                 <a:cs typeface="メイリオ" pitchFamily="34" charset="-120"/>
               </a:rPr>
-              <a:t>60.4</a:t>
+              <a:t>63.3</a:t>
             </a:r>
             <a:endParaRPr lang="en-US" sz="900" dirty="0"/>
           </a:p>
@@ -14061,7 +15072,7 @@
                 <a:ea typeface="メイリオ" pitchFamily="34" charset="-122"/>
                 <a:cs typeface="メイリオ" pitchFamily="34" charset="-120"/>
               </a:rPr>
-              <a:t>60.4</a:t>
+              <a:t>63.3</a:t>
             </a:r>
             <a:endParaRPr lang="en-US" sz="900" dirty="0"/>
           </a:p>
@@ -14100,7 +15111,7 @@
                 <a:ea typeface="メイリオ" pitchFamily="34" charset="-122"/>
                 <a:cs typeface="メイリオ" pitchFamily="34" charset="-120"/>
               </a:rPr>
-              <a:t>60.4</a:t>
+              <a:t>63.3</a:t>
             </a:r>
             <a:endParaRPr lang="en-US" sz="900" dirty="0"/>
           </a:p>
@@ -14139,7 +15150,7 @@
                 <a:ea typeface="メイリオ" pitchFamily="34" charset="-122"/>
                 <a:cs typeface="メイリオ" pitchFamily="34" charset="-120"/>
               </a:rPr>
-              <a:t>71.4</a:t>
+              <a:t>74.3</a:t>
             </a:r>
             <a:endParaRPr lang="en-US" sz="900" dirty="0"/>
           </a:p>
@@ -14768,13 +15779,13 @@
             <a:r>
               <a:rPr lang="en-US" sz="900" b="1" dirty="0">
                 <a:solidFill>
-                  <a:srgbClr val="6E6E6E"/>
-                </a:solidFill>
-                <a:latin typeface="メイリオ" pitchFamily="34" charset="0"/>
-                <a:ea typeface="メイリオ" pitchFamily="34" charset="-122"/>
-                <a:cs typeface="メイリオ" pitchFamily="34" charset="-120"/>
-              </a:rPr>
-              <a:t>▲2.1</a:t>
+                  <a:srgbClr val="1A1A1A"/>
+                </a:solidFill>
+                <a:latin typeface="メイリオ" pitchFamily="34" charset="0"/>
+                <a:ea typeface="メイリオ" pitchFamily="34" charset="-122"/>
+                <a:cs typeface="メイリオ" pitchFamily="34" charset="-120"/>
+              </a:rPr>
+              <a:t>0.8</a:t>
             </a:r>
             <a:endParaRPr lang="en-US" sz="900" dirty="0"/>
           </a:p>
@@ -14813,7 +15824,7 @@
                 <a:ea typeface="メイリオ" pitchFamily="34" charset="-122"/>
                 <a:cs typeface="メイリオ" pitchFamily="34" charset="-120"/>
               </a:rPr>
-              <a:t>▲6.1</a:t>
+              <a:t>▲3.2</a:t>
             </a:r>
             <a:endParaRPr lang="en-US" sz="900" dirty="0"/>
           </a:p>
@@ -14846,13 +15857,13 @@
             <a:r>
               <a:rPr lang="en-US" sz="900" b="1" dirty="0">
                 <a:solidFill>
-                  <a:srgbClr val="6E6E6E"/>
-                </a:solidFill>
-                <a:latin typeface="メイリオ" pitchFamily="34" charset="0"/>
-                <a:ea typeface="メイリオ" pitchFamily="34" charset="-122"/>
-                <a:cs typeface="メイリオ" pitchFamily="34" charset="-120"/>
-              </a:rPr>
-              <a:t>▲2.1</a:t>
+                  <a:srgbClr val="1A1A1A"/>
+                </a:solidFill>
+                <a:latin typeface="メイリオ" pitchFamily="34" charset="0"/>
+                <a:ea typeface="メイリオ" pitchFamily="34" charset="-122"/>
+                <a:cs typeface="メイリオ" pitchFamily="34" charset="-120"/>
+              </a:rPr>
+              <a:t>0.8</a:t>
             </a:r>
             <a:endParaRPr lang="en-US" sz="900" dirty="0"/>
           </a:p>
@@ -14885,13 +15896,13 @@
             <a:r>
               <a:rPr lang="en-US" sz="900" b="1" dirty="0">
                 <a:solidFill>
-                  <a:srgbClr val="6E6E6E"/>
-                </a:solidFill>
-                <a:latin typeface="メイリオ" pitchFamily="34" charset="0"/>
-                <a:ea typeface="メイリオ" pitchFamily="34" charset="-122"/>
-                <a:cs typeface="メイリオ" pitchFamily="34" charset="-120"/>
-              </a:rPr>
-              <a:t>▲2.1</a:t>
+                  <a:srgbClr val="1A1A1A"/>
+                </a:solidFill>
+                <a:latin typeface="メイリオ" pitchFamily="34" charset="0"/>
+                <a:ea typeface="メイリオ" pitchFamily="34" charset="-122"/>
+                <a:cs typeface="メイリオ" pitchFamily="34" charset="-120"/>
+              </a:rPr>
+              <a:t>0.8</a:t>
             </a:r>
             <a:endParaRPr lang="en-US" sz="900" dirty="0"/>
           </a:p>
@@ -14930,7 +15941,7 @@
                 <a:ea typeface="メイリオ" pitchFamily="34" charset="-122"/>
                 <a:cs typeface="メイリオ" pitchFamily="34" charset="-120"/>
               </a:rPr>
-              <a:t>▲4.1</a:t>
+              <a:t>▲1.2</a:t>
             </a:r>
             <a:endParaRPr lang="en-US" sz="900" dirty="0"/>
           </a:p>
@@ -14969,7 +15980,7 @@
                 <a:ea typeface="メイリオ" pitchFamily="34" charset="-122"/>
                 <a:cs typeface="メイリオ" pitchFamily="34" charset="-120"/>
               </a:rPr>
-              <a:t>30.9</a:t>
+              <a:t>33.8</a:t>
             </a:r>
             <a:endParaRPr lang="en-US" sz="900" dirty="0"/>
           </a:p>
@@ -15002,13 +16013,13 @@
             <a:r>
               <a:rPr lang="en-US" sz="900" b="1" dirty="0">
                 <a:solidFill>
-                  <a:srgbClr val="6E6E6E"/>
-                </a:solidFill>
-                <a:latin typeface="メイリオ" pitchFamily="34" charset="0"/>
-                <a:ea typeface="メイリオ" pitchFamily="34" charset="-122"/>
-                <a:cs typeface="メイリオ" pitchFamily="34" charset="-120"/>
-              </a:rPr>
-              <a:t>▲2.1</a:t>
+                  <a:srgbClr val="1A1A1A"/>
+                </a:solidFill>
+                <a:latin typeface="メイリオ" pitchFamily="34" charset="0"/>
+                <a:ea typeface="メイリオ" pitchFamily="34" charset="-122"/>
+                <a:cs typeface="メイリオ" pitchFamily="34" charset="-120"/>
+              </a:rPr>
+              <a:t>0.8</a:t>
             </a:r>
             <a:endParaRPr lang="en-US" sz="900" dirty="0"/>
           </a:p>
@@ -15047,7 +16058,7 @@
                 <a:ea typeface="メイリオ" pitchFamily="34" charset="-122"/>
                 <a:cs typeface="メイリオ" pitchFamily="34" charset="-120"/>
               </a:rPr>
-              <a:t>▲4.1</a:t>
+              <a:t>▲1.2</a:t>
             </a:r>
             <a:endParaRPr lang="en-US" sz="900" dirty="0"/>
           </a:p>
@@ -15080,13 +16091,13 @@
             <a:r>
               <a:rPr lang="en-US" sz="900" b="1" dirty="0">
                 <a:solidFill>
-                  <a:srgbClr val="6E6E6E"/>
-                </a:solidFill>
-                <a:latin typeface="メイリオ" pitchFamily="34" charset="0"/>
-                <a:ea typeface="メイリオ" pitchFamily="34" charset="-122"/>
-                <a:cs typeface="メイリオ" pitchFamily="34" charset="-120"/>
-              </a:rPr>
-              <a:t>▲2.1</a:t>
+                  <a:srgbClr val="1A1A1A"/>
+                </a:solidFill>
+                <a:latin typeface="メイリオ" pitchFamily="34" charset="0"/>
+                <a:ea typeface="メイリオ" pitchFamily="34" charset="-122"/>
+                <a:cs typeface="メイリオ" pitchFamily="34" charset="-120"/>
+              </a:rPr>
+              <a:t>0.8</a:t>
             </a:r>
             <a:endParaRPr lang="en-US" sz="900" dirty="0"/>
           </a:p>
@@ -15119,13 +16130,13 @@
             <a:r>
               <a:rPr lang="en-US" sz="900" b="1" dirty="0">
                 <a:solidFill>
-                  <a:srgbClr val="6E6E6E"/>
-                </a:solidFill>
-                <a:latin typeface="メイリオ" pitchFamily="34" charset="0"/>
-                <a:ea typeface="メイリオ" pitchFamily="34" charset="-122"/>
-                <a:cs typeface="メイリオ" pitchFamily="34" charset="-120"/>
-              </a:rPr>
-              <a:t>▲2.1</a:t>
+                  <a:srgbClr val="1A1A1A"/>
+                </a:solidFill>
+                <a:latin typeface="メイリオ" pitchFamily="34" charset="0"/>
+                <a:ea typeface="メイリオ" pitchFamily="34" charset="-122"/>
+                <a:cs typeface="メイリオ" pitchFamily="34" charset="-120"/>
+              </a:rPr>
+              <a:t>0.8</a:t>
             </a:r>
             <a:endParaRPr lang="en-US" sz="900" dirty="0"/>
           </a:p>
@@ -15164,7 +16175,7 @@
                 <a:ea typeface="メイリオ" pitchFamily="34" charset="-122"/>
                 <a:cs typeface="メイリオ" pitchFamily="34" charset="-120"/>
               </a:rPr>
-              <a:t>▲4.1</a:t>
+              <a:t>▲1.2</a:t>
             </a:r>
             <a:endParaRPr lang="en-US" sz="900" dirty="0"/>
           </a:p>
@@ -15203,7 +16214,7 @@
                 <a:ea typeface="メイリオ" pitchFamily="34" charset="-122"/>
                 <a:cs typeface="メイリオ" pitchFamily="34" charset="-120"/>
               </a:rPr>
-              <a:t>8.9</a:t>
+              <a:t>11.8</a:t>
             </a:r>
             <a:endParaRPr lang="en-US" sz="900" dirty="0"/>
           </a:p>
@@ -15838,7 +16849,7 @@
                 <a:ea typeface="メイリオ" pitchFamily="34" charset="-122"/>
                 <a:cs typeface="メイリオ" pitchFamily="34" charset="-120"/>
               </a:rPr>
-              <a:t>▲4.8</a:t>
+              <a:t>▲1.9</a:t>
             </a:r>
             <a:endParaRPr lang="en-US" sz="900" dirty="0"/>
           </a:p>
@@ -15877,7 +16888,7 @@
                 <a:ea typeface="メイリオ" pitchFamily="34" charset="-122"/>
                 <a:cs typeface="メイリオ" pitchFamily="34" charset="-120"/>
               </a:rPr>
-              <a:t>▲8.8</a:t>
+              <a:t>▲5.9</a:t>
             </a:r>
             <a:endParaRPr lang="en-US" sz="900" dirty="0"/>
           </a:p>
@@ -15916,7 +16927,7 @@
                 <a:ea typeface="メイリオ" pitchFamily="34" charset="-122"/>
                 <a:cs typeface="メイリオ" pitchFamily="34" charset="-120"/>
               </a:rPr>
-              <a:t>▲4.8</a:t>
+              <a:t>▲1.9</a:t>
             </a:r>
             <a:endParaRPr lang="en-US" sz="900" dirty="0"/>
           </a:p>
@@ -15955,7 +16966,7 @@
                 <a:ea typeface="メイリオ" pitchFamily="34" charset="-122"/>
                 <a:cs typeface="メイリオ" pitchFamily="34" charset="-120"/>
               </a:rPr>
-              <a:t>▲4.8</a:t>
+              <a:t>▲1.9</a:t>
             </a:r>
             <a:endParaRPr lang="en-US" sz="900" dirty="0"/>
           </a:p>
@@ -15994,7 +17005,7 @@
                 <a:ea typeface="メイリオ" pitchFamily="34" charset="-122"/>
                 <a:cs typeface="メイリオ" pitchFamily="34" charset="-120"/>
               </a:rPr>
-              <a:t>▲6.8</a:t>
+              <a:t>▲3.9</a:t>
             </a:r>
             <a:endParaRPr lang="en-US" sz="900" dirty="0"/>
           </a:p>
@@ -16033,7 +17044,7 @@
                 <a:ea typeface="メイリオ" pitchFamily="34" charset="-122"/>
                 <a:cs typeface="メイリオ" pitchFamily="34" charset="-120"/>
               </a:rPr>
-              <a:t>28.2</a:t>
+              <a:t>31.1</a:t>
             </a:r>
             <a:endParaRPr lang="en-US" sz="900" dirty="0"/>
           </a:p>
@@ -16072,7 +17083,7 @@
                 <a:ea typeface="メイリオ" pitchFamily="34" charset="-122"/>
                 <a:cs typeface="メイリオ" pitchFamily="34" charset="-120"/>
               </a:rPr>
-              <a:t>▲4.8</a:t>
+              <a:t>▲1.9</a:t>
             </a:r>
             <a:endParaRPr lang="en-US" sz="900" dirty="0"/>
           </a:p>
@@ -16111,7 +17122,7 @@
                 <a:ea typeface="メイリオ" pitchFamily="34" charset="-122"/>
                 <a:cs typeface="メイリオ" pitchFamily="34" charset="-120"/>
               </a:rPr>
-              <a:t>▲6.8</a:t>
+              <a:t>▲3.9</a:t>
             </a:r>
             <a:endParaRPr lang="en-US" sz="900" dirty="0"/>
           </a:p>
@@ -16150,7 +17161,7 @@
                 <a:ea typeface="メイリオ" pitchFamily="34" charset="-122"/>
                 <a:cs typeface="メイリオ" pitchFamily="34" charset="-120"/>
               </a:rPr>
-              <a:t>▲4.8</a:t>
+              <a:t>▲1.9</a:t>
             </a:r>
             <a:endParaRPr lang="en-US" sz="900" dirty="0"/>
           </a:p>
@@ -16189,7 +17200,7 @@
                 <a:ea typeface="メイリオ" pitchFamily="34" charset="-122"/>
                 <a:cs typeface="メイリオ" pitchFamily="34" charset="-120"/>
               </a:rPr>
-              <a:t>▲4.8</a:t>
+              <a:t>▲1.9</a:t>
             </a:r>
             <a:endParaRPr lang="en-US" sz="900" dirty="0"/>
           </a:p>
@@ -16228,7 +17239,7 @@
                 <a:ea typeface="メイリオ" pitchFamily="34" charset="-122"/>
                 <a:cs typeface="メイリオ" pitchFamily="34" charset="-120"/>
               </a:rPr>
-              <a:t>▲6.8</a:t>
+              <a:t>▲3.9</a:t>
             </a:r>
             <a:endParaRPr lang="en-US" sz="900" dirty="0"/>
           </a:p>
@@ -16267,7 +17278,7 @@
                 <a:ea typeface="メイリオ" pitchFamily="34" charset="-122"/>
                 <a:cs typeface="メイリオ" pitchFamily="34" charset="-120"/>
               </a:rPr>
-              <a:t>6.2</a:t>
+              <a:t>9.1</a:t>
             </a:r>
             <a:endParaRPr lang="en-US" sz="900" dirty="0"/>
           </a:p>
@@ -16370,7 +17381,7 @@
                 <a:ea typeface="メイリオ" pitchFamily="34" charset="-122"/>
                 <a:cs typeface="メイリオ" pitchFamily="34" charset="-120"/>
               </a:rPr>
-              <a:t>25.2</a:t>
+              <a:t>28.1</a:t>
             </a:r>
             <a:endParaRPr lang="en-US" sz="900" dirty="0"/>
           </a:p>
@@ -16409,7 +17420,7 @@
                 <a:ea typeface="メイリオ" pitchFamily="34" charset="-122"/>
                 <a:cs typeface="メイリオ" pitchFamily="34" charset="-120"/>
               </a:rPr>
-              <a:t>16.4</a:t>
+              <a:t>22.2</a:t>
             </a:r>
             <a:endParaRPr lang="en-US" sz="900" dirty="0"/>
           </a:p>
@@ -16448,7 +17459,7 @@
                 <a:ea typeface="メイリオ" pitchFamily="34" charset="-122"/>
                 <a:cs typeface="メイリオ" pitchFamily="34" charset="-120"/>
               </a:rPr>
-              <a:t>11.6</a:t>
+              <a:t>20.3</a:t>
             </a:r>
             <a:endParaRPr lang="en-US" sz="900" dirty="0"/>
           </a:p>
@@ -16487,7 +17498,7 @@
                 <a:ea typeface="メイリオ" pitchFamily="34" charset="-122"/>
                 <a:cs typeface="メイリオ" pitchFamily="34" charset="-120"/>
               </a:rPr>
-              <a:t>6.8</a:t>
+              <a:t>18.5</a:t>
             </a:r>
             <a:endParaRPr lang="en-US" sz="900" dirty="0"/>
           </a:p>
@@ -16526,7 +17537,7 @@
                 <a:ea typeface="メイリオ" pitchFamily="34" charset="-122"/>
                 <a:cs typeface="メイリオ" pitchFamily="34" charset="-120"/>
               </a:rPr>
-              <a:t>0.0</a:t>
+              <a:t>14.6</a:t>
             </a:r>
             <a:endParaRPr lang="en-US" sz="900" dirty="0"/>
           </a:p>
@@ -16565,7 +17576,7 @@
                 <a:ea typeface="メイリオ" pitchFamily="34" charset="-122"/>
                 <a:cs typeface="メイリオ" pitchFamily="34" charset="-120"/>
               </a:rPr>
-              <a:t>28.2</a:t>
+              <a:t>45.7</a:t>
             </a:r>
             <a:endParaRPr lang="en-US" sz="900" dirty="0"/>
           </a:p>
@@ -16604,7 +17615,7 @@
                 <a:ea typeface="メイリオ" pitchFamily="34" charset="-122"/>
                 <a:cs typeface="メイリオ" pitchFamily="34" charset="-120"/>
               </a:rPr>
-              <a:t>23.4</a:t>
+              <a:t>43.8</a:t>
             </a:r>
             <a:endParaRPr lang="en-US" sz="900" dirty="0"/>
           </a:p>
@@ -16643,7 +17654,7 @@
                 <a:ea typeface="メイリオ" pitchFamily="34" charset="-122"/>
                 <a:cs typeface="メイリオ" pitchFamily="34" charset="-120"/>
               </a:rPr>
-              <a:t>16.6</a:t>
+              <a:t>39.9</a:t>
             </a:r>
             <a:endParaRPr lang="en-US" sz="900" dirty="0"/>
           </a:p>
@@ -16682,7 +17693,7 @@
                 <a:ea typeface="メイリオ" pitchFamily="34" charset="-122"/>
                 <a:cs typeface="メイリオ" pitchFamily="34" charset="-120"/>
               </a:rPr>
-              <a:t>11.8</a:t>
+              <a:t>38.0</a:t>
             </a:r>
             <a:endParaRPr lang="en-US" sz="900" dirty="0"/>
           </a:p>
@@ -16721,7 +17732,7 @@
                 <a:ea typeface="メイリオ" pitchFamily="34" charset="-122"/>
                 <a:cs typeface="メイリオ" pitchFamily="34" charset="-120"/>
               </a:rPr>
-              <a:t>7.0</a:t>
+              <a:t>36.2</a:t>
             </a:r>
             <a:endParaRPr lang="en-US" sz="900" dirty="0"/>
           </a:p>
@@ -16760,7 +17771,7 @@
                 <a:ea typeface="メイリオ" pitchFamily="34" charset="-122"/>
                 <a:cs typeface="メイリオ" pitchFamily="34" charset="-120"/>
               </a:rPr>
-              <a:t>0.2</a:t>
+              <a:t>32.3</a:t>
             </a:r>
             <a:endParaRPr lang="en-US" sz="900" dirty="0"/>
           </a:p>
@@ -16799,7 +17810,7 @@
                 <a:ea typeface="メイリオ" pitchFamily="34" charset="-122"/>
                 <a:cs typeface="メイリオ" pitchFamily="34" charset="-120"/>
               </a:rPr>
-              <a:t>6.4</a:t>
+              <a:t>41.4</a:t>
             </a:r>
             <a:endParaRPr lang="en-US" sz="900" dirty="0"/>
           </a:p>
@@ -16887,7 +17898,7 @@
         <p:spPr>
           <a:xfrm>
             <a:off x="868680" y="5294376"/>
-            <a:ext cx="4800600" cy="822960"/>
+            <a:ext cx="4800600" cy="868680"/>
           </a:xfrm>
           <a:prstGeom prst="rect">
             <a:avLst/>
@@ -16911,7 +17922,7 @@
                 <a:ea typeface="メイリオ" pitchFamily="34" charset="-122"/>
                 <a:cs typeface="メイリオ" pitchFamily="34" charset="-120"/>
               </a:rPr>
-              <a:t>11月にFY2026分の消費税確定納付3.6百万円、2月に当期の中間納付2.0百万円。売上の回収が進む前に納税が重なる時期で、ここが必要売上高を決めています。</a:t>
+              <a:t>11月にFY2026分の消費税確定納付3.6百万円、2月に当期の中間納付2.0百万円。3月の一時収益44百万円が入るまでが最も薄い期間ですが、最低14.6百万円を確保します。</a:t>
             </a:r>
             <a:endParaRPr lang="en-US" sz="1050" dirty="0"/>
           </a:p>
@@ -17151,7 +18162,7 @@
                 <a:ea typeface="メイリオ" pitchFamily="34" charset="-122"/>
                 <a:cs typeface="メイリオ" pitchFamily="34" charset="-120"/>
               </a:rPr>
-              <a:t>＋6.4</a:t>
+              <a:t>＋41.4</a:t>
             </a:r>
             <a:endParaRPr lang="en-US" sz="850" dirty="0"/>
           </a:p>
@@ -17190,7 +18201,7 @@
                 <a:ea typeface="メイリオ" pitchFamily="34" charset="-122"/>
                 <a:cs typeface="メイリオ" pitchFamily="34" charset="-120"/>
               </a:rPr>
-              <a:t>0.0</a:t>
+              <a:t>＋14.6</a:t>
             </a:r>
             <a:endParaRPr lang="en-US" sz="850" dirty="0"/>
           </a:p>
@@ -17254,7 +18265,7 @@
                 <a:ea typeface="メイリオ" pitchFamily="34" charset="-122"/>
                 <a:cs typeface="メイリオ" pitchFamily="34" charset="-120"/>
               </a:rPr>
-              <a:t>B. 仕入を在庫横ばいにした場合</a:t>
+              <a:t>B. 仕入を売上原価に連動</a:t>
             </a:r>
             <a:endParaRPr lang="en-US" sz="850" dirty="0"/>
           </a:p>
@@ -17293,7 +18304,7 @@
                 <a:ea typeface="メイリオ" pitchFamily="34" charset="-122"/>
                 <a:cs typeface="メイリオ" pitchFamily="34" charset="-120"/>
               </a:rPr>
-              <a:t>＋165.6</a:t>
+              <a:t>＋38.6</a:t>
             </a:r>
             <a:endParaRPr lang="en-US" sz="850" dirty="0"/>
           </a:p>
@@ -17332,7 +18343,7 @@
                 <a:ea typeface="メイリオ" pitchFamily="34" charset="-122"/>
                 <a:cs typeface="メイリオ" pitchFamily="34" charset="-120"/>
               </a:rPr>
-              <a:t>＋159.2</a:t>
+              <a:t>＋11.8</a:t>
             </a:r>
             <a:endParaRPr lang="en-US" sz="850" dirty="0"/>
           </a:p>
@@ -17435,7 +18446,7 @@
                 <a:ea typeface="メイリオ" pitchFamily="34" charset="-122"/>
                 <a:cs typeface="メイリオ" pitchFamily="34" charset="-120"/>
               </a:rPr>
-              <a:t>▲37.6</a:t>
+              <a:t>▲2.6</a:t>
             </a:r>
             <a:endParaRPr lang="en-US" sz="850" dirty="0"/>
           </a:p>
@@ -17474,7 +18485,7 @@
                 <a:ea typeface="メイリオ" pitchFamily="34" charset="-122"/>
                 <a:cs typeface="メイリオ" pitchFamily="34" charset="-120"/>
               </a:rPr>
-              <a:t>▲44.0</a:t>
+              <a:t>▲29.4</a:t>
             </a:r>
             <a:endParaRPr lang="en-US" sz="850" dirty="0"/>
           </a:p>
@@ -17538,7 +18549,7 @@
                 <a:ea typeface="メイリオ" pitchFamily="34" charset="-122"/>
                 <a:cs typeface="メイリオ" pitchFamily="34" charset="-120"/>
               </a:rPr>
-              <a:t>D. 追加売上が未達</a:t>
+              <a:t>D. 売上が前期・今期並みに届かない</a:t>
             </a:r>
             <a:endParaRPr lang="en-US" sz="850" dirty="0"/>
           </a:p>
@@ -17577,7 +18588,7 @@
                 <a:ea typeface="メイリオ" pitchFamily="34" charset="-122"/>
                 <a:cs typeface="メイリオ" pitchFamily="34" charset="-120"/>
               </a:rPr>
-              <a:t>▲188.4</a:t>
+              <a:t>▲153.4</a:t>
             </a:r>
             <a:endParaRPr lang="en-US" sz="850" dirty="0"/>
           </a:p>
@@ -17616,7 +18627,7 @@
                 <a:ea typeface="メイリオ" pitchFamily="34" charset="-122"/>
                 <a:cs typeface="メイリオ" pitchFamily="34" charset="-120"/>
               </a:rPr>
-              <a:t>▲194.8</a:t>
+              <a:t>▲180.2</a:t>
             </a:r>
             <a:endParaRPr lang="en-US" sz="850" dirty="0"/>
           </a:p>
@@ -19879,7 +20890,7 @@
                 <a:ea typeface="メイリオ" pitchFamily="34" charset="-122"/>
                 <a:cs typeface="メイリオ" pitchFamily="34" charset="-120"/>
               </a:rPr>
-              <a:t>必要売上566.2百万円は、直近2期の実績をいずれも下回る水準です。</a:t>
+              <a:t>売上は前期・今期と同水準。上振れを織り込まず、粗利率も過去実績の平均に落としています。</a:t>
             </a:r>
             <a:endParaRPr lang="en-US" sz="1250" dirty="0"/>
           </a:p>
@@ -20534,7 +21545,7 @@
                 <a:ea typeface="メイリオ" pitchFamily="34" charset="-122"/>
                 <a:cs typeface="メイリオ" pitchFamily="34" charset="-120"/>
               </a:rPr>
-              <a:t>75.2%</a:t>
+              <a:t>97.0%</a:t>
             </a:r>
             <a:endParaRPr lang="en-US" sz="1050" dirty="0"/>
           </a:p>
@@ -20754,7 +21765,7 @@
                 <a:ea typeface="メイリオ" pitchFamily="34" charset="-122"/>
                 <a:cs typeface="メイリオ" pitchFamily="34" charset="-120"/>
               </a:rPr>
-              <a:t>80.0%</a:t>
+              <a:t>103.2%</a:t>
             </a:r>
             <a:endParaRPr lang="en-US" sz="1050" dirty="0"/>
           </a:p>
@@ -20857,7 +21868,7 @@
                 <a:ea typeface="メイリオ" pitchFamily="34" charset="-122"/>
                 <a:cs typeface="メイリオ" pitchFamily="34" charset="-120"/>
               </a:rPr>
-              <a:t>566.2</a:t>
+              <a:t>730.5</a:t>
             </a:r>
             <a:endParaRPr lang="en-US" sz="1050" dirty="0"/>
           </a:p>
@@ -20896,7 +21907,7 @@
                 <a:ea typeface="メイリオ" pitchFamily="34" charset="-122"/>
                 <a:cs typeface="メイリオ" pitchFamily="34" charset="-120"/>
               </a:rPr>
-              <a:t>291.9</a:t>
+              <a:t>308.9</a:t>
             </a:r>
             <a:endParaRPr lang="en-US" sz="1050" dirty="0"/>
           </a:p>
@@ -20935,7 +21946,7 @@
                 <a:ea typeface="メイリオ" pitchFamily="34" charset="-122"/>
                 <a:cs typeface="メイリオ" pitchFamily="34" charset="-120"/>
               </a:rPr>
-              <a:t>51.5%</a:t>
+              <a:t>42.3%</a:t>
             </a:r>
             <a:endParaRPr lang="en-US" sz="1050" dirty="0"/>
           </a:p>
@@ -20974,7 +21985,7 @@
                 <a:ea typeface="メイリオ" pitchFamily="34" charset="-122"/>
                 <a:cs typeface="メイリオ" pitchFamily="34" charset="-120"/>
               </a:rPr>
-              <a:t>－</a:t>
+              <a:t>100.3%</a:t>
             </a:r>
             <a:endParaRPr lang="en-US" sz="1050" dirty="0"/>
           </a:p>
@@ -21041,13 +22052,13 @@
             <a:r>
               <a:rPr lang="en-US" sz="1200" b="1" dirty="0">
                 <a:solidFill>
-                  <a:srgbClr val="FAF3E2"/>
-                </a:solidFill>
-                <a:latin typeface="メイリオ" pitchFamily="34" charset="0"/>
-                <a:ea typeface="メイリオ" pitchFamily="34" charset="-122"/>
-                <a:cs typeface="メイリオ" pitchFamily="34" charset="-120"/>
-              </a:rPr>
-              <a:t>売上のハードルは低い</a:t>
+                  <a:srgbClr val="A98442"/>
+                </a:solidFill>
+                <a:latin typeface="メイリオ" pitchFamily="34" charset="0"/>
+                <a:ea typeface="メイリオ" pitchFamily="34" charset="-122"/>
+                <a:cs typeface="メイリオ" pitchFamily="34" charset="-120"/>
+              </a:rPr>
+              <a:t>売上は過去2期と同水準</a:t>
             </a:r>
             <a:endParaRPr lang="en-US" sz="1200" dirty="0"/>
           </a:p>
@@ -21086,7 +22097,7 @@
                 <a:ea typeface="メイリオ" pitchFamily="34" charset="-122"/>
                 <a:cs typeface="メイリオ" pitchFamily="34" charset="-120"/>
               </a:rPr>
-              <a:t>プランDの566.2百万円は、FY2025実績の75.2%、FY2026見込の80.0%。2期平均730.5百万円に対しては77.5%です。過去に到達した売上規模を下回ります。</a:t>
+              <a:t>プランDの730.5百万円は、FY2025実績752.9とFY2026見込708.2のちょうど平均。新たな成長を前提にせず、過去2期に到達した売上規模をそのまま置いています。</a:t>
             </a:r>
             <a:endParaRPr lang="en-US" sz="1100" dirty="0"/>
           </a:p>
@@ -21159,7 +22170,7 @@
                 <a:ea typeface="メイリオ" pitchFamily="34" charset="-122"/>
                 <a:cs typeface="メイリオ" pitchFamily="34" charset="-120"/>
               </a:rPr>
-              <a:t>鍵は粗利率の構造変化</a:t>
+              <a:t>粗利率は保守的に据え置き</a:t>
             </a:r>
             <a:endParaRPr lang="en-US" sz="1200" dirty="0"/>
           </a:p>
@@ -21198,7 +22209,7 @@
                 <a:ea typeface="メイリオ" pitchFamily="34" charset="-122"/>
                 <a:cs typeface="メイリオ" pitchFamily="34" charset="-120"/>
               </a:rPr>
-              <a:t>低採算の飲食が抜けたことで、粗利率は26.8%（FY2025）→32.4%（FY2026）→51.5%（撤退後実績）へ改善。同じ売上でも残る利益が大きく変わります。</a:t>
+              <a:t>既存事業は29.5%（FY2025・FY2026の加重平均）に据え置き。4-6月実績の51.5%は使いません。総合42.3%になるのは上乗せ案件132.5百万円が原価なしのためです。</a:t>
             </a:r>
             <a:endParaRPr lang="en-US" sz="1100" dirty="0"/>
           </a:p>
@@ -21271,7 +22282,7 @@
                 <a:ea typeface="メイリオ" pitchFamily="34" charset="-122"/>
                 <a:cs typeface="メイリオ" pitchFamily="34" charset="-120"/>
               </a:rPr>
-              <a:t>過去2期の売上水準（708〜753百万円）を撤退後の粗利率で回した場合、経常利益は182〜205百万円。プランDの109.2百万円は上振れ余地を残した保守的な計画です。</a:t>
+              <a:t>既存事業の粗利率が4-6月実績の51.5%まで戻れば、同じ売上730.5百万円で経常利益は約185百万円。プランDはその上振れを一切織り込んでいません。</a:t>
             </a:r>
             <a:endParaRPr lang="en-US" sz="1200" dirty="0"/>
           </a:p>
@@ -21310,7 +22321,7 @@
                 <a:ea typeface="メイリオ" pitchFamily="34" charset="-122"/>
                 <a:cs typeface="メイリオ" pitchFamily="34" charset="-120"/>
               </a:rPr>
-              <a:t>事業粗利＝売上総利益から上乗せ案件132.5百万円を除いた本業ベース。粗利率51.5%は2026年4-6月実績。出典：事業計画202608（銀行様）、決算報告書 第54期。</a:t>
+              <a:t>プランDの事業粗利308.9百万円＝既存事業176.4（粗利率29.5%）＋上乗せ案件132.5（原価なし）。出典：事業計画202608（銀行様）、決算報告書 第54期。</a:t>
             </a:r>
             <a:endParaRPr lang="en-US" sz="850" dirty="0"/>
           </a:p>
@@ -21930,7 +22941,7 @@
                 <a:ea typeface="メイリオ" pitchFamily="34" charset="-122"/>
                 <a:cs typeface="メイリオ" pitchFamily="34" charset="-120"/>
               </a:rPr>
-              <a:t>必要売上566.2百万円は過去2期を下回る</a:t>
+              <a:t>売上は過去2期と同水準・粗利率は保守</a:t>
             </a:r>
             <a:endParaRPr lang="en-US" sz="1550" dirty="0"/>
           </a:p>
@@ -21969,7 +22980,7 @@
                 <a:ea typeface="メイリオ" pitchFamily="34" charset="-122"/>
                 <a:cs typeface="メイリオ" pitchFamily="34" charset="-120"/>
               </a:rPr>
-              <a:t>FY2025の75.2%、FY2026見込の80.0%。経常利益109.2百万円は保守的な計画です。</a:t>
+              <a:t>売上730.5百万円は2期平均そのもの。粗利率29.5%も過去2期の加重平均です。</a:t>
             </a:r>
             <a:endParaRPr lang="en-US" sz="1150" dirty="0"/>
           </a:p>
@@ -22942,7 +23953,7 @@
                 <a:ea typeface="メイリオ" pitchFamily="34" charset="-122"/>
                 <a:cs typeface="メイリオ" pitchFamily="34" charset="-120"/>
               </a:rPr>
-              <a:t>ワイン仕入は落とさない</a:t>
+              <a:t>粗利率は保守的に置いた</a:t>
             </a:r>
             <a:endParaRPr lang="en-US" sz="1450" dirty="0"/>
           </a:p>
@@ -22981,7 +23992,7 @@
                 <a:ea typeface="メイリオ" pitchFamily="34" charset="-122"/>
                 <a:cs typeface="メイリオ" pitchFamily="34" charset="-120"/>
               </a:rPr>
-              <a:t>仕入を絞ると割当が戻らず2〜3年先の成長を削るため。</a:t>
+              <a:t>既存事業29.5%（過去2期の加重平均）。4-6月実績の51.5%は使いません。</a:t>
             </a:r>
             <a:endParaRPr lang="en-US" sz="1100" dirty="0"/>
           </a:p>
@@ -23048,13 +24059,13 @@
             <a:r>
               <a:rPr lang="en-US" sz="1100" dirty="0">
                 <a:solidFill>
-                  <a:srgbClr val="FAF3E2"/>
-                </a:solidFill>
-                <a:latin typeface="メイリオ" pitchFamily="34" charset="0"/>
-                <a:ea typeface="メイリオ" pitchFamily="34" charset="-122"/>
-                <a:cs typeface="メイリオ" pitchFamily="34" charset="-120"/>
-              </a:rPr>
-              <a:t>FY2027 経常利益（Dプラン）</a:t>
+                  <a:srgbClr val="D9D7D2"/>
+                </a:solidFill>
+                <a:latin typeface="メイリオ" pitchFamily="34" charset="0"/>
+                <a:ea typeface="メイリオ" pitchFamily="34" charset="-122"/>
+                <a:cs typeface="メイリオ" pitchFamily="34" charset="-120"/>
+              </a:rPr>
+              <a:t>FY2027 営業利益（プランD）</a:t>
             </a:r>
             <a:endParaRPr lang="en-US" sz="1100" dirty="0"/>
           </a:p>
@@ -23093,7 +24104,7 @@
                 <a:ea typeface="メイリオ" pitchFamily="34" charset="-122"/>
                 <a:cs typeface="メイリオ" pitchFamily="34" charset="-120"/>
               </a:rPr>
-              <a:t>＋109.2</a:t>
+              <a:t>＋8.8</a:t>
             </a:r>
             <a:endParaRPr lang="en-US" sz="4200" dirty="0"/>
           </a:p>
@@ -23126,7 +24137,7 @@
             <a:r>
               <a:rPr lang="en-US" sz="1100" dirty="0">
                 <a:solidFill>
-                  <a:srgbClr val="FAF3E2"/>
+                  <a:srgbClr val="D9D7D2"/>
                 </a:solidFill>
                 <a:latin typeface="メイリオ" pitchFamily="34" charset="0"/>
                 <a:ea typeface="メイリオ" pitchFamily="34" charset="-122"/>
@@ -23171,7 +24182,7 @@
                 <a:ea typeface="メイリオ" pitchFamily="34" charset="-122"/>
                 <a:cs typeface="メイリオ" pitchFamily="34" charset="-120"/>
               </a:rPr>
-              <a:t>FY2026 ▲124.8百万円から</a:t>
+              <a:t>粗利率を保守的に置いても</a:t>
             </a:r>
             <a:endParaRPr lang="en-US" sz="1150" dirty="0"/>
           </a:p>
@@ -23188,7 +24199,7 @@
                 <a:ea typeface="メイリオ" pitchFamily="34" charset="-122"/>
                 <a:cs typeface="メイリオ" pitchFamily="34" charset="-120"/>
               </a:rPr>
-              <a:t>＋234.0百万円の改善</a:t>
+              <a:t>営業損益は黒字転換します</a:t>
             </a:r>
             <a:endParaRPr lang="en-US" sz="1150" dirty="0"/>
           </a:p>
@@ -23244,13 +24255,13 @@
             <a:r>
               <a:rPr lang="en-US" sz="1100" dirty="0">
                 <a:solidFill>
-                  <a:srgbClr val="FAF3E2"/>
-                </a:solidFill>
-                <a:latin typeface="メイリオ" pitchFamily="34" charset="0"/>
-                <a:ea typeface="メイリオ" pitchFamily="34" charset="-122"/>
-                <a:cs typeface="メイリオ" pitchFamily="34" charset="-120"/>
-              </a:rPr>
-              <a:t>必要な売上高</a:t>
+                  <a:srgbClr val="D9D7D2"/>
+                </a:solidFill>
+                <a:latin typeface="メイリオ" pitchFamily="34" charset="0"/>
+                <a:ea typeface="メイリオ" pitchFamily="34" charset="-122"/>
+                <a:cs typeface="メイリオ" pitchFamily="34" charset="-120"/>
+              </a:rPr>
+              <a:t>期中 最低現預金</a:t>
             </a:r>
             <a:endParaRPr lang="en-US" sz="1100" dirty="0"/>
           </a:p>
@@ -23281,17 +24292,17 @@
               <a:buNone/>
             </a:pPr>
             <a:r>
-              <a:rPr lang="en-US" sz="2800" b="1" dirty="0">
-                <a:solidFill>
-                  <a:srgbClr val="FAF3E2"/>
-                </a:solidFill>
-                <a:latin typeface="メイリオ" pitchFamily="34" charset="0"/>
-                <a:ea typeface="メイリオ" pitchFamily="34" charset="-122"/>
-                <a:cs typeface="メイリオ" pitchFamily="34" charset="-120"/>
-              </a:rPr>
-              <a:t>566.2百万円</a:t>
-            </a:r>
-            <a:endParaRPr lang="en-US" sz="2800" dirty="0"/>
+              <a:rPr lang="en-US" sz="2600" b="1" dirty="0">
+                <a:solidFill>
+                  <a:srgbClr val="A98442"/>
+                </a:solidFill>
+                <a:latin typeface="メイリオ" pitchFamily="34" charset="0"/>
+                <a:ea typeface="メイリオ" pitchFamily="34" charset="-122"/>
+                <a:cs typeface="メイリオ" pitchFamily="34" charset="-120"/>
+              </a:rPr>
+              <a:t>＋14.6百万円</a:t>
+            </a:r>
+            <a:endParaRPr lang="en-US" sz="2600" dirty="0"/>
           </a:p>
         </p:txBody>
       </p:sp>
@@ -23328,7 +24339,7 @@
                 <a:ea typeface="メイリオ" pitchFamily="34" charset="-122"/>
                 <a:cs typeface="メイリオ" pitchFamily="34" charset="-120"/>
               </a:rPr>
-              <a:t>FY2025実績752.9百万円の75.2%</a:t>
+              <a:t>売上730.5百万円（前期・今期並み）</a:t>
             </a:r>
             <a:endParaRPr lang="en-US" sz="1100" dirty="0"/>
           </a:p>
@@ -23345,7 +24356,7 @@
                 <a:ea typeface="メイリオ" pitchFamily="34" charset="-122"/>
                 <a:cs typeface="メイリオ" pitchFamily="34" charset="-120"/>
               </a:rPr>
-              <a:t>FY2026見込708.2百万円の80.0%</a:t>
+              <a:t>ワイン仕入419.1百万円を維持</a:t>
             </a:r>
             <a:endParaRPr lang="en-US" sz="1100" dirty="0"/>
           </a:p>

--- a/out/WineBank_FY2027_銀行提出.pptx
+++ b/out/WineBank_FY2027_銀行提出.pptx
@@ -1161,7 +1161,7 @@
           <a:p>
             <a:r>
               <a:rPr lang="en-US" dirty="0"/>
-              <a:t>通常月は経常▲3.9百万円だが、3月にM&amp;A仲介と新規クルーザー事業30百万円が乗り通期はほぼ均衡。減価償却43.7百万円があるため資金は回る。</a:t>
+              <a:t>通常月は経常＋3.4百万円。3月にM&amp;A仲介と新規クルーザー事業30百万円が乗る。通期経常＋80.6百万円。</a:t>
             </a:r>
             <a:endParaRPr lang="en-US" dirty="0"/>
           </a:p>
@@ -1513,7 +1513,7 @@
           <a:p>
             <a:r>
               <a:rPr lang="en-US" dirty="0"/>
-              <a:t>売上7億円は過去2期の実績値。プランDはそれを下回る6.2億円で成立する。粗利率改善の分だけ上振れ余地がある。</a:t>
+              <a:t>売上7億円は過去2期の実績値。プランCはそれを下回る6.2億円で成立する。粗利率改善の分だけ上振れ余地がある。</a:t>
             </a:r>
             <a:endParaRPr lang="en-US" dirty="0"/>
           </a:p>
@@ -1689,7 +1689,7 @@
           <a:p>
             <a:r>
               <a:rPr lang="en-US" dirty="0"/>
-              <a:t>プランDは売上を前期・今期並みに置き、粗利率を保守的に落とした前提。営業＋8.8百万円、経常▲6.2百万円だが、減価償却43.7百万円があるため資金は回る。</a:t>
+              <a:t>プランCはBに、前期・今期の売上平均730.5百万円までの差額208.9百万円を粗利率30%で加算したもの。営業＋95.6百万円、経常＋80.6百万円。</a:t>
             </a:r>
             <a:endParaRPr lang="en-US" dirty="0"/>
           </a:p>
@@ -3017,7 +3017,7 @@
                 <a:ea typeface="メイリオ" pitchFamily="34" charset="-122"/>
                 <a:cs typeface="メイリオ" pitchFamily="34" charset="-120"/>
               </a:rPr>
-              <a:t>4つのプラン － Dを本線とします</a:t>
+              <a:t>3つのプラン － Cを本線とします</a:t>
             </a:r>
             <a:endParaRPr lang="en-US" sz="2900" dirty="0"/>
           </a:p>
@@ -3056,7 +3056,7 @@
                 <a:ea typeface="メイリオ" pitchFamily="34" charset="-122"/>
                 <a:cs typeface="メイリオ" pitchFamily="34" charset="-120"/>
               </a:rPr>
-              <a:t>売上は前期・今期並み、粗利率は保守的。上振れを織り込まない前提で組み立てています。</a:t>
+              <a:t>Bに、前期・今期の売上平均までの差額を粗利率30%で加算したものがCです。</a:t>
             </a:r>
             <a:endParaRPr lang="en-US" sz="1250" dirty="0"/>
           </a:p>
@@ -3071,7 +3071,7 @@
         <p:spPr>
           <a:xfrm>
             <a:off x="594360" y="1517904"/>
-            <a:ext cx="10789920" cy="384048"/>
+            <a:ext cx="10972800" cy="384048"/>
           </a:xfrm>
           <a:prstGeom prst="rect">
             <a:avLst/>
@@ -3091,7 +3091,7 @@
         <p:spPr>
           <a:xfrm>
             <a:off x="704088" y="1517904"/>
-            <a:ext cx="2615184" cy="384048"/>
+            <a:ext cx="3803904" cy="384048"/>
           </a:xfrm>
           <a:prstGeom prst="rect">
             <a:avLst/>
@@ -3129,8 +3129,8 @@
         </p:nvSpPr>
         <p:spPr>
           <a:xfrm>
-            <a:off x="3538728" y="1517904"/>
-            <a:ext cx="1746504" cy="384048"/>
+            <a:off x="4727448" y="1517904"/>
+            <a:ext cx="2066544" cy="384048"/>
           </a:xfrm>
           <a:prstGeom prst="rect">
             <a:avLst/>
@@ -3168,8 +3168,8 @@
         </p:nvSpPr>
         <p:spPr>
           <a:xfrm>
-            <a:off x="5504688" y="1517904"/>
-            <a:ext cx="1746504" cy="384048"/>
+            <a:off x="7013448" y="1517904"/>
+            <a:ext cx="2112264" cy="384048"/>
           </a:xfrm>
           <a:prstGeom prst="rect">
             <a:avLst/>
@@ -3207,8 +3207,8 @@
         </p:nvSpPr>
         <p:spPr>
           <a:xfrm>
-            <a:off x="7470648" y="1517904"/>
-            <a:ext cx="1746504" cy="384048"/>
+            <a:off x="9345168" y="1517904"/>
+            <a:ext cx="2112264" cy="384048"/>
           </a:xfrm>
           <a:prstGeom prst="rect">
             <a:avLst/>
@@ -3232,7 +3232,7 @@
                 <a:ea typeface="メイリオ" pitchFamily="34" charset="-122"/>
                 <a:cs typeface="メイリオ" pitchFamily="34" charset="-120"/>
               </a:rPr>
-              <a:t>C. 経常利益1億円</a:t>
+              <a:t>C. B＋差額売上（粗利率30%）</a:t>
             </a:r>
             <a:endParaRPr lang="en-US" sz="900" dirty="0"/>
           </a:p>
@@ -3240,53 +3240,14 @@
       </p:sp>
       <p:sp>
         <p:nvSpPr>
-          <p:cNvPr id="9" name="Text 7"/>
-          <p:cNvSpPr/>
-          <p:nvPr/>
-        </p:nvSpPr>
-        <p:spPr>
-          <a:xfrm>
-            <a:off x="9436608" y="1517904"/>
-            <a:ext cx="1837944" cy="384048"/>
-          </a:xfrm>
-          <a:prstGeom prst="rect">
-            <a:avLst/>
-          </a:prstGeom>
-          <a:noFill/>
-          <a:ln/>
-        </p:spPr>
-        <p:txBody>
-          <a:bodyPr wrap="square" lIns="0" tIns="0" rIns="0" bIns="0" rtlCol="0" anchor="ctr"/>
-          <a:lstStyle/>
-          <a:p>
-            <a:pPr algn="r" indent="0" marL="0">
-              <a:buNone/>
-            </a:pPr>
-            <a:r>
-              <a:rPr lang="en-US" sz="900" b="1" dirty="0">
-                <a:solidFill>
-                  <a:srgbClr val="FFFFFF"/>
-                </a:solidFill>
-                <a:latin typeface="メイリオ" pitchFamily="34" charset="0"/>
-                <a:ea typeface="メイリオ" pitchFamily="34" charset="-122"/>
-                <a:cs typeface="メイリオ" pitchFamily="34" charset="-120"/>
-              </a:rPr>
-              <a:t>D. 保守シナリオ</a:t>
-            </a:r>
-            <a:endParaRPr lang="en-US" sz="900" dirty="0"/>
-          </a:p>
-        </p:txBody>
-      </p:sp>
-      <p:sp>
-        <p:nvSpPr>
-          <p:cNvPr id="10" name="Shape 8"/>
+          <p:cNvPr id="9" name="Shape 7"/>
           <p:cNvSpPr/>
           <p:nvPr/>
         </p:nvSpPr>
         <p:spPr>
           <a:xfrm>
             <a:off x="594360" y="1901952"/>
-            <a:ext cx="10789920" cy="365760"/>
+            <a:ext cx="10972800" cy="338328"/>
           </a:xfrm>
           <a:prstGeom prst="rect">
             <a:avLst/>
@@ -3304,26 +3265,65 @@
       </p:sp>
       <p:sp>
         <p:nvSpPr>
+          <p:cNvPr id="10" name="Text 8"/>
+          <p:cNvSpPr/>
+          <p:nvPr/>
+        </p:nvSpPr>
+        <p:spPr>
+          <a:xfrm>
+            <a:off x="704088" y="1901952"/>
+            <a:ext cx="3803904" cy="338328"/>
+          </a:xfrm>
+          <a:prstGeom prst="rect">
+            <a:avLst/>
+          </a:prstGeom>
+          <a:noFill/>
+          <a:ln/>
+        </p:spPr>
+        <p:txBody>
+          <a:bodyPr wrap="square" lIns="0" tIns="0" rIns="0" bIns="0" rtlCol="0" anchor="ctr"/>
+          <a:lstStyle/>
+          <a:p>
+            <a:pPr algn="l" indent="0" marL="0">
+              <a:buNone/>
+            </a:pPr>
+            <a:r>
+              <a:rPr lang="en-US" sz="1050" dirty="0">
+                <a:solidFill>
+                  <a:srgbClr val="1A1A1A"/>
+                </a:solidFill>
+                <a:latin typeface="メイリオ" pitchFamily="34" charset="0"/>
+                <a:ea typeface="メイリオ" pitchFamily="34" charset="-122"/>
+                <a:cs typeface="メイリオ" pitchFamily="34" charset="-120"/>
+              </a:rPr>
+              <a:t>売上高（上乗せ含む）</a:t>
+            </a:r>
+            <a:endParaRPr lang="en-US" sz="1050" dirty="0"/>
+          </a:p>
+        </p:txBody>
+      </p:sp>
+      <p:sp>
+        <p:nvSpPr>
           <p:cNvPr id="11" name="Text 9"/>
           <p:cNvSpPr/>
           <p:nvPr/>
         </p:nvSpPr>
         <p:spPr>
           <a:xfrm>
-            <a:off x="704088" y="1901952"/>
-            <a:ext cx="2615184" cy="365760"/>
-          </a:xfrm>
-          <a:prstGeom prst="rect">
-            <a:avLst/>
-          </a:prstGeom>
-          <a:noFill/>
-          <a:ln/>
-        </p:spPr>
-        <p:txBody>
-          <a:bodyPr wrap="square" lIns="0" tIns="0" rIns="0" bIns="0" rtlCol="0" anchor="ctr"/>
-          <a:lstStyle/>
-          <a:p>
-            <a:pPr algn="l" indent="0" marL="0">
+            <a:off x="4727448" y="1901952"/>
+            <a:ext cx="2066544" cy="338328"/>
+          </a:xfrm>
+          <a:prstGeom prst="rect">
+            <a:avLst/>
+          </a:prstGeom>
+          <a:noFill/>
+          <a:ln/>
+        </p:spPr>
+        <p:txBody>
+          <a:bodyPr wrap="square" lIns="0" tIns="0" rIns="0" bIns="0" rtlCol="0" anchor="ctr"/>
+          <a:lstStyle/>
+          <a:p>
+            <a:pPr algn="r" indent="0" marL="0">
               <a:buNone/>
             </a:pPr>
             <a:r>
@@ -3335,7 +3335,7 @@
                 <a:ea typeface="メイリオ" pitchFamily="34" charset="-122"/>
                 <a:cs typeface="メイリオ" pitchFamily="34" charset="-120"/>
               </a:rPr>
-              <a:t>売上高（上乗せ含む）</a:t>
+              <a:t>389.1</a:t>
             </a:r>
             <a:endParaRPr lang="en-US" sz="1050" dirty="0"/>
           </a:p>
@@ -3349,8 +3349,8 @@
         </p:nvSpPr>
         <p:spPr>
           <a:xfrm>
-            <a:off x="3538728" y="1901952"/>
-            <a:ext cx="1746504" cy="365760"/>
+            <a:off x="7013448" y="1901952"/>
+            <a:ext cx="2112264" cy="338328"/>
           </a:xfrm>
           <a:prstGeom prst="rect">
             <a:avLst/>
@@ -3374,7 +3374,7 @@
                 <a:ea typeface="メイリオ" pitchFamily="34" charset="-122"/>
                 <a:cs typeface="メイリオ" pitchFamily="34" charset="-120"/>
               </a:rPr>
-              <a:t>389.1</a:t>
+              <a:t>521.6</a:t>
             </a:r>
             <a:endParaRPr lang="en-US" sz="1050" dirty="0"/>
           </a:p>
@@ -3388,8 +3388,8 @@
         </p:nvSpPr>
         <p:spPr>
           <a:xfrm>
-            <a:off x="5504688" y="1901952"/>
-            <a:ext cx="1746504" cy="365760"/>
+            <a:off x="9345168" y="1901952"/>
+            <a:ext cx="2112264" cy="338328"/>
           </a:xfrm>
           <a:prstGeom prst="rect">
             <a:avLst/>
@@ -3413,7 +3413,7 @@
                 <a:ea typeface="メイリオ" pitchFamily="34" charset="-122"/>
                 <a:cs typeface="メイリオ" pitchFamily="34" charset="-120"/>
               </a:rPr>
-              <a:t>521.6</a:t>
+              <a:t>730.5</a:t>
             </a:r>
             <a:endParaRPr lang="en-US" sz="1050" dirty="0"/>
           </a:p>
@@ -3421,92 +3421,14 @@
       </p:sp>
       <p:sp>
         <p:nvSpPr>
-          <p:cNvPr id="14" name="Text 12"/>
-          <p:cNvSpPr/>
-          <p:nvPr/>
-        </p:nvSpPr>
-        <p:spPr>
-          <a:xfrm>
-            <a:off x="7470648" y="1901952"/>
-            <a:ext cx="1746504" cy="365760"/>
-          </a:xfrm>
-          <a:prstGeom prst="rect">
-            <a:avLst/>
-          </a:prstGeom>
-          <a:noFill/>
-          <a:ln/>
-        </p:spPr>
-        <p:txBody>
-          <a:bodyPr wrap="square" lIns="0" tIns="0" rIns="0" bIns="0" rtlCol="0" anchor="ctr"/>
-          <a:lstStyle/>
-          <a:p>
-            <a:pPr algn="r" indent="0" marL="0">
-              <a:buNone/>
-            </a:pPr>
-            <a:r>
-              <a:rPr lang="en-US" sz="1050" dirty="0">
-                <a:solidFill>
-                  <a:srgbClr val="1A1A1A"/>
-                </a:solidFill>
-                <a:latin typeface="メイリオ" pitchFamily="34" charset="0"/>
-                <a:ea typeface="メイリオ" pitchFamily="34" charset="-122"/>
-                <a:cs typeface="メイリオ" pitchFamily="34" charset="-120"/>
-              </a:rPr>
-              <a:t>680.8</a:t>
-            </a:r>
-            <a:endParaRPr lang="en-US" sz="1050" dirty="0"/>
-          </a:p>
-        </p:txBody>
-      </p:sp>
-      <p:sp>
-        <p:nvSpPr>
-          <p:cNvPr id="15" name="Text 13"/>
-          <p:cNvSpPr/>
-          <p:nvPr/>
-        </p:nvSpPr>
-        <p:spPr>
-          <a:xfrm>
-            <a:off x="9436608" y="1901952"/>
-            <a:ext cx="1837944" cy="365760"/>
-          </a:xfrm>
-          <a:prstGeom prst="rect">
-            <a:avLst/>
-          </a:prstGeom>
-          <a:noFill/>
-          <a:ln/>
-        </p:spPr>
-        <p:txBody>
-          <a:bodyPr wrap="square" lIns="0" tIns="0" rIns="0" bIns="0" rtlCol="0" anchor="ctr"/>
-          <a:lstStyle/>
-          <a:p>
-            <a:pPr algn="r" indent="0" marL="0">
-              <a:buNone/>
-            </a:pPr>
-            <a:r>
-              <a:rPr lang="en-US" sz="1050" dirty="0">
-                <a:solidFill>
-                  <a:srgbClr val="1A1A1A"/>
-                </a:solidFill>
-                <a:latin typeface="メイリオ" pitchFamily="34" charset="0"/>
-                <a:ea typeface="メイリオ" pitchFamily="34" charset="-122"/>
-                <a:cs typeface="メイリオ" pitchFamily="34" charset="-120"/>
-              </a:rPr>
-              <a:t>730.5</a:t>
-            </a:r>
-            <a:endParaRPr lang="en-US" sz="1050" dirty="0"/>
-          </a:p>
-        </p:txBody>
-      </p:sp>
-      <p:sp>
-        <p:nvSpPr>
-          <p:cNvPr id="16" name="Shape 14"/>
-          <p:cNvSpPr/>
-          <p:nvPr/>
-        </p:nvSpPr>
-        <p:spPr>
-          <a:xfrm>
-            <a:off x="594360" y="2267712"/>
-            <a:ext cx="10789920" cy="365760"/>
+          <p:cNvPr id="14" name="Shape 12"/>
+          <p:cNvSpPr/>
+          <p:nvPr/>
+        </p:nvSpPr>
+        <p:spPr>
+          <a:xfrm>
+            <a:off x="594360" y="2240280"/>
+            <a:ext cx="10972800" cy="338328"/>
           </a:xfrm>
           <a:prstGeom prst="rect">
             <a:avLst/>
@@ -3524,26 +3446,104 @@
       </p:sp>
       <p:sp>
         <p:nvSpPr>
+          <p:cNvPr id="15" name="Text 13"/>
+          <p:cNvSpPr/>
+          <p:nvPr/>
+        </p:nvSpPr>
+        <p:spPr>
+          <a:xfrm>
+            <a:off x="704088" y="2240280"/>
+            <a:ext cx="3803904" cy="338328"/>
+          </a:xfrm>
+          <a:prstGeom prst="rect">
+            <a:avLst/>
+          </a:prstGeom>
+          <a:noFill/>
+          <a:ln/>
+        </p:spPr>
+        <p:txBody>
+          <a:bodyPr wrap="square" lIns="0" tIns="0" rIns="0" bIns="0" rtlCol="0" anchor="ctr"/>
+          <a:lstStyle/>
+          <a:p>
+            <a:pPr algn="l" indent="0" marL="0">
+              <a:buNone/>
+            </a:pPr>
+            <a:r>
+              <a:rPr lang="en-US" sz="1050" dirty="0">
+                <a:solidFill>
+                  <a:srgbClr val="1A1A1A"/>
+                </a:solidFill>
+                <a:latin typeface="メイリオ" pitchFamily="34" charset="0"/>
+                <a:ea typeface="メイリオ" pitchFamily="34" charset="-122"/>
+                <a:cs typeface="メイリオ" pitchFamily="34" charset="-120"/>
+              </a:rPr>
+              <a:t>　うち 既存事業</a:t>
+            </a:r>
+            <a:endParaRPr lang="en-US" sz="1050" dirty="0"/>
+          </a:p>
+        </p:txBody>
+      </p:sp>
+      <p:sp>
+        <p:nvSpPr>
+          <p:cNvPr id="16" name="Text 14"/>
+          <p:cNvSpPr/>
+          <p:nvPr/>
+        </p:nvSpPr>
+        <p:spPr>
+          <a:xfrm>
+            <a:off x="4727448" y="2240280"/>
+            <a:ext cx="2066544" cy="338328"/>
+          </a:xfrm>
+          <a:prstGeom prst="rect">
+            <a:avLst/>
+          </a:prstGeom>
+          <a:noFill/>
+          <a:ln/>
+        </p:spPr>
+        <p:txBody>
+          <a:bodyPr wrap="square" lIns="0" tIns="0" rIns="0" bIns="0" rtlCol="0" anchor="ctr"/>
+          <a:lstStyle/>
+          <a:p>
+            <a:pPr algn="r" indent="0" marL="0">
+              <a:buNone/>
+            </a:pPr>
+            <a:r>
+              <a:rPr lang="en-US" sz="1050" dirty="0">
+                <a:solidFill>
+                  <a:srgbClr val="1A1A1A"/>
+                </a:solidFill>
+                <a:latin typeface="メイリオ" pitchFamily="34" charset="0"/>
+                <a:ea typeface="メイリオ" pitchFamily="34" charset="-122"/>
+                <a:cs typeface="メイリオ" pitchFamily="34" charset="-120"/>
+              </a:rPr>
+              <a:t>389.1</a:t>
+            </a:r>
+            <a:endParaRPr lang="en-US" sz="1050" dirty="0"/>
+          </a:p>
+        </p:txBody>
+      </p:sp>
+      <p:sp>
+        <p:nvSpPr>
           <p:cNvPr id="17" name="Text 15"/>
           <p:cNvSpPr/>
           <p:nvPr/>
         </p:nvSpPr>
         <p:spPr>
           <a:xfrm>
-            <a:off x="704088" y="2267712"/>
-            <a:ext cx="2615184" cy="365760"/>
-          </a:xfrm>
-          <a:prstGeom prst="rect">
-            <a:avLst/>
-          </a:prstGeom>
-          <a:noFill/>
-          <a:ln/>
-        </p:spPr>
-        <p:txBody>
-          <a:bodyPr wrap="square" lIns="0" tIns="0" rIns="0" bIns="0" rtlCol="0" anchor="ctr"/>
-          <a:lstStyle/>
-          <a:p>
-            <a:pPr algn="l" indent="0" marL="0">
+            <a:off x="7013448" y="2240280"/>
+            <a:ext cx="2112264" cy="338328"/>
+          </a:xfrm>
+          <a:prstGeom prst="rect">
+            <a:avLst/>
+          </a:prstGeom>
+          <a:noFill/>
+          <a:ln/>
+        </p:spPr>
+        <p:txBody>
+          <a:bodyPr wrap="square" lIns="0" tIns="0" rIns="0" bIns="0" rtlCol="0" anchor="ctr"/>
+          <a:lstStyle/>
+          <a:p>
+            <a:pPr algn="r" indent="0" marL="0">
               <a:buNone/>
             </a:pPr>
             <a:r>
@@ -3555,7 +3555,7 @@
                 <a:ea typeface="メイリオ" pitchFamily="34" charset="-122"/>
                 <a:cs typeface="メイリオ" pitchFamily="34" charset="-120"/>
               </a:rPr>
-              <a:t>既存事業の粗利率</a:t>
+              <a:t>389.1</a:t>
             </a:r>
             <a:endParaRPr lang="en-US" sz="1050" dirty="0"/>
           </a:p>
@@ -3569,8 +3569,8 @@
         </p:nvSpPr>
         <p:spPr>
           <a:xfrm>
-            <a:off x="3538728" y="2267712"/>
-            <a:ext cx="1746504" cy="365760"/>
+            <a:off x="9345168" y="2240280"/>
+            <a:ext cx="2112264" cy="338328"/>
           </a:xfrm>
           <a:prstGeom prst="rect">
             <a:avLst/>
@@ -3594,7 +3594,7 @@
                 <a:ea typeface="メイリオ" pitchFamily="34" charset="-122"/>
                 <a:cs typeface="メイリオ" pitchFamily="34" charset="-120"/>
               </a:rPr>
-              <a:t>51.5%</a:t>
+              <a:t>598.0</a:t>
             </a:r>
             <a:endParaRPr lang="en-US" sz="1050" dirty="0"/>
           </a:p>
@@ -3602,131 +3602,14 @@
       </p:sp>
       <p:sp>
         <p:nvSpPr>
-          <p:cNvPr id="19" name="Text 17"/>
-          <p:cNvSpPr/>
-          <p:nvPr/>
-        </p:nvSpPr>
-        <p:spPr>
-          <a:xfrm>
-            <a:off x="5504688" y="2267712"/>
-            <a:ext cx="1746504" cy="365760"/>
-          </a:xfrm>
-          <a:prstGeom prst="rect">
-            <a:avLst/>
-          </a:prstGeom>
-          <a:noFill/>
-          <a:ln/>
-        </p:spPr>
-        <p:txBody>
-          <a:bodyPr wrap="square" lIns="0" tIns="0" rIns="0" bIns="0" rtlCol="0" anchor="ctr"/>
-          <a:lstStyle/>
-          <a:p>
-            <a:pPr algn="r" indent="0" marL="0">
-              <a:buNone/>
-            </a:pPr>
-            <a:r>
-              <a:rPr lang="en-US" sz="1050" dirty="0">
-                <a:solidFill>
-                  <a:srgbClr val="1A1A1A"/>
-                </a:solidFill>
-                <a:latin typeface="メイリオ" pitchFamily="34" charset="0"/>
-                <a:ea typeface="メイリオ" pitchFamily="34" charset="-122"/>
-                <a:cs typeface="メイリオ" pitchFamily="34" charset="-120"/>
-              </a:rPr>
-              <a:t>51.5%</a:t>
-            </a:r>
-            <a:endParaRPr lang="en-US" sz="1050" dirty="0"/>
-          </a:p>
-        </p:txBody>
-      </p:sp>
-      <p:sp>
-        <p:nvSpPr>
-          <p:cNvPr id="20" name="Text 18"/>
-          <p:cNvSpPr/>
-          <p:nvPr/>
-        </p:nvSpPr>
-        <p:spPr>
-          <a:xfrm>
-            <a:off x="7470648" y="2267712"/>
-            <a:ext cx="1746504" cy="365760"/>
-          </a:xfrm>
-          <a:prstGeom prst="rect">
-            <a:avLst/>
-          </a:prstGeom>
-          <a:noFill/>
-          <a:ln/>
-        </p:spPr>
-        <p:txBody>
-          <a:bodyPr wrap="square" lIns="0" tIns="0" rIns="0" bIns="0" rtlCol="0" anchor="ctr"/>
-          <a:lstStyle/>
-          <a:p>
-            <a:pPr algn="r" indent="0" marL="0">
-              <a:buNone/>
-            </a:pPr>
-            <a:r>
-              <a:rPr lang="en-US" sz="1050" dirty="0">
-                <a:solidFill>
-                  <a:srgbClr val="1A1A1A"/>
-                </a:solidFill>
-                <a:latin typeface="メイリオ" pitchFamily="34" charset="0"/>
-                <a:ea typeface="メイリオ" pitchFamily="34" charset="-122"/>
-                <a:cs typeface="メイリオ" pitchFamily="34" charset="-120"/>
-              </a:rPr>
-              <a:t>51.5%</a:t>
-            </a:r>
-            <a:endParaRPr lang="en-US" sz="1050" dirty="0"/>
-          </a:p>
-        </p:txBody>
-      </p:sp>
-      <p:sp>
-        <p:nvSpPr>
-          <p:cNvPr id="21" name="Text 19"/>
-          <p:cNvSpPr/>
-          <p:nvPr/>
-        </p:nvSpPr>
-        <p:spPr>
-          <a:xfrm>
-            <a:off x="9436608" y="2267712"/>
-            <a:ext cx="1837944" cy="365760"/>
-          </a:xfrm>
-          <a:prstGeom prst="rect">
-            <a:avLst/>
-          </a:prstGeom>
-          <a:noFill/>
-          <a:ln/>
-        </p:spPr>
-        <p:txBody>
-          <a:bodyPr wrap="square" lIns="0" tIns="0" rIns="0" bIns="0" rtlCol="0" anchor="ctr"/>
-          <a:lstStyle/>
-          <a:p>
-            <a:pPr algn="r" indent="0" marL="0">
-              <a:buNone/>
-            </a:pPr>
-            <a:r>
-              <a:rPr lang="en-US" sz="1050" dirty="0">
-                <a:solidFill>
-                  <a:srgbClr val="1A1A1A"/>
-                </a:solidFill>
-                <a:latin typeface="メイリオ" pitchFamily="34" charset="0"/>
-                <a:ea typeface="メイリオ" pitchFamily="34" charset="-122"/>
-                <a:cs typeface="メイリオ" pitchFamily="34" charset="-120"/>
-              </a:rPr>
-              <a:t>29.5%</a:t>
-            </a:r>
-            <a:endParaRPr lang="en-US" sz="1050" dirty="0"/>
-          </a:p>
-        </p:txBody>
-      </p:sp>
-      <p:sp>
-        <p:nvSpPr>
-          <p:cNvPr id="22" name="Shape 20"/>
-          <p:cNvSpPr/>
-          <p:nvPr/>
-        </p:nvSpPr>
-        <p:spPr>
-          <a:xfrm>
-            <a:off x="594360" y="2633472"/>
-            <a:ext cx="10789920" cy="365760"/>
+          <p:cNvPr id="19" name="Shape 17"/>
+          <p:cNvSpPr/>
+          <p:nvPr/>
+        </p:nvSpPr>
+        <p:spPr>
+          <a:xfrm>
+            <a:off x="594360" y="2578608"/>
+            <a:ext cx="10972800" cy="338328"/>
           </a:xfrm>
           <a:prstGeom prst="rect">
             <a:avLst/>
@@ -3744,26 +3627,143 @@
       </p:sp>
       <p:sp>
         <p:nvSpPr>
+          <p:cNvPr id="20" name="Text 18"/>
+          <p:cNvSpPr/>
+          <p:nvPr/>
+        </p:nvSpPr>
+        <p:spPr>
+          <a:xfrm>
+            <a:off x="704088" y="2578608"/>
+            <a:ext cx="3803904" cy="338328"/>
+          </a:xfrm>
+          <a:prstGeom prst="rect">
+            <a:avLst/>
+          </a:prstGeom>
+          <a:noFill/>
+          <a:ln/>
+        </p:spPr>
+        <p:txBody>
+          <a:bodyPr wrap="square" lIns="0" tIns="0" rIns="0" bIns="0" rtlCol="0" anchor="ctr"/>
+          <a:lstStyle/>
+          <a:p>
+            <a:pPr algn="l" indent="0" marL="0">
+              <a:buNone/>
+            </a:pPr>
+            <a:r>
+              <a:rPr lang="en-US" sz="1050" dirty="0">
+                <a:solidFill>
+                  <a:srgbClr val="1A1A1A"/>
+                </a:solidFill>
+                <a:latin typeface="メイリオ" pitchFamily="34" charset="0"/>
+                <a:ea typeface="メイリオ" pitchFamily="34" charset="-122"/>
+                <a:cs typeface="メイリオ" pitchFamily="34" charset="-120"/>
+              </a:rPr>
+              <a:t>　うち 上乗せ案件</a:t>
+            </a:r>
+            <a:endParaRPr lang="en-US" sz="1050" dirty="0"/>
+          </a:p>
+        </p:txBody>
+      </p:sp>
+      <p:sp>
+        <p:nvSpPr>
+          <p:cNvPr id="21" name="Text 19"/>
+          <p:cNvSpPr/>
+          <p:nvPr/>
+        </p:nvSpPr>
+        <p:spPr>
+          <a:xfrm>
+            <a:off x="4727448" y="2578608"/>
+            <a:ext cx="2066544" cy="338328"/>
+          </a:xfrm>
+          <a:prstGeom prst="rect">
+            <a:avLst/>
+          </a:prstGeom>
+          <a:noFill/>
+          <a:ln/>
+        </p:spPr>
+        <p:txBody>
+          <a:bodyPr wrap="square" lIns="0" tIns="0" rIns="0" bIns="0" rtlCol="0" anchor="ctr"/>
+          <a:lstStyle/>
+          <a:p>
+            <a:pPr algn="r" indent="0" marL="0">
+              <a:buNone/>
+            </a:pPr>
+            <a:r>
+              <a:rPr lang="en-US" sz="1050" dirty="0">
+                <a:solidFill>
+                  <a:srgbClr val="1A1A1A"/>
+                </a:solidFill>
+                <a:latin typeface="メイリオ" pitchFamily="34" charset="0"/>
+                <a:ea typeface="メイリオ" pitchFamily="34" charset="-122"/>
+                <a:cs typeface="メイリオ" pitchFamily="34" charset="-120"/>
+              </a:rPr>
+              <a:t>－</a:t>
+            </a:r>
+            <a:endParaRPr lang="en-US" sz="1050" dirty="0"/>
+          </a:p>
+        </p:txBody>
+      </p:sp>
+      <p:sp>
+        <p:nvSpPr>
+          <p:cNvPr id="22" name="Text 20"/>
+          <p:cNvSpPr/>
+          <p:nvPr/>
+        </p:nvSpPr>
+        <p:spPr>
+          <a:xfrm>
+            <a:off x="7013448" y="2578608"/>
+            <a:ext cx="2112264" cy="338328"/>
+          </a:xfrm>
+          <a:prstGeom prst="rect">
+            <a:avLst/>
+          </a:prstGeom>
+          <a:noFill/>
+          <a:ln/>
+        </p:spPr>
+        <p:txBody>
+          <a:bodyPr wrap="square" lIns="0" tIns="0" rIns="0" bIns="0" rtlCol="0" anchor="ctr"/>
+          <a:lstStyle/>
+          <a:p>
+            <a:pPr algn="r" indent="0" marL="0">
+              <a:buNone/>
+            </a:pPr>
+            <a:r>
+              <a:rPr lang="en-US" sz="1050" dirty="0">
+                <a:solidFill>
+                  <a:srgbClr val="1A1A1A"/>
+                </a:solidFill>
+                <a:latin typeface="メイリオ" pitchFamily="34" charset="0"/>
+                <a:ea typeface="メイリオ" pitchFamily="34" charset="-122"/>
+                <a:cs typeface="メイリオ" pitchFamily="34" charset="-120"/>
+              </a:rPr>
+              <a:t>132.5</a:t>
+            </a:r>
+            <a:endParaRPr lang="en-US" sz="1050" dirty="0"/>
+          </a:p>
+        </p:txBody>
+      </p:sp>
+      <p:sp>
+        <p:nvSpPr>
           <p:cNvPr id="23" name="Text 21"/>
           <p:cNvSpPr/>
           <p:nvPr/>
         </p:nvSpPr>
         <p:spPr>
           <a:xfrm>
-            <a:off x="704088" y="2633472"/>
-            <a:ext cx="2615184" cy="365760"/>
-          </a:xfrm>
-          <a:prstGeom prst="rect">
-            <a:avLst/>
-          </a:prstGeom>
-          <a:noFill/>
-          <a:ln/>
-        </p:spPr>
-        <p:txBody>
-          <a:bodyPr wrap="square" lIns="0" tIns="0" rIns="0" bIns="0" rtlCol="0" anchor="ctr"/>
-          <a:lstStyle/>
-          <a:p>
-            <a:pPr algn="l" indent="0" marL="0">
+            <a:off x="9345168" y="2578608"/>
+            <a:ext cx="2112264" cy="338328"/>
+          </a:xfrm>
+          <a:prstGeom prst="rect">
+            <a:avLst/>
+          </a:prstGeom>
+          <a:noFill/>
+          <a:ln/>
+        </p:spPr>
+        <p:txBody>
+          <a:bodyPr wrap="square" lIns="0" tIns="0" rIns="0" bIns="0" rtlCol="0" anchor="ctr"/>
+          <a:lstStyle/>
+          <a:p>
+            <a:pPr algn="r" indent="0" marL="0">
               <a:buNone/>
             </a:pPr>
             <a:r>
@@ -3775,7 +3775,7 @@
                 <a:ea typeface="メイリオ" pitchFamily="34" charset="-122"/>
                 <a:cs typeface="メイリオ" pitchFamily="34" charset="-120"/>
               </a:rPr>
-              <a:t>売上総利益 合計</a:t>
+              <a:t>132.5</a:t>
             </a:r>
             <a:endParaRPr lang="en-US" sz="1050" dirty="0"/>
           </a:p>
@@ -3783,170 +3783,14 @@
       </p:sp>
       <p:sp>
         <p:nvSpPr>
-          <p:cNvPr id="24" name="Text 22"/>
-          <p:cNvSpPr/>
-          <p:nvPr/>
-        </p:nvSpPr>
-        <p:spPr>
-          <a:xfrm>
-            <a:off x="3538728" y="2633472"/>
-            <a:ext cx="1746504" cy="365760"/>
-          </a:xfrm>
-          <a:prstGeom prst="rect">
-            <a:avLst/>
-          </a:prstGeom>
-          <a:noFill/>
-          <a:ln/>
-        </p:spPr>
-        <p:txBody>
-          <a:bodyPr wrap="square" lIns="0" tIns="0" rIns="0" bIns="0" rtlCol="0" anchor="ctr"/>
-          <a:lstStyle/>
-          <a:p>
-            <a:pPr algn="r" indent="0" marL="0">
-              <a:buNone/>
-            </a:pPr>
-            <a:r>
-              <a:rPr lang="en-US" sz="1050" dirty="0">
-                <a:solidFill>
-                  <a:srgbClr val="1A1A1A"/>
-                </a:solidFill>
-                <a:latin typeface="メイリオ" pitchFamily="34" charset="0"/>
-                <a:ea typeface="メイリオ" pitchFamily="34" charset="-122"/>
-                <a:cs typeface="メイリオ" pitchFamily="34" charset="-120"/>
-              </a:rPr>
-              <a:t>200.6</a:t>
-            </a:r>
-            <a:endParaRPr lang="en-US" sz="1050" dirty="0"/>
-          </a:p>
-        </p:txBody>
-      </p:sp>
-      <p:sp>
-        <p:nvSpPr>
-          <p:cNvPr id="25" name="Text 23"/>
-          <p:cNvSpPr/>
-          <p:nvPr/>
-        </p:nvSpPr>
-        <p:spPr>
-          <a:xfrm>
-            <a:off x="5504688" y="2633472"/>
-            <a:ext cx="1746504" cy="365760"/>
-          </a:xfrm>
-          <a:prstGeom prst="rect">
-            <a:avLst/>
-          </a:prstGeom>
-          <a:noFill/>
-          <a:ln/>
-        </p:spPr>
-        <p:txBody>
-          <a:bodyPr wrap="square" lIns="0" tIns="0" rIns="0" bIns="0" rtlCol="0" anchor="ctr"/>
-          <a:lstStyle/>
-          <a:p>
-            <a:pPr algn="r" indent="0" marL="0">
-              <a:buNone/>
-            </a:pPr>
-            <a:r>
-              <a:rPr lang="en-US" sz="1050" dirty="0">
-                <a:solidFill>
-                  <a:srgbClr val="1A1A1A"/>
-                </a:solidFill>
-                <a:latin typeface="メイリオ" pitchFamily="34" charset="0"/>
-                <a:ea typeface="メイリオ" pitchFamily="34" charset="-122"/>
-                <a:cs typeface="メイリオ" pitchFamily="34" charset="-120"/>
-              </a:rPr>
-              <a:t>333.1</a:t>
-            </a:r>
-            <a:endParaRPr lang="en-US" sz="1050" dirty="0"/>
-          </a:p>
-        </p:txBody>
-      </p:sp>
-      <p:sp>
-        <p:nvSpPr>
-          <p:cNvPr id="26" name="Text 24"/>
-          <p:cNvSpPr/>
-          <p:nvPr/>
-        </p:nvSpPr>
-        <p:spPr>
-          <a:xfrm>
-            <a:off x="7470648" y="2633472"/>
-            <a:ext cx="1746504" cy="365760"/>
-          </a:xfrm>
-          <a:prstGeom prst="rect">
-            <a:avLst/>
-          </a:prstGeom>
-          <a:noFill/>
-          <a:ln/>
-        </p:spPr>
-        <p:txBody>
-          <a:bodyPr wrap="square" lIns="0" tIns="0" rIns="0" bIns="0" rtlCol="0" anchor="ctr"/>
-          <a:lstStyle/>
-          <a:p>
-            <a:pPr algn="r" indent="0" marL="0">
-              <a:buNone/>
-            </a:pPr>
-            <a:r>
-              <a:rPr lang="en-US" sz="1050" dirty="0">
-                <a:solidFill>
-                  <a:srgbClr val="1A1A1A"/>
-                </a:solidFill>
-                <a:latin typeface="メイリオ" pitchFamily="34" charset="0"/>
-                <a:ea typeface="メイリオ" pitchFamily="34" charset="-122"/>
-                <a:cs typeface="メイリオ" pitchFamily="34" charset="-120"/>
-              </a:rPr>
-              <a:t>415.2</a:t>
-            </a:r>
-            <a:endParaRPr lang="en-US" sz="1050" dirty="0"/>
-          </a:p>
-        </p:txBody>
-      </p:sp>
-      <p:sp>
-        <p:nvSpPr>
-          <p:cNvPr id="27" name="Text 25"/>
-          <p:cNvSpPr/>
-          <p:nvPr/>
-        </p:nvSpPr>
-        <p:spPr>
-          <a:xfrm>
-            <a:off x="9436608" y="2633472"/>
-            <a:ext cx="1837944" cy="365760"/>
-          </a:xfrm>
-          <a:prstGeom prst="rect">
-            <a:avLst/>
-          </a:prstGeom>
-          <a:noFill/>
-          <a:ln/>
-        </p:spPr>
-        <p:txBody>
-          <a:bodyPr wrap="square" lIns="0" tIns="0" rIns="0" bIns="0" rtlCol="0" anchor="ctr"/>
-          <a:lstStyle/>
-          <a:p>
-            <a:pPr algn="r" indent="0" marL="0">
-              <a:buNone/>
-            </a:pPr>
-            <a:r>
-              <a:rPr lang="en-US" sz="1050" dirty="0">
-                <a:solidFill>
-                  <a:srgbClr val="1A1A1A"/>
-                </a:solidFill>
-                <a:latin typeface="メイリオ" pitchFamily="34" charset="0"/>
-                <a:ea typeface="メイリオ" pitchFamily="34" charset="-122"/>
-                <a:cs typeface="メイリオ" pitchFamily="34" charset="-120"/>
-              </a:rPr>
-              <a:t>308.9</a:t>
-            </a:r>
-            <a:endParaRPr lang="en-US" sz="1050" dirty="0"/>
-          </a:p>
-        </p:txBody>
-      </p:sp>
-      <p:sp>
-        <p:nvSpPr>
-          <p:cNvPr id="28" name="Shape 26"/>
-          <p:cNvSpPr/>
-          <p:nvPr/>
-        </p:nvSpPr>
-        <p:spPr>
-          <a:xfrm>
-            <a:off x="594360" y="2999232"/>
-            <a:ext cx="10789920" cy="365760"/>
+          <p:cNvPr id="24" name="Shape 22"/>
+          <p:cNvSpPr/>
+          <p:nvPr/>
+        </p:nvSpPr>
+        <p:spPr>
+          <a:xfrm>
+            <a:off x="594360" y="2916936"/>
+            <a:ext cx="10972800" cy="338328"/>
           </a:xfrm>
           <a:prstGeom prst="rect">
             <a:avLst/>
@@ -3964,14 +3808,14 @@
       </p:sp>
       <p:sp>
         <p:nvSpPr>
-          <p:cNvPr id="29" name="Text 27"/>
-          <p:cNvSpPr/>
-          <p:nvPr/>
-        </p:nvSpPr>
-        <p:spPr>
-          <a:xfrm>
-            <a:off x="704088" y="2999232"/>
-            <a:ext cx="2615184" cy="365760"/>
+          <p:cNvPr id="25" name="Text 23"/>
+          <p:cNvSpPr/>
+          <p:nvPr/>
+        </p:nvSpPr>
+        <p:spPr>
+          <a:xfrm>
+            <a:off x="704088" y="2916936"/>
+            <a:ext cx="3803904" cy="338328"/>
           </a:xfrm>
           <a:prstGeom prst="rect">
             <a:avLst/>
@@ -3995,7 +3839,7 @@
                 <a:ea typeface="メイリオ" pitchFamily="34" charset="-122"/>
                 <a:cs typeface="メイリオ" pitchFamily="34" charset="-120"/>
               </a:rPr>
-              <a:t>総合粗利率</a:t>
+              <a:t>売上総利益 合計</a:t>
             </a:r>
             <a:endParaRPr lang="en-US" sz="1050" dirty="0"/>
           </a:p>
@@ -4003,14 +3847,14 @@
       </p:sp>
       <p:sp>
         <p:nvSpPr>
-          <p:cNvPr id="30" name="Text 28"/>
-          <p:cNvSpPr/>
-          <p:nvPr/>
-        </p:nvSpPr>
-        <p:spPr>
-          <a:xfrm>
-            <a:off x="3538728" y="2999232"/>
-            <a:ext cx="1746504" cy="365760"/>
+          <p:cNvPr id="26" name="Text 24"/>
+          <p:cNvSpPr/>
+          <p:nvPr/>
+        </p:nvSpPr>
+        <p:spPr>
+          <a:xfrm>
+            <a:off x="4727448" y="2916936"/>
+            <a:ext cx="2066544" cy="338328"/>
           </a:xfrm>
           <a:prstGeom prst="rect">
             <a:avLst/>
@@ -4034,7 +3878,7 @@
                 <a:ea typeface="メイリオ" pitchFamily="34" charset="-122"/>
                 <a:cs typeface="メイリオ" pitchFamily="34" charset="-120"/>
               </a:rPr>
-              <a:t>51.5%</a:t>
+              <a:t>200.6</a:t>
             </a:r>
             <a:endParaRPr lang="en-US" sz="1050" dirty="0"/>
           </a:p>
@@ -4042,14 +3886,14 @@
       </p:sp>
       <p:sp>
         <p:nvSpPr>
-          <p:cNvPr id="31" name="Text 29"/>
-          <p:cNvSpPr/>
-          <p:nvPr/>
-        </p:nvSpPr>
-        <p:spPr>
-          <a:xfrm>
-            <a:off x="5504688" y="2999232"/>
-            <a:ext cx="1746504" cy="365760"/>
+          <p:cNvPr id="27" name="Text 25"/>
+          <p:cNvSpPr/>
+          <p:nvPr/>
+        </p:nvSpPr>
+        <p:spPr>
+          <a:xfrm>
+            <a:off x="7013448" y="2916936"/>
+            <a:ext cx="2112264" cy="338328"/>
           </a:xfrm>
           <a:prstGeom prst="rect">
             <a:avLst/>
@@ -4073,7 +3917,7 @@
                 <a:ea typeface="メイリオ" pitchFamily="34" charset="-122"/>
                 <a:cs typeface="メイリオ" pitchFamily="34" charset="-120"/>
               </a:rPr>
-              <a:t>63.9%</a:t>
+              <a:t>333.1</a:t>
             </a:r>
             <a:endParaRPr lang="en-US" sz="1050" dirty="0"/>
           </a:p>
@@ -4081,14 +3925,14 @@
       </p:sp>
       <p:sp>
         <p:nvSpPr>
-          <p:cNvPr id="32" name="Text 30"/>
-          <p:cNvSpPr/>
-          <p:nvPr/>
-        </p:nvSpPr>
-        <p:spPr>
-          <a:xfrm>
-            <a:off x="7470648" y="2999232"/>
-            <a:ext cx="1746504" cy="365760"/>
+          <p:cNvPr id="28" name="Text 26"/>
+          <p:cNvSpPr/>
+          <p:nvPr/>
+        </p:nvSpPr>
+        <p:spPr>
+          <a:xfrm>
+            <a:off x="9345168" y="2916936"/>
+            <a:ext cx="2112264" cy="338328"/>
           </a:xfrm>
           <a:prstGeom prst="rect">
             <a:avLst/>
@@ -4112,7 +3956,7 @@
                 <a:ea typeface="メイリオ" pitchFamily="34" charset="-122"/>
                 <a:cs typeface="メイリオ" pitchFamily="34" charset="-120"/>
               </a:rPr>
-              <a:t>61.0%</a:t>
+              <a:t>395.8</a:t>
             </a:r>
             <a:endParaRPr lang="en-US" sz="1050" dirty="0"/>
           </a:p>
@@ -4120,53 +3964,14 @@
       </p:sp>
       <p:sp>
         <p:nvSpPr>
-          <p:cNvPr id="33" name="Text 31"/>
-          <p:cNvSpPr/>
-          <p:nvPr/>
-        </p:nvSpPr>
-        <p:spPr>
-          <a:xfrm>
-            <a:off x="9436608" y="2999232"/>
-            <a:ext cx="1837944" cy="365760"/>
-          </a:xfrm>
-          <a:prstGeom prst="rect">
-            <a:avLst/>
-          </a:prstGeom>
-          <a:noFill/>
-          <a:ln/>
-        </p:spPr>
-        <p:txBody>
-          <a:bodyPr wrap="square" lIns="0" tIns="0" rIns="0" bIns="0" rtlCol="0" anchor="ctr"/>
-          <a:lstStyle/>
-          <a:p>
-            <a:pPr algn="r" indent="0" marL="0">
-              <a:buNone/>
-            </a:pPr>
-            <a:r>
-              <a:rPr lang="en-US" sz="1050" dirty="0">
-                <a:solidFill>
-                  <a:srgbClr val="1A1A1A"/>
-                </a:solidFill>
-                <a:latin typeface="メイリオ" pitchFamily="34" charset="0"/>
-                <a:ea typeface="メイリオ" pitchFamily="34" charset="-122"/>
-                <a:cs typeface="メイリオ" pitchFamily="34" charset="-120"/>
-              </a:rPr>
-              <a:t>42.3%</a:t>
-            </a:r>
-            <a:endParaRPr lang="en-US" sz="1050" dirty="0"/>
-          </a:p>
-        </p:txBody>
-      </p:sp>
-      <p:sp>
-        <p:nvSpPr>
-          <p:cNvPr id="34" name="Shape 32"/>
-          <p:cNvSpPr/>
-          <p:nvPr/>
-        </p:nvSpPr>
-        <p:spPr>
-          <a:xfrm>
-            <a:off x="594360" y="3364992"/>
-            <a:ext cx="10789920" cy="365760"/>
+          <p:cNvPr id="29" name="Shape 27"/>
+          <p:cNvSpPr/>
+          <p:nvPr/>
+        </p:nvSpPr>
+        <p:spPr>
+          <a:xfrm>
+            <a:off x="594360" y="3255264"/>
+            <a:ext cx="10972800" cy="338328"/>
           </a:xfrm>
           <a:prstGeom prst="rect">
             <a:avLst/>
@@ -4184,14 +3989,195 @@
       </p:sp>
       <p:sp>
         <p:nvSpPr>
+          <p:cNvPr id="30" name="Text 28"/>
+          <p:cNvSpPr/>
+          <p:nvPr/>
+        </p:nvSpPr>
+        <p:spPr>
+          <a:xfrm>
+            <a:off x="704088" y="3255264"/>
+            <a:ext cx="3803904" cy="338328"/>
+          </a:xfrm>
+          <a:prstGeom prst="rect">
+            <a:avLst/>
+          </a:prstGeom>
+          <a:noFill/>
+          <a:ln/>
+        </p:spPr>
+        <p:txBody>
+          <a:bodyPr wrap="square" lIns="0" tIns="0" rIns="0" bIns="0" rtlCol="0" anchor="ctr"/>
+          <a:lstStyle/>
+          <a:p>
+            <a:pPr algn="l" indent="0" marL="0">
+              <a:buNone/>
+            </a:pPr>
+            <a:r>
+              <a:rPr lang="en-US" sz="1050" dirty="0">
+                <a:solidFill>
+                  <a:srgbClr val="1A1A1A"/>
+                </a:solidFill>
+                <a:latin typeface="メイリオ" pitchFamily="34" charset="0"/>
+                <a:ea typeface="メイリオ" pitchFamily="34" charset="-122"/>
+                <a:cs typeface="メイリオ" pitchFamily="34" charset="-120"/>
+              </a:rPr>
+              <a:t>総合粗利率</a:t>
+            </a:r>
+            <a:endParaRPr lang="en-US" sz="1050" dirty="0"/>
+          </a:p>
+        </p:txBody>
+      </p:sp>
+      <p:sp>
+        <p:nvSpPr>
+          <p:cNvPr id="31" name="Text 29"/>
+          <p:cNvSpPr/>
+          <p:nvPr/>
+        </p:nvSpPr>
+        <p:spPr>
+          <a:xfrm>
+            <a:off x="4727448" y="3255264"/>
+            <a:ext cx="2066544" cy="338328"/>
+          </a:xfrm>
+          <a:prstGeom prst="rect">
+            <a:avLst/>
+          </a:prstGeom>
+          <a:noFill/>
+          <a:ln/>
+        </p:spPr>
+        <p:txBody>
+          <a:bodyPr wrap="square" lIns="0" tIns="0" rIns="0" bIns="0" rtlCol="0" anchor="ctr"/>
+          <a:lstStyle/>
+          <a:p>
+            <a:pPr algn="r" indent="0" marL="0">
+              <a:buNone/>
+            </a:pPr>
+            <a:r>
+              <a:rPr lang="en-US" sz="1050" dirty="0">
+                <a:solidFill>
+                  <a:srgbClr val="1A1A1A"/>
+                </a:solidFill>
+                <a:latin typeface="メイリオ" pitchFamily="34" charset="0"/>
+                <a:ea typeface="メイリオ" pitchFamily="34" charset="-122"/>
+                <a:cs typeface="メイリオ" pitchFamily="34" charset="-120"/>
+              </a:rPr>
+              <a:t>51.5%</a:t>
+            </a:r>
+            <a:endParaRPr lang="en-US" sz="1050" dirty="0"/>
+          </a:p>
+        </p:txBody>
+      </p:sp>
+      <p:sp>
+        <p:nvSpPr>
+          <p:cNvPr id="32" name="Text 30"/>
+          <p:cNvSpPr/>
+          <p:nvPr/>
+        </p:nvSpPr>
+        <p:spPr>
+          <a:xfrm>
+            <a:off x="7013448" y="3255264"/>
+            <a:ext cx="2112264" cy="338328"/>
+          </a:xfrm>
+          <a:prstGeom prst="rect">
+            <a:avLst/>
+          </a:prstGeom>
+          <a:noFill/>
+          <a:ln/>
+        </p:spPr>
+        <p:txBody>
+          <a:bodyPr wrap="square" lIns="0" tIns="0" rIns="0" bIns="0" rtlCol="0" anchor="ctr"/>
+          <a:lstStyle/>
+          <a:p>
+            <a:pPr algn="r" indent="0" marL="0">
+              <a:buNone/>
+            </a:pPr>
+            <a:r>
+              <a:rPr lang="en-US" sz="1050" dirty="0">
+                <a:solidFill>
+                  <a:srgbClr val="1A1A1A"/>
+                </a:solidFill>
+                <a:latin typeface="メイリオ" pitchFamily="34" charset="0"/>
+                <a:ea typeface="メイリオ" pitchFamily="34" charset="-122"/>
+                <a:cs typeface="メイリオ" pitchFamily="34" charset="-120"/>
+              </a:rPr>
+              <a:t>63.9%</a:t>
+            </a:r>
+            <a:endParaRPr lang="en-US" sz="1050" dirty="0"/>
+          </a:p>
+        </p:txBody>
+      </p:sp>
+      <p:sp>
+        <p:nvSpPr>
+          <p:cNvPr id="33" name="Text 31"/>
+          <p:cNvSpPr/>
+          <p:nvPr/>
+        </p:nvSpPr>
+        <p:spPr>
+          <a:xfrm>
+            <a:off x="9345168" y="3255264"/>
+            <a:ext cx="2112264" cy="338328"/>
+          </a:xfrm>
+          <a:prstGeom prst="rect">
+            <a:avLst/>
+          </a:prstGeom>
+          <a:noFill/>
+          <a:ln/>
+        </p:spPr>
+        <p:txBody>
+          <a:bodyPr wrap="square" lIns="0" tIns="0" rIns="0" bIns="0" rtlCol="0" anchor="ctr"/>
+          <a:lstStyle/>
+          <a:p>
+            <a:pPr algn="r" indent="0" marL="0">
+              <a:buNone/>
+            </a:pPr>
+            <a:r>
+              <a:rPr lang="en-US" sz="1050" dirty="0">
+                <a:solidFill>
+                  <a:srgbClr val="1A1A1A"/>
+                </a:solidFill>
+                <a:latin typeface="メイリオ" pitchFamily="34" charset="0"/>
+                <a:ea typeface="メイリオ" pitchFamily="34" charset="-122"/>
+                <a:cs typeface="メイリオ" pitchFamily="34" charset="-120"/>
+              </a:rPr>
+              <a:t>54.2%</a:t>
+            </a:r>
+            <a:endParaRPr lang="en-US" sz="1050" dirty="0"/>
+          </a:p>
+        </p:txBody>
+      </p:sp>
+      <p:sp>
+        <p:nvSpPr>
+          <p:cNvPr id="34" name="Shape 32"/>
+          <p:cNvSpPr/>
+          <p:nvPr/>
+        </p:nvSpPr>
+        <p:spPr>
+          <a:xfrm>
+            <a:off x="594360" y="3593592"/>
+            <a:ext cx="10972800" cy="338328"/>
+          </a:xfrm>
+          <a:prstGeom prst="rect">
+            <a:avLst/>
+          </a:prstGeom>
+          <a:solidFill>
+            <a:srgbClr val="FBFAF8"/>
+          </a:solidFill>
+          <a:ln w="6350">
+            <a:solidFill>
+              <a:srgbClr val="E2E0DC"/>
+            </a:solidFill>
+            <a:prstDash val="solid"/>
+          </a:ln>
+        </p:spPr>
+      </p:sp>
+      <p:sp>
+        <p:nvSpPr>
           <p:cNvPr id="35" name="Text 33"/>
           <p:cNvSpPr/>
           <p:nvPr/>
         </p:nvSpPr>
         <p:spPr>
           <a:xfrm>
-            <a:off x="704088" y="3364992"/>
-            <a:ext cx="2615184" cy="365760"/>
+            <a:off x="704088" y="3593592"/>
+            <a:ext cx="3803904" cy="338328"/>
           </a:xfrm>
           <a:prstGeom prst="rect">
             <a:avLst/>
@@ -4229,8 +4215,8 @@
         </p:nvSpPr>
         <p:spPr>
           <a:xfrm>
-            <a:off x="3538728" y="3364992"/>
-            <a:ext cx="1746504" cy="365760"/>
+            <a:off x="4727448" y="3593592"/>
+            <a:ext cx="2066544" cy="338328"/>
           </a:xfrm>
           <a:prstGeom prst="rect">
             <a:avLst/>
@@ -4268,8 +4254,8 @@
         </p:nvSpPr>
         <p:spPr>
           <a:xfrm>
-            <a:off x="5504688" y="3364992"/>
-            <a:ext cx="1746504" cy="365760"/>
+            <a:off x="7013448" y="3593592"/>
+            <a:ext cx="2112264" cy="338328"/>
           </a:xfrm>
           <a:prstGeom prst="rect">
             <a:avLst/>
@@ -4307,8 +4293,8 @@
         </p:nvSpPr>
         <p:spPr>
           <a:xfrm>
-            <a:off x="7470648" y="3364992"/>
-            <a:ext cx="1746504" cy="365760"/>
+            <a:off x="9345168" y="3593592"/>
+            <a:ext cx="2112264" cy="338328"/>
           </a:xfrm>
           <a:prstGeom prst="rect">
             <a:avLst/>
@@ -4340,53 +4326,14 @@
       </p:sp>
       <p:sp>
         <p:nvSpPr>
-          <p:cNvPr id="39" name="Text 37"/>
-          <p:cNvSpPr/>
-          <p:nvPr/>
-        </p:nvSpPr>
-        <p:spPr>
-          <a:xfrm>
-            <a:off x="9436608" y="3364992"/>
-            <a:ext cx="1837944" cy="365760"/>
-          </a:xfrm>
-          <a:prstGeom prst="rect">
-            <a:avLst/>
-          </a:prstGeom>
-          <a:noFill/>
-          <a:ln/>
-        </p:spPr>
-        <p:txBody>
-          <a:bodyPr wrap="square" lIns="0" tIns="0" rIns="0" bIns="0" rtlCol="0" anchor="ctr"/>
-          <a:lstStyle/>
-          <a:p>
-            <a:pPr algn="r" indent="0" marL="0">
-              <a:buNone/>
-            </a:pPr>
-            <a:r>
-              <a:rPr lang="en-US" sz="1050" dirty="0">
-                <a:solidFill>
-                  <a:srgbClr val="1A1A1A"/>
-                </a:solidFill>
-                <a:latin typeface="メイリオ" pitchFamily="34" charset="0"/>
-                <a:ea typeface="メイリオ" pitchFamily="34" charset="-122"/>
-                <a:cs typeface="メイリオ" pitchFamily="34" charset="-120"/>
-              </a:rPr>
-              <a:t>300.2</a:t>
-            </a:r>
-            <a:endParaRPr lang="en-US" sz="1050" dirty="0"/>
-          </a:p>
-        </p:txBody>
-      </p:sp>
-      <p:sp>
-        <p:nvSpPr>
-          <p:cNvPr id="40" name="Shape 38"/>
-          <p:cNvSpPr/>
-          <p:nvPr/>
-        </p:nvSpPr>
-        <p:spPr>
-          <a:xfrm>
-            <a:off x="594360" y="3730752"/>
-            <a:ext cx="10789920" cy="365760"/>
+          <p:cNvPr id="39" name="Shape 37"/>
+          <p:cNvSpPr/>
+          <p:nvPr/>
+        </p:nvSpPr>
+        <p:spPr>
+          <a:xfrm>
+            <a:off x="594360" y="3931920"/>
+            <a:ext cx="10972800" cy="338328"/>
           </a:xfrm>
           <a:prstGeom prst="rect">
             <a:avLst/>
@@ -4404,38 +4351,77 @@
       </p:sp>
       <p:sp>
         <p:nvSpPr>
+          <p:cNvPr id="40" name="Text 38"/>
+          <p:cNvSpPr/>
+          <p:nvPr/>
+        </p:nvSpPr>
+        <p:spPr>
+          <a:xfrm>
+            <a:off x="704088" y="3931920"/>
+            <a:ext cx="3803904" cy="338328"/>
+          </a:xfrm>
+          <a:prstGeom prst="rect">
+            <a:avLst/>
+          </a:prstGeom>
+          <a:noFill/>
+          <a:ln/>
+        </p:spPr>
+        <p:txBody>
+          <a:bodyPr wrap="square" lIns="0" tIns="0" rIns="0" bIns="0" rtlCol="0" anchor="ctr"/>
+          <a:lstStyle/>
+          <a:p>
+            <a:pPr algn="l" indent="0" marL="0">
+              <a:buNone/>
+            </a:pPr>
+            <a:r>
+              <a:rPr lang="en-US" sz="1050" b="1" dirty="0">
+                <a:solidFill>
+                  <a:srgbClr val="1A1A1A"/>
+                </a:solidFill>
+                <a:latin typeface="メイリオ" pitchFamily="34" charset="0"/>
+                <a:ea typeface="メイリオ" pitchFamily="34" charset="-122"/>
+                <a:cs typeface="メイリオ" pitchFamily="34" charset="-120"/>
+              </a:rPr>
+              <a:t>営業利益</a:t>
+            </a:r>
+            <a:endParaRPr lang="en-US" sz="1050" dirty="0"/>
+          </a:p>
+        </p:txBody>
+      </p:sp>
+      <p:sp>
+        <p:nvSpPr>
           <p:cNvPr id="41" name="Text 39"/>
           <p:cNvSpPr/>
           <p:nvPr/>
         </p:nvSpPr>
         <p:spPr>
           <a:xfrm>
-            <a:off x="704088" y="3730752"/>
-            <a:ext cx="2615184" cy="365760"/>
-          </a:xfrm>
-          <a:prstGeom prst="rect">
-            <a:avLst/>
-          </a:prstGeom>
-          <a:noFill/>
-          <a:ln/>
-        </p:spPr>
-        <p:txBody>
-          <a:bodyPr wrap="square" lIns="0" tIns="0" rIns="0" bIns="0" rtlCol="0" anchor="ctr"/>
-          <a:lstStyle/>
-          <a:p>
-            <a:pPr algn="l" indent="0" marL="0">
+            <a:off x="4727448" y="3931920"/>
+            <a:ext cx="2066544" cy="338328"/>
+          </a:xfrm>
+          <a:prstGeom prst="rect">
+            <a:avLst/>
+          </a:prstGeom>
+          <a:noFill/>
+          <a:ln/>
+        </p:spPr>
+        <p:txBody>
+          <a:bodyPr wrap="square" lIns="0" tIns="0" rIns="0" bIns="0" rtlCol="0" anchor="ctr"/>
+          <a:lstStyle/>
+          <a:p>
+            <a:pPr algn="r" indent="0" marL="0">
               <a:buNone/>
             </a:pPr>
             <a:r>
               <a:rPr lang="en-US" sz="1050" b="1" dirty="0">
                 <a:solidFill>
-                  <a:srgbClr val="1A1A1A"/>
-                </a:solidFill>
-                <a:latin typeface="メイリオ" pitchFamily="34" charset="0"/>
-                <a:ea typeface="メイリオ" pitchFamily="34" charset="-122"/>
-                <a:cs typeface="メイリオ" pitchFamily="34" charset="-120"/>
-              </a:rPr>
-              <a:t>営業利益</a:t>
+                  <a:srgbClr val="6E6E6E"/>
+                </a:solidFill>
+                <a:latin typeface="メイリオ" pitchFamily="34" charset="0"/>
+                <a:ea typeface="メイリオ" pitchFamily="34" charset="-122"/>
+                <a:cs typeface="メイリオ" pitchFamily="34" charset="-120"/>
+              </a:rPr>
+              <a:t>▲99.6</a:t>
             </a:r>
             <a:endParaRPr lang="en-US" sz="1050" dirty="0"/>
           </a:p>
@@ -4449,8 +4435,8 @@
         </p:nvSpPr>
         <p:spPr>
           <a:xfrm>
-            <a:off x="3538728" y="3730752"/>
-            <a:ext cx="1746504" cy="365760"/>
+            <a:off x="7013448" y="3931920"/>
+            <a:ext cx="2112264" cy="338328"/>
           </a:xfrm>
           <a:prstGeom prst="rect">
             <a:avLst/>
@@ -4468,13 +4454,13 @@
             <a:r>
               <a:rPr lang="en-US" sz="1050" b="1" dirty="0">
                 <a:solidFill>
-                  <a:srgbClr val="6E6E6E"/>
-                </a:solidFill>
-                <a:latin typeface="メイリオ" pitchFamily="34" charset="0"/>
-                <a:ea typeface="メイリオ" pitchFamily="34" charset="-122"/>
-                <a:cs typeface="メイリオ" pitchFamily="34" charset="-120"/>
-              </a:rPr>
-              <a:t>▲99.6</a:t>
+                  <a:srgbClr val="1A1A1A"/>
+                </a:solidFill>
+                <a:latin typeface="メイリオ" pitchFamily="34" charset="0"/>
+                <a:ea typeface="メイリオ" pitchFamily="34" charset="-122"/>
+                <a:cs typeface="メイリオ" pitchFamily="34" charset="-120"/>
+              </a:rPr>
+              <a:t>＋32.9</a:t>
             </a:r>
             <a:endParaRPr lang="en-US" sz="1050" dirty="0"/>
           </a:p>
@@ -4488,8 +4474,8 @@
         </p:nvSpPr>
         <p:spPr>
           <a:xfrm>
-            <a:off x="5504688" y="3730752"/>
-            <a:ext cx="1746504" cy="365760"/>
+            <a:off x="9345168" y="3931920"/>
+            <a:ext cx="2112264" cy="338328"/>
           </a:xfrm>
           <a:prstGeom prst="rect">
             <a:avLst/>
@@ -4513,7 +4499,7 @@
                 <a:ea typeface="メイリオ" pitchFamily="34" charset="-122"/>
                 <a:cs typeface="メイリオ" pitchFamily="34" charset="-120"/>
               </a:rPr>
-              <a:t>＋32.9</a:t>
+              <a:t>＋95.6</a:t>
             </a:r>
             <a:endParaRPr lang="en-US" sz="1050" dirty="0"/>
           </a:p>
@@ -4521,92 +4507,14 @@
       </p:sp>
       <p:sp>
         <p:nvSpPr>
-          <p:cNvPr id="44" name="Text 42"/>
-          <p:cNvSpPr/>
-          <p:nvPr/>
-        </p:nvSpPr>
-        <p:spPr>
-          <a:xfrm>
-            <a:off x="7470648" y="3730752"/>
-            <a:ext cx="1746504" cy="365760"/>
-          </a:xfrm>
-          <a:prstGeom prst="rect">
-            <a:avLst/>
-          </a:prstGeom>
-          <a:noFill/>
-          <a:ln/>
-        </p:spPr>
-        <p:txBody>
-          <a:bodyPr wrap="square" lIns="0" tIns="0" rIns="0" bIns="0" rtlCol="0" anchor="ctr"/>
-          <a:lstStyle/>
-          <a:p>
-            <a:pPr algn="r" indent="0" marL="0">
-              <a:buNone/>
-            </a:pPr>
-            <a:r>
-              <a:rPr lang="en-US" sz="1050" b="1" dirty="0">
-                <a:solidFill>
-                  <a:srgbClr val="1A1A1A"/>
-                </a:solidFill>
-                <a:latin typeface="メイリオ" pitchFamily="34" charset="0"/>
-                <a:ea typeface="メイリオ" pitchFamily="34" charset="-122"/>
-                <a:cs typeface="メイリオ" pitchFamily="34" charset="-120"/>
-              </a:rPr>
-              <a:t>＋115.0</a:t>
-            </a:r>
-            <a:endParaRPr lang="en-US" sz="1050" dirty="0"/>
-          </a:p>
-        </p:txBody>
-      </p:sp>
-      <p:sp>
-        <p:nvSpPr>
-          <p:cNvPr id="45" name="Text 43"/>
-          <p:cNvSpPr/>
-          <p:nvPr/>
-        </p:nvSpPr>
-        <p:spPr>
-          <a:xfrm>
-            <a:off x="9436608" y="3730752"/>
-            <a:ext cx="1837944" cy="365760"/>
-          </a:xfrm>
-          <a:prstGeom prst="rect">
-            <a:avLst/>
-          </a:prstGeom>
-          <a:noFill/>
-          <a:ln/>
-        </p:spPr>
-        <p:txBody>
-          <a:bodyPr wrap="square" lIns="0" tIns="0" rIns="0" bIns="0" rtlCol="0" anchor="ctr"/>
-          <a:lstStyle/>
-          <a:p>
-            <a:pPr algn="r" indent="0" marL="0">
-              <a:buNone/>
-            </a:pPr>
-            <a:r>
-              <a:rPr lang="en-US" sz="1050" b="1" dirty="0">
-                <a:solidFill>
-                  <a:srgbClr val="1A1A1A"/>
-                </a:solidFill>
-                <a:latin typeface="メイリオ" pitchFamily="34" charset="0"/>
-                <a:ea typeface="メイリオ" pitchFamily="34" charset="-122"/>
-                <a:cs typeface="メイリオ" pitchFamily="34" charset="-120"/>
-              </a:rPr>
-              <a:t>＋8.8</a:t>
-            </a:r>
-            <a:endParaRPr lang="en-US" sz="1050" dirty="0"/>
-          </a:p>
-        </p:txBody>
-      </p:sp>
-      <p:sp>
-        <p:nvSpPr>
-          <p:cNvPr id="46" name="Shape 44"/>
-          <p:cNvSpPr/>
-          <p:nvPr/>
-        </p:nvSpPr>
-        <p:spPr>
-          <a:xfrm>
-            <a:off x="594360" y="4096512"/>
-            <a:ext cx="10789920" cy="365760"/>
+          <p:cNvPr id="44" name="Shape 42"/>
+          <p:cNvSpPr/>
+          <p:nvPr/>
+        </p:nvSpPr>
+        <p:spPr>
+          <a:xfrm>
+            <a:off x="594360" y="4270248"/>
+            <a:ext cx="10972800" cy="338328"/>
           </a:xfrm>
           <a:prstGeom prst="rect">
             <a:avLst/>
@@ -4624,26 +4532,104 @@
       </p:sp>
       <p:sp>
         <p:nvSpPr>
+          <p:cNvPr id="45" name="Text 43"/>
+          <p:cNvSpPr/>
+          <p:nvPr/>
+        </p:nvSpPr>
+        <p:spPr>
+          <a:xfrm>
+            <a:off x="704088" y="4270248"/>
+            <a:ext cx="3803904" cy="338328"/>
+          </a:xfrm>
+          <a:prstGeom prst="rect">
+            <a:avLst/>
+          </a:prstGeom>
+          <a:noFill/>
+          <a:ln/>
+        </p:spPr>
+        <p:txBody>
+          <a:bodyPr wrap="square" lIns="0" tIns="0" rIns="0" bIns="0" rtlCol="0" anchor="ctr"/>
+          <a:lstStyle/>
+          <a:p>
+            <a:pPr algn="l" indent="0" marL="0">
+              <a:buNone/>
+            </a:pPr>
+            <a:r>
+              <a:rPr lang="en-US" sz="1050" b="1" dirty="0">
+                <a:solidFill>
+                  <a:srgbClr val="1A1A1A"/>
+                </a:solidFill>
+                <a:latin typeface="メイリオ" pitchFamily="34" charset="0"/>
+                <a:ea typeface="メイリオ" pitchFamily="34" charset="-122"/>
+                <a:cs typeface="メイリオ" pitchFamily="34" charset="-120"/>
+              </a:rPr>
+              <a:t>経常利益</a:t>
+            </a:r>
+            <a:endParaRPr lang="en-US" sz="1050" dirty="0"/>
+          </a:p>
+        </p:txBody>
+      </p:sp>
+      <p:sp>
+        <p:nvSpPr>
+          <p:cNvPr id="46" name="Text 44"/>
+          <p:cNvSpPr/>
+          <p:nvPr/>
+        </p:nvSpPr>
+        <p:spPr>
+          <a:xfrm>
+            <a:off x="4727448" y="4270248"/>
+            <a:ext cx="2066544" cy="338328"/>
+          </a:xfrm>
+          <a:prstGeom prst="rect">
+            <a:avLst/>
+          </a:prstGeom>
+          <a:noFill/>
+          <a:ln/>
+        </p:spPr>
+        <p:txBody>
+          <a:bodyPr wrap="square" lIns="0" tIns="0" rIns="0" bIns="0" rtlCol="0" anchor="ctr"/>
+          <a:lstStyle/>
+          <a:p>
+            <a:pPr algn="r" indent="0" marL="0">
+              <a:buNone/>
+            </a:pPr>
+            <a:r>
+              <a:rPr lang="en-US" sz="1050" b="1" dirty="0">
+                <a:solidFill>
+                  <a:srgbClr val="6E6E6E"/>
+                </a:solidFill>
+                <a:latin typeface="メイリオ" pitchFamily="34" charset="0"/>
+                <a:ea typeface="メイリオ" pitchFamily="34" charset="-122"/>
+                <a:cs typeface="メイリオ" pitchFamily="34" charset="-120"/>
+              </a:rPr>
+              <a:t>▲114.6</a:t>
+            </a:r>
+            <a:endParaRPr lang="en-US" sz="1050" dirty="0"/>
+          </a:p>
+        </p:txBody>
+      </p:sp>
+      <p:sp>
+        <p:nvSpPr>
           <p:cNvPr id="47" name="Text 45"/>
           <p:cNvSpPr/>
           <p:nvPr/>
         </p:nvSpPr>
         <p:spPr>
           <a:xfrm>
-            <a:off x="704088" y="4096512"/>
-            <a:ext cx="2615184" cy="365760"/>
-          </a:xfrm>
-          <a:prstGeom prst="rect">
-            <a:avLst/>
-          </a:prstGeom>
-          <a:noFill/>
-          <a:ln/>
-        </p:spPr>
-        <p:txBody>
-          <a:bodyPr wrap="square" lIns="0" tIns="0" rIns="0" bIns="0" rtlCol="0" anchor="ctr"/>
-          <a:lstStyle/>
-          <a:p>
-            <a:pPr algn="l" indent="0" marL="0">
+            <a:off x="7013448" y="4270248"/>
+            <a:ext cx="2112264" cy="338328"/>
+          </a:xfrm>
+          <a:prstGeom prst="rect">
+            <a:avLst/>
+          </a:prstGeom>
+          <a:noFill/>
+          <a:ln/>
+        </p:spPr>
+        <p:txBody>
+          <a:bodyPr wrap="square" lIns="0" tIns="0" rIns="0" bIns="0" rtlCol="0" anchor="ctr"/>
+          <a:lstStyle/>
+          <a:p>
+            <a:pPr algn="r" indent="0" marL="0">
               <a:buNone/>
             </a:pPr>
             <a:r>
@@ -4655,7 +4641,7 @@
                 <a:ea typeface="メイリオ" pitchFamily="34" charset="-122"/>
                 <a:cs typeface="メイリオ" pitchFamily="34" charset="-120"/>
               </a:rPr>
-              <a:t>経常利益</a:t>
+              <a:t>＋17.9</a:t>
             </a:r>
             <a:endParaRPr lang="en-US" sz="1050" dirty="0"/>
           </a:p>
@@ -4669,8 +4655,8 @@
         </p:nvSpPr>
         <p:spPr>
           <a:xfrm>
-            <a:off x="3538728" y="4096512"/>
-            <a:ext cx="1746504" cy="365760"/>
+            <a:off x="9345168" y="4270248"/>
+            <a:ext cx="2112264" cy="338328"/>
           </a:xfrm>
           <a:prstGeom prst="rect">
             <a:avLst/>
@@ -4688,13 +4674,13 @@
             <a:r>
               <a:rPr lang="en-US" sz="1050" b="1" dirty="0">
                 <a:solidFill>
-                  <a:srgbClr val="6E6E6E"/>
-                </a:solidFill>
-                <a:latin typeface="メイリオ" pitchFamily="34" charset="0"/>
-                <a:ea typeface="メイリオ" pitchFamily="34" charset="-122"/>
-                <a:cs typeface="メイリオ" pitchFamily="34" charset="-120"/>
-              </a:rPr>
-              <a:t>▲114.6</a:t>
+                  <a:srgbClr val="1A1A1A"/>
+                </a:solidFill>
+                <a:latin typeface="メイリオ" pitchFamily="34" charset="0"/>
+                <a:ea typeface="メイリオ" pitchFamily="34" charset="-122"/>
+                <a:cs typeface="メイリオ" pitchFamily="34" charset="-120"/>
+              </a:rPr>
+              <a:t>＋80.6</a:t>
             </a:r>
             <a:endParaRPr lang="en-US" sz="1050" dirty="0"/>
           </a:p>
@@ -4702,131 +4688,14 @@
       </p:sp>
       <p:sp>
         <p:nvSpPr>
-          <p:cNvPr id="49" name="Text 47"/>
-          <p:cNvSpPr/>
-          <p:nvPr/>
-        </p:nvSpPr>
-        <p:spPr>
-          <a:xfrm>
-            <a:off x="5504688" y="4096512"/>
-            <a:ext cx="1746504" cy="365760"/>
-          </a:xfrm>
-          <a:prstGeom prst="rect">
-            <a:avLst/>
-          </a:prstGeom>
-          <a:noFill/>
-          <a:ln/>
-        </p:spPr>
-        <p:txBody>
-          <a:bodyPr wrap="square" lIns="0" tIns="0" rIns="0" bIns="0" rtlCol="0" anchor="ctr"/>
-          <a:lstStyle/>
-          <a:p>
-            <a:pPr algn="r" indent="0" marL="0">
-              <a:buNone/>
-            </a:pPr>
-            <a:r>
-              <a:rPr lang="en-US" sz="1050" b="1" dirty="0">
-                <a:solidFill>
-                  <a:srgbClr val="1A1A1A"/>
-                </a:solidFill>
-                <a:latin typeface="メイリオ" pitchFamily="34" charset="0"/>
-                <a:ea typeface="メイリオ" pitchFamily="34" charset="-122"/>
-                <a:cs typeface="メイリオ" pitchFamily="34" charset="-120"/>
-              </a:rPr>
-              <a:t>＋17.9</a:t>
-            </a:r>
-            <a:endParaRPr lang="en-US" sz="1050" dirty="0"/>
-          </a:p>
-        </p:txBody>
-      </p:sp>
-      <p:sp>
-        <p:nvSpPr>
-          <p:cNvPr id="50" name="Text 48"/>
-          <p:cNvSpPr/>
-          <p:nvPr/>
-        </p:nvSpPr>
-        <p:spPr>
-          <a:xfrm>
-            <a:off x="7470648" y="4096512"/>
-            <a:ext cx="1746504" cy="365760"/>
-          </a:xfrm>
-          <a:prstGeom prst="rect">
-            <a:avLst/>
-          </a:prstGeom>
-          <a:noFill/>
-          <a:ln/>
-        </p:spPr>
-        <p:txBody>
-          <a:bodyPr wrap="square" lIns="0" tIns="0" rIns="0" bIns="0" rtlCol="0" anchor="ctr"/>
-          <a:lstStyle/>
-          <a:p>
-            <a:pPr algn="r" indent="0" marL="0">
-              <a:buNone/>
-            </a:pPr>
-            <a:r>
-              <a:rPr lang="en-US" sz="1050" b="1" dirty="0">
-                <a:solidFill>
-                  <a:srgbClr val="1A1A1A"/>
-                </a:solidFill>
-                <a:latin typeface="メイリオ" pitchFamily="34" charset="0"/>
-                <a:ea typeface="メイリオ" pitchFamily="34" charset="-122"/>
-                <a:cs typeface="メイリオ" pitchFamily="34" charset="-120"/>
-              </a:rPr>
-              <a:t>＋100.0</a:t>
-            </a:r>
-            <a:endParaRPr lang="en-US" sz="1050" dirty="0"/>
-          </a:p>
-        </p:txBody>
-      </p:sp>
-      <p:sp>
-        <p:nvSpPr>
-          <p:cNvPr id="51" name="Text 49"/>
-          <p:cNvSpPr/>
-          <p:nvPr/>
-        </p:nvSpPr>
-        <p:spPr>
-          <a:xfrm>
-            <a:off x="9436608" y="4096512"/>
-            <a:ext cx="1837944" cy="365760"/>
-          </a:xfrm>
-          <a:prstGeom prst="rect">
-            <a:avLst/>
-          </a:prstGeom>
-          <a:noFill/>
-          <a:ln/>
-        </p:spPr>
-        <p:txBody>
-          <a:bodyPr wrap="square" lIns="0" tIns="0" rIns="0" bIns="0" rtlCol="0" anchor="ctr"/>
-          <a:lstStyle/>
-          <a:p>
-            <a:pPr algn="r" indent="0" marL="0">
-              <a:buNone/>
-            </a:pPr>
-            <a:r>
-              <a:rPr lang="en-US" sz="1050" b="1" dirty="0">
-                <a:solidFill>
-                  <a:srgbClr val="6E6E6E"/>
-                </a:solidFill>
-                <a:latin typeface="メイリオ" pitchFamily="34" charset="0"/>
-                <a:ea typeface="メイリオ" pitchFamily="34" charset="-122"/>
-                <a:cs typeface="メイリオ" pitchFamily="34" charset="-120"/>
-              </a:rPr>
-              <a:t>▲6.2</a:t>
-            </a:r>
-            <a:endParaRPr lang="en-US" sz="1050" dirty="0"/>
-          </a:p>
-        </p:txBody>
-      </p:sp>
-      <p:sp>
-        <p:nvSpPr>
-          <p:cNvPr id="52" name="Shape 50"/>
-          <p:cNvSpPr/>
-          <p:nvPr/>
-        </p:nvSpPr>
-        <p:spPr>
-          <a:xfrm>
-            <a:off x="594360" y="4462272"/>
-            <a:ext cx="10789920" cy="365760"/>
+          <p:cNvPr id="49" name="Shape 47"/>
+          <p:cNvSpPr/>
+          <p:nvPr/>
+        </p:nvSpPr>
+        <p:spPr>
+          <a:xfrm>
+            <a:off x="594360" y="4608576"/>
+            <a:ext cx="10972800" cy="338328"/>
           </a:xfrm>
           <a:prstGeom prst="rect">
             <a:avLst/>
@@ -4844,26 +4713,143 @@
       </p:sp>
       <p:sp>
         <p:nvSpPr>
+          <p:cNvPr id="50" name="Text 48"/>
+          <p:cNvSpPr/>
+          <p:nvPr/>
+        </p:nvSpPr>
+        <p:spPr>
+          <a:xfrm>
+            <a:off x="704088" y="4608576"/>
+            <a:ext cx="3803904" cy="338328"/>
+          </a:xfrm>
+          <a:prstGeom prst="rect">
+            <a:avLst/>
+          </a:prstGeom>
+          <a:noFill/>
+          <a:ln/>
+        </p:spPr>
+        <p:txBody>
+          <a:bodyPr wrap="square" lIns="0" tIns="0" rIns="0" bIns="0" rtlCol="0" anchor="ctr"/>
+          <a:lstStyle/>
+          <a:p>
+            <a:pPr algn="l" indent="0" marL="0">
+              <a:buNone/>
+            </a:pPr>
+            <a:r>
+              <a:rPr lang="en-US" sz="1050" b="1" dirty="0">
+                <a:solidFill>
+                  <a:srgbClr val="1A1A1A"/>
+                </a:solidFill>
+                <a:latin typeface="メイリオ" pitchFamily="34" charset="0"/>
+                <a:ea typeface="メイリオ" pitchFamily="34" charset="-122"/>
+                <a:cs typeface="メイリオ" pitchFamily="34" charset="-120"/>
+              </a:rPr>
+              <a:t>期中 最低現預金</a:t>
+            </a:r>
+            <a:endParaRPr lang="en-US" sz="1050" dirty="0"/>
+          </a:p>
+        </p:txBody>
+      </p:sp>
+      <p:sp>
+        <p:nvSpPr>
+          <p:cNvPr id="51" name="Text 49"/>
+          <p:cNvSpPr/>
+          <p:nvPr/>
+        </p:nvSpPr>
+        <p:spPr>
+          <a:xfrm>
+            <a:off x="4727448" y="4608576"/>
+            <a:ext cx="2066544" cy="338328"/>
+          </a:xfrm>
+          <a:prstGeom prst="rect">
+            <a:avLst/>
+          </a:prstGeom>
+          <a:noFill/>
+          <a:ln/>
+        </p:spPr>
+        <p:txBody>
+          <a:bodyPr wrap="square" lIns="0" tIns="0" rIns="0" bIns="0" rtlCol="0" anchor="ctr"/>
+          <a:lstStyle/>
+          <a:p>
+            <a:pPr algn="r" indent="0" marL="0">
+              <a:buNone/>
+            </a:pPr>
+            <a:r>
+              <a:rPr lang="en-US" sz="1050" b="1" dirty="0">
+                <a:solidFill>
+                  <a:srgbClr val="1A1A1A"/>
+                </a:solidFill>
+                <a:latin typeface="メイリオ" pitchFamily="34" charset="0"/>
+                <a:ea typeface="メイリオ" pitchFamily="34" charset="-122"/>
+                <a:cs typeface="メイリオ" pitchFamily="34" charset="-120"/>
+              </a:rPr>
+              <a:t>－</a:t>
+            </a:r>
+            <a:endParaRPr lang="en-US" sz="1050" dirty="0"/>
+          </a:p>
+        </p:txBody>
+      </p:sp>
+      <p:sp>
+        <p:nvSpPr>
+          <p:cNvPr id="52" name="Text 50"/>
+          <p:cNvSpPr/>
+          <p:nvPr/>
+        </p:nvSpPr>
+        <p:spPr>
+          <a:xfrm>
+            <a:off x="7013448" y="4608576"/>
+            <a:ext cx="2112264" cy="338328"/>
+          </a:xfrm>
+          <a:prstGeom prst="rect">
+            <a:avLst/>
+          </a:prstGeom>
+          <a:noFill/>
+          <a:ln/>
+        </p:spPr>
+        <p:txBody>
+          <a:bodyPr wrap="square" lIns="0" tIns="0" rIns="0" bIns="0" rtlCol="0" anchor="ctr"/>
+          <a:lstStyle/>
+          <a:p>
+            <a:pPr algn="r" indent="0" marL="0">
+              <a:buNone/>
+            </a:pPr>
+            <a:r>
+              <a:rPr lang="en-US" sz="1050" b="1" dirty="0">
+                <a:solidFill>
+                  <a:srgbClr val="1A1A1A"/>
+                </a:solidFill>
+                <a:latin typeface="メイリオ" pitchFamily="34" charset="0"/>
+                <a:ea typeface="メイリオ" pitchFamily="34" charset="-122"/>
+                <a:cs typeface="メイリオ" pitchFamily="34" charset="-120"/>
+              </a:rPr>
+              <a:t>－</a:t>
+            </a:r>
+            <a:endParaRPr lang="en-US" sz="1050" dirty="0"/>
+          </a:p>
+        </p:txBody>
+      </p:sp>
+      <p:sp>
+        <p:nvSpPr>
           <p:cNvPr id="53" name="Text 51"/>
           <p:cNvSpPr/>
           <p:nvPr/>
         </p:nvSpPr>
         <p:spPr>
           <a:xfrm>
-            <a:off x="704088" y="4462272"/>
-            <a:ext cx="2615184" cy="365760"/>
-          </a:xfrm>
-          <a:prstGeom prst="rect">
-            <a:avLst/>
-          </a:prstGeom>
-          <a:noFill/>
-          <a:ln/>
-        </p:spPr>
-        <p:txBody>
-          <a:bodyPr wrap="square" lIns="0" tIns="0" rIns="0" bIns="0" rtlCol="0" anchor="ctr"/>
-          <a:lstStyle/>
-          <a:p>
-            <a:pPr algn="l" indent="0" marL="0">
+            <a:off x="9345168" y="4608576"/>
+            <a:ext cx="2112264" cy="338328"/>
+          </a:xfrm>
+          <a:prstGeom prst="rect">
+            <a:avLst/>
+          </a:prstGeom>
+          <a:noFill/>
+          <a:ln/>
+        </p:spPr>
+        <p:txBody>
+          <a:bodyPr wrap="square" lIns="0" tIns="0" rIns="0" bIns="0" rtlCol="0" anchor="ctr"/>
+          <a:lstStyle/>
+          <a:p>
+            <a:pPr algn="r" indent="0" marL="0">
               <a:buNone/>
             </a:pPr>
             <a:r>
@@ -4875,7 +4861,7 @@
                 <a:ea typeface="メイリオ" pitchFamily="34" charset="-122"/>
                 <a:cs typeface="メイリオ" pitchFamily="34" charset="-120"/>
               </a:rPr>
-              <a:t>期中 最低現預金</a:t>
+              <a:t>＋14.6</a:t>
             </a:r>
             <a:endParaRPr lang="en-US" sz="1050" dirty="0"/>
           </a:p>
@@ -4883,163 +4869,7 @@
       </p:sp>
       <p:sp>
         <p:nvSpPr>
-          <p:cNvPr id="54" name="Text 52"/>
-          <p:cNvSpPr/>
-          <p:nvPr/>
-        </p:nvSpPr>
-        <p:spPr>
-          <a:xfrm>
-            <a:off x="3538728" y="4462272"/>
-            <a:ext cx="1746504" cy="365760"/>
-          </a:xfrm>
-          <a:prstGeom prst="rect">
-            <a:avLst/>
-          </a:prstGeom>
-          <a:noFill/>
-          <a:ln/>
-        </p:spPr>
-        <p:txBody>
-          <a:bodyPr wrap="square" lIns="0" tIns="0" rIns="0" bIns="0" rtlCol="0" anchor="ctr"/>
-          <a:lstStyle/>
-          <a:p>
-            <a:pPr algn="r" indent="0" marL="0">
-              <a:buNone/>
-            </a:pPr>
-            <a:r>
-              <a:rPr lang="en-US" sz="1050" b="1" dirty="0">
-                <a:solidFill>
-                  <a:srgbClr val="1A1A1A"/>
-                </a:solidFill>
-                <a:latin typeface="メイリオ" pitchFamily="34" charset="0"/>
-                <a:ea typeface="メイリオ" pitchFamily="34" charset="-122"/>
-                <a:cs typeface="メイリオ" pitchFamily="34" charset="-120"/>
-              </a:rPr>
-              <a:t>－</a:t>
-            </a:r>
-            <a:endParaRPr lang="en-US" sz="1050" dirty="0"/>
-          </a:p>
-        </p:txBody>
-      </p:sp>
-      <p:sp>
-        <p:nvSpPr>
-          <p:cNvPr id="55" name="Text 53"/>
-          <p:cNvSpPr/>
-          <p:nvPr/>
-        </p:nvSpPr>
-        <p:spPr>
-          <a:xfrm>
-            <a:off x="5504688" y="4462272"/>
-            <a:ext cx="1746504" cy="365760"/>
-          </a:xfrm>
-          <a:prstGeom prst="rect">
-            <a:avLst/>
-          </a:prstGeom>
-          <a:noFill/>
-          <a:ln/>
-        </p:spPr>
-        <p:txBody>
-          <a:bodyPr wrap="square" lIns="0" tIns="0" rIns="0" bIns="0" rtlCol="0" anchor="ctr"/>
-          <a:lstStyle/>
-          <a:p>
-            <a:pPr algn="r" indent="0" marL="0">
-              <a:buNone/>
-            </a:pPr>
-            <a:r>
-              <a:rPr lang="en-US" sz="1050" b="1" dirty="0">
-                <a:solidFill>
-                  <a:srgbClr val="1A1A1A"/>
-                </a:solidFill>
-                <a:latin typeface="メイリオ" pitchFamily="34" charset="0"/>
-                <a:ea typeface="メイリオ" pitchFamily="34" charset="-122"/>
-                <a:cs typeface="メイリオ" pitchFamily="34" charset="-120"/>
-              </a:rPr>
-              <a:t>－</a:t>
-            </a:r>
-            <a:endParaRPr lang="en-US" sz="1050" dirty="0"/>
-          </a:p>
-        </p:txBody>
-      </p:sp>
-      <p:sp>
-        <p:nvSpPr>
-          <p:cNvPr id="56" name="Text 54"/>
-          <p:cNvSpPr/>
-          <p:nvPr/>
-        </p:nvSpPr>
-        <p:spPr>
-          <a:xfrm>
-            <a:off x="7470648" y="4462272"/>
-            <a:ext cx="1746504" cy="365760"/>
-          </a:xfrm>
-          <a:prstGeom prst="rect">
-            <a:avLst/>
-          </a:prstGeom>
-          <a:noFill/>
-          <a:ln/>
-        </p:spPr>
-        <p:txBody>
-          <a:bodyPr wrap="square" lIns="0" tIns="0" rIns="0" bIns="0" rtlCol="0" anchor="ctr"/>
-          <a:lstStyle/>
-          <a:p>
-            <a:pPr algn="r" indent="0" marL="0">
-              <a:buNone/>
-            </a:pPr>
-            <a:r>
-              <a:rPr lang="en-US" sz="1050" b="1" dirty="0">
-                <a:solidFill>
-                  <a:srgbClr val="1A1A1A"/>
-                </a:solidFill>
-                <a:latin typeface="メイリオ" pitchFamily="34" charset="0"/>
-                <a:ea typeface="メイリオ" pitchFamily="34" charset="-122"/>
-                <a:cs typeface="メイリオ" pitchFamily="34" charset="-120"/>
-              </a:rPr>
-              <a:t>－</a:t>
-            </a:r>
-            <a:endParaRPr lang="en-US" sz="1050" dirty="0"/>
-          </a:p>
-        </p:txBody>
-      </p:sp>
-      <p:sp>
-        <p:nvSpPr>
-          <p:cNvPr id="57" name="Text 55"/>
-          <p:cNvSpPr/>
-          <p:nvPr/>
-        </p:nvSpPr>
-        <p:spPr>
-          <a:xfrm>
-            <a:off x="9436608" y="4462272"/>
-            <a:ext cx="1837944" cy="365760"/>
-          </a:xfrm>
-          <a:prstGeom prst="rect">
-            <a:avLst/>
-          </a:prstGeom>
-          <a:noFill/>
-          <a:ln/>
-        </p:spPr>
-        <p:txBody>
-          <a:bodyPr wrap="square" lIns="0" tIns="0" rIns="0" bIns="0" rtlCol="0" anchor="ctr"/>
-          <a:lstStyle/>
-          <a:p>
-            <a:pPr algn="r" indent="0" marL="0">
-              <a:buNone/>
-            </a:pPr>
-            <a:r>
-              <a:rPr lang="en-US" sz="1050" b="1" dirty="0">
-                <a:solidFill>
-                  <a:srgbClr val="1A1A1A"/>
-                </a:solidFill>
-                <a:latin typeface="メイリオ" pitchFamily="34" charset="0"/>
-                <a:ea typeface="メイリオ" pitchFamily="34" charset="-122"/>
-                <a:cs typeface="メイリオ" pitchFamily="34" charset="-120"/>
-              </a:rPr>
-              <a:t>＋14.6</a:t>
-            </a:r>
-            <a:endParaRPr lang="en-US" sz="1050" dirty="0"/>
-          </a:p>
-        </p:txBody>
-      </p:sp>
-      <p:sp>
-        <p:nvSpPr>
-          <p:cNvPr id="58" name="Shape 56"/>
+          <p:cNvPr id="54" name="Shape 52"/>
           <p:cNvSpPr/>
           <p:nvPr/>
         </p:nvSpPr>
@@ -5073,7 +4903,7 @@
       </p:sp>
       <p:sp>
         <p:nvSpPr>
-          <p:cNvPr id="59" name="Text 57"/>
+          <p:cNvPr id="55" name="Text 53"/>
           <p:cNvSpPr/>
           <p:nvPr/>
         </p:nvSpPr>
@@ -5104,7 +4934,7 @@
                 <a:ea typeface="メイリオ" pitchFamily="34" charset="-122"/>
                 <a:cs typeface="メイリオ" pitchFamily="34" charset="-120"/>
               </a:rPr>
-              <a:t>A〜C は粗利率51.5%を前提</a:t>
+              <a:t>Cの粗利の内訳</a:t>
             </a:r>
             <a:endParaRPr lang="en-US" sz="1100" dirty="0"/>
           </a:p>
@@ -5112,7 +4942,7 @@
       </p:sp>
       <p:sp>
         <p:nvSpPr>
-          <p:cNvPr id="60" name="Text 58"/>
+          <p:cNvPr id="56" name="Text 54"/>
           <p:cNvSpPr/>
           <p:nvPr/>
         </p:nvSpPr>
@@ -5143,7 +4973,7 @@
                 <a:ea typeface="メイリオ" pitchFamily="34" charset="-122"/>
                 <a:cs typeface="メイリオ" pitchFamily="34" charset="-120"/>
               </a:rPr>
-              <a:t>2026年4-6月の実績値。ただしこの水準は大口の在庫販売が入らなかった3か月のもので、通期で維持できる保証はありません。</a:t>
+              <a:t>既存389.1×51.5%＝200.6　／　差額208.9×30%＝62.7　／　上乗せ132.5×100%＝132.5。合計395.8百万円です。</a:t>
             </a:r>
             <a:endParaRPr lang="en-US" sz="1050" dirty="0"/>
           </a:p>
@@ -5151,7 +4981,7 @@
       </p:sp>
       <p:sp>
         <p:nvSpPr>
-          <p:cNvPr id="61" name="Shape 59"/>
+          <p:cNvPr id="57" name="Shape 55"/>
           <p:cNvSpPr/>
           <p:nvPr/>
         </p:nvSpPr>
@@ -5185,7 +5015,7 @@
       </p:sp>
       <p:sp>
         <p:nvSpPr>
-          <p:cNvPr id="62" name="Text 60"/>
+          <p:cNvPr id="58" name="Text 56"/>
           <p:cNvSpPr/>
           <p:nvPr/>
         </p:nvSpPr>
@@ -5216,7 +5046,7 @@
                 <a:ea typeface="メイリオ" pitchFamily="34" charset="-122"/>
                 <a:cs typeface="メイリオ" pitchFamily="34" charset="-120"/>
               </a:rPr>
-              <a:t>D は粗利率29.5%を前提</a:t>
+              <a:t>差額売上の粗利率30%の根拠</a:t>
             </a:r>
             <a:endParaRPr lang="en-US" sz="1100" dirty="0"/>
           </a:p>
@@ -5224,7 +5054,7 @@
       </p:sp>
       <p:sp>
         <p:nvSpPr>
-          <p:cNvPr id="63" name="Text 61"/>
+          <p:cNvPr id="59" name="Text 57"/>
           <p:cNvSpPr/>
           <p:nvPr/>
         </p:nvSpPr>
@@ -5255,7 +5085,7 @@
                 <a:ea typeface="メイリオ" pitchFamily="34" charset="-122"/>
                 <a:cs typeface="メイリオ" pitchFamily="34" charset="-120"/>
               </a:rPr>
-              <a:t>FY2025・FY2026の加重平均。大口の在庫販売を含む実績なので、より実態に近い保守値です。損益は均衡ですが資金は回ります。</a:t>
+              <a:t>既存事業の実績はFY2025 26.8%・FY2026 32.4%。その水準に合わせ、4-6月実績の51.5%は差額分には適用していません。</a:t>
             </a:r>
             <a:endParaRPr lang="en-US" sz="1050" dirty="0"/>
           </a:p>
@@ -5263,7 +5093,7 @@
       </p:sp>
       <p:sp>
         <p:nvSpPr>
-          <p:cNvPr id="64" name="Text 62"/>
+          <p:cNvPr id="60" name="Text 58"/>
           <p:cNvSpPr/>
           <p:nvPr/>
         </p:nvSpPr>
@@ -6493,7 +6323,7 @@
                 <a:ea typeface="メイリオ" pitchFamily="34" charset="-122"/>
                 <a:cs typeface="メイリオ" pitchFamily="34" charset="-120"/>
               </a:rPr>
-              <a:t>421.6百万円</a:t>
+              <a:t>334.8百万円</a:t>
             </a:r>
             <a:endParaRPr lang="en-US" sz="1800" dirty="0"/>
           </a:p>
@@ -6605,7 +6435,7 @@
                 <a:ea typeface="メイリオ" pitchFamily="34" charset="-122"/>
                 <a:cs typeface="メイリオ" pitchFamily="34" charset="-120"/>
               </a:rPr>
-              <a:t>417.5百万円</a:t>
+              <a:t>504.3百万円</a:t>
             </a:r>
             <a:endParaRPr lang="en-US" sz="1800" dirty="0"/>
           </a:p>
@@ -6678,7 +6508,7 @@
                 <a:ea typeface="メイリオ" pitchFamily="34" charset="-122"/>
                 <a:cs typeface="メイリオ" pitchFamily="34" charset="-120"/>
               </a:rPr>
-              <a:t>仕入419.1百万円と売上原価421.6百万円がほぼ見合うため、在庫は420.0→417.5百万円と横ばい。仕入を維持しながら在庫に資金を固定しません。</a:t>
+              <a:t>在庫は420.0→504.3百万円と84.3百万円積み上がりますが、時価1.37倍の換価可能資産です。運転資金としてのご理解をお願いしたい部分です。</a:t>
             </a:r>
             <a:endParaRPr lang="en-US" sz="1200" dirty="0"/>
           </a:p>
@@ -6788,7 +6618,7 @@
                 <a:ea typeface="メイリオ" pitchFamily="34" charset="-122"/>
                 <a:cs typeface="メイリオ" pitchFamily="34" charset="-120"/>
               </a:rPr>
-              <a:t>FY2027 月次推移表 － プランD</a:t>
+              <a:t>FY2027 月次推移表 － プランC</a:t>
             </a:r>
             <a:endParaRPr lang="en-US" sz="2900" dirty="0"/>
           </a:p>
@@ -6827,7 +6657,7 @@
                 <a:ea typeface="メイリオ" pitchFamily="34" charset="-122"/>
                 <a:cs typeface="メイリオ" pitchFamily="34" charset="-120"/>
               </a:rPr>
-              <a:t>売上は前期・今期並み、既存事業の粗利率は29.5%（保守）。上乗せ案件132.5百万円は原価なし。単位：百万円</a:t>
+              <a:t>既存389.1（51.5%）＋差額208.9（30%）＋上乗せ132.5（原価なし）。単位：百万円</a:t>
             </a:r>
             <a:endParaRPr lang="en-US" sz="1250" dirty="0"/>
           </a:p>
@@ -8067,7 +7897,7 @@
                 <a:ea typeface="メイリオ" pitchFamily="34" charset="-122"/>
                 <a:cs typeface="メイリオ" pitchFamily="34" charset="-120"/>
               </a:rPr>
-              <a:t>▲35.1</a:t>
+              <a:t>▲27.9</a:t>
             </a:r>
             <a:endParaRPr lang="en-US" sz="850" dirty="0"/>
           </a:p>
@@ -8106,7 +7936,7 @@
                 <a:ea typeface="メイリオ" pitchFamily="34" charset="-122"/>
                 <a:cs typeface="メイリオ" pitchFamily="34" charset="-120"/>
               </a:rPr>
-              <a:t>▲35.1</a:t>
+              <a:t>▲27.9</a:t>
             </a:r>
             <a:endParaRPr lang="en-US" sz="850" dirty="0"/>
           </a:p>
@@ -8145,7 +7975,7 @@
                 <a:ea typeface="メイリオ" pitchFamily="34" charset="-122"/>
                 <a:cs typeface="メイリオ" pitchFamily="34" charset="-120"/>
               </a:rPr>
-              <a:t>▲35.1</a:t>
+              <a:t>▲27.9</a:t>
             </a:r>
             <a:endParaRPr lang="en-US" sz="850" dirty="0"/>
           </a:p>
@@ -8184,7 +8014,7 @@
                 <a:ea typeface="メイリオ" pitchFamily="34" charset="-122"/>
                 <a:cs typeface="メイリオ" pitchFamily="34" charset="-120"/>
               </a:rPr>
-              <a:t>▲35.1</a:t>
+              <a:t>▲27.9</a:t>
             </a:r>
             <a:endParaRPr lang="en-US" sz="850" dirty="0"/>
           </a:p>
@@ -8223,7 +8053,7 @@
                 <a:ea typeface="メイリオ" pitchFamily="34" charset="-122"/>
                 <a:cs typeface="メイリオ" pitchFamily="34" charset="-120"/>
               </a:rPr>
-              <a:t>▲35.1</a:t>
+              <a:t>▲27.9</a:t>
             </a:r>
             <a:endParaRPr lang="en-US" sz="850" dirty="0"/>
           </a:p>
@@ -8262,7 +8092,7 @@
                 <a:ea typeface="メイリオ" pitchFamily="34" charset="-122"/>
                 <a:cs typeface="メイリオ" pitchFamily="34" charset="-120"/>
               </a:rPr>
-              <a:t>▲35.1</a:t>
+              <a:t>▲27.9</a:t>
             </a:r>
             <a:endParaRPr lang="en-US" sz="850" dirty="0"/>
           </a:p>
@@ -8301,7 +8131,7 @@
                 <a:ea typeface="メイリオ" pitchFamily="34" charset="-122"/>
                 <a:cs typeface="メイリオ" pitchFamily="34" charset="-120"/>
               </a:rPr>
-              <a:t>▲35.1</a:t>
+              <a:t>▲27.9</a:t>
             </a:r>
             <a:endParaRPr lang="en-US" sz="850" dirty="0"/>
           </a:p>
@@ -8340,7 +8170,7 @@
                 <a:ea typeface="メイリオ" pitchFamily="34" charset="-122"/>
                 <a:cs typeface="メイリオ" pitchFamily="34" charset="-120"/>
               </a:rPr>
-              <a:t>▲35.1</a:t>
+              <a:t>▲27.9</a:t>
             </a:r>
             <a:endParaRPr lang="en-US" sz="850" dirty="0"/>
           </a:p>
@@ -8379,7 +8209,7 @@
                 <a:ea typeface="メイリオ" pitchFamily="34" charset="-122"/>
                 <a:cs typeface="メイリオ" pitchFamily="34" charset="-120"/>
               </a:rPr>
-              <a:t>▲35.1</a:t>
+              <a:t>▲27.9</a:t>
             </a:r>
             <a:endParaRPr lang="en-US" sz="850" dirty="0"/>
           </a:p>
@@ -8418,7 +8248,7 @@
                 <a:ea typeface="メイリオ" pitchFamily="34" charset="-122"/>
                 <a:cs typeface="メイリオ" pitchFamily="34" charset="-120"/>
               </a:rPr>
-              <a:t>▲35.1</a:t>
+              <a:t>▲27.9</a:t>
             </a:r>
             <a:endParaRPr lang="en-US" sz="850" dirty="0"/>
           </a:p>
@@ -8457,7 +8287,7 @@
                 <a:ea typeface="メイリオ" pitchFamily="34" charset="-122"/>
                 <a:cs typeface="メイリオ" pitchFamily="34" charset="-120"/>
               </a:rPr>
-              <a:t>▲35.1</a:t>
+              <a:t>▲27.9</a:t>
             </a:r>
             <a:endParaRPr lang="en-US" sz="850" dirty="0"/>
           </a:p>
@@ -8496,7 +8326,7 @@
                 <a:ea typeface="メイリオ" pitchFamily="34" charset="-122"/>
                 <a:cs typeface="メイリオ" pitchFamily="34" charset="-120"/>
               </a:rPr>
-              <a:t>▲35.1</a:t>
+              <a:t>▲27.9</a:t>
             </a:r>
             <a:endParaRPr lang="en-US" sz="850" dirty="0"/>
           </a:p>
@@ -8535,7 +8365,7 @@
                 <a:ea typeface="メイリオ" pitchFamily="34" charset="-122"/>
                 <a:cs typeface="メイリオ" pitchFamily="34" charset="-120"/>
               </a:rPr>
-              <a:t>▲421.6</a:t>
+              <a:t>▲334.8</a:t>
             </a:r>
             <a:endParaRPr lang="en-US" sz="900" dirty="0"/>
           </a:p>
@@ -8638,7 +8468,7 @@
                 <a:ea typeface="メイリオ" pitchFamily="34" charset="-122"/>
                 <a:cs typeface="メイリオ" pitchFamily="34" charset="-120"/>
               </a:rPr>
-              <a:t>14.7</a:t>
+              <a:t>21.9</a:t>
             </a:r>
             <a:endParaRPr lang="en-US" sz="850" dirty="0"/>
           </a:p>
@@ -8677,7 +8507,7 @@
                 <a:ea typeface="メイリオ" pitchFamily="34" charset="-122"/>
                 <a:cs typeface="メイリオ" pitchFamily="34" charset="-120"/>
               </a:rPr>
-              <a:t>14.7</a:t>
+              <a:t>21.9</a:t>
             </a:r>
             <a:endParaRPr lang="en-US" sz="850" dirty="0"/>
           </a:p>
@@ -8716,7 +8546,7 @@
                 <a:ea typeface="メイリオ" pitchFamily="34" charset="-122"/>
                 <a:cs typeface="メイリオ" pitchFamily="34" charset="-120"/>
               </a:rPr>
-              <a:t>14.7</a:t>
+              <a:t>21.9</a:t>
             </a:r>
             <a:endParaRPr lang="en-US" sz="850" dirty="0"/>
           </a:p>
@@ -8755,7 +8585,7 @@
                 <a:ea typeface="メイリオ" pitchFamily="34" charset="-122"/>
                 <a:cs typeface="メイリオ" pitchFamily="34" charset="-120"/>
               </a:rPr>
-              <a:t>14.7</a:t>
+              <a:t>21.9</a:t>
             </a:r>
             <a:endParaRPr lang="en-US" sz="850" dirty="0"/>
           </a:p>
@@ -8794,7 +8624,7 @@
                 <a:ea typeface="メイリオ" pitchFamily="34" charset="-122"/>
                 <a:cs typeface="メイリオ" pitchFamily="34" charset="-120"/>
               </a:rPr>
-              <a:t>14.7</a:t>
+              <a:t>21.9</a:t>
             </a:r>
             <a:endParaRPr lang="en-US" sz="850" dirty="0"/>
           </a:p>
@@ -8833,7 +8663,7 @@
                 <a:ea typeface="メイリオ" pitchFamily="34" charset="-122"/>
                 <a:cs typeface="メイリオ" pitchFamily="34" charset="-120"/>
               </a:rPr>
-              <a:t>14.7</a:t>
+              <a:t>21.9</a:t>
             </a:r>
             <a:endParaRPr lang="en-US" sz="850" dirty="0"/>
           </a:p>
@@ -8872,7 +8702,7 @@
                 <a:ea typeface="メイリオ" pitchFamily="34" charset="-122"/>
                 <a:cs typeface="メイリオ" pitchFamily="34" charset="-120"/>
               </a:rPr>
-              <a:t>14.7</a:t>
+              <a:t>21.9</a:t>
             </a:r>
             <a:endParaRPr lang="en-US" sz="850" dirty="0"/>
           </a:p>
@@ -8911,7 +8741,7 @@
                 <a:ea typeface="メイリオ" pitchFamily="34" charset="-122"/>
                 <a:cs typeface="メイリオ" pitchFamily="34" charset="-120"/>
               </a:rPr>
-              <a:t>14.7</a:t>
+              <a:t>21.9</a:t>
             </a:r>
             <a:endParaRPr lang="en-US" sz="850" dirty="0"/>
           </a:p>
@@ -8950,7 +8780,7 @@
                 <a:ea typeface="メイリオ" pitchFamily="34" charset="-122"/>
                 <a:cs typeface="メイリオ" pitchFamily="34" charset="-120"/>
               </a:rPr>
-              <a:t>14.7</a:t>
+              <a:t>21.9</a:t>
             </a:r>
             <a:endParaRPr lang="en-US" sz="850" dirty="0"/>
           </a:p>
@@ -8989,7 +8819,7 @@
                 <a:ea typeface="メイリオ" pitchFamily="34" charset="-122"/>
                 <a:cs typeface="メイリオ" pitchFamily="34" charset="-120"/>
               </a:rPr>
-              <a:t>14.7</a:t>
+              <a:t>21.9</a:t>
             </a:r>
             <a:endParaRPr lang="en-US" sz="850" dirty="0"/>
           </a:p>
@@ -9028,7 +8858,7 @@
                 <a:ea typeface="メイリオ" pitchFamily="34" charset="-122"/>
                 <a:cs typeface="メイリオ" pitchFamily="34" charset="-120"/>
               </a:rPr>
-              <a:t>14.7</a:t>
+              <a:t>21.9</a:t>
             </a:r>
             <a:endParaRPr lang="en-US" sz="850" dirty="0"/>
           </a:p>
@@ -9067,7 +8897,7 @@
                 <a:ea typeface="メイリオ" pitchFamily="34" charset="-122"/>
                 <a:cs typeface="メイリオ" pitchFamily="34" charset="-120"/>
               </a:rPr>
-              <a:t>14.7</a:t>
+              <a:t>21.9</a:t>
             </a:r>
             <a:endParaRPr lang="en-US" sz="850" dirty="0"/>
           </a:p>
@@ -9106,7 +8936,7 @@
                 <a:ea typeface="メイリオ" pitchFamily="34" charset="-122"/>
                 <a:cs typeface="メイリオ" pitchFamily="34" charset="-120"/>
               </a:rPr>
-              <a:t>176.4</a:t>
+              <a:t>263.3</a:t>
             </a:r>
             <a:endParaRPr lang="en-US" sz="900" dirty="0"/>
           </a:p>
@@ -10922,7 +10752,7 @@
                 <a:ea typeface="メイリオ" pitchFamily="34" charset="-122"/>
                 <a:cs typeface="メイリオ" pitchFamily="34" charset="-120"/>
               </a:rPr>
-              <a:t>22.4</a:t>
+              <a:t>29.6</a:t>
             </a:r>
             <a:endParaRPr lang="en-US" sz="850" dirty="0"/>
           </a:p>
@@ -10961,7 +10791,7 @@
                 <a:ea typeface="メイリオ" pitchFamily="34" charset="-122"/>
                 <a:cs typeface="メイリオ" pitchFamily="34" charset="-120"/>
               </a:rPr>
-              <a:t>22.4</a:t>
+              <a:t>29.6</a:t>
             </a:r>
             <a:endParaRPr lang="en-US" sz="850" dirty="0"/>
           </a:p>
@@ -11000,7 +10830,7 @@
                 <a:ea typeface="メイリオ" pitchFamily="34" charset="-122"/>
                 <a:cs typeface="メイリオ" pitchFamily="34" charset="-120"/>
               </a:rPr>
-              <a:t>22.4</a:t>
+              <a:t>29.6</a:t>
             </a:r>
             <a:endParaRPr lang="en-US" sz="850" dirty="0"/>
           </a:p>
@@ -11039,7 +10869,7 @@
                 <a:ea typeface="メイリオ" pitchFamily="34" charset="-122"/>
                 <a:cs typeface="メイリオ" pitchFamily="34" charset="-120"/>
               </a:rPr>
-              <a:t>22.4</a:t>
+              <a:t>29.6</a:t>
             </a:r>
             <a:endParaRPr lang="en-US" sz="850" dirty="0"/>
           </a:p>
@@ -11078,7 +10908,7 @@
                 <a:ea typeface="メイリオ" pitchFamily="34" charset="-122"/>
                 <a:cs typeface="メイリオ" pitchFamily="34" charset="-120"/>
               </a:rPr>
-              <a:t>22.4</a:t>
+              <a:t>29.6</a:t>
             </a:r>
             <a:endParaRPr lang="en-US" sz="850" dirty="0"/>
           </a:p>
@@ -11117,7 +10947,7 @@
                 <a:ea typeface="メイリオ" pitchFamily="34" charset="-122"/>
                 <a:cs typeface="メイリオ" pitchFamily="34" charset="-120"/>
               </a:rPr>
-              <a:t>52.4</a:t>
+              <a:t>59.6</a:t>
             </a:r>
             <a:endParaRPr lang="en-US" sz="850" dirty="0"/>
           </a:p>
@@ -11156,7 +10986,7 @@
                 <a:ea typeface="メイリオ" pitchFamily="34" charset="-122"/>
                 <a:cs typeface="メイリオ" pitchFamily="34" charset="-120"/>
               </a:rPr>
-              <a:t>22.4</a:t>
+              <a:t>29.6</a:t>
             </a:r>
             <a:endParaRPr lang="en-US" sz="850" dirty="0"/>
           </a:p>
@@ -11195,7 +11025,7 @@
                 <a:ea typeface="メイリオ" pitchFamily="34" charset="-122"/>
                 <a:cs typeface="メイリオ" pitchFamily="34" charset="-120"/>
               </a:rPr>
-              <a:t>22.4</a:t>
+              <a:t>29.6</a:t>
             </a:r>
             <a:endParaRPr lang="en-US" sz="850" dirty="0"/>
           </a:p>
@@ -11234,7 +11064,7 @@
                 <a:ea typeface="メイリオ" pitchFamily="34" charset="-122"/>
                 <a:cs typeface="メイリオ" pitchFamily="34" charset="-120"/>
               </a:rPr>
-              <a:t>22.4</a:t>
+              <a:t>29.6</a:t>
             </a:r>
             <a:endParaRPr lang="en-US" sz="850" dirty="0"/>
           </a:p>
@@ -11273,7 +11103,7 @@
                 <a:ea typeface="メイリオ" pitchFamily="34" charset="-122"/>
                 <a:cs typeface="メイリオ" pitchFamily="34" charset="-120"/>
               </a:rPr>
-              <a:t>22.4</a:t>
+              <a:t>29.6</a:t>
             </a:r>
             <a:endParaRPr lang="en-US" sz="850" dirty="0"/>
           </a:p>
@@ -11312,7 +11142,7 @@
                 <a:ea typeface="メイリオ" pitchFamily="34" charset="-122"/>
                 <a:cs typeface="メイリオ" pitchFamily="34" charset="-120"/>
               </a:rPr>
-              <a:t>22.4</a:t>
+              <a:t>29.6</a:t>
             </a:r>
             <a:endParaRPr lang="en-US" sz="850" dirty="0"/>
           </a:p>
@@ -11351,7 +11181,7 @@
                 <a:ea typeface="メイリオ" pitchFamily="34" charset="-122"/>
                 <a:cs typeface="メイリオ" pitchFamily="34" charset="-120"/>
               </a:rPr>
-              <a:t>32.4</a:t>
+              <a:t>39.6</a:t>
             </a:r>
             <a:endParaRPr lang="en-US" sz="850" dirty="0"/>
           </a:p>
@@ -11390,7 +11220,7 @@
                 <a:ea typeface="メイリオ" pitchFamily="34" charset="-122"/>
                 <a:cs typeface="メイリオ" pitchFamily="34" charset="-120"/>
               </a:rPr>
-              <a:t>308.9</a:t>
+              <a:t>395.8</a:t>
             </a:r>
             <a:endParaRPr lang="en-US" sz="900" dirty="0"/>
           </a:p>
@@ -12058,13 +11888,13 @@
             <a:r>
               <a:rPr lang="en-US" sz="850" b="1" dirty="0">
                 <a:solidFill>
-                  <a:srgbClr val="6E6E6E"/>
-                </a:solidFill>
-                <a:latin typeface="メイリオ" pitchFamily="34" charset="0"/>
-                <a:ea typeface="メイリオ" pitchFamily="34" charset="-122"/>
-                <a:cs typeface="メイリオ" pitchFamily="34" charset="-120"/>
-              </a:rPr>
-              <a:t>▲2.6</a:t>
+                  <a:srgbClr val="1A1A1A"/>
+                </a:solidFill>
+                <a:latin typeface="メイリオ" pitchFamily="34" charset="0"/>
+                <a:ea typeface="メイリオ" pitchFamily="34" charset="-122"/>
+                <a:cs typeface="メイリオ" pitchFamily="34" charset="-120"/>
+              </a:rPr>
+              <a:t>4.6</a:t>
             </a:r>
             <a:endParaRPr lang="en-US" sz="850" dirty="0"/>
           </a:p>
@@ -12097,13 +11927,13 @@
             <a:r>
               <a:rPr lang="en-US" sz="850" b="1" dirty="0">
                 <a:solidFill>
-                  <a:srgbClr val="6E6E6E"/>
-                </a:solidFill>
-                <a:latin typeface="メイリオ" pitchFamily="34" charset="0"/>
-                <a:ea typeface="メイリオ" pitchFamily="34" charset="-122"/>
-                <a:cs typeface="メイリオ" pitchFamily="34" charset="-120"/>
-              </a:rPr>
-              <a:t>▲2.6</a:t>
+                  <a:srgbClr val="1A1A1A"/>
+                </a:solidFill>
+                <a:latin typeface="メイリオ" pitchFamily="34" charset="0"/>
+                <a:ea typeface="メイリオ" pitchFamily="34" charset="-122"/>
+                <a:cs typeface="メイリオ" pitchFamily="34" charset="-120"/>
+              </a:rPr>
+              <a:t>4.6</a:t>
             </a:r>
             <a:endParaRPr lang="en-US" sz="850" dirty="0"/>
           </a:p>
@@ -12136,13 +11966,13 @@
             <a:r>
               <a:rPr lang="en-US" sz="850" b="1" dirty="0">
                 <a:solidFill>
-                  <a:srgbClr val="6E6E6E"/>
-                </a:solidFill>
-                <a:latin typeface="メイリオ" pitchFamily="34" charset="0"/>
-                <a:ea typeface="メイリオ" pitchFamily="34" charset="-122"/>
-                <a:cs typeface="メイリオ" pitchFamily="34" charset="-120"/>
-              </a:rPr>
-              <a:t>▲2.6</a:t>
+                  <a:srgbClr val="1A1A1A"/>
+                </a:solidFill>
+                <a:latin typeface="メイリオ" pitchFamily="34" charset="0"/>
+                <a:ea typeface="メイリオ" pitchFamily="34" charset="-122"/>
+                <a:cs typeface="メイリオ" pitchFamily="34" charset="-120"/>
+              </a:rPr>
+              <a:t>4.6</a:t>
             </a:r>
             <a:endParaRPr lang="en-US" sz="850" dirty="0"/>
           </a:p>
@@ -12175,13 +12005,13 @@
             <a:r>
               <a:rPr lang="en-US" sz="850" b="1" dirty="0">
                 <a:solidFill>
-                  <a:srgbClr val="6E6E6E"/>
-                </a:solidFill>
-                <a:latin typeface="メイリオ" pitchFamily="34" charset="0"/>
-                <a:ea typeface="メイリオ" pitchFamily="34" charset="-122"/>
-                <a:cs typeface="メイリオ" pitchFamily="34" charset="-120"/>
-              </a:rPr>
-              <a:t>▲2.6</a:t>
+                  <a:srgbClr val="1A1A1A"/>
+                </a:solidFill>
+                <a:latin typeface="メイリオ" pitchFamily="34" charset="0"/>
+                <a:ea typeface="メイリオ" pitchFamily="34" charset="-122"/>
+                <a:cs typeface="メイリオ" pitchFamily="34" charset="-120"/>
+              </a:rPr>
+              <a:t>4.6</a:t>
             </a:r>
             <a:endParaRPr lang="en-US" sz="850" dirty="0"/>
           </a:p>
@@ -12214,13 +12044,13 @@
             <a:r>
               <a:rPr lang="en-US" sz="850" b="1" dirty="0">
                 <a:solidFill>
-                  <a:srgbClr val="6E6E6E"/>
-                </a:solidFill>
-                <a:latin typeface="メイリオ" pitchFamily="34" charset="0"/>
-                <a:ea typeface="メイリオ" pitchFamily="34" charset="-122"/>
-                <a:cs typeface="メイリオ" pitchFamily="34" charset="-120"/>
-              </a:rPr>
-              <a:t>▲2.6</a:t>
+                  <a:srgbClr val="1A1A1A"/>
+                </a:solidFill>
+                <a:latin typeface="メイリオ" pitchFamily="34" charset="0"/>
+                <a:ea typeface="メイリオ" pitchFamily="34" charset="-122"/>
+                <a:cs typeface="メイリオ" pitchFamily="34" charset="-120"/>
+              </a:rPr>
+              <a:t>4.6</a:t>
             </a:r>
             <a:endParaRPr lang="en-US" sz="850" dirty="0"/>
           </a:p>
@@ -12259,7 +12089,7 @@
                 <a:ea typeface="メイリオ" pitchFamily="34" charset="-122"/>
                 <a:cs typeface="メイリオ" pitchFamily="34" charset="-120"/>
               </a:rPr>
-              <a:t>27.4</a:t>
+              <a:t>34.6</a:t>
             </a:r>
             <a:endParaRPr lang="en-US" sz="850" dirty="0"/>
           </a:p>
@@ -12292,13 +12122,13 @@
             <a:r>
               <a:rPr lang="en-US" sz="850" b="1" dirty="0">
                 <a:solidFill>
-                  <a:srgbClr val="6E6E6E"/>
-                </a:solidFill>
-                <a:latin typeface="メイリオ" pitchFamily="34" charset="0"/>
-                <a:ea typeface="メイリオ" pitchFamily="34" charset="-122"/>
-                <a:cs typeface="メイリオ" pitchFamily="34" charset="-120"/>
-              </a:rPr>
-              <a:t>▲2.6</a:t>
+                  <a:srgbClr val="1A1A1A"/>
+                </a:solidFill>
+                <a:latin typeface="メイリオ" pitchFamily="34" charset="0"/>
+                <a:ea typeface="メイリオ" pitchFamily="34" charset="-122"/>
+                <a:cs typeface="メイリオ" pitchFamily="34" charset="-120"/>
+              </a:rPr>
+              <a:t>4.6</a:t>
             </a:r>
             <a:endParaRPr lang="en-US" sz="850" dirty="0"/>
           </a:p>
@@ -12331,13 +12161,13 @@
             <a:r>
               <a:rPr lang="en-US" sz="850" b="1" dirty="0">
                 <a:solidFill>
-                  <a:srgbClr val="6E6E6E"/>
-                </a:solidFill>
-                <a:latin typeface="メイリオ" pitchFamily="34" charset="0"/>
-                <a:ea typeface="メイリオ" pitchFamily="34" charset="-122"/>
-                <a:cs typeface="メイリオ" pitchFamily="34" charset="-120"/>
-              </a:rPr>
-              <a:t>▲2.6</a:t>
+                  <a:srgbClr val="1A1A1A"/>
+                </a:solidFill>
+                <a:latin typeface="メイリオ" pitchFamily="34" charset="0"/>
+                <a:ea typeface="メイリオ" pitchFamily="34" charset="-122"/>
+                <a:cs typeface="メイリオ" pitchFamily="34" charset="-120"/>
+              </a:rPr>
+              <a:t>4.6</a:t>
             </a:r>
             <a:endParaRPr lang="en-US" sz="850" dirty="0"/>
           </a:p>
@@ -12370,13 +12200,13 @@
             <a:r>
               <a:rPr lang="en-US" sz="850" b="1" dirty="0">
                 <a:solidFill>
-                  <a:srgbClr val="6E6E6E"/>
-                </a:solidFill>
-                <a:latin typeface="メイリオ" pitchFamily="34" charset="0"/>
-                <a:ea typeface="メイリオ" pitchFamily="34" charset="-122"/>
-                <a:cs typeface="メイリオ" pitchFamily="34" charset="-120"/>
-              </a:rPr>
-              <a:t>▲2.6</a:t>
+                  <a:srgbClr val="1A1A1A"/>
+                </a:solidFill>
+                <a:latin typeface="メイリオ" pitchFamily="34" charset="0"/>
+                <a:ea typeface="メイリオ" pitchFamily="34" charset="-122"/>
+                <a:cs typeface="メイリオ" pitchFamily="34" charset="-120"/>
+              </a:rPr>
+              <a:t>4.6</a:t>
             </a:r>
             <a:endParaRPr lang="en-US" sz="850" dirty="0"/>
           </a:p>
@@ -12409,13 +12239,13 @@
             <a:r>
               <a:rPr lang="en-US" sz="850" b="1" dirty="0">
                 <a:solidFill>
-                  <a:srgbClr val="6E6E6E"/>
-                </a:solidFill>
-                <a:latin typeface="メイリオ" pitchFamily="34" charset="0"/>
-                <a:ea typeface="メイリオ" pitchFamily="34" charset="-122"/>
-                <a:cs typeface="メイリオ" pitchFamily="34" charset="-120"/>
-              </a:rPr>
-              <a:t>▲2.6</a:t>
+                  <a:srgbClr val="1A1A1A"/>
+                </a:solidFill>
+                <a:latin typeface="メイリオ" pitchFamily="34" charset="0"/>
+                <a:ea typeface="メイリオ" pitchFamily="34" charset="-122"/>
+                <a:cs typeface="メイリオ" pitchFamily="34" charset="-120"/>
+              </a:rPr>
+              <a:t>4.6</a:t>
             </a:r>
             <a:endParaRPr lang="en-US" sz="850" dirty="0"/>
           </a:p>
@@ -12448,13 +12278,13 @@
             <a:r>
               <a:rPr lang="en-US" sz="850" b="1" dirty="0">
                 <a:solidFill>
-                  <a:srgbClr val="6E6E6E"/>
-                </a:solidFill>
-                <a:latin typeface="メイリオ" pitchFamily="34" charset="0"/>
-                <a:ea typeface="メイリオ" pitchFamily="34" charset="-122"/>
-                <a:cs typeface="メイリオ" pitchFamily="34" charset="-120"/>
-              </a:rPr>
-              <a:t>▲2.6</a:t>
+                  <a:srgbClr val="1A1A1A"/>
+                </a:solidFill>
+                <a:latin typeface="メイリオ" pitchFamily="34" charset="0"/>
+                <a:ea typeface="メイリオ" pitchFamily="34" charset="-122"/>
+                <a:cs typeface="メイリオ" pitchFamily="34" charset="-120"/>
+              </a:rPr>
+              <a:t>4.6</a:t>
             </a:r>
             <a:endParaRPr lang="en-US" sz="850" dirty="0"/>
           </a:p>
@@ -12493,7 +12323,7 @@
                 <a:ea typeface="メイリオ" pitchFamily="34" charset="-122"/>
                 <a:cs typeface="メイリオ" pitchFamily="34" charset="-120"/>
               </a:rPr>
-              <a:t>7.4</a:t>
+              <a:t>14.6</a:t>
             </a:r>
             <a:endParaRPr lang="en-US" sz="850" dirty="0"/>
           </a:p>
@@ -12532,7 +12362,7 @@
                 <a:ea typeface="メイリオ" pitchFamily="34" charset="-122"/>
                 <a:cs typeface="メイリオ" pitchFamily="34" charset="-120"/>
               </a:rPr>
-              <a:t>8.8</a:t>
+              <a:t>95.6</a:t>
             </a:r>
             <a:endParaRPr lang="en-US" sz="900" dirty="0"/>
           </a:p>
@@ -13200,13 +13030,13 @@
             <a:r>
               <a:rPr lang="en-US" sz="850" b="1" dirty="0">
                 <a:solidFill>
-                  <a:srgbClr val="6E6E6E"/>
-                </a:solidFill>
-                <a:latin typeface="メイリオ" pitchFamily="34" charset="0"/>
-                <a:ea typeface="メイリオ" pitchFamily="34" charset="-122"/>
-                <a:cs typeface="メイリオ" pitchFamily="34" charset="-120"/>
-              </a:rPr>
-              <a:t>▲3.9</a:t>
+                  <a:srgbClr val="1A1A1A"/>
+                </a:solidFill>
+                <a:latin typeface="メイリオ" pitchFamily="34" charset="0"/>
+                <a:ea typeface="メイリオ" pitchFamily="34" charset="-122"/>
+                <a:cs typeface="メイリオ" pitchFamily="34" charset="-120"/>
+              </a:rPr>
+              <a:t>3.4</a:t>
             </a:r>
             <a:endParaRPr lang="en-US" sz="850" dirty="0"/>
           </a:p>
@@ -13239,13 +13069,13 @@
             <a:r>
               <a:rPr lang="en-US" sz="850" b="1" dirty="0">
                 <a:solidFill>
-                  <a:srgbClr val="6E6E6E"/>
-                </a:solidFill>
-                <a:latin typeface="メイリオ" pitchFamily="34" charset="0"/>
-                <a:ea typeface="メイリオ" pitchFamily="34" charset="-122"/>
-                <a:cs typeface="メイリオ" pitchFamily="34" charset="-120"/>
-              </a:rPr>
-              <a:t>▲3.9</a:t>
+                  <a:srgbClr val="1A1A1A"/>
+                </a:solidFill>
+                <a:latin typeface="メイリオ" pitchFamily="34" charset="0"/>
+                <a:ea typeface="メイリオ" pitchFamily="34" charset="-122"/>
+                <a:cs typeface="メイリオ" pitchFamily="34" charset="-120"/>
+              </a:rPr>
+              <a:t>3.4</a:t>
             </a:r>
             <a:endParaRPr lang="en-US" sz="850" dirty="0"/>
           </a:p>
@@ -13278,13 +13108,13 @@
             <a:r>
               <a:rPr lang="en-US" sz="850" b="1" dirty="0">
                 <a:solidFill>
-                  <a:srgbClr val="6E6E6E"/>
-                </a:solidFill>
-                <a:latin typeface="メイリオ" pitchFamily="34" charset="0"/>
-                <a:ea typeface="メイリオ" pitchFamily="34" charset="-122"/>
-                <a:cs typeface="メイリオ" pitchFamily="34" charset="-120"/>
-              </a:rPr>
-              <a:t>▲3.9</a:t>
+                  <a:srgbClr val="1A1A1A"/>
+                </a:solidFill>
+                <a:latin typeface="メイリオ" pitchFamily="34" charset="0"/>
+                <a:ea typeface="メイリオ" pitchFamily="34" charset="-122"/>
+                <a:cs typeface="メイリオ" pitchFamily="34" charset="-120"/>
+              </a:rPr>
+              <a:t>3.4</a:t>
             </a:r>
             <a:endParaRPr lang="en-US" sz="850" dirty="0"/>
           </a:p>
@@ -13317,13 +13147,13 @@
             <a:r>
               <a:rPr lang="en-US" sz="850" b="1" dirty="0">
                 <a:solidFill>
-                  <a:srgbClr val="6E6E6E"/>
-                </a:solidFill>
-                <a:latin typeface="メイリオ" pitchFamily="34" charset="0"/>
-                <a:ea typeface="メイリオ" pitchFamily="34" charset="-122"/>
-                <a:cs typeface="メイリオ" pitchFamily="34" charset="-120"/>
-              </a:rPr>
-              <a:t>▲3.9</a:t>
+                  <a:srgbClr val="1A1A1A"/>
+                </a:solidFill>
+                <a:latin typeface="メイリオ" pitchFamily="34" charset="0"/>
+                <a:ea typeface="メイリオ" pitchFamily="34" charset="-122"/>
+                <a:cs typeface="メイリオ" pitchFamily="34" charset="-120"/>
+              </a:rPr>
+              <a:t>3.4</a:t>
             </a:r>
             <a:endParaRPr lang="en-US" sz="850" dirty="0"/>
           </a:p>
@@ -13356,13 +13186,13 @@
             <a:r>
               <a:rPr lang="en-US" sz="850" b="1" dirty="0">
                 <a:solidFill>
-                  <a:srgbClr val="6E6E6E"/>
-                </a:solidFill>
-                <a:latin typeface="メイリオ" pitchFamily="34" charset="0"/>
-                <a:ea typeface="メイリオ" pitchFamily="34" charset="-122"/>
-                <a:cs typeface="メイリオ" pitchFamily="34" charset="-120"/>
-              </a:rPr>
-              <a:t>▲3.9</a:t>
+                  <a:srgbClr val="1A1A1A"/>
+                </a:solidFill>
+                <a:latin typeface="メイリオ" pitchFamily="34" charset="0"/>
+                <a:ea typeface="メイリオ" pitchFamily="34" charset="-122"/>
+                <a:cs typeface="メイリオ" pitchFamily="34" charset="-120"/>
+              </a:rPr>
+              <a:t>3.4</a:t>
             </a:r>
             <a:endParaRPr lang="en-US" sz="850" dirty="0"/>
           </a:p>
@@ -13401,7 +13231,7 @@
                 <a:ea typeface="メイリオ" pitchFamily="34" charset="-122"/>
                 <a:cs typeface="メイリオ" pitchFamily="34" charset="-120"/>
               </a:rPr>
-              <a:t>26.1</a:t>
+              <a:t>33.4</a:t>
             </a:r>
             <a:endParaRPr lang="en-US" sz="850" dirty="0"/>
           </a:p>
@@ -13434,13 +13264,13 @@
             <a:r>
               <a:rPr lang="en-US" sz="850" b="1" dirty="0">
                 <a:solidFill>
-                  <a:srgbClr val="6E6E6E"/>
-                </a:solidFill>
-                <a:latin typeface="メイリオ" pitchFamily="34" charset="0"/>
-                <a:ea typeface="メイリオ" pitchFamily="34" charset="-122"/>
-                <a:cs typeface="メイリオ" pitchFamily="34" charset="-120"/>
-              </a:rPr>
-              <a:t>▲3.9</a:t>
+                  <a:srgbClr val="1A1A1A"/>
+                </a:solidFill>
+                <a:latin typeface="メイリオ" pitchFamily="34" charset="0"/>
+                <a:ea typeface="メイリオ" pitchFamily="34" charset="-122"/>
+                <a:cs typeface="メイリオ" pitchFamily="34" charset="-120"/>
+              </a:rPr>
+              <a:t>3.4</a:t>
             </a:r>
             <a:endParaRPr lang="en-US" sz="850" dirty="0"/>
           </a:p>
@@ -13473,13 +13303,13 @@
             <a:r>
               <a:rPr lang="en-US" sz="850" b="1" dirty="0">
                 <a:solidFill>
-                  <a:srgbClr val="6E6E6E"/>
-                </a:solidFill>
-                <a:latin typeface="メイリオ" pitchFamily="34" charset="0"/>
-                <a:ea typeface="メイリオ" pitchFamily="34" charset="-122"/>
-                <a:cs typeface="メイリオ" pitchFamily="34" charset="-120"/>
-              </a:rPr>
-              <a:t>▲3.9</a:t>
+                  <a:srgbClr val="1A1A1A"/>
+                </a:solidFill>
+                <a:latin typeface="メイリオ" pitchFamily="34" charset="0"/>
+                <a:ea typeface="メイリオ" pitchFamily="34" charset="-122"/>
+                <a:cs typeface="メイリオ" pitchFamily="34" charset="-120"/>
+              </a:rPr>
+              <a:t>3.4</a:t>
             </a:r>
             <a:endParaRPr lang="en-US" sz="850" dirty="0"/>
           </a:p>
@@ -13512,13 +13342,13 @@
             <a:r>
               <a:rPr lang="en-US" sz="850" b="1" dirty="0">
                 <a:solidFill>
-                  <a:srgbClr val="6E6E6E"/>
-                </a:solidFill>
-                <a:latin typeface="メイリオ" pitchFamily="34" charset="0"/>
-                <a:ea typeface="メイリオ" pitchFamily="34" charset="-122"/>
-                <a:cs typeface="メイリオ" pitchFamily="34" charset="-120"/>
-              </a:rPr>
-              <a:t>▲3.9</a:t>
+                  <a:srgbClr val="1A1A1A"/>
+                </a:solidFill>
+                <a:latin typeface="メイリオ" pitchFamily="34" charset="0"/>
+                <a:ea typeface="メイリオ" pitchFamily="34" charset="-122"/>
+                <a:cs typeface="メイリオ" pitchFamily="34" charset="-120"/>
+              </a:rPr>
+              <a:t>3.4</a:t>
             </a:r>
             <a:endParaRPr lang="en-US" sz="850" dirty="0"/>
           </a:p>
@@ -13551,13 +13381,13 @@
             <a:r>
               <a:rPr lang="en-US" sz="850" b="1" dirty="0">
                 <a:solidFill>
-                  <a:srgbClr val="6E6E6E"/>
-                </a:solidFill>
-                <a:latin typeface="メイリオ" pitchFamily="34" charset="0"/>
-                <a:ea typeface="メイリオ" pitchFamily="34" charset="-122"/>
-                <a:cs typeface="メイリオ" pitchFamily="34" charset="-120"/>
-              </a:rPr>
-              <a:t>▲3.9</a:t>
+                  <a:srgbClr val="1A1A1A"/>
+                </a:solidFill>
+                <a:latin typeface="メイリオ" pitchFamily="34" charset="0"/>
+                <a:ea typeface="メイリオ" pitchFamily="34" charset="-122"/>
+                <a:cs typeface="メイリオ" pitchFamily="34" charset="-120"/>
+              </a:rPr>
+              <a:t>3.4</a:t>
             </a:r>
             <a:endParaRPr lang="en-US" sz="850" dirty="0"/>
           </a:p>
@@ -13590,13 +13420,13 @@
             <a:r>
               <a:rPr lang="en-US" sz="850" b="1" dirty="0">
                 <a:solidFill>
-                  <a:srgbClr val="6E6E6E"/>
-                </a:solidFill>
-                <a:latin typeface="メイリオ" pitchFamily="34" charset="0"/>
-                <a:ea typeface="メイリオ" pitchFamily="34" charset="-122"/>
-                <a:cs typeface="メイリオ" pitchFamily="34" charset="-120"/>
-              </a:rPr>
-              <a:t>▲3.9</a:t>
+                  <a:srgbClr val="1A1A1A"/>
+                </a:solidFill>
+                <a:latin typeface="メイリオ" pitchFamily="34" charset="0"/>
+                <a:ea typeface="メイリオ" pitchFamily="34" charset="-122"/>
+                <a:cs typeface="メイリオ" pitchFamily="34" charset="-120"/>
+              </a:rPr>
+              <a:t>3.4</a:t>
             </a:r>
             <a:endParaRPr lang="en-US" sz="850" dirty="0"/>
           </a:p>
@@ -13635,7 +13465,7 @@
                 <a:ea typeface="メイリオ" pitchFamily="34" charset="-122"/>
                 <a:cs typeface="メイリオ" pitchFamily="34" charset="-120"/>
               </a:rPr>
-              <a:t>6.1</a:t>
+              <a:t>13.4</a:t>
             </a:r>
             <a:endParaRPr lang="en-US" sz="850" dirty="0"/>
           </a:p>
@@ -13668,13 +13498,13 @@
             <a:r>
               <a:rPr lang="en-US" sz="900" b="1" dirty="0">
                 <a:solidFill>
-                  <a:srgbClr val="6E6E6E"/>
-                </a:solidFill>
-                <a:latin typeface="メイリオ" pitchFamily="34" charset="0"/>
-                <a:ea typeface="メイリオ" pitchFamily="34" charset="-122"/>
-                <a:cs typeface="メイリオ" pitchFamily="34" charset="-120"/>
-              </a:rPr>
-              <a:t>▲6.2</a:t>
+                  <a:srgbClr val="1A1A1A"/>
+                </a:solidFill>
+                <a:latin typeface="メイリオ" pitchFamily="34" charset="0"/>
+                <a:ea typeface="メイリオ" pitchFamily="34" charset="-122"/>
+                <a:cs typeface="メイリオ" pitchFamily="34" charset="-120"/>
+              </a:rPr>
+              <a:t>80.6</a:t>
             </a:r>
             <a:endParaRPr lang="en-US" sz="900" dirty="0"/>
           </a:p>
@@ -13864,7 +13694,7 @@
                 <a:ea typeface="メイリオ" pitchFamily="34" charset="-122"/>
                 <a:cs typeface="メイリオ" pitchFamily="34" charset="-120"/>
               </a:rPr>
-              <a:t>＋8.8百万円</a:t>
+              <a:t>＋95.6百万円</a:t>
             </a:r>
             <a:endParaRPr lang="en-US" sz="1600" dirty="0"/>
           </a:p>
@@ -13942,7 +13772,7 @@
                 <a:ea typeface="メイリオ" pitchFamily="34" charset="-122"/>
                 <a:cs typeface="メイリオ" pitchFamily="34" charset="-120"/>
               </a:rPr>
-              <a:t>▲6.2百万円</a:t>
+              <a:t>＋80.6百万円</a:t>
             </a:r>
             <a:endParaRPr lang="en-US" sz="1600" dirty="0"/>
           </a:p>
@@ -14052,7 +13882,7 @@
                 <a:ea typeface="メイリオ" pitchFamily="34" charset="-122"/>
                 <a:cs typeface="メイリオ" pitchFamily="34" charset="-120"/>
               </a:rPr>
-              <a:t>FY2027 月次資金繰り － プランD</a:t>
+              <a:t>FY2027 月次資金繰り － プランC</a:t>
             </a:r>
             <a:endParaRPr lang="en-US" sz="2900" dirty="0"/>
           </a:p>
@@ -14091,7 +13921,7 @@
                 <a:ea typeface="メイリオ" pitchFamily="34" charset="-122"/>
                 <a:cs typeface="メイリオ" pitchFamily="34" charset="-120"/>
               </a:rPr>
-              <a:t>ワイン仕入419.1百万円を維持。売上原価421.6百万円とほぼ見合うため在庫は横ばいで、資金が固定されません。単位：百万円（税込）</a:t>
+              <a:t>ワイン仕入419.1百万円を維持したまま、期中に一度も現預金がマイナスになりません。単位：百万円（税込）</a:t>
             </a:r>
             <a:endParaRPr lang="en-US" sz="1250" dirty="0"/>
           </a:p>
@@ -18123,7 +17953,7 @@
                 <a:ea typeface="メイリオ" pitchFamily="34" charset="-122"/>
                 <a:cs typeface="メイリオ" pitchFamily="34" charset="-120"/>
               </a:rPr>
-              <a:t>A. プランD（本線）</a:t>
+              <a:t>A. プランC（本線）</a:t>
             </a:r>
             <a:endParaRPr lang="en-US" sz="850" dirty="0"/>
           </a:p>
@@ -18549,7 +18379,7 @@
                 <a:ea typeface="メイリオ" pitchFamily="34" charset="-122"/>
                 <a:cs typeface="メイリオ" pitchFamily="34" charset="-120"/>
               </a:rPr>
-              <a:t>D. 売上が前期・今期並みに届かない</a:t>
+              <a:t>D. 差額売上208.9百万円が未達</a:t>
             </a:r>
             <a:endParaRPr lang="en-US" sz="850" dirty="0"/>
           </a:p>
@@ -20851,7 +20681,7 @@
                 <a:ea typeface="メイリオ" pitchFamily="34" charset="-122"/>
                 <a:cs typeface="メイリオ" pitchFamily="34" charset="-120"/>
               </a:rPr>
-              <a:t>プランDの蓋然性 － 過去実績が裏付けています</a:t>
+              <a:t>プランCの蓋然性 － 過去実績が裏付けています</a:t>
             </a:r>
             <a:endParaRPr lang="en-US" sz="2900" dirty="0"/>
           </a:p>
@@ -21105,7 +20935,7 @@
                 <a:ea typeface="メイリオ" pitchFamily="34" charset="-122"/>
                 <a:cs typeface="メイリオ" pitchFamily="34" charset="-120"/>
               </a:rPr>
-              <a:t>プランD/実績</a:t>
+              <a:t>プランC/実績</a:t>
             </a:r>
             <a:endParaRPr lang="en-US" sz="950" dirty="0"/>
           </a:p>
@@ -21829,7 +21659,7 @@
                 <a:ea typeface="メイリオ" pitchFamily="34" charset="-122"/>
                 <a:cs typeface="メイリオ" pitchFamily="34" charset="-120"/>
               </a:rPr>
-              <a:t>プランD（FY2027）</a:t>
+              <a:t>プランC（FY2027）</a:t>
             </a:r>
             <a:endParaRPr lang="en-US" sz="1050" dirty="0"/>
           </a:p>
@@ -21907,7 +21737,7 @@
                 <a:ea typeface="メイリオ" pitchFamily="34" charset="-122"/>
                 <a:cs typeface="メイリオ" pitchFamily="34" charset="-120"/>
               </a:rPr>
-              <a:t>308.9</a:t>
+              <a:t>395.8</a:t>
             </a:r>
             <a:endParaRPr lang="en-US" sz="1050" dirty="0"/>
           </a:p>
@@ -21946,7 +21776,7 @@
                 <a:ea typeface="メイリオ" pitchFamily="34" charset="-122"/>
                 <a:cs typeface="メイリオ" pitchFamily="34" charset="-120"/>
               </a:rPr>
-              <a:t>42.3%</a:t>
+              <a:t>54.2%</a:t>
             </a:r>
             <a:endParaRPr lang="en-US" sz="1050" dirty="0"/>
           </a:p>
@@ -21985,7 +21815,7 @@
                 <a:ea typeface="メイリオ" pitchFamily="34" charset="-122"/>
                 <a:cs typeface="メイリオ" pitchFamily="34" charset="-120"/>
               </a:rPr>
-              <a:t>100.3%</a:t>
+              <a:t>100.0%</a:t>
             </a:r>
             <a:endParaRPr lang="en-US" sz="1050" dirty="0"/>
           </a:p>
@@ -22097,7 +21927,7 @@
                 <a:ea typeface="メイリオ" pitchFamily="34" charset="-122"/>
                 <a:cs typeface="メイリオ" pitchFamily="34" charset="-120"/>
               </a:rPr>
-              <a:t>プランDの730.5百万円は、FY2025実績752.9とFY2026見込708.2のちょうど平均。新たな成長を前提にせず、過去2期に到達した売上規模をそのまま置いています。</a:t>
+              <a:t>プランCの730.5百万円は、FY2025実績752.9とFY2026見込708.2のちょうど平均。新たな成長を前提にせず、過去2期に到達した売上規模をそのまま置いています。</a:t>
             </a:r>
             <a:endParaRPr lang="en-US" sz="1100" dirty="0"/>
           </a:p>
@@ -22170,7 +22000,7 @@
                 <a:ea typeface="メイリオ" pitchFamily="34" charset="-122"/>
                 <a:cs typeface="メイリオ" pitchFamily="34" charset="-120"/>
               </a:rPr>
-              <a:t>粗利率は保守的に据え置き</a:t>
+              <a:t>差額分の粗利率は保守的に30%</a:t>
             </a:r>
             <a:endParaRPr lang="en-US" sz="1200" dirty="0"/>
           </a:p>
@@ -22209,7 +22039,7 @@
                 <a:ea typeface="メイリオ" pitchFamily="34" charset="-122"/>
                 <a:cs typeface="メイリオ" pitchFamily="34" charset="-120"/>
               </a:rPr>
-              <a:t>既存事業は29.5%（FY2025・FY2026の加重平均）に据え置き。4-6月実績の51.5%は使いません。総合42.3%になるのは上乗せ案件132.5百万円が原価なしのためです。</a:t>
+              <a:t>Bからの差額売上208.9百万円には粗利率30%を適用。FY2025 26.8%・FY2026 32.4%という実績水準に合わせた保守値で、4-6月実績の51.5%は使っていません。</a:t>
             </a:r>
             <a:endParaRPr lang="en-US" sz="1100" dirty="0"/>
           </a:p>
@@ -22282,7 +22112,7 @@
                 <a:ea typeface="メイリオ" pitchFamily="34" charset="-122"/>
                 <a:cs typeface="メイリオ" pitchFamily="34" charset="-120"/>
               </a:rPr>
-              <a:t>既存事業の粗利率が4-6月実績の51.5%まで戻れば、同じ売上730.5百万円で経常利益は約185百万円。プランDはその上振れを一切織り込んでいません。</a:t>
+              <a:t>差額売上208.9百万円の粗利率が4-6月実績の51.5%であれば、同じ売上730.5百万円で経常利益は約125百万円。プランCはその上振れを織り込んでいません。</a:t>
             </a:r>
             <a:endParaRPr lang="en-US" sz="1200" dirty="0"/>
           </a:p>
@@ -22321,7 +22151,7 @@
                 <a:ea typeface="メイリオ" pitchFamily="34" charset="-122"/>
                 <a:cs typeface="メイリオ" pitchFamily="34" charset="-120"/>
               </a:rPr>
-              <a:t>プランDの事業粗利308.9百万円＝既存事業176.4（粗利率29.5%）＋上乗せ案件132.5（原価なし）。出典：事業計画202608（銀行様）、決算報告書 第54期。</a:t>
+              <a:t>プランCの粗利395.8百万円＝既存389.1×51.5%（200.6）＋差額208.9×30%（62.7）＋上乗せ132.5（原価なし）。出典：事業計画202608（銀行様）、決算報告書 第54期。</a:t>
             </a:r>
             <a:endParaRPr lang="en-US" sz="850" dirty="0"/>
           </a:p>
@@ -22941,7 +22771,7 @@
                 <a:ea typeface="メイリオ" pitchFamily="34" charset="-122"/>
                 <a:cs typeface="メイリオ" pitchFamily="34" charset="-120"/>
               </a:rPr>
-              <a:t>売上は過去2期と同水準・粗利率は保守</a:t>
+              <a:t>売上は過去2期と同水準・差額分は粗利率30%</a:t>
             </a:r>
             <a:endParaRPr lang="en-US" sz="1550" dirty="0"/>
           </a:p>
@@ -22980,7 +22810,7 @@
                 <a:ea typeface="メイリオ" pitchFamily="34" charset="-122"/>
                 <a:cs typeface="メイリオ" pitchFamily="34" charset="-120"/>
               </a:rPr>
-              <a:t>売上730.5百万円は2期平均そのもの。粗利率29.5%も過去2期の加重平均です。</a:t>
+              <a:t>売上730.5百万円は2期平均そのもの。営業利益＋95.6／経常利益＋80.6百万円です。</a:t>
             </a:r>
             <a:endParaRPr lang="en-US" sz="1150" dirty="0"/>
           </a:p>
@@ -23953,7 +23783,7 @@
                 <a:ea typeface="メイリオ" pitchFamily="34" charset="-122"/>
                 <a:cs typeface="メイリオ" pitchFamily="34" charset="-120"/>
               </a:rPr>
-              <a:t>粗利率は保守的に置いた</a:t>
+              <a:t>差額売上の粗利率は30%</a:t>
             </a:r>
             <a:endParaRPr lang="en-US" sz="1450" dirty="0"/>
           </a:p>
@@ -23992,7 +23822,7 @@
                 <a:ea typeface="メイリオ" pitchFamily="34" charset="-122"/>
                 <a:cs typeface="メイリオ" pitchFamily="34" charset="-120"/>
               </a:rPr>
-              <a:t>既存事業29.5%（過去2期の加重平均）。4-6月実績の51.5%は使いません。</a:t>
+              <a:t>前期・今期の売上平均までの差額は、保守的に粗利率30%で置いています。</a:t>
             </a:r>
             <a:endParaRPr lang="en-US" sz="1100" dirty="0"/>
           </a:p>
@@ -24065,7 +23895,7 @@
                 <a:ea typeface="メイリオ" pitchFamily="34" charset="-122"/>
                 <a:cs typeface="メイリオ" pitchFamily="34" charset="-120"/>
               </a:rPr>
-              <a:t>FY2027 営業利益（プランD）</a:t>
+              <a:t>FY2027 営業利益（プランC）</a:t>
             </a:r>
             <a:endParaRPr lang="en-US" sz="1100" dirty="0"/>
           </a:p>
@@ -24104,7 +23934,7 @@
                 <a:ea typeface="メイリオ" pitchFamily="34" charset="-122"/>
                 <a:cs typeface="メイリオ" pitchFamily="34" charset="-120"/>
               </a:rPr>
-              <a:t>＋8.8</a:t>
+              <a:t>＋95.6</a:t>
             </a:r>
             <a:endParaRPr lang="en-US" sz="4200" dirty="0"/>
           </a:p>
@@ -24182,7 +24012,7 @@
                 <a:ea typeface="メイリオ" pitchFamily="34" charset="-122"/>
                 <a:cs typeface="メイリオ" pitchFamily="34" charset="-120"/>
               </a:rPr>
-              <a:t>粗利率を保守的に置いても</a:t>
+              <a:t>経常利益は＋80.6百万円</a:t>
             </a:r>
             <a:endParaRPr lang="en-US" sz="1150" dirty="0"/>
           </a:p>
@@ -24199,7 +24029,7 @@
                 <a:ea typeface="メイリオ" pitchFamily="34" charset="-122"/>
                 <a:cs typeface="メイリオ" pitchFamily="34" charset="-120"/>
               </a:rPr>
-              <a:t>営業損益は黒字転換します</a:t>
+              <a:t>FY2026 ▲124.8百万円からの転換</a:t>
             </a:r>
             <a:endParaRPr lang="en-US" sz="1150" dirty="0"/>
           </a:p>
@@ -24261,7 +24091,7 @@
                 <a:ea typeface="メイリオ" pitchFamily="34" charset="-122"/>
                 <a:cs typeface="メイリオ" pitchFamily="34" charset="-120"/>
               </a:rPr>
-              <a:t>期中 最低現預金</a:t>
+              <a:t>売上高（上乗せ含む）</a:t>
             </a:r>
             <a:endParaRPr lang="en-US" sz="1100" dirty="0"/>
           </a:p>
@@ -24300,7 +24130,7 @@
                 <a:ea typeface="メイリオ" pitchFamily="34" charset="-122"/>
                 <a:cs typeface="メイリオ" pitchFamily="34" charset="-120"/>
               </a:rPr>
-              <a:t>＋14.6百万円</a:t>
+              <a:t>730.5百万円</a:t>
             </a:r>
             <a:endParaRPr lang="en-US" sz="2600" dirty="0"/>
           </a:p>
@@ -24339,7 +24169,7 @@
                 <a:ea typeface="メイリオ" pitchFamily="34" charset="-122"/>
                 <a:cs typeface="メイリオ" pitchFamily="34" charset="-120"/>
               </a:rPr>
-              <a:t>売上730.5百万円（前期・今期並み）</a:t>
+              <a:t>FY2025実績とFY2026見込の平均</a:t>
             </a:r>
             <a:endParaRPr lang="en-US" sz="1100" dirty="0"/>
           </a:p>
@@ -24356,7 +24186,7 @@
                 <a:ea typeface="メイリオ" pitchFamily="34" charset="-122"/>
                 <a:cs typeface="メイリオ" pitchFamily="34" charset="-120"/>
               </a:rPr>
-              <a:t>ワイン仕入419.1百万円を維持</a:t>
+              <a:t>期中最低現預金は＋14.6百万円</a:t>
             </a:r>
             <a:endParaRPr lang="en-US" sz="1100" dirty="0"/>
           </a:p>

--- a/out/WineBank_FY2027_銀行提出.pptx
+++ b/out/WineBank_FY2027_銀行提出.pptx
@@ -1161,7 +1161,7 @@
           <a:p>
             <a:r>
               <a:rPr lang="en-US" dirty="0"/>
-              <a:t>通常月は経常＋3.4百万円。3月にM&amp;A仲介と新規クルーザー事業30百万円が乗る。通期経常＋80.6百万円。</a:t>
+              <a:t>プランDの月次。通期経常＋120.4百万円。3月にM&amp;A仲介と新規クルーザー事業30百万円が乗る。</a:t>
             </a:r>
             <a:endParaRPr lang="en-US" dirty="0"/>
           </a:p>
@@ -1249,7 +1249,7 @@
           <a:p>
             <a:r>
               <a:rPr lang="en-US" dirty="0"/>
-              <a:t>保守前提でも期中最低14.6百万円を確保。仕入を維持しても在庫が積み上がらないため、資金が固定されないことが効いている。</a:t>
+              <a:t>プランDでは期中最低40.3百万円、期末187.1百万円。仕入を維持しても在庫が積み上がらないため、資金が固定されないことが効いている。ケースDはプランBにとどまった場合で、その差が本計画の意味。</a:t>
             </a:r>
             <a:endParaRPr lang="en-US" dirty="0"/>
           </a:p>
@@ -1601,7 +1601,7 @@
           <a:p>
             <a:r>
               <a:rPr lang="en-US" dirty="0"/>
-              <a:t>依頼事項を明確にして締める。11月のつなぎと在庫見合い枠の2点が具体的な依頼。</a:t>
+              <a:t>依頼事項を明確にして締める。短期の借換継続と在庫見合いの運転資金枠の2点が具体的な依頼。</a:t>
             </a:r>
             <a:endParaRPr lang="en-US" dirty="0"/>
           </a:p>
@@ -1689,7 +1689,7 @@
           <a:p>
             <a:r>
               <a:rPr lang="en-US" dirty="0"/>
-              <a:t>プランCはBに、前期・今期の売上平均730.5百万円までの差額208.9百万円を粗利率30%で加算したもの。営業＋95.6百万円、経常＋80.6百万円。</a:t>
+              <a:t>Bは契約ベースの下限。Dは既存事業を前期・今期の平均730.5百万円に置き、上乗せ案件132.5百万円を外数で加えたもの。売上863.0百万円、経常＋120.4百万円。</a:t>
             </a:r>
             <a:endParaRPr lang="en-US" dirty="0"/>
           </a:p>
@@ -3017,7 +3017,7 @@
                 <a:ea typeface="メイリオ" pitchFamily="34" charset="-122"/>
                 <a:cs typeface="メイリオ" pitchFamily="34" charset="-120"/>
               </a:rPr>
-              <a:t>3つのプラン － Cを本線とします</a:t>
+              <a:t>4つのプラン － Bが下限、Dが目指す姿</a:t>
             </a:r>
             <a:endParaRPr lang="en-US" sz="2900" dirty="0"/>
           </a:p>
@@ -3056,7 +3056,7 @@
                 <a:ea typeface="メイリオ" pitchFamily="34" charset="-122"/>
                 <a:cs typeface="メイリオ" pitchFamily="34" charset="-120"/>
               </a:rPr>
-              <a:t>Bに、前期・今期の売上平均までの差額を粗利率30%で加算したものがCです。</a:t>
+              <a:t>いずれも差額売上の粗利率は保守的に30%。上乗せ案件を内数とするか外数とするかがCとDの違いです。</a:t>
             </a:r>
             <a:endParaRPr lang="en-US" sz="1250" dirty="0"/>
           </a:p>
@@ -3071,7 +3071,7 @@
         <p:spPr>
           <a:xfrm>
             <a:off x="594360" y="1517904"/>
-            <a:ext cx="10972800" cy="384048"/>
+            <a:ext cx="10963656" cy="384048"/>
           </a:xfrm>
           <a:prstGeom prst="rect">
             <a:avLst/>
@@ -3091,7 +3091,7 @@
         <p:spPr>
           <a:xfrm>
             <a:off x="704088" y="1517904"/>
-            <a:ext cx="3803904" cy="384048"/>
+            <a:ext cx="2843784" cy="384048"/>
           </a:xfrm>
           <a:prstGeom prst="rect">
             <a:avLst/>
@@ -3129,8 +3129,8 @@
         </p:nvSpPr>
         <p:spPr>
           <a:xfrm>
-            <a:off x="4727448" y="1517904"/>
-            <a:ext cx="2066544" cy="384048"/>
+            <a:off x="3767328" y="1517904"/>
+            <a:ext cx="1609344" cy="384048"/>
           </a:xfrm>
           <a:prstGeom prst="rect">
             <a:avLst/>
@@ -3154,7 +3154,7 @@
                 <a:ea typeface="メイリオ" pitchFamily="34" charset="-122"/>
                 <a:cs typeface="メイリオ" pitchFamily="34" charset="-120"/>
               </a:rPr>
-              <a:t>A. 横ばいのみ</a:t>
+              <a:t>A. 横ばい</a:t>
             </a:r>
             <a:endParaRPr lang="en-US" sz="900" dirty="0"/>
           </a:p>
@@ -3168,8 +3168,8 @@
         </p:nvSpPr>
         <p:spPr>
           <a:xfrm>
-            <a:off x="7013448" y="1517904"/>
-            <a:ext cx="2112264" cy="384048"/>
+            <a:off x="5596128" y="1517904"/>
+            <a:ext cx="1700784" cy="384048"/>
           </a:xfrm>
           <a:prstGeom prst="rect">
             <a:avLst/>
@@ -3193,7 +3193,7 @@
                 <a:ea typeface="メイリオ" pitchFamily="34" charset="-122"/>
                 <a:cs typeface="メイリオ" pitchFamily="34" charset="-120"/>
               </a:rPr>
-              <a:t>B. ＋上乗せ132.5</a:t>
+              <a:t>B. ＋上乗せ</a:t>
             </a:r>
             <a:endParaRPr lang="en-US" sz="900" dirty="0"/>
           </a:p>
@@ -3207,8 +3207,8 @@
         </p:nvSpPr>
         <p:spPr>
           <a:xfrm>
-            <a:off x="9345168" y="1517904"/>
-            <a:ext cx="2112264" cy="384048"/>
+            <a:off x="7516368" y="1517904"/>
+            <a:ext cx="1837944" cy="384048"/>
           </a:xfrm>
           <a:prstGeom prst="rect">
             <a:avLst/>
@@ -3232,7 +3232,7 @@
                 <a:ea typeface="メイリオ" pitchFamily="34" charset="-122"/>
                 <a:cs typeface="メイリオ" pitchFamily="34" charset="-120"/>
               </a:rPr>
-              <a:t>C. B＋差額売上（粗利率30%）</a:t>
+              <a:t>C. 上乗せは内数</a:t>
             </a:r>
             <a:endParaRPr lang="en-US" sz="900" dirty="0"/>
           </a:p>
@@ -3240,14 +3240,53 @@
       </p:sp>
       <p:sp>
         <p:nvSpPr>
-          <p:cNvPr id="9" name="Shape 7"/>
+          <p:cNvPr id="9" name="Text 7"/>
+          <p:cNvSpPr/>
+          <p:nvPr/>
+        </p:nvSpPr>
+        <p:spPr>
+          <a:xfrm>
+            <a:off x="9573768" y="1517904"/>
+            <a:ext cx="1874520" cy="384048"/>
+          </a:xfrm>
+          <a:prstGeom prst="rect">
+            <a:avLst/>
+          </a:prstGeom>
+          <a:noFill/>
+          <a:ln/>
+        </p:spPr>
+        <p:txBody>
+          <a:bodyPr wrap="square" lIns="0" tIns="0" rIns="0" bIns="0" rtlCol="0" anchor="ctr"/>
+          <a:lstStyle/>
+          <a:p>
+            <a:pPr algn="r" indent="0" marL="0">
+              <a:buNone/>
+            </a:pPr>
+            <a:r>
+              <a:rPr lang="en-US" sz="900" b="1" dirty="0">
+                <a:solidFill>
+                  <a:srgbClr val="FFFFFF"/>
+                </a:solidFill>
+                <a:latin typeface="メイリオ" pitchFamily="34" charset="0"/>
+                <a:ea typeface="メイリオ" pitchFamily="34" charset="-122"/>
+                <a:cs typeface="メイリオ" pitchFamily="34" charset="-120"/>
+              </a:rPr>
+              <a:t>D. 上乗せは外数</a:t>
+            </a:r>
+            <a:endParaRPr lang="en-US" sz="900" dirty="0"/>
+          </a:p>
+        </p:txBody>
+      </p:sp>
+      <p:sp>
+        <p:nvSpPr>
+          <p:cNvPr id="10" name="Shape 8"/>
           <p:cNvSpPr/>
           <p:nvPr/>
         </p:nvSpPr>
         <p:spPr>
           <a:xfrm>
             <a:off x="594360" y="1901952"/>
-            <a:ext cx="10972800" cy="338328"/>
+            <a:ext cx="10963656" cy="338328"/>
           </a:xfrm>
           <a:prstGeom prst="rect">
             <a:avLst/>
@@ -3265,14 +3304,14 @@
       </p:sp>
       <p:sp>
         <p:nvSpPr>
-          <p:cNvPr id="10" name="Text 8"/>
+          <p:cNvPr id="11" name="Text 9"/>
           <p:cNvSpPr/>
           <p:nvPr/>
         </p:nvSpPr>
         <p:spPr>
           <a:xfrm>
             <a:off x="704088" y="1901952"/>
-            <a:ext cx="3803904" cy="338328"/>
+            <a:ext cx="2843784" cy="338328"/>
           </a:xfrm>
           <a:prstGeom prst="rect">
             <a:avLst/>
@@ -3304,14 +3343,14 @@
       </p:sp>
       <p:sp>
         <p:nvSpPr>
-          <p:cNvPr id="11" name="Text 9"/>
-          <p:cNvSpPr/>
-          <p:nvPr/>
-        </p:nvSpPr>
-        <p:spPr>
-          <a:xfrm>
-            <a:off x="4727448" y="1901952"/>
-            <a:ext cx="2066544" cy="338328"/>
+          <p:cNvPr id="12" name="Text 10"/>
+          <p:cNvSpPr/>
+          <p:nvPr/>
+        </p:nvSpPr>
+        <p:spPr>
+          <a:xfrm>
+            <a:off x="3767328" y="1901952"/>
+            <a:ext cx="1609344" cy="338328"/>
           </a:xfrm>
           <a:prstGeom prst="rect">
             <a:avLst/>
@@ -3343,14 +3382,14 @@
       </p:sp>
       <p:sp>
         <p:nvSpPr>
-          <p:cNvPr id="12" name="Text 10"/>
-          <p:cNvSpPr/>
-          <p:nvPr/>
-        </p:nvSpPr>
-        <p:spPr>
-          <a:xfrm>
-            <a:off x="7013448" y="1901952"/>
-            <a:ext cx="2112264" cy="338328"/>
+          <p:cNvPr id="13" name="Text 11"/>
+          <p:cNvSpPr/>
+          <p:nvPr/>
+        </p:nvSpPr>
+        <p:spPr>
+          <a:xfrm>
+            <a:off x="5596128" y="1901952"/>
+            <a:ext cx="1700784" cy="338328"/>
           </a:xfrm>
           <a:prstGeom prst="rect">
             <a:avLst/>
@@ -3382,14 +3421,14 @@
       </p:sp>
       <p:sp>
         <p:nvSpPr>
-          <p:cNvPr id="13" name="Text 11"/>
-          <p:cNvSpPr/>
-          <p:nvPr/>
-        </p:nvSpPr>
-        <p:spPr>
-          <a:xfrm>
-            <a:off x="9345168" y="1901952"/>
-            <a:ext cx="2112264" cy="338328"/>
+          <p:cNvPr id="14" name="Text 12"/>
+          <p:cNvSpPr/>
+          <p:nvPr/>
+        </p:nvSpPr>
+        <p:spPr>
+          <a:xfrm>
+            <a:off x="7516368" y="1901952"/>
+            <a:ext cx="1837944" cy="338328"/>
           </a:xfrm>
           <a:prstGeom prst="rect">
             <a:avLst/>
@@ -3421,14 +3460,53 @@
       </p:sp>
       <p:sp>
         <p:nvSpPr>
-          <p:cNvPr id="14" name="Shape 12"/>
+          <p:cNvPr id="15" name="Text 13"/>
+          <p:cNvSpPr/>
+          <p:nvPr/>
+        </p:nvSpPr>
+        <p:spPr>
+          <a:xfrm>
+            <a:off x="9573768" y="1901952"/>
+            <a:ext cx="1874520" cy="338328"/>
+          </a:xfrm>
+          <a:prstGeom prst="rect">
+            <a:avLst/>
+          </a:prstGeom>
+          <a:noFill/>
+          <a:ln/>
+        </p:spPr>
+        <p:txBody>
+          <a:bodyPr wrap="square" lIns="0" tIns="0" rIns="0" bIns="0" rtlCol="0" anchor="ctr"/>
+          <a:lstStyle/>
+          <a:p>
+            <a:pPr algn="r" indent="0" marL="0">
+              <a:buNone/>
+            </a:pPr>
+            <a:r>
+              <a:rPr lang="en-US" sz="1050" dirty="0">
+                <a:solidFill>
+                  <a:srgbClr val="1A1A1A"/>
+                </a:solidFill>
+                <a:latin typeface="メイリオ" pitchFamily="34" charset="0"/>
+                <a:ea typeface="メイリオ" pitchFamily="34" charset="-122"/>
+                <a:cs typeface="メイリオ" pitchFamily="34" charset="-120"/>
+              </a:rPr>
+              <a:t>863.0</a:t>
+            </a:r>
+            <a:endParaRPr lang="en-US" sz="1050" dirty="0"/>
+          </a:p>
+        </p:txBody>
+      </p:sp>
+      <p:sp>
+        <p:nvSpPr>
+          <p:cNvPr id="16" name="Shape 14"/>
           <p:cNvSpPr/>
           <p:nvPr/>
         </p:nvSpPr>
         <p:spPr>
           <a:xfrm>
             <a:off x="594360" y="2240280"/>
-            <a:ext cx="10972800" cy="338328"/>
+            <a:ext cx="10963656" cy="338328"/>
           </a:xfrm>
           <a:prstGeom prst="rect">
             <a:avLst/>
@@ -3446,14 +3524,14 @@
       </p:sp>
       <p:sp>
         <p:nvSpPr>
-          <p:cNvPr id="15" name="Text 13"/>
+          <p:cNvPr id="17" name="Text 15"/>
           <p:cNvSpPr/>
           <p:nvPr/>
         </p:nvSpPr>
         <p:spPr>
           <a:xfrm>
             <a:off x="704088" y="2240280"/>
-            <a:ext cx="3803904" cy="338328"/>
+            <a:ext cx="2843784" cy="338328"/>
           </a:xfrm>
           <a:prstGeom prst="rect">
             <a:avLst/>
@@ -3485,14 +3563,14 @@
       </p:sp>
       <p:sp>
         <p:nvSpPr>
-          <p:cNvPr id="16" name="Text 14"/>
-          <p:cNvSpPr/>
-          <p:nvPr/>
-        </p:nvSpPr>
-        <p:spPr>
-          <a:xfrm>
-            <a:off x="4727448" y="2240280"/>
-            <a:ext cx="2066544" cy="338328"/>
+          <p:cNvPr id="18" name="Text 16"/>
+          <p:cNvSpPr/>
+          <p:nvPr/>
+        </p:nvSpPr>
+        <p:spPr>
+          <a:xfrm>
+            <a:off x="3767328" y="2240280"/>
+            <a:ext cx="1609344" cy="338328"/>
           </a:xfrm>
           <a:prstGeom prst="rect">
             <a:avLst/>
@@ -3524,14 +3602,14 @@
       </p:sp>
       <p:sp>
         <p:nvSpPr>
-          <p:cNvPr id="17" name="Text 15"/>
-          <p:cNvSpPr/>
-          <p:nvPr/>
-        </p:nvSpPr>
-        <p:spPr>
-          <a:xfrm>
-            <a:off x="7013448" y="2240280"/>
-            <a:ext cx="2112264" cy="338328"/>
+          <p:cNvPr id="19" name="Text 17"/>
+          <p:cNvSpPr/>
+          <p:nvPr/>
+        </p:nvSpPr>
+        <p:spPr>
+          <a:xfrm>
+            <a:off x="5596128" y="2240280"/>
+            <a:ext cx="1700784" cy="338328"/>
           </a:xfrm>
           <a:prstGeom prst="rect">
             <a:avLst/>
@@ -3563,14 +3641,14 @@
       </p:sp>
       <p:sp>
         <p:nvSpPr>
-          <p:cNvPr id="18" name="Text 16"/>
-          <p:cNvSpPr/>
-          <p:nvPr/>
-        </p:nvSpPr>
-        <p:spPr>
-          <a:xfrm>
-            <a:off x="9345168" y="2240280"/>
-            <a:ext cx="2112264" cy="338328"/>
+          <p:cNvPr id="20" name="Text 18"/>
+          <p:cNvSpPr/>
+          <p:nvPr/>
+        </p:nvSpPr>
+        <p:spPr>
+          <a:xfrm>
+            <a:off x="7516368" y="2240280"/>
+            <a:ext cx="1837944" cy="338328"/>
           </a:xfrm>
           <a:prstGeom prst="rect">
             <a:avLst/>
@@ -3602,14 +3680,53 @@
       </p:sp>
       <p:sp>
         <p:nvSpPr>
-          <p:cNvPr id="19" name="Shape 17"/>
+          <p:cNvPr id="21" name="Text 19"/>
+          <p:cNvSpPr/>
+          <p:nvPr/>
+        </p:nvSpPr>
+        <p:spPr>
+          <a:xfrm>
+            <a:off x="9573768" y="2240280"/>
+            <a:ext cx="1874520" cy="338328"/>
+          </a:xfrm>
+          <a:prstGeom prst="rect">
+            <a:avLst/>
+          </a:prstGeom>
+          <a:noFill/>
+          <a:ln/>
+        </p:spPr>
+        <p:txBody>
+          <a:bodyPr wrap="square" lIns="0" tIns="0" rIns="0" bIns="0" rtlCol="0" anchor="ctr"/>
+          <a:lstStyle/>
+          <a:p>
+            <a:pPr algn="r" indent="0" marL="0">
+              <a:buNone/>
+            </a:pPr>
+            <a:r>
+              <a:rPr lang="en-US" sz="1050" dirty="0">
+                <a:solidFill>
+                  <a:srgbClr val="1A1A1A"/>
+                </a:solidFill>
+                <a:latin typeface="メイリオ" pitchFamily="34" charset="0"/>
+                <a:ea typeface="メイリオ" pitchFamily="34" charset="-122"/>
+                <a:cs typeface="メイリオ" pitchFamily="34" charset="-120"/>
+              </a:rPr>
+              <a:t>730.5</a:t>
+            </a:r>
+            <a:endParaRPr lang="en-US" sz="1050" dirty="0"/>
+          </a:p>
+        </p:txBody>
+      </p:sp>
+      <p:sp>
+        <p:nvSpPr>
+          <p:cNvPr id="22" name="Shape 20"/>
           <p:cNvSpPr/>
           <p:nvPr/>
         </p:nvSpPr>
         <p:spPr>
           <a:xfrm>
             <a:off x="594360" y="2578608"/>
-            <a:ext cx="10972800" cy="338328"/>
+            <a:ext cx="10963656" cy="338328"/>
           </a:xfrm>
           <a:prstGeom prst="rect">
             <a:avLst/>
@@ -3627,14 +3744,14 @@
       </p:sp>
       <p:sp>
         <p:nvSpPr>
-          <p:cNvPr id="20" name="Text 18"/>
+          <p:cNvPr id="23" name="Text 21"/>
           <p:cNvSpPr/>
           <p:nvPr/>
         </p:nvSpPr>
         <p:spPr>
           <a:xfrm>
             <a:off x="704088" y="2578608"/>
-            <a:ext cx="3803904" cy="338328"/>
+            <a:ext cx="2843784" cy="338328"/>
           </a:xfrm>
           <a:prstGeom prst="rect">
             <a:avLst/>
@@ -3666,14 +3783,14 @@
       </p:sp>
       <p:sp>
         <p:nvSpPr>
-          <p:cNvPr id="21" name="Text 19"/>
-          <p:cNvSpPr/>
-          <p:nvPr/>
-        </p:nvSpPr>
-        <p:spPr>
-          <a:xfrm>
-            <a:off x="4727448" y="2578608"/>
-            <a:ext cx="2066544" cy="338328"/>
+          <p:cNvPr id="24" name="Text 22"/>
+          <p:cNvSpPr/>
+          <p:nvPr/>
+        </p:nvSpPr>
+        <p:spPr>
+          <a:xfrm>
+            <a:off x="3767328" y="2578608"/>
+            <a:ext cx="1609344" cy="338328"/>
           </a:xfrm>
           <a:prstGeom prst="rect">
             <a:avLst/>
@@ -3705,14 +3822,14 @@
       </p:sp>
       <p:sp>
         <p:nvSpPr>
-          <p:cNvPr id="22" name="Text 20"/>
-          <p:cNvSpPr/>
-          <p:nvPr/>
-        </p:nvSpPr>
-        <p:spPr>
-          <a:xfrm>
-            <a:off x="7013448" y="2578608"/>
-            <a:ext cx="2112264" cy="338328"/>
+          <p:cNvPr id="25" name="Text 23"/>
+          <p:cNvSpPr/>
+          <p:nvPr/>
+        </p:nvSpPr>
+        <p:spPr>
+          <a:xfrm>
+            <a:off x="5596128" y="2578608"/>
+            <a:ext cx="1700784" cy="338328"/>
           </a:xfrm>
           <a:prstGeom prst="rect">
             <a:avLst/>
@@ -3744,14 +3861,14 @@
       </p:sp>
       <p:sp>
         <p:nvSpPr>
-          <p:cNvPr id="23" name="Text 21"/>
-          <p:cNvSpPr/>
-          <p:nvPr/>
-        </p:nvSpPr>
-        <p:spPr>
-          <a:xfrm>
-            <a:off x="9345168" y="2578608"/>
-            <a:ext cx="2112264" cy="338328"/>
+          <p:cNvPr id="26" name="Text 24"/>
+          <p:cNvSpPr/>
+          <p:nvPr/>
+        </p:nvSpPr>
+        <p:spPr>
+          <a:xfrm>
+            <a:off x="7516368" y="2578608"/>
+            <a:ext cx="1837944" cy="338328"/>
           </a:xfrm>
           <a:prstGeom prst="rect">
             <a:avLst/>
@@ -3783,14 +3900,53 @@
       </p:sp>
       <p:sp>
         <p:nvSpPr>
-          <p:cNvPr id="24" name="Shape 22"/>
+          <p:cNvPr id="27" name="Text 25"/>
+          <p:cNvSpPr/>
+          <p:nvPr/>
+        </p:nvSpPr>
+        <p:spPr>
+          <a:xfrm>
+            <a:off x="9573768" y="2578608"/>
+            <a:ext cx="1874520" cy="338328"/>
+          </a:xfrm>
+          <a:prstGeom prst="rect">
+            <a:avLst/>
+          </a:prstGeom>
+          <a:noFill/>
+          <a:ln/>
+        </p:spPr>
+        <p:txBody>
+          <a:bodyPr wrap="square" lIns="0" tIns="0" rIns="0" bIns="0" rtlCol="0" anchor="ctr"/>
+          <a:lstStyle/>
+          <a:p>
+            <a:pPr algn="r" indent="0" marL="0">
+              <a:buNone/>
+            </a:pPr>
+            <a:r>
+              <a:rPr lang="en-US" sz="1050" dirty="0">
+                <a:solidFill>
+                  <a:srgbClr val="1A1A1A"/>
+                </a:solidFill>
+                <a:latin typeface="メイリオ" pitchFamily="34" charset="0"/>
+                <a:ea typeface="メイリオ" pitchFamily="34" charset="-122"/>
+                <a:cs typeface="メイリオ" pitchFamily="34" charset="-120"/>
+              </a:rPr>
+              <a:t>132.5</a:t>
+            </a:r>
+            <a:endParaRPr lang="en-US" sz="1050" dirty="0"/>
+          </a:p>
+        </p:txBody>
+      </p:sp>
+      <p:sp>
+        <p:nvSpPr>
+          <p:cNvPr id="28" name="Shape 26"/>
           <p:cNvSpPr/>
           <p:nvPr/>
         </p:nvSpPr>
         <p:spPr>
           <a:xfrm>
             <a:off x="594360" y="2916936"/>
-            <a:ext cx="10972800" cy="338328"/>
+            <a:ext cx="10963656" cy="338328"/>
           </a:xfrm>
           <a:prstGeom prst="rect">
             <a:avLst/>
@@ -3808,14 +3964,14 @@
       </p:sp>
       <p:sp>
         <p:nvSpPr>
-          <p:cNvPr id="25" name="Text 23"/>
+          <p:cNvPr id="29" name="Text 27"/>
           <p:cNvSpPr/>
           <p:nvPr/>
         </p:nvSpPr>
         <p:spPr>
           <a:xfrm>
             <a:off x="704088" y="2916936"/>
-            <a:ext cx="3803904" cy="338328"/>
+            <a:ext cx="2843784" cy="338328"/>
           </a:xfrm>
           <a:prstGeom prst="rect">
             <a:avLst/>
@@ -3847,14 +4003,14 @@
       </p:sp>
       <p:sp>
         <p:nvSpPr>
-          <p:cNvPr id="26" name="Text 24"/>
-          <p:cNvSpPr/>
-          <p:nvPr/>
-        </p:nvSpPr>
-        <p:spPr>
-          <a:xfrm>
-            <a:off x="4727448" y="2916936"/>
-            <a:ext cx="2066544" cy="338328"/>
+          <p:cNvPr id="30" name="Text 28"/>
+          <p:cNvSpPr/>
+          <p:nvPr/>
+        </p:nvSpPr>
+        <p:spPr>
+          <a:xfrm>
+            <a:off x="3767328" y="2916936"/>
+            <a:ext cx="1609344" cy="338328"/>
           </a:xfrm>
           <a:prstGeom prst="rect">
             <a:avLst/>
@@ -3886,14 +4042,14 @@
       </p:sp>
       <p:sp>
         <p:nvSpPr>
-          <p:cNvPr id="27" name="Text 25"/>
-          <p:cNvSpPr/>
-          <p:nvPr/>
-        </p:nvSpPr>
-        <p:spPr>
-          <a:xfrm>
-            <a:off x="7013448" y="2916936"/>
-            <a:ext cx="2112264" cy="338328"/>
+          <p:cNvPr id="31" name="Text 29"/>
+          <p:cNvSpPr/>
+          <p:nvPr/>
+        </p:nvSpPr>
+        <p:spPr>
+          <a:xfrm>
+            <a:off x="5596128" y="2916936"/>
+            <a:ext cx="1700784" cy="338328"/>
           </a:xfrm>
           <a:prstGeom prst="rect">
             <a:avLst/>
@@ -3925,14 +4081,14 @@
       </p:sp>
       <p:sp>
         <p:nvSpPr>
-          <p:cNvPr id="28" name="Text 26"/>
-          <p:cNvSpPr/>
-          <p:nvPr/>
-        </p:nvSpPr>
-        <p:spPr>
-          <a:xfrm>
-            <a:off x="9345168" y="2916936"/>
-            <a:ext cx="2112264" cy="338328"/>
+          <p:cNvPr id="32" name="Text 30"/>
+          <p:cNvSpPr/>
+          <p:nvPr/>
+        </p:nvSpPr>
+        <p:spPr>
+          <a:xfrm>
+            <a:off x="7516368" y="2916936"/>
+            <a:ext cx="1837944" cy="338328"/>
           </a:xfrm>
           <a:prstGeom prst="rect">
             <a:avLst/>
@@ -3964,14 +4120,53 @@
       </p:sp>
       <p:sp>
         <p:nvSpPr>
-          <p:cNvPr id="29" name="Shape 27"/>
+          <p:cNvPr id="33" name="Text 31"/>
+          <p:cNvSpPr/>
+          <p:nvPr/>
+        </p:nvSpPr>
+        <p:spPr>
+          <a:xfrm>
+            <a:off x="9573768" y="2916936"/>
+            <a:ext cx="1874520" cy="338328"/>
+          </a:xfrm>
+          <a:prstGeom prst="rect">
+            <a:avLst/>
+          </a:prstGeom>
+          <a:noFill/>
+          <a:ln/>
+        </p:spPr>
+        <p:txBody>
+          <a:bodyPr wrap="square" lIns="0" tIns="0" rIns="0" bIns="0" rtlCol="0" anchor="ctr"/>
+          <a:lstStyle/>
+          <a:p>
+            <a:pPr algn="r" indent="0" marL="0">
+              <a:buNone/>
+            </a:pPr>
+            <a:r>
+              <a:rPr lang="en-US" sz="1050" dirty="0">
+                <a:solidFill>
+                  <a:srgbClr val="1A1A1A"/>
+                </a:solidFill>
+                <a:latin typeface="メイリオ" pitchFamily="34" charset="0"/>
+                <a:ea typeface="メイリオ" pitchFamily="34" charset="-122"/>
+                <a:cs typeface="メイリオ" pitchFamily="34" charset="-120"/>
+              </a:rPr>
+              <a:t>435.5</a:t>
+            </a:r>
+            <a:endParaRPr lang="en-US" sz="1050" dirty="0"/>
+          </a:p>
+        </p:txBody>
+      </p:sp>
+      <p:sp>
+        <p:nvSpPr>
+          <p:cNvPr id="34" name="Shape 32"/>
           <p:cNvSpPr/>
           <p:nvPr/>
         </p:nvSpPr>
         <p:spPr>
           <a:xfrm>
             <a:off x="594360" y="3255264"/>
-            <a:ext cx="10972800" cy="338328"/>
+            <a:ext cx="10963656" cy="338328"/>
           </a:xfrm>
           <a:prstGeom prst="rect">
             <a:avLst/>
@@ -3989,14 +4184,14 @@
       </p:sp>
       <p:sp>
         <p:nvSpPr>
-          <p:cNvPr id="30" name="Text 28"/>
+          <p:cNvPr id="35" name="Text 33"/>
           <p:cNvSpPr/>
           <p:nvPr/>
         </p:nvSpPr>
         <p:spPr>
           <a:xfrm>
             <a:off x="704088" y="3255264"/>
-            <a:ext cx="3803904" cy="338328"/>
+            <a:ext cx="2843784" cy="338328"/>
           </a:xfrm>
           <a:prstGeom prst="rect">
             <a:avLst/>
@@ -4028,14 +4223,14 @@
       </p:sp>
       <p:sp>
         <p:nvSpPr>
-          <p:cNvPr id="31" name="Text 29"/>
-          <p:cNvSpPr/>
-          <p:nvPr/>
-        </p:nvSpPr>
-        <p:spPr>
-          <a:xfrm>
-            <a:off x="4727448" y="3255264"/>
-            <a:ext cx="2066544" cy="338328"/>
+          <p:cNvPr id="36" name="Text 34"/>
+          <p:cNvSpPr/>
+          <p:nvPr/>
+        </p:nvSpPr>
+        <p:spPr>
+          <a:xfrm>
+            <a:off x="3767328" y="3255264"/>
+            <a:ext cx="1609344" cy="338328"/>
           </a:xfrm>
           <a:prstGeom prst="rect">
             <a:avLst/>
@@ -4067,14 +4262,14 @@
       </p:sp>
       <p:sp>
         <p:nvSpPr>
-          <p:cNvPr id="32" name="Text 30"/>
-          <p:cNvSpPr/>
-          <p:nvPr/>
-        </p:nvSpPr>
-        <p:spPr>
-          <a:xfrm>
-            <a:off x="7013448" y="3255264"/>
-            <a:ext cx="2112264" cy="338328"/>
+          <p:cNvPr id="37" name="Text 35"/>
+          <p:cNvSpPr/>
+          <p:nvPr/>
+        </p:nvSpPr>
+        <p:spPr>
+          <a:xfrm>
+            <a:off x="5596128" y="3255264"/>
+            <a:ext cx="1700784" cy="338328"/>
           </a:xfrm>
           <a:prstGeom prst="rect">
             <a:avLst/>
@@ -4106,14 +4301,14 @@
       </p:sp>
       <p:sp>
         <p:nvSpPr>
-          <p:cNvPr id="33" name="Text 31"/>
-          <p:cNvSpPr/>
-          <p:nvPr/>
-        </p:nvSpPr>
-        <p:spPr>
-          <a:xfrm>
-            <a:off x="9345168" y="3255264"/>
-            <a:ext cx="2112264" cy="338328"/>
+          <p:cNvPr id="38" name="Text 36"/>
+          <p:cNvSpPr/>
+          <p:nvPr/>
+        </p:nvSpPr>
+        <p:spPr>
+          <a:xfrm>
+            <a:off x="7516368" y="3255264"/>
+            <a:ext cx="1837944" cy="338328"/>
           </a:xfrm>
           <a:prstGeom prst="rect">
             <a:avLst/>
@@ -4145,14 +4340,53 @@
       </p:sp>
       <p:sp>
         <p:nvSpPr>
-          <p:cNvPr id="34" name="Shape 32"/>
+          <p:cNvPr id="39" name="Text 37"/>
+          <p:cNvSpPr/>
+          <p:nvPr/>
+        </p:nvSpPr>
+        <p:spPr>
+          <a:xfrm>
+            <a:off x="9573768" y="3255264"/>
+            <a:ext cx="1874520" cy="338328"/>
+          </a:xfrm>
+          <a:prstGeom prst="rect">
+            <a:avLst/>
+          </a:prstGeom>
+          <a:noFill/>
+          <a:ln/>
+        </p:spPr>
+        <p:txBody>
+          <a:bodyPr wrap="square" lIns="0" tIns="0" rIns="0" bIns="0" rtlCol="0" anchor="ctr"/>
+          <a:lstStyle/>
+          <a:p>
+            <a:pPr algn="r" indent="0" marL="0">
+              <a:buNone/>
+            </a:pPr>
+            <a:r>
+              <a:rPr lang="en-US" sz="1050" dirty="0">
+                <a:solidFill>
+                  <a:srgbClr val="1A1A1A"/>
+                </a:solidFill>
+                <a:latin typeface="メイリオ" pitchFamily="34" charset="0"/>
+                <a:ea typeface="メイリオ" pitchFamily="34" charset="-122"/>
+                <a:cs typeface="メイリオ" pitchFamily="34" charset="-120"/>
+              </a:rPr>
+              <a:t>50.5%</a:t>
+            </a:r>
+            <a:endParaRPr lang="en-US" sz="1050" dirty="0"/>
+          </a:p>
+        </p:txBody>
+      </p:sp>
+      <p:sp>
+        <p:nvSpPr>
+          <p:cNvPr id="40" name="Shape 38"/>
           <p:cNvSpPr/>
           <p:nvPr/>
         </p:nvSpPr>
         <p:spPr>
           <a:xfrm>
             <a:off x="594360" y="3593592"/>
-            <a:ext cx="10972800" cy="338328"/>
+            <a:ext cx="10963656" cy="338328"/>
           </a:xfrm>
           <a:prstGeom prst="rect">
             <a:avLst/>
@@ -4170,14 +4404,14 @@
       </p:sp>
       <p:sp>
         <p:nvSpPr>
-          <p:cNvPr id="35" name="Text 33"/>
+          <p:cNvPr id="41" name="Text 39"/>
           <p:cNvSpPr/>
           <p:nvPr/>
         </p:nvSpPr>
         <p:spPr>
           <a:xfrm>
             <a:off x="704088" y="3593592"/>
-            <a:ext cx="3803904" cy="338328"/>
+            <a:ext cx="2843784" cy="338328"/>
           </a:xfrm>
           <a:prstGeom prst="rect">
             <a:avLst/>
@@ -4209,14 +4443,14 @@
       </p:sp>
       <p:sp>
         <p:nvSpPr>
-          <p:cNvPr id="36" name="Text 34"/>
-          <p:cNvSpPr/>
-          <p:nvPr/>
-        </p:nvSpPr>
-        <p:spPr>
-          <a:xfrm>
-            <a:off x="4727448" y="3593592"/>
-            <a:ext cx="2066544" cy="338328"/>
+          <p:cNvPr id="42" name="Text 40"/>
+          <p:cNvSpPr/>
+          <p:nvPr/>
+        </p:nvSpPr>
+        <p:spPr>
+          <a:xfrm>
+            <a:off x="3767328" y="3593592"/>
+            <a:ext cx="1609344" cy="338328"/>
           </a:xfrm>
           <a:prstGeom prst="rect">
             <a:avLst/>
@@ -4248,14 +4482,14 @@
       </p:sp>
       <p:sp>
         <p:nvSpPr>
-          <p:cNvPr id="37" name="Text 35"/>
-          <p:cNvSpPr/>
-          <p:nvPr/>
-        </p:nvSpPr>
-        <p:spPr>
-          <a:xfrm>
-            <a:off x="7013448" y="3593592"/>
-            <a:ext cx="2112264" cy="338328"/>
+          <p:cNvPr id="43" name="Text 41"/>
+          <p:cNvSpPr/>
+          <p:nvPr/>
+        </p:nvSpPr>
+        <p:spPr>
+          <a:xfrm>
+            <a:off x="5596128" y="3593592"/>
+            <a:ext cx="1700784" cy="338328"/>
           </a:xfrm>
           <a:prstGeom prst="rect">
             <a:avLst/>
@@ -4287,14 +4521,14 @@
       </p:sp>
       <p:sp>
         <p:nvSpPr>
-          <p:cNvPr id="38" name="Text 36"/>
-          <p:cNvSpPr/>
-          <p:nvPr/>
-        </p:nvSpPr>
-        <p:spPr>
-          <a:xfrm>
-            <a:off x="9345168" y="3593592"/>
-            <a:ext cx="2112264" cy="338328"/>
+          <p:cNvPr id="44" name="Text 42"/>
+          <p:cNvSpPr/>
+          <p:nvPr/>
+        </p:nvSpPr>
+        <p:spPr>
+          <a:xfrm>
+            <a:off x="7516368" y="3593592"/>
+            <a:ext cx="1837944" cy="338328"/>
           </a:xfrm>
           <a:prstGeom prst="rect">
             <a:avLst/>
@@ -4326,14 +4560,53 @@
       </p:sp>
       <p:sp>
         <p:nvSpPr>
-          <p:cNvPr id="39" name="Shape 37"/>
+          <p:cNvPr id="45" name="Text 43"/>
+          <p:cNvSpPr/>
+          <p:nvPr/>
+        </p:nvSpPr>
+        <p:spPr>
+          <a:xfrm>
+            <a:off x="9573768" y="3593592"/>
+            <a:ext cx="1874520" cy="338328"/>
+          </a:xfrm>
+          <a:prstGeom prst="rect">
+            <a:avLst/>
+          </a:prstGeom>
+          <a:noFill/>
+          <a:ln/>
+        </p:spPr>
+        <p:txBody>
+          <a:bodyPr wrap="square" lIns="0" tIns="0" rIns="0" bIns="0" rtlCol="0" anchor="ctr"/>
+          <a:lstStyle/>
+          <a:p>
+            <a:pPr algn="r" indent="0" marL="0">
+              <a:buNone/>
+            </a:pPr>
+            <a:r>
+              <a:rPr lang="en-US" sz="1050" dirty="0">
+                <a:solidFill>
+                  <a:srgbClr val="1A1A1A"/>
+                </a:solidFill>
+                <a:latin typeface="メイリオ" pitchFamily="34" charset="0"/>
+                <a:ea typeface="メイリオ" pitchFamily="34" charset="-122"/>
+                <a:cs typeface="メイリオ" pitchFamily="34" charset="-120"/>
+              </a:rPr>
+              <a:t>300.2</a:t>
+            </a:r>
+            <a:endParaRPr lang="en-US" sz="1050" dirty="0"/>
+          </a:p>
+        </p:txBody>
+      </p:sp>
+      <p:sp>
+        <p:nvSpPr>
+          <p:cNvPr id="46" name="Shape 44"/>
           <p:cNvSpPr/>
           <p:nvPr/>
         </p:nvSpPr>
         <p:spPr>
           <a:xfrm>
             <a:off x="594360" y="3931920"/>
-            <a:ext cx="10972800" cy="338328"/>
+            <a:ext cx="10963656" cy="338328"/>
           </a:xfrm>
           <a:prstGeom prst="rect">
             <a:avLst/>
@@ -4351,14 +4624,14 @@
       </p:sp>
       <p:sp>
         <p:nvSpPr>
-          <p:cNvPr id="40" name="Text 38"/>
+          <p:cNvPr id="47" name="Text 45"/>
           <p:cNvSpPr/>
           <p:nvPr/>
         </p:nvSpPr>
         <p:spPr>
           <a:xfrm>
             <a:off x="704088" y="3931920"/>
-            <a:ext cx="3803904" cy="338328"/>
+            <a:ext cx="2843784" cy="338328"/>
           </a:xfrm>
           <a:prstGeom prst="rect">
             <a:avLst/>
@@ -4390,14 +4663,14 @@
       </p:sp>
       <p:sp>
         <p:nvSpPr>
-          <p:cNvPr id="41" name="Text 39"/>
-          <p:cNvSpPr/>
-          <p:nvPr/>
-        </p:nvSpPr>
-        <p:spPr>
-          <a:xfrm>
-            <a:off x="4727448" y="3931920"/>
-            <a:ext cx="2066544" cy="338328"/>
+          <p:cNvPr id="48" name="Text 46"/>
+          <p:cNvSpPr/>
+          <p:nvPr/>
+        </p:nvSpPr>
+        <p:spPr>
+          <a:xfrm>
+            <a:off x="3767328" y="3931920"/>
+            <a:ext cx="1609344" cy="338328"/>
           </a:xfrm>
           <a:prstGeom prst="rect">
             <a:avLst/>
@@ -4429,14 +4702,14 @@
       </p:sp>
       <p:sp>
         <p:nvSpPr>
-          <p:cNvPr id="42" name="Text 40"/>
-          <p:cNvSpPr/>
-          <p:nvPr/>
-        </p:nvSpPr>
-        <p:spPr>
-          <a:xfrm>
-            <a:off x="7013448" y="3931920"/>
-            <a:ext cx="2112264" cy="338328"/>
+          <p:cNvPr id="49" name="Text 47"/>
+          <p:cNvSpPr/>
+          <p:nvPr/>
+        </p:nvSpPr>
+        <p:spPr>
+          <a:xfrm>
+            <a:off x="5596128" y="3931920"/>
+            <a:ext cx="1700784" cy="338328"/>
           </a:xfrm>
           <a:prstGeom prst="rect">
             <a:avLst/>
@@ -4468,14 +4741,14 @@
       </p:sp>
       <p:sp>
         <p:nvSpPr>
-          <p:cNvPr id="43" name="Text 41"/>
-          <p:cNvSpPr/>
-          <p:nvPr/>
-        </p:nvSpPr>
-        <p:spPr>
-          <a:xfrm>
-            <a:off x="9345168" y="3931920"/>
-            <a:ext cx="2112264" cy="338328"/>
+          <p:cNvPr id="50" name="Text 48"/>
+          <p:cNvSpPr/>
+          <p:nvPr/>
+        </p:nvSpPr>
+        <p:spPr>
+          <a:xfrm>
+            <a:off x="7516368" y="3931920"/>
+            <a:ext cx="1837944" cy="338328"/>
           </a:xfrm>
           <a:prstGeom prst="rect">
             <a:avLst/>
@@ -4507,14 +4780,53 @@
       </p:sp>
       <p:sp>
         <p:nvSpPr>
-          <p:cNvPr id="44" name="Shape 42"/>
+          <p:cNvPr id="51" name="Text 49"/>
+          <p:cNvSpPr/>
+          <p:nvPr/>
+        </p:nvSpPr>
+        <p:spPr>
+          <a:xfrm>
+            <a:off x="9573768" y="3931920"/>
+            <a:ext cx="1874520" cy="338328"/>
+          </a:xfrm>
+          <a:prstGeom prst="rect">
+            <a:avLst/>
+          </a:prstGeom>
+          <a:noFill/>
+          <a:ln/>
+        </p:spPr>
+        <p:txBody>
+          <a:bodyPr wrap="square" lIns="0" tIns="0" rIns="0" bIns="0" rtlCol="0" anchor="ctr"/>
+          <a:lstStyle/>
+          <a:p>
+            <a:pPr algn="r" indent="0" marL="0">
+              <a:buNone/>
+            </a:pPr>
+            <a:r>
+              <a:rPr lang="en-US" sz="1050" b="1" dirty="0">
+                <a:solidFill>
+                  <a:srgbClr val="1A1A1A"/>
+                </a:solidFill>
+                <a:latin typeface="メイリオ" pitchFamily="34" charset="0"/>
+                <a:ea typeface="メイリオ" pitchFamily="34" charset="-122"/>
+                <a:cs typeface="メイリオ" pitchFamily="34" charset="-120"/>
+              </a:rPr>
+              <a:t>＋135.4</a:t>
+            </a:r>
+            <a:endParaRPr lang="en-US" sz="1050" dirty="0"/>
+          </a:p>
+        </p:txBody>
+      </p:sp>
+      <p:sp>
+        <p:nvSpPr>
+          <p:cNvPr id="52" name="Shape 50"/>
           <p:cNvSpPr/>
           <p:nvPr/>
         </p:nvSpPr>
         <p:spPr>
           <a:xfrm>
             <a:off x="594360" y="4270248"/>
-            <a:ext cx="10972800" cy="338328"/>
+            <a:ext cx="10963656" cy="338328"/>
           </a:xfrm>
           <a:prstGeom prst="rect">
             <a:avLst/>
@@ -4532,14 +4844,14 @@
       </p:sp>
       <p:sp>
         <p:nvSpPr>
-          <p:cNvPr id="45" name="Text 43"/>
+          <p:cNvPr id="53" name="Text 51"/>
           <p:cNvSpPr/>
           <p:nvPr/>
         </p:nvSpPr>
         <p:spPr>
           <a:xfrm>
             <a:off x="704088" y="4270248"/>
-            <a:ext cx="3803904" cy="338328"/>
+            <a:ext cx="2843784" cy="338328"/>
           </a:xfrm>
           <a:prstGeom prst="rect">
             <a:avLst/>
@@ -4571,14 +4883,14 @@
       </p:sp>
       <p:sp>
         <p:nvSpPr>
-          <p:cNvPr id="46" name="Text 44"/>
-          <p:cNvSpPr/>
-          <p:nvPr/>
-        </p:nvSpPr>
-        <p:spPr>
-          <a:xfrm>
-            <a:off x="4727448" y="4270248"/>
-            <a:ext cx="2066544" cy="338328"/>
+          <p:cNvPr id="54" name="Text 52"/>
+          <p:cNvSpPr/>
+          <p:nvPr/>
+        </p:nvSpPr>
+        <p:spPr>
+          <a:xfrm>
+            <a:off x="3767328" y="4270248"/>
+            <a:ext cx="1609344" cy="338328"/>
           </a:xfrm>
           <a:prstGeom prst="rect">
             <a:avLst/>
@@ -4610,14 +4922,14 @@
       </p:sp>
       <p:sp>
         <p:nvSpPr>
-          <p:cNvPr id="47" name="Text 45"/>
-          <p:cNvSpPr/>
-          <p:nvPr/>
-        </p:nvSpPr>
-        <p:spPr>
-          <a:xfrm>
-            <a:off x="7013448" y="4270248"/>
-            <a:ext cx="2112264" cy="338328"/>
+          <p:cNvPr id="55" name="Text 53"/>
+          <p:cNvSpPr/>
+          <p:nvPr/>
+        </p:nvSpPr>
+        <p:spPr>
+          <a:xfrm>
+            <a:off x="5596128" y="4270248"/>
+            <a:ext cx="1700784" cy="338328"/>
           </a:xfrm>
           <a:prstGeom prst="rect">
             <a:avLst/>
@@ -4649,14 +4961,14 @@
       </p:sp>
       <p:sp>
         <p:nvSpPr>
-          <p:cNvPr id="48" name="Text 46"/>
-          <p:cNvSpPr/>
-          <p:nvPr/>
-        </p:nvSpPr>
-        <p:spPr>
-          <a:xfrm>
-            <a:off x="9345168" y="4270248"/>
-            <a:ext cx="2112264" cy="338328"/>
+          <p:cNvPr id="56" name="Text 54"/>
+          <p:cNvSpPr/>
+          <p:nvPr/>
+        </p:nvSpPr>
+        <p:spPr>
+          <a:xfrm>
+            <a:off x="7516368" y="4270248"/>
+            <a:ext cx="1837944" cy="338328"/>
           </a:xfrm>
           <a:prstGeom prst="rect">
             <a:avLst/>
@@ -4688,14 +5000,53 @@
       </p:sp>
       <p:sp>
         <p:nvSpPr>
-          <p:cNvPr id="49" name="Shape 47"/>
+          <p:cNvPr id="57" name="Text 55"/>
+          <p:cNvSpPr/>
+          <p:nvPr/>
+        </p:nvSpPr>
+        <p:spPr>
+          <a:xfrm>
+            <a:off x="9573768" y="4270248"/>
+            <a:ext cx="1874520" cy="338328"/>
+          </a:xfrm>
+          <a:prstGeom prst="rect">
+            <a:avLst/>
+          </a:prstGeom>
+          <a:noFill/>
+          <a:ln/>
+        </p:spPr>
+        <p:txBody>
+          <a:bodyPr wrap="square" lIns="0" tIns="0" rIns="0" bIns="0" rtlCol="0" anchor="ctr"/>
+          <a:lstStyle/>
+          <a:p>
+            <a:pPr algn="r" indent="0" marL="0">
+              <a:buNone/>
+            </a:pPr>
+            <a:r>
+              <a:rPr lang="en-US" sz="1050" b="1" dirty="0">
+                <a:solidFill>
+                  <a:srgbClr val="1A1A1A"/>
+                </a:solidFill>
+                <a:latin typeface="メイリオ" pitchFamily="34" charset="0"/>
+                <a:ea typeface="メイリオ" pitchFamily="34" charset="-122"/>
+                <a:cs typeface="メイリオ" pitchFamily="34" charset="-120"/>
+              </a:rPr>
+              <a:t>＋120.4</a:t>
+            </a:r>
+            <a:endParaRPr lang="en-US" sz="1050" dirty="0"/>
+          </a:p>
+        </p:txBody>
+      </p:sp>
+      <p:sp>
+        <p:nvSpPr>
+          <p:cNvPr id="58" name="Shape 56"/>
           <p:cNvSpPr/>
           <p:nvPr/>
         </p:nvSpPr>
         <p:spPr>
           <a:xfrm>
             <a:off x="594360" y="4608576"/>
-            <a:ext cx="10972800" cy="338328"/>
+            <a:ext cx="10963656" cy="338328"/>
           </a:xfrm>
           <a:prstGeom prst="rect">
             <a:avLst/>
@@ -4713,14 +5064,14 @@
       </p:sp>
       <p:sp>
         <p:nvSpPr>
-          <p:cNvPr id="50" name="Text 48"/>
+          <p:cNvPr id="59" name="Text 57"/>
           <p:cNvSpPr/>
           <p:nvPr/>
         </p:nvSpPr>
         <p:spPr>
           <a:xfrm>
             <a:off x="704088" y="4608576"/>
-            <a:ext cx="3803904" cy="338328"/>
+            <a:ext cx="2843784" cy="338328"/>
           </a:xfrm>
           <a:prstGeom prst="rect">
             <a:avLst/>
@@ -4752,14 +5103,14 @@
       </p:sp>
       <p:sp>
         <p:nvSpPr>
-          <p:cNvPr id="51" name="Text 49"/>
-          <p:cNvSpPr/>
-          <p:nvPr/>
-        </p:nvSpPr>
-        <p:spPr>
-          <a:xfrm>
-            <a:off x="4727448" y="4608576"/>
-            <a:ext cx="2066544" cy="338328"/>
+          <p:cNvPr id="60" name="Text 58"/>
+          <p:cNvSpPr/>
+          <p:nvPr/>
+        </p:nvSpPr>
+        <p:spPr>
+          <a:xfrm>
+            <a:off x="3767328" y="4608576"/>
+            <a:ext cx="1609344" cy="338328"/>
           </a:xfrm>
           <a:prstGeom prst="rect">
             <a:avLst/>
@@ -4791,14 +5142,14 @@
       </p:sp>
       <p:sp>
         <p:nvSpPr>
-          <p:cNvPr id="52" name="Text 50"/>
-          <p:cNvSpPr/>
-          <p:nvPr/>
-        </p:nvSpPr>
-        <p:spPr>
-          <a:xfrm>
-            <a:off x="7013448" y="4608576"/>
-            <a:ext cx="2112264" cy="338328"/>
+          <p:cNvPr id="61" name="Text 59"/>
+          <p:cNvSpPr/>
+          <p:nvPr/>
+        </p:nvSpPr>
+        <p:spPr>
+          <a:xfrm>
+            <a:off x="5596128" y="4608576"/>
+            <a:ext cx="1700784" cy="338328"/>
           </a:xfrm>
           <a:prstGeom prst="rect">
             <a:avLst/>
@@ -4830,14 +5181,14 @@
       </p:sp>
       <p:sp>
         <p:nvSpPr>
-          <p:cNvPr id="53" name="Text 51"/>
-          <p:cNvSpPr/>
-          <p:nvPr/>
-        </p:nvSpPr>
-        <p:spPr>
-          <a:xfrm>
-            <a:off x="9345168" y="4608576"/>
-            <a:ext cx="2112264" cy="338328"/>
+          <p:cNvPr id="62" name="Text 60"/>
+          <p:cNvSpPr/>
+          <p:nvPr/>
+        </p:nvSpPr>
+        <p:spPr>
+          <a:xfrm>
+            <a:off x="7516368" y="4608576"/>
+            <a:ext cx="1837944" cy="338328"/>
           </a:xfrm>
           <a:prstGeom prst="rect">
             <a:avLst/>
@@ -4869,7 +5220,46 @@
       </p:sp>
       <p:sp>
         <p:nvSpPr>
-          <p:cNvPr id="54" name="Shape 52"/>
+          <p:cNvPr id="63" name="Text 61"/>
+          <p:cNvSpPr/>
+          <p:nvPr/>
+        </p:nvSpPr>
+        <p:spPr>
+          <a:xfrm>
+            <a:off x="9573768" y="4608576"/>
+            <a:ext cx="1874520" cy="338328"/>
+          </a:xfrm>
+          <a:prstGeom prst="rect">
+            <a:avLst/>
+          </a:prstGeom>
+          <a:noFill/>
+          <a:ln/>
+        </p:spPr>
+        <p:txBody>
+          <a:bodyPr wrap="square" lIns="0" tIns="0" rIns="0" bIns="0" rtlCol="0" anchor="ctr"/>
+          <a:lstStyle/>
+          <a:p>
+            <a:pPr algn="r" indent="0" marL="0">
+              <a:buNone/>
+            </a:pPr>
+            <a:r>
+              <a:rPr lang="en-US" sz="1050" b="1" dirty="0">
+                <a:solidFill>
+                  <a:srgbClr val="1A1A1A"/>
+                </a:solidFill>
+                <a:latin typeface="メイリオ" pitchFamily="34" charset="0"/>
+                <a:ea typeface="メイリオ" pitchFamily="34" charset="-122"/>
+                <a:cs typeface="メイリオ" pitchFamily="34" charset="-120"/>
+              </a:rPr>
+              <a:t>＋40.3</a:t>
+            </a:r>
+            <a:endParaRPr lang="en-US" sz="1050" dirty="0"/>
+          </a:p>
+        </p:txBody>
+      </p:sp>
+      <p:sp>
+        <p:nvSpPr>
+          <p:cNvPr id="64" name="Shape 62"/>
           <p:cNvSpPr/>
           <p:nvPr/>
         </p:nvSpPr>
@@ -4903,7 +5293,7 @@
       </p:sp>
       <p:sp>
         <p:nvSpPr>
-          <p:cNvPr id="55" name="Text 53"/>
+          <p:cNvPr id="65" name="Text 63"/>
           <p:cNvSpPr/>
           <p:nvPr/>
         </p:nvSpPr>
@@ -4934,7 +5324,7 @@
                 <a:ea typeface="メイリオ" pitchFamily="34" charset="-122"/>
                 <a:cs typeface="メイリオ" pitchFamily="34" charset="-120"/>
               </a:rPr>
-              <a:t>Cの粗利の内訳</a:t>
+              <a:t>B は「何もしなくても」届く下限</a:t>
             </a:r>
             <a:endParaRPr lang="en-US" sz="1100" dirty="0"/>
           </a:p>
@@ -4942,7 +5332,7 @@
       </p:sp>
       <p:sp>
         <p:nvSpPr>
-          <p:cNvPr id="56" name="Text 54"/>
+          <p:cNvPr id="66" name="Text 64"/>
           <p:cNvSpPr/>
           <p:nvPr/>
         </p:nvSpPr>
@@ -4973,7 +5363,7 @@
                 <a:ea typeface="メイリオ" pitchFamily="34" charset="-122"/>
                 <a:cs typeface="メイリオ" pitchFamily="34" charset="-120"/>
               </a:rPr>
-              <a:t>既存389.1×51.5%＝200.6　／　差額208.9×30%＝62.7　／　上乗せ132.5×100%＝132.5。合計395.8百万円です。</a:t>
+              <a:t>4-6月実績の横ばいに、契約ベースの上乗せ案件を足しただけ。新規の施策をひとつも前提にしていません。</a:t>
             </a:r>
             <a:endParaRPr lang="en-US" sz="1050" dirty="0"/>
           </a:p>
@@ -4981,7 +5371,7 @@
       </p:sp>
       <p:sp>
         <p:nvSpPr>
-          <p:cNvPr id="57" name="Shape 55"/>
+          <p:cNvPr id="67" name="Shape 65"/>
           <p:cNvSpPr/>
           <p:nvPr/>
         </p:nvSpPr>
@@ -5015,7 +5405,7 @@
       </p:sp>
       <p:sp>
         <p:nvSpPr>
-          <p:cNvPr id="58" name="Text 56"/>
+          <p:cNvPr id="68" name="Text 66"/>
           <p:cNvSpPr/>
           <p:nvPr/>
         </p:nvSpPr>
@@ -5046,7 +5436,7 @@
                 <a:ea typeface="メイリオ" pitchFamily="34" charset="-122"/>
                 <a:cs typeface="メイリオ" pitchFamily="34" charset="-120"/>
               </a:rPr>
-              <a:t>差額売上の粗利率30%の根拠</a:t>
+              <a:t>D は目指すべき最低限の姿</a:t>
             </a:r>
             <a:endParaRPr lang="en-US" sz="1100" dirty="0"/>
           </a:p>
@@ -5054,7 +5444,7 @@
       </p:sp>
       <p:sp>
         <p:nvSpPr>
-          <p:cNvPr id="59" name="Text 57"/>
+          <p:cNvPr id="69" name="Text 67"/>
           <p:cNvSpPr/>
           <p:nvPr/>
         </p:nvSpPr>
@@ -5085,7 +5475,7 @@
                 <a:ea typeface="メイリオ" pitchFamily="34" charset="-122"/>
                 <a:cs typeface="メイリオ" pitchFamily="34" charset="-120"/>
               </a:rPr>
-              <a:t>既存事業の実績はFY2025 26.8%・FY2026 32.4%。その水準に合わせ、4-6月実績の51.5%は差額分には適用していません。</a:t>
+              <a:t>既存事業を前期・今期の平均730.5百万円に戻し、上乗せ案件132.5百万円を外数で加算。当然これ以上を狙います。</a:t>
             </a:r>
             <a:endParaRPr lang="en-US" sz="1050" dirty="0"/>
           </a:p>
@@ -5093,7 +5483,7 @@
       </p:sp>
       <p:sp>
         <p:nvSpPr>
-          <p:cNvPr id="60" name="Text 58"/>
+          <p:cNvPr id="70" name="Text 68"/>
           <p:cNvSpPr/>
           <p:nvPr/>
         </p:nvSpPr>
@@ -6323,7 +6713,7 @@
                 <a:ea typeface="メイリオ" pitchFamily="34" charset="-122"/>
                 <a:cs typeface="メイリオ" pitchFamily="34" charset="-120"/>
               </a:rPr>
-              <a:t>334.8百万円</a:t>
+              <a:t>427.5百万円</a:t>
             </a:r>
             <a:endParaRPr lang="en-US" sz="1800" dirty="0"/>
           </a:p>
@@ -6435,7 +6825,7 @@
                 <a:ea typeface="メイリオ" pitchFamily="34" charset="-122"/>
                 <a:cs typeface="メイリオ" pitchFamily="34" charset="-120"/>
               </a:rPr>
-              <a:t>504.3百万円</a:t>
+              <a:t>411.6百万円</a:t>
             </a:r>
             <a:endParaRPr lang="en-US" sz="1800" dirty="0"/>
           </a:p>
@@ -6508,7 +6898,7 @@
                 <a:ea typeface="メイリオ" pitchFamily="34" charset="-122"/>
                 <a:cs typeface="メイリオ" pitchFamily="34" charset="-120"/>
               </a:rPr>
-              <a:t>在庫は420.0→504.3百万円と84.3百万円積み上がりますが、時価1.37倍の換価可能資産です。運転資金としてのご理解をお願いしたい部分です。</a:t>
+              <a:t>プランDでは売上原価427.5百万円が仕入419.1百万円とほぼ見合い、在庫は420.0→411.6百万円と横ばい。仕入を維持しても資金が固定されません。</a:t>
             </a:r>
             <a:endParaRPr lang="en-US" sz="1200" dirty="0"/>
           </a:p>
@@ -6618,7 +7008,7 @@
                 <a:ea typeface="メイリオ" pitchFamily="34" charset="-122"/>
                 <a:cs typeface="メイリオ" pitchFamily="34" charset="-120"/>
               </a:rPr>
-              <a:t>FY2027 月次推移表 － プランC</a:t>
+              <a:t>FY2027 月次推移表 － プランD</a:t>
             </a:r>
             <a:endParaRPr lang="en-US" sz="2900" dirty="0"/>
           </a:p>
@@ -6657,7 +7047,7 @@
                 <a:ea typeface="メイリオ" pitchFamily="34" charset="-122"/>
                 <a:cs typeface="メイリオ" pitchFamily="34" charset="-120"/>
               </a:rPr>
-              <a:t>既存389.1（51.5%）＋差額208.9（30%）＋上乗せ132.5（原価なし）。単位：百万円</a:t>
+              <a:t>既存389.1（51.5%）＋差額341.4（30%）＋上乗せ132.5（原価なし）。単位：百万円</a:t>
             </a:r>
             <a:endParaRPr lang="en-US" sz="1250" dirty="0"/>
           </a:p>
@@ -6671,7 +7061,7 @@
         </p:nvSpPr>
         <p:spPr>
           <a:xfrm>
-            <a:off x="594360" y="1481328"/>
+            <a:off x="594360" y="1444752"/>
             <a:ext cx="11658600" cy="384048"/>
           </a:xfrm>
           <a:prstGeom prst="rect">
@@ -6691,7 +7081,7 @@
         </p:nvSpPr>
         <p:spPr>
           <a:xfrm>
-            <a:off x="704088" y="1481328"/>
+            <a:off x="704088" y="1444752"/>
             <a:ext cx="2011680" cy="384048"/>
           </a:xfrm>
           <a:prstGeom prst="rect">
@@ -6730,7 +7120,7 @@
         </p:nvSpPr>
         <p:spPr>
           <a:xfrm>
-            <a:off x="2606040" y="1481328"/>
+            <a:off x="2606040" y="1444752"/>
             <a:ext cx="731520" cy="384048"/>
           </a:xfrm>
           <a:prstGeom prst="rect">
@@ -6769,7 +7159,7 @@
         </p:nvSpPr>
         <p:spPr>
           <a:xfrm>
-            <a:off x="3337560" y="1481328"/>
+            <a:off x="3337560" y="1444752"/>
             <a:ext cx="731520" cy="384048"/>
           </a:xfrm>
           <a:prstGeom prst="rect">
@@ -6808,7 +7198,7 @@
         </p:nvSpPr>
         <p:spPr>
           <a:xfrm>
-            <a:off x="4069080" y="1481328"/>
+            <a:off x="4069080" y="1444752"/>
             <a:ext cx="731520" cy="384048"/>
           </a:xfrm>
           <a:prstGeom prst="rect">
@@ -6847,7 +7237,7 @@
         </p:nvSpPr>
         <p:spPr>
           <a:xfrm>
-            <a:off x="4800600" y="1481328"/>
+            <a:off x="4800600" y="1444752"/>
             <a:ext cx="731520" cy="384048"/>
           </a:xfrm>
           <a:prstGeom prst="rect">
@@ -6886,7 +7276,7 @@
         </p:nvSpPr>
         <p:spPr>
           <a:xfrm>
-            <a:off x="5532120" y="1481328"/>
+            <a:off x="5532120" y="1444752"/>
             <a:ext cx="731520" cy="384048"/>
           </a:xfrm>
           <a:prstGeom prst="rect">
@@ -6925,7 +7315,7 @@
         </p:nvSpPr>
         <p:spPr>
           <a:xfrm>
-            <a:off x="6263640" y="1481328"/>
+            <a:off x="6263640" y="1444752"/>
             <a:ext cx="731520" cy="384048"/>
           </a:xfrm>
           <a:prstGeom prst="rect">
@@ -6964,7 +7354,7 @@
         </p:nvSpPr>
         <p:spPr>
           <a:xfrm>
-            <a:off x="6995160" y="1481328"/>
+            <a:off x="6995160" y="1444752"/>
             <a:ext cx="731520" cy="384048"/>
           </a:xfrm>
           <a:prstGeom prst="rect">
@@ -7003,7 +7393,7 @@
         </p:nvSpPr>
         <p:spPr>
           <a:xfrm>
-            <a:off x="7726680" y="1481328"/>
+            <a:off x="7726680" y="1444752"/>
             <a:ext cx="731520" cy="384048"/>
           </a:xfrm>
           <a:prstGeom prst="rect">
@@ -7042,7 +7432,7 @@
         </p:nvSpPr>
         <p:spPr>
           <a:xfrm>
-            <a:off x="8458200" y="1481328"/>
+            <a:off x="8458200" y="1444752"/>
             <a:ext cx="731520" cy="384048"/>
           </a:xfrm>
           <a:prstGeom prst="rect">
@@ -7081,7 +7471,7 @@
         </p:nvSpPr>
         <p:spPr>
           <a:xfrm>
-            <a:off x="9189720" y="1481328"/>
+            <a:off x="9189720" y="1444752"/>
             <a:ext cx="731520" cy="384048"/>
           </a:xfrm>
           <a:prstGeom prst="rect">
@@ -7120,7 +7510,7 @@
         </p:nvSpPr>
         <p:spPr>
           <a:xfrm>
-            <a:off x="9921240" y="1481328"/>
+            <a:off x="9921240" y="1444752"/>
             <a:ext cx="731520" cy="384048"/>
           </a:xfrm>
           <a:prstGeom prst="rect">
@@ -7159,7 +7549,7 @@
         </p:nvSpPr>
         <p:spPr>
           <a:xfrm>
-            <a:off x="10652760" y="1481328"/>
+            <a:off x="10652760" y="1444752"/>
             <a:ext cx="731520" cy="384048"/>
           </a:xfrm>
           <a:prstGeom prst="rect">
@@ -7198,7 +7588,7 @@
         </p:nvSpPr>
         <p:spPr>
           <a:xfrm>
-            <a:off x="11384280" y="1481328"/>
+            <a:off x="11384280" y="1444752"/>
             <a:ext cx="868680" cy="384048"/>
           </a:xfrm>
           <a:prstGeom prst="rect">
@@ -7237,8 +7627,8 @@
         </p:nvSpPr>
         <p:spPr>
           <a:xfrm>
-            <a:off x="594360" y="1865376"/>
-            <a:ext cx="11658600" cy="365760"/>
+            <a:off x="594360" y="1828800"/>
+            <a:ext cx="11658600" cy="333756"/>
           </a:xfrm>
           <a:prstGeom prst="rect">
             <a:avLst/>
@@ -7262,8 +7652,8 @@
         </p:nvSpPr>
         <p:spPr>
           <a:xfrm>
-            <a:off x="704088" y="1865376"/>
-            <a:ext cx="2011680" cy="365760"/>
+            <a:off x="704088" y="1828800"/>
+            <a:ext cx="2011680" cy="333756"/>
           </a:xfrm>
           <a:prstGeom prst="rect">
             <a:avLst/>
@@ -7301,8 +7691,8 @@
         </p:nvSpPr>
         <p:spPr>
           <a:xfrm>
-            <a:off x="2606040" y="1865376"/>
-            <a:ext cx="731520" cy="365760"/>
+            <a:off x="2606040" y="1828800"/>
+            <a:ext cx="731520" cy="333756"/>
           </a:xfrm>
           <a:prstGeom prst="rect">
             <a:avLst/>
@@ -7326,7 +7716,7 @@
                 <a:ea typeface="メイリオ" pitchFamily="34" charset="-122"/>
                 <a:cs typeface="メイリオ" pitchFamily="34" charset="-120"/>
               </a:rPr>
-              <a:t>49.8</a:t>
+              <a:t>60.9</a:t>
             </a:r>
             <a:endParaRPr lang="en-US" sz="850" dirty="0"/>
           </a:p>
@@ -7340,8 +7730,8 @@
         </p:nvSpPr>
         <p:spPr>
           <a:xfrm>
-            <a:off x="3337560" y="1865376"/>
-            <a:ext cx="731520" cy="365760"/>
+            <a:off x="3337560" y="1828800"/>
+            <a:ext cx="731520" cy="333756"/>
           </a:xfrm>
           <a:prstGeom prst="rect">
             <a:avLst/>
@@ -7365,7 +7755,7 @@
                 <a:ea typeface="メイリオ" pitchFamily="34" charset="-122"/>
                 <a:cs typeface="メイリオ" pitchFamily="34" charset="-120"/>
               </a:rPr>
-              <a:t>49.8</a:t>
+              <a:t>60.9</a:t>
             </a:r>
             <a:endParaRPr lang="en-US" sz="850" dirty="0"/>
           </a:p>
@@ -7379,8 +7769,8 @@
         </p:nvSpPr>
         <p:spPr>
           <a:xfrm>
-            <a:off x="4069080" y="1865376"/>
-            <a:ext cx="731520" cy="365760"/>
+            <a:off x="4069080" y="1828800"/>
+            <a:ext cx="731520" cy="333756"/>
           </a:xfrm>
           <a:prstGeom prst="rect">
             <a:avLst/>
@@ -7404,7 +7794,7 @@
                 <a:ea typeface="メイリオ" pitchFamily="34" charset="-122"/>
                 <a:cs typeface="メイリオ" pitchFamily="34" charset="-120"/>
               </a:rPr>
-              <a:t>49.8</a:t>
+              <a:t>60.9</a:t>
             </a:r>
             <a:endParaRPr lang="en-US" sz="850" dirty="0"/>
           </a:p>
@@ -7418,8 +7808,8 @@
         </p:nvSpPr>
         <p:spPr>
           <a:xfrm>
-            <a:off x="4800600" y="1865376"/>
-            <a:ext cx="731520" cy="365760"/>
+            <a:off x="4800600" y="1828800"/>
+            <a:ext cx="731520" cy="333756"/>
           </a:xfrm>
           <a:prstGeom prst="rect">
             <a:avLst/>
@@ -7443,7 +7833,7 @@
                 <a:ea typeface="メイリオ" pitchFamily="34" charset="-122"/>
                 <a:cs typeface="メイリオ" pitchFamily="34" charset="-120"/>
               </a:rPr>
-              <a:t>49.8</a:t>
+              <a:t>60.9</a:t>
             </a:r>
             <a:endParaRPr lang="en-US" sz="850" dirty="0"/>
           </a:p>
@@ -7457,8 +7847,8 @@
         </p:nvSpPr>
         <p:spPr>
           <a:xfrm>
-            <a:off x="5532120" y="1865376"/>
-            <a:ext cx="731520" cy="365760"/>
+            <a:off x="5532120" y="1828800"/>
+            <a:ext cx="731520" cy="333756"/>
           </a:xfrm>
           <a:prstGeom prst="rect">
             <a:avLst/>
@@ -7482,7 +7872,7 @@
                 <a:ea typeface="メイリオ" pitchFamily="34" charset="-122"/>
                 <a:cs typeface="メイリオ" pitchFamily="34" charset="-120"/>
               </a:rPr>
-              <a:t>49.8</a:t>
+              <a:t>60.9</a:t>
             </a:r>
             <a:endParaRPr lang="en-US" sz="850" dirty="0"/>
           </a:p>
@@ -7496,8 +7886,8 @@
         </p:nvSpPr>
         <p:spPr>
           <a:xfrm>
-            <a:off x="6263640" y="1865376"/>
-            <a:ext cx="731520" cy="365760"/>
+            <a:off x="6263640" y="1828800"/>
+            <a:ext cx="731520" cy="333756"/>
           </a:xfrm>
           <a:prstGeom prst="rect">
             <a:avLst/>
@@ -7521,7 +7911,7 @@
                 <a:ea typeface="メイリオ" pitchFamily="34" charset="-122"/>
                 <a:cs typeface="メイリオ" pitchFamily="34" charset="-120"/>
               </a:rPr>
-              <a:t>49.8</a:t>
+              <a:t>60.9</a:t>
             </a:r>
             <a:endParaRPr lang="en-US" sz="850" dirty="0"/>
           </a:p>
@@ -7535,8 +7925,8 @@
         </p:nvSpPr>
         <p:spPr>
           <a:xfrm>
-            <a:off x="6995160" y="1865376"/>
-            <a:ext cx="731520" cy="365760"/>
+            <a:off x="6995160" y="1828800"/>
+            <a:ext cx="731520" cy="333756"/>
           </a:xfrm>
           <a:prstGeom prst="rect">
             <a:avLst/>
@@ -7560,7 +7950,7 @@
                 <a:ea typeface="メイリオ" pitchFamily="34" charset="-122"/>
                 <a:cs typeface="メイリオ" pitchFamily="34" charset="-120"/>
               </a:rPr>
-              <a:t>49.8</a:t>
+              <a:t>60.9</a:t>
             </a:r>
             <a:endParaRPr lang="en-US" sz="850" dirty="0"/>
           </a:p>
@@ -7574,8 +7964,8 @@
         </p:nvSpPr>
         <p:spPr>
           <a:xfrm>
-            <a:off x="7726680" y="1865376"/>
-            <a:ext cx="731520" cy="365760"/>
+            <a:off x="7726680" y="1828800"/>
+            <a:ext cx="731520" cy="333756"/>
           </a:xfrm>
           <a:prstGeom prst="rect">
             <a:avLst/>
@@ -7599,7 +7989,7 @@
                 <a:ea typeface="メイリオ" pitchFamily="34" charset="-122"/>
                 <a:cs typeface="メイリオ" pitchFamily="34" charset="-120"/>
               </a:rPr>
-              <a:t>49.8</a:t>
+              <a:t>60.9</a:t>
             </a:r>
             <a:endParaRPr lang="en-US" sz="850" dirty="0"/>
           </a:p>
@@ -7613,8 +8003,8 @@
         </p:nvSpPr>
         <p:spPr>
           <a:xfrm>
-            <a:off x="8458200" y="1865376"/>
-            <a:ext cx="731520" cy="365760"/>
+            <a:off x="8458200" y="1828800"/>
+            <a:ext cx="731520" cy="333756"/>
           </a:xfrm>
           <a:prstGeom prst="rect">
             <a:avLst/>
@@ -7638,7 +8028,7 @@
                 <a:ea typeface="メイリオ" pitchFamily="34" charset="-122"/>
                 <a:cs typeface="メイリオ" pitchFamily="34" charset="-120"/>
               </a:rPr>
-              <a:t>49.8</a:t>
+              <a:t>60.9</a:t>
             </a:r>
             <a:endParaRPr lang="en-US" sz="850" dirty="0"/>
           </a:p>
@@ -7652,8 +8042,8 @@
         </p:nvSpPr>
         <p:spPr>
           <a:xfrm>
-            <a:off x="9189720" y="1865376"/>
-            <a:ext cx="731520" cy="365760"/>
+            <a:off x="9189720" y="1828800"/>
+            <a:ext cx="731520" cy="333756"/>
           </a:xfrm>
           <a:prstGeom prst="rect">
             <a:avLst/>
@@ -7677,7 +8067,7 @@
                 <a:ea typeface="メイリオ" pitchFamily="34" charset="-122"/>
                 <a:cs typeface="メイリオ" pitchFamily="34" charset="-120"/>
               </a:rPr>
-              <a:t>49.8</a:t>
+              <a:t>60.9</a:t>
             </a:r>
             <a:endParaRPr lang="en-US" sz="850" dirty="0"/>
           </a:p>
@@ -7691,8 +8081,8 @@
         </p:nvSpPr>
         <p:spPr>
           <a:xfrm>
-            <a:off x="9921240" y="1865376"/>
-            <a:ext cx="731520" cy="365760"/>
+            <a:off x="9921240" y="1828800"/>
+            <a:ext cx="731520" cy="333756"/>
           </a:xfrm>
           <a:prstGeom prst="rect">
             <a:avLst/>
@@ -7716,7 +8106,7 @@
                 <a:ea typeface="メイリオ" pitchFamily="34" charset="-122"/>
                 <a:cs typeface="メイリオ" pitchFamily="34" charset="-120"/>
               </a:rPr>
-              <a:t>49.8</a:t>
+              <a:t>60.9</a:t>
             </a:r>
             <a:endParaRPr lang="en-US" sz="850" dirty="0"/>
           </a:p>
@@ -7730,8 +8120,8 @@
         </p:nvSpPr>
         <p:spPr>
           <a:xfrm>
-            <a:off x="10652760" y="1865376"/>
-            <a:ext cx="731520" cy="365760"/>
+            <a:off x="10652760" y="1828800"/>
+            <a:ext cx="731520" cy="333756"/>
           </a:xfrm>
           <a:prstGeom prst="rect">
             <a:avLst/>
@@ -7755,7 +8145,7 @@
                 <a:ea typeface="メイリオ" pitchFamily="34" charset="-122"/>
                 <a:cs typeface="メイリオ" pitchFamily="34" charset="-120"/>
               </a:rPr>
-              <a:t>49.8</a:t>
+              <a:t>60.9</a:t>
             </a:r>
             <a:endParaRPr lang="en-US" sz="850" dirty="0"/>
           </a:p>
@@ -7769,8 +8159,8 @@
         </p:nvSpPr>
         <p:spPr>
           <a:xfrm>
-            <a:off x="11384280" y="1865376"/>
-            <a:ext cx="868680" cy="365760"/>
+            <a:off x="11384280" y="1828800"/>
+            <a:ext cx="868680" cy="333756"/>
           </a:xfrm>
           <a:prstGeom prst="rect">
             <a:avLst/>
@@ -7794,7 +8184,7 @@
                 <a:ea typeface="メイリオ" pitchFamily="34" charset="-122"/>
                 <a:cs typeface="メイリオ" pitchFamily="34" charset="-120"/>
               </a:rPr>
-              <a:t>598.0</a:t>
+              <a:t>730.5</a:t>
             </a:r>
             <a:endParaRPr lang="en-US" sz="900" dirty="0"/>
           </a:p>
@@ -7808,8 +8198,8 @@
         </p:nvSpPr>
         <p:spPr>
           <a:xfrm>
-            <a:off x="594360" y="2231136"/>
-            <a:ext cx="11658600" cy="365760"/>
+            <a:off x="594360" y="2162556"/>
+            <a:ext cx="11658600" cy="333756"/>
           </a:xfrm>
           <a:prstGeom prst="rect">
             <a:avLst/>
@@ -7833,8 +8223,8 @@
         </p:nvSpPr>
         <p:spPr>
           <a:xfrm>
-            <a:off x="704088" y="2231136"/>
-            <a:ext cx="2011680" cy="365760"/>
+            <a:off x="704088" y="2162556"/>
+            <a:ext cx="2011680" cy="333756"/>
           </a:xfrm>
           <a:prstGeom prst="rect">
             <a:avLst/>
@@ -7872,8 +8262,8 @@
         </p:nvSpPr>
         <p:spPr>
           <a:xfrm>
-            <a:off x="2606040" y="2231136"/>
-            <a:ext cx="731520" cy="365760"/>
+            <a:off x="2606040" y="2162556"/>
+            <a:ext cx="731520" cy="333756"/>
           </a:xfrm>
           <a:prstGeom prst="rect">
             <a:avLst/>
@@ -7897,7 +8287,7 @@
                 <a:ea typeface="メイリオ" pitchFamily="34" charset="-122"/>
                 <a:cs typeface="メイリオ" pitchFamily="34" charset="-120"/>
               </a:rPr>
-              <a:t>▲27.9</a:t>
+              <a:t>▲35.6</a:t>
             </a:r>
             <a:endParaRPr lang="en-US" sz="850" dirty="0"/>
           </a:p>
@@ -7911,8 +8301,8 @@
         </p:nvSpPr>
         <p:spPr>
           <a:xfrm>
-            <a:off x="3337560" y="2231136"/>
-            <a:ext cx="731520" cy="365760"/>
+            <a:off x="3337560" y="2162556"/>
+            <a:ext cx="731520" cy="333756"/>
           </a:xfrm>
           <a:prstGeom prst="rect">
             <a:avLst/>
@@ -7936,7 +8326,7 @@
                 <a:ea typeface="メイリオ" pitchFamily="34" charset="-122"/>
                 <a:cs typeface="メイリオ" pitchFamily="34" charset="-120"/>
               </a:rPr>
-              <a:t>▲27.9</a:t>
+              <a:t>▲35.6</a:t>
             </a:r>
             <a:endParaRPr lang="en-US" sz="850" dirty="0"/>
           </a:p>
@@ -7950,8 +8340,8 @@
         </p:nvSpPr>
         <p:spPr>
           <a:xfrm>
-            <a:off x="4069080" y="2231136"/>
-            <a:ext cx="731520" cy="365760"/>
+            <a:off x="4069080" y="2162556"/>
+            <a:ext cx="731520" cy="333756"/>
           </a:xfrm>
           <a:prstGeom prst="rect">
             <a:avLst/>
@@ -7975,7 +8365,7 @@
                 <a:ea typeface="メイリオ" pitchFamily="34" charset="-122"/>
                 <a:cs typeface="メイリオ" pitchFamily="34" charset="-120"/>
               </a:rPr>
-              <a:t>▲27.9</a:t>
+              <a:t>▲35.6</a:t>
             </a:r>
             <a:endParaRPr lang="en-US" sz="850" dirty="0"/>
           </a:p>
@@ -7989,8 +8379,8 @@
         </p:nvSpPr>
         <p:spPr>
           <a:xfrm>
-            <a:off x="4800600" y="2231136"/>
-            <a:ext cx="731520" cy="365760"/>
+            <a:off x="4800600" y="2162556"/>
+            <a:ext cx="731520" cy="333756"/>
           </a:xfrm>
           <a:prstGeom prst="rect">
             <a:avLst/>
@@ -8014,7 +8404,7 @@
                 <a:ea typeface="メイリオ" pitchFamily="34" charset="-122"/>
                 <a:cs typeface="メイリオ" pitchFamily="34" charset="-120"/>
               </a:rPr>
-              <a:t>▲27.9</a:t>
+              <a:t>▲35.6</a:t>
             </a:r>
             <a:endParaRPr lang="en-US" sz="850" dirty="0"/>
           </a:p>
@@ -8028,8 +8418,8 @@
         </p:nvSpPr>
         <p:spPr>
           <a:xfrm>
-            <a:off x="5532120" y="2231136"/>
-            <a:ext cx="731520" cy="365760"/>
+            <a:off x="5532120" y="2162556"/>
+            <a:ext cx="731520" cy="333756"/>
           </a:xfrm>
           <a:prstGeom prst="rect">
             <a:avLst/>
@@ -8053,7 +8443,7 @@
                 <a:ea typeface="メイリオ" pitchFamily="34" charset="-122"/>
                 <a:cs typeface="メイリオ" pitchFamily="34" charset="-120"/>
               </a:rPr>
-              <a:t>▲27.9</a:t>
+              <a:t>▲35.6</a:t>
             </a:r>
             <a:endParaRPr lang="en-US" sz="850" dirty="0"/>
           </a:p>
@@ -8067,8 +8457,8 @@
         </p:nvSpPr>
         <p:spPr>
           <a:xfrm>
-            <a:off x="6263640" y="2231136"/>
-            <a:ext cx="731520" cy="365760"/>
+            <a:off x="6263640" y="2162556"/>
+            <a:ext cx="731520" cy="333756"/>
           </a:xfrm>
           <a:prstGeom prst="rect">
             <a:avLst/>
@@ -8092,7 +8482,7 @@
                 <a:ea typeface="メイリオ" pitchFamily="34" charset="-122"/>
                 <a:cs typeface="メイリオ" pitchFamily="34" charset="-120"/>
               </a:rPr>
-              <a:t>▲27.9</a:t>
+              <a:t>▲35.6</a:t>
             </a:r>
             <a:endParaRPr lang="en-US" sz="850" dirty="0"/>
           </a:p>
@@ -8106,8 +8496,8 @@
         </p:nvSpPr>
         <p:spPr>
           <a:xfrm>
-            <a:off x="6995160" y="2231136"/>
-            <a:ext cx="731520" cy="365760"/>
+            <a:off x="6995160" y="2162556"/>
+            <a:ext cx="731520" cy="333756"/>
           </a:xfrm>
           <a:prstGeom prst="rect">
             <a:avLst/>
@@ -8131,7 +8521,7 @@
                 <a:ea typeface="メイリオ" pitchFamily="34" charset="-122"/>
                 <a:cs typeface="メイリオ" pitchFamily="34" charset="-120"/>
               </a:rPr>
-              <a:t>▲27.9</a:t>
+              <a:t>▲35.6</a:t>
             </a:r>
             <a:endParaRPr lang="en-US" sz="850" dirty="0"/>
           </a:p>
@@ -8145,8 +8535,8 @@
         </p:nvSpPr>
         <p:spPr>
           <a:xfrm>
-            <a:off x="7726680" y="2231136"/>
-            <a:ext cx="731520" cy="365760"/>
+            <a:off x="7726680" y="2162556"/>
+            <a:ext cx="731520" cy="333756"/>
           </a:xfrm>
           <a:prstGeom prst="rect">
             <a:avLst/>
@@ -8170,7 +8560,7 @@
                 <a:ea typeface="メイリオ" pitchFamily="34" charset="-122"/>
                 <a:cs typeface="メイリオ" pitchFamily="34" charset="-120"/>
               </a:rPr>
-              <a:t>▲27.9</a:t>
+              <a:t>▲35.6</a:t>
             </a:r>
             <a:endParaRPr lang="en-US" sz="850" dirty="0"/>
           </a:p>
@@ -8184,8 +8574,8 @@
         </p:nvSpPr>
         <p:spPr>
           <a:xfrm>
-            <a:off x="8458200" y="2231136"/>
-            <a:ext cx="731520" cy="365760"/>
+            <a:off x="8458200" y="2162556"/>
+            <a:ext cx="731520" cy="333756"/>
           </a:xfrm>
           <a:prstGeom prst="rect">
             <a:avLst/>
@@ -8209,7 +8599,7 @@
                 <a:ea typeface="メイリオ" pitchFamily="34" charset="-122"/>
                 <a:cs typeface="メイリオ" pitchFamily="34" charset="-120"/>
               </a:rPr>
-              <a:t>▲27.9</a:t>
+              <a:t>▲35.6</a:t>
             </a:r>
             <a:endParaRPr lang="en-US" sz="850" dirty="0"/>
           </a:p>
@@ -8223,8 +8613,8 @@
         </p:nvSpPr>
         <p:spPr>
           <a:xfrm>
-            <a:off x="9189720" y="2231136"/>
-            <a:ext cx="731520" cy="365760"/>
+            <a:off x="9189720" y="2162556"/>
+            <a:ext cx="731520" cy="333756"/>
           </a:xfrm>
           <a:prstGeom prst="rect">
             <a:avLst/>
@@ -8248,7 +8638,7 @@
                 <a:ea typeface="メイリオ" pitchFamily="34" charset="-122"/>
                 <a:cs typeface="メイリオ" pitchFamily="34" charset="-120"/>
               </a:rPr>
-              <a:t>▲27.9</a:t>
+              <a:t>▲35.6</a:t>
             </a:r>
             <a:endParaRPr lang="en-US" sz="850" dirty="0"/>
           </a:p>
@@ -8262,8 +8652,8 @@
         </p:nvSpPr>
         <p:spPr>
           <a:xfrm>
-            <a:off x="9921240" y="2231136"/>
-            <a:ext cx="731520" cy="365760"/>
+            <a:off x="9921240" y="2162556"/>
+            <a:ext cx="731520" cy="333756"/>
           </a:xfrm>
           <a:prstGeom prst="rect">
             <a:avLst/>
@@ -8287,7 +8677,7 @@
                 <a:ea typeface="メイリオ" pitchFamily="34" charset="-122"/>
                 <a:cs typeface="メイリオ" pitchFamily="34" charset="-120"/>
               </a:rPr>
-              <a:t>▲27.9</a:t>
+              <a:t>▲35.6</a:t>
             </a:r>
             <a:endParaRPr lang="en-US" sz="850" dirty="0"/>
           </a:p>
@@ -8301,8 +8691,8 @@
         </p:nvSpPr>
         <p:spPr>
           <a:xfrm>
-            <a:off x="10652760" y="2231136"/>
-            <a:ext cx="731520" cy="365760"/>
+            <a:off x="10652760" y="2162556"/>
+            <a:ext cx="731520" cy="333756"/>
           </a:xfrm>
           <a:prstGeom prst="rect">
             <a:avLst/>
@@ -8326,7 +8716,7 @@
                 <a:ea typeface="メイリオ" pitchFamily="34" charset="-122"/>
                 <a:cs typeface="メイリオ" pitchFamily="34" charset="-120"/>
               </a:rPr>
-              <a:t>▲27.9</a:t>
+              <a:t>▲35.6</a:t>
             </a:r>
             <a:endParaRPr lang="en-US" sz="850" dirty="0"/>
           </a:p>
@@ -8340,8 +8730,8 @@
         </p:nvSpPr>
         <p:spPr>
           <a:xfrm>
-            <a:off x="11384280" y="2231136"/>
-            <a:ext cx="868680" cy="365760"/>
+            <a:off x="11384280" y="2162556"/>
+            <a:ext cx="868680" cy="333756"/>
           </a:xfrm>
           <a:prstGeom prst="rect">
             <a:avLst/>
@@ -8365,7 +8755,7 @@
                 <a:ea typeface="メイリオ" pitchFamily="34" charset="-122"/>
                 <a:cs typeface="メイリオ" pitchFamily="34" charset="-120"/>
               </a:rPr>
-              <a:t>▲334.8</a:t>
+              <a:t>▲427.5</a:t>
             </a:r>
             <a:endParaRPr lang="en-US" sz="900" dirty="0"/>
           </a:p>
@@ -8379,8 +8769,8 @@
         </p:nvSpPr>
         <p:spPr>
           <a:xfrm>
-            <a:off x="594360" y="2596896"/>
-            <a:ext cx="11658600" cy="365760"/>
+            <a:off x="594360" y="2496312"/>
+            <a:ext cx="11658600" cy="333756"/>
           </a:xfrm>
           <a:prstGeom prst="rect">
             <a:avLst/>
@@ -8404,8 +8794,8 @@
         </p:nvSpPr>
         <p:spPr>
           <a:xfrm>
-            <a:off x="704088" y="2596896"/>
-            <a:ext cx="2011680" cy="365760"/>
+            <a:off x="704088" y="2496312"/>
+            <a:ext cx="2011680" cy="333756"/>
           </a:xfrm>
           <a:prstGeom prst="rect">
             <a:avLst/>
@@ -8443,8 +8833,8 @@
         </p:nvSpPr>
         <p:spPr>
           <a:xfrm>
-            <a:off x="2606040" y="2596896"/>
-            <a:ext cx="731520" cy="365760"/>
+            <a:off x="2606040" y="2496312"/>
+            <a:ext cx="731520" cy="333756"/>
           </a:xfrm>
           <a:prstGeom prst="rect">
             <a:avLst/>
@@ -8468,7 +8858,7 @@
                 <a:ea typeface="メイリオ" pitchFamily="34" charset="-122"/>
                 <a:cs typeface="メイリオ" pitchFamily="34" charset="-120"/>
               </a:rPr>
-              <a:t>21.9</a:t>
+              <a:t>25.3</a:t>
             </a:r>
             <a:endParaRPr lang="en-US" sz="850" dirty="0"/>
           </a:p>
@@ -8482,8 +8872,8 @@
         </p:nvSpPr>
         <p:spPr>
           <a:xfrm>
-            <a:off x="3337560" y="2596896"/>
-            <a:ext cx="731520" cy="365760"/>
+            <a:off x="3337560" y="2496312"/>
+            <a:ext cx="731520" cy="333756"/>
           </a:xfrm>
           <a:prstGeom prst="rect">
             <a:avLst/>
@@ -8507,7 +8897,7 @@
                 <a:ea typeface="メイリオ" pitchFamily="34" charset="-122"/>
                 <a:cs typeface="メイリオ" pitchFamily="34" charset="-120"/>
               </a:rPr>
-              <a:t>21.9</a:t>
+              <a:t>25.3</a:t>
             </a:r>
             <a:endParaRPr lang="en-US" sz="850" dirty="0"/>
           </a:p>
@@ -8521,8 +8911,8 @@
         </p:nvSpPr>
         <p:spPr>
           <a:xfrm>
-            <a:off x="4069080" y="2596896"/>
-            <a:ext cx="731520" cy="365760"/>
+            <a:off x="4069080" y="2496312"/>
+            <a:ext cx="731520" cy="333756"/>
           </a:xfrm>
           <a:prstGeom prst="rect">
             <a:avLst/>
@@ -8546,7 +8936,7 @@
                 <a:ea typeface="メイリオ" pitchFamily="34" charset="-122"/>
                 <a:cs typeface="メイリオ" pitchFamily="34" charset="-120"/>
               </a:rPr>
-              <a:t>21.9</a:t>
+              <a:t>25.3</a:t>
             </a:r>
             <a:endParaRPr lang="en-US" sz="850" dirty="0"/>
           </a:p>
@@ -8560,8 +8950,8 @@
         </p:nvSpPr>
         <p:spPr>
           <a:xfrm>
-            <a:off x="4800600" y="2596896"/>
-            <a:ext cx="731520" cy="365760"/>
+            <a:off x="4800600" y="2496312"/>
+            <a:ext cx="731520" cy="333756"/>
           </a:xfrm>
           <a:prstGeom prst="rect">
             <a:avLst/>
@@ -8585,7 +8975,7 @@
                 <a:ea typeface="メイリオ" pitchFamily="34" charset="-122"/>
                 <a:cs typeface="メイリオ" pitchFamily="34" charset="-120"/>
               </a:rPr>
-              <a:t>21.9</a:t>
+              <a:t>25.3</a:t>
             </a:r>
             <a:endParaRPr lang="en-US" sz="850" dirty="0"/>
           </a:p>
@@ -8599,8 +8989,8 @@
         </p:nvSpPr>
         <p:spPr>
           <a:xfrm>
-            <a:off x="5532120" y="2596896"/>
-            <a:ext cx="731520" cy="365760"/>
+            <a:off x="5532120" y="2496312"/>
+            <a:ext cx="731520" cy="333756"/>
           </a:xfrm>
           <a:prstGeom prst="rect">
             <a:avLst/>
@@ -8624,7 +9014,7 @@
                 <a:ea typeface="メイリオ" pitchFamily="34" charset="-122"/>
                 <a:cs typeface="メイリオ" pitchFamily="34" charset="-120"/>
               </a:rPr>
-              <a:t>21.9</a:t>
+              <a:t>25.3</a:t>
             </a:r>
             <a:endParaRPr lang="en-US" sz="850" dirty="0"/>
           </a:p>
@@ -8638,8 +9028,8 @@
         </p:nvSpPr>
         <p:spPr>
           <a:xfrm>
-            <a:off x="6263640" y="2596896"/>
-            <a:ext cx="731520" cy="365760"/>
+            <a:off x="6263640" y="2496312"/>
+            <a:ext cx="731520" cy="333756"/>
           </a:xfrm>
           <a:prstGeom prst="rect">
             <a:avLst/>
@@ -8663,7 +9053,7 @@
                 <a:ea typeface="メイリオ" pitchFamily="34" charset="-122"/>
                 <a:cs typeface="メイリオ" pitchFamily="34" charset="-120"/>
               </a:rPr>
-              <a:t>21.9</a:t>
+              <a:t>25.3</a:t>
             </a:r>
             <a:endParaRPr lang="en-US" sz="850" dirty="0"/>
           </a:p>
@@ -8677,8 +9067,8 @@
         </p:nvSpPr>
         <p:spPr>
           <a:xfrm>
-            <a:off x="6995160" y="2596896"/>
-            <a:ext cx="731520" cy="365760"/>
+            <a:off x="6995160" y="2496312"/>
+            <a:ext cx="731520" cy="333756"/>
           </a:xfrm>
           <a:prstGeom prst="rect">
             <a:avLst/>
@@ -8702,7 +9092,7 @@
                 <a:ea typeface="メイリオ" pitchFamily="34" charset="-122"/>
                 <a:cs typeface="メイリオ" pitchFamily="34" charset="-120"/>
               </a:rPr>
-              <a:t>21.9</a:t>
+              <a:t>25.3</a:t>
             </a:r>
             <a:endParaRPr lang="en-US" sz="850" dirty="0"/>
           </a:p>
@@ -8716,8 +9106,8 @@
         </p:nvSpPr>
         <p:spPr>
           <a:xfrm>
-            <a:off x="7726680" y="2596896"/>
-            <a:ext cx="731520" cy="365760"/>
+            <a:off x="7726680" y="2496312"/>
+            <a:ext cx="731520" cy="333756"/>
           </a:xfrm>
           <a:prstGeom prst="rect">
             <a:avLst/>
@@ -8741,7 +9131,7 @@
                 <a:ea typeface="メイリオ" pitchFamily="34" charset="-122"/>
                 <a:cs typeface="メイリオ" pitchFamily="34" charset="-120"/>
               </a:rPr>
-              <a:t>21.9</a:t>
+              <a:t>25.3</a:t>
             </a:r>
             <a:endParaRPr lang="en-US" sz="850" dirty="0"/>
           </a:p>
@@ -8755,8 +9145,8 @@
         </p:nvSpPr>
         <p:spPr>
           <a:xfrm>
-            <a:off x="8458200" y="2596896"/>
-            <a:ext cx="731520" cy="365760"/>
+            <a:off x="8458200" y="2496312"/>
+            <a:ext cx="731520" cy="333756"/>
           </a:xfrm>
           <a:prstGeom prst="rect">
             <a:avLst/>
@@ -8780,7 +9170,7 @@
                 <a:ea typeface="メイリオ" pitchFamily="34" charset="-122"/>
                 <a:cs typeface="メイリオ" pitchFamily="34" charset="-120"/>
               </a:rPr>
-              <a:t>21.9</a:t>
+              <a:t>25.3</a:t>
             </a:r>
             <a:endParaRPr lang="en-US" sz="850" dirty="0"/>
           </a:p>
@@ -8794,8 +9184,8 @@
         </p:nvSpPr>
         <p:spPr>
           <a:xfrm>
-            <a:off x="9189720" y="2596896"/>
-            <a:ext cx="731520" cy="365760"/>
+            <a:off x="9189720" y="2496312"/>
+            <a:ext cx="731520" cy="333756"/>
           </a:xfrm>
           <a:prstGeom prst="rect">
             <a:avLst/>
@@ -8819,7 +9209,7 @@
                 <a:ea typeface="メイリオ" pitchFamily="34" charset="-122"/>
                 <a:cs typeface="メイリオ" pitchFamily="34" charset="-120"/>
               </a:rPr>
-              <a:t>21.9</a:t>
+              <a:t>25.3</a:t>
             </a:r>
             <a:endParaRPr lang="en-US" sz="850" dirty="0"/>
           </a:p>
@@ -8833,8 +9223,8 @@
         </p:nvSpPr>
         <p:spPr>
           <a:xfrm>
-            <a:off x="9921240" y="2596896"/>
-            <a:ext cx="731520" cy="365760"/>
+            <a:off x="9921240" y="2496312"/>
+            <a:ext cx="731520" cy="333756"/>
           </a:xfrm>
           <a:prstGeom prst="rect">
             <a:avLst/>
@@ -8858,7 +9248,7 @@
                 <a:ea typeface="メイリオ" pitchFamily="34" charset="-122"/>
                 <a:cs typeface="メイリオ" pitchFamily="34" charset="-120"/>
               </a:rPr>
-              <a:t>21.9</a:t>
+              <a:t>25.3</a:t>
             </a:r>
             <a:endParaRPr lang="en-US" sz="850" dirty="0"/>
           </a:p>
@@ -8872,8 +9262,8 @@
         </p:nvSpPr>
         <p:spPr>
           <a:xfrm>
-            <a:off x="10652760" y="2596896"/>
-            <a:ext cx="731520" cy="365760"/>
+            <a:off x="10652760" y="2496312"/>
+            <a:ext cx="731520" cy="333756"/>
           </a:xfrm>
           <a:prstGeom prst="rect">
             <a:avLst/>
@@ -8897,7 +9287,7 @@
                 <a:ea typeface="メイリオ" pitchFamily="34" charset="-122"/>
                 <a:cs typeface="メイリオ" pitchFamily="34" charset="-120"/>
               </a:rPr>
-              <a:t>21.9</a:t>
+              <a:t>25.3</a:t>
             </a:r>
             <a:endParaRPr lang="en-US" sz="850" dirty="0"/>
           </a:p>
@@ -8911,8 +9301,8 @@
         </p:nvSpPr>
         <p:spPr>
           <a:xfrm>
-            <a:off x="11384280" y="2596896"/>
-            <a:ext cx="868680" cy="365760"/>
+            <a:off x="11384280" y="2496312"/>
+            <a:ext cx="868680" cy="333756"/>
           </a:xfrm>
           <a:prstGeom prst="rect">
             <a:avLst/>
@@ -8936,7 +9326,7 @@
                 <a:ea typeface="メイリオ" pitchFamily="34" charset="-122"/>
                 <a:cs typeface="メイリオ" pitchFamily="34" charset="-120"/>
               </a:rPr>
-              <a:t>263.3</a:t>
+              <a:t>303.0</a:t>
             </a:r>
             <a:endParaRPr lang="en-US" sz="900" dirty="0"/>
           </a:p>
@@ -8950,8 +9340,8 @@
         </p:nvSpPr>
         <p:spPr>
           <a:xfrm>
-            <a:off x="594360" y="2962656"/>
-            <a:ext cx="11658600" cy="365760"/>
+            <a:off x="594360" y="2830068"/>
+            <a:ext cx="11658600" cy="333756"/>
           </a:xfrm>
           <a:prstGeom prst="rect">
             <a:avLst/>
@@ -8975,8 +9365,8 @@
         </p:nvSpPr>
         <p:spPr>
           <a:xfrm>
-            <a:off x="704088" y="2962656"/>
-            <a:ext cx="2011680" cy="365760"/>
+            <a:off x="704088" y="2830068"/>
+            <a:ext cx="2011680" cy="333756"/>
           </a:xfrm>
           <a:prstGeom prst="rect">
             <a:avLst/>
@@ -9014,8 +9404,8 @@
         </p:nvSpPr>
         <p:spPr>
           <a:xfrm>
-            <a:off x="2606040" y="2962656"/>
-            <a:ext cx="731520" cy="365760"/>
+            <a:off x="2606040" y="2830068"/>
+            <a:ext cx="731520" cy="333756"/>
           </a:xfrm>
           <a:prstGeom prst="rect">
             <a:avLst/>
@@ -9053,8 +9443,8 @@
         </p:nvSpPr>
         <p:spPr>
           <a:xfrm>
-            <a:off x="3337560" y="2962656"/>
-            <a:ext cx="731520" cy="365760"/>
+            <a:off x="3337560" y="2830068"/>
+            <a:ext cx="731520" cy="333756"/>
           </a:xfrm>
           <a:prstGeom prst="rect">
             <a:avLst/>
@@ -9092,8 +9482,8 @@
         </p:nvSpPr>
         <p:spPr>
           <a:xfrm>
-            <a:off x="4069080" y="2962656"/>
-            <a:ext cx="731520" cy="365760"/>
+            <a:off x="4069080" y="2830068"/>
+            <a:ext cx="731520" cy="333756"/>
           </a:xfrm>
           <a:prstGeom prst="rect">
             <a:avLst/>
@@ -9131,8 +9521,8 @@
         </p:nvSpPr>
         <p:spPr>
           <a:xfrm>
-            <a:off x="4800600" y="2962656"/>
-            <a:ext cx="731520" cy="365760"/>
+            <a:off x="4800600" y="2830068"/>
+            <a:ext cx="731520" cy="333756"/>
           </a:xfrm>
           <a:prstGeom prst="rect">
             <a:avLst/>
@@ -9170,8 +9560,8 @@
         </p:nvSpPr>
         <p:spPr>
           <a:xfrm>
-            <a:off x="5532120" y="2962656"/>
-            <a:ext cx="731520" cy="365760"/>
+            <a:off x="5532120" y="2830068"/>
+            <a:ext cx="731520" cy="333756"/>
           </a:xfrm>
           <a:prstGeom prst="rect">
             <a:avLst/>
@@ -9209,8 +9599,8 @@
         </p:nvSpPr>
         <p:spPr>
           <a:xfrm>
-            <a:off x="6263640" y="2962656"/>
-            <a:ext cx="731520" cy="365760"/>
+            <a:off x="6263640" y="2830068"/>
+            <a:ext cx="731520" cy="333756"/>
           </a:xfrm>
           <a:prstGeom prst="rect">
             <a:avLst/>
@@ -9248,8 +9638,8 @@
         </p:nvSpPr>
         <p:spPr>
           <a:xfrm>
-            <a:off x="6995160" y="2962656"/>
-            <a:ext cx="731520" cy="365760"/>
+            <a:off x="6995160" y="2830068"/>
+            <a:ext cx="731520" cy="333756"/>
           </a:xfrm>
           <a:prstGeom prst="rect">
             <a:avLst/>
@@ -9287,8 +9677,8 @@
         </p:nvSpPr>
         <p:spPr>
           <a:xfrm>
-            <a:off x="7726680" y="2962656"/>
-            <a:ext cx="731520" cy="365760"/>
+            <a:off x="7726680" y="2830068"/>
+            <a:ext cx="731520" cy="333756"/>
           </a:xfrm>
           <a:prstGeom prst="rect">
             <a:avLst/>
@@ -9326,8 +9716,8 @@
         </p:nvSpPr>
         <p:spPr>
           <a:xfrm>
-            <a:off x="8458200" y="2962656"/>
-            <a:ext cx="731520" cy="365760"/>
+            <a:off x="8458200" y="2830068"/>
+            <a:ext cx="731520" cy="333756"/>
           </a:xfrm>
           <a:prstGeom prst="rect">
             <a:avLst/>
@@ -9365,8 +9755,8 @@
         </p:nvSpPr>
         <p:spPr>
           <a:xfrm>
-            <a:off x="9189720" y="2962656"/>
-            <a:ext cx="731520" cy="365760"/>
+            <a:off x="9189720" y="2830068"/>
+            <a:ext cx="731520" cy="333756"/>
           </a:xfrm>
           <a:prstGeom prst="rect">
             <a:avLst/>
@@ -9404,8 +9794,8 @@
         </p:nvSpPr>
         <p:spPr>
           <a:xfrm>
-            <a:off x="9921240" y="2962656"/>
-            <a:ext cx="731520" cy="365760"/>
+            <a:off x="9921240" y="2830068"/>
+            <a:ext cx="731520" cy="333756"/>
           </a:xfrm>
           <a:prstGeom prst="rect">
             <a:avLst/>
@@ -9443,8 +9833,8 @@
         </p:nvSpPr>
         <p:spPr>
           <a:xfrm>
-            <a:off x="10652760" y="2962656"/>
-            <a:ext cx="731520" cy="365760"/>
+            <a:off x="10652760" y="2830068"/>
+            <a:ext cx="731520" cy="333756"/>
           </a:xfrm>
           <a:prstGeom prst="rect">
             <a:avLst/>
@@ -9482,8 +9872,8 @@
         </p:nvSpPr>
         <p:spPr>
           <a:xfrm>
-            <a:off x="11384280" y="2962656"/>
-            <a:ext cx="868680" cy="365760"/>
+            <a:off x="11384280" y="2830068"/>
+            <a:ext cx="868680" cy="333756"/>
           </a:xfrm>
           <a:prstGeom prst="rect">
             <a:avLst/>
@@ -9521,8 +9911,8 @@
         </p:nvSpPr>
         <p:spPr>
           <a:xfrm>
-            <a:off x="594360" y="3328416"/>
-            <a:ext cx="11658600" cy="365760"/>
+            <a:off x="594360" y="3163824"/>
+            <a:ext cx="11658600" cy="333756"/>
           </a:xfrm>
           <a:prstGeom prst="rect">
             <a:avLst/>
@@ -9546,8 +9936,8 @@
         </p:nvSpPr>
         <p:spPr>
           <a:xfrm>
-            <a:off x="704088" y="3328416"/>
-            <a:ext cx="2011680" cy="365760"/>
+            <a:off x="704088" y="3163824"/>
+            <a:ext cx="2011680" cy="333756"/>
           </a:xfrm>
           <a:prstGeom prst="rect">
             <a:avLst/>
@@ -9585,8 +9975,8 @@
         </p:nvSpPr>
         <p:spPr>
           <a:xfrm>
-            <a:off x="2606040" y="3328416"/>
-            <a:ext cx="731520" cy="365760"/>
+            <a:off x="2606040" y="3163824"/>
+            <a:ext cx="731520" cy="333756"/>
           </a:xfrm>
           <a:prstGeom prst="rect">
             <a:avLst/>
@@ -9624,8 +10014,8 @@
         </p:nvSpPr>
         <p:spPr>
           <a:xfrm>
-            <a:off x="3337560" y="3328416"/>
-            <a:ext cx="731520" cy="365760"/>
+            <a:off x="3337560" y="3163824"/>
+            <a:ext cx="731520" cy="333756"/>
           </a:xfrm>
           <a:prstGeom prst="rect">
             <a:avLst/>
@@ -9663,8 +10053,8 @@
         </p:nvSpPr>
         <p:spPr>
           <a:xfrm>
-            <a:off x="4069080" y="3328416"/>
-            <a:ext cx="731520" cy="365760"/>
+            <a:off x="4069080" y="3163824"/>
+            <a:ext cx="731520" cy="333756"/>
           </a:xfrm>
           <a:prstGeom prst="rect">
             <a:avLst/>
@@ -9702,8 +10092,8 @@
         </p:nvSpPr>
         <p:spPr>
           <a:xfrm>
-            <a:off x="4800600" y="3328416"/>
-            <a:ext cx="731520" cy="365760"/>
+            <a:off x="4800600" y="3163824"/>
+            <a:ext cx="731520" cy="333756"/>
           </a:xfrm>
           <a:prstGeom prst="rect">
             <a:avLst/>
@@ -9741,8 +10131,8 @@
         </p:nvSpPr>
         <p:spPr>
           <a:xfrm>
-            <a:off x="5532120" y="3328416"/>
-            <a:ext cx="731520" cy="365760"/>
+            <a:off x="5532120" y="3163824"/>
+            <a:ext cx="731520" cy="333756"/>
           </a:xfrm>
           <a:prstGeom prst="rect">
             <a:avLst/>
@@ -9780,8 +10170,8 @@
         </p:nvSpPr>
         <p:spPr>
           <a:xfrm>
-            <a:off x="6263640" y="3328416"/>
-            <a:ext cx="731520" cy="365760"/>
+            <a:off x="6263640" y="3163824"/>
+            <a:ext cx="731520" cy="333756"/>
           </a:xfrm>
           <a:prstGeom prst="rect">
             <a:avLst/>
@@ -9819,8 +10209,8 @@
         </p:nvSpPr>
         <p:spPr>
           <a:xfrm>
-            <a:off x="6995160" y="3328416"/>
-            <a:ext cx="731520" cy="365760"/>
+            <a:off x="6995160" y="3163824"/>
+            <a:ext cx="731520" cy="333756"/>
           </a:xfrm>
           <a:prstGeom prst="rect">
             <a:avLst/>
@@ -9858,8 +10248,8 @@
         </p:nvSpPr>
         <p:spPr>
           <a:xfrm>
-            <a:off x="7726680" y="3328416"/>
-            <a:ext cx="731520" cy="365760"/>
+            <a:off x="7726680" y="3163824"/>
+            <a:ext cx="731520" cy="333756"/>
           </a:xfrm>
           <a:prstGeom prst="rect">
             <a:avLst/>
@@ -9897,8 +10287,8 @@
         </p:nvSpPr>
         <p:spPr>
           <a:xfrm>
-            <a:off x="8458200" y="3328416"/>
-            <a:ext cx="731520" cy="365760"/>
+            <a:off x="8458200" y="3163824"/>
+            <a:ext cx="731520" cy="333756"/>
           </a:xfrm>
           <a:prstGeom prst="rect">
             <a:avLst/>
@@ -9936,8 +10326,8 @@
         </p:nvSpPr>
         <p:spPr>
           <a:xfrm>
-            <a:off x="9189720" y="3328416"/>
-            <a:ext cx="731520" cy="365760"/>
+            <a:off x="9189720" y="3163824"/>
+            <a:ext cx="731520" cy="333756"/>
           </a:xfrm>
           <a:prstGeom prst="rect">
             <a:avLst/>
@@ -9975,8 +10365,8 @@
         </p:nvSpPr>
         <p:spPr>
           <a:xfrm>
-            <a:off x="9921240" y="3328416"/>
-            <a:ext cx="731520" cy="365760"/>
+            <a:off x="9921240" y="3163824"/>
+            <a:ext cx="731520" cy="333756"/>
           </a:xfrm>
           <a:prstGeom prst="rect">
             <a:avLst/>
@@ -10014,8 +10404,8 @@
         </p:nvSpPr>
         <p:spPr>
           <a:xfrm>
-            <a:off x="10652760" y="3328416"/>
-            <a:ext cx="731520" cy="365760"/>
+            <a:off x="10652760" y="3163824"/>
+            <a:ext cx="731520" cy="333756"/>
           </a:xfrm>
           <a:prstGeom prst="rect">
             <a:avLst/>
@@ -10053,8 +10443,8 @@
         </p:nvSpPr>
         <p:spPr>
           <a:xfrm>
-            <a:off x="11384280" y="3328416"/>
-            <a:ext cx="868680" cy="365760"/>
+            <a:off x="11384280" y="3163824"/>
+            <a:ext cx="868680" cy="333756"/>
           </a:xfrm>
           <a:prstGeom prst="rect">
             <a:avLst/>
@@ -10092,8 +10482,8 @@
         </p:nvSpPr>
         <p:spPr>
           <a:xfrm>
-            <a:off x="594360" y="3694176"/>
-            <a:ext cx="11658600" cy="365760"/>
+            <a:off x="594360" y="3497580"/>
+            <a:ext cx="11658600" cy="333756"/>
           </a:xfrm>
           <a:prstGeom prst="rect">
             <a:avLst/>
@@ -10117,8 +10507,8 @@
         </p:nvSpPr>
         <p:spPr>
           <a:xfrm>
-            <a:off x="704088" y="3694176"/>
-            <a:ext cx="2011680" cy="365760"/>
+            <a:off x="704088" y="3497580"/>
+            <a:ext cx="2011680" cy="333756"/>
           </a:xfrm>
           <a:prstGeom prst="rect">
             <a:avLst/>
@@ -10156,8 +10546,8 @@
         </p:nvSpPr>
         <p:spPr>
           <a:xfrm>
-            <a:off x="2606040" y="3694176"/>
-            <a:ext cx="731520" cy="365760"/>
+            <a:off x="2606040" y="3497580"/>
+            <a:ext cx="731520" cy="333756"/>
           </a:xfrm>
           <a:prstGeom prst="rect">
             <a:avLst/>
@@ -10195,8 +10585,8 @@
         </p:nvSpPr>
         <p:spPr>
           <a:xfrm>
-            <a:off x="3337560" y="3694176"/>
-            <a:ext cx="731520" cy="365760"/>
+            <a:off x="3337560" y="3497580"/>
+            <a:ext cx="731520" cy="333756"/>
           </a:xfrm>
           <a:prstGeom prst="rect">
             <a:avLst/>
@@ -10234,8 +10624,8 @@
         </p:nvSpPr>
         <p:spPr>
           <a:xfrm>
-            <a:off x="4069080" y="3694176"/>
-            <a:ext cx="731520" cy="365760"/>
+            <a:off x="4069080" y="3497580"/>
+            <a:ext cx="731520" cy="333756"/>
           </a:xfrm>
           <a:prstGeom prst="rect">
             <a:avLst/>
@@ -10273,8 +10663,8 @@
         </p:nvSpPr>
         <p:spPr>
           <a:xfrm>
-            <a:off x="4800600" y="3694176"/>
-            <a:ext cx="731520" cy="365760"/>
+            <a:off x="4800600" y="3497580"/>
+            <a:ext cx="731520" cy="333756"/>
           </a:xfrm>
           <a:prstGeom prst="rect">
             <a:avLst/>
@@ -10312,8 +10702,8 @@
         </p:nvSpPr>
         <p:spPr>
           <a:xfrm>
-            <a:off x="5532120" y="3694176"/>
-            <a:ext cx="731520" cy="365760"/>
+            <a:off x="5532120" y="3497580"/>
+            <a:ext cx="731520" cy="333756"/>
           </a:xfrm>
           <a:prstGeom prst="rect">
             <a:avLst/>
@@ -10351,8 +10741,8 @@
         </p:nvSpPr>
         <p:spPr>
           <a:xfrm>
-            <a:off x="6263640" y="3694176"/>
-            <a:ext cx="731520" cy="365760"/>
+            <a:off x="6263640" y="3497580"/>
+            <a:ext cx="731520" cy="333756"/>
           </a:xfrm>
           <a:prstGeom prst="rect">
             <a:avLst/>
@@ -10390,8 +10780,8 @@
         </p:nvSpPr>
         <p:spPr>
           <a:xfrm>
-            <a:off x="6995160" y="3694176"/>
-            <a:ext cx="731520" cy="365760"/>
+            <a:off x="6995160" y="3497580"/>
+            <a:ext cx="731520" cy="333756"/>
           </a:xfrm>
           <a:prstGeom prst="rect">
             <a:avLst/>
@@ -10429,8 +10819,8 @@
         </p:nvSpPr>
         <p:spPr>
           <a:xfrm>
-            <a:off x="7726680" y="3694176"/>
-            <a:ext cx="731520" cy="365760"/>
+            <a:off x="7726680" y="3497580"/>
+            <a:ext cx="731520" cy="333756"/>
           </a:xfrm>
           <a:prstGeom prst="rect">
             <a:avLst/>
@@ -10468,8 +10858,8 @@
         </p:nvSpPr>
         <p:spPr>
           <a:xfrm>
-            <a:off x="8458200" y="3694176"/>
-            <a:ext cx="731520" cy="365760"/>
+            <a:off x="8458200" y="3497580"/>
+            <a:ext cx="731520" cy="333756"/>
           </a:xfrm>
           <a:prstGeom prst="rect">
             <a:avLst/>
@@ -10507,8 +10897,8 @@
         </p:nvSpPr>
         <p:spPr>
           <a:xfrm>
-            <a:off x="9189720" y="3694176"/>
-            <a:ext cx="731520" cy="365760"/>
+            <a:off x="9189720" y="3497580"/>
+            <a:ext cx="731520" cy="333756"/>
           </a:xfrm>
           <a:prstGeom prst="rect">
             <a:avLst/>
@@ -10546,8 +10936,8 @@
         </p:nvSpPr>
         <p:spPr>
           <a:xfrm>
-            <a:off x="9921240" y="3694176"/>
-            <a:ext cx="731520" cy="365760"/>
+            <a:off x="9921240" y="3497580"/>
+            <a:ext cx="731520" cy="333756"/>
           </a:xfrm>
           <a:prstGeom prst="rect">
             <a:avLst/>
@@ -10585,8 +10975,8 @@
         </p:nvSpPr>
         <p:spPr>
           <a:xfrm>
-            <a:off x="10652760" y="3694176"/>
-            <a:ext cx="731520" cy="365760"/>
+            <a:off x="10652760" y="3497580"/>
+            <a:ext cx="731520" cy="333756"/>
           </a:xfrm>
           <a:prstGeom prst="rect">
             <a:avLst/>
@@ -10624,8 +11014,8 @@
         </p:nvSpPr>
         <p:spPr>
           <a:xfrm>
-            <a:off x="11384280" y="3694176"/>
-            <a:ext cx="868680" cy="365760"/>
+            <a:off x="11384280" y="3497580"/>
+            <a:ext cx="868680" cy="333756"/>
           </a:xfrm>
           <a:prstGeom prst="rect">
             <a:avLst/>
@@ -10663,8 +11053,8 @@
         </p:nvSpPr>
         <p:spPr>
           <a:xfrm>
-            <a:off x="594360" y="4059936"/>
-            <a:ext cx="11658600" cy="365760"/>
+            <a:off x="594360" y="3831336"/>
+            <a:ext cx="11658600" cy="333756"/>
           </a:xfrm>
           <a:prstGeom prst="rect">
             <a:avLst/>
@@ -10688,8 +11078,8 @@
         </p:nvSpPr>
         <p:spPr>
           <a:xfrm>
-            <a:off x="704088" y="4059936"/>
-            <a:ext cx="2011680" cy="365760"/>
+            <a:off x="704088" y="3831336"/>
+            <a:ext cx="2011680" cy="333756"/>
           </a:xfrm>
           <a:prstGeom prst="rect">
             <a:avLst/>
@@ -10727,8 +11117,8 @@
         </p:nvSpPr>
         <p:spPr>
           <a:xfrm>
-            <a:off x="2606040" y="4059936"/>
-            <a:ext cx="731520" cy="365760"/>
+            <a:off x="2606040" y="3831336"/>
+            <a:ext cx="731520" cy="333756"/>
           </a:xfrm>
           <a:prstGeom prst="rect">
             <a:avLst/>
@@ -10752,7 +11142,7 @@
                 <a:ea typeface="メイリオ" pitchFamily="34" charset="-122"/>
                 <a:cs typeface="メイリオ" pitchFamily="34" charset="-120"/>
               </a:rPr>
-              <a:t>29.6</a:t>
+              <a:t>33.0</a:t>
             </a:r>
             <a:endParaRPr lang="en-US" sz="850" dirty="0"/>
           </a:p>
@@ -10766,8 +11156,8 @@
         </p:nvSpPr>
         <p:spPr>
           <a:xfrm>
-            <a:off x="3337560" y="4059936"/>
-            <a:ext cx="731520" cy="365760"/>
+            <a:off x="3337560" y="3831336"/>
+            <a:ext cx="731520" cy="333756"/>
           </a:xfrm>
           <a:prstGeom prst="rect">
             <a:avLst/>
@@ -10791,7 +11181,7 @@
                 <a:ea typeface="メイリオ" pitchFamily="34" charset="-122"/>
                 <a:cs typeface="メイリオ" pitchFamily="34" charset="-120"/>
               </a:rPr>
-              <a:t>29.6</a:t>
+              <a:t>33.0</a:t>
             </a:r>
             <a:endParaRPr lang="en-US" sz="850" dirty="0"/>
           </a:p>
@@ -10805,8 +11195,8 @@
         </p:nvSpPr>
         <p:spPr>
           <a:xfrm>
-            <a:off x="4069080" y="4059936"/>
-            <a:ext cx="731520" cy="365760"/>
+            <a:off x="4069080" y="3831336"/>
+            <a:ext cx="731520" cy="333756"/>
           </a:xfrm>
           <a:prstGeom prst="rect">
             <a:avLst/>
@@ -10830,7 +11220,7 @@
                 <a:ea typeface="メイリオ" pitchFamily="34" charset="-122"/>
                 <a:cs typeface="メイリオ" pitchFamily="34" charset="-120"/>
               </a:rPr>
-              <a:t>29.6</a:t>
+              <a:t>33.0</a:t>
             </a:r>
             <a:endParaRPr lang="en-US" sz="850" dirty="0"/>
           </a:p>
@@ -10844,8 +11234,8 @@
         </p:nvSpPr>
         <p:spPr>
           <a:xfrm>
-            <a:off x="4800600" y="4059936"/>
-            <a:ext cx="731520" cy="365760"/>
+            <a:off x="4800600" y="3831336"/>
+            <a:ext cx="731520" cy="333756"/>
           </a:xfrm>
           <a:prstGeom prst="rect">
             <a:avLst/>
@@ -10869,7 +11259,7 @@
                 <a:ea typeface="メイリオ" pitchFamily="34" charset="-122"/>
                 <a:cs typeface="メイリオ" pitchFamily="34" charset="-120"/>
               </a:rPr>
-              <a:t>29.6</a:t>
+              <a:t>33.0</a:t>
             </a:r>
             <a:endParaRPr lang="en-US" sz="850" dirty="0"/>
           </a:p>
@@ -10883,8 +11273,8 @@
         </p:nvSpPr>
         <p:spPr>
           <a:xfrm>
-            <a:off x="5532120" y="4059936"/>
-            <a:ext cx="731520" cy="365760"/>
+            <a:off x="5532120" y="3831336"/>
+            <a:ext cx="731520" cy="333756"/>
           </a:xfrm>
           <a:prstGeom prst="rect">
             <a:avLst/>
@@ -10908,7 +11298,7 @@
                 <a:ea typeface="メイリオ" pitchFamily="34" charset="-122"/>
                 <a:cs typeface="メイリオ" pitchFamily="34" charset="-120"/>
               </a:rPr>
-              <a:t>29.6</a:t>
+              <a:t>33.0</a:t>
             </a:r>
             <a:endParaRPr lang="en-US" sz="850" dirty="0"/>
           </a:p>
@@ -10922,8 +11312,8 @@
         </p:nvSpPr>
         <p:spPr>
           <a:xfrm>
-            <a:off x="6263640" y="4059936"/>
-            <a:ext cx="731520" cy="365760"/>
+            <a:off x="6263640" y="3831336"/>
+            <a:ext cx="731520" cy="333756"/>
           </a:xfrm>
           <a:prstGeom prst="rect">
             <a:avLst/>
@@ -10947,7 +11337,7 @@
                 <a:ea typeface="メイリオ" pitchFamily="34" charset="-122"/>
                 <a:cs typeface="メイリオ" pitchFamily="34" charset="-120"/>
               </a:rPr>
-              <a:t>59.6</a:t>
+              <a:t>63.0</a:t>
             </a:r>
             <a:endParaRPr lang="en-US" sz="850" dirty="0"/>
           </a:p>
@@ -10961,8 +11351,8 @@
         </p:nvSpPr>
         <p:spPr>
           <a:xfrm>
-            <a:off x="6995160" y="4059936"/>
-            <a:ext cx="731520" cy="365760"/>
+            <a:off x="6995160" y="3831336"/>
+            <a:ext cx="731520" cy="333756"/>
           </a:xfrm>
           <a:prstGeom prst="rect">
             <a:avLst/>
@@ -10986,7 +11376,7 @@
                 <a:ea typeface="メイリオ" pitchFamily="34" charset="-122"/>
                 <a:cs typeface="メイリオ" pitchFamily="34" charset="-120"/>
               </a:rPr>
-              <a:t>29.6</a:t>
+              <a:t>33.0</a:t>
             </a:r>
             <a:endParaRPr lang="en-US" sz="850" dirty="0"/>
           </a:p>
@@ -11000,8 +11390,8 @@
         </p:nvSpPr>
         <p:spPr>
           <a:xfrm>
-            <a:off x="7726680" y="4059936"/>
-            <a:ext cx="731520" cy="365760"/>
+            <a:off x="7726680" y="3831336"/>
+            <a:ext cx="731520" cy="333756"/>
           </a:xfrm>
           <a:prstGeom prst="rect">
             <a:avLst/>
@@ -11025,7 +11415,7 @@
                 <a:ea typeface="メイリオ" pitchFamily="34" charset="-122"/>
                 <a:cs typeface="メイリオ" pitchFamily="34" charset="-120"/>
               </a:rPr>
-              <a:t>29.6</a:t>
+              <a:t>33.0</a:t>
             </a:r>
             <a:endParaRPr lang="en-US" sz="850" dirty="0"/>
           </a:p>
@@ -11039,8 +11429,8 @@
         </p:nvSpPr>
         <p:spPr>
           <a:xfrm>
-            <a:off x="8458200" y="4059936"/>
-            <a:ext cx="731520" cy="365760"/>
+            <a:off x="8458200" y="3831336"/>
+            <a:ext cx="731520" cy="333756"/>
           </a:xfrm>
           <a:prstGeom prst="rect">
             <a:avLst/>
@@ -11064,7 +11454,7 @@
                 <a:ea typeface="メイリオ" pitchFamily="34" charset="-122"/>
                 <a:cs typeface="メイリオ" pitchFamily="34" charset="-120"/>
               </a:rPr>
-              <a:t>29.6</a:t>
+              <a:t>33.0</a:t>
             </a:r>
             <a:endParaRPr lang="en-US" sz="850" dirty="0"/>
           </a:p>
@@ -11078,8 +11468,8 @@
         </p:nvSpPr>
         <p:spPr>
           <a:xfrm>
-            <a:off x="9189720" y="4059936"/>
-            <a:ext cx="731520" cy="365760"/>
+            <a:off x="9189720" y="3831336"/>
+            <a:ext cx="731520" cy="333756"/>
           </a:xfrm>
           <a:prstGeom prst="rect">
             <a:avLst/>
@@ -11103,7 +11493,7 @@
                 <a:ea typeface="メイリオ" pitchFamily="34" charset="-122"/>
                 <a:cs typeface="メイリオ" pitchFamily="34" charset="-120"/>
               </a:rPr>
-              <a:t>29.6</a:t>
+              <a:t>33.0</a:t>
             </a:r>
             <a:endParaRPr lang="en-US" sz="850" dirty="0"/>
           </a:p>
@@ -11117,8 +11507,8 @@
         </p:nvSpPr>
         <p:spPr>
           <a:xfrm>
-            <a:off x="9921240" y="4059936"/>
-            <a:ext cx="731520" cy="365760"/>
+            <a:off x="9921240" y="3831336"/>
+            <a:ext cx="731520" cy="333756"/>
           </a:xfrm>
           <a:prstGeom prst="rect">
             <a:avLst/>
@@ -11142,7 +11532,7 @@
                 <a:ea typeface="メイリオ" pitchFamily="34" charset="-122"/>
                 <a:cs typeface="メイリオ" pitchFamily="34" charset="-120"/>
               </a:rPr>
-              <a:t>29.6</a:t>
+              <a:t>33.0</a:t>
             </a:r>
             <a:endParaRPr lang="en-US" sz="850" dirty="0"/>
           </a:p>
@@ -11156,8 +11546,8 @@
         </p:nvSpPr>
         <p:spPr>
           <a:xfrm>
-            <a:off x="10652760" y="4059936"/>
-            <a:ext cx="731520" cy="365760"/>
+            <a:off x="10652760" y="3831336"/>
+            <a:ext cx="731520" cy="333756"/>
           </a:xfrm>
           <a:prstGeom prst="rect">
             <a:avLst/>
@@ -11181,7 +11571,7 @@
                 <a:ea typeface="メイリオ" pitchFamily="34" charset="-122"/>
                 <a:cs typeface="メイリオ" pitchFamily="34" charset="-120"/>
               </a:rPr>
-              <a:t>39.6</a:t>
+              <a:t>43.0</a:t>
             </a:r>
             <a:endParaRPr lang="en-US" sz="850" dirty="0"/>
           </a:p>
@@ -11195,8 +11585,8 @@
         </p:nvSpPr>
         <p:spPr>
           <a:xfrm>
-            <a:off x="11384280" y="4059936"/>
-            <a:ext cx="868680" cy="365760"/>
+            <a:off x="11384280" y="3831336"/>
+            <a:ext cx="868680" cy="333756"/>
           </a:xfrm>
           <a:prstGeom prst="rect">
             <a:avLst/>
@@ -11220,7 +11610,7 @@
                 <a:ea typeface="メイリオ" pitchFamily="34" charset="-122"/>
                 <a:cs typeface="メイリオ" pitchFamily="34" charset="-120"/>
               </a:rPr>
-              <a:t>395.8</a:t>
+              <a:t>435.5</a:t>
             </a:r>
             <a:endParaRPr lang="en-US" sz="900" dirty="0"/>
           </a:p>
@@ -11234,8 +11624,8 @@
         </p:nvSpPr>
         <p:spPr>
           <a:xfrm>
-            <a:off x="594360" y="4425696"/>
-            <a:ext cx="11658600" cy="365760"/>
+            <a:off x="594360" y="4165092"/>
+            <a:ext cx="11658600" cy="333756"/>
           </a:xfrm>
           <a:prstGeom prst="rect">
             <a:avLst/>
@@ -11259,8 +11649,8 @@
         </p:nvSpPr>
         <p:spPr>
           <a:xfrm>
-            <a:off x="704088" y="4425696"/>
-            <a:ext cx="2011680" cy="365760"/>
+            <a:off x="704088" y="4165092"/>
+            <a:ext cx="2011680" cy="333756"/>
           </a:xfrm>
           <a:prstGeom prst="rect">
             <a:avLst/>
@@ -11298,8 +11688,8 @@
         </p:nvSpPr>
         <p:spPr>
           <a:xfrm>
-            <a:off x="2606040" y="4425696"/>
-            <a:ext cx="731520" cy="365760"/>
+            <a:off x="2606040" y="4165092"/>
+            <a:ext cx="731520" cy="333756"/>
           </a:xfrm>
           <a:prstGeom prst="rect">
             <a:avLst/>
@@ -11337,8 +11727,8 @@
         </p:nvSpPr>
         <p:spPr>
           <a:xfrm>
-            <a:off x="3337560" y="4425696"/>
-            <a:ext cx="731520" cy="365760"/>
+            <a:off x="3337560" y="4165092"/>
+            <a:ext cx="731520" cy="333756"/>
           </a:xfrm>
           <a:prstGeom prst="rect">
             <a:avLst/>
@@ -11376,8 +11766,8 @@
         </p:nvSpPr>
         <p:spPr>
           <a:xfrm>
-            <a:off x="4069080" y="4425696"/>
-            <a:ext cx="731520" cy="365760"/>
+            <a:off x="4069080" y="4165092"/>
+            <a:ext cx="731520" cy="333756"/>
           </a:xfrm>
           <a:prstGeom prst="rect">
             <a:avLst/>
@@ -11415,8 +11805,8 @@
         </p:nvSpPr>
         <p:spPr>
           <a:xfrm>
-            <a:off x="4800600" y="4425696"/>
-            <a:ext cx="731520" cy="365760"/>
+            <a:off x="4800600" y="4165092"/>
+            <a:ext cx="731520" cy="333756"/>
           </a:xfrm>
           <a:prstGeom prst="rect">
             <a:avLst/>
@@ -11454,8 +11844,8 @@
         </p:nvSpPr>
         <p:spPr>
           <a:xfrm>
-            <a:off x="5532120" y="4425696"/>
-            <a:ext cx="731520" cy="365760"/>
+            <a:off x="5532120" y="4165092"/>
+            <a:ext cx="731520" cy="333756"/>
           </a:xfrm>
           <a:prstGeom prst="rect">
             <a:avLst/>
@@ -11493,8 +11883,8 @@
         </p:nvSpPr>
         <p:spPr>
           <a:xfrm>
-            <a:off x="6263640" y="4425696"/>
-            <a:ext cx="731520" cy="365760"/>
+            <a:off x="6263640" y="4165092"/>
+            <a:ext cx="731520" cy="333756"/>
           </a:xfrm>
           <a:prstGeom prst="rect">
             <a:avLst/>
@@ -11532,8 +11922,8 @@
         </p:nvSpPr>
         <p:spPr>
           <a:xfrm>
-            <a:off x="6995160" y="4425696"/>
-            <a:ext cx="731520" cy="365760"/>
+            <a:off x="6995160" y="4165092"/>
+            <a:ext cx="731520" cy="333756"/>
           </a:xfrm>
           <a:prstGeom prst="rect">
             <a:avLst/>
@@ -11571,8 +11961,8 @@
         </p:nvSpPr>
         <p:spPr>
           <a:xfrm>
-            <a:off x="7726680" y="4425696"/>
-            <a:ext cx="731520" cy="365760"/>
+            <a:off x="7726680" y="4165092"/>
+            <a:ext cx="731520" cy="333756"/>
           </a:xfrm>
           <a:prstGeom prst="rect">
             <a:avLst/>
@@ -11610,8 +12000,8 @@
         </p:nvSpPr>
         <p:spPr>
           <a:xfrm>
-            <a:off x="8458200" y="4425696"/>
-            <a:ext cx="731520" cy="365760"/>
+            <a:off x="8458200" y="4165092"/>
+            <a:ext cx="731520" cy="333756"/>
           </a:xfrm>
           <a:prstGeom prst="rect">
             <a:avLst/>
@@ -11649,8 +12039,8 @@
         </p:nvSpPr>
         <p:spPr>
           <a:xfrm>
-            <a:off x="9189720" y="4425696"/>
-            <a:ext cx="731520" cy="365760"/>
+            <a:off x="9189720" y="4165092"/>
+            <a:ext cx="731520" cy="333756"/>
           </a:xfrm>
           <a:prstGeom prst="rect">
             <a:avLst/>
@@ -11688,8 +12078,8 @@
         </p:nvSpPr>
         <p:spPr>
           <a:xfrm>
-            <a:off x="9921240" y="4425696"/>
-            <a:ext cx="731520" cy="365760"/>
+            <a:off x="9921240" y="4165092"/>
+            <a:ext cx="731520" cy="333756"/>
           </a:xfrm>
           <a:prstGeom prst="rect">
             <a:avLst/>
@@ -11727,8 +12117,8 @@
         </p:nvSpPr>
         <p:spPr>
           <a:xfrm>
-            <a:off x="10652760" y="4425696"/>
-            <a:ext cx="731520" cy="365760"/>
+            <a:off x="10652760" y="4165092"/>
+            <a:ext cx="731520" cy="333756"/>
           </a:xfrm>
           <a:prstGeom prst="rect">
             <a:avLst/>
@@ -11766,8 +12156,8 @@
         </p:nvSpPr>
         <p:spPr>
           <a:xfrm>
-            <a:off x="11384280" y="4425696"/>
-            <a:ext cx="868680" cy="365760"/>
+            <a:off x="11384280" y="4165092"/>
+            <a:ext cx="868680" cy="333756"/>
           </a:xfrm>
           <a:prstGeom prst="rect">
             <a:avLst/>
@@ -11805,8 +12195,8 @@
         </p:nvSpPr>
         <p:spPr>
           <a:xfrm>
-            <a:off x="594360" y="4791456"/>
-            <a:ext cx="11658600" cy="365760"/>
+            <a:off x="594360" y="4498848"/>
+            <a:ext cx="11658600" cy="333756"/>
           </a:xfrm>
           <a:prstGeom prst="rect">
             <a:avLst/>
@@ -11830,8 +12220,8 @@
         </p:nvSpPr>
         <p:spPr>
           <a:xfrm>
-            <a:off x="704088" y="4791456"/>
-            <a:ext cx="2011680" cy="365760"/>
+            <a:off x="704088" y="4498848"/>
+            <a:ext cx="2011680" cy="333756"/>
           </a:xfrm>
           <a:prstGeom prst="rect">
             <a:avLst/>
@@ -11869,8 +12259,8 @@
         </p:nvSpPr>
         <p:spPr>
           <a:xfrm>
-            <a:off x="2606040" y="4791456"/>
-            <a:ext cx="731520" cy="365760"/>
+            <a:off x="2606040" y="4498848"/>
+            <a:ext cx="731520" cy="333756"/>
           </a:xfrm>
           <a:prstGeom prst="rect">
             <a:avLst/>
@@ -11894,7 +12284,7 @@
                 <a:ea typeface="メイリオ" pitchFamily="34" charset="-122"/>
                 <a:cs typeface="メイリオ" pitchFamily="34" charset="-120"/>
               </a:rPr>
-              <a:t>4.6</a:t>
+              <a:t>7.9</a:t>
             </a:r>
             <a:endParaRPr lang="en-US" sz="850" dirty="0"/>
           </a:p>
@@ -11908,8 +12298,8 @@
         </p:nvSpPr>
         <p:spPr>
           <a:xfrm>
-            <a:off x="3337560" y="4791456"/>
-            <a:ext cx="731520" cy="365760"/>
+            <a:off x="3337560" y="4498848"/>
+            <a:ext cx="731520" cy="333756"/>
           </a:xfrm>
           <a:prstGeom prst="rect">
             <a:avLst/>
@@ -11933,7 +12323,7 @@
                 <a:ea typeface="メイリオ" pitchFamily="34" charset="-122"/>
                 <a:cs typeface="メイリオ" pitchFamily="34" charset="-120"/>
               </a:rPr>
-              <a:t>4.6</a:t>
+              <a:t>7.9</a:t>
             </a:r>
             <a:endParaRPr lang="en-US" sz="850" dirty="0"/>
           </a:p>
@@ -11947,8 +12337,8 @@
         </p:nvSpPr>
         <p:spPr>
           <a:xfrm>
-            <a:off x="4069080" y="4791456"/>
-            <a:ext cx="731520" cy="365760"/>
+            <a:off x="4069080" y="4498848"/>
+            <a:ext cx="731520" cy="333756"/>
           </a:xfrm>
           <a:prstGeom prst="rect">
             <a:avLst/>
@@ -11972,7 +12362,7 @@
                 <a:ea typeface="メイリオ" pitchFamily="34" charset="-122"/>
                 <a:cs typeface="メイリオ" pitchFamily="34" charset="-120"/>
               </a:rPr>
-              <a:t>4.6</a:t>
+              <a:t>7.9</a:t>
             </a:r>
             <a:endParaRPr lang="en-US" sz="850" dirty="0"/>
           </a:p>
@@ -11986,8 +12376,8 @@
         </p:nvSpPr>
         <p:spPr>
           <a:xfrm>
-            <a:off x="4800600" y="4791456"/>
-            <a:ext cx="731520" cy="365760"/>
+            <a:off x="4800600" y="4498848"/>
+            <a:ext cx="731520" cy="333756"/>
           </a:xfrm>
           <a:prstGeom prst="rect">
             <a:avLst/>
@@ -12011,7 +12401,7 @@
                 <a:ea typeface="メイリオ" pitchFamily="34" charset="-122"/>
                 <a:cs typeface="メイリオ" pitchFamily="34" charset="-120"/>
               </a:rPr>
-              <a:t>4.6</a:t>
+              <a:t>7.9</a:t>
             </a:r>
             <a:endParaRPr lang="en-US" sz="850" dirty="0"/>
           </a:p>
@@ -12025,8 +12415,8 @@
         </p:nvSpPr>
         <p:spPr>
           <a:xfrm>
-            <a:off x="5532120" y="4791456"/>
-            <a:ext cx="731520" cy="365760"/>
+            <a:off x="5532120" y="4498848"/>
+            <a:ext cx="731520" cy="333756"/>
           </a:xfrm>
           <a:prstGeom prst="rect">
             <a:avLst/>
@@ -12050,7 +12440,7 @@
                 <a:ea typeface="メイリオ" pitchFamily="34" charset="-122"/>
                 <a:cs typeface="メイリオ" pitchFamily="34" charset="-120"/>
               </a:rPr>
-              <a:t>4.6</a:t>
+              <a:t>7.9</a:t>
             </a:r>
             <a:endParaRPr lang="en-US" sz="850" dirty="0"/>
           </a:p>
@@ -12064,8 +12454,8 @@
         </p:nvSpPr>
         <p:spPr>
           <a:xfrm>
-            <a:off x="6263640" y="4791456"/>
-            <a:ext cx="731520" cy="365760"/>
+            <a:off x="6263640" y="4498848"/>
+            <a:ext cx="731520" cy="333756"/>
           </a:xfrm>
           <a:prstGeom prst="rect">
             <a:avLst/>
@@ -12089,7 +12479,7 @@
                 <a:ea typeface="メイリオ" pitchFamily="34" charset="-122"/>
                 <a:cs typeface="メイリオ" pitchFamily="34" charset="-120"/>
               </a:rPr>
-              <a:t>34.6</a:t>
+              <a:t>37.9</a:t>
             </a:r>
             <a:endParaRPr lang="en-US" sz="850" dirty="0"/>
           </a:p>
@@ -12103,8 +12493,8 @@
         </p:nvSpPr>
         <p:spPr>
           <a:xfrm>
-            <a:off x="6995160" y="4791456"/>
-            <a:ext cx="731520" cy="365760"/>
+            <a:off x="6995160" y="4498848"/>
+            <a:ext cx="731520" cy="333756"/>
           </a:xfrm>
           <a:prstGeom prst="rect">
             <a:avLst/>
@@ -12128,7 +12518,7 @@
                 <a:ea typeface="メイリオ" pitchFamily="34" charset="-122"/>
                 <a:cs typeface="メイリオ" pitchFamily="34" charset="-120"/>
               </a:rPr>
-              <a:t>4.6</a:t>
+              <a:t>7.9</a:t>
             </a:r>
             <a:endParaRPr lang="en-US" sz="850" dirty="0"/>
           </a:p>
@@ -12142,8 +12532,8 @@
         </p:nvSpPr>
         <p:spPr>
           <a:xfrm>
-            <a:off x="7726680" y="4791456"/>
-            <a:ext cx="731520" cy="365760"/>
+            <a:off x="7726680" y="4498848"/>
+            <a:ext cx="731520" cy="333756"/>
           </a:xfrm>
           <a:prstGeom prst="rect">
             <a:avLst/>
@@ -12167,7 +12557,7 @@
                 <a:ea typeface="メイリオ" pitchFamily="34" charset="-122"/>
                 <a:cs typeface="メイリオ" pitchFamily="34" charset="-120"/>
               </a:rPr>
-              <a:t>4.6</a:t>
+              <a:t>7.9</a:t>
             </a:r>
             <a:endParaRPr lang="en-US" sz="850" dirty="0"/>
           </a:p>
@@ -12181,8 +12571,8 @@
         </p:nvSpPr>
         <p:spPr>
           <a:xfrm>
-            <a:off x="8458200" y="4791456"/>
-            <a:ext cx="731520" cy="365760"/>
+            <a:off x="8458200" y="4498848"/>
+            <a:ext cx="731520" cy="333756"/>
           </a:xfrm>
           <a:prstGeom prst="rect">
             <a:avLst/>
@@ -12206,7 +12596,7 @@
                 <a:ea typeface="メイリオ" pitchFamily="34" charset="-122"/>
                 <a:cs typeface="メイリオ" pitchFamily="34" charset="-120"/>
               </a:rPr>
-              <a:t>4.6</a:t>
+              <a:t>7.9</a:t>
             </a:r>
             <a:endParaRPr lang="en-US" sz="850" dirty="0"/>
           </a:p>
@@ -12220,8 +12610,8 @@
         </p:nvSpPr>
         <p:spPr>
           <a:xfrm>
-            <a:off x="9189720" y="4791456"/>
-            <a:ext cx="731520" cy="365760"/>
+            <a:off x="9189720" y="4498848"/>
+            <a:ext cx="731520" cy="333756"/>
           </a:xfrm>
           <a:prstGeom prst="rect">
             <a:avLst/>
@@ -12245,7 +12635,7 @@
                 <a:ea typeface="メイリオ" pitchFamily="34" charset="-122"/>
                 <a:cs typeface="メイリオ" pitchFamily="34" charset="-120"/>
               </a:rPr>
-              <a:t>4.6</a:t>
+              <a:t>7.9</a:t>
             </a:r>
             <a:endParaRPr lang="en-US" sz="850" dirty="0"/>
           </a:p>
@@ -12259,8 +12649,8 @@
         </p:nvSpPr>
         <p:spPr>
           <a:xfrm>
-            <a:off x="9921240" y="4791456"/>
-            <a:ext cx="731520" cy="365760"/>
+            <a:off x="9921240" y="4498848"/>
+            <a:ext cx="731520" cy="333756"/>
           </a:xfrm>
           <a:prstGeom prst="rect">
             <a:avLst/>
@@ -12284,7 +12674,7 @@
                 <a:ea typeface="メイリオ" pitchFamily="34" charset="-122"/>
                 <a:cs typeface="メイリオ" pitchFamily="34" charset="-120"/>
               </a:rPr>
-              <a:t>4.6</a:t>
+              <a:t>7.9</a:t>
             </a:r>
             <a:endParaRPr lang="en-US" sz="850" dirty="0"/>
           </a:p>
@@ -12298,8 +12688,8 @@
         </p:nvSpPr>
         <p:spPr>
           <a:xfrm>
-            <a:off x="10652760" y="4791456"/>
-            <a:ext cx="731520" cy="365760"/>
+            <a:off x="10652760" y="4498848"/>
+            <a:ext cx="731520" cy="333756"/>
           </a:xfrm>
           <a:prstGeom prst="rect">
             <a:avLst/>
@@ -12323,7 +12713,7 @@
                 <a:ea typeface="メイリオ" pitchFamily="34" charset="-122"/>
                 <a:cs typeface="メイリオ" pitchFamily="34" charset="-120"/>
               </a:rPr>
-              <a:t>14.6</a:t>
+              <a:t>17.9</a:t>
             </a:r>
             <a:endParaRPr lang="en-US" sz="850" dirty="0"/>
           </a:p>
@@ -12337,8 +12727,8 @@
         </p:nvSpPr>
         <p:spPr>
           <a:xfrm>
-            <a:off x="11384280" y="4791456"/>
-            <a:ext cx="868680" cy="365760"/>
+            <a:off x="11384280" y="4498848"/>
+            <a:ext cx="868680" cy="333756"/>
           </a:xfrm>
           <a:prstGeom prst="rect">
             <a:avLst/>
@@ -12362,7 +12752,7 @@
                 <a:ea typeface="メイリオ" pitchFamily="34" charset="-122"/>
                 <a:cs typeface="メイリオ" pitchFamily="34" charset="-120"/>
               </a:rPr>
-              <a:t>95.6</a:t>
+              <a:t>135.4</a:t>
             </a:r>
             <a:endParaRPr lang="en-US" sz="900" dirty="0"/>
           </a:p>
@@ -12376,8 +12766,8 @@
         </p:nvSpPr>
         <p:spPr>
           <a:xfrm>
-            <a:off x="594360" y="5157216"/>
-            <a:ext cx="11658600" cy="365760"/>
+            <a:off x="594360" y="4832604"/>
+            <a:ext cx="11658600" cy="333756"/>
           </a:xfrm>
           <a:prstGeom prst="rect">
             <a:avLst/>
@@ -12401,8 +12791,8 @@
         </p:nvSpPr>
         <p:spPr>
           <a:xfrm>
-            <a:off x="704088" y="5157216"/>
-            <a:ext cx="2011680" cy="365760"/>
+            <a:off x="704088" y="4832604"/>
+            <a:ext cx="2011680" cy="333756"/>
           </a:xfrm>
           <a:prstGeom prst="rect">
             <a:avLst/>
@@ -12440,8 +12830,8 @@
         </p:nvSpPr>
         <p:spPr>
           <a:xfrm>
-            <a:off x="2606040" y="5157216"/>
-            <a:ext cx="731520" cy="365760"/>
+            <a:off x="2606040" y="4832604"/>
+            <a:ext cx="731520" cy="333756"/>
           </a:xfrm>
           <a:prstGeom prst="rect">
             <a:avLst/>
@@ -12479,8 +12869,8 @@
         </p:nvSpPr>
         <p:spPr>
           <a:xfrm>
-            <a:off x="3337560" y="5157216"/>
-            <a:ext cx="731520" cy="365760"/>
+            <a:off x="3337560" y="4832604"/>
+            <a:ext cx="731520" cy="333756"/>
           </a:xfrm>
           <a:prstGeom prst="rect">
             <a:avLst/>
@@ -12518,8 +12908,8 @@
         </p:nvSpPr>
         <p:spPr>
           <a:xfrm>
-            <a:off x="4069080" y="5157216"/>
-            <a:ext cx="731520" cy="365760"/>
+            <a:off x="4069080" y="4832604"/>
+            <a:ext cx="731520" cy="333756"/>
           </a:xfrm>
           <a:prstGeom prst="rect">
             <a:avLst/>
@@ -12557,8 +12947,8 @@
         </p:nvSpPr>
         <p:spPr>
           <a:xfrm>
-            <a:off x="4800600" y="5157216"/>
-            <a:ext cx="731520" cy="365760"/>
+            <a:off x="4800600" y="4832604"/>
+            <a:ext cx="731520" cy="333756"/>
           </a:xfrm>
           <a:prstGeom prst="rect">
             <a:avLst/>
@@ -12596,8 +12986,8 @@
         </p:nvSpPr>
         <p:spPr>
           <a:xfrm>
-            <a:off x="5532120" y="5157216"/>
-            <a:ext cx="731520" cy="365760"/>
+            <a:off x="5532120" y="4832604"/>
+            <a:ext cx="731520" cy="333756"/>
           </a:xfrm>
           <a:prstGeom prst="rect">
             <a:avLst/>
@@ -12635,8 +13025,8 @@
         </p:nvSpPr>
         <p:spPr>
           <a:xfrm>
-            <a:off x="6263640" y="5157216"/>
-            <a:ext cx="731520" cy="365760"/>
+            <a:off x="6263640" y="4832604"/>
+            <a:ext cx="731520" cy="333756"/>
           </a:xfrm>
           <a:prstGeom prst="rect">
             <a:avLst/>
@@ -12674,8 +13064,8 @@
         </p:nvSpPr>
         <p:spPr>
           <a:xfrm>
-            <a:off x="6995160" y="5157216"/>
-            <a:ext cx="731520" cy="365760"/>
+            <a:off x="6995160" y="4832604"/>
+            <a:ext cx="731520" cy="333756"/>
           </a:xfrm>
           <a:prstGeom prst="rect">
             <a:avLst/>
@@ -12713,8 +13103,8 @@
         </p:nvSpPr>
         <p:spPr>
           <a:xfrm>
-            <a:off x="7726680" y="5157216"/>
-            <a:ext cx="731520" cy="365760"/>
+            <a:off x="7726680" y="4832604"/>
+            <a:ext cx="731520" cy="333756"/>
           </a:xfrm>
           <a:prstGeom prst="rect">
             <a:avLst/>
@@ -12752,8 +13142,8 @@
         </p:nvSpPr>
         <p:spPr>
           <a:xfrm>
-            <a:off x="8458200" y="5157216"/>
-            <a:ext cx="731520" cy="365760"/>
+            <a:off x="8458200" y="4832604"/>
+            <a:ext cx="731520" cy="333756"/>
           </a:xfrm>
           <a:prstGeom prst="rect">
             <a:avLst/>
@@ -12791,8 +13181,8 @@
         </p:nvSpPr>
         <p:spPr>
           <a:xfrm>
-            <a:off x="9189720" y="5157216"/>
-            <a:ext cx="731520" cy="365760"/>
+            <a:off x="9189720" y="4832604"/>
+            <a:ext cx="731520" cy="333756"/>
           </a:xfrm>
           <a:prstGeom prst="rect">
             <a:avLst/>
@@ -12830,8 +13220,8 @@
         </p:nvSpPr>
         <p:spPr>
           <a:xfrm>
-            <a:off x="9921240" y="5157216"/>
-            <a:ext cx="731520" cy="365760"/>
+            <a:off x="9921240" y="4832604"/>
+            <a:ext cx="731520" cy="333756"/>
           </a:xfrm>
           <a:prstGeom prst="rect">
             <a:avLst/>
@@ -12869,8 +13259,8 @@
         </p:nvSpPr>
         <p:spPr>
           <a:xfrm>
-            <a:off x="10652760" y="5157216"/>
-            <a:ext cx="731520" cy="365760"/>
+            <a:off x="10652760" y="4832604"/>
+            <a:ext cx="731520" cy="333756"/>
           </a:xfrm>
           <a:prstGeom prst="rect">
             <a:avLst/>
@@ -12908,8 +13298,8 @@
         </p:nvSpPr>
         <p:spPr>
           <a:xfrm>
-            <a:off x="11384280" y="5157216"/>
-            <a:ext cx="868680" cy="365760"/>
+            <a:off x="11384280" y="4832604"/>
+            <a:ext cx="868680" cy="333756"/>
           </a:xfrm>
           <a:prstGeom prst="rect">
             <a:avLst/>
@@ -12947,8 +13337,8 @@
         </p:nvSpPr>
         <p:spPr>
           <a:xfrm>
-            <a:off x="594360" y="5522976"/>
-            <a:ext cx="11658600" cy="365760"/>
+            <a:off x="594360" y="5166360"/>
+            <a:ext cx="11658600" cy="333756"/>
           </a:xfrm>
           <a:prstGeom prst="rect">
             <a:avLst/>
@@ -12972,8 +13362,8 @@
         </p:nvSpPr>
         <p:spPr>
           <a:xfrm>
-            <a:off x="704088" y="5522976"/>
-            <a:ext cx="2011680" cy="365760"/>
+            <a:off x="704088" y="5166360"/>
+            <a:ext cx="2011680" cy="333756"/>
           </a:xfrm>
           <a:prstGeom prst="rect">
             <a:avLst/>
@@ -13011,8 +13401,8 @@
         </p:nvSpPr>
         <p:spPr>
           <a:xfrm>
-            <a:off x="2606040" y="5522976"/>
-            <a:ext cx="731520" cy="365760"/>
+            <a:off x="2606040" y="5166360"/>
+            <a:ext cx="731520" cy="333756"/>
           </a:xfrm>
           <a:prstGeom prst="rect">
             <a:avLst/>
@@ -13036,7 +13426,7 @@
                 <a:ea typeface="メイリオ" pitchFamily="34" charset="-122"/>
                 <a:cs typeface="メイリオ" pitchFamily="34" charset="-120"/>
               </a:rPr>
-              <a:t>3.4</a:t>
+              <a:t>6.7</a:t>
             </a:r>
             <a:endParaRPr lang="en-US" sz="850" dirty="0"/>
           </a:p>
@@ -13050,8 +13440,8 @@
         </p:nvSpPr>
         <p:spPr>
           <a:xfrm>
-            <a:off x="3337560" y="5522976"/>
-            <a:ext cx="731520" cy="365760"/>
+            <a:off x="3337560" y="5166360"/>
+            <a:ext cx="731520" cy="333756"/>
           </a:xfrm>
           <a:prstGeom prst="rect">
             <a:avLst/>
@@ -13075,7 +13465,7 @@
                 <a:ea typeface="メイリオ" pitchFamily="34" charset="-122"/>
                 <a:cs typeface="メイリオ" pitchFamily="34" charset="-120"/>
               </a:rPr>
-              <a:t>3.4</a:t>
+              <a:t>6.7</a:t>
             </a:r>
             <a:endParaRPr lang="en-US" sz="850" dirty="0"/>
           </a:p>
@@ -13089,8 +13479,8 @@
         </p:nvSpPr>
         <p:spPr>
           <a:xfrm>
-            <a:off x="4069080" y="5522976"/>
-            <a:ext cx="731520" cy="365760"/>
+            <a:off x="4069080" y="5166360"/>
+            <a:ext cx="731520" cy="333756"/>
           </a:xfrm>
           <a:prstGeom prst="rect">
             <a:avLst/>
@@ -13114,7 +13504,7 @@
                 <a:ea typeface="メイリオ" pitchFamily="34" charset="-122"/>
                 <a:cs typeface="メイリオ" pitchFamily="34" charset="-120"/>
               </a:rPr>
-              <a:t>3.4</a:t>
+              <a:t>6.7</a:t>
             </a:r>
             <a:endParaRPr lang="en-US" sz="850" dirty="0"/>
           </a:p>
@@ -13128,8 +13518,8 @@
         </p:nvSpPr>
         <p:spPr>
           <a:xfrm>
-            <a:off x="4800600" y="5522976"/>
-            <a:ext cx="731520" cy="365760"/>
+            <a:off x="4800600" y="5166360"/>
+            <a:ext cx="731520" cy="333756"/>
           </a:xfrm>
           <a:prstGeom prst="rect">
             <a:avLst/>
@@ -13153,7 +13543,7 @@
                 <a:ea typeface="メイリオ" pitchFamily="34" charset="-122"/>
                 <a:cs typeface="メイリオ" pitchFamily="34" charset="-120"/>
               </a:rPr>
-              <a:t>3.4</a:t>
+              <a:t>6.7</a:t>
             </a:r>
             <a:endParaRPr lang="en-US" sz="850" dirty="0"/>
           </a:p>
@@ -13167,8 +13557,8 @@
         </p:nvSpPr>
         <p:spPr>
           <a:xfrm>
-            <a:off x="5532120" y="5522976"/>
-            <a:ext cx="731520" cy="365760"/>
+            <a:off x="5532120" y="5166360"/>
+            <a:ext cx="731520" cy="333756"/>
           </a:xfrm>
           <a:prstGeom prst="rect">
             <a:avLst/>
@@ -13192,7 +13582,7 @@
                 <a:ea typeface="メイリオ" pitchFamily="34" charset="-122"/>
                 <a:cs typeface="メイリオ" pitchFamily="34" charset="-120"/>
               </a:rPr>
-              <a:t>3.4</a:t>
+              <a:t>6.7</a:t>
             </a:r>
             <a:endParaRPr lang="en-US" sz="850" dirty="0"/>
           </a:p>
@@ -13206,8 +13596,8 @@
         </p:nvSpPr>
         <p:spPr>
           <a:xfrm>
-            <a:off x="6263640" y="5522976"/>
-            <a:ext cx="731520" cy="365760"/>
+            <a:off x="6263640" y="5166360"/>
+            <a:ext cx="731520" cy="333756"/>
           </a:xfrm>
           <a:prstGeom prst="rect">
             <a:avLst/>
@@ -13231,7 +13621,7 @@
                 <a:ea typeface="メイリオ" pitchFamily="34" charset="-122"/>
                 <a:cs typeface="メイリオ" pitchFamily="34" charset="-120"/>
               </a:rPr>
-              <a:t>33.4</a:t>
+              <a:t>36.7</a:t>
             </a:r>
             <a:endParaRPr lang="en-US" sz="850" dirty="0"/>
           </a:p>
@@ -13245,8 +13635,8 @@
         </p:nvSpPr>
         <p:spPr>
           <a:xfrm>
-            <a:off x="6995160" y="5522976"/>
-            <a:ext cx="731520" cy="365760"/>
+            <a:off x="6995160" y="5166360"/>
+            <a:ext cx="731520" cy="333756"/>
           </a:xfrm>
           <a:prstGeom prst="rect">
             <a:avLst/>
@@ -13270,7 +13660,7 @@
                 <a:ea typeface="メイリオ" pitchFamily="34" charset="-122"/>
                 <a:cs typeface="メイリオ" pitchFamily="34" charset="-120"/>
               </a:rPr>
-              <a:t>3.4</a:t>
+              <a:t>6.7</a:t>
             </a:r>
             <a:endParaRPr lang="en-US" sz="850" dirty="0"/>
           </a:p>
@@ -13284,8 +13674,8 @@
         </p:nvSpPr>
         <p:spPr>
           <a:xfrm>
-            <a:off x="7726680" y="5522976"/>
-            <a:ext cx="731520" cy="365760"/>
+            <a:off x="7726680" y="5166360"/>
+            <a:ext cx="731520" cy="333756"/>
           </a:xfrm>
           <a:prstGeom prst="rect">
             <a:avLst/>
@@ -13309,7 +13699,7 @@
                 <a:ea typeface="メイリオ" pitchFamily="34" charset="-122"/>
                 <a:cs typeface="メイリオ" pitchFamily="34" charset="-120"/>
               </a:rPr>
-              <a:t>3.4</a:t>
+              <a:t>6.7</a:t>
             </a:r>
             <a:endParaRPr lang="en-US" sz="850" dirty="0"/>
           </a:p>
@@ -13323,8 +13713,8 @@
         </p:nvSpPr>
         <p:spPr>
           <a:xfrm>
-            <a:off x="8458200" y="5522976"/>
-            <a:ext cx="731520" cy="365760"/>
+            <a:off x="8458200" y="5166360"/>
+            <a:ext cx="731520" cy="333756"/>
           </a:xfrm>
           <a:prstGeom prst="rect">
             <a:avLst/>
@@ -13348,7 +13738,7 @@
                 <a:ea typeface="メイリオ" pitchFamily="34" charset="-122"/>
                 <a:cs typeface="メイリオ" pitchFamily="34" charset="-120"/>
               </a:rPr>
-              <a:t>3.4</a:t>
+              <a:t>6.7</a:t>
             </a:r>
             <a:endParaRPr lang="en-US" sz="850" dirty="0"/>
           </a:p>
@@ -13362,8 +13752,8 @@
         </p:nvSpPr>
         <p:spPr>
           <a:xfrm>
-            <a:off x="9189720" y="5522976"/>
-            <a:ext cx="731520" cy="365760"/>
+            <a:off x="9189720" y="5166360"/>
+            <a:ext cx="731520" cy="333756"/>
           </a:xfrm>
           <a:prstGeom prst="rect">
             <a:avLst/>
@@ -13387,7 +13777,7 @@
                 <a:ea typeface="メイリオ" pitchFamily="34" charset="-122"/>
                 <a:cs typeface="メイリオ" pitchFamily="34" charset="-120"/>
               </a:rPr>
-              <a:t>3.4</a:t>
+              <a:t>6.7</a:t>
             </a:r>
             <a:endParaRPr lang="en-US" sz="850" dirty="0"/>
           </a:p>
@@ -13401,8 +13791,8 @@
         </p:nvSpPr>
         <p:spPr>
           <a:xfrm>
-            <a:off x="9921240" y="5522976"/>
-            <a:ext cx="731520" cy="365760"/>
+            <a:off x="9921240" y="5166360"/>
+            <a:ext cx="731520" cy="333756"/>
           </a:xfrm>
           <a:prstGeom prst="rect">
             <a:avLst/>
@@ -13426,7 +13816,7 @@
                 <a:ea typeface="メイリオ" pitchFamily="34" charset="-122"/>
                 <a:cs typeface="メイリオ" pitchFamily="34" charset="-120"/>
               </a:rPr>
-              <a:t>3.4</a:t>
+              <a:t>6.7</a:t>
             </a:r>
             <a:endParaRPr lang="en-US" sz="850" dirty="0"/>
           </a:p>
@@ -13440,8 +13830,8 @@
         </p:nvSpPr>
         <p:spPr>
           <a:xfrm>
-            <a:off x="10652760" y="5522976"/>
-            <a:ext cx="731520" cy="365760"/>
+            <a:off x="10652760" y="5166360"/>
+            <a:ext cx="731520" cy="333756"/>
           </a:xfrm>
           <a:prstGeom prst="rect">
             <a:avLst/>
@@ -13465,7 +13855,7 @@
                 <a:ea typeface="メイリオ" pitchFamily="34" charset="-122"/>
                 <a:cs typeface="メイリオ" pitchFamily="34" charset="-120"/>
               </a:rPr>
-              <a:t>13.4</a:t>
+              <a:t>16.7</a:t>
             </a:r>
             <a:endParaRPr lang="en-US" sz="850" dirty="0"/>
           </a:p>
@@ -13479,8 +13869,8 @@
         </p:nvSpPr>
         <p:spPr>
           <a:xfrm>
-            <a:off x="11384280" y="5522976"/>
-            <a:ext cx="868680" cy="365760"/>
+            <a:off x="11384280" y="5166360"/>
+            <a:ext cx="868680" cy="333756"/>
           </a:xfrm>
           <a:prstGeom prst="rect">
             <a:avLst/>
@@ -13504,7 +13894,7 @@
                 <a:ea typeface="メイリオ" pitchFamily="34" charset="-122"/>
                 <a:cs typeface="メイリオ" pitchFamily="34" charset="-120"/>
               </a:rPr>
-              <a:t>80.6</a:t>
+              <a:t>120.4</a:t>
             </a:r>
             <a:endParaRPr lang="en-US" sz="900" dirty="0"/>
           </a:p>
@@ -13518,7 +13908,7 @@
         </p:nvSpPr>
         <p:spPr>
           <a:xfrm>
-            <a:off x="594360" y="6108192"/>
+            <a:off x="594360" y="5682996"/>
             <a:ext cx="10963656" cy="841248"/>
           </a:xfrm>
           <a:prstGeom prst="roundRect">
@@ -13552,7 +13942,7 @@
         </p:nvSpPr>
         <p:spPr>
           <a:xfrm>
-            <a:off x="914400" y="6181344"/>
+            <a:off x="914400" y="5756148"/>
             <a:ext cx="3291840" cy="237744"/>
           </a:xfrm>
           <a:prstGeom prst="rect">
@@ -13591,7 +13981,7 @@
         </p:nvSpPr>
         <p:spPr>
           <a:xfrm>
-            <a:off x="914400" y="6382512"/>
+            <a:off x="914400" y="5957316"/>
             <a:ext cx="3291840" cy="310896"/>
           </a:xfrm>
           <a:prstGeom prst="rect">
@@ -13616,7 +14006,7 @@
                 <a:ea typeface="メイリオ" pitchFamily="34" charset="-122"/>
                 <a:cs typeface="メイリオ" pitchFamily="34" charset="-120"/>
               </a:rPr>
-              <a:t>730.5百万円</a:t>
+              <a:t>863.0百万円</a:t>
             </a:r>
             <a:endParaRPr lang="en-US" sz="1600" dirty="0"/>
           </a:p>
@@ -13630,7 +14020,7 @@
         </p:nvSpPr>
         <p:spPr>
           <a:xfrm>
-            <a:off x="4526280" y="6181344"/>
+            <a:off x="4526280" y="5756148"/>
             <a:ext cx="3291840" cy="237744"/>
           </a:xfrm>
           <a:prstGeom prst="rect">
@@ -13669,7 +14059,7 @@
         </p:nvSpPr>
         <p:spPr>
           <a:xfrm>
-            <a:off x="4526280" y="6382512"/>
+            <a:off x="4526280" y="5957316"/>
             <a:ext cx="3291840" cy="310896"/>
           </a:xfrm>
           <a:prstGeom prst="rect">
@@ -13694,7 +14084,7 @@
                 <a:ea typeface="メイリオ" pitchFamily="34" charset="-122"/>
                 <a:cs typeface="メイリオ" pitchFamily="34" charset="-120"/>
               </a:rPr>
-              <a:t>＋95.6百万円</a:t>
+              <a:t>＋135.4百万円</a:t>
             </a:r>
             <a:endParaRPr lang="en-US" sz="1600" dirty="0"/>
           </a:p>
@@ -13708,7 +14098,7 @@
         </p:nvSpPr>
         <p:spPr>
           <a:xfrm>
-            <a:off x="8138160" y="6181344"/>
+            <a:off x="8138160" y="5756148"/>
             <a:ext cx="3291840" cy="237744"/>
           </a:xfrm>
           <a:prstGeom prst="rect">
@@ -13747,7 +14137,7 @@
         </p:nvSpPr>
         <p:spPr>
           <a:xfrm>
-            <a:off x="8138160" y="6382512"/>
+            <a:off x="8138160" y="5957316"/>
             <a:ext cx="3291840" cy="310896"/>
           </a:xfrm>
           <a:prstGeom prst="rect">
@@ -13772,7 +14162,7 @@
                 <a:ea typeface="メイリオ" pitchFamily="34" charset="-122"/>
                 <a:cs typeface="メイリオ" pitchFamily="34" charset="-120"/>
               </a:rPr>
-              <a:t>＋80.6百万円</a:t>
+              <a:t>＋120.4百万円</a:t>
             </a:r>
             <a:endParaRPr lang="en-US" sz="1600" dirty="0"/>
           </a:p>
@@ -13786,7 +14176,7 @@
         </p:nvSpPr>
         <p:spPr>
           <a:xfrm>
-            <a:off x="914400" y="6693408"/>
+            <a:off x="914400" y="6268212"/>
             <a:ext cx="10332720" cy="219456"/>
           </a:xfrm>
           <a:prstGeom prst="rect">
@@ -13882,7 +14272,7 @@
                 <a:ea typeface="メイリオ" pitchFamily="34" charset="-122"/>
                 <a:cs typeface="メイリオ" pitchFamily="34" charset="-120"/>
               </a:rPr>
-              <a:t>FY2027 月次資金繰り － プランC</a:t>
+              <a:t>FY2027 月次資金繰り － プランD</a:t>
             </a:r>
             <a:endParaRPr lang="en-US" sz="2900" dirty="0"/>
           </a:p>
@@ -14551,7 +14941,7 @@
                 <a:ea typeface="メイリオ" pitchFamily="34" charset="-122"/>
                 <a:cs typeface="メイリオ" pitchFamily="34" charset="-120"/>
               </a:rPr>
-              <a:t>63.3</a:t>
+              <a:t>75.4</a:t>
             </a:r>
             <a:endParaRPr lang="en-US" sz="900" dirty="0"/>
           </a:p>
@@ -14590,7 +14980,7 @@
                 <a:ea typeface="メイリオ" pitchFamily="34" charset="-122"/>
                 <a:cs typeface="メイリオ" pitchFamily="34" charset="-120"/>
               </a:rPr>
-              <a:t>63.3</a:t>
+              <a:t>75.4</a:t>
             </a:r>
             <a:endParaRPr lang="en-US" sz="900" dirty="0"/>
           </a:p>
@@ -14629,7 +15019,7 @@
                 <a:ea typeface="メイリオ" pitchFamily="34" charset="-122"/>
                 <a:cs typeface="メイリオ" pitchFamily="34" charset="-120"/>
               </a:rPr>
-              <a:t>63.3</a:t>
+              <a:t>75.4</a:t>
             </a:r>
             <a:endParaRPr lang="en-US" sz="900" dirty="0"/>
           </a:p>
@@ -14668,7 +15058,7 @@
                 <a:ea typeface="メイリオ" pitchFamily="34" charset="-122"/>
                 <a:cs typeface="メイリオ" pitchFamily="34" charset="-120"/>
               </a:rPr>
-              <a:t>63.3</a:t>
+              <a:t>75.4</a:t>
             </a:r>
             <a:endParaRPr lang="en-US" sz="900" dirty="0"/>
           </a:p>
@@ -14707,7 +15097,7 @@
                 <a:ea typeface="メイリオ" pitchFamily="34" charset="-122"/>
                 <a:cs typeface="メイリオ" pitchFamily="34" charset="-120"/>
               </a:rPr>
-              <a:t>63.3</a:t>
+              <a:t>75.4</a:t>
             </a:r>
             <a:endParaRPr lang="en-US" sz="900" dirty="0"/>
           </a:p>
@@ -14746,7 +15136,7 @@
                 <a:ea typeface="メイリオ" pitchFamily="34" charset="-122"/>
                 <a:cs typeface="メイリオ" pitchFamily="34" charset="-120"/>
               </a:rPr>
-              <a:t>96.3</a:t>
+              <a:t>108.4</a:t>
             </a:r>
             <a:endParaRPr lang="en-US" sz="900" dirty="0"/>
           </a:p>
@@ -14785,7 +15175,7 @@
                 <a:ea typeface="メイリオ" pitchFamily="34" charset="-122"/>
                 <a:cs typeface="メイリオ" pitchFamily="34" charset="-120"/>
               </a:rPr>
-              <a:t>63.3</a:t>
+              <a:t>75.4</a:t>
             </a:r>
             <a:endParaRPr lang="en-US" sz="900" dirty="0"/>
           </a:p>
@@ -14824,7 +15214,7 @@
                 <a:ea typeface="メイリオ" pitchFamily="34" charset="-122"/>
                 <a:cs typeface="メイリオ" pitchFamily="34" charset="-120"/>
               </a:rPr>
-              <a:t>63.3</a:t>
+              <a:t>75.4</a:t>
             </a:r>
             <a:endParaRPr lang="en-US" sz="900" dirty="0"/>
           </a:p>
@@ -14863,7 +15253,7 @@
                 <a:ea typeface="メイリオ" pitchFamily="34" charset="-122"/>
                 <a:cs typeface="メイリオ" pitchFamily="34" charset="-120"/>
               </a:rPr>
-              <a:t>63.3</a:t>
+              <a:t>75.4</a:t>
             </a:r>
             <a:endParaRPr lang="en-US" sz="900" dirty="0"/>
           </a:p>
@@ -14902,7 +15292,7 @@
                 <a:ea typeface="メイリオ" pitchFamily="34" charset="-122"/>
                 <a:cs typeface="メイリオ" pitchFamily="34" charset="-120"/>
               </a:rPr>
-              <a:t>63.3</a:t>
+              <a:t>75.4</a:t>
             </a:r>
             <a:endParaRPr lang="en-US" sz="900" dirty="0"/>
           </a:p>
@@ -14941,7 +15331,7 @@
                 <a:ea typeface="メイリオ" pitchFamily="34" charset="-122"/>
                 <a:cs typeface="メイリオ" pitchFamily="34" charset="-120"/>
               </a:rPr>
-              <a:t>63.3</a:t>
+              <a:t>75.4</a:t>
             </a:r>
             <a:endParaRPr lang="en-US" sz="900" dirty="0"/>
           </a:p>
@@ -14980,7 +15370,7 @@
                 <a:ea typeface="メイリオ" pitchFamily="34" charset="-122"/>
                 <a:cs typeface="メイリオ" pitchFamily="34" charset="-120"/>
               </a:rPr>
-              <a:t>74.3</a:t>
+              <a:t>86.4</a:t>
             </a:r>
             <a:endParaRPr lang="en-US" sz="900" dirty="0"/>
           </a:p>
@@ -15615,7 +16005,7 @@
                 <a:ea typeface="メイリオ" pitchFamily="34" charset="-122"/>
                 <a:cs typeface="メイリオ" pitchFamily="34" charset="-120"/>
               </a:rPr>
-              <a:t>0.8</a:t>
+              <a:t>12.9</a:t>
             </a:r>
             <a:endParaRPr lang="en-US" sz="900" dirty="0"/>
           </a:p>
@@ -15648,13 +16038,13 @@
             <a:r>
               <a:rPr lang="en-US" sz="900" b="1" dirty="0">
                 <a:solidFill>
-                  <a:srgbClr val="6E6E6E"/>
-                </a:solidFill>
-                <a:latin typeface="メイリオ" pitchFamily="34" charset="0"/>
-                <a:ea typeface="メイリオ" pitchFamily="34" charset="-122"/>
-                <a:cs typeface="メイリオ" pitchFamily="34" charset="-120"/>
-              </a:rPr>
-              <a:t>▲3.2</a:t>
+                  <a:srgbClr val="1A1A1A"/>
+                </a:solidFill>
+                <a:latin typeface="メイリオ" pitchFamily="34" charset="0"/>
+                <a:ea typeface="メイリオ" pitchFamily="34" charset="-122"/>
+                <a:cs typeface="メイリオ" pitchFamily="34" charset="-120"/>
+              </a:rPr>
+              <a:t>8.9</a:t>
             </a:r>
             <a:endParaRPr lang="en-US" sz="900" dirty="0"/>
           </a:p>
@@ -15693,7 +16083,7 @@
                 <a:ea typeface="メイリオ" pitchFamily="34" charset="-122"/>
                 <a:cs typeface="メイリオ" pitchFamily="34" charset="-120"/>
               </a:rPr>
-              <a:t>0.8</a:t>
+              <a:t>12.9</a:t>
             </a:r>
             <a:endParaRPr lang="en-US" sz="900" dirty="0"/>
           </a:p>
@@ -15732,7 +16122,7 @@
                 <a:ea typeface="メイリオ" pitchFamily="34" charset="-122"/>
                 <a:cs typeface="メイリオ" pitchFamily="34" charset="-120"/>
               </a:rPr>
-              <a:t>0.8</a:t>
+              <a:t>12.9</a:t>
             </a:r>
             <a:endParaRPr lang="en-US" sz="900" dirty="0"/>
           </a:p>
@@ -15765,13 +16155,13 @@
             <a:r>
               <a:rPr lang="en-US" sz="900" b="1" dirty="0">
                 <a:solidFill>
-                  <a:srgbClr val="6E6E6E"/>
-                </a:solidFill>
-                <a:latin typeface="メイリオ" pitchFamily="34" charset="0"/>
-                <a:ea typeface="メイリオ" pitchFamily="34" charset="-122"/>
-                <a:cs typeface="メイリオ" pitchFamily="34" charset="-120"/>
-              </a:rPr>
-              <a:t>▲1.2</a:t>
+                  <a:srgbClr val="1A1A1A"/>
+                </a:solidFill>
+                <a:latin typeface="メイリオ" pitchFamily="34" charset="0"/>
+                <a:ea typeface="メイリオ" pitchFamily="34" charset="-122"/>
+                <a:cs typeface="メイリオ" pitchFamily="34" charset="-120"/>
+              </a:rPr>
+              <a:t>10.9</a:t>
             </a:r>
             <a:endParaRPr lang="en-US" sz="900" dirty="0"/>
           </a:p>
@@ -15810,7 +16200,7 @@
                 <a:ea typeface="メイリオ" pitchFamily="34" charset="-122"/>
                 <a:cs typeface="メイリオ" pitchFamily="34" charset="-120"/>
               </a:rPr>
-              <a:t>33.8</a:t>
+              <a:t>45.9</a:t>
             </a:r>
             <a:endParaRPr lang="en-US" sz="900" dirty="0"/>
           </a:p>
@@ -15849,7 +16239,7 @@
                 <a:ea typeface="メイリオ" pitchFamily="34" charset="-122"/>
                 <a:cs typeface="メイリオ" pitchFamily="34" charset="-120"/>
               </a:rPr>
-              <a:t>0.8</a:t>
+              <a:t>12.9</a:t>
             </a:r>
             <a:endParaRPr lang="en-US" sz="900" dirty="0"/>
           </a:p>
@@ -15882,13 +16272,13 @@
             <a:r>
               <a:rPr lang="en-US" sz="900" b="1" dirty="0">
                 <a:solidFill>
-                  <a:srgbClr val="6E6E6E"/>
-                </a:solidFill>
-                <a:latin typeface="メイリオ" pitchFamily="34" charset="0"/>
-                <a:ea typeface="メイリオ" pitchFamily="34" charset="-122"/>
-                <a:cs typeface="メイリオ" pitchFamily="34" charset="-120"/>
-              </a:rPr>
-              <a:t>▲1.2</a:t>
+                  <a:srgbClr val="1A1A1A"/>
+                </a:solidFill>
+                <a:latin typeface="メイリオ" pitchFamily="34" charset="0"/>
+                <a:ea typeface="メイリオ" pitchFamily="34" charset="-122"/>
+                <a:cs typeface="メイリオ" pitchFamily="34" charset="-120"/>
+              </a:rPr>
+              <a:t>10.9</a:t>
             </a:r>
             <a:endParaRPr lang="en-US" sz="900" dirty="0"/>
           </a:p>
@@ -15927,7 +16317,7 @@
                 <a:ea typeface="メイリオ" pitchFamily="34" charset="-122"/>
                 <a:cs typeface="メイリオ" pitchFamily="34" charset="-120"/>
               </a:rPr>
-              <a:t>0.8</a:t>
+              <a:t>12.9</a:t>
             </a:r>
             <a:endParaRPr lang="en-US" sz="900" dirty="0"/>
           </a:p>
@@ -15966,7 +16356,7 @@
                 <a:ea typeface="メイリオ" pitchFamily="34" charset="-122"/>
                 <a:cs typeface="メイリオ" pitchFamily="34" charset="-120"/>
               </a:rPr>
-              <a:t>0.8</a:t>
+              <a:t>12.9</a:t>
             </a:r>
             <a:endParaRPr lang="en-US" sz="900" dirty="0"/>
           </a:p>
@@ -15999,13 +16389,13 @@
             <a:r>
               <a:rPr lang="en-US" sz="900" b="1" dirty="0">
                 <a:solidFill>
-                  <a:srgbClr val="6E6E6E"/>
-                </a:solidFill>
-                <a:latin typeface="メイリオ" pitchFamily="34" charset="0"/>
-                <a:ea typeface="メイリオ" pitchFamily="34" charset="-122"/>
-                <a:cs typeface="メイリオ" pitchFamily="34" charset="-120"/>
-              </a:rPr>
-              <a:t>▲1.2</a:t>
+                  <a:srgbClr val="1A1A1A"/>
+                </a:solidFill>
+                <a:latin typeface="メイリオ" pitchFamily="34" charset="0"/>
+                <a:ea typeface="メイリオ" pitchFamily="34" charset="-122"/>
+                <a:cs typeface="メイリオ" pitchFamily="34" charset="-120"/>
+              </a:rPr>
+              <a:t>10.9</a:t>
             </a:r>
             <a:endParaRPr lang="en-US" sz="900" dirty="0"/>
           </a:p>
@@ -16044,7 +16434,7 @@
                 <a:ea typeface="メイリオ" pitchFamily="34" charset="-122"/>
                 <a:cs typeface="メイリオ" pitchFamily="34" charset="-120"/>
               </a:rPr>
-              <a:t>11.8</a:t>
+              <a:t>23.9</a:t>
             </a:r>
             <a:endParaRPr lang="en-US" sz="900" dirty="0"/>
           </a:p>
@@ -16673,13 +17063,13 @@
             <a:r>
               <a:rPr lang="en-US" sz="900" b="1" dirty="0">
                 <a:solidFill>
-                  <a:srgbClr val="6E6E6E"/>
-                </a:solidFill>
-                <a:latin typeface="メイリオ" pitchFamily="34" charset="0"/>
-                <a:ea typeface="メイリオ" pitchFamily="34" charset="-122"/>
-                <a:cs typeface="メイリオ" pitchFamily="34" charset="-120"/>
-              </a:rPr>
-              <a:t>▲1.9</a:t>
+                  <a:srgbClr val="1A1A1A"/>
+                </a:solidFill>
+                <a:latin typeface="メイリオ" pitchFamily="34" charset="0"/>
+                <a:ea typeface="メイリオ" pitchFamily="34" charset="-122"/>
+                <a:cs typeface="メイリオ" pitchFamily="34" charset="-120"/>
+              </a:rPr>
+              <a:t>10.3</a:t>
             </a:r>
             <a:endParaRPr lang="en-US" sz="900" dirty="0"/>
           </a:p>
@@ -16712,13 +17102,13 @@
             <a:r>
               <a:rPr lang="en-US" sz="900" b="1" dirty="0">
                 <a:solidFill>
-                  <a:srgbClr val="6E6E6E"/>
-                </a:solidFill>
-                <a:latin typeface="メイリオ" pitchFamily="34" charset="0"/>
-                <a:ea typeface="メイリオ" pitchFamily="34" charset="-122"/>
-                <a:cs typeface="メイリオ" pitchFamily="34" charset="-120"/>
-              </a:rPr>
-              <a:t>▲5.9</a:t>
+                  <a:srgbClr val="1A1A1A"/>
+                </a:solidFill>
+                <a:latin typeface="メイリオ" pitchFamily="34" charset="0"/>
+                <a:ea typeface="メイリオ" pitchFamily="34" charset="-122"/>
+                <a:cs typeface="メイリオ" pitchFamily="34" charset="-120"/>
+              </a:rPr>
+              <a:t>6.2</a:t>
             </a:r>
             <a:endParaRPr lang="en-US" sz="900" dirty="0"/>
           </a:p>
@@ -16751,13 +17141,13 @@
             <a:r>
               <a:rPr lang="en-US" sz="900" b="1" dirty="0">
                 <a:solidFill>
-                  <a:srgbClr val="6E6E6E"/>
-                </a:solidFill>
-                <a:latin typeface="メイリオ" pitchFamily="34" charset="0"/>
-                <a:ea typeface="メイリオ" pitchFamily="34" charset="-122"/>
-                <a:cs typeface="メイリオ" pitchFamily="34" charset="-120"/>
-              </a:rPr>
-              <a:t>▲1.9</a:t>
+                  <a:srgbClr val="1A1A1A"/>
+                </a:solidFill>
+                <a:latin typeface="メイリオ" pitchFamily="34" charset="0"/>
+                <a:ea typeface="メイリオ" pitchFamily="34" charset="-122"/>
+                <a:cs typeface="メイリオ" pitchFamily="34" charset="-120"/>
+              </a:rPr>
+              <a:t>10.3</a:t>
             </a:r>
             <a:endParaRPr lang="en-US" sz="900" dirty="0"/>
           </a:p>
@@ -16790,13 +17180,13 @@
             <a:r>
               <a:rPr lang="en-US" sz="900" b="1" dirty="0">
                 <a:solidFill>
-                  <a:srgbClr val="6E6E6E"/>
-                </a:solidFill>
-                <a:latin typeface="メイリオ" pitchFamily="34" charset="0"/>
-                <a:ea typeface="メイリオ" pitchFamily="34" charset="-122"/>
-                <a:cs typeface="メイリオ" pitchFamily="34" charset="-120"/>
-              </a:rPr>
-              <a:t>▲1.9</a:t>
+                  <a:srgbClr val="1A1A1A"/>
+                </a:solidFill>
+                <a:latin typeface="メイリオ" pitchFamily="34" charset="0"/>
+                <a:ea typeface="メイリオ" pitchFamily="34" charset="-122"/>
+                <a:cs typeface="メイリオ" pitchFamily="34" charset="-120"/>
+              </a:rPr>
+              <a:t>10.3</a:t>
             </a:r>
             <a:endParaRPr lang="en-US" sz="900" dirty="0"/>
           </a:p>
@@ -16829,13 +17219,13 @@
             <a:r>
               <a:rPr lang="en-US" sz="900" b="1" dirty="0">
                 <a:solidFill>
-                  <a:srgbClr val="6E6E6E"/>
-                </a:solidFill>
-                <a:latin typeface="メイリオ" pitchFamily="34" charset="0"/>
-                <a:ea typeface="メイリオ" pitchFamily="34" charset="-122"/>
-                <a:cs typeface="メイリオ" pitchFamily="34" charset="-120"/>
-              </a:rPr>
-              <a:t>▲3.9</a:t>
+                  <a:srgbClr val="1A1A1A"/>
+                </a:solidFill>
+                <a:latin typeface="メイリオ" pitchFamily="34" charset="0"/>
+                <a:ea typeface="メイリオ" pitchFamily="34" charset="-122"/>
+                <a:cs typeface="メイリオ" pitchFamily="34" charset="-120"/>
+              </a:rPr>
+              <a:t>8.3</a:t>
             </a:r>
             <a:endParaRPr lang="en-US" sz="900" dirty="0"/>
           </a:p>
@@ -16874,7 +17264,7 @@
                 <a:ea typeface="メイリオ" pitchFamily="34" charset="-122"/>
                 <a:cs typeface="メイリオ" pitchFamily="34" charset="-120"/>
               </a:rPr>
-              <a:t>31.1</a:t>
+              <a:t>43.3</a:t>
             </a:r>
             <a:endParaRPr lang="en-US" sz="900" dirty="0"/>
           </a:p>
@@ -16907,13 +17297,13 @@
             <a:r>
               <a:rPr lang="en-US" sz="900" b="1" dirty="0">
                 <a:solidFill>
-                  <a:srgbClr val="6E6E6E"/>
-                </a:solidFill>
-                <a:latin typeface="メイリオ" pitchFamily="34" charset="0"/>
-                <a:ea typeface="メイリオ" pitchFamily="34" charset="-122"/>
-                <a:cs typeface="メイリオ" pitchFamily="34" charset="-120"/>
-              </a:rPr>
-              <a:t>▲1.9</a:t>
+                  <a:srgbClr val="1A1A1A"/>
+                </a:solidFill>
+                <a:latin typeface="メイリオ" pitchFamily="34" charset="0"/>
+                <a:ea typeface="メイリオ" pitchFamily="34" charset="-122"/>
+                <a:cs typeface="メイリオ" pitchFamily="34" charset="-120"/>
+              </a:rPr>
+              <a:t>10.3</a:t>
             </a:r>
             <a:endParaRPr lang="en-US" sz="900" dirty="0"/>
           </a:p>
@@ -16946,13 +17336,13 @@
             <a:r>
               <a:rPr lang="en-US" sz="900" b="1" dirty="0">
                 <a:solidFill>
-                  <a:srgbClr val="6E6E6E"/>
-                </a:solidFill>
-                <a:latin typeface="メイリオ" pitchFamily="34" charset="0"/>
-                <a:ea typeface="メイリオ" pitchFamily="34" charset="-122"/>
-                <a:cs typeface="メイリオ" pitchFamily="34" charset="-120"/>
-              </a:rPr>
-              <a:t>▲3.9</a:t>
+                  <a:srgbClr val="1A1A1A"/>
+                </a:solidFill>
+                <a:latin typeface="メイリオ" pitchFamily="34" charset="0"/>
+                <a:ea typeface="メイリオ" pitchFamily="34" charset="-122"/>
+                <a:cs typeface="メイリオ" pitchFamily="34" charset="-120"/>
+              </a:rPr>
+              <a:t>8.3</a:t>
             </a:r>
             <a:endParaRPr lang="en-US" sz="900" dirty="0"/>
           </a:p>
@@ -16985,13 +17375,13 @@
             <a:r>
               <a:rPr lang="en-US" sz="900" b="1" dirty="0">
                 <a:solidFill>
-                  <a:srgbClr val="6E6E6E"/>
-                </a:solidFill>
-                <a:latin typeface="メイリオ" pitchFamily="34" charset="0"/>
-                <a:ea typeface="メイリオ" pitchFamily="34" charset="-122"/>
-                <a:cs typeface="メイリオ" pitchFamily="34" charset="-120"/>
-              </a:rPr>
-              <a:t>▲1.9</a:t>
+                  <a:srgbClr val="1A1A1A"/>
+                </a:solidFill>
+                <a:latin typeface="メイリオ" pitchFamily="34" charset="0"/>
+                <a:ea typeface="メイリオ" pitchFamily="34" charset="-122"/>
+                <a:cs typeface="メイリオ" pitchFamily="34" charset="-120"/>
+              </a:rPr>
+              <a:t>10.3</a:t>
             </a:r>
             <a:endParaRPr lang="en-US" sz="900" dirty="0"/>
           </a:p>
@@ -17024,13 +17414,13 @@
             <a:r>
               <a:rPr lang="en-US" sz="900" b="1" dirty="0">
                 <a:solidFill>
-                  <a:srgbClr val="6E6E6E"/>
-                </a:solidFill>
-                <a:latin typeface="メイリオ" pitchFamily="34" charset="0"/>
-                <a:ea typeface="メイリオ" pitchFamily="34" charset="-122"/>
-                <a:cs typeface="メイリオ" pitchFamily="34" charset="-120"/>
-              </a:rPr>
-              <a:t>▲1.9</a:t>
+                  <a:srgbClr val="1A1A1A"/>
+                </a:solidFill>
+                <a:latin typeface="メイリオ" pitchFamily="34" charset="0"/>
+                <a:ea typeface="メイリオ" pitchFamily="34" charset="-122"/>
+                <a:cs typeface="メイリオ" pitchFamily="34" charset="-120"/>
+              </a:rPr>
+              <a:t>10.3</a:t>
             </a:r>
             <a:endParaRPr lang="en-US" sz="900" dirty="0"/>
           </a:p>
@@ -17063,13 +17453,13 @@
             <a:r>
               <a:rPr lang="en-US" sz="900" b="1" dirty="0">
                 <a:solidFill>
-                  <a:srgbClr val="6E6E6E"/>
-                </a:solidFill>
-                <a:latin typeface="メイリオ" pitchFamily="34" charset="0"/>
-                <a:ea typeface="メイリオ" pitchFamily="34" charset="-122"/>
-                <a:cs typeface="メイリオ" pitchFamily="34" charset="-120"/>
-              </a:rPr>
-              <a:t>▲3.9</a:t>
+                  <a:srgbClr val="1A1A1A"/>
+                </a:solidFill>
+                <a:latin typeface="メイリオ" pitchFamily="34" charset="0"/>
+                <a:ea typeface="メイリオ" pitchFamily="34" charset="-122"/>
+                <a:cs typeface="メイリオ" pitchFamily="34" charset="-120"/>
+              </a:rPr>
+              <a:t>8.3</a:t>
             </a:r>
             <a:endParaRPr lang="en-US" sz="900" dirty="0"/>
           </a:p>
@@ -17108,7 +17498,7 @@
                 <a:ea typeface="メイリオ" pitchFamily="34" charset="-122"/>
                 <a:cs typeface="メイリオ" pitchFamily="34" charset="-120"/>
               </a:rPr>
-              <a:t>9.1</a:t>
+              <a:t>21.3</a:t>
             </a:r>
             <a:endParaRPr lang="en-US" sz="900" dirty="0"/>
           </a:p>
@@ -17211,7 +17601,7 @@
                 <a:ea typeface="メイリオ" pitchFamily="34" charset="-122"/>
                 <a:cs typeface="メイリオ" pitchFamily="34" charset="-120"/>
               </a:rPr>
-              <a:t>28.1</a:t>
+              <a:t>40.3</a:t>
             </a:r>
             <a:endParaRPr lang="en-US" sz="900" dirty="0"/>
           </a:p>
@@ -17250,7 +17640,7 @@
                 <a:ea typeface="メイリオ" pitchFamily="34" charset="-122"/>
                 <a:cs typeface="メイリオ" pitchFamily="34" charset="-120"/>
               </a:rPr>
-              <a:t>22.2</a:t>
+              <a:t>46.5</a:t>
             </a:r>
             <a:endParaRPr lang="en-US" sz="900" dirty="0"/>
           </a:p>
@@ -17289,7 +17679,7 @@
                 <a:ea typeface="メイリオ" pitchFamily="34" charset="-122"/>
                 <a:cs typeface="メイリオ" pitchFamily="34" charset="-120"/>
               </a:rPr>
-              <a:t>20.3</a:t>
+              <a:t>56.8</a:t>
             </a:r>
             <a:endParaRPr lang="en-US" sz="900" dirty="0"/>
           </a:p>
@@ -17328,7 +17718,7 @@
                 <a:ea typeface="メイリオ" pitchFamily="34" charset="-122"/>
                 <a:cs typeface="メイリオ" pitchFamily="34" charset="-120"/>
               </a:rPr>
-              <a:t>18.5</a:t>
+              <a:t>67.0</a:t>
             </a:r>
             <a:endParaRPr lang="en-US" sz="900" dirty="0"/>
           </a:p>
@@ -17367,7 +17757,7 @@
                 <a:ea typeface="メイリオ" pitchFamily="34" charset="-122"/>
                 <a:cs typeface="メイリオ" pitchFamily="34" charset="-120"/>
               </a:rPr>
-              <a:t>14.6</a:t>
+              <a:t>75.3</a:t>
             </a:r>
             <a:endParaRPr lang="en-US" sz="900" dirty="0"/>
           </a:p>
@@ -17406,7 +17796,7 @@
                 <a:ea typeface="メイリオ" pitchFamily="34" charset="-122"/>
                 <a:cs typeface="メイリオ" pitchFamily="34" charset="-120"/>
               </a:rPr>
-              <a:t>45.7</a:t>
+              <a:t>118.6</a:t>
             </a:r>
             <a:endParaRPr lang="en-US" sz="900" dirty="0"/>
           </a:p>
@@ -17445,7 +17835,7 @@
                 <a:ea typeface="メイリオ" pitchFamily="34" charset="-122"/>
                 <a:cs typeface="メイリオ" pitchFamily="34" charset="-120"/>
               </a:rPr>
-              <a:t>43.8</a:t>
+              <a:t>128.8</a:t>
             </a:r>
             <a:endParaRPr lang="en-US" sz="900" dirty="0"/>
           </a:p>
@@ -17484,7 +17874,7 @@
                 <a:ea typeface="メイリオ" pitchFamily="34" charset="-122"/>
                 <a:cs typeface="メイリオ" pitchFamily="34" charset="-120"/>
               </a:rPr>
-              <a:t>39.9</a:t>
+              <a:t>137.1</a:t>
             </a:r>
             <a:endParaRPr lang="en-US" sz="900" dirty="0"/>
           </a:p>
@@ -17523,7 +17913,7 @@
                 <a:ea typeface="メイリオ" pitchFamily="34" charset="-122"/>
                 <a:cs typeface="メイリオ" pitchFamily="34" charset="-120"/>
               </a:rPr>
-              <a:t>38.0</a:t>
+              <a:t>147.3</a:t>
             </a:r>
             <a:endParaRPr lang="en-US" sz="900" dirty="0"/>
           </a:p>
@@ -17562,7 +17952,7 @@
                 <a:ea typeface="メイリオ" pitchFamily="34" charset="-122"/>
                 <a:cs typeface="メイリオ" pitchFamily="34" charset="-120"/>
               </a:rPr>
-              <a:t>36.2</a:t>
+              <a:t>157.6</a:t>
             </a:r>
             <a:endParaRPr lang="en-US" sz="900" dirty="0"/>
           </a:p>
@@ -17601,7 +17991,7 @@
                 <a:ea typeface="メイリオ" pitchFamily="34" charset="-122"/>
                 <a:cs typeface="メイリオ" pitchFamily="34" charset="-120"/>
               </a:rPr>
-              <a:t>32.3</a:t>
+              <a:t>165.9</a:t>
             </a:r>
             <a:endParaRPr lang="en-US" sz="900" dirty="0"/>
           </a:p>
@@ -17640,7 +18030,7 @@
                 <a:ea typeface="メイリオ" pitchFamily="34" charset="-122"/>
                 <a:cs typeface="メイリオ" pitchFamily="34" charset="-120"/>
               </a:rPr>
-              <a:t>41.4</a:t>
+              <a:t>187.1</a:t>
             </a:r>
             <a:endParaRPr lang="en-US" sz="900" dirty="0"/>
           </a:p>
@@ -17655,11 +18045,11 @@
         <p:spPr>
           <a:xfrm>
             <a:off x="594360" y="4791456"/>
-            <a:ext cx="5349240" cy="1371600"/>
+            <a:ext cx="5349240" cy="1481328"/>
           </a:xfrm>
           <a:prstGeom prst="roundRect">
             <a:avLst>
-              <a:gd name="adj" fmla="val 3333"/>
+              <a:gd name="adj" fmla="val 3086"/>
             </a:avLst>
           </a:prstGeom>
           <a:solidFill>
@@ -17713,7 +18103,7 @@
                 <a:ea typeface="メイリオ" pitchFamily="34" charset="-122"/>
                 <a:cs typeface="メイリオ" pitchFamily="34" charset="-120"/>
               </a:rPr>
-              <a:t>ボトルネックは2027年2月</a:t>
+              <a:t>最も薄いのは期首直後</a:t>
             </a:r>
             <a:endParaRPr lang="en-US" sz="1200" dirty="0"/>
           </a:p>
@@ -17728,7 +18118,7 @@
         <p:spPr>
           <a:xfrm>
             <a:off x="868680" y="5294376"/>
-            <a:ext cx="4800600" cy="868680"/>
+            <a:ext cx="4800600" cy="960120"/>
           </a:xfrm>
           <a:prstGeom prst="rect">
             <a:avLst/>
@@ -17752,7 +18142,7 @@
                 <a:ea typeface="メイリオ" pitchFamily="34" charset="-122"/>
                 <a:cs typeface="メイリオ" pitchFamily="34" charset="-120"/>
               </a:rPr>
-              <a:t>11月にFY2026分の消費税確定納付3.6百万円、2月に当期の中間納付2.0百万円。3月の一時収益44百万円が入るまでが最も薄い期間ですが、最低14.6百万円を確保します。</a:t>
+              <a:t>期首30.0百万円に対し、期中最低は2026/10末の40.3百万円。11月にFY2026分の消費税確定納付3.6百万円、2・5・8月に中間納付2.0百万円を織り込んでも、以降は毎月プラスで積み上がり期末187.1百万円。</a:t>
             </a:r>
             <a:endParaRPr lang="en-US" sz="1050" dirty="0"/>
           </a:p>
@@ -17953,7 +18343,7 @@
                 <a:ea typeface="メイリオ" pitchFamily="34" charset="-122"/>
                 <a:cs typeface="メイリオ" pitchFamily="34" charset="-120"/>
               </a:rPr>
-              <a:t>A. プランC（本線）</a:t>
+              <a:t>A. プランD（本線）</a:t>
             </a:r>
             <a:endParaRPr lang="en-US" sz="850" dirty="0"/>
           </a:p>
@@ -17992,7 +18382,7 @@
                 <a:ea typeface="メイリオ" pitchFamily="34" charset="-122"/>
                 <a:cs typeface="メイリオ" pitchFamily="34" charset="-120"/>
               </a:rPr>
-              <a:t>＋41.4</a:t>
+              <a:t>＋187.1</a:t>
             </a:r>
             <a:endParaRPr lang="en-US" sz="850" dirty="0"/>
           </a:p>
@@ -18031,7 +18421,7 @@
                 <a:ea typeface="メイリオ" pitchFamily="34" charset="-122"/>
                 <a:cs typeface="メイリオ" pitchFamily="34" charset="-120"/>
               </a:rPr>
-              <a:t>＋14.6</a:t>
+              <a:t>＋40.3</a:t>
             </a:r>
             <a:endParaRPr lang="en-US" sz="850" dirty="0"/>
           </a:p>
@@ -18134,7 +18524,7 @@
                 <a:ea typeface="メイリオ" pitchFamily="34" charset="-122"/>
                 <a:cs typeface="メイリオ" pitchFamily="34" charset="-120"/>
               </a:rPr>
-              <a:t>＋38.6</a:t>
+              <a:t>＋177.8</a:t>
             </a:r>
             <a:endParaRPr lang="en-US" sz="850" dirty="0"/>
           </a:p>
@@ -18173,7 +18563,7 @@
                 <a:ea typeface="メイリオ" pitchFamily="34" charset="-122"/>
                 <a:cs typeface="メイリオ" pitchFamily="34" charset="-120"/>
               </a:rPr>
-              <a:t>＋11.8</a:t>
+              <a:t>＋31.0</a:t>
             </a:r>
             <a:endParaRPr lang="en-US" sz="850" dirty="0"/>
           </a:p>
@@ -18270,13 +18660,13 @@
             <a:r>
               <a:rPr lang="en-US" sz="850" dirty="0">
                 <a:solidFill>
-                  <a:srgbClr val="6E6E6E"/>
-                </a:solidFill>
-                <a:latin typeface="メイリオ" pitchFamily="34" charset="0"/>
-                <a:ea typeface="メイリオ" pitchFamily="34" charset="-122"/>
-                <a:cs typeface="メイリオ" pitchFamily="34" charset="-120"/>
-              </a:rPr>
-              <a:t>▲2.6</a:t>
+                  <a:srgbClr val="1A1A1A"/>
+                </a:solidFill>
+                <a:latin typeface="メイリオ" pitchFamily="34" charset="0"/>
+                <a:ea typeface="メイリオ" pitchFamily="34" charset="-122"/>
+                <a:cs typeface="メイリオ" pitchFamily="34" charset="-120"/>
+              </a:rPr>
+              <a:t>＋143.1</a:t>
             </a:r>
             <a:endParaRPr lang="en-US" sz="850" dirty="0"/>
           </a:p>
@@ -18315,7 +18705,7 @@
                 <a:ea typeface="メイリオ" pitchFamily="34" charset="-122"/>
                 <a:cs typeface="メイリオ" pitchFamily="34" charset="-120"/>
               </a:rPr>
-              <a:t>▲29.4</a:t>
+              <a:t>▲3.7</a:t>
             </a:r>
             <a:endParaRPr lang="en-US" sz="850" dirty="0"/>
           </a:p>
@@ -18379,7 +18769,7 @@
                 <a:ea typeface="メイリオ" pitchFamily="34" charset="-122"/>
                 <a:cs typeface="メイリオ" pitchFamily="34" charset="-120"/>
               </a:rPr>
-              <a:t>D. 差額売上208.9百万円が未達</a:t>
+              <a:t>D. 差額売上341.4百万円が未達（プランB）</a:t>
             </a:r>
             <a:endParaRPr lang="en-US" sz="850" dirty="0"/>
           </a:p>
@@ -18418,7 +18808,7 @@
                 <a:ea typeface="メイリオ" pitchFamily="34" charset="-122"/>
                 <a:cs typeface="メイリオ" pitchFamily="34" charset="-120"/>
               </a:rPr>
-              <a:t>▲153.4</a:t>
+              <a:t>▲188.4</a:t>
             </a:r>
             <a:endParaRPr lang="en-US" sz="850" dirty="0"/>
           </a:p>
@@ -18457,7 +18847,7 @@
                 <a:ea typeface="メイリオ" pitchFamily="34" charset="-122"/>
                 <a:cs typeface="メイリオ" pitchFamily="34" charset="-120"/>
               </a:rPr>
-              <a:t>▲180.2</a:t>
+              <a:t>▲335.3</a:t>
             </a:r>
             <a:endParaRPr lang="en-US" sz="850" dirty="0"/>
           </a:p>
@@ -20681,7 +21071,7 @@
                 <a:ea typeface="メイリオ" pitchFamily="34" charset="-122"/>
                 <a:cs typeface="メイリオ" pitchFamily="34" charset="-120"/>
               </a:rPr>
-              <a:t>プランCの蓋然性 － 過去実績が裏付けています</a:t>
+              <a:t>C〜D が本命レンジ － トラックレコードが裏付けます</a:t>
             </a:r>
             <a:endParaRPr lang="en-US" sz="2900" dirty="0"/>
           </a:p>
@@ -20720,7 +21110,7 @@
                 <a:ea typeface="メイリオ" pitchFamily="34" charset="-122"/>
                 <a:cs typeface="メイリオ" pitchFamily="34" charset="-120"/>
               </a:rPr>
-              <a:t>売上は前期・今期と同水準。上振れを織り込まず、粗利率も過去実績の平均に落としています。</a:t>
+              <a:t>Bは何もしなくても届く下限。過去2期の売上実績に照らすと、C〜Dの蓋然性が最も高いと考えています。</a:t>
             </a:r>
             <a:endParaRPr lang="en-US" sz="1250" dirty="0"/>
           </a:p>
@@ -20935,7 +21325,7 @@
                 <a:ea typeface="メイリオ" pitchFamily="34" charset="-122"/>
                 <a:cs typeface="メイリオ" pitchFamily="34" charset="-120"/>
               </a:rPr>
-              <a:t>プランC/実績</a:t>
+              <a:t>既存事業／2期平均</a:t>
             </a:r>
             <a:endParaRPr lang="en-US" sz="950" dirty="0"/>
           </a:p>
@@ -20950,7 +21340,7 @@
         <p:spPr>
           <a:xfrm>
             <a:off x="594360" y="1901952"/>
-            <a:ext cx="10058400" cy="475488"/>
+            <a:ext cx="10058400" cy="384048"/>
           </a:xfrm>
           <a:prstGeom prst="rect">
             <a:avLst/>
@@ -20975,7 +21365,7 @@
         <p:spPr>
           <a:xfrm>
             <a:off x="704088" y="1901952"/>
-            <a:ext cx="2432304" cy="475488"/>
+            <a:ext cx="2432304" cy="384048"/>
           </a:xfrm>
           <a:prstGeom prst="rect">
             <a:avLst/>
@@ -21014,7 +21404,7 @@
         <p:spPr>
           <a:xfrm>
             <a:off x="3355848" y="1901952"/>
-            <a:ext cx="1792224" cy="475488"/>
+            <a:ext cx="1792224" cy="384048"/>
           </a:xfrm>
           <a:prstGeom prst="rect">
             <a:avLst/>
@@ -21053,7 +21443,7 @@
         <p:spPr>
           <a:xfrm>
             <a:off x="5367528" y="1901952"/>
-            <a:ext cx="1883664" cy="475488"/>
+            <a:ext cx="1883664" cy="384048"/>
           </a:xfrm>
           <a:prstGeom prst="rect">
             <a:avLst/>
@@ -21092,7 +21482,7 @@
         <p:spPr>
           <a:xfrm>
             <a:off x="7470648" y="1901952"/>
-            <a:ext cx="1243584" cy="475488"/>
+            <a:ext cx="1243584" cy="384048"/>
           </a:xfrm>
           <a:prstGeom prst="rect">
             <a:avLst/>
@@ -21131,7 +21521,7 @@
         <p:spPr>
           <a:xfrm>
             <a:off x="8933688" y="1901952"/>
-            <a:ext cx="1609344" cy="475488"/>
+            <a:ext cx="1609344" cy="384048"/>
           </a:xfrm>
           <a:prstGeom prst="rect">
             <a:avLst/>
@@ -21169,8 +21559,8 @@
         </p:nvSpPr>
         <p:spPr>
           <a:xfrm>
-            <a:off x="594360" y="2377440"/>
-            <a:ext cx="10058400" cy="475488"/>
+            <a:off x="594360" y="2286000"/>
+            <a:ext cx="10058400" cy="384048"/>
           </a:xfrm>
           <a:prstGeom prst="rect">
             <a:avLst/>
@@ -21194,8 +21584,8 @@
         </p:nvSpPr>
         <p:spPr>
           <a:xfrm>
-            <a:off x="704088" y="2377440"/>
-            <a:ext cx="2432304" cy="475488"/>
+            <a:off x="704088" y="2286000"/>
+            <a:ext cx="2432304" cy="384048"/>
           </a:xfrm>
           <a:prstGeom prst="rect">
             <a:avLst/>
@@ -21233,8 +21623,8 @@
         </p:nvSpPr>
         <p:spPr>
           <a:xfrm>
-            <a:off x="3355848" y="2377440"/>
-            <a:ext cx="1792224" cy="475488"/>
+            <a:off x="3355848" y="2286000"/>
+            <a:ext cx="1792224" cy="384048"/>
           </a:xfrm>
           <a:prstGeom prst="rect">
             <a:avLst/>
@@ -21272,8 +21662,8 @@
         </p:nvSpPr>
         <p:spPr>
           <a:xfrm>
-            <a:off x="5367528" y="2377440"/>
-            <a:ext cx="1883664" cy="475488"/>
+            <a:off x="5367528" y="2286000"/>
+            <a:ext cx="1883664" cy="384048"/>
           </a:xfrm>
           <a:prstGeom prst="rect">
             <a:avLst/>
@@ -21311,8 +21701,8 @@
         </p:nvSpPr>
         <p:spPr>
           <a:xfrm>
-            <a:off x="7470648" y="2377440"/>
-            <a:ext cx="1243584" cy="475488"/>
+            <a:off x="7470648" y="2286000"/>
+            <a:ext cx="1243584" cy="384048"/>
           </a:xfrm>
           <a:prstGeom prst="rect">
             <a:avLst/>
@@ -21350,8 +21740,8 @@
         </p:nvSpPr>
         <p:spPr>
           <a:xfrm>
-            <a:off x="8933688" y="2377440"/>
-            <a:ext cx="1609344" cy="475488"/>
+            <a:off x="8933688" y="2286000"/>
+            <a:ext cx="1609344" cy="384048"/>
           </a:xfrm>
           <a:prstGeom prst="rect">
             <a:avLst/>
@@ -21375,7 +21765,7 @@
                 <a:ea typeface="メイリオ" pitchFamily="34" charset="-122"/>
                 <a:cs typeface="メイリオ" pitchFamily="34" charset="-120"/>
               </a:rPr>
-              <a:t>97.0%</a:t>
+              <a:t>－</a:t>
             </a:r>
             <a:endParaRPr lang="en-US" sz="1050" dirty="0"/>
           </a:p>
@@ -21389,8 +21779,8 @@
         </p:nvSpPr>
         <p:spPr>
           <a:xfrm>
-            <a:off x="594360" y="2852928"/>
-            <a:ext cx="10058400" cy="475488"/>
+            <a:off x="594360" y="2670048"/>
+            <a:ext cx="10058400" cy="384048"/>
           </a:xfrm>
           <a:prstGeom prst="rect">
             <a:avLst/>
@@ -21414,8 +21804,8 @@
         </p:nvSpPr>
         <p:spPr>
           <a:xfrm>
-            <a:off x="704088" y="2852928"/>
-            <a:ext cx="2432304" cy="475488"/>
+            <a:off x="704088" y="2670048"/>
+            <a:ext cx="2432304" cy="384048"/>
           </a:xfrm>
           <a:prstGeom prst="rect">
             <a:avLst/>
@@ -21453,8 +21843,8 @@
         </p:nvSpPr>
         <p:spPr>
           <a:xfrm>
-            <a:off x="3355848" y="2852928"/>
-            <a:ext cx="1792224" cy="475488"/>
+            <a:off x="3355848" y="2670048"/>
+            <a:ext cx="1792224" cy="384048"/>
           </a:xfrm>
           <a:prstGeom prst="rect">
             <a:avLst/>
@@ -21492,8 +21882,8 @@
         </p:nvSpPr>
         <p:spPr>
           <a:xfrm>
-            <a:off x="5367528" y="2852928"/>
-            <a:ext cx="1883664" cy="475488"/>
+            <a:off x="5367528" y="2670048"/>
+            <a:ext cx="1883664" cy="384048"/>
           </a:xfrm>
           <a:prstGeom prst="rect">
             <a:avLst/>
@@ -21531,8 +21921,8 @@
         </p:nvSpPr>
         <p:spPr>
           <a:xfrm>
-            <a:off x="7470648" y="2852928"/>
-            <a:ext cx="1243584" cy="475488"/>
+            <a:off x="7470648" y="2670048"/>
+            <a:ext cx="1243584" cy="384048"/>
           </a:xfrm>
           <a:prstGeom prst="rect">
             <a:avLst/>
@@ -21570,8 +21960,8 @@
         </p:nvSpPr>
         <p:spPr>
           <a:xfrm>
-            <a:off x="8933688" y="2852928"/>
-            <a:ext cx="1609344" cy="475488"/>
+            <a:off x="8933688" y="2670048"/>
+            <a:ext cx="1609344" cy="384048"/>
           </a:xfrm>
           <a:prstGeom prst="rect">
             <a:avLst/>
@@ -21595,7 +21985,7 @@
                 <a:ea typeface="メイリオ" pitchFamily="34" charset="-122"/>
                 <a:cs typeface="メイリオ" pitchFamily="34" charset="-120"/>
               </a:rPr>
-              <a:t>103.2%</a:t>
+              <a:t>－</a:t>
             </a:r>
             <a:endParaRPr lang="en-US" sz="1050" dirty="0"/>
           </a:p>
@@ -21609,8 +21999,8 @@
         </p:nvSpPr>
         <p:spPr>
           <a:xfrm>
-            <a:off x="594360" y="3328416"/>
-            <a:ext cx="10058400" cy="475488"/>
+            <a:off x="594360" y="3054096"/>
+            <a:ext cx="10058400" cy="384048"/>
           </a:xfrm>
           <a:prstGeom prst="rect">
             <a:avLst/>
@@ -21634,8 +22024,8 @@
         </p:nvSpPr>
         <p:spPr>
           <a:xfrm>
-            <a:off x="704088" y="3328416"/>
-            <a:ext cx="2432304" cy="475488"/>
+            <a:off x="704088" y="3054096"/>
+            <a:ext cx="2432304" cy="384048"/>
           </a:xfrm>
           <a:prstGeom prst="rect">
             <a:avLst/>
@@ -21659,7 +22049,7 @@
                 <a:ea typeface="メイリオ" pitchFamily="34" charset="-122"/>
                 <a:cs typeface="メイリオ" pitchFamily="34" charset="-120"/>
               </a:rPr>
-              <a:t>プランC（FY2027）</a:t>
+              <a:t>プランC（既存598.0）</a:t>
             </a:r>
             <a:endParaRPr lang="en-US" sz="1050" dirty="0"/>
           </a:p>
@@ -21673,8 +22063,8 @@
         </p:nvSpPr>
         <p:spPr>
           <a:xfrm>
-            <a:off x="3355848" y="3328416"/>
-            <a:ext cx="1792224" cy="475488"/>
+            <a:off x="3355848" y="3054096"/>
+            <a:ext cx="1792224" cy="384048"/>
           </a:xfrm>
           <a:prstGeom prst="rect">
             <a:avLst/>
@@ -21712,8 +22102,8 @@
         </p:nvSpPr>
         <p:spPr>
           <a:xfrm>
-            <a:off x="5367528" y="3328416"/>
-            <a:ext cx="1883664" cy="475488"/>
+            <a:off x="5367528" y="3054096"/>
+            <a:ext cx="1883664" cy="384048"/>
           </a:xfrm>
           <a:prstGeom prst="rect">
             <a:avLst/>
@@ -21751,8 +22141,8 @@
         </p:nvSpPr>
         <p:spPr>
           <a:xfrm>
-            <a:off x="7470648" y="3328416"/>
-            <a:ext cx="1243584" cy="475488"/>
+            <a:off x="7470648" y="3054096"/>
+            <a:ext cx="1243584" cy="384048"/>
           </a:xfrm>
           <a:prstGeom prst="rect">
             <a:avLst/>
@@ -21790,8 +22180,8 @@
         </p:nvSpPr>
         <p:spPr>
           <a:xfrm>
-            <a:off x="8933688" y="3328416"/>
-            <a:ext cx="1609344" cy="475488"/>
+            <a:off x="8933688" y="3054096"/>
+            <a:ext cx="1609344" cy="384048"/>
           </a:xfrm>
           <a:prstGeom prst="rect">
             <a:avLst/>
@@ -21815,6 +22205,226 @@
                 <a:ea typeface="メイリオ" pitchFamily="34" charset="-122"/>
                 <a:cs typeface="メイリオ" pitchFamily="34" charset="-120"/>
               </a:rPr>
+              <a:t>81.9%</a:t>
+            </a:r>
+            <a:endParaRPr lang="en-US" sz="1050" dirty="0"/>
+          </a:p>
+        </p:txBody>
+      </p:sp>
+      <p:sp>
+        <p:nvSpPr>
+          <p:cNvPr id="34" name="Shape 32"/>
+          <p:cNvSpPr/>
+          <p:nvPr/>
+        </p:nvSpPr>
+        <p:spPr>
+          <a:xfrm>
+            <a:off x="594360" y="3438144"/>
+            <a:ext cx="10058400" cy="384048"/>
+          </a:xfrm>
+          <a:prstGeom prst="rect">
+            <a:avLst/>
+          </a:prstGeom>
+          <a:solidFill>
+            <a:srgbClr val="FAF3E2"/>
+          </a:solidFill>
+          <a:ln w="6350">
+            <a:solidFill>
+              <a:srgbClr val="E2E0DC"/>
+            </a:solidFill>
+            <a:prstDash val="solid"/>
+          </a:ln>
+        </p:spPr>
+      </p:sp>
+      <p:sp>
+        <p:nvSpPr>
+          <p:cNvPr id="35" name="Text 33"/>
+          <p:cNvSpPr/>
+          <p:nvPr/>
+        </p:nvSpPr>
+        <p:spPr>
+          <a:xfrm>
+            <a:off x="704088" y="3438144"/>
+            <a:ext cx="2432304" cy="384048"/>
+          </a:xfrm>
+          <a:prstGeom prst="rect">
+            <a:avLst/>
+          </a:prstGeom>
+          <a:noFill/>
+          <a:ln/>
+        </p:spPr>
+        <p:txBody>
+          <a:bodyPr wrap="square" lIns="0" tIns="0" rIns="0" bIns="0" rtlCol="0" anchor="ctr"/>
+          <a:lstStyle/>
+          <a:p>
+            <a:pPr algn="l" indent="0" marL="0">
+              <a:buNone/>
+            </a:pPr>
+            <a:r>
+              <a:rPr lang="en-US" sz="1050" b="1" dirty="0">
+                <a:solidFill>
+                  <a:srgbClr val="1A1A1A"/>
+                </a:solidFill>
+                <a:latin typeface="メイリオ" pitchFamily="34" charset="0"/>
+                <a:ea typeface="メイリオ" pitchFamily="34" charset="-122"/>
+                <a:cs typeface="メイリオ" pitchFamily="34" charset="-120"/>
+              </a:rPr>
+              <a:t>プランD（既存730.5）</a:t>
+            </a:r>
+            <a:endParaRPr lang="en-US" sz="1050" dirty="0"/>
+          </a:p>
+        </p:txBody>
+      </p:sp>
+      <p:sp>
+        <p:nvSpPr>
+          <p:cNvPr id="36" name="Text 34"/>
+          <p:cNvSpPr/>
+          <p:nvPr/>
+        </p:nvSpPr>
+        <p:spPr>
+          <a:xfrm>
+            <a:off x="3355848" y="3438144"/>
+            <a:ext cx="1792224" cy="384048"/>
+          </a:xfrm>
+          <a:prstGeom prst="rect">
+            <a:avLst/>
+          </a:prstGeom>
+          <a:noFill/>
+          <a:ln/>
+        </p:spPr>
+        <p:txBody>
+          <a:bodyPr wrap="square" lIns="0" tIns="0" rIns="0" bIns="0" rtlCol="0" anchor="ctr"/>
+          <a:lstStyle/>
+          <a:p>
+            <a:pPr algn="r" indent="0" marL="0">
+              <a:buNone/>
+            </a:pPr>
+            <a:r>
+              <a:rPr lang="en-US" sz="1050" b="1" dirty="0">
+                <a:solidFill>
+                  <a:srgbClr val="1A1A1A"/>
+                </a:solidFill>
+                <a:latin typeface="メイリオ" pitchFamily="34" charset="0"/>
+                <a:ea typeface="メイリオ" pitchFamily="34" charset="-122"/>
+                <a:cs typeface="メイリオ" pitchFamily="34" charset="-120"/>
+              </a:rPr>
+              <a:t>863.0</a:t>
+            </a:r>
+            <a:endParaRPr lang="en-US" sz="1050" dirty="0"/>
+          </a:p>
+        </p:txBody>
+      </p:sp>
+      <p:sp>
+        <p:nvSpPr>
+          <p:cNvPr id="37" name="Text 35"/>
+          <p:cNvSpPr/>
+          <p:nvPr/>
+        </p:nvSpPr>
+        <p:spPr>
+          <a:xfrm>
+            <a:off x="5367528" y="3438144"/>
+            <a:ext cx="1883664" cy="384048"/>
+          </a:xfrm>
+          <a:prstGeom prst="rect">
+            <a:avLst/>
+          </a:prstGeom>
+          <a:noFill/>
+          <a:ln/>
+        </p:spPr>
+        <p:txBody>
+          <a:bodyPr wrap="square" lIns="0" tIns="0" rIns="0" bIns="0" rtlCol="0" anchor="ctr"/>
+          <a:lstStyle/>
+          <a:p>
+            <a:pPr algn="r" indent="0" marL="0">
+              <a:buNone/>
+            </a:pPr>
+            <a:r>
+              <a:rPr lang="en-US" sz="1050" b="1" dirty="0">
+                <a:solidFill>
+                  <a:srgbClr val="1A1A1A"/>
+                </a:solidFill>
+                <a:latin typeface="メイリオ" pitchFamily="34" charset="0"/>
+                <a:ea typeface="メイリオ" pitchFamily="34" charset="-122"/>
+                <a:cs typeface="メイリオ" pitchFamily="34" charset="-120"/>
+              </a:rPr>
+              <a:t>435.5</a:t>
+            </a:r>
+            <a:endParaRPr lang="en-US" sz="1050" dirty="0"/>
+          </a:p>
+        </p:txBody>
+      </p:sp>
+      <p:sp>
+        <p:nvSpPr>
+          <p:cNvPr id="38" name="Text 36"/>
+          <p:cNvSpPr/>
+          <p:nvPr/>
+        </p:nvSpPr>
+        <p:spPr>
+          <a:xfrm>
+            <a:off x="7470648" y="3438144"/>
+            <a:ext cx="1243584" cy="384048"/>
+          </a:xfrm>
+          <a:prstGeom prst="rect">
+            <a:avLst/>
+          </a:prstGeom>
+          <a:noFill/>
+          <a:ln/>
+        </p:spPr>
+        <p:txBody>
+          <a:bodyPr wrap="square" lIns="0" tIns="0" rIns="0" bIns="0" rtlCol="0" anchor="ctr"/>
+          <a:lstStyle/>
+          <a:p>
+            <a:pPr algn="r" indent="0" marL="0">
+              <a:buNone/>
+            </a:pPr>
+            <a:r>
+              <a:rPr lang="en-US" sz="1050" b="1" dirty="0">
+                <a:solidFill>
+                  <a:srgbClr val="1A1A1A"/>
+                </a:solidFill>
+                <a:latin typeface="メイリオ" pitchFamily="34" charset="0"/>
+                <a:ea typeface="メイリオ" pitchFamily="34" charset="-122"/>
+                <a:cs typeface="メイリオ" pitchFamily="34" charset="-120"/>
+              </a:rPr>
+              <a:t>50.5%</a:t>
+            </a:r>
+            <a:endParaRPr lang="en-US" sz="1050" dirty="0"/>
+          </a:p>
+        </p:txBody>
+      </p:sp>
+      <p:sp>
+        <p:nvSpPr>
+          <p:cNvPr id="39" name="Text 37"/>
+          <p:cNvSpPr/>
+          <p:nvPr/>
+        </p:nvSpPr>
+        <p:spPr>
+          <a:xfrm>
+            <a:off x="8933688" y="3438144"/>
+            <a:ext cx="1609344" cy="384048"/>
+          </a:xfrm>
+          <a:prstGeom prst="rect">
+            <a:avLst/>
+          </a:prstGeom>
+          <a:noFill/>
+          <a:ln/>
+        </p:spPr>
+        <p:txBody>
+          <a:bodyPr wrap="square" lIns="0" tIns="0" rIns="0" bIns="0" rtlCol="0" anchor="ctr"/>
+          <a:lstStyle/>
+          <a:p>
+            <a:pPr algn="r" indent="0" marL="0">
+              <a:buNone/>
+            </a:pPr>
+            <a:r>
+              <a:rPr lang="en-US" sz="1050" b="1" dirty="0">
+                <a:solidFill>
+                  <a:srgbClr val="1A1A1A"/>
+                </a:solidFill>
+                <a:latin typeface="メイリオ" pitchFamily="34" charset="0"/>
+                <a:ea typeface="メイリオ" pitchFamily="34" charset="-122"/>
+                <a:cs typeface="メイリオ" pitchFamily="34" charset="-120"/>
+              </a:rPr>
               <a:t>100.0%</a:t>
             </a:r>
             <a:endParaRPr lang="en-US" sz="1050" dirty="0"/>
@@ -21823,18 +22433,18 @@
       </p:sp>
       <p:sp>
         <p:nvSpPr>
-          <p:cNvPr id="34" name="Shape 32"/>
-          <p:cNvSpPr/>
-          <p:nvPr/>
-        </p:nvSpPr>
-        <p:spPr>
-          <a:xfrm>
-            <a:off x="594360" y="3794760"/>
-            <a:ext cx="5349240" cy="1417320"/>
+          <p:cNvPr id="40" name="Shape 38"/>
+          <p:cNvSpPr/>
+          <p:nvPr/>
+        </p:nvSpPr>
+        <p:spPr>
+          <a:xfrm>
+            <a:off x="594360" y="4041648"/>
+            <a:ext cx="5349240" cy="1234440"/>
           </a:xfrm>
           <a:prstGeom prst="roundRect">
             <a:avLst>
-              <a:gd name="adj" fmla="val 3226"/>
+              <a:gd name="adj" fmla="val 3704"/>
             </a:avLst>
           </a:prstGeom>
           <a:solidFill>
@@ -21857,13 +22467,13 @@
       </p:sp>
       <p:sp>
         <p:nvSpPr>
-          <p:cNvPr id="35" name="Text 33"/>
-          <p:cNvSpPr/>
-          <p:nvPr/>
-        </p:nvSpPr>
-        <p:spPr>
-          <a:xfrm>
-            <a:off x="868680" y="3959352"/>
+          <p:cNvPr id="41" name="Text 39"/>
+          <p:cNvSpPr/>
+          <p:nvPr/>
+        </p:nvSpPr>
+        <p:spPr>
+          <a:xfrm>
+            <a:off x="868680" y="4187952"/>
             <a:ext cx="4800600" cy="292608"/>
           </a:xfrm>
           <a:prstGeom prst="rect">
@@ -21888,7 +22498,7 @@
                 <a:ea typeface="メイリオ" pitchFamily="34" charset="-122"/>
                 <a:cs typeface="メイリオ" pitchFamily="34" charset="-120"/>
               </a:rPr>
-              <a:t>売上は過去2期と同水準</a:t>
+              <a:t>B は下限、D は目指す姿</a:t>
             </a:r>
             <a:endParaRPr lang="en-US" sz="1200" dirty="0"/>
           </a:p>
@@ -21896,14 +22506,14 @@
       </p:sp>
       <p:sp>
         <p:nvSpPr>
-          <p:cNvPr id="36" name="Text 34"/>
-          <p:cNvSpPr/>
-          <p:nvPr/>
-        </p:nvSpPr>
-        <p:spPr>
-          <a:xfrm>
-            <a:off x="868680" y="4297680"/>
-            <a:ext cx="4800600" cy="868680"/>
+          <p:cNvPr id="42" name="Text 40"/>
+          <p:cNvSpPr/>
+          <p:nvPr/>
+        </p:nvSpPr>
+        <p:spPr>
+          <a:xfrm>
+            <a:off x="868680" y="4498848"/>
+            <a:ext cx="4800600" cy="731520"/>
           </a:xfrm>
           <a:prstGeom prst="rect">
             <a:avLst/>
@@ -21919,7 +22529,7 @@
               <a:buNone/>
             </a:pPr>
             <a:r>
-              <a:rPr lang="en-US" sz="1100" dirty="0">
+              <a:rPr lang="en-US" sz="1050" dirty="0">
                 <a:solidFill>
                   <a:srgbClr val="FFFFFF"/>
                 </a:solidFill>
@@ -21927,26 +22537,26 @@
                 <a:ea typeface="メイリオ" pitchFamily="34" charset="-122"/>
                 <a:cs typeface="メイリオ" pitchFamily="34" charset="-120"/>
               </a:rPr>
-              <a:t>プランCの730.5百万円は、FY2025実績752.9とFY2026見込708.2のちょうど平均。新たな成長を前提にせず、過去2期に到達した売上規模をそのまま置いています。</a:t>
-            </a:r>
-            <a:endParaRPr lang="en-US" sz="1100" dirty="0"/>
-          </a:p>
-        </p:txBody>
-      </p:sp>
-      <p:sp>
-        <p:nvSpPr>
-          <p:cNvPr id="37" name="Shape 35"/>
-          <p:cNvSpPr/>
-          <p:nvPr/>
-        </p:nvSpPr>
-        <p:spPr>
-          <a:xfrm>
-            <a:off x="6217920" y="3794760"/>
-            <a:ext cx="5349240" cy="1417320"/>
+              <a:t>Bは4-6月実績の横ばいに契約分を足しただけの下限。Dの既存事業730.5百万円は過去2期の平均そのもので、新たな成長を前提にしていません。当然これ以上を狙います。</a:t>
+            </a:r>
+            <a:endParaRPr lang="en-US" sz="1050" dirty="0"/>
+          </a:p>
+        </p:txBody>
+      </p:sp>
+      <p:sp>
+        <p:nvSpPr>
+          <p:cNvPr id="43" name="Shape 41"/>
+          <p:cNvSpPr/>
+          <p:nvPr/>
+        </p:nvSpPr>
+        <p:spPr>
+          <a:xfrm>
+            <a:off x="6217920" y="4041648"/>
+            <a:ext cx="5349240" cy="1234440"/>
           </a:xfrm>
           <a:prstGeom prst="roundRect">
             <a:avLst>
-              <a:gd name="adj" fmla="val 3226"/>
+              <a:gd name="adj" fmla="val 3704"/>
             </a:avLst>
           </a:prstGeom>
           <a:solidFill>
@@ -21969,13 +22579,13 @@
       </p:sp>
       <p:sp>
         <p:nvSpPr>
-          <p:cNvPr id="38" name="Text 36"/>
-          <p:cNvSpPr/>
-          <p:nvPr/>
-        </p:nvSpPr>
-        <p:spPr>
-          <a:xfrm>
-            <a:off x="6492240" y="3959352"/>
+          <p:cNvPr id="44" name="Text 42"/>
+          <p:cNvSpPr/>
+          <p:nvPr/>
+        </p:nvSpPr>
+        <p:spPr>
+          <a:xfrm>
+            <a:off x="6492240" y="4187952"/>
             <a:ext cx="4800600" cy="292608"/>
           </a:xfrm>
           <a:prstGeom prst="rect">
@@ -22000,7 +22610,7 @@
                 <a:ea typeface="メイリオ" pitchFamily="34" charset="-122"/>
                 <a:cs typeface="メイリオ" pitchFamily="34" charset="-120"/>
               </a:rPr>
-              <a:t>差額分の粗利率は保守的に30%</a:t>
+              <a:t>C〜D の蓋然性が最も高い</a:t>
             </a:r>
             <a:endParaRPr lang="en-US" sz="1200" dirty="0"/>
           </a:p>
@@ -22008,14 +22618,14 @@
       </p:sp>
       <p:sp>
         <p:nvSpPr>
-          <p:cNvPr id="39" name="Text 37"/>
-          <p:cNvSpPr/>
-          <p:nvPr/>
-        </p:nvSpPr>
-        <p:spPr>
-          <a:xfrm>
-            <a:off x="6492240" y="4297680"/>
-            <a:ext cx="4800600" cy="868680"/>
+          <p:cNvPr id="45" name="Text 43"/>
+          <p:cNvSpPr/>
+          <p:nvPr/>
+        </p:nvSpPr>
+        <p:spPr>
+          <a:xfrm>
+            <a:off x="6492240" y="4498848"/>
+            <a:ext cx="4800600" cy="731520"/>
           </a:xfrm>
           <a:prstGeom prst="rect">
             <a:avLst/>
@@ -22031,29 +22641,29 @@
               <a:buNone/>
             </a:pPr>
             <a:r>
-              <a:rPr lang="en-US" sz="1100" dirty="0">
-                <a:solidFill>
-                  <a:srgbClr val="1A1A1A"/>
-                </a:solidFill>
-                <a:latin typeface="メイリオ" pitchFamily="34" charset="0"/>
-                <a:ea typeface="メイリオ" pitchFamily="34" charset="-122"/>
-                <a:cs typeface="メイリオ" pitchFamily="34" charset="-120"/>
-              </a:rPr>
-              <a:t>Bからの差額売上208.9百万円には粗利率30%を適用。FY2025 26.8%・FY2026 32.4%という実績水準に合わせた保守値で、4-6月実績の51.5%は使っていません。</a:t>
-            </a:r>
-            <a:endParaRPr lang="en-US" sz="1100" dirty="0"/>
-          </a:p>
-        </p:txBody>
-      </p:sp>
-      <p:sp>
-        <p:nvSpPr>
-          <p:cNvPr id="40" name="Shape 38"/>
-          <p:cNvSpPr/>
-          <p:nvPr/>
-        </p:nvSpPr>
-        <p:spPr>
-          <a:xfrm>
-            <a:off x="594360" y="5394960"/>
+              <a:rPr lang="en-US" sz="1050" dirty="0">
+                <a:solidFill>
+                  <a:srgbClr val="1A1A1A"/>
+                </a:solidFill>
+                <a:latin typeface="メイリオ" pitchFamily="34" charset="0"/>
+                <a:ea typeface="メイリオ" pitchFamily="34" charset="-122"/>
+                <a:cs typeface="メイリオ" pitchFamily="34" charset="-120"/>
+              </a:rPr>
+              <a:t>既存事業売上はCが過去2期平均の81.9%、Dが100.0%。過去に到達した水準の範囲内であり、粗利率も実績平均の30%。実績に照らして無理のないレンジです。</a:t>
+            </a:r>
+            <a:endParaRPr lang="en-US" sz="1050" dirty="0"/>
+          </a:p>
+        </p:txBody>
+      </p:sp>
+      <p:sp>
+        <p:nvSpPr>
+          <p:cNvPr id="46" name="Shape 44"/>
+          <p:cNvSpPr/>
+          <p:nvPr/>
+        </p:nvSpPr>
+        <p:spPr>
+          <a:xfrm>
+            <a:off x="594360" y="5440680"/>
             <a:ext cx="10963656" cy="777240"/>
           </a:xfrm>
           <a:prstGeom prst="roundRect">
@@ -22081,7 +22691,7 @@
       </p:sp>
       <p:sp>
         <p:nvSpPr>
-          <p:cNvPr id="41" name="Text 39"/>
+          <p:cNvPr id="47" name="Text 45"/>
           <p:cNvSpPr/>
           <p:nvPr/>
         </p:nvSpPr>
@@ -22112,7 +22722,7 @@
                 <a:ea typeface="メイリオ" pitchFamily="34" charset="-122"/>
                 <a:cs typeface="メイリオ" pitchFamily="34" charset="-120"/>
               </a:rPr>
-              <a:t>差額売上208.9百万円の粗利率が4-6月実績の51.5%であれば、同じ売上730.5百万円で経常利益は約125百万円。プランCはその上振れを織り込んでいません。</a:t>
+              <a:t>B（経常＋17.9百万円）は何もしなくても届く下限。C（＋80.6）〜D（＋120.4）が過去実績に照らした本命レンジであり、施策を打つ以上はD超えを目指します。</a:t>
             </a:r>
             <a:endParaRPr lang="en-US" sz="1200" dirty="0"/>
           </a:p>
@@ -22120,7 +22730,7 @@
       </p:sp>
       <p:sp>
         <p:nvSpPr>
-          <p:cNvPr id="42" name="Text 40"/>
+          <p:cNvPr id="48" name="Text 46"/>
           <p:cNvSpPr/>
           <p:nvPr/>
         </p:nvSpPr>
@@ -22151,7 +22761,7 @@
                 <a:ea typeface="メイリオ" pitchFamily="34" charset="-122"/>
                 <a:cs typeface="メイリオ" pitchFamily="34" charset="-120"/>
               </a:rPr>
-              <a:t>プランCの粗利395.8百万円＝既存389.1×51.5%（200.6）＋差額208.9×30%（62.7）＋上乗せ132.5（原価なし）。出典：事業計画202608（銀行様）、決算報告書 第54期。</a:t>
+              <a:t>「既存事業／2期平均」＝各プランの既存事業売上が過去2期平均730.5百万円に占める比率。差額売上の粗利率は30%（FY2025 26.8%・FY2026 32.4%の水準）。</a:t>
             </a:r>
             <a:endParaRPr lang="en-US" sz="850" dirty="0"/>
           </a:p>
@@ -22256,26 +22866,6 @@
         </p:nvSpPr>
         <p:spPr>
           <a:xfrm>
-            <a:off x="822960" y="1371600"/>
-            <a:ext cx="1463040" cy="22860"/>
-          </a:xfrm>
-          <a:prstGeom prst="rect">
-            <a:avLst/>
-          </a:prstGeom>
-          <a:solidFill>
-            <a:srgbClr val="A98442"/>
-          </a:solidFill>
-          <a:ln/>
-        </p:spPr>
-      </p:sp>
-      <p:sp>
-        <p:nvSpPr>
-          <p:cNvPr id="5" name="Shape 3"/>
-          <p:cNvSpPr/>
-          <p:nvPr/>
-        </p:nvSpPr>
-        <p:spPr>
-          <a:xfrm>
             <a:off x="822960" y="1655064"/>
             <a:ext cx="365760" cy="365760"/>
           </a:xfrm>
@@ -22290,7 +22880,7 @@
       </p:sp>
       <p:sp>
         <p:nvSpPr>
-          <p:cNvPr id="6" name="Text 4"/>
+          <p:cNvPr id="5" name="Text 3"/>
           <p:cNvSpPr/>
           <p:nvPr/>
         </p:nvSpPr>
@@ -22329,7 +22919,7 @@
       </p:sp>
       <p:sp>
         <p:nvSpPr>
-          <p:cNvPr id="7" name="Text 5"/>
+          <p:cNvPr id="6" name="Text 4"/>
           <p:cNvSpPr/>
           <p:nvPr/>
         </p:nvSpPr>
@@ -22368,7 +22958,7 @@
       </p:sp>
       <p:sp>
         <p:nvSpPr>
-          <p:cNvPr id="8" name="Text 6"/>
+          <p:cNvPr id="7" name="Text 5"/>
           <p:cNvSpPr/>
           <p:nvPr/>
         </p:nvSpPr>
@@ -22407,7 +22997,7 @@
       </p:sp>
       <p:sp>
         <p:nvSpPr>
-          <p:cNvPr id="9" name="Shape 7"/>
+          <p:cNvPr id="8" name="Shape 6"/>
           <p:cNvSpPr/>
           <p:nvPr/>
         </p:nvSpPr>
@@ -22427,7 +23017,7 @@
       </p:sp>
       <p:sp>
         <p:nvSpPr>
-          <p:cNvPr id="10" name="Text 8"/>
+          <p:cNvPr id="9" name="Text 7"/>
           <p:cNvSpPr/>
           <p:nvPr/>
         </p:nvSpPr>
@@ -22466,7 +23056,7 @@
       </p:sp>
       <p:sp>
         <p:nvSpPr>
-          <p:cNvPr id="11" name="Text 9"/>
+          <p:cNvPr id="10" name="Text 8"/>
           <p:cNvSpPr/>
           <p:nvPr/>
         </p:nvSpPr>
@@ -22505,7 +23095,7 @@
       </p:sp>
       <p:sp>
         <p:nvSpPr>
-          <p:cNvPr id="12" name="Text 10"/>
+          <p:cNvPr id="11" name="Text 9"/>
           <p:cNvSpPr/>
           <p:nvPr/>
         </p:nvSpPr>
@@ -22544,7 +23134,7 @@
       </p:sp>
       <p:sp>
         <p:nvSpPr>
-          <p:cNvPr id="13" name="Shape 11"/>
+          <p:cNvPr id="12" name="Shape 10"/>
           <p:cNvSpPr/>
           <p:nvPr/>
         </p:nvSpPr>
@@ -22564,7 +23154,7 @@
       </p:sp>
       <p:sp>
         <p:nvSpPr>
-          <p:cNvPr id="14" name="Text 12"/>
+          <p:cNvPr id="13" name="Text 11"/>
           <p:cNvSpPr/>
           <p:nvPr/>
         </p:nvSpPr>
@@ -22603,7 +23193,7 @@
       </p:sp>
       <p:sp>
         <p:nvSpPr>
-          <p:cNvPr id="15" name="Text 13"/>
+          <p:cNvPr id="14" name="Text 12"/>
           <p:cNvSpPr/>
           <p:nvPr/>
         </p:nvSpPr>
@@ -22642,7 +23232,7 @@
       </p:sp>
       <p:sp>
         <p:nvSpPr>
-          <p:cNvPr id="16" name="Text 14"/>
+          <p:cNvPr id="15" name="Text 13"/>
           <p:cNvSpPr/>
           <p:nvPr/>
         </p:nvSpPr>
@@ -22681,7 +23271,7 @@
       </p:sp>
       <p:sp>
         <p:nvSpPr>
-          <p:cNvPr id="17" name="Shape 15"/>
+          <p:cNvPr id="16" name="Shape 14"/>
           <p:cNvSpPr/>
           <p:nvPr/>
         </p:nvSpPr>
@@ -22701,7 +23291,7 @@
       </p:sp>
       <p:sp>
         <p:nvSpPr>
-          <p:cNvPr id="18" name="Text 16"/>
+          <p:cNvPr id="17" name="Text 15"/>
           <p:cNvSpPr/>
           <p:nvPr/>
         </p:nvSpPr>
@@ -22740,7 +23330,7 @@
       </p:sp>
       <p:sp>
         <p:nvSpPr>
-          <p:cNvPr id="19" name="Text 17"/>
+          <p:cNvPr id="18" name="Text 16"/>
           <p:cNvSpPr/>
           <p:nvPr/>
         </p:nvSpPr>
@@ -22771,7 +23361,7 @@
                 <a:ea typeface="メイリオ" pitchFamily="34" charset="-122"/>
                 <a:cs typeface="メイリオ" pitchFamily="34" charset="-120"/>
               </a:rPr>
-              <a:t>売上は過去2期と同水準・差額分は粗利率30%</a:t>
+              <a:t>B は下限、C〜D が本命レンジ</a:t>
             </a:r>
             <a:endParaRPr lang="en-US" sz="1550" dirty="0"/>
           </a:p>
@@ -22779,7 +23369,7 @@
       </p:sp>
       <p:sp>
         <p:nvSpPr>
-          <p:cNvPr id="20" name="Text 18"/>
+          <p:cNvPr id="19" name="Text 17"/>
           <p:cNvSpPr/>
           <p:nvPr/>
         </p:nvSpPr>
@@ -22810,7 +23400,7 @@
                 <a:ea typeface="メイリオ" pitchFamily="34" charset="-122"/>
                 <a:cs typeface="メイリオ" pitchFamily="34" charset="-120"/>
               </a:rPr>
-              <a:t>売上730.5百万円は2期平均そのもの。営業利益＋95.6／経常利益＋80.6百万円です。</a:t>
+              <a:t>Bは何もしなくても＋17.9百万円。Dは売上863.0百万円・経常＋120.4百万円で、目指すべき最低限の姿です。</a:t>
             </a:r>
             <a:endParaRPr lang="en-US" sz="1150" dirty="0"/>
           </a:p>
@@ -22818,18 +23408,18 @@
       </p:sp>
       <p:sp>
         <p:nvSpPr>
-          <p:cNvPr id="21" name="Shape 19"/>
+          <p:cNvPr id="20" name="Shape 18"/>
           <p:cNvSpPr/>
           <p:nvPr/>
         </p:nvSpPr>
         <p:spPr>
           <a:xfrm>
             <a:off x="8595360" y="1600200"/>
-            <a:ext cx="2971800" cy="3886200"/>
+            <a:ext cx="2971800" cy="2331720"/>
           </a:xfrm>
           <a:prstGeom prst="roundRect">
             <a:avLst>
-              <a:gd name="adj" fmla="val 1538"/>
+              <a:gd name="adj" fmla="val 1961"/>
             </a:avLst>
           </a:prstGeom>
           <a:solidFill>
@@ -22852,7 +23442,7 @@
       </p:sp>
       <p:sp>
         <p:nvSpPr>
-          <p:cNvPr id="22" name="Text 20"/>
+          <p:cNvPr id="21" name="Text 19"/>
           <p:cNvSpPr/>
           <p:nvPr/>
         </p:nvSpPr>
@@ -22891,7 +23481,7 @@
       </p:sp>
       <p:sp>
         <p:nvSpPr>
-          <p:cNvPr id="23" name="Text 21"/>
+          <p:cNvPr id="22" name="Text 20"/>
           <p:cNvSpPr/>
           <p:nvPr/>
         </p:nvSpPr>
@@ -22926,7 +23516,7 @@
                 <a:ea typeface="メイリオ" pitchFamily="34" charset="-122"/>
                 <a:cs typeface="メイリオ" pitchFamily="34" charset="-120"/>
               </a:rPr>
-              <a:t>2026年11月のつなぎ資金</a:t>
+              <a:t>短期借入162百万円の借換継続</a:t>
             </a:r>
             <a:endParaRPr lang="en-US" sz="1100" dirty="0"/>
           </a:p>
@@ -22997,7 +23587,7 @@
       </p:sp>
       <p:sp>
         <p:nvSpPr>
-          <p:cNvPr id="24" name="Text 22"/>
+          <p:cNvPr id="23" name="Text 21"/>
           <p:cNvSpPr/>
           <p:nvPr/>
         </p:nvSpPr>
@@ -23783,7 +24373,7 @@
                 <a:ea typeface="メイリオ" pitchFamily="34" charset="-122"/>
                 <a:cs typeface="メイリオ" pitchFamily="34" charset="-120"/>
               </a:rPr>
-              <a:t>差額売上の粗利率は30%</a:t>
+              <a:t>B は何もしなくても届く下限</a:t>
             </a:r>
             <a:endParaRPr lang="en-US" sz="1450" dirty="0"/>
           </a:p>
@@ -23822,7 +24412,7 @@
                 <a:ea typeface="メイリオ" pitchFamily="34" charset="-122"/>
                 <a:cs typeface="メイリオ" pitchFamily="34" charset="-120"/>
               </a:rPr>
-              <a:t>前期・今期の売上平均までの差額は、保守的に粗利率30%で置いています。</a:t>
+              <a:t>C〜Dが過去実績に照らした本命レンジ。Dを目指すべき最低限の姿とします。</a:t>
             </a:r>
             <a:endParaRPr lang="en-US" sz="1100" dirty="0"/>
           </a:p>
@@ -23895,7 +24485,7 @@
                 <a:ea typeface="メイリオ" pitchFamily="34" charset="-122"/>
                 <a:cs typeface="メイリオ" pitchFamily="34" charset="-120"/>
               </a:rPr>
-              <a:t>FY2027 営業利益（プランC）</a:t>
+              <a:t>FY2027 営業利益（プランD）</a:t>
             </a:r>
             <a:endParaRPr lang="en-US" sz="1100" dirty="0"/>
           </a:p>
@@ -23934,7 +24524,7 @@
                 <a:ea typeface="メイリオ" pitchFamily="34" charset="-122"/>
                 <a:cs typeface="メイリオ" pitchFamily="34" charset="-120"/>
               </a:rPr>
-              <a:t>＋95.6</a:t>
+              <a:t>＋135.4</a:t>
             </a:r>
             <a:endParaRPr lang="en-US" sz="4200" dirty="0"/>
           </a:p>
@@ -24012,7 +24602,7 @@
                 <a:ea typeface="メイリオ" pitchFamily="34" charset="-122"/>
                 <a:cs typeface="メイリオ" pitchFamily="34" charset="-120"/>
               </a:rPr>
-              <a:t>経常利益は＋80.6百万円</a:t>
+              <a:t>経常利益は＋120.4百万円</a:t>
             </a:r>
             <a:endParaRPr lang="en-US" sz="1150" dirty="0"/>
           </a:p>
@@ -24029,7 +24619,7 @@
                 <a:ea typeface="メイリオ" pitchFamily="34" charset="-122"/>
                 <a:cs typeface="メイリオ" pitchFamily="34" charset="-120"/>
               </a:rPr>
-              <a:t>FY2026 ▲124.8百万円からの転換</a:t>
+              <a:t>目指すべき最低限の姿</a:t>
             </a:r>
             <a:endParaRPr lang="en-US" sz="1150" dirty="0"/>
           </a:p>
@@ -24130,7 +24720,7 @@
                 <a:ea typeface="メイリオ" pitchFamily="34" charset="-122"/>
                 <a:cs typeface="メイリオ" pitchFamily="34" charset="-120"/>
               </a:rPr>
-              <a:t>730.5百万円</a:t>
+              <a:t>863.0百万円</a:t>
             </a:r>
             <a:endParaRPr lang="en-US" sz="2600" dirty="0"/>
           </a:p>
@@ -24169,7 +24759,7 @@
                 <a:ea typeface="メイリオ" pitchFamily="34" charset="-122"/>
                 <a:cs typeface="メイリオ" pitchFamily="34" charset="-120"/>
               </a:rPr>
-              <a:t>FY2025実績とFY2026見込の平均</a:t>
+              <a:t>既存730.5（前期・今期の平均）</a:t>
             </a:r>
             <a:endParaRPr lang="en-US" sz="1100" dirty="0"/>
           </a:p>
@@ -24186,7 +24776,7 @@
                 <a:ea typeface="メイリオ" pitchFamily="34" charset="-122"/>
                 <a:cs typeface="メイリオ" pitchFamily="34" charset="-120"/>
               </a:rPr>
-              <a:t>期中最低現預金は＋14.6百万円</a:t>
+              <a:t>＋上乗せ案件132.5百万円</a:t>
             </a:r>
             <a:endParaRPr lang="en-US" sz="1100" dirty="0"/>
           </a:p>
